--- a/downloads/presentations/modules/gov-350.pptx
+++ b/downloads/presentations/modules/gov-350.pptx
@@ -3619,13 +3619,11 @@
             </a:avLst>
           </a:prstGeom>
           <a:solidFill>
-            <a:srgbClr val="FFFFFF">
-              <a:alpha val="88000"/>
-            </a:srgbClr>
+            <a:srgbClr val="FFFFFF"/>
           </a:solidFill>
           <a:ln w="12700">
             <a:solidFill>
-              <a:srgbClr val="D6E8F2"/>
+              <a:srgbClr val="B9D7E6"/>
             </a:solidFill>
             <a:prstDash val="solid"/>
           </a:ln>
@@ -3633,30 +3631,42 @@
       </p:sp>
       <p:sp>
         <p:nvSpPr>
-          <p:cNvPr id="14" name="Shape 12"/>
-          <p:cNvSpPr/>
-          <p:nvPr/>
-        </p:nvSpPr>
-        <p:spPr>
-          <a:xfrm>
-            <a:off x="7927848" y="3319272"/>
-            <a:ext cx="792480" cy="749808"/>
-          </a:xfrm>
-          <a:prstGeom prst="roundRect">
-            <a:avLst>
-              <a:gd name="adj" fmla="val 14634"/>
-            </a:avLst>
-          </a:prstGeom>
-          <a:solidFill>
-            <a:srgbClr val="0068B7"/>
-          </a:solidFill>
-          <a:ln w="12700">
-            <a:solidFill>
-              <a:srgbClr val="0068B7"/>
-            </a:solidFill>
-            <a:prstDash val="solid"/>
-          </a:ln>
-        </p:spPr>
+          <p:cNvPr id="14" name="Text 12"/>
+          <p:cNvSpPr/>
+          <p:nvPr/>
+        </p:nvSpPr>
+        <p:spPr>
+          <a:xfrm>
+            <a:off x="7799832" y="2935224"/>
+            <a:ext cx="3145536" cy="256032"/>
+          </a:xfrm>
+          <a:prstGeom prst="rect">
+            <a:avLst/>
+          </a:prstGeom>
+          <a:noFill/>
+          <a:ln/>
+        </p:spPr>
+        <p:txBody>
+          <a:bodyPr wrap="square" lIns="0" tIns="0" rIns="0" bIns="0" rtlCol="0" anchor="ctr"/>
+          <a:lstStyle/>
+          <a:p>
+            <a:pPr indent="0" marL="0">
+              <a:buNone/>
+            </a:pPr>
+            <a:r>
+              <a:rPr lang="en-US" sz="1300" b="1" dirty="0">
+                <a:solidFill>
+                  <a:srgbClr val="0068B7"/>
+                </a:solidFill>
+                <a:latin typeface="Aptos" pitchFamily="34" charset="0"/>
+                <a:ea typeface="Aptos" pitchFamily="34" charset="-122"/>
+                <a:cs typeface="Aptos" pitchFamily="34" charset="-120"/>
+              </a:rPr>
+              <a:t>Concept checkpoints</a:t>
+            </a:r>
+            <a:endParaRPr lang="en-US" sz="1300" dirty="0"/>
+          </a:p>
+        </p:txBody>
       </p:sp>
       <p:sp>
         <p:nvSpPr>
@@ -3666,240 +3676,53 @@
         </p:nvSpPr>
         <p:spPr>
           <a:xfrm>
-            <a:off x="8001000" y="3511296"/>
-            <a:ext cx="646176" cy="310896"/>
-          </a:xfrm>
-          <a:prstGeom prst="rect">
-            <a:avLst/>
-          </a:prstGeom>
-          <a:noFill/>
-          <a:ln/>
-        </p:spPr>
-        <p:txBody>
-          <a:bodyPr wrap="square" lIns="0" tIns="0" rIns="0" bIns="0" rtlCol="0" anchor="ctr">
+            <a:off x="7818120" y="3300984"/>
+            <a:ext cx="3090672" cy="877824"/>
+          </a:xfrm>
+          <a:prstGeom prst="rect">
+            <a:avLst/>
+          </a:prstGeom>
+          <a:noFill/>
+          <a:ln/>
+        </p:spPr>
+        <p:txBody>
+          <a:bodyPr wrap="square" lIns="254" tIns="254" rIns="254" bIns="254" rtlCol="0" anchor="t">
             <a:normAutofit/>
           </a:bodyPr>
           <a:lstStyle/>
           <a:p>
-            <a:pPr algn="ctr" indent="0" marL="0">
-              <a:buNone/>
-            </a:pPr>
-            <a:r>
-              <a:rPr lang="en-US" sz="1500" b="1" dirty="0">
-                <a:solidFill>
-                  <a:srgbClr val="FFFFFF"/>
-                </a:solidFill>
-                <a:latin typeface="Aptos" pitchFamily="34" charset="0"/>
-                <a:ea typeface="Aptos" pitchFamily="34" charset="-122"/>
-                <a:cs typeface="Aptos" pitchFamily="34" charset="-120"/>
-              </a:rPr>
-              <a:t>Plan</a:t>
-            </a:r>
-            <a:endParaRPr lang="en-US" sz="1500" dirty="0"/>
+            <a:r>
+              <a:rPr lang="en-US" sz="1380" dirty="0">
+                <a:solidFill>
+                  <a:srgbClr val="17364A"/>
+                </a:solidFill>
+                <a:latin typeface="Aptos" pitchFamily="34" charset="0"/>
+                <a:ea typeface="Aptos" pitchFamily="34" charset="-122"/>
+                <a:cs typeface="Aptos" pitchFamily="34" charset="-120"/>
+              </a:rPr>
+              <a:t>Logs should capture user identity, service identity, data accessed, action taken, time,.</a:t>
+            </a:r>
+            <a:endParaRPr lang="en-US" sz="1380" dirty="0"/>
+          </a:p>
+          <a:p>
+            <a:r>
+              <a:rPr lang="en-US" sz="1380" dirty="0">
+                <a:solidFill>
+                  <a:srgbClr val="17364A"/>
+                </a:solidFill>
+                <a:latin typeface="Aptos" pitchFamily="34" charset="0"/>
+                <a:ea typeface="Aptos" pitchFamily="34" charset="-122"/>
+                <a:cs typeface="Aptos" pitchFamily="34" charset="-120"/>
+              </a:rPr>
+              <a:t>For agentic workflows, logs should also show tool calls, attempted actions, blocked.</a:t>
+            </a:r>
+            <a:endParaRPr lang="en-US" sz="1380" dirty="0"/>
           </a:p>
         </p:txBody>
       </p:sp>
       <p:sp>
         <p:nvSpPr>
           <p:cNvPr id="16" name="Shape 14"/>
-          <p:cNvSpPr/>
-          <p:nvPr/>
-        </p:nvSpPr>
-        <p:spPr>
-          <a:xfrm>
-            <a:off x="8976360" y="3319272"/>
-            <a:ext cx="792480" cy="749808"/>
-          </a:xfrm>
-          <a:prstGeom prst="roundRect">
-            <a:avLst>
-              <a:gd name="adj" fmla="val 14634"/>
-            </a:avLst>
-          </a:prstGeom>
-          <a:solidFill>
-            <a:srgbClr val="2F8A28"/>
-          </a:solidFill>
-          <a:ln w="12700">
-            <a:solidFill>
-              <a:srgbClr val="2F8A28"/>
-            </a:solidFill>
-            <a:prstDash val="solid"/>
-          </a:ln>
-        </p:spPr>
-      </p:sp>
-      <p:sp>
-        <p:nvSpPr>
-          <p:cNvPr id="17" name="Text 15"/>
-          <p:cNvSpPr/>
-          <p:nvPr/>
-        </p:nvSpPr>
-        <p:spPr>
-          <a:xfrm>
-            <a:off x="9049512" y="3511296"/>
-            <a:ext cx="646176" cy="310896"/>
-          </a:xfrm>
-          <a:prstGeom prst="rect">
-            <a:avLst/>
-          </a:prstGeom>
-          <a:noFill/>
-          <a:ln/>
-        </p:spPr>
-        <p:txBody>
-          <a:bodyPr wrap="square" lIns="0" tIns="0" rIns="0" bIns="0" rtlCol="0" anchor="ctr">
-            <a:normAutofit/>
-          </a:bodyPr>
-          <a:lstStyle/>
-          <a:p>
-            <a:pPr algn="ctr" indent="0" marL="0">
-              <a:buNone/>
-            </a:pPr>
-            <a:r>
-              <a:rPr lang="en-US" sz="1500" b="1" dirty="0">
-                <a:solidFill>
-                  <a:srgbClr val="FFFFFF"/>
-                </a:solidFill>
-                <a:latin typeface="Aptos" pitchFamily="34" charset="0"/>
-                <a:ea typeface="Aptos" pitchFamily="34" charset="-122"/>
-                <a:cs typeface="Aptos" pitchFamily="34" charset="-120"/>
-              </a:rPr>
-              <a:t>Do</a:t>
-            </a:r>
-            <a:endParaRPr lang="en-US" sz="1500" dirty="0"/>
-          </a:p>
-        </p:txBody>
-      </p:sp>
-      <p:sp>
-        <p:nvSpPr>
-          <p:cNvPr id="18" name="Shape 16"/>
-          <p:cNvSpPr/>
-          <p:nvPr/>
-        </p:nvSpPr>
-        <p:spPr>
-          <a:xfrm>
-            <a:off x="10024872" y="3319272"/>
-            <a:ext cx="792480" cy="749808"/>
-          </a:xfrm>
-          <a:prstGeom prst="roundRect">
-            <a:avLst>
-              <a:gd name="adj" fmla="val 14634"/>
-            </a:avLst>
-          </a:prstGeom>
-          <a:solidFill>
-            <a:srgbClr val="D69A2D"/>
-          </a:solidFill>
-          <a:ln w="12700">
-            <a:solidFill>
-              <a:srgbClr val="D69A2D"/>
-            </a:solidFill>
-            <a:prstDash val="solid"/>
-          </a:ln>
-        </p:spPr>
-      </p:sp>
-      <p:sp>
-        <p:nvSpPr>
-          <p:cNvPr id="19" name="Text 17"/>
-          <p:cNvSpPr/>
-          <p:nvPr/>
-        </p:nvSpPr>
-        <p:spPr>
-          <a:xfrm>
-            <a:off x="10098024" y="3511296"/>
-            <a:ext cx="646176" cy="310896"/>
-          </a:xfrm>
-          <a:prstGeom prst="rect">
-            <a:avLst/>
-          </a:prstGeom>
-          <a:noFill/>
-          <a:ln/>
-        </p:spPr>
-        <p:txBody>
-          <a:bodyPr wrap="square" lIns="0" tIns="0" rIns="0" bIns="0" rtlCol="0" anchor="ctr">
-            <a:normAutofit/>
-          </a:bodyPr>
-          <a:lstStyle/>
-          <a:p>
-            <a:pPr algn="ctr" indent="0" marL="0">
-              <a:buNone/>
-            </a:pPr>
-            <a:r>
-              <a:rPr lang="en-US" sz="1500" b="1" dirty="0">
-                <a:solidFill>
-                  <a:srgbClr val="FFFFFF"/>
-                </a:solidFill>
-                <a:latin typeface="Aptos" pitchFamily="34" charset="0"/>
-                <a:ea typeface="Aptos" pitchFamily="34" charset="-122"/>
-                <a:cs typeface="Aptos" pitchFamily="34" charset="-120"/>
-              </a:rPr>
-              <a:t>Review</a:t>
-            </a:r>
-            <a:endParaRPr lang="en-US" sz="1500" dirty="0"/>
-          </a:p>
-        </p:txBody>
-      </p:sp>
-      <p:sp>
-        <p:nvSpPr>
-          <p:cNvPr id="20" name="Shape 18"/>
-          <p:cNvSpPr/>
-          <p:nvPr/>
-        </p:nvSpPr>
-        <p:spPr>
-          <a:xfrm>
-            <a:off x="8293608" y="4389120"/>
-            <a:ext cx="2157984" cy="0"/>
-          </a:xfrm>
-          <a:prstGeom prst="line">
-            <a:avLst/>
-          </a:prstGeom>
-          <a:noFill/>
-          <a:ln w="25400">
-            <a:solidFill>
-              <a:srgbClr val="8ABBD8"/>
-            </a:solidFill>
-            <a:prstDash val="solid"/>
-          </a:ln>
-        </p:spPr>
-      </p:sp>
-      <p:sp>
-        <p:nvSpPr>
-          <p:cNvPr id="21" name="Text 19"/>
-          <p:cNvSpPr/>
-          <p:nvPr/>
-        </p:nvSpPr>
-        <p:spPr>
-          <a:xfrm>
-            <a:off x="7909560" y="3977640"/>
-            <a:ext cx="2926080" cy="182880"/>
-          </a:xfrm>
-          <a:prstGeom prst="rect">
-            <a:avLst/>
-          </a:prstGeom>
-          <a:noFill/>
-          <a:ln/>
-        </p:spPr>
-        <p:txBody>
-          <a:bodyPr wrap="square" lIns="0" tIns="0" rIns="0" bIns="0" rtlCol="0" anchor="ctr"/>
-          <a:lstStyle/>
-          <a:p>
-            <a:pPr algn="ctr" indent="0" marL="0">
-              <a:buNone/>
-            </a:pPr>
-            <a:r>
-              <a:rPr lang="en-US" sz="1000" dirty="0">
-                <a:solidFill>
-                  <a:srgbClr val="003A63"/>
-                </a:solidFill>
-                <a:latin typeface="Aptos" pitchFamily="34" charset="0"/>
-                <a:ea typeface="Aptos" pitchFamily="34" charset="-122"/>
-                <a:cs typeface="Aptos" pitchFamily="34" charset="-120"/>
-              </a:rPr>
-              <a:t>Dependencies visible</a:t>
-            </a:r>
-            <a:endParaRPr lang="en-US" sz="1000" dirty="0"/>
-          </a:p>
-        </p:txBody>
-      </p:sp>
-      <p:sp>
-        <p:nvSpPr>
-          <p:cNvPr id="22" name="Shape 20"/>
           <p:cNvSpPr/>
           <p:nvPr/>
         </p:nvSpPr>
@@ -3926,7 +3749,7 @@
       </p:sp>
       <p:sp>
         <p:nvSpPr>
-          <p:cNvPr id="23" name="Text 21"/>
+          <p:cNvPr id="17" name="Text 15"/>
           <p:cNvSpPr/>
           <p:nvPr/>
         </p:nvSpPr>
@@ -3965,7 +3788,7 @@
       </p:sp>
       <p:sp>
         <p:nvSpPr>
-          <p:cNvPr id="24" name="Text 22"/>
+          <p:cNvPr id="18" name="Text 16"/>
           <p:cNvSpPr/>
           <p:nvPr/>
         </p:nvSpPr>
@@ -4473,13 +4296,11 @@
             </a:avLst>
           </a:prstGeom>
           <a:solidFill>
-            <a:srgbClr val="FFFFFF">
-              <a:alpha val="88000"/>
-            </a:srgbClr>
+            <a:srgbClr val="FFFFFF"/>
           </a:solidFill>
           <a:ln w="12700">
             <a:solidFill>
-              <a:srgbClr val="D6E8F2"/>
+              <a:srgbClr val="B9D7E6"/>
             </a:solidFill>
             <a:prstDash val="solid"/>
           </a:ln>
@@ -4487,26 +4308,42 @@
       </p:sp>
       <p:sp>
         <p:nvSpPr>
-          <p:cNvPr id="14" name="Shape 12"/>
-          <p:cNvSpPr/>
-          <p:nvPr/>
-        </p:nvSpPr>
-        <p:spPr>
-          <a:xfrm>
-            <a:off x="8046720" y="3108960"/>
-            <a:ext cx="2651760" cy="896112"/>
-          </a:xfrm>
-          <a:prstGeom prst="arc">
-            <a:avLst/>
-          </a:prstGeom>
-          <a:noFill/>
-          <a:ln w="25400">
-            <a:solidFill>
-              <a:srgbClr val="0068B7"/>
-            </a:solidFill>
-            <a:prstDash val="solid"/>
-          </a:ln>
-        </p:spPr>
+          <p:cNvPr id="14" name="Text 12"/>
+          <p:cNvSpPr/>
+          <p:nvPr/>
+        </p:nvSpPr>
+        <p:spPr>
+          <a:xfrm>
+            <a:off x="7799832" y="2935224"/>
+            <a:ext cx="3145536" cy="256032"/>
+          </a:xfrm>
+          <a:prstGeom prst="rect">
+            <a:avLst/>
+          </a:prstGeom>
+          <a:noFill/>
+          <a:ln/>
+        </p:spPr>
+        <p:txBody>
+          <a:bodyPr wrap="square" lIns="0" tIns="0" rIns="0" bIns="0" rtlCol="0" anchor="ctr"/>
+          <a:lstStyle/>
+          <a:p>
+            <a:pPr indent="0" marL="0">
+              <a:buNone/>
+            </a:pPr>
+            <a:r>
+              <a:rPr lang="en-US" sz="1300" b="1" dirty="0">
+                <a:solidFill>
+                  <a:srgbClr val="0068B7"/>
+                </a:solidFill>
+                <a:latin typeface="Aptos" pitchFamily="34" charset="0"/>
+                <a:ea typeface="Aptos" pitchFamily="34" charset="-122"/>
+                <a:cs typeface="Aptos" pitchFamily="34" charset="-120"/>
+              </a:rPr>
+              <a:t>Concept checkpoints</a:t>
+            </a:r>
+            <a:endParaRPr lang="en-US" sz="1300" dirty="0"/>
+          </a:p>
+        </p:txBody>
       </p:sp>
       <p:sp>
         <p:nvSpPr>
@@ -4516,102 +4353,67 @@
         </p:nvSpPr>
         <p:spPr>
           <a:xfrm>
-            <a:off x="7909560" y="3099816"/>
-            <a:ext cx="2926080" cy="256032"/>
-          </a:xfrm>
-          <a:prstGeom prst="rect">
-            <a:avLst/>
-          </a:prstGeom>
-          <a:noFill/>
-          <a:ln/>
-        </p:spPr>
-        <p:txBody>
-          <a:bodyPr wrap="square" lIns="0" tIns="0" rIns="0" bIns="0" rtlCol="0" anchor="ctr"/>
-          <a:lstStyle/>
-          <a:p>
-            <a:pPr algn="ctr" indent="0" marL="0">
-              <a:buNone/>
-            </a:pPr>
-            <a:r>
-              <a:rPr lang="en-US" sz="1500" b="1" dirty="0">
-                <a:solidFill>
-                  <a:srgbClr val="003A63"/>
-                </a:solidFill>
-                <a:latin typeface="Aptos" pitchFamily="34" charset="0"/>
-                <a:ea typeface="Aptos" pitchFamily="34" charset="-122"/>
-                <a:cs typeface="Aptos" pitchFamily="34" charset="-120"/>
-              </a:rPr>
-              <a:t>Risk</a:t>
-            </a:r>
-            <a:endParaRPr lang="en-US" sz="1500" dirty="0"/>
+            <a:off x="7818120" y="3300984"/>
+            <a:ext cx="3090672" cy="877824"/>
+          </a:xfrm>
+          <a:prstGeom prst="rect">
+            <a:avLst/>
+          </a:prstGeom>
+          <a:noFill/>
+          <a:ln/>
+        </p:spPr>
+        <p:txBody>
+          <a:bodyPr wrap="square" lIns="254" tIns="254" rIns="254" bIns="254" rtlCol="0" anchor="t">
+            <a:normAutofit/>
+          </a:bodyPr>
+          <a:lstStyle/>
+          <a:p>
+            <a:r>
+              <a:rPr lang="en-US" sz="1380" dirty="0">
+                <a:solidFill>
+                  <a:srgbClr val="17364A"/>
+                </a:solidFill>
+                <a:latin typeface="Aptos" pitchFamily="34" charset="0"/>
+                <a:ea typeface="Aptos" pitchFamily="34" charset="-122"/>
+                <a:cs typeface="Aptos" pitchFamily="34" charset="-120"/>
+              </a:rPr>
+              <a:t>Risks and failure modes include the following:</a:t>
+            </a:r>
+            <a:endParaRPr lang="en-US" sz="1380" dirty="0"/>
+          </a:p>
+          <a:p>
+            <a:r>
+              <a:rPr lang="en-US" sz="1380" dirty="0">
+                <a:solidFill>
+                  <a:srgbClr val="17364A"/>
+                </a:solidFill>
+                <a:latin typeface="Aptos" pitchFamily="34" charset="0"/>
+                <a:ea typeface="Aptos" pitchFamily="34" charset="-122"/>
+                <a:cs typeface="Aptos" pitchFamily="34" charset="-120"/>
+              </a:rPr>
+              <a:t>Service accounts with broad access to sensitive data.</a:t>
+            </a:r>
+            <a:endParaRPr lang="en-US" sz="1380" dirty="0"/>
+          </a:p>
+          <a:p>
+            <a:r>
+              <a:rPr lang="en-US" sz="1380" dirty="0">
+                <a:solidFill>
+                  <a:srgbClr val="17364A"/>
+                </a:solidFill>
+                <a:latin typeface="Aptos" pitchFamily="34" charset="0"/>
+                <a:ea typeface="Aptos" pitchFamily="34" charset="-122"/>
+                <a:cs typeface="Aptos" pitchFamily="34" charset="-120"/>
+              </a:rPr>
+              <a:t>AI tools retrieving data unrelated to the approved use case.</a:t>
+            </a:r>
+            <a:endParaRPr lang="en-US" sz="1380" dirty="0"/>
           </a:p>
         </p:txBody>
       </p:sp>
       <p:sp>
         <p:nvSpPr>
           <p:cNvPr id="16" name="Shape 14"/>
-          <p:cNvSpPr/>
-          <p:nvPr/>
-        </p:nvSpPr>
-        <p:spPr>
-          <a:xfrm>
-            <a:off x="8366760" y="3639312"/>
-            <a:ext cx="2011680" cy="0"/>
-          </a:xfrm>
-          <a:prstGeom prst="line">
-            <a:avLst/>
-          </a:prstGeom>
-          <a:noFill/>
-          <a:ln w="63500">
-            <a:solidFill>
-              <a:srgbClr val="2F8A28"/>
-            </a:solidFill>
-            <a:prstDash val="solid"/>
-          </a:ln>
-        </p:spPr>
-      </p:sp>
-      <p:sp>
-        <p:nvSpPr>
-          <p:cNvPr id="17" name="Text 15"/>
-          <p:cNvSpPr/>
-          <p:nvPr/>
-        </p:nvSpPr>
-        <p:spPr>
-          <a:xfrm>
-            <a:off x="7909560" y="3849624"/>
-            <a:ext cx="2926080" cy="164592"/>
-          </a:xfrm>
-          <a:prstGeom prst="rect">
-            <a:avLst/>
-          </a:prstGeom>
-          <a:noFill/>
-          <a:ln/>
-        </p:spPr>
-        <p:txBody>
-          <a:bodyPr wrap="square" lIns="0" tIns="0" rIns="0" bIns="0" rtlCol="0" anchor="ctr"/>
-          <a:lstStyle/>
-          <a:p>
-            <a:pPr algn="ctr" indent="0" marL="0">
-              <a:buNone/>
-            </a:pPr>
-            <a:r>
-              <a:rPr lang="en-US" sz="900" dirty="0">
-                <a:solidFill>
-                  <a:srgbClr val="003A63"/>
-                </a:solidFill>
-                <a:latin typeface="Aptos" pitchFamily="34" charset="0"/>
-                <a:ea typeface="Aptos" pitchFamily="34" charset="-122"/>
-                <a:cs typeface="Aptos" pitchFamily="34" charset="-120"/>
-              </a:rPr>
-              <a:t>Human review</a:t>
-            </a:r>
-            <a:endParaRPr lang="en-US" sz="900" dirty="0"/>
-          </a:p>
-        </p:txBody>
-      </p:sp>
-      <p:sp>
-        <p:nvSpPr>
-          <p:cNvPr id="18" name="Shape 16"/>
           <p:cNvSpPr/>
           <p:nvPr/>
         </p:nvSpPr>
@@ -4638,7 +4440,7 @@
       </p:sp>
       <p:sp>
         <p:nvSpPr>
-          <p:cNvPr id="19" name="Text 17"/>
+          <p:cNvPr id="17" name="Text 15"/>
           <p:cNvSpPr/>
           <p:nvPr/>
         </p:nvSpPr>
@@ -4677,7 +4479,7 @@
       </p:sp>
       <p:sp>
         <p:nvSpPr>
-          <p:cNvPr id="20" name="Text 18"/>
+          <p:cNvPr id="18" name="Text 16"/>
           <p:cNvSpPr/>
           <p:nvPr/>
         </p:nvSpPr>
@@ -5185,13 +4987,11 @@
             </a:avLst>
           </a:prstGeom>
           <a:solidFill>
-            <a:srgbClr val="FFFFFF">
-              <a:alpha val="88000"/>
-            </a:srgbClr>
+            <a:srgbClr val="FFFFFF"/>
           </a:solidFill>
           <a:ln w="12700">
             <a:solidFill>
-              <a:srgbClr val="D6E8F2"/>
+              <a:srgbClr val="B9D7E6"/>
             </a:solidFill>
             <a:prstDash val="solid"/>
           </a:ln>
@@ -5199,26 +4999,42 @@
       </p:sp>
       <p:sp>
         <p:nvSpPr>
-          <p:cNvPr id="14" name="Shape 12"/>
-          <p:cNvSpPr/>
-          <p:nvPr/>
-        </p:nvSpPr>
-        <p:spPr>
-          <a:xfrm>
-            <a:off x="8046720" y="3108960"/>
-            <a:ext cx="2651760" cy="896112"/>
-          </a:xfrm>
-          <a:prstGeom prst="arc">
-            <a:avLst/>
-          </a:prstGeom>
-          <a:noFill/>
-          <a:ln w="25400">
-            <a:solidFill>
-              <a:srgbClr val="0068B7"/>
-            </a:solidFill>
-            <a:prstDash val="solid"/>
-          </a:ln>
-        </p:spPr>
+          <p:cNvPr id="14" name="Text 12"/>
+          <p:cNvSpPr/>
+          <p:nvPr/>
+        </p:nvSpPr>
+        <p:spPr>
+          <a:xfrm>
+            <a:off x="7799832" y="2935224"/>
+            <a:ext cx="3145536" cy="256032"/>
+          </a:xfrm>
+          <a:prstGeom prst="rect">
+            <a:avLst/>
+          </a:prstGeom>
+          <a:noFill/>
+          <a:ln/>
+        </p:spPr>
+        <p:txBody>
+          <a:bodyPr wrap="square" lIns="0" tIns="0" rIns="0" bIns="0" rtlCol="0" anchor="ctr"/>
+          <a:lstStyle/>
+          <a:p>
+            <a:pPr indent="0" marL="0">
+              <a:buNone/>
+            </a:pPr>
+            <a:r>
+              <a:rPr lang="en-US" sz="1300" b="1" dirty="0">
+                <a:solidFill>
+                  <a:srgbClr val="0068B7"/>
+                </a:solidFill>
+                <a:latin typeface="Aptos" pitchFamily="34" charset="0"/>
+                <a:ea typeface="Aptos" pitchFamily="34" charset="-122"/>
+                <a:cs typeface="Aptos" pitchFamily="34" charset="-120"/>
+              </a:rPr>
+              <a:t>Concept checkpoints</a:t>
+            </a:r>
+            <a:endParaRPr lang="en-US" sz="1300" dirty="0"/>
+          </a:p>
+        </p:txBody>
       </p:sp>
       <p:sp>
         <p:nvSpPr>
@@ -5228,102 +5044,67 @@
         </p:nvSpPr>
         <p:spPr>
           <a:xfrm>
-            <a:off x="7909560" y="3099816"/>
-            <a:ext cx="2926080" cy="256032"/>
-          </a:xfrm>
-          <a:prstGeom prst="rect">
-            <a:avLst/>
-          </a:prstGeom>
-          <a:noFill/>
-          <a:ln/>
-        </p:spPr>
-        <p:txBody>
-          <a:bodyPr wrap="square" lIns="0" tIns="0" rIns="0" bIns="0" rtlCol="0" anchor="ctr"/>
-          <a:lstStyle/>
-          <a:p>
-            <a:pPr algn="ctr" indent="0" marL="0">
-              <a:buNone/>
-            </a:pPr>
-            <a:r>
-              <a:rPr lang="en-US" sz="1500" b="1" dirty="0">
-                <a:solidFill>
-                  <a:srgbClr val="003A63"/>
-                </a:solidFill>
-                <a:latin typeface="Aptos" pitchFamily="34" charset="0"/>
-                <a:ea typeface="Aptos" pitchFamily="34" charset="-122"/>
-                <a:cs typeface="Aptos" pitchFamily="34" charset="-120"/>
-              </a:rPr>
-              <a:t>Risk</a:t>
-            </a:r>
-            <a:endParaRPr lang="en-US" sz="1500" dirty="0"/>
+            <a:off x="7818120" y="3300984"/>
+            <a:ext cx="3090672" cy="877824"/>
+          </a:xfrm>
+          <a:prstGeom prst="rect">
+            <a:avLst/>
+          </a:prstGeom>
+          <a:noFill/>
+          <a:ln/>
+        </p:spPr>
+        <p:txBody>
+          <a:bodyPr wrap="square" lIns="254" tIns="254" rIns="254" bIns="254" rtlCol="0" anchor="t">
+            <a:normAutofit/>
+          </a:bodyPr>
+          <a:lstStyle/>
+          <a:p>
+            <a:r>
+              <a:rPr lang="en-US" sz="1380" dirty="0">
+                <a:solidFill>
+                  <a:srgbClr val="17364A"/>
+                </a:solidFill>
+                <a:latin typeface="Aptos" pitchFamily="34" charset="0"/>
+                <a:ea typeface="Aptos" pitchFamily="34" charset="-122"/>
+                <a:cs typeface="Aptos" pitchFamily="34" charset="-120"/>
+              </a:rPr>
+              <a:t>Write-back actions occurring without human approval.</a:t>
+            </a:r>
+            <a:endParaRPr lang="en-US" sz="1380" dirty="0"/>
+          </a:p>
+          <a:p>
+            <a:r>
+              <a:rPr lang="en-US" sz="1380" dirty="0">
+                <a:solidFill>
+                  <a:srgbClr val="17364A"/>
+                </a:solidFill>
+                <a:latin typeface="Aptos" pitchFamily="34" charset="0"/>
+                <a:ea typeface="Aptos" pitchFamily="34" charset="-122"/>
+                <a:cs typeface="Aptos" pitchFamily="34" charset="-120"/>
+              </a:rPr>
+              <a:t>Shared accounts preventing accountability.</a:t>
+            </a:r>
+            <a:endParaRPr lang="en-US" sz="1380" dirty="0"/>
+          </a:p>
+          <a:p>
+            <a:r>
+              <a:rPr lang="en-US" sz="1380" dirty="0">
+                <a:solidFill>
+                  <a:srgbClr val="17364A"/>
+                </a:solidFill>
+                <a:latin typeface="Aptos" pitchFamily="34" charset="0"/>
+                <a:ea typeface="Aptos" pitchFamily="34" charset="-122"/>
+                <a:cs typeface="Aptos" pitchFamily="34" charset="-120"/>
+              </a:rPr>
+              <a:t>Insufficient logs to investigate data access or output generation.</a:t>
+            </a:r>
+            <a:endParaRPr lang="en-US" sz="1380" dirty="0"/>
           </a:p>
         </p:txBody>
       </p:sp>
       <p:sp>
         <p:nvSpPr>
           <p:cNvPr id="16" name="Shape 14"/>
-          <p:cNvSpPr/>
-          <p:nvPr/>
-        </p:nvSpPr>
-        <p:spPr>
-          <a:xfrm>
-            <a:off x="8366760" y="3639312"/>
-            <a:ext cx="2011680" cy="0"/>
-          </a:xfrm>
-          <a:prstGeom prst="line">
-            <a:avLst/>
-          </a:prstGeom>
-          <a:noFill/>
-          <a:ln w="63500">
-            <a:solidFill>
-              <a:srgbClr val="2F8A28"/>
-            </a:solidFill>
-            <a:prstDash val="solid"/>
-          </a:ln>
-        </p:spPr>
-      </p:sp>
-      <p:sp>
-        <p:nvSpPr>
-          <p:cNvPr id="17" name="Text 15"/>
-          <p:cNvSpPr/>
-          <p:nvPr/>
-        </p:nvSpPr>
-        <p:spPr>
-          <a:xfrm>
-            <a:off x="7909560" y="3849624"/>
-            <a:ext cx="2926080" cy="164592"/>
-          </a:xfrm>
-          <a:prstGeom prst="rect">
-            <a:avLst/>
-          </a:prstGeom>
-          <a:noFill/>
-          <a:ln/>
-        </p:spPr>
-        <p:txBody>
-          <a:bodyPr wrap="square" lIns="0" tIns="0" rIns="0" bIns="0" rtlCol="0" anchor="ctr"/>
-          <a:lstStyle/>
-          <a:p>
-            <a:pPr algn="ctr" indent="0" marL="0">
-              <a:buNone/>
-            </a:pPr>
-            <a:r>
-              <a:rPr lang="en-US" sz="900" dirty="0">
-                <a:solidFill>
-                  <a:srgbClr val="003A63"/>
-                </a:solidFill>
-                <a:latin typeface="Aptos" pitchFamily="34" charset="0"/>
-                <a:ea typeface="Aptos" pitchFamily="34" charset="-122"/>
-                <a:cs typeface="Aptos" pitchFamily="34" charset="-120"/>
-              </a:rPr>
-              <a:t>Human review</a:t>
-            </a:r>
-            <a:endParaRPr lang="en-US" sz="900" dirty="0"/>
-          </a:p>
-        </p:txBody>
-      </p:sp>
-      <p:sp>
-        <p:nvSpPr>
-          <p:cNvPr id="18" name="Shape 16"/>
           <p:cNvSpPr/>
           <p:nvPr/>
         </p:nvSpPr>
@@ -5350,7 +5131,7 @@
       </p:sp>
       <p:sp>
         <p:nvSpPr>
-          <p:cNvPr id="19" name="Text 17"/>
+          <p:cNvPr id="17" name="Text 15"/>
           <p:cNvSpPr/>
           <p:nvPr/>
         </p:nvSpPr>
@@ -5389,7 +5170,7 @@
       </p:sp>
       <p:sp>
         <p:nvSpPr>
-          <p:cNvPr id="20" name="Text 18"/>
+          <p:cNvPr id="18" name="Text 16"/>
           <p:cNvSpPr/>
           <p:nvPr/>
         </p:nvSpPr>
@@ -5897,13 +5678,11 @@
             </a:avLst>
           </a:prstGeom>
           <a:solidFill>
-            <a:srgbClr val="FFFFFF">
-              <a:alpha val="88000"/>
-            </a:srgbClr>
+            <a:srgbClr val="FFFFFF"/>
           </a:solidFill>
           <a:ln w="12700">
             <a:solidFill>
-              <a:srgbClr val="D6E8F2"/>
+              <a:srgbClr val="B9D7E6"/>
             </a:solidFill>
             <a:prstDash val="solid"/>
           </a:ln>
@@ -5911,26 +5690,42 @@
       </p:sp>
       <p:sp>
         <p:nvSpPr>
-          <p:cNvPr id="14" name="Shape 12"/>
-          <p:cNvSpPr/>
-          <p:nvPr/>
-        </p:nvSpPr>
-        <p:spPr>
-          <a:xfrm>
-            <a:off x="8046720" y="3108960"/>
-            <a:ext cx="2651760" cy="896112"/>
-          </a:xfrm>
-          <a:prstGeom prst="arc">
-            <a:avLst/>
-          </a:prstGeom>
-          <a:noFill/>
-          <a:ln w="25400">
-            <a:solidFill>
-              <a:srgbClr val="0068B7"/>
-            </a:solidFill>
-            <a:prstDash val="solid"/>
-          </a:ln>
-        </p:spPr>
+          <p:cNvPr id="14" name="Text 12"/>
+          <p:cNvSpPr/>
+          <p:nvPr/>
+        </p:nvSpPr>
+        <p:spPr>
+          <a:xfrm>
+            <a:off x="7799832" y="2935224"/>
+            <a:ext cx="3145536" cy="256032"/>
+          </a:xfrm>
+          <a:prstGeom prst="rect">
+            <a:avLst/>
+          </a:prstGeom>
+          <a:noFill/>
+          <a:ln/>
+        </p:spPr>
+        <p:txBody>
+          <a:bodyPr wrap="square" lIns="0" tIns="0" rIns="0" bIns="0" rtlCol="0" anchor="ctr"/>
+          <a:lstStyle/>
+          <a:p>
+            <a:pPr indent="0" marL="0">
+              <a:buNone/>
+            </a:pPr>
+            <a:r>
+              <a:rPr lang="en-US" sz="1300" b="1" dirty="0">
+                <a:solidFill>
+                  <a:srgbClr val="0068B7"/>
+                </a:solidFill>
+                <a:latin typeface="Aptos" pitchFamily="34" charset="0"/>
+                <a:ea typeface="Aptos" pitchFamily="34" charset="-122"/>
+                <a:cs typeface="Aptos" pitchFamily="34" charset="-120"/>
+              </a:rPr>
+              <a:t>Concept checkpoints</a:t>
+            </a:r>
+            <a:endParaRPr lang="en-US" sz="1300" dirty="0"/>
+          </a:p>
+        </p:txBody>
       </p:sp>
       <p:sp>
         <p:nvSpPr>
@@ -5940,102 +5735,67 @@
         </p:nvSpPr>
         <p:spPr>
           <a:xfrm>
-            <a:off x="7909560" y="3099816"/>
-            <a:ext cx="2926080" cy="256032"/>
-          </a:xfrm>
-          <a:prstGeom prst="rect">
-            <a:avLst/>
-          </a:prstGeom>
-          <a:noFill/>
-          <a:ln/>
-        </p:spPr>
-        <p:txBody>
-          <a:bodyPr wrap="square" lIns="0" tIns="0" rIns="0" bIns="0" rtlCol="0" anchor="ctr"/>
-          <a:lstStyle/>
-          <a:p>
-            <a:pPr algn="ctr" indent="0" marL="0">
-              <a:buNone/>
-            </a:pPr>
-            <a:r>
-              <a:rPr lang="en-US" sz="1500" b="1" dirty="0">
-                <a:solidFill>
-                  <a:srgbClr val="003A63"/>
-                </a:solidFill>
-                <a:latin typeface="Aptos" pitchFamily="34" charset="0"/>
-                <a:ea typeface="Aptos" pitchFamily="34" charset="-122"/>
-                <a:cs typeface="Aptos" pitchFamily="34" charset="-120"/>
-              </a:rPr>
-              <a:t>Risk</a:t>
-            </a:r>
-            <a:endParaRPr lang="en-US" sz="1500" dirty="0"/>
+            <a:off x="7818120" y="3300984"/>
+            <a:ext cx="3090672" cy="877824"/>
+          </a:xfrm>
+          <a:prstGeom prst="rect">
+            <a:avLst/>
+          </a:prstGeom>
+          <a:noFill/>
+          <a:ln/>
+        </p:spPr>
+        <p:txBody>
+          <a:bodyPr wrap="square" lIns="254" tIns="254" rIns="254" bIns="254" rtlCol="0" anchor="t">
+            <a:normAutofit/>
+          </a:bodyPr>
+          <a:lstStyle/>
+          <a:p>
+            <a:r>
+              <a:rPr lang="en-US" sz="1380" dirty="0">
+                <a:solidFill>
+                  <a:srgbClr val="17364A"/>
+                </a:solidFill>
+                <a:latin typeface="Aptos" pitchFamily="34" charset="0"/>
+                <a:ea typeface="Aptos" pitchFamily="34" charset="-122"/>
+                <a:cs typeface="Aptos" pitchFamily="34" charset="-120"/>
+              </a:rPr>
+              <a:t>Recommended guardrails include the following:</a:t>
+            </a:r>
+            <a:endParaRPr lang="en-US" sz="1380" dirty="0"/>
+          </a:p>
+          <a:p>
+            <a:r>
+              <a:rPr lang="en-US" sz="1380" dirty="0">
+                <a:solidFill>
+                  <a:srgbClr val="17364A"/>
+                </a:solidFill>
+                <a:latin typeface="Aptos" pitchFamily="34" charset="0"/>
+                <a:ea typeface="Aptos" pitchFamily="34" charset="-122"/>
+                <a:cs typeface="Aptos" pitchFamily="34" charset="-120"/>
+              </a:rPr>
+              <a:t>Use role-based and purpose-based access controls.</a:t>
+            </a:r>
+            <a:endParaRPr lang="en-US" sz="1380" dirty="0"/>
+          </a:p>
+          <a:p>
+            <a:r>
+              <a:rPr lang="en-US" sz="1380" dirty="0">
+                <a:solidFill>
+                  <a:srgbClr val="17364A"/>
+                </a:solidFill>
+                <a:latin typeface="Aptos" pitchFamily="34" charset="0"/>
+                <a:ea typeface="Aptos" pitchFamily="34" charset="-122"/>
+                <a:cs typeface="Aptos" pitchFamily="34" charset="-120"/>
+              </a:rPr>
+              <a:t>Apply least privilege to users, service accounts, APIs, and agents.</a:t>
+            </a:r>
+            <a:endParaRPr lang="en-US" sz="1380" dirty="0"/>
           </a:p>
         </p:txBody>
       </p:sp>
       <p:sp>
         <p:nvSpPr>
           <p:cNvPr id="16" name="Shape 14"/>
-          <p:cNvSpPr/>
-          <p:nvPr/>
-        </p:nvSpPr>
-        <p:spPr>
-          <a:xfrm>
-            <a:off x="8366760" y="3639312"/>
-            <a:ext cx="2011680" cy="0"/>
-          </a:xfrm>
-          <a:prstGeom prst="line">
-            <a:avLst/>
-          </a:prstGeom>
-          <a:noFill/>
-          <a:ln w="63500">
-            <a:solidFill>
-              <a:srgbClr val="2F8A28"/>
-            </a:solidFill>
-            <a:prstDash val="solid"/>
-          </a:ln>
-        </p:spPr>
-      </p:sp>
-      <p:sp>
-        <p:nvSpPr>
-          <p:cNvPr id="17" name="Text 15"/>
-          <p:cNvSpPr/>
-          <p:nvPr/>
-        </p:nvSpPr>
-        <p:spPr>
-          <a:xfrm>
-            <a:off x="7909560" y="3849624"/>
-            <a:ext cx="2926080" cy="164592"/>
-          </a:xfrm>
-          <a:prstGeom prst="rect">
-            <a:avLst/>
-          </a:prstGeom>
-          <a:noFill/>
-          <a:ln/>
-        </p:spPr>
-        <p:txBody>
-          <a:bodyPr wrap="square" lIns="0" tIns="0" rIns="0" bIns="0" rtlCol="0" anchor="ctr"/>
-          <a:lstStyle/>
-          <a:p>
-            <a:pPr algn="ctr" indent="0" marL="0">
-              <a:buNone/>
-            </a:pPr>
-            <a:r>
-              <a:rPr lang="en-US" sz="900" dirty="0">
-                <a:solidFill>
-                  <a:srgbClr val="003A63"/>
-                </a:solidFill>
-                <a:latin typeface="Aptos" pitchFamily="34" charset="0"/>
-                <a:ea typeface="Aptos" pitchFamily="34" charset="-122"/>
-                <a:cs typeface="Aptos" pitchFamily="34" charset="-120"/>
-              </a:rPr>
-              <a:t>Human review</a:t>
-            </a:r>
-            <a:endParaRPr lang="en-US" sz="900" dirty="0"/>
-          </a:p>
-        </p:txBody>
-      </p:sp>
-      <p:sp>
-        <p:nvSpPr>
-          <p:cNvPr id="18" name="Shape 16"/>
           <p:cNvSpPr/>
           <p:nvPr/>
         </p:nvSpPr>
@@ -6062,7 +5822,7 @@
       </p:sp>
       <p:sp>
         <p:nvSpPr>
-          <p:cNvPr id="19" name="Text 17"/>
+          <p:cNvPr id="17" name="Text 15"/>
           <p:cNvSpPr/>
           <p:nvPr/>
         </p:nvSpPr>
@@ -6101,7 +5861,7 @@
       </p:sp>
       <p:sp>
         <p:nvSpPr>
-          <p:cNvPr id="20" name="Text 18"/>
+          <p:cNvPr id="18" name="Text 16"/>
           <p:cNvSpPr/>
           <p:nvPr/>
         </p:nvSpPr>
@@ -6609,13 +6369,11 @@
             </a:avLst>
           </a:prstGeom>
           <a:solidFill>
-            <a:srgbClr val="FFFFFF">
-              <a:alpha val="88000"/>
-            </a:srgbClr>
+            <a:srgbClr val="FFFFFF"/>
           </a:solidFill>
           <a:ln w="12700">
             <a:solidFill>
-              <a:srgbClr val="D6E8F2"/>
+              <a:srgbClr val="B9D7E6"/>
             </a:solidFill>
             <a:prstDash val="solid"/>
           </a:ln>
@@ -6623,26 +6381,42 @@
       </p:sp>
       <p:sp>
         <p:nvSpPr>
-          <p:cNvPr id="14" name="Shape 12"/>
-          <p:cNvSpPr/>
-          <p:nvPr/>
-        </p:nvSpPr>
-        <p:spPr>
-          <a:xfrm>
-            <a:off x="8046720" y="3108960"/>
-            <a:ext cx="2651760" cy="896112"/>
-          </a:xfrm>
-          <a:prstGeom prst="arc">
-            <a:avLst/>
-          </a:prstGeom>
-          <a:noFill/>
-          <a:ln w="25400">
-            <a:solidFill>
-              <a:srgbClr val="0068B7"/>
-            </a:solidFill>
-            <a:prstDash val="solid"/>
-          </a:ln>
-        </p:spPr>
+          <p:cNvPr id="14" name="Text 12"/>
+          <p:cNvSpPr/>
+          <p:nvPr/>
+        </p:nvSpPr>
+        <p:spPr>
+          <a:xfrm>
+            <a:off x="7799832" y="2935224"/>
+            <a:ext cx="3145536" cy="256032"/>
+          </a:xfrm>
+          <a:prstGeom prst="rect">
+            <a:avLst/>
+          </a:prstGeom>
+          <a:noFill/>
+          <a:ln/>
+        </p:spPr>
+        <p:txBody>
+          <a:bodyPr wrap="square" lIns="0" tIns="0" rIns="0" bIns="0" rtlCol="0" anchor="ctr"/>
+          <a:lstStyle/>
+          <a:p>
+            <a:pPr indent="0" marL="0">
+              <a:buNone/>
+            </a:pPr>
+            <a:r>
+              <a:rPr lang="en-US" sz="1300" b="1" dirty="0">
+                <a:solidFill>
+                  <a:srgbClr val="0068B7"/>
+                </a:solidFill>
+                <a:latin typeface="Aptos" pitchFamily="34" charset="0"/>
+                <a:ea typeface="Aptos" pitchFamily="34" charset="-122"/>
+                <a:cs typeface="Aptos" pitchFamily="34" charset="-120"/>
+              </a:rPr>
+              <a:t>Concept checkpoints</a:t>
+            </a:r>
+            <a:endParaRPr lang="en-US" sz="1300" dirty="0"/>
+          </a:p>
+        </p:txBody>
       </p:sp>
       <p:sp>
         <p:nvSpPr>
@@ -6652,102 +6426,67 @@
         </p:nvSpPr>
         <p:spPr>
           <a:xfrm>
-            <a:off x="7909560" y="3099816"/>
-            <a:ext cx="2926080" cy="256032"/>
-          </a:xfrm>
-          <a:prstGeom prst="rect">
-            <a:avLst/>
-          </a:prstGeom>
-          <a:noFill/>
-          <a:ln/>
-        </p:spPr>
-        <p:txBody>
-          <a:bodyPr wrap="square" lIns="0" tIns="0" rIns="0" bIns="0" rtlCol="0" anchor="ctr"/>
-          <a:lstStyle/>
-          <a:p>
-            <a:pPr algn="ctr" indent="0" marL="0">
-              <a:buNone/>
-            </a:pPr>
-            <a:r>
-              <a:rPr lang="en-US" sz="1500" b="1" dirty="0">
-                <a:solidFill>
-                  <a:srgbClr val="003A63"/>
-                </a:solidFill>
-                <a:latin typeface="Aptos" pitchFamily="34" charset="0"/>
-                <a:ea typeface="Aptos" pitchFamily="34" charset="-122"/>
-                <a:cs typeface="Aptos" pitchFamily="34" charset="-120"/>
-              </a:rPr>
-              <a:t>Risk</a:t>
-            </a:r>
-            <a:endParaRPr lang="en-US" sz="1500" dirty="0"/>
+            <a:off x="7818120" y="3300984"/>
+            <a:ext cx="3090672" cy="877824"/>
+          </a:xfrm>
+          <a:prstGeom prst="rect">
+            <a:avLst/>
+          </a:prstGeom>
+          <a:noFill/>
+          <a:ln/>
+        </p:spPr>
+        <p:txBody>
+          <a:bodyPr wrap="square" lIns="254" tIns="254" rIns="254" bIns="254" rtlCol="0" anchor="t">
+            <a:normAutofit/>
+          </a:bodyPr>
+          <a:lstStyle/>
+          <a:p>
+            <a:r>
+              <a:rPr lang="en-US" sz="1380" dirty="0">
+                <a:solidFill>
+                  <a:srgbClr val="17364A"/>
+                </a:solidFill>
+                <a:latin typeface="Aptos" pitchFamily="34" charset="0"/>
+                <a:ea typeface="Aptos" pitchFamily="34" charset="-122"/>
+                <a:cs typeface="Aptos" pitchFamily="34" charset="-120"/>
+              </a:rPr>
+              <a:t>Require stronger approval for write-back, external transmission, and automated actions.</a:t>
+            </a:r>
+            <a:endParaRPr lang="en-US" sz="1380" dirty="0"/>
+          </a:p>
+          <a:p>
+            <a:r>
+              <a:rPr lang="en-US" sz="1380" dirty="0">
+                <a:solidFill>
+                  <a:srgbClr val="17364A"/>
+                </a:solidFill>
+                <a:latin typeface="Aptos" pitchFamily="34" charset="0"/>
+                <a:ea typeface="Aptos" pitchFamily="34" charset="-122"/>
+                <a:cs typeface="Aptos" pitchFamily="34" charset="-120"/>
+              </a:rPr>
+              <a:t>Avoid shared accounts and undocumented service identities.</a:t>
+            </a:r>
+            <a:endParaRPr lang="en-US" sz="1380" dirty="0"/>
+          </a:p>
+          <a:p>
+            <a:r>
+              <a:rPr lang="en-US" sz="1380" dirty="0">
+                <a:solidFill>
+                  <a:srgbClr val="17364A"/>
+                </a:solidFill>
+                <a:latin typeface="Aptos" pitchFamily="34" charset="0"/>
+                <a:ea typeface="Aptos" pitchFamily="34" charset="-122"/>
+                <a:cs typeface="Aptos" pitchFamily="34" charset="-120"/>
+              </a:rPr>
+              <a:t>Maintain detailed audit logs for AI access and actions.</a:t>
+            </a:r>
+            <a:endParaRPr lang="en-US" sz="1380" dirty="0"/>
           </a:p>
         </p:txBody>
       </p:sp>
       <p:sp>
         <p:nvSpPr>
           <p:cNvPr id="16" name="Shape 14"/>
-          <p:cNvSpPr/>
-          <p:nvPr/>
-        </p:nvSpPr>
-        <p:spPr>
-          <a:xfrm>
-            <a:off x="8366760" y="3639312"/>
-            <a:ext cx="2011680" cy="0"/>
-          </a:xfrm>
-          <a:prstGeom prst="line">
-            <a:avLst/>
-          </a:prstGeom>
-          <a:noFill/>
-          <a:ln w="63500">
-            <a:solidFill>
-              <a:srgbClr val="2F8A28"/>
-            </a:solidFill>
-            <a:prstDash val="solid"/>
-          </a:ln>
-        </p:spPr>
-      </p:sp>
-      <p:sp>
-        <p:nvSpPr>
-          <p:cNvPr id="17" name="Text 15"/>
-          <p:cNvSpPr/>
-          <p:nvPr/>
-        </p:nvSpPr>
-        <p:spPr>
-          <a:xfrm>
-            <a:off x="7909560" y="3849624"/>
-            <a:ext cx="2926080" cy="164592"/>
-          </a:xfrm>
-          <a:prstGeom prst="rect">
-            <a:avLst/>
-          </a:prstGeom>
-          <a:noFill/>
-          <a:ln/>
-        </p:spPr>
-        <p:txBody>
-          <a:bodyPr wrap="square" lIns="0" tIns="0" rIns="0" bIns="0" rtlCol="0" anchor="ctr"/>
-          <a:lstStyle/>
-          <a:p>
-            <a:pPr algn="ctr" indent="0" marL="0">
-              <a:buNone/>
-            </a:pPr>
-            <a:r>
-              <a:rPr lang="en-US" sz="900" dirty="0">
-                <a:solidFill>
-                  <a:srgbClr val="003A63"/>
-                </a:solidFill>
-                <a:latin typeface="Aptos" pitchFamily="34" charset="0"/>
-                <a:ea typeface="Aptos" pitchFamily="34" charset="-122"/>
-                <a:cs typeface="Aptos" pitchFamily="34" charset="-120"/>
-              </a:rPr>
-              <a:t>Human review</a:t>
-            </a:r>
-            <a:endParaRPr lang="en-US" sz="900" dirty="0"/>
-          </a:p>
-        </p:txBody>
-      </p:sp>
-      <p:sp>
-        <p:nvSpPr>
-          <p:cNvPr id="18" name="Shape 16"/>
           <p:cNvSpPr/>
           <p:nvPr/>
         </p:nvSpPr>
@@ -6774,7 +6513,7 @@
       </p:sp>
       <p:sp>
         <p:nvSpPr>
-          <p:cNvPr id="19" name="Text 17"/>
+          <p:cNvPr id="17" name="Text 15"/>
           <p:cNvSpPr/>
           <p:nvPr/>
         </p:nvSpPr>
@@ -6813,7 +6552,7 @@
       </p:sp>
       <p:sp>
         <p:nvSpPr>
-          <p:cNvPr id="20" name="Text 18"/>
+          <p:cNvPr id="18" name="Text 16"/>
           <p:cNvSpPr/>
           <p:nvPr/>
         </p:nvSpPr>
@@ -7321,13 +7060,11 @@
             </a:avLst>
           </a:prstGeom>
           <a:solidFill>
-            <a:srgbClr val="FFFFFF">
-              <a:alpha val="88000"/>
-            </a:srgbClr>
+            <a:srgbClr val="FFFFFF"/>
           </a:solidFill>
           <a:ln w="12700">
             <a:solidFill>
-              <a:srgbClr val="D6E8F2"/>
+              <a:srgbClr val="B9D7E6"/>
             </a:solidFill>
             <a:prstDash val="solid"/>
           </a:ln>
@@ -7335,30 +7072,42 @@
       </p:sp>
       <p:sp>
         <p:nvSpPr>
-          <p:cNvPr id="14" name="Shape 12"/>
-          <p:cNvSpPr/>
-          <p:nvPr/>
-        </p:nvSpPr>
-        <p:spPr>
-          <a:xfrm>
-            <a:off x="7927848" y="3319272"/>
-            <a:ext cx="792480" cy="749808"/>
-          </a:xfrm>
-          <a:prstGeom prst="roundRect">
-            <a:avLst>
-              <a:gd name="adj" fmla="val 14634"/>
-            </a:avLst>
-          </a:prstGeom>
-          <a:solidFill>
-            <a:srgbClr val="0068B7"/>
-          </a:solidFill>
-          <a:ln w="12700">
-            <a:solidFill>
-              <a:srgbClr val="0068B7"/>
-            </a:solidFill>
-            <a:prstDash val="solid"/>
-          </a:ln>
-        </p:spPr>
+          <p:cNvPr id="14" name="Text 12"/>
+          <p:cNvSpPr/>
+          <p:nvPr/>
+        </p:nvSpPr>
+        <p:spPr>
+          <a:xfrm>
+            <a:off x="7799832" y="2935224"/>
+            <a:ext cx="3145536" cy="256032"/>
+          </a:xfrm>
+          <a:prstGeom prst="rect">
+            <a:avLst/>
+          </a:prstGeom>
+          <a:noFill/>
+          <a:ln/>
+        </p:spPr>
+        <p:txBody>
+          <a:bodyPr wrap="square" lIns="0" tIns="0" rIns="0" bIns="0" rtlCol="0" anchor="ctr"/>
+          <a:lstStyle/>
+          <a:p>
+            <a:pPr indent="0" marL="0">
+              <a:buNone/>
+            </a:pPr>
+            <a:r>
+              <a:rPr lang="en-US" sz="1300" b="1" dirty="0">
+                <a:solidFill>
+                  <a:srgbClr val="0068B7"/>
+                </a:solidFill>
+                <a:latin typeface="Aptos" pitchFamily="34" charset="0"/>
+                <a:ea typeface="Aptos" pitchFamily="34" charset="-122"/>
+                <a:cs typeface="Aptos" pitchFamily="34" charset="-120"/>
+              </a:rPr>
+              <a:t>Concept checkpoints</a:t>
+            </a:r>
+            <a:endParaRPr lang="en-US" sz="1300" dirty="0"/>
+          </a:p>
+        </p:txBody>
       </p:sp>
       <p:sp>
         <p:nvSpPr>
@@ -7368,240 +7117,67 @@
         </p:nvSpPr>
         <p:spPr>
           <a:xfrm>
-            <a:off x="8001000" y="3511296"/>
-            <a:ext cx="646176" cy="310896"/>
-          </a:xfrm>
-          <a:prstGeom prst="rect">
-            <a:avLst/>
-          </a:prstGeom>
-          <a:noFill/>
-          <a:ln/>
-        </p:spPr>
-        <p:txBody>
-          <a:bodyPr wrap="square" lIns="0" tIns="0" rIns="0" bIns="0" rtlCol="0" anchor="ctr">
+            <a:off x="7818120" y="3300984"/>
+            <a:ext cx="3090672" cy="877824"/>
+          </a:xfrm>
+          <a:prstGeom prst="rect">
+            <a:avLst/>
+          </a:prstGeom>
+          <a:noFill/>
+          <a:ln/>
+        </p:spPr>
+        <p:txBody>
+          <a:bodyPr wrap="square" lIns="254" tIns="254" rIns="254" bIns="254" rtlCol="0" anchor="t">
             <a:normAutofit/>
           </a:bodyPr>
           <a:lstStyle/>
           <a:p>
-            <a:pPr algn="ctr" indent="0" marL="0">
-              <a:buNone/>
-            </a:pPr>
-            <a:r>
-              <a:rPr lang="en-US" sz="1500" b="1" dirty="0">
-                <a:solidFill>
-                  <a:srgbClr val="FFFFFF"/>
-                </a:solidFill>
-                <a:latin typeface="Aptos" pitchFamily="34" charset="0"/>
-                <a:ea typeface="Aptos" pitchFamily="34" charset="-122"/>
-                <a:cs typeface="Aptos" pitchFamily="34" charset="-120"/>
-              </a:rPr>
-              <a:t>Plan</a:t>
-            </a:r>
-            <a:endParaRPr lang="en-US" sz="1500" dirty="0"/>
+            <a:r>
+              <a:rPr lang="en-US" sz="1380" dirty="0">
+                <a:solidFill>
+                  <a:srgbClr val="17364A"/>
+                </a:solidFill>
+                <a:latin typeface="Aptos" pitchFamily="34" charset="0"/>
+                <a:ea typeface="Aptos" pitchFamily="34" charset="-122"/>
+                <a:cs typeface="Aptos" pitchFamily="34" charset="-120"/>
+              </a:rPr>
+              <a:t>Where does this topic appear in your agency, program, or workflow?</a:t>
+            </a:r>
+            <a:endParaRPr lang="en-US" sz="1380" dirty="0"/>
+          </a:p>
+          <a:p>
+            <a:r>
+              <a:rPr lang="en-US" sz="1380" dirty="0">
+                <a:solidFill>
+                  <a:srgbClr val="17364A"/>
+                </a:solidFill>
+                <a:latin typeface="Aptos" pitchFamily="34" charset="0"/>
+                <a:ea typeface="Aptos" pitchFamily="34" charset="-122"/>
+                <a:cs typeface="Aptos" pitchFamily="34" charset="-120"/>
+              </a:rPr>
+              <a:t>Which staff roles would need to understand or apply this concept before AI use is approved?</a:t>
+            </a:r>
+            <a:endParaRPr lang="en-US" sz="1380" dirty="0"/>
+          </a:p>
+          <a:p>
+            <a:r>
+              <a:rPr lang="en-US" sz="1380" dirty="0">
+                <a:solidFill>
+                  <a:srgbClr val="17364A"/>
+                </a:solidFill>
+                <a:latin typeface="Aptos" pitchFamily="34" charset="0"/>
+                <a:ea typeface="Aptos" pitchFamily="34" charset="-122"/>
+                <a:cs typeface="Aptos" pitchFamily="34" charset="-120"/>
+              </a:rPr>
+              <a:t>What could go wrong if this topic is not addressed before implementation?</a:t>
+            </a:r>
+            <a:endParaRPr lang="en-US" sz="1380" dirty="0"/>
           </a:p>
         </p:txBody>
       </p:sp>
       <p:sp>
         <p:nvSpPr>
           <p:cNvPr id="16" name="Shape 14"/>
-          <p:cNvSpPr/>
-          <p:nvPr/>
-        </p:nvSpPr>
-        <p:spPr>
-          <a:xfrm>
-            <a:off x="8976360" y="3319272"/>
-            <a:ext cx="792480" cy="749808"/>
-          </a:xfrm>
-          <a:prstGeom prst="roundRect">
-            <a:avLst>
-              <a:gd name="adj" fmla="val 14634"/>
-            </a:avLst>
-          </a:prstGeom>
-          <a:solidFill>
-            <a:srgbClr val="2F8A28"/>
-          </a:solidFill>
-          <a:ln w="12700">
-            <a:solidFill>
-              <a:srgbClr val="2F8A28"/>
-            </a:solidFill>
-            <a:prstDash val="solid"/>
-          </a:ln>
-        </p:spPr>
-      </p:sp>
-      <p:sp>
-        <p:nvSpPr>
-          <p:cNvPr id="17" name="Text 15"/>
-          <p:cNvSpPr/>
-          <p:nvPr/>
-        </p:nvSpPr>
-        <p:spPr>
-          <a:xfrm>
-            <a:off x="9049512" y="3511296"/>
-            <a:ext cx="646176" cy="310896"/>
-          </a:xfrm>
-          <a:prstGeom prst="rect">
-            <a:avLst/>
-          </a:prstGeom>
-          <a:noFill/>
-          <a:ln/>
-        </p:spPr>
-        <p:txBody>
-          <a:bodyPr wrap="square" lIns="0" tIns="0" rIns="0" bIns="0" rtlCol="0" anchor="ctr">
-            <a:normAutofit/>
-          </a:bodyPr>
-          <a:lstStyle/>
-          <a:p>
-            <a:pPr algn="ctr" indent="0" marL="0">
-              <a:buNone/>
-            </a:pPr>
-            <a:r>
-              <a:rPr lang="en-US" sz="1500" b="1" dirty="0">
-                <a:solidFill>
-                  <a:srgbClr val="FFFFFF"/>
-                </a:solidFill>
-                <a:latin typeface="Aptos" pitchFamily="34" charset="0"/>
-                <a:ea typeface="Aptos" pitchFamily="34" charset="-122"/>
-                <a:cs typeface="Aptos" pitchFamily="34" charset="-120"/>
-              </a:rPr>
-              <a:t>Do</a:t>
-            </a:r>
-            <a:endParaRPr lang="en-US" sz="1500" dirty="0"/>
-          </a:p>
-        </p:txBody>
-      </p:sp>
-      <p:sp>
-        <p:nvSpPr>
-          <p:cNvPr id="18" name="Shape 16"/>
-          <p:cNvSpPr/>
-          <p:nvPr/>
-        </p:nvSpPr>
-        <p:spPr>
-          <a:xfrm>
-            <a:off x="10024872" y="3319272"/>
-            <a:ext cx="792480" cy="749808"/>
-          </a:xfrm>
-          <a:prstGeom prst="roundRect">
-            <a:avLst>
-              <a:gd name="adj" fmla="val 14634"/>
-            </a:avLst>
-          </a:prstGeom>
-          <a:solidFill>
-            <a:srgbClr val="D69A2D"/>
-          </a:solidFill>
-          <a:ln w="12700">
-            <a:solidFill>
-              <a:srgbClr val="D69A2D"/>
-            </a:solidFill>
-            <a:prstDash val="solid"/>
-          </a:ln>
-        </p:spPr>
-      </p:sp>
-      <p:sp>
-        <p:nvSpPr>
-          <p:cNvPr id="19" name="Text 17"/>
-          <p:cNvSpPr/>
-          <p:nvPr/>
-        </p:nvSpPr>
-        <p:spPr>
-          <a:xfrm>
-            <a:off x="10098024" y="3511296"/>
-            <a:ext cx="646176" cy="310896"/>
-          </a:xfrm>
-          <a:prstGeom prst="rect">
-            <a:avLst/>
-          </a:prstGeom>
-          <a:noFill/>
-          <a:ln/>
-        </p:spPr>
-        <p:txBody>
-          <a:bodyPr wrap="square" lIns="0" tIns="0" rIns="0" bIns="0" rtlCol="0" anchor="ctr">
-            <a:normAutofit/>
-          </a:bodyPr>
-          <a:lstStyle/>
-          <a:p>
-            <a:pPr algn="ctr" indent="0" marL="0">
-              <a:buNone/>
-            </a:pPr>
-            <a:r>
-              <a:rPr lang="en-US" sz="1500" b="1" dirty="0">
-                <a:solidFill>
-                  <a:srgbClr val="FFFFFF"/>
-                </a:solidFill>
-                <a:latin typeface="Aptos" pitchFamily="34" charset="0"/>
-                <a:ea typeface="Aptos" pitchFamily="34" charset="-122"/>
-                <a:cs typeface="Aptos" pitchFamily="34" charset="-120"/>
-              </a:rPr>
-              <a:t>Review</a:t>
-            </a:r>
-            <a:endParaRPr lang="en-US" sz="1500" dirty="0"/>
-          </a:p>
-        </p:txBody>
-      </p:sp>
-      <p:sp>
-        <p:nvSpPr>
-          <p:cNvPr id="20" name="Shape 18"/>
-          <p:cNvSpPr/>
-          <p:nvPr/>
-        </p:nvSpPr>
-        <p:spPr>
-          <a:xfrm>
-            <a:off x="8293608" y="4389120"/>
-            <a:ext cx="2157984" cy="0"/>
-          </a:xfrm>
-          <a:prstGeom prst="line">
-            <a:avLst/>
-          </a:prstGeom>
-          <a:noFill/>
-          <a:ln w="25400">
-            <a:solidFill>
-              <a:srgbClr val="8ABBD8"/>
-            </a:solidFill>
-            <a:prstDash val="solid"/>
-          </a:ln>
-        </p:spPr>
-      </p:sp>
-      <p:sp>
-        <p:nvSpPr>
-          <p:cNvPr id="21" name="Text 19"/>
-          <p:cNvSpPr/>
-          <p:nvPr/>
-        </p:nvSpPr>
-        <p:spPr>
-          <a:xfrm>
-            <a:off x="7909560" y="3977640"/>
-            <a:ext cx="2926080" cy="182880"/>
-          </a:xfrm>
-          <a:prstGeom prst="rect">
-            <a:avLst/>
-          </a:prstGeom>
-          <a:noFill/>
-          <a:ln/>
-        </p:spPr>
-        <p:txBody>
-          <a:bodyPr wrap="square" lIns="0" tIns="0" rIns="0" bIns="0" rtlCol="0" anchor="ctr"/>
-          <a:lstStyle/>
-          <a:p>
-            <a:pPr algn="ctr" indent="0" marL="0">
-              <a:buNone/>
-            </a:pPr>
-            <a:r>
-              <a:rPr lang="en-US" sz="1000" dirty="0">
-                <a:solidFill>
-                  <a:srgbClr val="003A63"/>
-                </a:solidFill>
-                <a:latin typeface="Aptos" pitchFamily="34" charset="0"/>
-                <a:ea typeface="Aptos" pitchFamily="34" charset="-122"/>
-                <a:cs typeface="Aptos" pitchFamily="34" charset="-120"/>
-              </a:rPr>
-              <a:t>Dependencies visible</a:t>
-            </a:r>
-            <a:endParaRPr lang="en-US" sz="1000" dirty="0"/>
-          </a:p>
-        </p:txBody>
-      </p:sp>
-      <p:sp>
-        <p:nvSpPr>
-          <p:cNvPr id="22" name="Shape 20"/>
           <p:cNvSpPr/>
           <p:nvPr/>
         </p:nvSpPr>
@@ -7628,7 +7204,7 @@
       </p:sp>
       <p:sp>
         <p:nvSpPr>
-          <p:cNvPr id="23" name="Text 21"/>
+          <p:cNvPr id="17" name="Text 15"/>
           <p:cNvSpPr/>
           <p:nvPr/>
         </p:nvSpPr>
@@ -7667,7 +7243,7 @@
       </p:sp>
       <p:sp>
         <p:nvSpPr>
-          <p:cNvPr id="24" name="Text 22"/>
+          <p:cNvPr id="18" name="Text 16"/>
           <p:cNvSpPr/>
           <p:nvPr/>
         </p:nvSpPr>
@@ -8161,13 +7737,11 @@
             </a:avLst>
           </a:prstGeom>
           <a:solidFill>
-            <a:srgbClr val="FFFFFF">
-              <a:alpha val="88000"/>
-            </a:srgbClr>
+            <a:srgbClr val="FFFFFF"/>
           </a:solidFill>
           <a:ln w="12700">
             <a:solidFill>
-              <a:srgbClr val="D6E8F2"/>
+              <a:srgbClr val="B9D7E6"/>
             </a:solidFill>
             <a:prstDash val="solid"/>
           </a:ln>
@@ -8175,30 +7749,42 @@
       </p:sp>
       <p:sp>
         <p:nvSpPr>
-          <p:cNvPr id="14" name="Shape 12"/>
-          <p:cNvSpPr/>
-          <p:nvPr/>
-        </p:nvSpPr>
-        <p:spPr>
-          <a:xfrm>
-            <a:off x="7927848" y="3319272"/>
-            <a:ext cx="792480" cy="749808"/>
-          </a:xfrm>
-          <a:prstGeom prst="roundRect">
-            <a:avLst>
-              <a:gd name="adj" fmla="val 14634"/>
-            </a:avLst>
-          </a:prstGeom>
-          <a:solidFill>
-            <a:srgbClr val="0068B7"/>
-          </a:solidFill>
-          <a:ln w="12700">
-            <a:solidFill>
-              <a:srgbClr val="0068B7"/>
-            </a:solidFill>
-            <a:prstDash val="solid"/>
-          </a:ln>
-        </p:spPr>
+          <p:cNvPr id="14" name="Text 12"/>
+          <p:cNvSpPr/>
+          <p:nvPr/>
+        </p:nvSpPr>
+        <p:spPr>
+          <a:xfrm>
+            <a:off x="7799832" y="2935224"/>
+            <a:ext cx="3145536" cy="256032"/>
+          </a:xfrm>
+          <a:prstGeom prst="rect">
+            <a:avLst/>
+          </a:prstGeom>
+          <a:noFill/>
+          <a:ln/>
+        </p:spPr>
+        <p:txBody>
+          <a:bodyPr wrap="square" lIns="0" tIns="0" rIns="0" bIns="0" rtlCol="0" anchor="ctr"/>
+          <a:lstStyle/>
+          <a:p>
+            <a:pPr indent="0" marL="0">
+              <a:buNone/>
+            </a:pPr>
+            <a:r>
+              <a:rPr lang="en-US" sz="1300" b="1" dirty="0">
+                <a:solidFill>
+                  <a:srgbClr val="0068B7"/>
+                </a:solidFill>
+                <a:latin typeface="Aptos" pitchFamily="34" charset="0"/>
+                <a:ea typeface="Aptos" pitchFamily="34" charset="-122"/>
+                <a:cs typeface="Aptos" pitchFamily="34" charset="-120"/>
+              </a:rPr>
+              <a:t>Concept checkpoints</a:t>
+            </a:r>
+            <a:endParaRPr lang="en-US" sz="1300" dirty="0"/>
+          </a:p>
+        </p:txBody>
       </p:sp>
       <p:sp>
         <p:nvSpPr>
@@ -8208,240 +7794,53 @@
         </p:nvSpPr>
         <p:spPr>
           <a:xfrm>
-            <a:off x="8001000" y="3511296"/>
-            <a:ext cx="646176" cy="310896"/>
-          </a:xfrm>
-          <a:prstGeom prst="rect">
-            <a:avLst/>
-          </a:prstGeom>
-          <a:noFill/>
-          <a:ln/>
-        </p:spPr>
-        <p:txBody>
-          <a:bodyPr wrap="square" lIns="0" tIns="0" rIns="0" bIns="0" rtlCol="0" anchor="ctr">
+            <a:off x="7818120" y="3300984"/>
+            <a:ext cx="3090672" cy="877824"/>
+          </a:xfrm>
+          <a:prstGeom prst="rect">
+            <a:avLst/>
+          </a:prstGeom>
+          <a:noFill/>
+          <a:ln/>
+        </p:spPr>
+        <p:txBody>
+          <a:bodyPr wrap="square" lIns="254" tIns="254" rIns="254" bIns="254" rtlCol="0" anchor="t">
             <a:normAutofit/>
           </a:bodyPr>
           <a:lstStyle/>
           <a:p>
-            <a:pPr algn="ctr" indent="0" marL="0">
-              <a:buNone/>
-            </a:pPr>
-            <a:r>
-              <a:rPr lang="en-US" sz="1500" b="1" dirty="0">
-                <a:solidFill>
-                  <a:srgbClr val="FFFFFF"/>
-                </a:solidFill>
-                <a:latin typeface="Aptos" pitchFamily="34" charset="0"/>
-                <a:ea typeface="Aptos" pitchFamily="34" charset="-122"/>
-                <a:cs typeface="Aptos" pitchFamily="34" charset="-120"/>
-              </a:rPr>
-              <a:t>Plan</a:t>
-            </a:r>
-            <a:endParaRPr lang="en-US" sz="1500" dirty="0"/>
+            <a:r>
+              <a:rPr lang="en-US" sz="1380" dirty="0">
+                <a:solidFill>
+                  <a:srgbClr val="17364A"/>
+                </a:solidFill>
+                <a:latin typeface="Aptos" pitchFamily="34" charset="0"/>
+                <a:ea typeface="Aptos" pitchFamily="34" charset="-122"/>
+                <a:cs typeface="Aptos" pitchFamily="34" charset="-120"/>
+              </a:rPr>
+              <a:t>What evidence would governance, leadership, or operations staff need before moving forward?</a:t>
+            </a:r>
+            <a:endParaRPr lang="en-US" sz="1380" dirty="0"/>
+          </a:p>
+          <a:p>
+            <a:r>
+              <a:rPr lang="en-US" sz="1380" dirty="0">
+                <a:solidFill>
+                  <a:srgbClr val="17364A"/>
+                </a:solidFill>
+                <a:latin typeface="Aptos" pitchFamily="34" charset="0"/>
+                <a:ea typeface="Aptos" pitchFamily="34" charset="-122"/>
+                <a:cs typeface="Aptos" pitchFamily="34" charset="-120"/>
+              </a:rPr>
+              <a:t>Which policy, data, equity, privacy, security, or workflow questions remain unresolved?</a:t>
+            </a:r>
+            <a:endParaRPr lang="en-US" sz="1380" dirty="0"/>
           </a:p>
         </p:txBody>
       </p:sp>
       <p:sp>
         <p:nvSpPr>
           <p:cNvPr id="16" name="Shape 14"/>
-          <p:cNvSpPr/>
-          <p:nvPr/>
-        </p:nvSpPr>
-        <p:spPr>
-          <a:xfrm>
-            <a:off x="8976360" y="3319272"/>
-            <a:ext cx="792480" cy="749808"/>
-          </a:xfrm>
-          <a:prstGeom prst="roundRect">
-            <a:avLst>
-              <a:gd name="adj" fmla="val 14634"/>
-            </a:avLst>
-          </a:prstGeom>
-          <a:solidFill>
-            <a:srgbClr val="2F8A28"/>
-          </a:solidFill>
-          <a:ln w="12700">
-            <a:solidFill>
-              <a:srgbClr val="2F8A28"/>
-            </a:solidFill>
-            <a:prstDash val="solid"/>
-          </a:ln>
-        </p:spPr>
-      </p:sp>
-      <p:sp>
-        <p:nvSpPr>
-          <p:cNvPr id="17" name="Text 15"/>
-          <p:cNvSpPr/>
-          <p:nvPr/>
-        </p:nvSpPr>
-        <p:spPr>
-          <a:xfrm>
-            <a:off x="9049512" y="3511296"/>
-            <a:ext cx="646176" cy="310896"/>
-          </a:xfrm>
-          <a:prstGeom prst="rect">
-            <a:avLst/>
-          </a:prstGeom>
-          <a:noFill/>
-          <a:ln/>
-        </p:spPr>
-        <p:txBody>
-          <a:bodyPr wrap="square" lIns="0" tIns="0" rIns="0" bIns="0" rtlCol="0" anchor="ctr">
-            <a:normAutofit/>
-          </a:bodyPr>
-          <a:lstStyle/>
-          <a:p>
-            <a:pPr algn="ctr" indent="0" marL="0">
-              <a:buNone/>
-            </a:pPr>
-            <a:r>
-              <a:rPr lang="en-US" sz="1500" b="1" dirty="0">
-                <a:solidFill>
-                  <a:srgbClr val="FFFFFF"/>
-                </a:solidFill>
-                <a:latin typeface="Aptos" pitchFamily="34" charset="0"/>
-                <a:ea typeface="Aptos" pitchFamily="34" charset="-122"/>
-                <a:cs typeface="Aptos" pitchFamily="34" charset="-120"/>
-              </a:rPr>
-              <a:t>Do</a:t>
-            </a:r>
-            <a:endParaRPr lang="en-US" sz="1500" dirty="0"/>
-          </a:p>
-        </p:txBody>
-      </p:sp>
-      <p:sp>
-        <p:nvSpPr>
-          <p:cNvPr id="18" name="Shape 16"/>
-          <p:cNvSpPr/>
-          <p:nvPr/>
-        </p:nvSpPr>
-        <p:spPr>
-          <a:xfrm>
-            <a:off x="10024872" y="3319272"/>
-            <a:ext cx="792480" cy="749808"/>
-          </a:xfrm>
-          <a:prstGeom prst="roundRect">
-            <a:avLst>
-              <a:gd name="adj" fmla="val 14634"/>
-            </a:avLst>
-          </a:prstGeom>
-          <a:solidFill>
-            <a:srgbClr val="D69A2D"/>
-          </a:solidFill>
-          <a:ln w="12700">
-            <a:solidFill>
-              <a:srgbClr val="D69A2D"/>
-            </a:solidFill>
-            <a:prstDash val="solid"/>
-          </a:ln>
-        </p:spPr>
-      </p:sp>
-      <p:sp>
-        <p:nvSpPr>
-          <p:cNvPr id="19" name="Text 17"/>
-          <p:cNvSpPr/>
-          <p:nvPr/>
-        </p:nvSpPr>
-        <p:spPr>
-          <a:xfrm>
-            <a:off x="10098024" y="3511296"/>
-            <a:ext cx="646176" cy="310896"/>
-          </a:xfrm>
-          <a:prstGeom prst="rect">
-            <a:avLst/>
-          </a:prstGeom>
-          <a:noFill/>
-          <a:ln/>
-        </p:spPr>
-        <p:txBody>
-          <a:bodyPr wrap="square" lIns="0" tIns="0" rIns="0" bIns="0" rtlCol="0" anchor="ctr">
-            <a:normAutofit/>
-          </a:bodyPr>
-          <a:lstStyle/>
-          <a:p>
-            <a:pPr algn="ctr" indent="0" marL="0">
-              <a:buNone/>
-            </a:pPr>
-            <a:r>
-              <a:rPr lang="en-US" sz="1500" b="1" dirty="0">
-                <a:solidFill>
-                  <a:srgbClr val="FFFFFF"/>
-                </a:solidFill>
-                <a:latin typeface="Aptos" pitchFamily="34" charset="0"/>
-                <a:ea typeface="Aptos" pitchFamily="34" charset="-122"/>
-                <a:cs typeface="Aptos" pitchFamily="34" charset="-120"/>
-              </a:rPr>
-              <a:t>Review</a:t>
-            </a:r>
-            <a:endParaRPr lang="en-US" sz="1500" dirty="0"/>
-          </a:p>
-        </p:txBody>
-      </p:sp>
-      <p:sp>
-        <p:nvSpPr>
-          <p:cNvPr id="20" name="Shape 18"/>
-          <p:cNvSpPr/>
-          <p:nvPr/>
-        </p:nvSpPr>
-        <p:spPr>
-          <a:xfrm>
-            <a:off x="8293608" y="4389120"/>
-            <a:ext cx="2157984" cy="0"/>
-          </a:xfrm>
-          <a:prstGeom prst="line">
-            <a:avLst/>
-          </a:prstGeom>
-          <a:noFill/>
-          <a:ln w="25400">
-            <a:solidFill>
-              <a:srgbClr val="8ABBD8"/>
-            </a:solidFill>
-            <a:prstDash val="solid"/>
-          </a:ln>
-        </p:spPr>
-      </p:sp>
-      <p:sp>
-        <p:nvSpPr>
-          <p:cNvPr id="21" name="Text 19"/>
-          <p:cNvSpPr/>
-          <p:nvPr/>
-        </p:nvSpPr>
-        <p:spPr>
-          <a:xfrm>
-            <a:off x="7909560" y="3977640"/>
-            <a:ext cx="2926080" cy="182880"/>
-          </a:xfrm>
-          <a:prstGeom prst="rect">
-            <a:avLst/>
-          </a:prstGeom>
-          <a:noFill/>
-          <a:ln/>
-        </p:spPr>
-        <p:txBody>
-          <a:bodyPr wrap="square" lIns="0" tIns="0" rIns="0" bIns="0" rtlCol="0" anchor="ctr"/>
-          <a:lstStyle/>
-          <a:p>
-            <a:pPr algn="ctr" indent="0" marL="0">
-              <a:buNone/>
-            </a:pPr>
-            <a:r>
-              <a:rPr lang="en-US" sz="1000" dirty="0">
-                <a:solidFill>
-                  <a:srgbClr val="003A63"/>
-                </a:solidFill>
-                <a:latin typeface="Aptos" pitchFamily="34" charset="0"/>
-                <a:ea typeface="Aptos" pitchFamily="34" charset="-122"/>
-                <a:cs typeface="Aptos" pitchFamily="34" charset="-120"/>
-              </a:rPr>
-              <a:t>Dependencies visible</a:t>
-            </a:r>
-            <a:endParaRPr lang="en-US" sz="1000" dirty="0"/>
-          </a:p>
-        </p:txBody>
-      </p:sp>
-      <p:sp>
-        <p:nvSpPr>
-          <p:cNvPr id="22" name="Shape 20"/>
           <p:cNvSpPr/>
           <p:nvPr/>
         </p:nvSpPr>
@@ -8468,7 +7867,7 @@
       </p:sp>
       <p:sp>
         <p:nvSpPr>
-          <p:cNvPr id="23" name="Text 21"/>
+          <p:cNvPr id="17" name="Text 15"/>
           <p:cNvSpPr/>
           <p:nvPr/>
         </p:nvSpPr>
@@ -8507,7 +7906,7 @@
       </p:sp>
       <p:sp>
         <p:nvSpPr>
-          <p:cNvPr id="24" name="Text 22"/>
+          <p:cNvPr id="18" name="Text 16"/>
           <p:cNvSpPr/>
           <p:nvPr/>
         </p:nvSpPr>
@@ -9001,13 +8400,11 @@
             </a:avLst>
           </a:prstGeom>
           <a:solidFill>
-            <a:srgbClr val="FFFFFF">
-              <a:alpha val="88000"/>
-            </a:srgbClr>
+            <a:srgbClr val="FFFFFF"/>
           </a:solidFill>
           <a:ln w="12700">
             <a:solidFill>
-              <a:srgbClr val="D6E8F2"/>
+              <a:srgbClr val="B9D7E6"/>
             </a:solidFill>
             <a:prstDash val="solid"/>
           </a:ln>
@@ -9015,30 +8412,42 @@
       </p:sp>
       <p:sp>
         <p:nvSpPr>
-          <p:cNvPr id="14" name="Shape 12"/>
-          <p:cNvSpPr/>
-          <p:nvPr/>
-        </p:nvSpPr>
-        <p:spPr>
-          <a:xfrm>
-            <a:off x="7927848" y="3319272"/>
-            <a:ext cx="792480" cy="749808"/>
-          </a:xfrm>
-          <a:prstGeom prst="roundRect">
-            <a:avLst>
-              <a:gd name="adj" fmla="val 14634"/>
-            </a:avLst>
-          </a:prstGeom>
-          <a:solidFill>
-            <a:srgbClr val="0068B7"/>
-          </a:solidFill>
-          <a:ln w="12700">
-            <a:solidFill>
-              <a:srgbClr val="0068B7"/>
-            </a:solidFill>
-            <a:prstDash val="solid"/>
-          </a:ln>
-        </p:spPr>
+          <p:cNvPr id="14" name="Text 12"/>
+          <p:cNvSpPr/>
+          <p:nvPr/>
+        </p:nvSpPr>
+        <p:spPr>
+          <a:xfrm>
+            <a:off x="7799832" y="2935224"/>
+            <a:ext cx="3145536" cy="256032"/>
+          </a:xfrm>
+          <a:prstGeom prst="rect">
+            <a:avLst/>
+          </a:prstGeom>
+          <a:noFill/>
+          <a:ln/>
+        </p:spPr>
+        <p:txBody>
+          <a:bodyPr wrap="square" lIns="0" tIns="0" rIns="0" bIns="0" rtlCol="0" anchor="ctr"/>
+          <a:lstStyle/>
+          <a:p>
+            <a:pPr indent="0" marL="0">
+              <a:buNone/>
+            </a:pPr>
+            <a:r>
+              <a:rPr lang="en-US" sz="1300" b="1" dirty="0">
+                <a:solidFill>
+                  <a:srgbClr val="0068B7"/>
+                </a:solidFill>
+                <a:latin typeface="Aptos" pitchFamily="34" charset="0"/>
+                <a:ea typeface="Aptos" pitchFamily="34" charset="-122"/>
+                <a:cs typeface="Aptos" pitchFamily="34" charset="-120"/>
+              </a:rPr>
+              <a:t>Concept checkpoints</a:t>
+            </a:r>
+            <a:endParaRPr lang="en-US" sz="1300" dirty="0"/>
+          </a:p>
+        </p:txBody>
       </p:sp>
       <p:sp>
         <p:nvSpPr>
@@ -9048,240 +8457,53 @@
         </p:nvSpPr>
         <p:spPr>
           <a:xfrm>
-            <a:off x="8001000" y="3511296"/>
-            <a:ext cx="646176" cy="310896"/>
-          </a:xfrm>
-          <a:prstGeom prst="rect">
-            <a:avLst/>
-          </a:prstGeom>
-          <a:noFill/>
-          <a:ln/>
-        </p:spPr>
-        <p:txBody>
-          <a:bodyPr wrap="square" lIns="0" tIns="0" rIns="0" bIns="0" rtlCol="0" anchor="ctr">
+            <a:off x="7818120" y="3300984"/>
+            <a:ext cx="3090672" cy="877824"/>
+          </a:xfrm>
+          <a:prstGeom prst="rect">
+            <a:avLst/>
+          </a:prstGeom>
+          <a:noFill/>
+          <a:ln/>
+        </p:spPr>
+        <p:txBody>
+          <a:bodyPr wrap="square" lIns="254" tIns="254" rIns="254" bIns="254" rtlCol="0" anchor="t">
             <a:normAutofit/>
           </a:bodyPr>
           <a:lstStyle/>
           <a:p>
-            <a:pPr algn="ctr" indent="0" marL="0">
-              <a:buNone/>
-            </a:pPr>
-            <a:r>
-              <a:rPr lang="en-US" sz="1500" b="1" dirty="0">
-                <a:solidFill>
-                  <a:srgbClr val="FFFFFF"/>
-                </a:solidFill>
-                <a:latin typeface="Aptos" pitchFamily="34" charset="0"/>
-                <a:ea typeface="Aptos" pitchFamily="34" charset="-122"/>
-                <a:cs typeface="Aptos" pitchFamily="34" charset="-120"/>
-              </a:rPr>
-              <a:t>Plan</a:t>
-            </a:r>
-            <a:endParaRPr lang="en-US" sz="1500" dirty="0"/>
+            <a:r>
+              <a:rPr lang="en-US" sz="1380" dirty="0">
+                <a:solidFill>
+                  <a:srgbClr val="17364A"/>
+                </a:solidFill>
+                <a:latin typeface="Aptos" pitchFamily="34" charset="0"/>
+                <a:ea typeface="Aptos" pitchFamily="34" charset="-122"/>
+                <a:cs typeface="Aptos" pitchFamily="34" charset="-120"/>
+              </a:rPr>
+              <a:t>Create an identity, access, and permissions review for one AI-supported workflow.</a:t>
+            </a:r>
+            <a:endParaRPr lang="en-US" sz="1380" dirty="0"/>
+          </a:p>
+          <a:p>
+            <a:r>
+              <a:rPr lang="en-US" sz="1380" dirty="0">
+                <a:solidFill>
+                  <a:srgbClr val="17364A"/>
+                </a:solidFill>
+                <a:latin typeface="Aptos" pitchFamily="34" charset="0"/>
+                <a:ea typeface="Aptos" pitchFamily="34" charset="-122"/>
+                <a:cs typeface="Aptos" pitchFamily="34" charset="-120"/>
+              </a:rPr>
+              <a:t>Identify users, service accounts, systems, data accessed, read/write permissions, approval.</a:t>
+            </a:r>
+            <a:endParaRPr lang="en-US" sz="1380" dirty="0"/>
           </a:p>
         </p:txBody>
       </p:sp>
       <p:sp>
         <p:nvSpPr>
           <p:cNvPr id="16" name="Shape 14"/>
-          <p:cNvSpPr/>
-          <p:nvPr/>
-        </p:nvSpPr>
-        <p:spPr>
-          <a:xfrm>
-            <a:off x="8976360" y="3319272"/>
-            <a:ext cx="792480" cy="749808"/>
-          </a:xfrm>
-          <a:prstGeom prst="roundRect">
-            <a:avLst>
-              <a:gd name="adj" fmla="val 14634"/>
-            </a:avLst>
-          </a:prstGeom>
-          <a:solidFill>
-            <a:srgbClr val="2F8A28"/>
-          </a:solidFill>
-          <a:ln w="12700">
-            <a:solidFill>
-              <a:srgbClr val="2F8A28"/>
-            </a:solidFill>
-            <a:prstDash val="solid"/>
-          </a:ln>
-        </p:spPr>
-      </p:sp>
-      <p:sp>
-        <p:nvSpPr>
-          <p:cNvPr id="17" name="Text 15"/>
-          <p:cNvSpPr/>
-          <p:nvPr/>
-        </p:nvSpPr>
-        <p:spPr>
-          <a:xfrm>
-            <a:off x="9049512" y="3511296"/>
-            <a:ext cx="646176" cy="310896"/>
-          </a:xfrm>
-          <a:prstGeom prst="rect">
-            <a:avLst/>
-          </a:prstGeom>
-          <a:noFill/>
-          <a:ln/>
-        </p:spPr>
-        <p:txBody>
-          <a:bodyPr wrap="square" lIns="0" tIns="0" rIns="0" bIns="0" rtlCol="0" anchor="ctr">
-            <a:normAutofit/>
-          </a:bodyPr>
-          <a:lstStyle/>
-          <a:p>
-            <a:pPr algn="ctr" indent="0" marL="0">
-              <a:buNone/>
-            </a:pPr>
-            <a:r>
-              <a:rPr lang="en-US" sz="1500" b="1" dirty="0">
-                <a:solidFill>
-                  <a:srgbClr val="FFFFFF"/>
-                </a:solidFill>
-                <a:latin typeface="Aptos" pitchFamily="34" charset="0"/>
-                <a:ea typeface="Aptos" pitchFamily="34" charset="-122"/>
-                <a:cs typeface="Aptos" pitchFamily="34" charset="-120"/>
-              </a:rPr>
-              <a:t>Do</a:t>
-            </a:r>
-            <a:endParaRPr lang="en-US" sz="1500" dirty="0"/>
-          </a:p>
-        </p:txBody>
-      </p:sp>
-      <p:sp>
-        <p:nvSpPr>
-          <p:cNvPr id="18" name="Shape 16"/>
-          <p:cNvSpPr/>
-          <p:nvPr/>
-        </p:nvSpPr>
-        <p:spPr>
-          <a:xfrm>
-            <a:off x="10024872" y="3319272"/>
-            <a:ext cx="792480" cy="749808"/>
-          </a:xfrm>
-          <a:prstGeom prst="roundRect">
-            <a:avLst>
-              <a:gd name="adj" fmla="val 14634"/>
-            </a:avLst>
-          </a:prstGeom>
-          <a:solidFill>
-            <a:srgbClr val="D69A2D"/>
-          </a:solidFill>
-          <a:ln w="12700">
-            <a:solidFill>
-              <a:srgbClr val="D69A2D"/>
-            </a:solidFill>
-            <a:prstDash val="solid"/>
-          </a:ln>
-        </p:spPr>
-      </p:sp>
-      <p:sp>
-        <p:nvSpPr>
-          <p:cNvPr id="19" name="Text 17"/>
-          <p:cNvSpPr/>
-          <p:nvPr/>
-        </p:nvSpPr>
-        <p:spPr>
-          <a:xfrm>
-            <a:off x="10098024" y="3511296"/>
-            <a:ext cx="646176" cy="310896"/>
-          </a:xfrm>
-          <a:prstGeom prst="rect">
-            <a:avLst/>
-          </a:prstGeom>
-          <a:noFill/>
-          <a:ln/>
-        </p:spPr>
-        <p:txBody>
-          <a:bodyPr wrap="square" lIns="0" tIns="0" rIns="0" bIns="0" rtlCol="0" anchor="ctr">
-            <a:normAutofit/>
-          </a:bodyPr>
-          <a:lstStyle/>
-          <a:p>
-            <a:pPr algn="ctr" indent="0" marL="0">
-              <a:buNone/>
-            </a:pPr>
-            <a:r>
-              <a:rPr lang="en-US" sz="1500" b="1" dirty="0">
-                <a:solidFill>
-                  <a:srgbClr val="FFFFFF"/>
-                </a:solidFill>
-                <a:latin typeface="Aptos" pitchFamily="34" charset="0"/>
-                <a:ea typeface="Aptos" pitchFamily="34" charset="-122"/>
-                <a:cs typeface="Aptos" pitchFamily="34" charset="-120"/>
-              </a:rPr>
-              <a:t>Review</a:t>
-            </a:r>
-            <a:endParaRPr lang="en-US" sz="1500" dirty="0"/>
-          </a:p>
-        </p:txBody>
-      </p:sp>
-      <p:sp>
-        <p:nvSpPr>
-          <p:cNvPr id="20" name="Shape 18"/>
-          <p:cNvSpPr/>
-          <p:nvPr/>
-        </p:nvSpPr>
-        <p:spPr>
-          <a:xfrm>
-            <a:off x="8293608" y="4389120"/>
-            <a:ext cx="2157984" cy="0"/>
-          </a:xfrm>
-          <a:prstGeom prst="line">
-            <a:avLst/>
-          </a:prstGeom>
-          <a:noFill/>
-          <a:ln w="25400">
-            <a:solidFill>
-              <a:srgbClr val="8ABBD8"/>
-            </a:solidFill>
-            <a:prstDash val="solid"/>
-          </a:ln>
-        </p:spPr>
-      </p:sp>
-      <p:sp>
-        <p:nvSpPr>
-          <p:cNvPr id="21" name="Text 19"/>
-          <p:cNvSpPr/>
-          <p:nvPr/>
-        </p:nvSpPr>
-        <p:spPr>
-          <a:xfrm>
-            <a:off x="7909560" y="3977640"/>
-            <a:ext cx="2926080" cy="182880"/>
-          </a:xfrm>
-          <a:prstGeom prst="rect">
-            <a:avLst/>
-          </a:prstGeom>
-          <a:noFill/>
-          <a:ln/>
-        </p:spPr>
-        <p:txBody>
-          <a:bodyPr wrap="square" lIns="0" tIns="0" rIns="0" bIns="0" rtlCol="0" anchor="ctr"/>
-          <a:lstStyle/>
-          <a:p>
-            <a:pPr algn="ctr" indent="0" marL="0">
-              <a:buNone/>
-            </a:pPr>
-            <a:r>
-              <a:rPr lang="en-US" sz="1000" dirty="0">
-                <a:solidFill>
-                  <a:srgbClr val="003A63"/>
-                </a:solidFill>
-                <a:latin typeface="Aptos" pitchFamily="34" charset="0"/>
-                <a:ea typeface="Aptos" pitchFamily="34" charset="-122"/>
-                <a:cs typeface="Aptos" pitchFamily="34" charset="-120"/>
-              </a:rPr>
-              <a:t>Dependencies visible</a:t>
-            </a:r>
-            <a:endParaRPr lang="en-US" sz="1000" dirty="0"/>
-          </a:p>
-        </p:txBody>
-      </p:sp>
-      <p:sp>
-        <p:nvSpPr>
-          <p:cNvPr id="22" name="Shape 20"/>
           <p:cNvSpPr/>
           <p:nvPr/>
         </p:nvSpPr>
@@ -9308,7 +8530,7 @@
       </p:sp>
       <p:sp>
         <p:nvSpPr>
-          <p:cNvPr id="23" name="Text 21"/>
+          <p:cNvPr id="17" name="Text 15"/>
           <p:cNvSpPr/>
           <p:nvPr/>
         </p:nvSpPr>
@@ -9347,7 +8569,7 @@
       </p:sp>
       <p:sp>
         <p:nvSpPr>
-          <p:cNvPr id="24" name="Text 22"/>
+          <p:cNvPr id="18" name="Text 16"/>
           <p:cNvSpPr/>
           <p:nvPr/>
         </p:nvSpPr>
@@ -9855,13 +9077,11 @@
             </a:avLst>
           </a:prstGeom>
           <a:solidFill>
-            <a:srgbClr val="FFFFFF">
-              <a:alpha val="88000"/>
-            </a:srgbClr>
+            <a:srgbClr val="FFFFFF"/>
           </a:solidFill>
           <a:ln w="12700">
             <a:solidFill>
-              <a:srgbClr val="D6E8F2"/>
+              <a:srgbClr val="B9D7E6"/>
             </a:solidFill>
             <a:prstDash val="solid"/>
           </a:ln>
@@ -9869,30 +9089,42 @@
       </p:sp>
       <p:sp>
         <p:nvSpPr>
-          <p:cNvPr id="14" name="Shape 12"/>
-          <p:cNvSpPr/>
-          <p:nvPr/>
-        </p:nvSpPr>
-        <p:spPr>
-          <a:xfrm>
-            <a:off x="7927848" y="3319272"/>
-            <a:ext cx="792480" cy="749808"/>
-          </a:xfrm>
-          <a:prstGeom prst="roundRect">
-            <a:avLst>
-              <a:gd name="adj" fmla="val 14634"/>
-            </a:avLst>
-          </a:prstGeom>
-          <a:solidFill>
-            <a:srgbClr val="0068B7"/>
-          </a:solidFill>
-          <a:ln w="12700">
-            <a:solidFill>
-              <a:srgbClr val="0068B7"/>
-            </a:solidFill>
-            <a:prstDash val="solid"/>
-          </a:ln>
-        </p:spPr>
+          <p:cNvPr id="14" name="Text 12"/>
+          <p:cNvSpPr/>
+          <p:nvPr/>
+        </p:nvSpPr>
+        <p:spPr>
+          <a:xfrm>
+            <a:off x="7799832" y="2935224"/>
+            <a:ext cx="3145536" cy="256032"/>
+          </a:xfrm>
+          <a:prstGeom prst="rect">
+            <a:avLst/>
+          </a:prstGeom>
+          <a:noFill/>
+          <a:ln/>
+        </p:spPr>
+        <p:txBody>
+          <a:bodyPr wrap="square" lIns="0" tIns="0" rIns="0" bIns="0" rtlCol="0" anchor="ctr"/>
+          <a:lstStyle/>
+          <a:p>
+            <a:pPr indent="0" marL="0">
+              <a:buNone/>
+            </a:pPr>
+            <a:r>
+              <a:rPr lang="en-US" sz="1300" b="1" dirty="0">
+                <a:solidFill>
+                  <a:srgbClr val="0068B7"/>
+                </a:solidFill>
+                <a:latin typeface="Aptos" pitchFamily="34" charset="0"/>
+                <a:ea typeface="Aptos" pitchFamily="34" charset="-122"/>
+                <a:cs typeface="Aptos" pitchFamily="34" charset="-120"/>
+              </a:rPr>
+              <a:t>Concept checkpoints</a:t>
+            </a:r>
+            <a:endParaRPr lang="en-US" sz="1300" dirty="0"/>
+          </a:p>
+        </p:txBody>
       </p:sp>
       <p:sp>
         <p:nvSpPr>
@@ -9902,240 +9134,67 @@
         </p:nvSpPr>
         <p:spPr>
           <a:xfrm>
-            <a:off x="8001000" y="3511296"/>
-            <a:ext cx="646176" cy="310896"/>
-          </a:xfrm>
-          <a:prstGeom prst="rect">
-            <a:avLst/>
-          </a:prstGeom>
-          <a:noFill/>
-          <a:ln/>
-        </p:spPr>
-        <p:txBody>
-          <a:bodyPr wrap="square" lIns="0" tIns="0" rIns="0" bIns="0" rtlCol="0" anchor="ctr">
+            <a:off x="7818120" y="3300984"/>
+            <a:ext cx="3090672" cy="877824"/>
+          </a:xfrm>
+          <a:prstGeom prst="rect">
+            <a:avLst/>
+          </a:prstGeom>
+          <a:noFill/>
+          <a:ln/>
+        </p:spPr>
+        <p:txBody>
+          <a:bodyPr wrap="square" lIns="254" tIns="254" rIns="254" bIns="254" rtlCol="0" anchor="t">
             <a:normAutofit/>
           </a:bodyPr>
           <a:lstStyle/>
           <a:p>
-            <a:pPr algn="ctr" indent="0" marL="0">
-              <a:buNone/>
-            </a:pPr>
-            <a:r>
-              <a:rPr lang="en-US" sz="1500" b="1" dirty="0">
-                <a:solidFill>
-                  <a:srgbClr val="FFFFFF"/>
-                </a:solidFill>
-                <a:latin typeface="Aptos" pitchFamily="34" charset="0"/>
-                <a:ea typeface="Aptos" pitchFamily="34" charset="-122"/>
-                <a:cs typeface="Aptos" pitchFamily="34" charset="-120"/>
-              </a:rPr>
-              <a:t>Plan</a:t>
-            </a:r>
-            <a:endParaRPr lang="en-US" sz="1500" dirty="0"/>
+            <a:r>
+              <a:rPr lang="en-US" sz="1380" dirty="0">
+                <a:solidFill>
+                  <a:srgbClr val="17364A"/>
+                </a:solidFill>
+                <a:latin typeface="Aptos" pitchFamily="34" charset="0"/>
+                <a:ea typeface="Aptos" pitchFamily="34" charset="-122"/>
+                <a:cs typeface="Aptos" pitchFamily="34" charset="-120"/>
+              </a:rPr>
+              <a:t>Access and permissions review</a:t>
+            </a:r>
+            <a:endParaRPr lang="en-US" sz="1380" dirty="0"/>
+          </a:p>
+          <a:p>
+            <a:r>
+              <a:rPr lang="en-US" sz="1380" dirty="0">
+                <a:solidFill>
+                  <a:srgbClr val="17364A"/>
+                </a:solidFill>
+                <a:latin typeface="Aptos" pitchFamily="34" charset="0"/>
+                <a:ea typeface="Aptos" pitchFamily="34" charset="-122"/>
+                <a:cs typeface="Aptos" pitchFamily="34" charset="-120"/>
+              </a:rPr>
+              <a:t>List of user and service identities</a:t>
+            </a:r>
+            <a:endParaRPr lang="en-US" sz="1380" dirty="0"/>
+          </a:p>
+          <a:p>
+            <a:r>
+              <a:rPr lang="en-US" sz="1380" dirty="0">
+                <a:solidFill>
+                  <a:srgbClr val="17364A"/>
+                </a:solidFill>
+                <a:latin typeface="Aptos" pitchFamily="34" charset="0"/>
+                <a:ea typeface="Aptos" pitchFamily="34" charset="-122"/>
+                <a:cs typeface="Aptos" pitchFamily="34" charset="-120"/>
+              </a:rPr>
+              <a:t>Least-privilege recommendation</a:t>
+            </a:r>
+            <a:endParaRPr lang="en-US" sz="1380" dirty="0"/>
           </a:p>
         </p:txBody>
       </p:sp>
       <p:sp>
         <p:nvSpPr>
           <p:cNvPr id="16" name="Shape 14"/>
-          <p:cNvSpPr/>
-          <p:nvPr/>
-        </p:nvSpPr>
-        <p:spPr>
-          <a:xfrm>
-            <a:off x="8976360" y="3319272"/>
-            <a:ext cx="792480" cy="749808"/>
-          </a:xfrm>
-          <a:prstGeom prst="roundRect">
-            <a:avLst>
-              <a:gd name="adj" fmla="val 14634"/>
-            </a:avLst>
-          </a:prstGeom>
-          <a:solidFill>
-            <a:srgbClr val="2F8A28"/>
-          </a:solidFill>
-          <a:ln w="12700">
-            <a:solidFill>
-              <a:srgbClr val="2F8A28"/>
-            </a:solidFill>
-            <a:prstDash val="solid"/>
-          </a:ln>
-        </p:spPr>
-      </p:sp>
-      <p:sp>
-        <p:nvSpPr>
-          <p:cNvPr id="17" name="Text 15"/>
-          <p:cNvSpPr/>
-          <p:nvPr/>
-        </p:nvSpPr>
-        <p:spPr>
-          <a:xfrm>
-            <a:off x="9049512" y="3511296"/>
-            <a:ext cx="646176" cy="310896"/>
-          </a:xfrm>
-          <a:prstGeom prst="rect">
-            <a:avLst/>
-          </a:prstGeom>
-          <a:noFill/>
-          <a:ln/>
-        </p:spPr>
-        <p:txBody>
-          <a:bodyPr wrap="square" lIns="0" tIns="0" rIns="0" bIns="0" rtlCol="0" anchor="ctr">
-            <a:normAutofit/>
-          </a:bodyPr>
-          <a:lstStyle/>
-          <a:p>
-            <a:pPr algn="ctr" indent="0" marL="0">
-              <a:buNone/>
-            </a:pPr>
-            <a:r>
-              <a:rPr lang="en-US" sz="1500" b="1" dirty="0">
-                <a:solidFill>
-                  <a:srgbClr val="FFFFFF"/>
-                </a:solidFill>
-                <a:latin typeface="Aptos" pitchFamily="34" charset="0"/>
-                <a:ea typeface="Aptos" pitchFamily="34" charset="-122"/>
-                <a:cs typeface="Aptos" pitchFamily="34" charset="-120"/>
-              </a:rPr>
-              <a:t>Do</a:t>
-            </a:r>
-            <a:endParaRPr lang="en-US" sz="1500" dirty="0"/>
-          </a:p>
-        </p:txBody>
-      </p:sp>
-      <p:sp>
-        <p:nvSpPr>
-          <p:cNvPr id="18" name="Shape 16"/>
-          <p:cNvSpPr/>
-          <p:nvPr/>
-        </p:nvSpPr>
-        <p:spPr>
-          <a:xfrm>
-            <a:off x="10024872" y="3319272"/>
-            <a:ext cx="792480" cy="749808"/>
-          </a:xfrm>
-          <a:prstGeom prst="roundRect">
-            <a:avLst>
-              <a:gd name="adj" fmla="val 14634"/>
-            </a:avLst>
-          </a:prstGeom>
-          <a:solidFill>
-            <a:srgbClr val="D69A2D"/>
-          </a:solidFill>
-          <a:ln w="12700">
-            <a:solidFill>
-              <a:srgbClr val="D69A2D"/>
-            </a:solidFill>
-            <a:prstDash val="solid"/>
-          </a:ln>
-        </p:spPr>
-      </p:sp>
-      <p:sp>
-        <p:nvSpPr>
-          <p:cNvPr id="19" name="Text 17"/>
-          <p:cNvSpPr/>
-          <p:nvPr/>
-        </p:nvSpPr>
-        <p:spPr>
-          <a:xfrm>
-            <a:off x="10098024" y="3511296"/>
-            <a:ext cx="646176" cy="310896"/>
-          </a:xfrm>
-          <a:prstGeom prst="rect">
-            <a:avLst/>
-          </a:prstGeom>
-          <a:noFill/>
-          <a:ln/>
-        </p:spPr>
-        <p:txBody>
-          <a:bodyPr wrap="square" lIns="0" tIns="0" rIns="0" bIns="0" rtlCol="0" anchor="ctr">
-            <a:normAutofit/>
-          </a:bodyPr>
-          <a:lstStyle/>
-          <a:p>
-            <a:pPr algn="ctr" indent="0" marL="0">
-              <a:buNone/>
-            </a:pPr>
-            <a:r>
-              <a:rPr lang="en-US" sz="1500" b="1" dirty="0">
-                <a:solidFill>
-                  <a:srgbClr val="FFFFFF"/>
-                </a:solidFill>
-                <a:latin typeface="Aptos" pitchFamily="34" charset="0"/>
-                <a:ea typeface="Aptos" pitchFamily="34" charset="-122"/>
-                <a:cs typeface="Aptos" pitchFamily="34" charset="-120"/>
-              </a:rPr>
-              <a:t>Review</a:t>
-            </a:r>
-            <a:endParaRPr lang="en-US" sz="1500" dirty="0"/>
-          </a:p>
-        </p:txBody>
-      </p:sp>
-      <p:sp>
-        <p:nvSpPr>
-          <p:cNvPr id="20" name="Shape 18"/>
-          <p:cNvSpPr/>
-          <p:nvPr/>
-        </p:nvSpPr>
-        <p:spPr>
-          <a:xfrm>
-            <a:off x="8293608" y="4389120"/>
-            <a:ext cx="2157984" cy="0"/>
-          </a:xfrm>
-          <a:prstGeom prst="line">
-            <a:avLst/>
-          </a:prstGeom>
-          <a:noFill/>
-          <a:ln w="25400">
-            <a:solidFill>
-              <a:srgbClr val="8ABBD8"/>
-            </a:solidFill>
-            <a:prstDash val="solid"/>
-          </a:ln>
-        </p:spPr>
-      </p:sp>
-      <p:sp>
-        <p:nvSpPr>
-          <p:cNvPr id="21" name="Text 19"/>
-          <p:cNvSpPr/>
-          <p:nvPr/>
-        </p:nvSpPr>
-        <p:spPr>
-          <a:xfrm>
-            <a:off x="7909560" y="3977640"/>
-            <a:ext cx="2926080" cy="182880"/>
-          </a:xfrm>
-          <a:prstGeom prst="rect">
-            <a:avLst/>
-          </a:prstGeom>
-          <a:noFill/>
-          <a:ln/>
-        </p:spPr>
-        <p:txBody>
-          <a:bodyPr wrap="square" lIns="0" tIns="0" rIns="0" bIns="0" rtlCol="0" anchor="ctr"/>
-          <a:lstStyle/>
-          <a:p>
-            <a:pPr algn="ctr" indent="0" marL="0">
-              <a:buNone/>
-            </a:pPr>
-            <a:r>
-              <a:rPr lang="en-US" sz="1000" dirty="0">
-                <a:solidFill>
-                  <a:srgbClr val="003A63"/>
-                </a:solidFill>
-                <a:latin typeface="Aptos" pitchFamily="34" charset="0"/>
-                <a:ea typeface="Aptos" pitchFamily="34" charset="-122"/>
-                <a:cs typeface="Aptos" pitchFamily="34" charset="-120"/>
-              </a:rPr>
-              <a:t>Dependencies visible</a:t>
-            </a:r>
-            <a:endParaRPr lang="en-US" sz="1000" dirty="0"/>
-          </a:p>
-        </p:txBody>
-      </p:sp>
-      <p:sp>
-        <p:nvSpPr>
-          <p:cNvPr id="22" name="Shape 20"/>
           <p:cNvSpPr/>
           <p:nvPr/>
         </p:nvSpPr>
@@ -10162,7 +9221,7 @@
       </p:sp>
       <p:sp>
         <p:nvSpPr>
-          <p:cNvPr id="23" name="Text 21"/>
+          <p:cNvPr id="17" name="Text 15"/>
           <p:cNvSpPr/>
           <p:nvPr/>
         </p:nvSpPr>
@@ -10201,7 +9260,7 @@
       </p:sp>
       <p:sp>
         <p:nvSpPr>
-          <p:cNvPr id="24" name="Text 22"/>
+          <p:cNvPr id="18" name="Text 16"/>
           <p:cNvSpPr/>
           <p:nvPr/>
         </p:nvSpPr>
@@ -10695,13 +9754,11 @@
             </a:avLst>
           </a:prstGeom>
           <a:solidFill>
-            <a:srgbClr val="FFFFFF">
-              <a:alpha val="88000"/>
-            </a:srgbClr>
+            <a:srgbClr val="FFFFFF"/>
           </a:solidFill>
           <a:ln w="12700">
             <a:solidFill>
-              <a:srgbClr val="D6E8F2"/>
+              <a:srgbClr val="B9D7E6"/>
             </a:solidFill>
             <a:prstDash val="solid"/>
           </a:ln>
@@ -10709,30 +9766,42 @@
       </p:sp>
       <p:sp>
         <p:nvSpPr>
-          <p:cNvPr id="14" name="Shape 12"/>
-          <p:cNvSpPr/>
-          <p:nvPr/>
-        </p:nvSpPr>
-        <p:spPr>
-          <a:xfrm>
-            <a:off x="7927848" y="3319272"/>
-            <a:ext cx="792480" cy="749808"/>
-          </a:xfrm>
-          <a:prstGeom prst="roundRect">
-            <a:avLst>
-              <a:gd name="adj" fmla="val 14634"/>
-            </a:avLst>
-          </a:prstGeom>
-          <a:solidFill>
-            <a:srgbClr val="0068B7"/>
-          </a:solidFill>
-          <a:ln w="12700">
-            <a:solidFill>
-              <a:srgbClr val="0068B7"/>
-            </a:solidFill>
-            <a:prstDash val="solid"/>
-          </a:ln>
-        </p:spPr>
+          <p:cNvPr id="14" name="Text 12"/>
+          <p:cNvSpPr/>
+          <p:nvPr/>
+        </p:nvSpPr>
+        <p:spPr>
+          <a:xfrm>
+            <a:off x="7799832" y="2935224"/>
+            <a:ext cx="3145536" cy="256032"/>
+          </a:xfrm>
+          <a:prstGeom prst="rect">
+            <a:avLst/>
+          </a:prstGeom>
+          <a:noFill/>
+          <a:ln/>
+        </p:spPr>
+        <p:txBody>
+          <a:bodyPr wrap="square" lIns="0" tIns="0" rIns="0" bIns="0" rtlCol="0" anchor="ctr"/>
+          <a:lstStyle/>
+          <a:p>
+            <a:pPr indent="0" marL="0">
+              <a:buNone/>
+            </a:pPr>
+            <a:r>
+              <a:rPr lang="en-US" sz="1300" b="1" dirty="0">
+                <a:solidFill>
+                  <a:srgbClr val="0068B7"/>
+                </a:solidFill>
+                <a:latin typeface="Aptos" pitchFamily="34" charset="0"/>
+                <a:ea typeface="Aptos" pitchFamily="34" charset="-122"/>
+                <a:cs typeface="Aptos" pitchFamily="34" charset="-120"/>
+              </a:rPr>
+              <a:t>Concept checkpoints</a:t>
+            </a:r>
+            <a:endParaRPr lang="en-US" sz="1300" dirty="0"/>
+          </a:p>
+        </p:txBody>
       </p:sp>
       <p:sp>
         <p:nvSpPr>
@@ -10742,240 +9811,53 @@
         </p:nvSpPr>
         <p:spPr>
           <a:xfrm>
-            <a:off x="8001000" y="3511296"/>
-            <a:ext cx="646176" cy="310896"/>
-          </a:xfrm>
-          <a:prstGeom prst="rect">
-            <a:avLst/>
-          </a:prstGeom>
-          <a:noFill/>
-          <a:ln/>
-        </p:spPr>
-        <p:txBody>
-          <a:bodyPr wrap="square" lIns="0" tIns="0" rIns="0" bIns="0" rtlCol="0" anchor="ctr">
+            <a:off x="7818120" y="3300984"/>
+            <a:ext cx="3090672" cy="877824"/>
+          </a:xfrm>
+          <a:prstGeom prst="rect">
+            <a:avLst/>
+          </a:prstGeom>
+          <a:noFill/>
+          <a:ln/>
+        </p:spPr>
+        <p:txBody>
+          <a:bodyPr wrap="square" lIns="254" tIns="254" rIns="254" bIns="254" rtlCol="0" anchor="t">
             <a:normAutofit/>
           </a:bodyPr>
           <a:lstStyle/>
           <a:p>
-            <a:pPr algn="ctr" indent="0" marL="0">
-              <a:buNone/>
-            </a:pPr>
-            <a:r>
-              <a:rPr lang="en-US" sz="1500" b="1" dirty="0">
-                <a:solidFill>
-                  <a:srgbClr val="FFFFFF"/>
-                </a:solidFill>
-                <a:latin typeface="Aptos" pitchFamily="34" charset="0"/>
-                <a:ea typeface="Aptos" pitchFamily="34" charset="-122"/>
-                <a:cs typeface="Aptos" pitchFamily="34" charset="-120"/>
-              </a:rPr>
-              <a:t>Plan</a:t>
-            </a:r>
-            <a:endParaRPr lang="en-US" sz="1500" dirty="0"/>
+            <a:r>
+              <a:rPr lang="en-US" sz="1380" dirty="0">
+                <a:solidFill>
+                  <a:srgbClr val="17364A"/>
+                </a:solidFill>
+                <a:latin typeface="Aptos" pitchFamily="34" charset="0"/>
+                <a:ea typeface="Aptos" pitchFamily="34" charset="-122"/>
+                <a:cs typeface="Aptos" pitchFamily="34" charset="-120"/>
+              </a:rPr>
+              <a:t>Write-back approval rules</a:t>
+            </a:r>
+            <a:endParaRPr lang="en-US" sz="1380" dirty="0"/>
+          </a:p>
+          <a:p>
+            <a:r>
+              <a:rPr lang="en-US" sz="1380" dirty="0">
+                <a:solidFill>
+                  <a:srgbClr val="17364A"/>
+                </a:solidFill>
+                <a:latin typeface="Aptos" pitchFamily="34" charset="0"/>
+                <a:ea typeface="Aptos" pitchFamily="34" charset="-122"/>
+                <a:cs typeface="Aptos" pitchFamily="34" charset="-120"/>
+              </a:rPr>
+              <a:t>Audit log requirements</a:t>
+            </a:r>
+            <a:endParaRPr lang="en-US" sz="1380" dirty="0"/>
           </a:p>
         </p:txBody>
       </p:sp>
       <p:sp>
         <p:nvSpPr>
           <p:cNvPr id="16" name="Shape 14"/>
-          <p:cNvSpPr/>
-          <p:nvPr/>
-        </p:nvSpPr>
-        <p:spPr>
-          <a:xfrm>
-            <a:off x="8976360" y="3319272"/>
-            <a:ext cx="792480" cy="749808"/>
-          </a:xfrm>
-          <a:prstGeom prst="roundRect">
-            <a:avLst>
-              <a:gd name="adj" fmla="val 14634"/>
-            </a:avLst>
-          </a:prstGeom>
-          <a:solidFill>
-            <a:srgbClr val="2F8A28"/>
-          </a:solidFill>
-          <a:ln w="12700">
-            <a:solidFill>
-              <a:srgbClr val="2F8A28"/>
-            </a:solidFill>
-            <a:prstDash val="solid"/>
-          </a:ln>
-        </p:spPr>
-      </p:sp>
-      <p:sp>
-        <p:nvSpPr>
-          <p:cNvPr id="17" name="Text 15"/>
-          <p:cNvSpPr/>
-          <p:nvPr/>
-        </p:nvSpPr>
-        <p:spPr>
-          <a:xfrm>
-            <a:off x="9049512" y="3511296"/>
-            <a:ext cx="646176" cy="310896"/>
-          </a:xfrm>
-          <a:prstGeom prst="rect">
-            <a:avLst/>
-          </a:prstGeom>
-          <a:noFill/>
-          <a:ln/>
-        </p:spPr>
-        <p:txBody>
-          <a:bodyPr wrap="square" lIns="0" tIns="0" rIns="0" bIns="0" rtlCol="0" anchor="ctr">
-            <a:normAutofit/>
-          </a:bodyPr>
-          <a:lstStyle/>
-          <a:p>
-            <a:pPr algn="ctr" indent="0" marL="0">
-              <a:buNone/>
-            </a:pPr>
-            <a:r>
-              <a:rPr lang="en-US" sz="1500" b="1" dirty="0">
-                <a:solidFill>
-                  <a:srgbClr val="FFFFFF"/>
-                </a:solidFill>
-                <a:latin typeface="Aptos" pitchFamily="34" charset="0"/>
-                <a:ea typeface="Aptos" pitchFamily="34" charset="-122"/>
-                <a:cs typeface="Aptos" pitchFamily="34" charset="-120"/>
-              </a:rPr>
-              <a:t>Do</a:t>
-            </a:r>
-            <a:endParaRPr lang="en-US" sz="1500" dirty="0"/>
-          </a:p>
-        </p:txBody>
-      </p:sp>
-      <p:sp>
-        <p:nvSpPr>
-          <p:cNvPr id="18" name="Shape 16"/>
-          <p:cNvSpPr/>
-          <p:nvPr/>
-        </p:nvSpPr>
-        <p:spPr>
-          <a:xfrm>
-            <a:off x="10024872" y="3319272"/>
-            <a:ext cx="792480" cy="749808"/>
-          </a:xfrm>
-          <a:prstGeom prst="roundRect">
-            <a:avLst>
-              <a:gd name="adj" fmla="val 14634"/>
-            </a:avLst>
-          </a:prstGeom>
-          <a:solidFill>
-            <a:srgbClr val="D69A2D"/>
-          </a:solidFill>
-          <a:ln w="12700">
-            <a:solidFill>
-              <a:srgbClr val="D69A2D"/>
-            </a:solidFill>
-            <a:prstDash val="solid"/>
-          </a:ln>
-        </p:spPr>
-      </p:sp>
-      <p:sp>
-        <p:nvSpPr>
-          <p:cNvPr id="19" name="Text 17"/>
-          <p:cNvSpPr/>
-          <p:nvPr/>
-        </p:nvSpPr>
-        <p:spPr>
-          <a:xfrm>
-            <a:off x="10098024" y="3511296"/>
-            <a:ext cx="646176" cy="310896"/>
-          </a:xfrm>
-          <a:prstGeom prst="rect">
-            <a:avLst/>
-          </a:prstGeom>
-          <a:noFill/>
-          <a:ln/>
-        </p:spPr>
-        <p:txBody>
-          <a:bodyPr wrap="square" lIns="0" tIns="0" rIns="0" bIns="0" rtlCol="0" anchor="ctr">
-            <a:normAutofit/>
-          </a:bodyPr>
-          <a:lstStyle/>
-          <a:p>
-            <a:pPr algn="ctr" indent="0" marL="0">
-              <a:buNone/>
-            </a:pPr>
-            <a:r>
-              <a:rPr lang="en-US" sz="1500" b="1" dirty="0">
-                <a:solidFill>
-                  <a:srgbClr val="FFFFFF"/>
-                </a:solidFill>
-                <a:latin typeface="Aptos" pitchFamily="34" charset="0"/>
-                <a:ea typeface="Aptos" pitchFamily="34" charset="-122"/>
-                <a:cs typeface="Aptos" pitchFamily="34" charset="-120"/>
-              </a:rPr>
-              <a:t>Review</a:t>
-            </a:r>
-            <a:endParaRPr lang="en-US" sz="1500" dirty="0"/>
-          </a:p>
-        </p:txBody>
-      </p:sp>
-      <p:sp>
-        <p:nvSpPr>
-          <p:cNvPr id="20" name="Shape 18"/>
-          <p:cNvSpPr/>
-          <p:nvPr/>
-        </p:nvSpPr>
-        <p:spPr>
-          <a:xfrm>
-            <a:off x="8293608" y="4389120"/>
-            <a:ext cx="2157984" cy="0"/>
-          </a:xfrm>
-          <a:prstGeom prst="line">
-            <a:avLst/>
-          </a:prstGeom>
-          <a:noFill/>
-          <a:ln w="25400">
-            <a:solidFill>
-              <a:srgbClr val="8ABBD8"/>
-            </a:solidFill>
-            <a:prstDash val="solid"/>
-          </a:ln>
-        </p:spPr>
-      </p:sp>
-      <p:sp>
-        <p:nvSpPr>
-          <p:cNvPr id="21" name="Text 19"/>
-          <p:cNvSpPr/>
-          <p:nvPr/>
-        </p:nvSpPr>
-        <p:spPr>
-          <a:xfrm>
-            <a:off x="7909560" y="3977640"/>
-            <a:ext cx="2926080" cy="182880"/>
-          </a:xfrm>
-          <a:prstGeom prst="rect">
-            <a:avLst/>
-          </a:prstGeom>
-          <a:noFill/>
-          <a:ln/>
-        </p:spPr>
-        <p:txBody>
-          <a:bodyPr wrap="square" lIns="0" tIns="0" rIns="0" bIns="0" rtlCol="0" anchor="ctr"/>
-          <a:lstStyle/>
-          <a:p>
-            <a:pPr algn="ctr" indent="0" marL="0">
-              <a:buNone/>
-            </a:pPr>
-            <a:r>
-              <a:rPr lang="en-US" sz="1000" dirty="0">
-                <a:solidFill>
-                  <a:srgbClr val="003A63"/>
-                </a:solidFill>
-                <a:latin typeface="Aptos" pitchFamily="34" charset="0"/>
-                <a:ea typeface="Aptos" pitchFamily="34" charset="-122"/>
-                <a:cs typeface="Aptos" pitchFamily="34" charset="-120"/>
-              </a:rPr>
-              <a:t>Dependencies visible</a:t>
-            </a:r>
-            <a:endParaRPr lang="en-US" sz="1000" dirty="0"/>
-          </a:p>
-        </p:txBody>
-      </p:sp>
-      <p:sp>
-        <p:nvSpPr>
-          <p:cNvPr id="22" name="Shape 20"/>
           <p:cNvSpPr/>
           <p:nvPr/>
         </p:nvSpPr>
@@ -11002,7 +9884,7 @@
       </p:sp>
       <p:sp>
         <p:nvSpPr>
-          <p:cNvPr id="23" name="Text 21"/>
+          <p:cNvPr id="17" name="Text 15"/>
           <p:cNvSpPr/>
           <p:nvPr/>
         </p:nvSpPr>
@@ -11041,7 +9923,7 @@
       </p:sp>
       <p:sp>
         <p:nvSpPr>
-          <p:cNvPr id="24" name="Text 22"/>
+          <p:cNvPr id="18" name="Text 16"/>
           <p:cNvSpPr/>
           <p:nvPr/>
         </p:nvSpPr>
@@ -11574,20 +10456,20 @@
         </p:nvSpPr>
         <p:spPr>
           <a:xfrm>
-            <a:off x="7635240" y="3730752"/>
-            <a:ext cx="1033272" cy="749808"/>
+            <a:off x="7909560" y="3675888"/>
+            <a:ext cx="3154680" cy="1691640"/>
           </a:xfrm>
           <a:prstGeom prst="roundRect">
             <a:avLst>
-              <a:gd name="adj" fmla="val 14634"/>
+              <a:gd name="adj" fmla="val 6486"/>
             </a:avLst>
           </a:prstGeom>
           <a:solidFill>
-            <a:srgbClr val="0068B7"/>
+            <a:srgbClr val="FFFFFF"/>
           </a:solidFill>
           <a:ln w="12700">
             <a:solidFill>
-              <a:srgbClr val="0068B7"/>
+              <a:srgbClr val="B9D7E6"/>
             </a:solidFill>
             <a:prstDash val="solid"/>
           </a:ln>
@@ -11601,172 +10483,100 @@
         </p:nvSpPr>
         <p:spPr>
           <a:xfrm>
-            <a:off x="7708392" y="3922776"/>
-            <a:ext cx="886968" cy="310896"/>
-          </a:xfrm>
-          <a:prstGeom prst="rect">
-            <a:avLst/>
-          </a:prstGeom>
-          <a:noFill/>
-          <a:ln/>
-        </p:spPr>
-        <p:txBody>
-          <a:bodyPr wrap="square" lIns="0" tIns="0" rIns="0" bIns="0" rtlCol="0" anchor="ctr">
+            <a:off x="8074152" y="3822192"/>
+            <a:ext cx="2825496" cy="256032"/>
+          </a:xfrm>
+          <a:prstGeom prst="rect">
+            <a:avLst/>
+          </a:prstGeom>
+          <a:noFill/>
+          <a:ln/>
+        </p:spPr>
+        <p:txBody>
+          <a:bodyPr wrap="square" lIns="0" tIns="0" rIns="0" bIns="0" rtlCol="0" anchor="ctr"/>
+          <a:lstStyle/>
+          <a:p>
+            <a:pPr indent="0" marL="0">
+              <a:buNone/>
+            </a:pPr>
+            <a:r>
+              <a:rPr lang="en-US" sz="1300" b="1" dirty="0">
+                <a:solidFill>
+                  <a:srgbClr val="0068B7"/>
+                </a:solidFill>
+                <a:latin typeface="Aptos" pitchFamily="34" charset="0"/>
+                <a:ea typeface="Aptos" pitchFamily="34" charset="-122"/>
+                <a:cs typeface="Aptos" pitchFamily="34" charset="-120"/>
+              </a:rPr>
+              <a:t>Learning sequence</a:t>
+            </a:r>
+            <a:endParaRPr lang="en-US" sz="1300" dirty="0"/>
+          </a:p>
+        </p:txBody>
+      </p:sp>
+      <p:sp>
+        <p:nvSpPr>
+          <p:cNvPr id="15" name="Text 13"/>
+          <p:cNvSpPr/>
+          <p:nvPr/>
+        </p:nvSpPr>
+        <p:spPr>
+          <a:xfrm>
+            <a:off x="8092440" y="4187952"/>
+            <a:ext cx="2770632" cy="1033272"/>
+          </a:xfrm>
+          <a:prstGeom prst="rect">
+            <a:avLst/>
+          </a:prstGeom>
+          <a:noFill/>
+          <a:ln/>
+        </p:spPr>
+        <p:txBody>
+          <a:bodyPr wrap="square" lIns="254" tIns="254" rIns="254" bIns="254" rtlCol="0" anchor="t">
             <a:normAutofit/>
           </a:bodyPr>
           <a:lstStyle/>
           <a:p>
-            <a:pPr algn="ctr" indent="0" marL="0">
-              <a:buNone/>
-            </a:pPr>
-            <a:r>
-              <a:rPr lang="en-US" sz="1500" b="1" dirty="0">
-                <a:solidFill>
-                  <a:srgbClr val="FFFFFF"/>
-                </a:solidFill>
-                <a:latin typeface="Aptos" pitchFamily="34" charset="0"/>
-                <a:ea typeface="Aptos" pitchFamily="34" charset="-122"/>
-                <a:cs typeface="Aptos" pitchFamily="34" charset="-120"/>
-              </a:rPr>
-              <a:t>Learn</a:t>
-            </a:r>
-            <a:endParaRPr lang="en-US" sz="1500" dirty="0"/>
-          </a:p>
-        </p:txBody>
-      </p:sp>
-      <p:sp>
-        <p:nvSpPr>
-          <p:cNvPr id="15" name="Shape 13"/>
-          <p:cNvSpPr/>
-          <p:nvPr/>
-        </p:nvSpPr>
-        <p:spPr>
-          <a:xfrm>
-            <a:off x="8924544" y="3730752"/>
-            <a:ext cx="1033272" cy="749808"/>
-          </a:xfrm>
-          <a:prstGeom prst="roundRect">
-            <a:avLst>
-              <a:gd name="adj" fmla="val 14634"/>
-            </a:avLst>
-          </a:prstGeom>
-          <a:solidFill>
-            <a:srgbClr val="2F8A28"/>
-          </a:solidFill>
-          <a:ln w="12700">
-            <a:solidFill>
-              <a:srgbClr val="2F8A28"/>
-            </a:solidFill>
-            <a:prstDash val="solid"/>
-          </a:ln>
-        </p:spPr>
-      </p:sp>
-      <p:sp>
-        <p:nvSpPr>
-          <p:cNvPr id="16" name="Text 14"/>
-          <p:cNvSpPr/>
-          <p:nvPr/>
-        </p:nvSpPr>
-        <p:spPr>
-          <a:xfrm>
-            <a:off x="8997696" y="3922776"/>
-            <a:ext cx="886968" cy="310896"/>
-          </a:xfrm>
-          <a:prstGeom prst="rect">
-            <a:avLst/>
-          </a:prstGeom>
-          <a:noFill/>
-          <a:ln/>
-        </p:spPr>
-        <p:txBody>
-          <a:bodyPr wrap="square" lIns="0" tIns="0" rIns="0" bIns="0" rtlCol="0" anchor="ctr">
-            <a:normAutofit/>
-          </a:bodyPr>
-          <a:lstStyle/>
-          <a:p>
-            <a:pPr algn="ctr" indent="0" marL="0">
-              <a:buNone/>
-            </a:pPr>
-            <a:r>
-              <a:rPr lang="en-US" sz="1500" b="1" dirty="0">
-                <a:solidFill>
-                  <a:srgbClr val="FFFFFF"/>
-                </a:solidFill>
-                <a:latin typeface="Aptos" pitchFamily="34" charset="0"/>
-                <a:ea typeface="Aptos" pitchFamily="34" charset="-122"/>
-                <a:cs typeface="Aptos" pitchFamily="34" charset="-120"/>
-              </a:rPr>
-              <a:t>Apply</a:t>
-            </a:r>
-            <a:endParaRPr lang="en-US" sz="1500" dirty="0"/>
-          </a:p>
-        </p:txBody>
-      </p:sp>
-      <p:sp>
-        <p:nvSpPr>
-          <p:cNvPr id="17" name="Shape 15"/>
-          <p:cNvSpPr/>
-          <p:nvPr/>
-        </p:nvSpPr>
-        <p:spPr>
-          <a:xfrm>
-            <a:off x="10213848" y="3730752"/>
-            <a:ext cx="1033272" cy="749808"/>
-          </a:xfrm>
-          <a:prstGeom prst="roundRect">
-            <a:avLst>
-              <a:gd name="adj" fmla="val 14634"/>
-            </a:avLst>
-          </a:prstGeom>
-          <a:solidFill>
-            <a:srgbClr val="6A4CA3"/>
-          </a:solidFill>
-          <a:ln w="12700">
-            <a:solidFill>
-              <a:srgbClr val="6A4CA3"/>
-            </a:solidFill>
-            <a:prstDash val="solid"/>
-          </a:ln>
-        </p:spPr>
-      </p:sp>
-      <p:sp>
-        <p:nvSpPr>
-          <p:cNvPr id="18" name="Text 16"/>
-          <p:cNvSpPr/>
-          <p:nvPr/>
-        </p:nvSpPr>
-        <p:spPr>
-          <a:xfrm>
-            <a:off x="10287000" y="3922776"/>
-            <a:ext cx="886968" cy="310896"/>
-          </a:xfrm>
-          <a:prstGeom prst="rect">
-            <a:avLst/>
-          </a:prstGeom>
-          <a:noFill/>
-          <a:ln/>
-        </p:spPr>
-        <p:txBody>
-          <a:bodyPr wrap="square" lIns="0" tIns="0" rIns="0" bIns="0" rtlCol="0" anchor="ctr">
-            <a:normAutofit/>
-          </a:bodyPr>
-          <a:lstStyle/>
-          <a:p>
-            <a:pPr algn="ctr" indent="0" marL="0">
-              <a:buNone/>
-            </a:pPr>
-            <a:r>
-              <a:rPr lang="en-US" sz="1500" b="1" dirty="0">
-                <a:solidFill>
-                  <a:srgbClr val="FFFFFF"/>
-                </a:solidFill>
-                <a:latin typeface="Aptos" pitchFamily="34" charset="0"/>
-                <a:ea typeface="Aptos" pitchFamily="34" charset="-122"/>
-                <a:cs typeface="Aptos" pitchFamily="34" charset="-120"/>
-              </a:rPr>
-              <a:t>Document</a:t>
-            </a:r>
-            <a:endParaRPr lang="en-US" sz="1500" dirty="0"/>
+            <a:r>
+              <a:rPr lang="en-US" sz="1380" dirty="0">
+                <a:solidFill>
+                  <a:srgbClr val="17364A"/>
+                </a:solidFill>
+                <a:latin typeface="Aptos" pitchFamily="34" charset="0"/>
+                <a:ea typeface="Aptos" pitchFamily="34" charset="-122"/>
+                <a:cs typeface="Aptos" pitchFamily="34" charset="-120"/>
+              </a:rPr>
+              <a:t>Read the module for shared vocabulary and context.</a:t>
+            </a:r>
+            <a:endParaRPr lang="en-US" sz="1380" dirty="0"/>
+          </a:p>
+          <a:p>
+            <a:r>
+              <a:rPr lang="en-US" sz="1380" dirty="0">
+                <a:solidFill>
+                  <a:srgbClr val="17364A"/>
+                </a:solidFill>
+                <a:latin typeface="Aptos" pitchFamily="34" charset="0"/>
+                <a:ea typeface="Aptos" pitchFamily="34" charset="-122"/>
+                <a:cs typeface="Aptos" pitchFamily="34" charset="-120"/>
+              </a:rPr>
+              <a:t>Complete the practical exercise to apply the concept.</a:t>
+            </a:r>
+            <a:endParaRPr lang="en-US" sz="1380" dirty="0"/>
+          </a:p>
+          <a:p>
+            <a:r>
+              <a:rPr lang="en-US" sz="1380" dirty="0">
+                <a:solidFill>
+                  <a:srgbClr val="17364A"/>
+                </a:solidFill>
+                <a:latin typeface="Aptos" pitchFamily="34" charset="0"/>
+                <a:ea typeface="Aptos" pitchFamily="34" charset="-122"/>
+                <a:cs typeface="Aptos" pitchFamily="34" charset="-120"/>
+              </a:rPr>
+              <a:t>Use the notes and references for deeper review.</a:t>
+            </a:r>
+            <a:endParaRPr lang="en-US" sz="1380" dirty="0"/>
           </a:p>
         </p:txBody>
       </p:sp>
@@ -12239,13 +11049,11 @@
             </a:avLst>
           </a:prstGeom>
           <a:solidFill>
-            <a:srgbClr val="FFFFFF">
-              <a:alpha val="88000"/>
-            </a:srgbClr>
+            <a:srgbClr val="FFFFFF"/>
           </a:solidFill>
           <a:ln w="12700">
             <a:solidFill>
-              <a:srgbClr val="D6E8F2"/>
+              <a:srgbClr val="B9D7E6"/>
             </a:solidFill>
             <a:prstDash val="solid"/>
           </a:ln>
@@ -12253,30 +11061,42 @@
       </p:sp>
       <p:sp>
         <p:nvSpPr>
-          <p:cNvPr id="14" name="Shape 12"/>
-          <p:cNvSpPr/>
-          <p:nvPr/>
-        </p:nvSpPr>
-        <p:spPr>
-          <a:xfrm>
-            <a:off x="7927848" y="3319272"/>
-            <a:ext cx="792480" cy="749808"/>
-          </a:xfrm>
-          <a:prstGeom prst="roundRect">
-            <a:avLst>
-              <a:gd name="adj" fmla="val 14634"/>
-            </a:avLst>
-          </a:prstGeom>
-          <a:solidFill>
-            <a:srgbClr val="0068B7"/>
-          </a:solidFill>
-          <a:ln w="12700">
-            <a:solidFill>
-              <a:srgbClr val="0068B7"/>
-            </a:solidFill>
-            <a:prstDash val="solid"/>
-          </a:ln>
-        </p:spPr>
+          <p:cNvPr id="14" name="Text 12"/>
+          <p:cNvSpPr/>
+          <p:nvPr/>
+        </p:nvSpPr>
+        <p:spPr>
+          <a:xfrm>
+            <a:off x="7799832" y="2935224"/>
+            <a:ext cx="3145536" cy="256032"/>
+          </a:xfrm>
+          <a:prstGeom prst="rect">
+            <a:avLst/>
+          </a:prstGeom>
+          <a:noFill/>
+          <a:ln/>
+        </p:spPr>
+        <p:txBody>
+          <a:bodyPr wrap="square" lIns="0" tIns="0" rIns="0" bIns="0" rtlCol="0" anchor="ctr"/>
+          <a:lstStyle/>
+          <a:p>
+            <a:pPr indent="0" marL="0">
+              <a:buNone/>
+            </a:pPr>
+            <a:r>
+              <a:rPr lang="en-US" sz="1300" b="1" dirty="0">
+                <a:solidFill>
+                  <a:srgbClr val="0068B7"/>
+                </a:solidFill>
+                <a:latin typeface="Aptos" pitchFamily="34" charset="0"/>
+                <a:ea typeface="Aptos" pitchFamily="34" charset="-122"/>
+                <a:cs typeface="Aptos" pitchFamily="34" charset="-120"/>
+              </a:rPr>
+              <a:t>Concept checkpoints</a:t>
+            </a:r>
+            <a:endParaRPr lang="en-US" sz="1300" dirty="0"/>
+          </a:p>
+        </p:txBody>
       </p:sp>
       <p:sp>
         <p:nvSpPr>
@@ -12286,240 +11106,53 @@
         </p:nvSpPr>
         <p:spPr>
           <a:xfrm>
-            <a:off x="8001000" y="3511296"/>
-            <a:ext cx="646176" cy="310896"/>
-          </a:xfrm>
-          <a:prstGeom prst="rect">
-            <a:avLst/>
-          </a:prstGeom>
-          <a:noFill/>
-          <a:ln/>
-        </p:spPr>
-        <p:txBody>
-          <a:bodyPr wrap="square" lIns="0" tIns="0" rIns="0" bIns="0" rtlCol="0" anchor="ctr">
+            <a:off x="7818120" y="3300984"/>
+            <a:ext cx="3090672" cy="877824"/>
+          </a:xfrm>
+          <a:prstGeom prst="rect">
+            <a:avLst/>
+          </a:prstGeom>
+          <a:noFill/>
+          <a:ln/>
+        </p:spPr>
+        <p:txBody>
+          <a:bodyPr wrap="square" lIns="254" tIns="254" rIns="254" bIns="254" rtlCol="0" anchor="t">
             <a:normAutofit/>
           </a:bodyPr>
           <a:lstStyle/>
           <a:p>
-            <a:pPr algn="ctr" indent="0" marL="0">
-              <a:buNone/>
-            </a:pPr>
-            <a:r>
-              <a:rPr lang="en-US" sz="1500" b="1" dirty="0">
-                <a:solidFill>
-                  <a:srgbClr val="FFFFFF"/>
-                </a:solidFill>
-                <a:latin typeface="Aptos" pitchFamily="34" charset="0"/>
-                <a:ea typeface="Aptos" pitchFamily="34" charset="-122"/>
-                <a:cs typeface="Aptos" pitchFamily="34" charset="-120"/>
-              </a:rPr>
-              <a:t>Plan</a:t>
-            </a:r>
-            <a:endParaRPr lang="en-US" sz="1500" dirty="0"/>
+            <a:r>
+              <a:rPr lang="en-US" sz="1380" dirty="0">
+                <a:solidFill>
+                  <a:srgbClr val="17364A"/>
+                </a:solidFill>
+                <a:latin typeface="Aptos" pitchFamily="34" charset="0"/>
+                <a:ea typeface="Aptos" pitchFamily="34" charset="-122"/>
+                <a:cs typeface="Aptos" pitchFamily="34" charset="-120"/>
+              </a:rPr>
+              <a:t>Write-back approval rules</a:t>
+            </a:r>
+            <a:endParaRPr lang="en-US" sz="1380" dirty="0"/>
+          </a:p>
+          <a:p>
+            <a:r>
+              <a:rPr lang="en-US" sz="1380" dirty="0">
+                <a:solidFill>
+                  <a:srgbClr val="17364A"/>
+                </a:solidFill>
+                <a:latin typeface="Aptos" pitchFamily="34" charset="0"/>
+                <a:ea typeface="Aptos" pitchFamily="34" charset="-122"/>
+                <a:cs typeface="Aptos" pitchFamily="34" charset="-120"/>
+              </a:rPr>
+              <a:t>Audit log requirements</a:t>
+            </a:r>
+            <a:endParaRPr lang="en-US" sz="1380" dirty="0"/>
           </a:p>
         </p:txBody>
       </p:sp>
       <p:sp>
         <p:nvSpPr>
           <p:cNvPr id="16" name="Shape 14"/>
-          <p:cNvSpPr/>
-          <p:nvPr/>
-        </p:nvSpPr>
-        <p:spPr>
-          <a:xfrm>
-            <a:off x="8976360" y="3319272"/>
-            <a:ext cx="792480" cy="749808"/>
-          </a:xfrm>
-          <a:prstGeom prst="roundRect">
-            <a:avLst>
-              <a:gd name="adj" fmla="val 14634"/>
-            </a:avLst>
-          </a:prstGeom>
-          <a:solidFill>
-            <a:srgbClr val="2F8A28"/>
-          </a:solidFill>
-          <a:ln w="12700">
-            <a:solidFill>
-              <a:srgbClr val="2F8A28"/>
-            </a:solidFill>
-            <a:prstDash val="solid"/>
-          </a:ln>
-        </p:spPr>
-      </p:sp>
-      <p:sp>
-        <p:nvSpPr>
-          <p:cNvPr id="17" name="Text 15"/>
-          <p:cNvSpPr/>
-          <p:nvPr/>
-        </p:nvSpPr>
-        <p:spPr>
-          <a:xfrm>
-            <a:off x="9049512" y="3511296"/>
-            <a:ext cx="646176" cy="310896"/>
-          </a:xfrm>
-          <a:prstGeom prst="rect">
-            <a:avLst/>
-          </a:prstGeom>
-          <a:noFill/>
-          <a:ln/>
-        </p:spPr>
-        <p:txBody>
-          <a:bodyPr wrap="square" lIns="0" tIns="0" rIns="0" bIns="0" rtlCol="0" anchor="ctr">
-            <a:normAutofit/>
-          </a:bodyPr>
-          <a:lstStyle/>
-          <a:p>
-            <a:pPr algn="ctr" indent="0" marL="0">
-              <a:buNone/>
-            </a:pPr>
-            <a:r>
-              <a:rPr lang="en-US" sz="1500" b="1" dirty="0">
-                <a:solidFill>
-                  <a:srgbClr val="FFFFFF"/>
-                </a:solidFill>
-                <a:latin typeface="Aptos" pitchFamily="34" charset="0"/>
-                <a:ea typeface="Aptos" pitchFamily="34" charset="-122"/>
-                <a:cs typeface="Aptos" pitchFamily="34" charset="-120"/>
-              </a:rPr>
-              <a:t>Do</a:t>
-            </a:r>
-            <a:endParaRPr lang="en-US" sz="1500" dirty="0"/>
-          </a:p>
-        </p:txBody>
-      </p:sp>
-      <p:sp>
-        <p:nvSpPr>
-          <p:cNvPr id="18" name="Shape 16"/>
-          <p:cNvSpPr/>
-          <p:nvPr/>
-        </p:nvSpPr>
-        <p:spPr>
-          <a:xfrm>
-            <a:off x="10024872" y="3319272"/>
-            <a:ext cx="792480" cy="749808"/>
-          </a:xfrm>
-          <a:prstGeom prst="roundRect">
-            <a:avLst>
-              <a:gd name="adj" fmla="val 14634"/>
-            </a:avLst>
-          </a:prstGeom>
-          <a:solidFill>
-            <a:srgbClr val="D69A2D"/>
-          </a:solidFill>
-          <a:ln w="12700">
-            <a:solidFill>
-              <a:srgbClr val="D69A2D"/>
-            </a:solidFill>
-            <a:prstDash val="solid"/>
-          </a:ln>
-        </p:spPr>
-      </p:sp>
-      <p:sp>
-        <p:nvSpPr>
-          <p:cNvPr id="19" name="Text 17"/>
-          <p:cNvSpPr/>
-          <p:nvPr/>
-        </p:nvSpPr>
-        <p:spPr>
-          <a:xfrm>
-            <a:off x="10098024" y="3511296"/>
-            <a:ext cx="646176" cy="310896"/>
-          </a:xfrm>
-          <a:prstGeom prst="rect">
-            <a:avLst/>
-          </a:prstGeom>
-          <a:noFill/>
-          <a:ln/>
-        </p:spPr>
-        <p:txBody>
-          <a:bodyPr wrap="square" lIns="0" tIns="0" rIns="0" bIns="0" rtlCol="0" anchor="ctr">
-            <a:normAutofit/>
-          </a:bodyPr>
-          <a:lstStyle/>
-          <a:p>
-            <a:pPr algn="ctr" indent="0" marL="0">
-              <a:buNone/>
-            </a:pPr>
-            <a:r>
-              <a:rPr lang="en-US" sz="1500" b="1" dirty="0">
-                <a:solidFill>
-                  <a:srgbClr val="FFFFFF"/>
-                </a:solidFill>
-                <a:latin typeface="Aptos" pitchFamily="34" charset="0"/>
-                <a:ea typeface="Aptos" pitchFamily="34" charset="-122"/>
-                <a:cs typeface="Aptos" pitchFamily="34" charset="-120"/>
-              </a:rPr>
-              <a:t>Review</a:t>
-            </a:r>
-            <a:endParaRPr lang="en-US" sz="1500" dirty="0"/>
-          </a:p>
-        </p:txBody>
-      </p:sp>
-      <p:sp>
-        <p:nvSpPr>
-          <p:cNvPr id="20" name="Shape 18"/>
-          <p:cNvSpPr/>
-          <p:nvPr/>
-        </p:nvSpPr>
-        <p:spPr>
-          <a:xfrm>
-            <a:off x="8293608" y="4389120"/>
-            <a:ext cx="2157984" cy="0"/>
-          </a:xfrm>
-          <a:prstGeom prst="line">
-            <a:avLst/>
-          </a:prstGeom>
-          <a:noFill/>
-          <a:ln w="25400">
-            <a:solidFill>
-              <a:srgbClr val="8ABBD8"/>
-            </a:solidFill>
-            <a:prstDash val="solid"/>
-          </a:ln>
-        </p:spPr>
-      </p:sp>
-      <p:sp>
-        <p:nvSpPr>
-          <p:cNvPr id="21" name="Text 19"/>
-          <p:cNvSpPr/>
-          <p:nvPr/>
-        </p:nvSpPr>
-        <p:spPr>
-          <a:xfrm>
-            <a:off x="7909560" y="3977640"/>
-            <a:ext cx="2926080" cy="182880"/>
-          </a:xfrm>
-          <a:prstGeom prst="rect">
-            <a:avLst/>
-          </a:prstGeom>
-          <a:noFill/>
-          <a:ln/>
-        </p:spPr>
-        <p:txBody>
-          <a:bodyPr wrap="square" lIns="0" tIns="0" rIns="0" bIns="0" rtlCol="0" anchor="ctr"/>
-          <a:lstStyle/>
-          <a:p>
-            <a:pPr algn="ctr" indent="0" marL="0">
-              <a:buNone/>
-            </a:pPr>
-            <a:r>
-              <a:rPr lang="en-US" sz="1000" dirty="0">
-                <a:solidFill>
-                  <a:srgbClr val="003A63"/>
-                </a:solidFill>
-                <a:latin typeface="Aptos" pitchFamily="34" charset="0"/>
-                <a:ea typeface="Aptos" pitchFamily="34" charset="-122"/>
-                <a:cs typeface="Aptos" pitchFamily="34" charset="-120"/>
-              </a:rPr>
-              <a:t>Dependencies visible</a:t>
-            </a:r>
-            <a:endParaRPr lang="en-US" sz="1000" dirty="0"/>
-          </a:p>
-        </p:txBody>
-      </p:sp>
-      <p:sp>
-        <p:nvSpPr>
-          <p:cNvPr id="22" name="Shape 20"/>
           <p:cNvSpPr/>
           <p:nvPr/>
         </p:nvSpPr>
@@ -12546,7 +11179,7 @@
       </p:sp>
       <p:sp>
         <p:nvSpPr>
-          <p:cNvPr id="23" name="Text 21"/>
+          <p:cNvPr id="17" name="Text 15"/>
           <p:cNvSpPr/>
           <p:nvPr/>
         </p:nvSpPr>
@@ -12585,7 +11218,7 @@
       </p:sp>
       <p:sp>
         <p:nvSpPr>
-          <p:cNvPr id="24" name="Text 22"/>
+          <p:cNvPr id="18" name="Text 16"/>
           <p:cNvSpPr/>
           <p:nvPr/>
         </p:nvSpPr>
@@ -13093,13 +11726,11 @@
             </a:avLst>
           </a:prstGeom>
           <a:solidFill>
-            <a:srgbClr val="FFFFFF">
-              <a:alpha val="88000"/>
-            </a:srgbClr>
+            <a:srgbClr val="FFFFFF"/>
           </a:solidFill>
           <a:ln w="12700">
             <a:solidFill>
-              <a:srgbClr val="D6E8F2"/>
+              <a:srgbClr val="B9D7E6"/>
             </a:solidFill>
             <a:prstDash val="solid"/>
           </a:ln>
@@ -13107,30 +11738,42 @@
       </p:sp>
       <p:sp>
         <p:nvSpPr>
-          <p:cNvPr id="14" name="Shape 12"/>
-          <p:cNvSpPr/>
-          <p:nvPr/>
-        </p:nvSpPr>
-        <p:spPr>
-          <a:xfrm>
-            <a:off x="7927848" y="3319272"/>
-            <a:ext cx="792480" cy="749808"/>
-          </a:xfrm>
-          <a:prstGeom prst="roundRect">
-            <a:avLst>
-              <a:gd name="adj" fmla="val 14634"/>
-            </a:avLst>
-          </a:prstGeom>
-          <a:solidFill>
-            <a:srgbClr val="0068B7"/>
-          </a:solidFill>
-          <a:ln w="12700">
-            <a:solidFill>
-              <a:srgbClr val="0068B7"/>
-            </a:solidFill>
-            <a:prstDash val="solid"/>
-          </a:ln>
-        </p:spPr>
+          <p:cNvPr id="14" name="Text 12"/>
+          <p:cNvSpPr/>
+          <p:nvPr/>
+        </p:nvSpPr>
+        <p:spPr>
+          <a:xfrm>
+            <a:off x="7799832" y="2935224"/>
+            <a:ext cx="3145536" cy="256032"/>
+          </a:xfrm>
+          <a:prstGeom prst="rect">
+            <a:avLst/>
+          </a:prstGeom>
+          <a:noFill/>
+          <a:ln/>
+        </p:spPr>
+        <p:txBody>
+          <a:bodyPr wrap="square" lIns="0" tIns="0" rIns="0" bIns="0" rtlCol="0" anchor="ctr"/>
+          <a:lstStyle/>
+          <a:p>
+            <a:pPr indent="0" marL="0">
+              <a:buNone/>
+            </a:pPr>
+            <a:r>
+              <a:rPr lang="en-US" sz="1300" b="1" dirty="0">
+                <a:solidFill>
+                  <a:srgbClr val="0068B7"/>
+                </a:solidFill>
+                <a:latin typeface="Aptos" pitchFamily="34" charset="0"/>
+                <a:ea typeface="Aptos" pitchFamily="34" charset="-122"/>
+                <a:cs typeface="Aptos" pitchFamily="34" charset="-120"/>
+              </a:rPr>
+              <a:t>Concept checkpoints</a:t>
+            </a:r>
+            <a:endParaRPr lang="en-US" sz="1300" dirty="0"/>
+          </a:p>
+        </p:txBody>
       </p:sp>
       <p:sp>
         <p:nvSpPr>
@@ -13140,240 +11783,67 @@
         </p:nvSpPr>
         <p:spPr>
           <a:xfrm>
-            <a:off x="8001000" y="3511296"/>
-            <a:ext cx="646176" cy="310896"/>
-          </a:xfrm>
-          <a:prstGeom prst="rect">
-            <a:avLst/>
-          </a:prstGeom>
-          <a:noFill/>
-          <a:ln/>
-        </p:spPr>
-        <p:txBody>
-          <a:bodyPr wrap="square" lIns="0" tIns="0" rIns="0" bIns="0" rtlCol="0" anchor="ctr">
+            <a:off x="7818120" y="3300984"/>
+            <a:ext cx="3090672" cy="877824"/>
+          </a:xfrm>
+          <a:prstGeom prst="rect">
+            <a:avLst/>
+          </a:prstGeom>
+          <a:noFill/>
+          <a:ln/>
+        </p:spPr>
+        <p:txBody>
+          <a:bodyPr wrap="square" lIns="254" tIns="254" rIns="254" bIns="254" rtlCol="0" anchor="t">
             <a:normAutofit/>
           </a:bodyPr>
           <a:lstStyle/>
           <a:p>
-            <a:pPr algn="ctr" indent="0" marL="0">
-              <a:buNone/>
-            </a:pPr>
-            <a:r>
-              <a:rPr lang="en-US" sz="1500" b="1" dirty="0">
-                <a:solidFill>
-                  <a:srgbClr val="FFFFFF"/>
-                </a:solidFill>
-                <a:latin typeface="Aptos" pitchFamily="34" charset="0"/>
-                <a:ea typeface="Aptos" pitchFamily="34" charset="-122"/>
-                <a:cs typeface="Aptos" pitchFamily="34" charset="-120"/>
-              </a:rPr>
-              <a:t>Plan</a:t>
-            </a:r>
-            <a:endParaRPr lang="en-US" sz="1500" dirty="0"/>
+            <a:r>
+              <a:rPr lang="en-US" sz="1380" dirty="0">
+                <a:solidFill>
+                  <a:srgbClr val="17364A"/>
+                </a:solidFill>
+                <a:latin typeface="Aptos" pitchFamily="34" charset="0"/>
+                <a:ea typeface="Aptos" pitchFamily="34" charset="-122"/>
+                <a:cs typeface="Aptos" pitchFamily="34" charset="-120"/>
+              </a:rPr>
+              <a:t>1.</a:t>
+            </a:r>
+            <a:endParaRPr lang="en-US" sz="1380" dirty="0"/>
+          </a:p>
+          <a:p>
+            <a:r>
+              <a:rPr lang="en-US" sz="1380" dirty="0">
+                <a:solidFill>
+                  <a:srgbClr val="17364A"/>
+                </a:solidFill>
+                <a:latin typeface="Aptos" pitchFamily="34" charset="0"/>
+                <a:ea typeface="Aptos" pitchFamily="34" charset="-122"/>
+                <a:cs typeface="Aptos" pitchFamily="34" charset="-120"/>
+              </a:rPr>
+              <a:t>What is authorization?</a:t>
+            </a:r>
+            <a:endParaRPr lang="en-US" sz="1380" dirty="0"/>
+          </a:p>
+          <a:p>
+            <a:r>
+              <a:rPr lang="en-US" sz="1380" dirty="0">
+                <a:solidFill>
+                  <a:srgbClr val="17364A"/>
+                </a:solidFill>
+                <a:latin typeface="Aptos" pitchFamily="34" charset="0"/>
+                <a:ea typeface="Aptos" pitchFamily="34" charset="-122"/>
+                <a:cs typeface="Aptos" pitchFamily="34" charset="-120"/>
+              </a:rPr>
+              <a:t>2.</a:t>
+            </a:r>
+            <a:endParaRPr lang="en-US" sz="1380" dirty="0"/>
           </a:p>
         </p:txBody>
       </p:sp>
       <p:sp>
         <p:nvSpPr>
           <p:cNvPr id="16" name="Shape 14"/>
-          <p:cNvSpPr/>
-          <p:nvPr/>
-        </p:nvSpPr>
-        <p:spPr>
-          <a:xfrm>
-            <a:off x="8976360" y="3319272"/>
-            <a:ext cx="792480" cy="749808"/>
-          </a:xfrm>
-          <a:prstGeom prst="roundRect">
-            <a:avLst>
-              <a:gd name="adj" fmla="val 14634"/>
-            </a:avLst>
-          </a:prstGeom>
-          <a:solidFill>
-            <a:srgbClr val="2F8A28"/>
-          </a:solidFill>
-          <a:ln w="12700">
-            <a:solidFill>
-              <a:srgbClr val="2F8A28"/>
-            </a:solidFill>
-            <a:prstDash val="solid"/>
-          </a:ln>
-        </p:spPr>
-      </p:sp>
-      <p:sp>
-        <p:nvSpPr>
-          <p:cNvPr id="17" name="Text 15"/>
-          <p:cNvSpPr/>
-          <p:nvPr/>
-        </p:nvSpPr>
-        <p:spPr>
-          <a:xfrm>
-            <a:off x="9049512" y="3511296"/>
-            <a:ext cx="646176" cy="310896"/>
-          </a:xfrm>
-          <a:prstGeom prst="rect">
-            <a:avLst/>
-          </a:prstGeom>
-          <a:noFill/>
-          <a:ln/>
-        </p:spPr>
-        <p:txBody>
-          <a:bodyPr wrap="square" lIns="0" tIns="0" rIns="0" bIns="0" rtlCol="0" anchor="ctr">
-            <a:normAutofit/>
-          </a:bodyPr>
-          <a:lstStyle/>
-          <a:p>
-            <a:pPr algn="ctr" indent="0" marL="0">
-              <a:buNone/>
-            </a:pPr>
-            <a:r>
-              <a:rPr lang="en-US" sz="1500" b="1" dirty="0">
-                <a:solidFill>
-                  <a:srgbClr val="FFFFFF"/>
-                </a:solidFill>
-                <a:latin typeface="Aptos" pitchFamily="34" charset="0"/>
-                <a:ea typeface="Aptos" pitchFamily="34" charset="-122"/>
-                <a:cs typeface="Aptos" pitchFamily="34" charset="-120"/>
-              </a:rPr>
-              <a:t>Do</a:t>
-            </a:r>
-            <a:endParaRPr lang="en-US" sz="1500" dirty="0"/>
-          </a:p>
-        </p:txBody>
-      </p:sp>
-      <p:sp>
-        <p:nvSpPr>
-          <p:cNvPr id="18" name="Shape 16"/>
-          <p:cNvSpPr/>
-          <p:nvPr/>
-        </p:nvSpPr>
-        <p:spPr>
-          <a:xfrm>
-            <a:off x="10024872" y="3319272"/>
-            <a:ext cx="792480" cy="749808"/>
-          </a:xfrm>
-          <a:prstGeom prst="roundRect">
-            <a:avLst>
-              <a:gd name="adj" fmla="val 14634"/>
-            </a:avLst>
-          </a:prstGeom>
-          <a:solidFill>
-            <a:srgbClr val="D69A2D"/>
-          </a:solidFill>
-          <a:ln w="12700">
-            <a:solidFill>
-              <a:srgbClr val="D69A2D"/>
-            </a:solidFill>
-            <a:prstDash val="solid"/>
-          </a:ln>
-        </p:spPr>
-      </p:sp>
-      <p:sp>
-        <p:nvSpPr>
-          <p:cNvPr id="19" name="Text 17"/>
-          <p:cNvSpPr/>
-          <p:nvPr/>
-        </p:nvSpPr>
-        <p:spPr>
-          <a:xfrm>
-            <a:off x="10098024" y="3511296"/>
-            <a:ext cx="646176" cy="310896"/>
-          </a:xfrm>
-          <a:prstGeom prst="rect">
-            <a:avLst/>
-          </a:prstGeom>
-          <a:noFill/>
-          <a:ln/>
-        </p:spPr>
-        <p:txBody>
-          <a:bodyPr wrap="square" lIns="0" tIns="0" rIns="0" bIns="0" rtlCol="0" anchor="ctr">
-            <a:normAutofit/>
-          </a:bodyPr>
-          <a:lstStyle/>
-          <a:p>
-            <a:pPr algn="ctr" indent="0" marL="0">
-              <a:buNone/>
-            </a:pPr>
-            <a:r>
-              <a:rPr lang="en-US" sz="1500" b="1" dirty="0">
-                <a:solidFill>
-                  <a:srgbClr val="FFFFFF"/>
-                </a:solidFill>
-                <a:latin typeface="Aptos" pitchFamily="34" charset="0"/>
-                <a:ea typeface="Aptos" pitchFamily="34" charset="-122"/>
-                <a:cs typeface="Aptos" pitchFamily="34" charset="-120"/>
-              </a:rPr>
-              <a:t>Review</a:t>
-            </a:r>
-            <a:endParaRPr lang="en-US" sz="1500" dirty="0"/>
-          </a:p>
-        </p:txBody>
-      </p:sp>
-      <p:sp>
-        <p:nvSpPr>
-          <p:cNvPr id="20" name="Shape 18"/>
-          <p:cNvSpPr/>
-          <p:nvPr/>
-        </p:nvSpPr>
-        <p:spPr>
-          <a:xfrm>
-            <a:off x="8293608" y="4389120"/>
-            <a:ext cx="2157984" cy="0"/>
-          </a:xfrm>
-          <a:prstGeom prst="line">
-            <a:avLst/>
-          </a:prstGeom>
-          <a:noFill/>
-          <a:ln w="25400">
-            <a:solidFill>
-              <a:srgbClr val="8ABBD8"/>
-            </a:solidFill>
-            <a:prstDash val="solid"/>
-          </a:ln>
-        </p:spPr>
-      </p:sp>
-      <p:sp>
-        <p:nvSpPr>
-          <p:cNvPr id="21" name="Text 19"/>
-          <p:cNvSpPr/>
-          <p:nvPr/>
-        </p:nvSpPr>
-        <p:spPr>
-          <a:xfrm>
-            <a:off x="7909560" y="3977640"/>
-            <a:ext cx="2926080" cy="182880"/>
-          </a:xfrm>
-          <a:prstGeom prst="rect">
-            <a:avLst/>
-          </a:prstGeom>
-          <a:noFill/>
-          <a:ln/>
-        </p:spPr>
-        <p:txBody>
-          <a:bodyPr wrap="square" lIns="0" tIns="0" rIns="0" bIns="0" rtlCol="0" anchor="ctr"/>
-          <a:lstStyle/>
-          <a:p>
-            <a:pPr algn="ctr" indent="0" marL="0">
-              <a:buNone/>
-            </a:pPr>
-            <a:r>
-              <a:rPr lang="en-US" sz="1000" dirty="0">
-                <a:solidFill>
-                  <a:srgbClr val="003A63"/>
-                </a:solidFill>
-                <a:latin typeface="Aptos" pitchFamily="34" charset="0"/>
-                <a:ea typeface="Aptos" pitchFamily="34" charset="-122"/>
-                <a:cs typeface="Aptos" pitchFamily="34" charset="-120"/>
-              </a:rPr>
-              <a:t>Dependencies visible</a:t>
-            </a:r>
-            <a:endParaRPr lang="en-US" sz="1000" dirty="0"/>
-          </a:p>
-        </p:txBody>
-      </p:sp>
-      <p:sp>
-        <p:nvSpPr>
-          <p:cNvPr id="22" name="Shape 20"/>
           <p:cNvSpPr/>
           <p:nvPr/>
         </p:nvSpPr>
@@ -13400,7 +11870,7 @@
       </p:sp>
       <p:sp>
         <p:nvSpPr>
-          <p:cNvPr id="23" name="Text 21"/>
+          <p:cNvPr id="17" name="Text 15"/>
           <p:cNvSpPr/>
           <p:nvPr/>
         </p:nvSpPr>
@@ -13439,7 +11909,7 @@
       </p:sp>
       <p:sp>
         <p:nvSpPr>
-          <p:cNvPr id="24" name="Text 22"/>
+          <p:cNvPr id="18" name="Text 16"/>
           <p:cNvSpPr/>
           <p:nvPr/>
         </p:nvSpPr>
@@ -13947,13 +12417,11 @@
             </a:avLst>
           </a:prstGeom>
           <a:solidFill>
-            <a:srgbClr val="FFFFFF">
-              <a:alpha val="88000"/>
-            </a:srgbClr>
+            <a:srgbClr val="FFFFFF"/>
           </a:solidFill>
           <a:ln w="12700">
             <a:solidFill>
-              <a:srgbClr val="D6E8F2"/>
+              <a:srgbClr val="B9D7E6"/>
             </a:solidFill>
             <a:prstDash val="solid"/>
           </a:ln>
@@ -13961,30 +12429,42 @@
       </p:sp>
       <p:sp>
         <p:nvSpPr>
-          <p:cNvPr id="14" name="Shape 12"/>
-          <p:cNvSpPr/>
-          <p:nvPr/>
-        </p:nvSpPr>
-        <p:spPr>
-          <a:xfrm>
-            <a:off x="7927848" y="3319272"/>
-            <a:ext cx="792480" cy="749808"/>
-          </a:xfrm>
-          <a:prstGeom prst="roundRect">
-            <a:avLst>
-              <a:gd name="adj" fmla="val 14634"/>
-            </a:avLst>
-          </a:prstGeom>
-          <a:solidFill>
-            <a:srgbClr val="0068B7"/>
-          </a:solidFill>
-          <a:ln w="12700">
-            <a:solidFill>
-              <a:srgbClr val="0068B7"/>
-            </a:solidFill>
-            <a:prstDash val="solid"/>
-          </a:ln>
-        </p:spPr>
+          <p:cNvPr id="14" name="Text 12"/>
+          <p:cNvSpPr/>
+          <p:nvPr/>
+        </p:nvSpPr>
+        <p:spPr>
+          <a:xfrm>
+            <a:off x="7799832" y="2935224"/>
+            <a:ext cx="3145536" cy="256032"/>
+          </a:xfrm>
+          <a:prstGeom prst="rect">
+            <a:avLst/>
+          </a:prstGeom>
+          <a:noFill/>
+          <a:ln/>
+        </p:spPr>
+        <p:txBody>
+          <a:bodyPr wrap="square" lIns="0" tIns="0" rIns="0" bIns="0" rtlCol="0" anchor="ctr"/>
+          <a:lstStyle/>
+          <a:p>
+            <a:pPr indent="0" marL="0">
+              <a:buNone/>
+            </a:pPr>
+            <a:r>
+              <a:rPr lang="en-US" sz="1300" b="1" dirty="0">
+                <a:solidFill>
+                  <a:srgbClr val="0068B7"/>
+                </a:solidFill>
+                <a:latin typeface="Aptos" pitchFamily="34" charset="0"/>
+                <a:ea typeface="Aptos" pitchFamily="34" charset="-122"/>
+                <a:cs typeface="Aptos" pitchFamily="34" charset="-120"/>
+              </a:rPr>
+              <a:t>Concept checkpoints</a:t>
+            </a:r>
+            <a:endParaRPr lang="en-US" sz="1300" dirty="0"/>
+          </a:p>
+        </p:txBody>
       </p:sp>
       <p:sp>
         <p:nvSpPr>
@@ -13994,240 +12474,67 @@
         </p:nvSpPr>
         <p:spPr>
           <a:xfrm>
-            <a:off x="8001000" y="3511296"/>
-            <a:ext cx="646176" cy="310896"/>
-          </a:xfrm>
-          <a:prstGeom prst="rect">
-            <a:avLst/>
-          </a:prstGeom>
-          <a:noFill/>
-          <a:ln/>
-        </p:spPr>
-        <p:txBody>
-          <a:bodyPr wrap="square" lIns="0" tIns="0" rIns="0" bIns="0" rtlCol="0" anchor="ctr">
+            <a:off x="7818120" y="3300984"/>
+            <a:ext cx="3090672" cy="877824"/>
+          </a:xfrm>
+          <a:prstGeom prst="rect">
+            <a:avLst/>
+          </a:prstGeom>
+          <a:noFill/>
+          <a:ln/>
+        </p:spPr>
+        <p:txBody>
+          <a:bodyPr wrap="square" lIns="254" tIns="254" rIns="254" bIns="254" rtlCol="0" anchor="t">
             <a:normAutofit/>
           </a:bodyPr>
           <a:lstStyle/>
           <a:p>
-            <a:pPr algn="ctr" indent="0" marL="0">
-              <a:buNone/>
-            </a:pPr>
-            <a:r>
-              <a:rPr lang="en-US" sz="1500" b="1" dirty="0">
-                <a:solidFill>
-                  <a:srgbClr val="FFFFFF"/>
-                </a:solidFill>
-                <a:latin typeface="Aptos" pitchFamily="34" charset="0"/>
-                <a:ea typeface="Aptos" pitchFamily="34" charset="-122"/>
-                <a:cs typeface="Aptos" pitchFamily="34" charset="-120"/>
-              </a:rPr>
-              <a:t>Plan</a:t>
-            </a:r>
-            <a:endParaRPr lang="en-US" sz="1500" dirty="0"/>
+            <a:r>
+              <a:rPr lang="en-US" sz="1380" dirty="0">
+                <a:solidFill>
+                  <a:srgbClr val="17364A"/>
+                </a:solidFill>
+                <a:latin typeface="Aptos" pitchFamily="34" charset="0"/>
+                <a:ea typeface="Aptos" pitchFamily="34" charset="-122"/>
+                <a:cs typeface="Aptos" pitchFamily="34" charset="-120"/>
+              </a:rPr>
+              <a:t>NIST Artificial Intelligence Risk Management Framework:.</a:t>
+            </a:r>
+            <a:endParaRPr lang="en-US" sz="1380" dirty="0"/>
+          </a:p>
+          <a:p>
+            <a:r>
+              <a:rPr lang="en-US" sz="1380" dirty="0">
+                <a:solidFill>
+                  <a:srgbClr val="17364A"/>
+                </a:solidFill>
+                <a:latin typeface="Aptos" pitchFamily="34" charset="0"/>
+                <a:ea typeface="Aptos" pitchFamily="34" charset="-122"/>
+                <a:cs typeface="Aptos" pitchFamily="34" charset="-120"/>
+              </a:rPr>
+              <a:t>OWASP guidance for LLM application security</a:t>
+            </a:r>
+            <a:endParaRPr lang="en-US" sz="1380" dirty="0"/>
+          </a:p>
+          <a:p>
+            <a:r>
+              <a:rPr lang="en-US" sz="1380" dirty="0">
+                <a:solidFill>
+                  <a:srgbClr val="17364A"/>
+                </a:solidFill>
+                <a:latin typeface="Aptos" pitchFamily="34" charset="0"/>
+                <a:ea typeface="Aptos" pitchFamily="34" charset="-122"/>
+                <a:cs typeface="Aptos" pitchFamily="34" charset="-120"/>
+              </a:rPr>
+              <a:t>Agency policies for privacy, cybersecurity, records, procurement, accessibility, and.</a:t>
+            </a:r>
+            <a:endParaRPr lang="en-US" sz="1380" dirty="0"/>
           </a:p>
         </p:txBody>
       </p:sp>
       <p:sp>
         <p:nvSpPr>
           <p:cNvPr id="16" name="Shape 14"/>
-          <p:cNvSpPr/>
-          <p:nvPr/>
-        </p:nvSpPr>
-        <p:spPr>
-          <a:xfrm>
-            <a:off x="8976360" y="3319272"/>
-            <a:ext cx="792480" cy="749808"/>
-          </a:xfrm>
-          <a:prstGeom prst="roundRect">
-            <a:avLst>
-              <a:gd name="adj" fmla="val 14634"/>
-            </a:avLst>
-          </a:prstGeom>
-          <a:solidFill>
-            <a:srgbClr val="2F8A28"/>
-          </a:solidFill>
-          <a:ln w="12700">
-            <a:solidFill>
-              <a:srgbClr val="2F8A28"/>
-            </a:solidFill>
-            <a:prstDash val="solid"/>
-          </a:ln>
-        </p:spPr>
-      </p:sp>
-      <p:sp>
-        <p:nvSpPr>
-          <p:cNvPr id="17" name="Text 15"/>
-          <p:cNvSpPr/>
-          <p:nvPr/>
-        </p:nvSpPr>
-        <p:spPr>
-          <a:xfrm>
-            <a:off x="9049512" y="3511296"/>
-            <a:ext cx="646176" cy="310896"/>
-          </a:xfrm>
-          <a:prstGeom prst="rect">
-            <a:avLst/>
-          </a:prstGeom>
-          <a:noFill/>
-          <a:ln/>
-        </p:spPr>
-        <p:txBody>
-          <a:bodyPr wrap="square" lIns="0" tIns="0" rIns="0" bIns="0" rtlCol="0" anchor="ctr">
-            <a:normAutofit/>
-          </a:bodyPr>
-          <a:lstStyle/>
-          <a:p>
-            <a:pPr algn="ctr" indent="0" marL="0">
-              <a:buNone/>
-            </a:pPr>
-            <a:r>
-              <a:rPr lang="en-US" sz="1500" b="1" dirty="0">
-                <a:solidFill>
-                  <a:srgbClr val="FFFFFF"/>
-                </a:solidFill>
-                <a:latin typeface="Aptos" pitchFamily="34" charset="0"/>
-                <a:ea typeface="Aptos" pitchFamily="34" charset="-122"/>
-                <a:cs typeface="Aptos" pitchFamily="34" charset="-120"/>
-              </a:rPr>
-              <a:t>Do</a:t>
-            </a:r>
-            <a:endParaRPr lang="en-US" sz="1500" dirty="0"/>
-          </a:p>
-        </p:txBody>
-      </p:sp>
-      <p:sp>
-        <p:nvSpPr>
-          <p:cNvPr id="18" name="Shape 16"/>
-          <p:cNvSpPr/>
-          <p:nvPr/>
-        </p:nvSpPr>
-        <p:spPr>
-          <a:xfrm>
-            <a:off x="10024872" y="3319272"/>
-            <a:ext cx="792480" cy="749808"/>
-          </a:xfrm>
-          <a:prstGeom prst="roundRect">
-            <a:avLst>
-              <a:gd name="adj" fmla="val 14634"/>
-            </a:avLst>
-          </a:prstGeom>
-          <a:solidFill>
-            <a:srgbClr val="D69A2D"/>
-          </a:solidFill>
-          <a:ln w="12700">
-            <a:solidFill>
-              <a:srgbClr val="D69A2D"/>
-            </a:solidFill>
-            <a:prstDash val="solid"/>
-          </a:ln>
-        </p:spPr>
-      </p:sp>
-      <p:sp>
-        <p:nvSpPr>
-          <p:cNvPr id="19" name="Text 17"/>
-          <p:cNvSpPr/>
-          <p:nvPr/>
-        </p:nvSpPr>
-        <p:spPr>
-          <a:xfrm>
-            <a:off x="10098024" y="3511296"/>
-            <a:ext cx="646176" cy="310896"/>
-          </a:xfrm>
-          <a:prstGeom prst="rect">
-            <a:avLst/>
-          </a:prstGeom>
-          <a:noFill/>
-          <a:ln/>
-        </p:spPr>
-        <p:txBody>
-          <a:bodyPr wrap="square" lIns="0" tIns="0" rIns="0" bIns="0" rtlCol="0" anchor="ctr">
-            <a:normAutofit/>
-          </a:bodyPr>
-          <a:lstStyle/>
-          <a:p>
-            <a:pPr algn="ctr" indent="0" marL="0">
-              <a:buNone/>
-            </a:pPr>
-            <a:r>
-              <a:rPr lang="en-US" sz="1500" b="1" dirty="0">
-                <a:solidFill>
-                  <a:srgbClr val="FFFFFF"/>
-                </a:solidFill>
-                <a:latin typeface="Aptos" pitchFamily="34" charset="0"/>
-                <a:ea typeface="Aptos" pitchFamily="34" charset="-122"/>
-                <a:cs typeface="Aptos" pitchFamily="34" charset="-120"/>
-              </a:rPr>
-              <a:t>Review</a:t>
-            </a:r>
-            <a:endParaRPr lang="en-US" sz="1500" dirty="0"/>
-          </a:p>
-        </p:txBody>
-      </p:sp>
-      <p:sp>
-        <p:nvSpPr>
-          <p:cNvPr id="20" name="Shape 18"/>
-          <p:cNvSpPr/>
-          <p:nvPr/>
-        </p:nvSpPr>
-        <p:spPr>
-          <a:xfrm>
-            <a:off x="8293608" y="4389120"/>
-            <a:ext cx="2157984" cy="0"/>
-          </a:xfrm>
-          <a:prstGeom prst="line">
-            <a:avLst/>
-          </a:prstGeom>
-          <a:noFill/>
-          <a:ln w="25400">
-            <a:solidFill>
-              <a:srgbClr val="8ABBD8"/>
-            </a:solidFill>
-            <a:prstDash val="solid"/>
-          </a:ln>
-        </p:spPr>
-      </p:sp>
-      <p:sp>
-        <p:nvSpPr>
-          <p:cNvPr id="21" name="Text 19"/>
-          <p:cNvSpPr/>
-          <p:nvPr/>
-        </p:nvSpPr>
-        <p:spPr>
-          <a:xfrm>
-            <a:off x="7909560" y="3977640"/>
-            <a:ext cx="2926080" cy="182880"/>
-          </a:xfrm>
-          <a:prstGeom prst="rect">
-            <a:avLst/>
-          </a:prstGeom>
-          <a:noFill/>
-          <a:ln/>
-        </p:spPr>
-        <p:txBody>
-          <a:bodyPr wrap="square" lIns="0" tIns="0" rIns="0" bIns="0" rtlCol="0" anchor="ctr"/>
-          <a:lstStyle/>
-          <a:p>
-            <a:pPr algn="ctr" indent="0" marL="0">
-              <a:buNone/>
-            </a:pPr>
-            <a:r>
-              <a:rPr lang="en-US" sz="1000" dirty="0">
-                <a:solidFill>
-                  <a:srgbClr val="003A63"/>
-                </a:solidFill>
-                <a:latin typeface="Aptos" pitchFamily="34" charset="0"/>
-                <a:ea typeface="Aptos" pitchFamily="34" charset="-122"/>
-                <a:cs typeface="Aptos" pitchFamily="34" charset="-120"/>
-              </a:rPr>
-              <a:t>Dependencies visible</a:t>
-            </a:r>
-            <a:endParaRPr lang="en-US" sz="1000" dirty="0"/>
-          </a:p>
-        </p:txBody>
-      </p:sp>
-      <p:sp>
-        <p:nvSpPr>
-          <p:cNvPr id="22" name="Shape 20"/>
           <p:cNvSpPr/>
           <p:nvPr/>
         </p:nvSpPr>
@@ -14254,7 +12561,7 @@
       </p:sp>
       <p:sp>
         <p:nvSpPr>
-          <p:cNvPr id="23" name="Text 21"/>
+          <p:cNvPr id="17" name="Text 15"/>
           <p:cNvSpPr/>
           <p:nvPr/>
         </p:nvSpPr>
@@ -14293,7 +12600,7 @@
       </p:sp>
       <p:sp>
         <p:nvSpPr>
-          <p:cNvPr id="24" name="Text 22"/>
+          <p:cNvPr id="18" name="Text 16"/>
           <p:cNvSpPr/>
           <p:nvPr/>
         </p:nvSpPr>
@@ -14773,13 +13080,11 @@
             </a:avLst>
           </a:prstGeom>
           <a:solidFill>
-            <a:srgbClr val="FFFFFF">
-              <a:alpha val="88000"/>
-            </a:srgbClr>
+            <a:srgbClr val="FFFFFF"/>
           </a:solidFill>
           <a:ln w="12700">
             <a:solidFill>
-              <a:srgbClr val="D6E8F2"/>
+              <a:srgbClr val="B9D7E6"/>
             </a:solidFill>
             <a:prstDash val="solid"/>
           </a:ln>
@@ -14787,30 +13092,42 @@
       </p:sp>
       <p:sp>
         <p:nvSpPr>
-          <p:cNvPr id="14" name="Shape 12"/>
-          <p:cNvSpPr/>
-          <p:nvPr/>
-        </p:nvSpPr>
-        <p:spPr>
-          <a:xfrm>
-            <a:off x="7927848" y="3319272"/>
-            <a:ext cx="792480" cy="749808"/>
-          </a:xfrm>
-          <a:prstGeom prst="roundRect">
-            <a:avLst>
-              <a:gd name="adj" fmla="val 14634"/>
-            </a:avLst>
-          </a:prstGeom>
-          <a:solidFill>
-            <a:srgbClr val="0068B7"/>
-          </a:solidFill>
-          <a:ln w="12700">
-            <a:solidFill>
-              <a:srgbClr val="0068B7"/>
-            </a:solidFill>
-            <a:prstDash val="solid"/>
-          </a:ln>
-        </p:spPr>
+          <p:cNvPr id="14" name="Text 12"/>
+          <p:cNvSpPr/>
+          <p:nvPr/>
+        </p:nvSpPr>
+        <p:spPr>
+          <a:xfrm>
+            <a:off x="7799832" y="2935224"/>
+            <a:ext cx="3145536" cy="256032"/>
+          </a:xfrm>
+          <a:prstGeom prst="rect">
+            <a:avLst/>
+          </a:prstGeom>
+          <a:noFill/>
+          <a:ln/>
+        </p:spPr>
+        <p:txBody>
+          <a:bodyPr wrap="square" lIns="0" tIns="0" rIns="0" bIns="0" rtlCol="0" anchor="ctr"/>
+          <a:lstStyle/>
+          <a:p>
+            <a:pPr indent="0" marL="0">
+              <a:buNone/>
+            </a:pPr>
+            <a:r>
+              <a:rPr lang="en-US" sz="1300" b="1" dirty="0">
+                <a:solidFill>
+                  <a:srgbClr val="0068B7"/>
+                </a:solidFill>
+                <a:latin typeface="Aptos" pitchFamily="34" charset="0"/>
+                <a:ea typeface="Aptos" pitchFamily="34" charset="-122"/>
+                <a:cs typeface="Aptos" pitchFamily="34" charset="-120"/>
+              </a:rPr>
+              <a:t>Concept checkpoints</a:t>
+            </a:r>
+            <a:endParaRPr lang="en-US" sz="1300" dirty="0"/>
+          </a:p>
+        </p:txBody>
       </p:sp>
       <p:sp>
         <p:nvSpPr>
@@ -14820,240 +13137,39 @@
         </p:nvSpPr>
         <p:spPr>
           <a:xfrm>
-            <a:off x="8001000" y="3511296"/>
-            <a:ext cx="646176" cy="310896"/>
-          </a:xfrm>
-          <a:prstGeom prst="rect">
-            <a:avLst/>
-          </a:prstGeom>
-          <a:noFill/>
-          <a:ln/>
-        </p:spPr>
-        <p:txBody>
-          <a:bodyPr wrap="square" lIns="0" tIns="0" rIns="0" bIns="0" rtlCol="0" anchor="ctr">
+            <a:off x="7818120" y="3300984"/>
+            <a:ext cx="3090672" cy="877824"/>
+          </a:xfrm>
+          <a:prstGeom prst="rect">
+            <a:avLst/>
+          </a:prstGeom>
+          <a:noFill/>
+          <a:ln/>
+        </p:spPr>
+        <p:txBody>
+          <a:bodyPr wrap="square" lIns="254" tIns="254" rIns="254" bIns="254" rtlCol="0" anchor="t">
             <a:normAutofit/>
           </a:bodyPr>
           <a:lstStyle/>
           <a:p>
-            <a:pPr algn="ctr" indent="0" marL="0">
-              <a:buNone/>
-            </a:pPr>
-            <a:r>
-              <a:rPr lang="en-US" sz="1500" b="1" dirty="0">
-                <a:solidFill>
-                  <a:srgbClr val="FFFFFF"/>
-                </a:solidFill>
-                <a:latin typeface="Aptos" pitchFamily="34" charset="0"/>
-                <a:ea typeface="Aptos" pitchFamily="34" charset="-122"/>
-                <a:cs typeface="Aptos" pitchFamily="34" charset="-120"/>
-              </a:rPr>
-              <a:t>Plan</a:t>
-            </a:r>
-            <a:endParaRPr lang="en-US" sz="1500" dirty="0"/>
+            <a:r>
+              <a:rPr lang="en-US" sz="1380" dirty="0">
+                <a:solidFill>
+                  <a:srgbClr val="17364A"/>
+                </a:solidFill>
+                <a:latin typeface="Aptos" pitchFamily="34" charset="0"/>
+                <a:ea typeface="Aptos" pitchFamily="34" charset="-122"/>
+                <a:cs typeface="Aptos" pitchFamily="34" charset="-120"/>
+              </a:rPr>
+              <a:t>Relevant public health program SOPs, data governance documentation, and implementation plans</a:t>
+            </a:r>
+            <a:endParaRPr lang="en-US" sz="1380" dirty="0"/>
           </a:p>
         </p:txBody>
       </p:sp>
       <p:sp>
         <p:nvSpPr>
           <p:cNvPr id="16" name="Shape 14"/>
-          <p:cNvSpPr/>
-          <p:nvPr/>
-        </p:nvSpPr>
-        <p:spPr>
-          <a:xfrm>
-            <a:off x="8976360" y="3319272"/>
-            <a:ext cx="792480" cy="749808"/>
-          </a:xfrm>
-          <a:prstGeom prst="roundRect">
-            <a:avLst>
-              <a:gd name="adj" fmla="val 14634"/>
-            </a:avLst>
-          </a:prstGeom>
-          <a:solidFill>
-            <a:srgbClr val="2F8A28"/>
-          </a:solidFill>
-          <a:ln w="12700">
-            <a:solidFill>
-              <a:srgbClr val="2F8A28"/>
-            </a:solidFill>
-            <a:prstDash val="solid"/>
-          </a:ln>
-        </p:spPr>
-      </p:sp>
-      <p:sp>
-        <p:nvSpPr>
-          <p:cNvPr id="17" name="Text 15"/>
-          <p:cNvSpPr/>
-          <p:nvPr/>
-        </p:nvSpPr>
-        <p:spPr>
-          <a:xfrm>
-            <a:off x="9049512" y="3511296"/>
-            <a:ext cx="646176" cy="310896"/>
-          </a:xfrm>
-          <a:prstGeom prst="rect">
-            <a:avLst/>
-          </a:prstGeom>
-          <a:noFill/>
-          <a:ln/>
-        </p:spPr>
-        <p:txBody>
-          <a:bodyPr wrap="square" lIns="0" tIns="0" rIns="0" bIns="0" rtlCol="0" anchor="ctr">
-            <a:normAutofit/>
-          </a:bodyPr>
-          <a:lstStyle/>
-          <a:p>
-            <a:pPr algn="ctr" indent="0" marL="0">
-              <a:buNone/>
-            </a:pPr>
-            <a:r>
-              <a:rPr lang="en-US" sz="1500" b="1" dirty="0">
-                <a:solidFill>
-                  <a:srgbClr val="FFFFFF"/>
-                </a:solidFill>
-                <a:latin typeface="Aptos" pitchFamily="34" charset="0"/>
-                <a:ea typeface="Aptos" pitchFamily="34" charset="-122"/>
-                <a:cs typeface="Aptos" pitchFamily="34" charset="-120"/>
-              </a:rPr>
-              <a:t>Do</a:t>
-            </a:r>
-            <a:endParaRPr lang="en-US" sz="1500" dirty="0"/>
-          </a:p>
-        </p:txBody>
-      </p:sp>
-      <p:sp>
-        <p:nvSpPr>
-          <p:cNvPr id="18" name="Shape 16"/>
-          <p:cNvSpPr/>
-          <p:nvPr/>
-        </p:nvSpPr>
-        <p:spPr>
-          <a:xfrm>
-            <a:off x="10024872" y="3319272"/>
-            <a:ext cx="792480" cy="749808"/>
-          </a:xfrm>
-          <a:prstGeom prst="roundRect">
-            <a:avLst>
-              <a:gd name="adj" fmla="val 14634"/>
-            </a:avLst>
-          </a:prstGeom>
-          <a:solidFill>
-            <a:srgbClr val="D69A2D"/>
-          </a:solidFill>
-          <a:ln w="12700">
-            <a:solidFill>
-              <a:srgbClr val="D69A2D"/>
-            </a:solidFill>
-            <a:prstDash val="solid"/>
-          </a:ln>
-        </p:spPr>
-      </p:sp>
-      <p:sp>
-        <p:nvSpPr>
-          <p:cNvPr id="19" name="Text 17"/>
-          <p:cNvSpPr/>
-          <p:nvPr/>
-        </p:nvSpPr>
-        <p:spPr>
-          <a:xfrm>
-            <a:off x="10098024" y="3511296"/>
-            <a:ext cx="646176" cy="310896"/>
-          </a:xfrm>
-          <a:prstGeom prst="rect">
-            <a:avLst/>
-          </a:prstGeom>
-          <a:noFill/>
-          <a:ln/>
-        </p:spPr>
-        <p:txBody>
-          <a:bodyPr wrap="square" lIns="0" tIns="0" rIns="0" bIns="0" rtlCol="0" anchor="ctr">
-            <a:normAutofit/>
-          </a:bodyPr>
-          <a:lstStyle/>
-          <a:p>
-            <a:pPr algn="ctr" indent="0" marL="0">
-              <a:buNone/>
-            </a:pPr>
-            <a:r>
-              <a:rPr lang="en-US" sz="1500" b="1" dirty="0">
-                <a:solidFill>
-                  <a:srgbClr val="FFFFFF"/>
-                </a:solidFill>
-                <a:latin typeface="Aptos" pitchFamily="34" charset="0"/>
-                <a:ea typeface="Aptos" pitchFamily="34" charset="-122"/>
-                <a:cs typeface="Aptos" pitchFamily="34" charset="-120"/>
-              </a:rPr>
-              <a:t>Review</a:t>
-            </a:r>
-            <a:endParaRPr lang="en-US" sz="1500" dirty="0"/>
-          </a:p>
-        </p:txBody>
-      </p:sp>
-      <p:sp>
-        <p:nvSpPr>
-          <p:cNvPr id="20" name="Shape 18"/>
-          <p:cNvSpPr/>
-          <p:nvPr/>
-        </p:nvSpPr>
-        <p:spPr>
-          <a:xfrm>
-            <a:off x="8293608" y="4389120"/>
-            <a:ext cx="2157984" cy="0"/>
-          </a:xfrm>
-          <a:prstGeom prst="line">
-            <a:avLst/>
-          </a:prstGeom>
-          <a:noFill/>
-          <a:ln w="25400">
-            <a:solidFill>
-              <a:srgbClr val="8ABBD8"/>
-            </a:solidFill>
-            <a:prstDash val="solid"/>
-          </a:ln>
-        </p:spPr>
-      </p:sp>
-      <p:sp>
-        <p:nvSpPr>
-          <p:cNvPr id="21" name="Text 19"/>
-          <p:cNvSpPr/>
-          <p:nvPr/>
-        </p:nvSpPr>
-        <p:spPr>
-          <a:xfrm>
-            <a:off x="7909560" y="3977640"/>
-            <a:ext cx="2926080" cy="182880"/>
-          </a:xfrm>
-          <a:prstGeom prst="rect">
-            <a:avLst/>
-          </a:prstGeom>
-          <a:noFill/>
-          <a:ln/>
-        </p:spPr>
-        <p:txBody>
-          <a:bodyPr wrap="square" lIns="0" tIns="0" rIns="0" bIns="0" rtlCol="0" anchor="ctr"/>
-          <a:lstStyle/>
-          <a:p>
-            <a:pPr algn="ctr" indent="0" marL="0">
-              <a:buNone/>
-            </a:pPr>
-            <a:r>
-              <a:rPr lang="en-US" sz="1000" dirty="0">
-                <a:solidFill>
-                  <a:srgbClr val="003A63"/>
-                </a:solidFill>
-                <a:latin typeface="Aptos" pitchFamily="34" charset="0"/>
-                <a:ea typeface="Aptos" pitchFamily="34" charset="-122"/>
-                <a:cs typeface="Aptos" pitchFamily="34" charset="-120"/>
-              </a:rPr>
-              <a:t>Dependencies visible</a:t>
-            </a:r>
-            <a:endParaRPr lang="en-US" sz="1000" dirty="0"/>
-          </a:p>
-        </p:txBody>
-      </p:sp>
-      <p:sp>
-        <p:nvSpPr>
-          <p:cNvPr id="22" name="Shape 20"/>
           <p:cNvSpPr/>
           <p:nvPr/>
         </p:nvSpPr>
@@ -15080,7 +13196,7 @@
       </p:sp>
       <p:sp>
         <p:nvSpPr>
-          <p:cNvPr id="23" name="Text 21"/>
+          <p:cNvPr id="17" name="Text 15"/>
           <p:cNvSpPr/>
           <p:nvPr/>
         </p:nvSpPr>
@@ -15119,7 +13235,7 @@
       </p:sp>
       <p:sp>
         <p:nvSpPr>
-          <p:cNvPr id="24" name="Text 22"/>
+          <p:cNvPr id="18" name="Text 16"/>
           <p:cNvSpPr/>
           <p:nvPr/>
         </p:nvSpPr>
@@ -15632,20 +13748,20 @@
         </p:nvSpPr>
         <p:spPr>
           <a:xfrm>
-            <a:off x="7818120" y="3977640"/>
-            <a:ext cx="972312" cy="749808"/>
+            <a:off x="8046720" y="3794760"/>
+            <a:ext cx="3063240" cy="1600200"/>
           </a:xfrm>
           <a:prstGeom prst="roundRect">
             <a:avLst>
-              <a:gd name="adj" fmla="val 14634"/>
+              <a:gd name="adj" fmla="val 6857"/>
             </a:avLst>
           </a:prstGeom>
           <a:solidFill>
-            <a:srgbClr val="0068B7"/>
+            <a:srgbClr val="FFFFFF"/>
           </a:solidFill>
           <a:ln w="12700">
             <a:solidFill>
-              <a:srgbClr val="0068B7"/>
+              <a:srgbClr val="B9D7E6"/>
             </a:solidFill>
             <a:prstDash val="solid"/>
           </a:ln>
@@ -15659,172 +13775,100 @@
         </p:nvSpPr>
         <p:spPr>
           <a:xfrm>
-            <a:off x="7891272" y="4169664"/>
-            <a:ext cx="826008" cy="310896"/>
-          </a:xfrm>
-          <a:prstGeom prst="rect">
-            <a:avLst/>
-          </a:prstGeom>
-          <a:noFill/>
-          <a:ln/>
-        </p:spPr>
-        <p:txBody>
-          <a:bodyPr wrap="square" lIns="0" tIns="0" rIns="0" bIns="0" rtlCol="0" anchor="ctr">
+            <a:off x="8211312" y="3941064"/>
+            <a:ext cx="2734056" cy="256032"/>
+          </a:xfrm>
+          <a:prstGeom prst="rect">
+            <a:avLst/>
+          </a:prstGeom>
+          <a:noFill/>
+          <a:ln/>
+        </p:spPr>
+        <p:txBody>
+          <a:bodyPr wrap="square" lIns="0" tIns="0" rIns="0" bIns="0" rtlCol="0" anchor="ctr"/>
+          <a:lstStyle/>
+          <a:p>
+            <a:pPr indent="0" marL="0">
+              <a:buNone/>
+            </a:pPr>
+            <a:r>
+              <a:rPr lang="en-US" sz="1300" b="1" dirty="0">
+                <a:solidFill>
+                  <a:srgbClr val="0068B7"/>
+                </a:solidFill>
+                <a:latin typeface="Aptos" pitchFamily="34" charset="0"/>
+                <a:ea typeface="Aptos" pitchFamily="34" charset="-122"/>
+                <a:cs typeface="Aptos" pitchFamily="34" charset="-120"/>
+              </a:rPr>
+              <a:t>Use the play links to</a:t>
+            </a:r>
+            <a:endParaRPr lang="en-US" sz="1300" dirty="0"/>
+          </a:p>
+        </p:txBody>
+      </p:sp>
+      <p:sp>
+        <p:nvSpPr>
+          <p:cNvPr id="15" name="Text 13"/>
+          <p:cNvSpPr/>
+          <p:nvPr/>
+        </p:nvSpPr>
+        <p:spPr>
+          <a:xfrm>
+            <a:off x="8229600" y="4306824"/>
+            <a:ext cx="2679192" cy="941832"/>
+          </a:xfrm>
+          <a:prstGeom prst="rect">
+            <a:avLst/>
+          </a:prstGeom>
+          <a:noFill/>
+          <a:ln/>
+        </p:spPr>
+        <p:txBody>
+          <a:bodyPr wrap="square" lIns="254" tIns="254" rIns="254" bIns="254" rtlCol="0" anchor="t">
             <a:normAutofit/>
           </a:bodyPr>
           <a:lstStyle/>
           <a:p>
-            <a:pPr algn="ctr" indent="0" marL="0">
-              <a:buNone/>
-            </a:pPr>
-            <a:r>
-              <a:rPr lang="en-US" sz="1500" b="1" dirty="0">
-                <a:solidFill>
-                  <a:srgbClr val="FFFFFF"/>
-                </a:solidFill>
-                <a:latin typeface="Aptos" pitchFamily="34" charset="0"/>
-                <a:ea typeface="Aptos" pitchFamily="34" charset="-122"/>
-                <a:cs typeface="Aptos" pitchFamily="34" charset="-120"/>
-              </a:rPr>
-              <a:t>Lesson</a:t>
-            </a:r>
-            <a:endParaRPr lang="en-US" sz="1500" dirty="0"/>
-          </a:p>
-        </p:txBody>
-      </p:sp>
-      <p:sp>
-        <p:nvSpPr>
-          <p:cNvPr id="15" name="Shape 13"/>
-          <p:cNvSpPr/>
-          <p:nvPr/>
-        </p:nvSpPr>
-        <p:spPr>
-          <a:xfrm>
-            <a:off x="9046464" y="3977640"/>
-            <a:ext cx="972312" cy="749808"/>
-          </a:xfrm>
-          <a:prstGeom prst="roundRect">
-            <a:avLst>
-              <a:gd name="adj" fmla="val 14634"/>
-            </a:avLst>
-          </a:prstGeom>
-          <a:solidFill>
-            <a:srgbClr val="2F8A28"/>
-          </a:solidFill>
-          <a:ln w="12700">
-            <a:solidFill>
-              <a:srgbClr val="2F8A28"/>
-            </a:solidFill>
-            <a:prstDash val="solid"/>
-          </a:ln>
-        </p:spPr>
-      </p:sp>
-      <p:sp>
-        <p:nvSpPr>
-          <p:cNvPr id="16" name="Text 14"/>
-          <p:cNvSpPr/>
-          <p:nvPr/>
-        </p:nvSpPr>
-        <p:spPr>
-          <a:xfrm>
-            <a:off x="9119616" y="4169664"/>
-            <a:ext cx="826008" cy="310896"/>
-          </a:xfrm>
-          <a:prstGeom prst="rect">
-            <a:avLst/>
-          </a:prstGeom>
-          <a:noFill/>
-          <a:ln/>
-        </p:spPr>
-        <p:txBody>
-          <a:bodyPr wrap="square" lIns="0" tIns="0" rIns="0" bIns="0" rtlCol="0" anchor="ctr">
-            <a:normAutofit/>
-          </a:bodyPr>
-          <a:lstStyle/>
-          <a:p>
-            <a:pPr algn="ctr" indent="0" marL="0">
-              <a:buNone/>
-            </a:pPr>
-            <a:r>
-              <a:rPr lang="en-US" sz="1500" b="1" dirty="0">
-                <a:solidFill>
-                  <a:srgbClr val="FFFFFF"/>
-                </a:solidFill>
-                <a:latin typeface="Aptos" pitchFamily="34" charset="0"/>
-                <a:ea typeface="Aptos" pitchFamily="34" charset="-122"/>
-                <a:cs typeface="Aptos" pitchFamily="34" charset="-120"/>
-              </a:rPr>
-              <a:t>Plays</a:t>
-            </a:r>
-            <a:endParaRPr lang="en-US" sz="1500" dirty="0"/>
-          </a:p>
-        </p:txBody>
-      </p:sp>
-      <p:sp>
-        <p:nvSpPr>
-          <p:cNvPr id="17" name="Shape 15"/>
-          <p:cNvSpPr/>
-          <p:nvPr/>
-        </p:nvSpPr>
-        <p:spPr>
-          <a:xfrm>
-            <a:off x="10274808" y="3977640"/>
-            <a:ext cx="972312" cy="749808"/>
-          </a:xfrm>
-          <a:prstGeom prst="roundRect">
-            <a:avLst>
-              <a:gd name="adj" fmla="val 14634"/>
-            </a:avLst>
-          </a:prstGeom>
-          <a:solidFill>
-            <a:srgbClr val="6A4CA3"/>
-          </a:solidFill>
-          <a:ln w="12700">
-            <a:solidFill>
-              <a:srgbClr val="6A4CA3"/>
-            </a:solidFill>
-            <a:prstDash val="solid"/>
-          </a:ln>
-        </p:spPr>
-      </p:sp>
-      <p:sp>
-        <p:nvSpPr>
-          <p:cNvPr id="18" name="Text 16"/>
-          <p:cNvSpPr/>
-          <p:nvPr/>
-        </p:nvSpPr>
-        <p:spPr>
-          <a:xfrm>
-            <a:off x="10347960" y="4169664"/>
-            <a:ext cx="826008" cy="310896"/>
-          </a:xfrm>
-          <a:prstGeom prst="rect">
-            <a:avLst/>
-          </a:prstGeom>
-          <a:noFill/>
-          <a:ln/>
-        </p:spPr>
-        <p:txBody>
-          <a:bodyPr wrap="square" lIns="0" tIns="0" rIns="0" bIns="0" rtlCol="0" anchor="ctr">
-            <a:normAutofit/>
-          </a:bodyPr>
-          <a:lstStyle/>
-          <a:p>
-            <a:pPr algn="ctr" indent="0" marL="0">
-              <a:buNone/>
-            </a:pPr>
-            <a:r>
-              <a:rPr lang="en-US" sz="1500" b="1" dirty="0">
-                <a:solidFill>
-                  <a:srgbClr val="FFFFFF"/>
-                </a:solidFill>
-                <a:latin typeface="Aptos" pitchFamily="34" charset="0"/>
-                <a:ea typeface="Aptos" pitchFamily="34" charset="-122"/>
-                <a:cs typeface="Aptos" pitchFamily="34" charset="-120"/>
-              </a:rPr>
-              <a:t>Action</a:t>
-            </a:r>
-            <a:endParaRPr lang="en-US" sz="1500" dirty="0"/>
+            <a:r>
+              <a:rPr lang="en-US" sz="1380" dirty="0">
+                <a:solidFill>
+                  <a:srgbClr val="17364A"/>
+                </a:solidFill>
+                <a:latin typeface="Aptos" pitchFamily="34" charset="0"/>
+                <a:ea typeface="Aptos" pitchFamily="34" charset="-122"/>
+                <a:cs typeface="Aptos" pitchFamily="34" charset="-120"/>
+              </a:rPr>
+              <a:t>Locate the decision point in the playbook sequence.</a:t>
+            </a:r>
+            <a:endParaRPr lang="en-US" sz="1380" dirty="0"/>
+          </a:p>
+          <a:p>
+            <a:r>
+              <a:rPr lang="en-US" sz="1380" dirty="0">
+                <a:solidFill>
+                  <a:srgbClr val="17364A"/>
+                </a:solidFill>
+                <a:latin typeface="Aptos" pitchFamily="34" charset="0"/>
+                <a:ea typeface="Aptos" pitchFamily="34" charset="-122"/>
+                <a:cs typeface="Aptos" pitchFamily="34" charset="-120"/>
+              </a:rPr>
+              <a:t>Identify who should participate in the work.</a:t>
+            </a:r>
+            <a:endParaRPr lang="en-US" sz="1380" dirty="0"/>
+          </a:p>
+          <a:p>
+            <a:r>
+              <a:rPr lang="en-US" sz="1380" dirty="0">
+                <a:solidFill>
+                  <a:srgbClr val="17364A"/>
+                </a:solidFill>
+                <a:latin typeface="Aptos" pitchFamily="34" charset="0"/>
+                <a:ea typeface="Aptos" pitchFamily="34" charset="-122"/>
+                <a:cs typeface="Aptos" pitchFamily="34" charset="-120"/>
+              </a:rPr>
+              <a:t>Document the review, approval, or implementation step.</a:t>
+            </a:r>
+            <a:endParaRPr lang="en-US" sz="1380" dirty="0"/>
           </a:p>
         </p:txBody>
       </p:sp>
@@ -16302,20 +14346,20 @@
         </p:nvSpPr>
         <p:spPr>
           <a:xfrm>
-            <a:off x="7818120" y="3977640"/>
-            <a:ext cx="972312" cy="749808"/>
+            <a:off x="8046720" y="3794760"/>
+            <a:ext cx="3063240" cy="1600200"/>
           </a:xfrm>
           <a:prstGeom prst="roundRect">
             <a:avLst>
-              <a:gd name="adj" fmla="val 14634"/>
+              <a:gd name="adj" fmla="val 6857"/>
             </a:avLst>
           </a:prstGeom>
           <a:solidFill>
-            <a:srgbClr val="0068B7"/>
+            <a:srgbClr val="FFFFFF"/>
           </a:solidFill>
           <a:ln w="12700">
             <a:solidFill>
-              <a:srgbClr val="0068B7"/>
+              <a:srgbClr val="B9D7E6"/>
             </a:solidFill>
             <a:prstDash val="solid"/>
           </a:ln>
@@ -16329,172 +14373,100 @@
         </p:nvSpPr>
         <p:spPr>
           <a:xfrm>
-            <a:off x="7891272" y="4169664"/>
-            <a:ext cx="826008" cy="310896"/>
-          </a:xfrm>
-          <a:prstGeom prst="rect">
-            <a:avLst/>
-          </a:prstGeom>
-          <a:noFill/>
-          <a:ln/>
-        </p:spPr>
-        <p:txBody>
-          <a:bodyPr wrap="square" lIns="0" tIns="0" rIns="0" bIns="0" rtlCol="0" anchor="ctr">
+            <a:off x="8211312" y="3941064"/>
+            <a:ext cx="2734056" cy="256032"/>
+          </a:xfrm>
+          <a:prstGeom prst="rect">
+            <a:avLst/>
+          </a:prstGeom>
+          <a:noFill/>
+          <a:ln/>
+        </p:spPr>
+        <p:txBody>
+          <a:bodyPr wrap="square" lIns="0" tIns="0" rIns="0" bIns="0" rtlCol="0" anchor="ctr"/>
+          <a:lstStyle/>
+          <a:p>
+            <a:pPr indent="0" marL="0">
+              <a:buNone/>
+            </a:pPr>
+            <a:r>
+              <a:rPr lang="en-US" sz="1300" b="1" dirty="0">
+                <a:solidFill>
+                  <a:srgbClr val="0068B7"/>
+                </a:solidFill>
+                <a:latin typeface="Aptos" pitchFamily="34" charset="0"/>
+                <a:ea typeface="Aptos" pitchFamily="34" charset="-122"/>
+                <a:cs typeface="Aptos" pitchFamily="34" charset="-120"/>
+              </a:rPr>
+              <a:t>Tool selection cues</a:t>
+            </a:r>
+            <a:endParaRPr lang="en-US" sz="1300" dirty="0"/>
+          </a:p>
+        </p:txBody>
+      </p:sp>
+      <p:sp>
+        <p:nvSpPr>
+          <p:cNvPr id="15" name="Text 13"/>
+          <p:cNvSpPr/>
+          <p:nvPr/>
+        </p:nvSpPr>
+        <p:spPr>
+          <a:xfrm>
+            <a:off x="8229600" y="4306824"/>
+            <a:ext cx="2679192" cy="941832"/>
+          </a:xfrm>
+          <a:prstGeom prst="rect">
+            <a:avLst/>
+          </a:prstGeom>
+          <a:noFill/>
+          <a:ln/>
+        </p:spPr>
+        <p:txBody>
+          <a:bodyPr wrap="square" lIns="254" tIns="254" rIns="254" bIns="254" rtlCol="0" anchor="t">
             <a:normAutofit/>
           </a:bodyPr>
           <a:lstStyle/>
           <a:p>
-            <a:pPr algn="ctr" indent="0" marL="0">
-              <a:buNone/>
-            </a:pPr>
-            <a:r>
-              <a:rPr lang="en-US" sz="1500" b="1" dirty="0">
-                <a:solidFill>
-                  <a:srgbClr val="FFFFFF"/>
-                </a:solidFill>
-                <a:latin typeface="Aptos" pitchFamily="34" charset="0"/>
-                <a:ea typeface="Aptos" pitchFamily="34" charset="-122"/>
-                <a:cs typeface="Aptos" pitchFamily="34" charset="-120"/>
-              </a:rPr>
-              <a:t>Concept</a:t>
-            </a:r>
-            <a:endParaRPr lang="en-US" sz="1500" dirty="0"/>
-          </a:p>
-        </p:txBody>
-      </p:sp>
-      <p:sp>
-        <p:nvSpPr>
-          <p:cNvPr id="15" name="Shape 13"/>
-          <p:cNvSpPr/>
-          <p:nvPr/>
-        </p:nvSpPr>
-        <p:spPr>
-          <a:xfrm>
-            <a:off x="9046464" y="3977640"/>
-            <a:ext cx="972312" cy="749808"/>
-          </a:xfrm>
-          <a:prstGeom prst="roundRect">
-            <a:avLst>
-              <a:gd name="adj" fmla="val 14634"/>
-            </a:avLst>
-          </a:prstGeom>
-          <a:solidFill>
-            <a:srgbClr val="2F8A28"/>
-          </a:solidFill>
-          <a:ln w="12700">
-            <a:solidFill>
-              <a:srgbClr val="2F8A28"/>
-            </a:solidFill>
-            <a:prstDash val="solid"/>
-          </a:ln>
-        </p:spPr>
-      </p:sp>
-      <p:sp>
-        <p:nvSpPr>
-          <p:cNvPr id="16" name="Text 14"/>
-          <p:cNvSpPr/>
-          <p:nvPr/>
-        </p:nvSpPr>
-        <p:spPr>
-          <a:xfrm>
-            <a:off x="9119616" y="4169664"/>
-            <a:ext cx="826008" cy="310896"/>
-          </a:xfrm>
-          <a:prstGeom prst="rect">
-            <a:avLst/>
-          </a:prstGeom>
-          <a:noFill/>
-          <a:ln/>
-        </p:spPr>
-        <p:txBody>
-          <a:bodyPr wrap="square" lIns="0" tIns="0" rIns="0" bIns="0" rtlCol="0" anchor="ctr">
-            <a:normAutofit/>
-          </a:bodyPr>
-          <a:lstStyle/>
-          <a:p>
-            <a:pPr algn="ctr" indent="0" marL="0">
-              <a:buNone/>
-            </a:pPr>
-            <a:r>
-              <a:rPr lang="en-US" sz="1500" b="1" dirty="0">
-                <a:solidFill>
-                  <a:srgbClr val="FFFFFF"/>
-                </a:solidFill>
-                <a:latin typeface="Aptos" pitchFamily="34" charset="0"/>
-                <a:ea typeface="Aptos" pitchFamily="34" charset="-122"/>
-                <a:cs typeface="Aptos" pitchFamily="34" charset="-120"/>
-              </a:rPr>
-              <a:t>Tool</a:t>
-            </a:r>
-            <a:endParaRPr lang="en-US" sz="1500" dirty="0"/>
-          </a:p>
-        </p:txBody>
-      </p:sp>
-      <p:sp>
-        <p:nvSpPr>
-          <p:cNvPr id="17" name="Shape 15"/>
-          <p:cNvSpPr/>
-          <p:nvPr/>
-        </p:nvSpPr>
-        <p:spPr>
-          <a:xfrm>
-            <a:off x="10274808" y="3977640"/>
-            <a:ext cx="972312" cy="749808"/>
-          </a:xfrm>
-          <a:prstGeom prst="roundRect">
-            <a:avLst>
-              <a:gd name="adj" fmla="val 14634"/>
-            </a:avLst>
-          </a:prstGeom>
-          <a:solidFill>
-            <a:srgbClr val="D69A2D"/>
-          </a:solidFill>
-          <a:ln w="12700">
-            <a:solidFill>
-              <a:srgbClr val="D69A2D"/>
-            </a:solidFill>
-            <a:prstDash val="solid"/>
-          </a:ln>
-        </p:spPr>
-      </p:sp>
-      <p:sp>
-        <p:nvSpPr>
-          <p:cNvPr id="18" name="Text 16"/>
-          <p:cNvSpPr/>
-          <p:nvPr/>
-        </p:nvSpPr>
-        <p:spPr>
-          <a:xfrm>
-            <a:off x="10347960" y="4169664"/>
-            <a:ext cx="826008" cy="310896"/>
-          </a:xfrm>
-          <a:prstGeom prst="rect">
-            <a:avLst/>
-          </a:prstGeom>
-          <a:noFill/>
-          <a:ln/>
-        </p:spPr>
-        <p:txBody>
-          <a:bodyPr wrap="square" lIns="0" tIns="0" rIns="0" bIns="0" rtlCol="0" anchor="ctr">
-            <a:normAutofit/>
-          </a:bodyPr>
-          <a:lstStyle/>
-          <a:p>
-            <a:pPr algn="ctr" indent="0" marL="0">
-              <a:buNone/>
-            </a:pPr>
-            <a:r>
-              <a:rPr lang="en-US" sz="1500" b="1" dirty="0">
-                <a:solidFill>
-                  <a:srgbClr val="FFFFFF"/>
-                </a:solidFill>
-                <a:latin typeface="Aptos" pitchFamily="34" charset="0"/>
-                <a:ea typeface="Aptos" pitchFamily="34" charset="-122"/>
-                <a:cs typeface="Aptos" pitchFamily="34" charset="-120"/>
-              </a:rPr>
-              <a:t>Artifact</a:t>
-            </a:r>
-            <a:endParaRPr lang="en-US" sz="1500" dirty="0"/>
+            <a:r>
+              <a:rPr lang="en-US" sz="1380" dirty="0">
+                <a:solidFill>
+                  <a:srgbClr val="17364A"/>
+                </a:solidFill>
+                <a:latin typeface="Aptos" pitchFamily="34" charset="0"/>
+                <a:ea typeface="Aptos" pitchFamily="34" charset="-122"/>
+                <a:cs typeface="Aptos" pitchFamily="34" charset="-120"/>
+              </a:rPr>
+              <a:t>Use a tool when no comparable local process exists.</a:t>
+            </a:r>
+            <a:endParaRPr lang="en-US" sz="1380" dirty="0"/>
+          </a:p>
+          <a:p>
+            <a:r>
+              <a:rPr lang="en-US" sz="1380" dirty="0">
+                <a:solidFill>
+                  <a:srgbClr val="17364A"/>
+                </a:solidFill>
+                <a:latin typeface="Aptos" pitchFamily="34" charset="0"/>
+                <a:ea typeface="Aptos" pitchFamily="34" charset="-122"/>
+                <a:cs typeface="Aptos" pitchFamily="34" charset="-120"/>
+              </a:rPr>
+              <a:t>Adapt existing department templates when they already fit the purpose.</a:t>
+            </a:r>
+            <a:endParaRPr lang="en-US" sz="1380" dirty="0"/>
+          </a:p>
+          <a:p>
+            <a:r>
+              <a:rPr lang="en-US" sz="1380" dirty="0">
+                <a:solidFill>
+                  <a:srgbClr val="17364A"/>
+                </a:solidFill>
+                <a:latin typeface="Aptos" pitchFamily="34" charset="0"/>
+                <a:ea typeface="Aptos" pitchFamily="34" charset="-122"/>
+                <a:cs typeface="Aptos" pitchFamily="34" charset="-120"/>
+              </a:rPr>
+              <a:t>Save the completed artifact as evidence of the decision.</a:t>
+            </a:r>
+            <a:endParaRPr lang="en-US" sz="1380" dirty="0"/>
           </a:p>
         </p:txBody>
       </p:sp>
@@ -16967,13 +14939,11 @@
             </a:avLst>
           </a:prstGeom>
           <a:solidFill>
-            <a:srgbClr val="FFFFFF">
-              <a:alpha val="88000"/>
-            </a:srgbClr>
+            <a:srgbClr val="FFFFFF"/>
           </a:solidFill>
           <a:ln w="12700">
             <a:solidFill>
-              <a:srgbClr val="D6E8F2"/>
+              <a:srgbClr val="B9D7E6"/>
             </a:solidFill>
             <a:prstDash val="solid"/>
           </a:ln>
@@ -16981,30 +14951,42 @@
       </p:sp>
       <p:sp>
         <p:nvSpPr>
-          <p:cNvPr id="14" name="Shape 12"/>
-          <p:cNvSpPr/>
-          <p:nvPr/>
-        </p:nvSpPr>
-        <p:spPr>
-          <a:xfrm>
-            <a:off x="7927848" y="3319272"/>
-            <a:ext cx="792480" cy="749808"/>
-          </a:xfrm>
-          <a:prstGeom prst="roundRect">
-            <a:avLst>
-              <a:gd name="adj" fmla="val 14634"/>
-            </a:avLst>
-          </a:prstGeom>
-          <a:solidFill>
-            <a:srgbClr val="0068B7"/>
-          </a:solidFill>
-          <a:ln w="12700">
-            <a:solidFill>
-              <a:srgbClr val="0068B7"/>
-            </a:solidFill>
-            <a:prstDash val="solid"/>
-          </a:ln>
-        </p:spPr>
+          <p:cNvPr id="14" name="Text 12"/>
+          <p:cNvSpPr/>
+          <p:nvPr/>
+        </p:nvSpPr>
+        <p:spPr>
+          <a:xfrm>
+            <a:off x="7799832" y="2935224"/>
+            <a:ext cx="3145536" cy="256032"/>
+          </a:xfrm>
+          <a:prstGeom prst="rect">
+            <a:avLst/>
+          </a:prstGeom>
+          <a:noFill/>
+          <a:ln/>
+        </p:spPr>
+        <p:txBody>
+          <a:bodyPr wrap="square" lIns="0" tIns="0" rIns="0" bIns="0" rtlCol="0" anchor="ctr"/>
+          <a:lstStyle/>
+          <a:p>
+            <a:pPr indent="0" marL="0">
+              <a:buNone/>
+            </a:pPr>
+            <a:r>
+              <a:rPr lang="en-US" sz="1300" b="1" dirty="0">
+                <a:solidFill>
+                  <a:srgbClr val="0068B7"/>
+                </a:solidFill>
+                <a:latin typeface="Aptos" pitchFamily="34" charset="0"/>
+                <a:ea typeface="Aptos" pitchFamily="34" charset="-122"/>
+                <a:cs typeface="Aptos" pitchFamily="34" charset="-120"/>
+              </a:rPr>
+              <a:t>Concept checkpoints</a:t>
+            </a:r>
+            <a:endParaRPr lang="en-US" sz="1300" dirty="0"/>
+          </a:p>
+        </p:txBody>
       </p:sp>
       <p:sp>
         <p:nvSpPr>
@@ -17014,240 +14996,67 @@
         </p:nvSpPr>
         <p:spPr>
           <a:xfrm>
-            <a:off x="8001000" y="3511296"/>
-            <a:ext cx="646176" cy="310896"/>
-          </a:xfrm>
-          <a:prstGeom prst="rect">
-            <a:avLst/>
-          </a:prstGeom>
-          <a:noFill/>
-          <a:ln/>
-        </p:spPr>
-        <p:txBody>
-          <a:bodyPr wrap="square" lIns="0" tIns="0" rIns="0" bIns="0" rtlCol="0" anchor="ctr">
+            <a:off x="7818120" y="3300984"/>
+            <a:ext cx="3090672" cy="877824"/>
+          </a:xfrm>
+          <a:prstGeom prst="rect">
+            <a:avLst/>
+          </a:prstGeom>
+          <a:noFill/>
+          <a:ln/>
+        </p:spPr>
+        <p:txBody>
+          <a:bodyPr wrap="square" lIns="254" tIns="254" rIns="254" bIns="254" rtlCol="0" anchor="t">
             <a:normAutofit/>
           </a:bodyPr>
           <a:lstStyle/>
           <a:p>
-            <a:pPr algn="ctr" indent="0" marL="0">
-              <a:buNone/>
-            </a:pPr>
-            <a:r>
-              <a:rPr lang="en-US" sz="1500" b="1" dirty="0">
-                <a:solidFill>
-                  <a:srgbClr val="FFFFFF"/>
-                </a:solidFill>
-                <a:latin typeface="Aptos" pitchFamily="34" charset="0"/>
-                <a:ea typeface="Aptos" pitchFamily="34" charset="-122"/>
-                <a:cs typeface="Aptos" pitchFamily="34" charset="-120"/>
-              </a:rPr>
-              <a:t>Plan</a:t>
-            </a:r>
-            <a:endParaRPr lang="en-US" sz="1500" dirty="0"/>
+            <a:r>
+              <a:rPr lang="en-US" sz="1380" dirty="0">
+                <a:solidFill>
+                  <a:srgbClr val="17364A"/>
+                </a:solidFill>
+                <a:latin typeface="Aptos" pitchFamily="34" charset="0"/>
+                <a:ea typeface="Aptos" pitchFamily="34" charset="-122"/>
+                <a:cs typeface="Aptos" pitchFamily="34" charset="-120"/>
+              </a:rPr>
+              <a:t>Explain the difference between user identity, service identity, authentication,.</a:t>
+            </a:r>
+            <a:endParaRPr lang="en-US" sz="1380" dirty="0"/>
+          </a:p>
+          <a:p>
+            <a:r>
+              <a:rPr lang="en-US" sz="1380" dirty="0">
+                <a:solidFill>
+                  <a:srgbClr val="17364A"/>
+                </a:solidFill>
+                <a:latin typeface="Aptos" pitchFamily="34" charset="0"/>
+                <a:ea typeface="Aptos" pitchFamily="34" charset="-122"/>
+                <a:cs typeface="Aptos" pitchFamily="34" charset="-120"/>
+              </a:rPr>
+              <a:t>Define audit log and approval requirements for AI tools that access sensitive systems or.</a:t>
+            </a:r>
+            <a:endParaRPr lang="en-US" sz="1380" dirty="0"/>
+          </a:p>
+          <a:p>
+            <a:r>
+              <a:rPr lang="en-US" sz="1380" dirty="0">
+                <a:solidFill>
+                  <a:srgbClr val="17364A"/>
+                </a:solidFill>
+                <a:latin typeface="Aptos" pitchFamily="34" charset="0"/>
+                <a:ea typeface="Aptos" pitchFamily="34" charset="-122"/>
+                <a:cs typeface="Aptos" pitchFamily="34" charset="-120"/>
+              </a:rPr>
+              <a:t>Create an access and permissions review for an AI workflow.</a:t>
+            </a:r>
+            <a:endParaRPr lang="en-US" sz="1380" dirty="0"/>
           </a:p>
         </p:txBody>
       </p:sp>
       <p:sp>
         <p:nvSpPr>
           <p:cNvPr id="16" name="Shape 14"/>
-          <p:cNvSpPr/>
-          <p:nvPr/>
-        </p:nvSpPr>
-        <p:spPr>
-          <a:xfrm>
-            <a:off x="8976360" y="3319272"/>
-            <a:ext cx="792480" cy="749808"/>
-          </a:xfrm>
-          <a:prstGeom prst="roundRect">
-            <a:avLst>
-              <a:gd name="adj" fmla="val 14634"/>
-            </a:avLst>
-          </a:prstGeom>
-          <a:solidFill>
-            <a:srgbClr val="2F8A28"/>
-          </a:solidFill>
-          <a:ln w="12700">
-            <a:solidFill>
-              <a:srgbClr val="2F8A28"/>
-            </a:solidFill>
-            <a:prstDash val="solid"/>
-          </a:ln>
-        </p:spPr>
-      </p:sp>
-      <p:sp>
-        <p:nvSpPr>
-          <p:cNvPr id="17" name="Text 15"/>
-          <p:cNvSpPr/>
-          <p:nvPr/>
-        </p:nvSpPr>
-        <p:spPr>
-          <a:xfrm>
-            <a:off x="9049512" y="3511296"/>
-            <a:ext cx="646176" cy="310896"/>
-          </a:xfrm>
-          <a:prstGeom prst="rect">
-            <a:avLst/>
-          </a:prstGeom>
-          <a:noFill/>
-          <a:ln/>
-        </p:spPr>
-        <p:txBody>
-          <a:bodyPr wrap="square" lIns="0" tIns="0" rIns="0" bIns="0" rtlCol="0" anchor="ctr">
-            <a:normAutofit/>
-          </a:bodyPr>
-          <a:lstStyle/>
-          <a:p>
-            <a:pPr algn="ctr" indent="0" marL="0">
-              <a:buNone/>
-            </a:pPr>
-            <a:r>
-              <a:rPr lang="en-US" sz="1500" b="1" dirty="0">
-                <a:solidFill>
-                  <a:srgbClr val="FFFFFF"/>
-                </a:solidFill>
-                <a:latin typeface="Aptos" pitchFamily="34" charset="0"/>
-                <a:ea typeface="Aptos" pitchFamily="34" charset="-122"/>
-                <a:cs typeface="Aptos" pitchFamily="34" charset="-120"/>
-              </a:rPr>
-              <a:t>Do</a:t>
-            </a:r>
-            <a:endParaRPr lang="en-US" sz="1500" dirty="0"/>
-          </a:p>
-        </p:txBody>
-      </p:sp>
-      <p:sp>
-        <p:nvSpPr>
-          <p:cNvPr id="18" name="Shape 16"/>
-          <p:cNvSpPr/>
-          <p:nvPr/>
-        </p:nvSpPr>
-        <p:spPr>
-          <a:xfrm>
-            <a:off x="10024872" y="3319272"/>
-            <a:ext cx="792480" cy="749808"/>
-          </a:xfrm>
-          <a:prstGeom prst="roundRect">
-            <a:avLst>
-              <a:gd name="adj" fmla="val 14634"/>
-            </a:avLst>
-          </a:prstGeom>
-          <a:solidFill>
-            <a:srgbClr val="D69A2D"/>
-          </a:solidFill>
-          <a:ln w="12700">
-            <a:solidFill>
-              <a:srgbClr val="D69A2D"/>
-            </a:solidFill>
-            <a:prstDash val="solid"/>
-          </a:ln>
-        </p:spPr>
-      </p:sp>
-      <p:sp>
-        <p:nvSpPr>
-          <p:cNvPr id="19" name="Text 17"/>
-          <p:cNvSpPr/>
-          <p:nvPr/>
-        </p:nvSpPr>
-        <p:spPr>
-          <a:xfrm>
-            <a:off x="10098024" y="3511296"/>
-            <a:ext cx="646176" cy="310896"/>
-          </a:xfrm>
-          <a:prstGeom prst="rect">
-            <a:avLst/>
-          </a:prstGeom>
-          <a:noFill/>
-          <a:ln/>
-        </p:spPr>
-        <p:txBody>
-          <a:bodyPr wrap="square" lIns="0" tIns="0" rIns="0" bIns="0" rtlCol="0" anchor="ctr">
-            <a:normAutofit/>
-          </a:bodyPr>
-          <a:lstStyle/>
-          <a:p>
-            <a:pPr algn="ctr" indent="0" marL="0">
-              <a:buNone/>
-            </a:pPr>
-            <a:r>
-              <a:rPr lang="en-US" sz="1500" b="1" dirty="0">
-                <a:solidFill>
-                  <a:srgbClr val="FFFFFF"/>
-                </a:solidFill>
-                <a:latin typeface="Aptos" pitchFamily="34" charset="0"/>
-                <a:ea typeface="Aptos" pitchFamily="34" charset="-122"/>
-                <a:cs typeface="Aptos" pitchFamily="34" charset="-120"/>
-              </a:rPr>
-              <a:t>Review</a:t>
-            </a:r>
-            <a:endParaRPr lang="en-US" sz="1500" dirty="0"/>
-          </a:p>
-        </p:txBody>
-      </p:sp>
-      <p:sp>
-        <p:nvSpPr>
-          <p:cNvPr id="20" name="Shape 18"/>
-          <p:cNvSpPr/>
-          <p:nvPr/>
-        </p:nvSpPr>
-        <p:spPr>
-          <a:xfrm>
-            <a:off x="8293608" y="4389120"/>
-            <a:ext cx="2157984" cy="0"/>
-          </a:xfrm>
-          <a:prstGeom prst="line">
-            <a:avLst/>
-          </a:prstGeom>
-          <a:noFill/>
-          <a:ln w="25400">
-            <a:solidFill>
-              <a:srgbClr val="8ABBD8"/>
-            </a:solidFill>
-            <a:prstDash val="solid"/>
-          </a:ln>
-        </p:spPr>
-      </p:sp>
-      <p:sp>
-        <p:nvSpPr>
-          <p:cNvPr id="21" name="Text 19"/>
-          <p:cNvSpPr/>
-          <p:nvPr/>
-        </p:nvSpPr>
-        <p:spPr>
-          <a:xfrm>
-            <a:off x="7909560" y="3977640"/>
-            <a:ext cx="2926080" cy="182880"/>
-          </a:xfrm>
-          <a:prstGeom prst="rect">
-            <a:avLst/>
-          </a:prstGeom>
-          <a:noFill/>
-          <a:ln/>
-        </p:spPr>
-        <p:txBody>
-          <a:bodyPr wrap="square" lIns="0" tIns="0" rIns="0" bIns="0" rtlCol="0" anchor="ctr"/>
-          <a:lstStyle/>
-          <a:p>
-            <a:pPr algn="ctr" indent="0" marL="0">
-              <a:buNone/>
-            </a:pPr>
-            <a:r>
-              <a:rPr lang="en-US" sz="1000" dirty="0">
-                <a:solidFill>
-                  <a:srgbClr val="003A63"/>
-                </a:solidFill>
-                <a:latin typeface="Aptos" pitchFamily="34" charset="0"/>
-                <a:ea typeface="Aptos" pitchFamily="34" charset="-122"/>
-                <a:cs typeface="Aptos" pitchFamily="34" charset="-120"/>
-              </a:rPr>
-              <a:t>Dependencies visible</a:t>
-            </a:r>
-            <a:endParaRPr lang="en-US" sz="1000" dirty="0"/>
-          </a:p>
-        </p:txBody>
-      </p:sp>
-      <p:sp>
-        <p:nvSpPr>
-          <p:cNvPr id="22" name="Shape 20"/>
           <p:cNvSpPr/>
           <p:nvPr/>
         </p:nvSpPr>
@@ -17274,7 +15083,7 @@
       </p:sp>
       <p:sp>
         <p:nvSpPr>
-          <p:cNvPr id="23" name="Text 21"/>
+          <p:cNvPr id="17" name="Text 15"/>
           <p:cNvSpPr/>
           <p:nvPr/>
         </p:nvSpPr>
@@ -17313,7 +15122,7 @@
       </p:sp>
       <p:sp>
         <p:nvSpPr>
-          <p:cNvPr id="24" name="Text 22"/>
+          <p:cNvPr id="18" name="Text 16"/>
           <p:cNvSpPr/>
           <p:nvPr/>
         </p:nvSpPr>
@@ -17821,13 +15630,11 @@
             </a:avLst>
           </a:prstGeom>
           <a:solidFill>
-            <a:srgbClr val="FFFFFF">
-              <a:alpha val="88000"/>
-            </a:srgbClr>
+            <a:srgbClr val="FFFFFF"/>
           </a:solidFill>
           <a:ln w="12700">
             <a:solidFill>
-              <a:srgbClr val="D6E8F2"/>
+              <a:srgbClr val="B9D7E6"/>
             </a:solidFill>
             <a:prstDash val="solid"/>
           </a:ln>
@@ -17835,30 +15642,42 @@
       </p:sp>
       <p:sp>
         <p:nvSpPr>
-          <p:cNvPr id="14" name="Shape 12"/>
-          <p:cNvSpPr/>
-          <p:nvPr/>
-        </p:nvSpPr>
-        <p:spPr>
-          <a:xfrm>
-            <a:off x="7927848" y="3319272"/>
-            <a:ext cx="792480" cy="749808"/>
-          </a:xfrm>
-          <a:prstGeom prst="roundRect">
-            <a:avLst>
-              <a:gd name="adj" fmla="val 14634"/>
-            </a:avLst>
-          </a:prstGeom>
-          <a:solidFill>
-            <a:srgbClr val="0068B7"/>
-          </a:solidFill>
-          <a:ln w="12700">
-            <a:solidFill>
-              <a:srgbClr val="0068B7"/>
-            </a:solidFill>
-            <a:prstDash val="solid"/>
-          </a:ln>
-        </p:spPr>
+          <p:cNvPr id="14" name="Text 12"/>
+          <p:cNvSpPr/>
+          <p:nvPr/>
+        </p:nvSpPr>
+        <p:spPr>
+          <a:xfrm>
+            <a:off x="7799832" y="2935224"/>
+            <a:ext cx="3145536" cy="256032"/>
+          </a:xfrm>
+          <a:prstGeom prst="rect">
+            <a:avLst/>
+          </a:prstGeom>
+          <a:noFill/>
+          <a:ln/>
+        </p:spPr>
+        <p:txBody>
+          <a:bodyPr wrap="square" lIns="0" tIns="0" rIns="0" bIns="0" rtlCol="0" anchor="ctr"/>
+          <a:lstStyle/>
+          <a:p>
+            <a:pPr indent="0" marL="0">
+              <a:buNone/>
+            </a:pPr>
+            <a:r>
+              <a:rPr lang="en-US" sz="1300" b="1" dirty="0">
+                <a:solidFill>
+                  <a:srgbClr val="0068B7"/>
+                </a:solidFill>
+                <a:latin typeface="Aptos" pitchFamily="34" charset="0"/>
+                <a:ea typeface="Aptos" pitchFamily="34" charset="-122"/>
+                <a:cs typeface="Aptos" pitchFamily="34" charset="-120"/>
+              </a:rPr>
+              <a:t>Concept checkpoints</a:t>
+            </a:r>
+            <a:endParaRPr lang="en-US" sz="1300" dirty="0"/>
+          </a:p>
+        </p:txBody>
       </p:sp>
       <p:sp>
         <p:nvSpPr>
@@ -17868,240 +15687,67 @@
         </p:nvSpPr>
         <p:spPr>
           <a:xfrm>
-            <a:off x="8001000" y="3511296"/>
-            <a:ext cx="646176" cy="310896"/>
-          </a:xfrm>
-          <a:prstGeom prst="rect">
-            <a:avLst/>
-          </a:prstGeom>
-          <a:noFill/>
-          <a:ln/>
-        </p:spPr>
-        <p:txBody>
-          <a:bodyPr wrap="square" lIns="0" tIns="0" rIns="0" bIns="0" rtlCol="0" anchor="ctr">
+            <a:off x="7818120" y="3300984"/>
+            <a:ext cx="3090672" cy="877824"/>
+          </a:xfrm>
+          <a:prstGeom prst="rect">
+            <a:avLst/>
+          </a:prstGeom>
+          <a:noFill/>
+          <a:ln/>
+        </p:spPr>
+        <p:txBody>
+          <a:bodyPr wrap="square" lIns="254" tIns="254" rIns="254" bIns="254" rtlCol="0" anchor="t">
             <a:normAutofit/>
           </a:bodyPr>
           <a:lstStyle/>
           <a:p>
-            <a:pPr algn="ctr" indent="0" marL="0">
-              <a:buNone/>
-            </a:pPr>
-            <a:r>
-              <a:rPr lang="en-US" sz="1500" b="1" dirty="0">
-                <a:solidFill>
-                  <a:srgbClr val="FFFFFF"/>
-                </a:solidFill>
-                <a:latin typeface="Aptos" pitchFamily="34" charset="0"/>
-                <a:ea typeface="Aptos" pitchFamily="34" charset="-122"/>
-                <a:cs typeface="Aptos" pitchFamily="34" charset="-120"/>
-              </a:rPr>
-              <a:t>Plan</a:t>
-            </a:r>
-            <a:endParaRPr lang="en-US" sz="1500" dirty="0"/>
+            <a:r>
+              <a:rPr lang="en-US" sz="1380" dirty="0">
+                <a:solidFill>
+                  <a:srgbClr val="17364A"/>
+                </a:solidFill>
+                <a:latin typeface="Aptos" pitchFamily="34" charset="0"/>
+                <a:ea typeface="Aptos" pitchFamily="34" charset="-122"/>
+                <a:cs typeface="Aptos" pitchFamily="34" charset="-120"/>
+              </a:rPr>
+              <a:t>Identity, access, and permissions determine who or what can use data, systems, tools, and.</a:t>
+            </a:r>
+            <a:endParaRPr lang="en-US" sz="1380" dirty="0"/>
+          </a:p>
+          <a:p>
+            <a:r>
+              <a:rPr lang="en-US" sz="1380" dirty="0">
+                <a:solidFill>
+                  <a:srgbClr val="17364A"/>
+                </a:solidFill>
+                <a:latin typeface="Aptos" pitchFamily="34" charset="0"/>
+                <a:ea typeface="Aptos" pitchFamily="34" charset="-122"/>
+                <a:cs typeface="Aptos" pitchFamily="34" charset="-120"/>
+              </a:rPr>
+              <a:t>Public health AI workflows may involve staff users, service accounts, APIs, vendors,.</a:t>
+            </a:r>
+            <a:endParaRPr lang="en-US" sz="1380" dirty="0"/>
+          </a:p>
+          <a:p>
+            <a:r>
+              <a:rPr lang="en-US" sz="1380" dirty="0">
+                <a:solidFill>
+                  <a:srgbClr val="17364A"/>
+                </a:solidFill>
+                <a:latin typeface="Aptos" pitchFamily="34" charset="0"/>
+                <a:ea typeface="Aptos" pitchFamily="34" charset="-122"/>
+                <a:cs typeface="Aptos" pitchFamily="34" charset="-120"/>
+              </a:rPr>
+              <a:t>Without clear access controls, an AI tool may retrieve sensitive data, expose information.</a:t>
+            </a:r>
+            <a:endParaRPr lang="en-US" sz="1380" dirty="0"/>
           </a:p>
         </p:txBody>
       </p:sp>
       <p:sp>
         <p:nvSpPr>
           <p:cNvPr id="16" name="Shape 14"/>
-          <p:cNvSpPr/>
-          <p:nvPr/>
-        </p:nvSpPr>
-        <p:spPr>
-          <a:xfrm>
-            <a:off x="8976360" y="3319272"/>
-            <a:ext cx="792480" cy="749808"/>
-          </a:xfrm>
-          <a:prstGeom prst="roundRect">
-            <a:avLst>
-              <a:gd name="adj" fmla="val 14634"/>
-            </a:avLst>
-          </a:prstGeom>
-          <a:solidFill>
-            <a:srgbClr val="2F8A28"/>
-          </a:solidFill>
-          <a:ln w="12700">
-            <a:solidFill>
-              <a:srgbClr val="2F8A28"/>
-            </a:solidFill>
-            <a:prstDash val="solid"/>
-          </a:ln>
-        </p:spPr>
-      </p:sp>
-      <p:sp>
-        <p:nvSpPr>
-          <p:cNvPr id="17" name="Text 15"/>
-          <p:cNvSpPr/>
-          <p:nvPr/>
-        </p:nvSpPr>
-        <p:spPr>
-          <a:xfrm>
-            <a:off x="9049512" y="3511296"/>
-            <a:ext cx="646176" cy="310896"/>
-          </a:xfrm>
-          <a:prstGeom prst="rect">
-            <a:avLst/>
-          </a:prstGeom>
-          <a:noFill/>
-          <a:ln/>
-        </p:spPr>
-        <p:txBody>
-          <a:bodyPr wrap="square" lIns="0" tIns="0" rIns="0" bIns="0" rtlCol="0" anchor="ctr">
-            <a:normAutofit/>
-          </a:bodyPr>
-          <a:lstStyle/>
-          <a:p>
-            <a:pPr algn="ctr" indent="0" marL="0">
-              <a:buNone/>
-            </a:pPr>
-            <a:r>
-              <a:rPr lang="en-US" sz="1500" b="1" dirty="0">
-                <a:solidFill>
-                  <a:srgbClr val="FFFFFF"/>
-                </a:solidFill>
-                <a:latin typeface="Aptos" pitchFamily="34" charset="0"/>
-                <a:ea typeface="Aptos" pitchFamily="34" charset="-122"/>
-                <a:cs typeface="Aptos" pitchFamily="34" charset="-120"/>
-              </a:rPr>
-              <a:t>Do</a:t>
-            </a:r>
-            <a:endParaRPr lang="en-US" sz="1500" dirty="0"/>
-          </a:p>
-        </p:txBody>
-      </p:sp>
-      <p:sp>
-        <p:nvSpPr>
-          <p:cNvPr id="18" name="Shape 16"/>
-          <p:cNvSpPr/>
-          <p:nvPr/>
-        </p:nvSpPr>
-        <p:spPr>
-          <a:xfrm>
-            <a:off x="10024872" y="3319272"/>
-            <a:ext cx="792480" cy="749808"/>
-          </a:xfrm>
-          <a:prstGeom prst="roundRect">
-            <a:avLst>
-              <a:gd name="adj" fmla="val 14634"/>
-            </a:avLst>
-          </a:prstGeom>
-          <a:solidFill>
-            <a:srgbClr val="D69A2D"/>
-          </a:solidFill>
-          <a:ln w="12700">
-            <a:solidFill>
-              <a:srgbClr val="D69A2D"/>
-            </a:solidFill>
-            <a:prstDash val="solid"/>
-          </a:ln>
-        </p:spPr>
-      </p:sp>
-      <p:sp>
-        <p:nvSpPr>
-          <p:cNvPr id="19" name="Text 17"/>
-          <p:cNvSpPr/>
-          <p:nvPr/>
-        </p:nvSpPr>
-        <p:spPr>
-          <a:xfrm>
-            <a:off x="10098024" y="3511296"/>
-            <a:ext cx="646176" cy="310896"/>
-          </a:xfrm>
-          <a:prstGeom prst="rect">
-            <a:avLst/>
-          </a:prstGeom>
-          <a:noFill/>
-          <a:ln/>
-        </p:spPr>
-        <p:txBody>
-          <a:bodyPr wrap="square" lIns="0" tIns="0" rIns="0" bIns="0" rtlCol="0" anchor="ctr">
-            <a:normAutofit/>
-          </a:bodyPr>
-          <a:lstStyle/>
-          <a:p>
-            <a:pPr algn="ctr" indent="0" marL="0">
-              <a:buNone/>
-            </a:pPr>
-            <a:r>
-              <a:rPr lang="en-US" sz="1500" b="1" dirty="0">
-                <a:solidFill>
-                  <a:srgbClr val="FFFFFF"/>
-                </a:solidFill>
-                <a:latin typeface="Aptos" pitchFamily="34" charset="0"/>
-                <a:ea typeface="Aptos" pitchFamily="34" charset="-122"/>
-                <a:cs typeface="Aptos" pitchFamily="34" charset="-120"/>
-              </a:rPr>
-              <a:t>Review</a:t>
-            </a:r>
-            <a:endParaRPr lang="en-US" sz="1500" dirty="0"/>
-          </a:p>
-        </p:txBody>
-      </p:sp>
-      <p:sp>
-        <p:nvSpPr>
-          <p:cNvPr id="20" name="Shape 18"/>
-          <p:cNvSpPr/>
-          <p:nvPr/>
-        </p:nvSpPr>
-        <p:spPr>
-          <a:xfrm>
-            <a:off x="8293608" y="4389120"/>
-            <a:ext cx="2157984" cy="0"/>
-          </a:xfrm>
-          <a:prstGeom prst="line">
-            <a:avLst/>
-          </a:prstGeom>
-          <a:noFill/>
-          <a:ln w="25400">
-            <a:solidFill>
-              <a:srgbClr val="8ABBD8"/>
-            </a:solidFill>
-            <a:prstDash val="solid"/>
-          </a:ln>
-        </p:spPr>
-      </p:sp>
-      <p:sp>
-        <p:nvSpPr>
-          <p:cNvPr id="21" name="Text 19"/>
-          <p:cNvSpPr/>
-          <p:nvPr/>
-        </p:nvSpPr>
-        <p:spPr>
-          <a:xfrm>
-            <a:off x="7909560" y="3977640"/>
-            <a:ext cx="2926080" cy="182880"/>
-          </a:xfrm>
-          <a:prstGeom prst="rect">
-            <a:avLst/>
-          </a:prstGeom>
-          <a:noFill/>
-          <a:ln/>
-        </p:spPr>
-        <p:txBody>
-          <a:bodyPr wrap="square" lIns="0" tIns="0" rIns="0" bIns="0" rtlCol="0" anchor="ctr"/>
-          <a:lstStyle/>
-          <a:p>
-            <a:pPr algn="ctr" indent="0" marL="0">
-              <a:buNone/>
-            </a:pPr>
-            <a:r>
-              <a:rPr lang="en-US" sz="1000" dirty="0">
-                <a:solidFill>
-                  <a:srgbClr val="003A63"/>
-                </a:solidFill>
-                <a:latin typeface="Aptos" pitchFamily="34" charset="0"/>
-                <a:ea typeface="Aptos" pitchFamily="34" charset="-122"/>
-                <a:cs typeface="Aptos" pitchFamily="34" charset="-120"/>
-              </a:rPr>
-              <a:t>Dependencies visible</a:t>
-            </a:r>
-            <a:endParaRPr lang="en-US" sz="1000" dirty="0"/>
-          </a:p>
-        </p:txBody>
-      </p:sp>
-      <p:sp>
-        <p:nvSpPr>
-          <p:cNvPr id="22" name="Shape 20"/>
           <p:cNvSpPr/>
           <p:nvPr/>
         </p:nvSpPr>
@@ -18128,7 +15774,7 @@
       </p:sp>
       <p:sp>
         <p:nvSpPr>
-          <p:cNvPr id="23" name="Text 21"/>
+          <p:cNvPr id="17" name="Text 15"/>
           <p:cNvSpPr/>
           <p:nvPr/>
         </p:nvSpPr>
@@ -18167,7 +15813,7 @@
       </p:sp>
       <p:sp>
         <p:nvSpPr>
-          <p:cNvPr id="24" name="Text 22"/>
+          <p:cNvPr id="18" name="Text 16"/>
           <p:cNvSpPr/>
           <p:nvPr/>
         </p:nvSpPr>
@@ -18675,13 +16321,11 @@
             </a:avLst>
           </a:prstGeom>
           <a:solidFill>
-            <a:srgbClr val="FFFFFF">
-              <a:alpha val="88000"/>
-            </a:srgbClr>
+            <a:srgbClr val="FFFFFF"/>
           </a:solidFill>
           <a:ln w="12700">
             <a:solidFill>
-              <a:srgbClr val="D6E8F2"/>
+              <a:srgbClr val="B9D7E6"/>
             </a:solidFill>
             <a:prstDash val="solid"/>
           </a:ln>
@@ -18689,190 +16333,112 @@
       </p:sp>
       <p:sp>
         <p:nvSpPr>
-          <p:cNvPr id="14" name="Shape 12"/>
-          <p:cNvSpPr/>
-          <p:nvPr/>
-        </p:nvSpPr>
-        <p:spPr>
-          <a:xfrm>
-            <a:off x="7891272" y="3108960"/>
-            <a:ext cx="566928" cy="566928"/>
-          </a:xfrm>
-          <a:prstGeom prst="ellipse">
-            <a:avLst/>
-          </a:prstGeom>
-          <a:solidFill>
-            <a:srgbClr val="0068B7"/>
-          </a:solidFill>
-          <a:ln w="12700">
-            <a:solidFill>
-              <a:srgbClr val="0068B7"/>
-            </a:solidFill>
-            <a:prstDash val="solid"/>
-          </a:ln>
-        </p:spPr>
-      </p:sp>
-      <p:sp>
-        <p:nvSpPr>
-          <p:cNvPr id="15" name="Shape 13"/>
-          <p:cNvSpPr/>
-          <p:nvPr/>
-        </p:nvSpPr>
-        <p:spPr>
-          <a:xfrm>
-            <a:off x="10287000" y="3108960"/>
-            <a:ext cx="566928" cy="566928"/>
-          </a:xfrm>
-          <a:prstGeom prst="ellipse">
-            <a:avLst/>
-          </a:prstGeom>
-          <a:solidFill>
-            <a:srgbClr val="2F8A28"/>
-          </a:solidFill>
-          <a:ln w="12700">
-            <a:solidFill>
-              <a:srgbClr val="2F8A28"/>
-            </a:solidFill>
-            <a:prstDash val="solid"/>
-          </a:ln>
-        </p:spPr>
+          <p:cNvPr id="14" name="Text 12"/>
+          <p:cNvSpPr/>
+          <p:nvPr/>
+        </p:nvSpPr>
+        <p:spPr>
+          <a:xfrm>
+            <a:off x="7799832" y="2935224"/>
+            <a:ext cx="3145536" cy="256032"/>
+          </a:xfrm>
+          <a:prstGeom prst="rect">
+            <a:avLst/>
+          </a:prstGeom>
+          <a:noFill/>
+          <a:ln/>
+        </p:spPr>
+        <p:txBody>
+          <a:bodyPr wrap="square" lIns="0" tIns="0" rIns="0" bIns="0" rtlCol="0" anchor="ctr"/>
+          <a:lstStyle/>
+          <a:p>
+            <a:pPr indent="0" marL="0">
+              <a:buNone/>
+            </a:pPr>
+            <a:r>
+              <a:rPr lang="en-US" sz="1300" b="1" dirty="0">
+                <a:solidFill>
+                  <a:srgbClr val="0068B7"/>
+                </a:solidFill>
+                <a:latin typeface="Aptos" pitchFamily="34" charset="0"/>
+                <a:ea typeface="Aptos" pitchFamily="34" charset="-122"/>
+                <a:cs typeface="Aptos" pitchFamily="34" charset="-120"/>
+              </a:rPr>
+              <a:t>Concept checkpoints</a:t>
+            </a:r>
+            <a:endParaRPr lang="en-US" sz="1300" dirty="0"/>
+          </a:p>
+        </p:txBody>
+      </p:sp>
+      <p:sp>
+        <p:nvSpPr>
+          <p:cNvPr id="15" name="Text 13"/>
+          <p:cNvSpPr/>
+          <p:nvPr/>
+        </p:nvSpPr>
+        <p:spPr>
+          <a:xfrm>
+            <a:off x="7818120" y="3300984"/>
+            <a:ext cx="3090672" cy="877824"/>
+          </a:xfrm>
+          <a:prstGeom prst="rect">
+            <a:avLst/>
+          </a:prstGeom>
+          <a:noFill/>
+          <a:ln/>
+        </p:spPr>
+        <p:txBody>
+          <a:bodyPr wrap="square" lIns="254" tIns="254" rIns="254" bIns="254" rtlCol="0" anchor="t">
+            <a:normAutofit/>
+          </a:bodyPr>
+          <a:lstStyle/>
+          <a:p>
+            <a:r>
+              <a:rPr lang="en-US" sz="1380" dirty="0">
+                <a:solidFill>
+                  <a:srgbClr val="17364A"/>
+                </a:solidFill>
+                <a:latin typeface="Aptos" pitchFamily="34" charset="0"/>
+                <a:ea typeface="Aptos" pitchFamily="34" charset="-122"/>
+                <a:cs typeface="Aptos" pitchFamily="34" charset="-120"/>
+              </a:rPr>
+              <a:t>It is not legal advice and does not replace review by agency legal counsel, privacy.</a:t>
+            </a:r>
+            <a:endParaRPr lang="en-US" sz="1380" dirty="0"/>
+          </a:p>
+          <a:p>
+            <a:r>
+              <a:rPr lang="en-US" sz="1380" dirty="0">
+                <a:solidFill>
+                  <a:srgbClr val="17364A"/>
+                </a:solidFill>
+                <a:latin typeface="Aptos" pitchFamily="34" charset="0"/>
+                <a:ea typeface="Aptos" pitchFamily="34" charset="-122"/>
+                <a:cs typeface="Aptos" pitchFamily="34" charset="-120"/>
+              </a:rPr>
+              <a:t>Requirements may vary by state, locality, territory, Tribe, agency, funding source,.</a:t>
+            </a:r>
+            <a:endParaRPr lang="en-US" sz="1380" dirty="0"/>
+          </a:p>
+          <a:p>
+            <a:r>
+              <a:rPr lang="en-US" sz="1380" dirty="0">
+                <a:solidFill>
+                  <a:srgbClr val="17364A"/>
+                </a:solidFill>
+                <a:latin typeface="Aptos" pitchFamily="34" charset="0"/>
+                <a:ea typeface="Aptos" pitchFamily="34" charset="-122"/>
+                <a:cs typeface="Aptos" pitchFamily="34" charset="-120"/>
+              </a:rPr>
+              <a:t>Learners should use this module to identify the issues that require review and should.</a:t>
+            </a:r>
+            <a:endParaRPr lang="en-US" sz="1380" dirty="0"/>
+          </a:p>
+        </p:txBody>
       </p:sp>
       <p:sp>
         <p:nvSpPr>
           <p:cNvPr id="16" name="Shape 14"/>
-          <p:cNvSpPr/>
-          <p:nvPr/>
-        </p:nvSpPr>
-        <p:spPr>
-          <a:xfrm>
-            <a:off x="9089136" y="3456432"/>
-            <a:ext cx="566928" cy="566928"/>
-          </a:xfrm>
-          <a:prstGeom prst="ellipse">
-            <a:avLst/>
-          </a:prstGeom>
-          <a:solidFill>
-            <a:srgbClr val="6A4CA3"/>
-          </a:solidFill>
-          <a:ln w="12700">
-            <a:solidFill>
-              <a:srgbClr val="6A4CA3"/>
-            </a:solidFill>
-            <a:prstDash val="solid"/>
-          </a:ln>
-        </p:spPr>
-      </p:sp>
-      <p:sp>
-        <p:nvSpPr>
-          <p:cNvPr id="17" name="Shape 15"/>
-          <p:cNvSpPr/>
-          <p:nvPr/>
-        </p:nvSpPr>
-        <p:spPr>
-          <a:xfrm>
-            <a:off x="8385048" y="3419856"/>
-            <a:ext cx="1975104" cy="0"/>
-          </a:xfrm>
-          <a:prstGeom prst="line">
-            <a:avLst/>
-          </a:prstGeom>
-          <a:noFill/>
-          <a:ln w="25400">
-            <a:solidFill>
-              <a:srgbClr val="8ABBD8"/>
-            </a:solidFill>
-            <a:prstDash val="solid"/>
-          </a:ln>
-        </p:spPr>
-      </p:sp>
-      <p:sp>
-        <p:nvSpPr>
-          <p:cNvPr id="18" name="Shape 16"/>
-          <p:cNvSpPr/>
-          <p:nvPr/>
-        </p:nvSpPr>
-        <p:spPr>
-          <a:xfrm>
-            <a:off x="8202168" y="3630168"/>
-            <a:ext cx="1170432" cy="118872"/>
-          </a:xfrm>
-          <a:prstGeom prst="line">
-            <a:avLst/>
-          </a:prstGeom>
-          <a:noFill/>
-          <a:ln w="25400">
-            <a:solidFill>
-              <a:srgbClr val="8ABBD8"/>
-            </a:solidFill>
-            <a:prstDash val="solid"/>
-          </a:ln>
-        </p:spPr>
-      </p:sp>
-      <p:sp>
-        <p:nvSpPr>
-          <p:cNvPr id="19" name="Shape 17"/>
-          <p:cNvSpPr/>
-          <p:nvPr/>
-        </p:nvSpPr>
-        <p:spPr>
-          <a:xfrm>
-            <a:off x="10543032" y="3630168"/>
-            <a:ext cx="-1170432" cy="118872"/>
-          </a:xfrm>
-          <a:prstGeom prst="line">
-            <a:avLst/>
-          </a:prstGeom>
-          <a:noFill/>
-          <a:ln w="25400">
-            <a:solidFill>
-              <a:srgbClr val="8ABBD8"/>
-            </a:solidFill>
-            <a:prstDash val="solid"/>
-          </a:ln>
-        </p:spPr>
-      </p:sp>
-      <p:sp>
-        <p:nvSpPr>
-          <p:cNvPr id="20" name="Text 18"/>
-          <p:cNvSpPr/>
-          <p:nvPr/>
-        </p:nvSpPr>
-        <p:spPr>
-          <a:xfrm>
-            <a:off x="7863840" y="4069080"/>
-            <a:ext cx="3017520" cy="164592"/>
-          </a:xfrm>
-          <a:prstGeom prst="rect">
-            <a:avLst/>
-          </a:prstGeom>
-          <a:noFill/>
-          <a:ln/>
-        </p:spPr>
-        <p:txBody>
-          <a:bodyPr wrap="square" lIns="0" tIns="0" rIns="0" bIns="0" rtlCol="0" anchor="ctr"/>
-          <a:lstStyle/>
-          <a:p>
-            <a:pPr algn="ctr" indent="0" marL="0">
-              <a:buNone/>
-            </a:pPr>
-            <a:r>
-              <a:rPr lang="en-US" sz="900" b="1" dirty="0">
-                <a:solidFill>
-                  <a:srgbClr val="003A63"/>
-                </a:solidFill>
-                <a:latin typeface="Aptos" pitchFamily="34" charset="0"/>
-                <a:ea typeface="Aptos" pitchFamily="34" charset="-122"/>
-                <a:cs typeface="Aptos" pitchFamily="34" charset="-120"/>
-              </a:rPr>
-              <a:t>Decision rights</a:t>
-            </a:r>
-            <a:endParaRPr lang="en-US" sz="900" dirty="0"/>
-          </a:p>
-        </p:txBody>
-      </p:sp>
-      <p:sp>
-        <p:nvSpPr>
-          <p:cNvPr id="21" name="Shape 19"/>
           <p:cNvSpPr/>
           <p:nvPr/>
         </p:nvSpPr>
@@ -18899,7 +16465,7 @@
       </p:sp>
       <p:sp>
         <p:nvSpPr>
-          <p:cNvPr id="22" name="Text 20"/>
+          <p:cNvPr id="17" name="Text 15"/>
           <p:cNvSpPr/>
           <p:nvPr/>
         </p:nvSpPr>
@@ -18938,7 +16504,7 @@
       </p:sp>
       <p:sp>
         <p:nvSpPr>
-          <p:cNvPr id="23" name="Text 21"/>
+          <p:cNvPr id="18" name="Text 16"/>
           <p:cNvSpPr/>
           <p:nvPr/>
         </p:nvSpPr>
@@ -19446,13 +17012,11 @@
             </a:avLst>
           </a:prstGeom>
           <a:solidFill>
-            <a:srgbClr val="FFFFFF">
-              <a:alpha val="88000"/>
-            </a:srgbClr>
+            <a:srgbClr val="FFFFFF"/>
           </a:solidFill>
           <a:ln w="12700">
             <a:solidFill>
-              <a:srgbClr val="D6E8F2"/>
+              <a:srgbClr val="B9D7E6"/>
             </a:solidFill>
             <a:prstDash val="solid"/>
           </a:ln>
@@ -19460,30 +17024,42 @@
       </p:sp>
       <p:sp>
         <p:nvSpPr>
-          <p:cNvPr id="14" name="Shape 12"/>
-          <p:cNvSpPr/>
-          <p:nvPr/>
-        </p:nvSpPr>
-        <p:spPr>
-          <a:xfrm>
-            <a:off x="7927848" y="3319272"/>
-            <a:ext cx="792480" cy="749808"/>
-          </a:xfrm>
-          <a:prstGeom prst="roundRect">
-            <a:avLst>
-              <a:gd name="adj" fmla="val 14634"/>
-            </a:avLst>
-          </a:prstGeom>
-          <a:solidFill>
-            <a:srgbClr val="0068B7"/>
-          </a:solidFill>
-          <a:ln w="12700">
-            <a:solidFill>
-              <a:srgbClr val="0068B7"/>
-            </a:solidFill>
-            <a:prstDash val="solid"/>
-          </a:ln>
-        </p:spPr>
+          <p:cNvPr id="14" name="Text 12"/>
+          <p:cNvSpPr/>
+          <p:nvPr/>
+        </p:nvSpPr>
+        <p:spPr>
+          <a:xfrm>
+            <a:off x="7799832" y="2935224"/>
+            <a:ext cx="3145536" cy="256032"/>
+          </a:xfrm>
+          <a:prstGeom prst="rect">
+            <a:avLst/>
+          </a:prstGeom>
+          <a:noFill/>
+          <a:ln/>
+        </p:spPr>
+        <p:txBody>
+          <a:bodyPr wrap="square" lIns="0" tIns="0" rIns="0" bIns="0" rtlCol="0" anchor="ctr"/>
+          <a:lstStyle/>
+          <a:p>
+            <a:pPr indent="0" marL="0">
+              <a:buNone/>
+            </a:pPr>
+            <a:r>
+              <a:rPr lang="en-US" sz="1300" b="1" dirty="0">
+                <a:solidFill>
+                  <a:srgbClr val="0068B7"/>
+                </a:solidFill>
+                <a:latin typeface="Aptos" pitchFamily="34" charset="0"/>
+                <a:ea typeface="Aptos" pitchFamily="34" charset="-122"/>
+                <a:cs typeface="Aptos" pitchFamily="34" charset="-120"/>
+              </a:rPr>
+              <a:t>Concept checkpoints</a:t>
+            </a:r>
+            <a:endParaRPr lang="en-US" sz="1300" dirty="0"/>
+          </a:p>
+        </p:txBody>
       </p:sp>
       <p:sp>
         <p:nvSpPr>
@@ -19493,240 +17069,53 @@
         </p:nvSpPr>
         <p:spPr>
           <a:xfrm>
-            <a:off x="8001000" y="3511296"/>
-            <a:ext cx="646176" cy="310896"/>
-          </a:xfrm>
-          <a:prstGeom prst="rect">
-            <a:avLst/>
-          </a:prstGeom>
-          <a:noFill/>
-          <a:ln/>
-        </p:spPr>
-        <p:txBody>
-          <a:bodyPr wrap="square" lIns="0" tIns="0" rIns="0" bIns="0" rtlCol="0" anchor="ctr">
+            <a:off x="7818120" y="3300984"/>
+            <a:ext cx="3090672" cy="877824"/>
+          </a:xfrm>
+          <a:prstGeom prst="rect">
+            <a:avLst/>
+          </a:prstGeom>
+          <a:noFill/>
+          <a:ln/>
+        </p:spPr>
+        <p:txBody>
+          <a:bodyPr wrap="square" lIns="254" tIns="254" rIns="254" bIns="254" rtlCol="0" anchor="t">
             <a:normAutofit/>
           </a:bodyPr>
           <a:lstStyle/>
           <a:p>
-            <a:pPr algn="ctr" indent="0" marL="0">
-              <a:buNone/>
-            </a:pPr>
-            <a:r>
-              <a:rPr lang="en-US" sz="1500" b="1" dirty="0">
-                <a:solidFill>
-                  <a:srgbClr val="FFFFFF"/>
-                </a:solidFill>
-                <a:latin typeface="Aptos" pitchFamily="34" charset="0"/>
-                <a:ea typeface="Aptos" pitchFamily="34" charset="-122"/>
-                <a:cs typeface="Aptos" pitchFamily="34" charset="-120"/>
-              </a:rPr>
-              <a:t>Plan</a:t>
-            </a:r>
-            <a:endParaRPr lang="en-US" sz="1500" dirty="0"/>
+            <a:r>
+              <a:rPr lang="en-US" sz="1380" dirty="0">
+                <a:solidFill>
+                  <a:srgbClr val="17364A"/>
+                </a:solidFill>
+                <a:latin typeface="Aptos" pitchFamily="34" charset="0"/>
+                <a:ea typeface="Aptos" pitchFamily="34" charset="-122"/>
+                <a:cs typeface="Aptos" pitchFamily="34" charset="-120"/>
+              </a:rPr>
+              <a:t>The access review determines that the assistant may retrieve only records assigned to the.</a:t>
+            </a:r>
+            <a:endParaRPr lang="en-US" sz="1380" dirty="0"/>
+          </a:p>
+          <a:p>
+            <a:r>
+              <a:rPr lang="en-US" sz="1380" dirty="0">
+                <a:solidFill>
+                  <a:srgbClr val="17364A"/>
+                </a:solidFill>
+                <a:latin typeface="Aptos" pitchFamily="34" charset="0"/>
+                <a:ea typeface="Aptos" pitchFamily="34" charset="-122"/>
+                <a:cs typeface="Aptos" pitchFamily="34" charset="-120"/>
+              </a:rPr>
+              <a:t>Logs must show which user requested the summary, which record was accessed, and whether.</a:t>
+            </a:r>
+            <a:endParaRPr lang="en-US" sz="1380" dirty="0"/>
           </a:p>
         </p:txBody>
       </p:sp>
       <p:sp>
         <p:nvSpPr>
           <p:cNvPr id="16" name="Shape 14"/>
-          <p:cNvSpPr/>
-          <p:nvPr/>
-        </p:nvSpPr>
-        <p:spPr>
-          <a:xfrm>
-            <a:off x="8976360" y="3319272"/>
-            <a:ext cx="792480" cy="749808"/>
-          </a:xfrm>
-          <a:prstGeom prst="roundRect">
-            <a:avLst>
-              <a:gd name="adj" fmla="val 14634"/>
-            </a:avLst>
-          </a:prstGeom>
-          <a:solidFill>
-            <a:srgbClr val="2F8A28"/>
-          </a:solidFill>
-          <a:ln w="12700">
-            <a:solidFill>
-              <a:srgbClr val="2F8A28"/>
-            </a:solidFill>
-            <a:prstDash val="solid"/>
-          </a:ln>
-        </p:spPr>
-      </p:sp>
-      <p:sp>
-        <p:nvSpPr>
-          <p:cNvPr id="17" name="Text 15"/>
-          <p:cNvSpPr/>
-          <p:nvPr/>
-        </p:nvSpPr>
-        <p:spPr>
-          <a:xfrm>
-            <a:off x="9049512" y="3511296"/>
-            <a:ext cx="646176" cy="310896"/>
-          </a:xfrm>
-          <a:prstGeom prst="rect">
-            <a:avLst/>
-          </a:prstGeom>
-          <a:noFill/>
-          <a:ln/>
-        </p:spPr>
-        <p:txBody>
-          <a:bodyPr wrap="square" lIns="0" tIns="0" rIns="0" bIns="0" rtlCol="0" anchor="ctr">
-            <a:normAutofit/>
-          </a:bodyPr>
-          <a:lstStyle/>
-          <a:p>
-            <a:pPr algn="ctr" indent="0" marL="0">
-              <a:buNone/>
-            </a:pPr>
-            <a:r>
-              <a:rPr lang="en-US" sz="1500" b="1" dirty="0">
-                <a:solidFill>
-                  <a:srgbClr val="FFFFFF"/>
-                </a:solidFill>
-                <a:latin typeface="Aptos" pitchFamily="34" charset="0"/>
-                <a:ea typeface="Aptos" pitchFamily="34" charset="-122"/>
-                <a:cs typeface="Aptos" pitchFamily="34" charset="-120"/>
-              </a:rPr>
-              <a:t>Do</a:t>
-            </a:r>
-            <a:endParaRPr lang="en-US" sz="1500" dirty="0"/>
-          </a:p>
-        </p:txBody>
-      </p:sp>
-      <p:sp>
-        <p:nvSpPr>
-          <p:cNvPr id="18" name="Shape 16"/>
-          <p:cNvSpPr/>
-          <p:nvPr/>
-        </p:nvSpPr>
-        <p:spPr>
-          <a:xfrm>
-            <a:off x="10024872" y="3319272"/>
-            <a:ext cx="792480" cy="749808"/>
-          </a:xfrm>
-          <a:prstGeom prst="roundRect">
-            <a:avLst>
-              <a:gd name="adj" fmla="val 14634"/>
-            </a:avLst>
-          </a:prstGeom>
-          <a:solidFill>
-            <a:srgbClr val="D69A2D"/>
-          </a:solidFill>
-          <a:ln w="12700">
-            <a:solidFill>
-              <a:srgbClr val="D69A2D"/>
-            </a:solidFill>
-            <a:prstDash val="solid"/>
-          </a:ln>
-        </p:spPr>
-      </p:sp>
-      <p:sp>
-        <p:nvSpPr>
-          <p:cNvPr id="19" name="Text 17"/>
-          <p:cNvSpPr/>
-          <p:nvPr/>
-        </p:nvSpPr>
-        <p:spPr>
-          <a:xfrm>
-            <a:off x="10098024" y="3511296"/>
-            <a:ext cx="646176" cy="310896"/>
-          </a:xfrm>
-          <a:prstGeom prst="rect">
-            <a:avLst/>
-          </a:prstGeom>
-          <a:noFill/>
-          <a:ln/>
-        </p:spPr>
-        <p:txBody>
-          <a:bodyPr wrap="square" lIns="0" tIns="0" rIns="0" bIns="0" rtlCol="0" anchor="ctr">
-            <a:normAutofit/>
-          </a:bodyPr>
-          <a:lstStyle/>
-          <a:p>
-            <a:pPr algn="ctr" indent="0" marL="0">
-              <a:buNone/>
-            </a:pPr>
-            <a:r>
-              <a:rPr lang="en-US" sz="1500" b="1" dirty="0">
-                <a:solidFill>
-                  <a:srgbClr val="FFFFFF"/>
-                </a:solidFill>
-                <a:latin typeface="Aptos" pitchFamily="34" charset="0"/>
-                <a:ea typeface="Aptos" pitchFamily="34" charset="-122"/>
-                <a:cs typeface="Aptos" pitchFamily="34" charset="-120"/>
-              </a:rPr>
-              <a:t>Review</a:t>
-            </a:r>
-            <a:endParaRPr lang="en-US" sz="1500" dirty="0"/>
-          </a:p>
-        </p:txBody>
-      </p:sp>
-      <p:sp>
-        <p:nvSpPr>
-          <p:cNvPr id="20" name="Shape 18"/>
-          <p:cNvSpPr/>
-          <p:nvPr/>
-        </p:nvSpPr>
-        <p:spPr>
-          <a:xfrm>
-            <a:off x="8293608" y="4389120"/>
-            <a:ext cx="2157984" cy="0"/>
-          </a:xfrm>
-          <a:prstGeom prst="line">
-            <a:avLst/>
-          </a:prstGeom>
-          <a:noFill/>
-          <a:ln w="25400">
-            <a:solidFill>
-              <a:srgbClr val="8ABBD8"/>
-            </a:solidFill>
-            <a:prstDash val="solid"/>
-          </a:ln>
-        </p:spPr>
-      </p:sp>
-      <p:sp>
-        <p:nvSpPr>
-          <p:cNvPr id="21" name="Text 19"/>
-          <p:cNvSpPr/>
-          <p:nvPr/>
-        </p:nvSpPr>
-        <p:spPr>
-          <a:xfrm>
-            <a:off x="7909560" y="3977640"/>
-            <a:ext cx="2926080" cy="182880"/>
-          </a:xfrm>
-          <a:prstGeom prst="rect">
-            <a:avLst/>
-          </a:prstGeom>
-          <a:noFill/>
-          <a:ln/>
-        </p:spPr>
-        <p:txBody>
-          <a:bodyPr wrap="square" lIns="0" tIns="0" rIns="0" bIns="0" rtlCol="0" anchor="ctr"/>
-          <a:lstStyle/>
-          <a:p>
-            <a:pPr algn="ctr" indent="0" marL="0">
-              <a:buNone/>
-            </a:pPr>
-            <a:r>
-              <a:rPr lang="en-US" sz="1000" dirty="0">
-                <a:solidFill>
-                  <a:srgbClr val="003A63"/>
-                </a:solidFill>
-                <a:latin typeface="Aptos" pitchFamily="34" charset="0"/>
-                <a:ea typeface="Aptos" pitchFamily="34" charset="-122"/>
-                <a:cs typeface="Aptos" pitchFamily="34" charset="-120"/>
-              </a:rPr>
-              <a:t>Dependencies visible</a:t>
-            </a:r>
-            <a:endParaRPr lang="en-US" sz="1000" dirty="0"/>
-          </a:p>
-        </p:txBody>
-      </p:sp>
-      <p:sp>
-        <p:nvSpPr>
-          <p:cNvPr id="22" name="Shape 20"/>
           <p:cNvSpPr/>
           <p:nvPr/>
         </p:nvSpPr>
@@ -19753,7 +17142,7 @@
       </p:sp>
       <p:sp>
         <p:nvSpPr>
-          <p:cNvPr id="23" name="Text 21"/>
+          <p:cNvPr id="17" name="Text 15"/>
           <p:cNvSpPr/>
           <p:nvPr/>
         </p:nvSpPr>
@@ -19792,7 +17181,7 @@
       </p:sp>
       <p:sp>
         <p:nvSpPr>
-          <p:cNvPr id="24" name="Text 22"/>
+          <p:cNvPr id="18" name="Text 16"/>
           <p:cNvSpPr/>
           <p:nvPr/>
         </p:nvSpPr>
@@ -20300,13 +17689,11 @@
             </a:avLst>
           </a:prstGeom>
           <a:solidFill>
-            <a:srgbClr val="FFFFFF">
-              <a:alpha val="88000"/>
-            </a:srgbClr>
+            <a:srgbClr val="FFFFFF"/>
           </a:solidFill>
           <a:ln w="12700">
             <a:solidFill>
-              <a:srgbClr val="D6E8F2"/>
+              <a:srgbClr val="B9D7E6"/>
             </a:solidFill>
             <a:prstDash val="solid"/>
           </a:ln>
@@ -20314,30 +17701,42 @@
       </p:sp>
       <p:sp>
         <p:nvSpPr>
-          <p:cNvPr id="14" name="Shape 12"/>
-          <p:cNvSpPr/>
-          <p:nvPr/>
-        </p:nvSpPr>
-        <p:spPr>
-          <a:xfrm>
-            <a:off x="7927848" y="3319272"/>
-            <a:ext cx="792480" cy="749808"/>
-          </a:xfrm>
-          <a:prstGeom prst="roundRect">
-            <a:avLst>
-              <a:gd name="adj" fmla="val 14634"/>
-            </a:avLst>
-          </a:prstGeom>
-          <a:solidFill>
-            <a:srgbClr val="0068B7"/>
-          </a:solidFill>
-          <a:ln w="12700">
-            <a:solidFill>
-              <a:srgbClr val="0068B7"/>
-            </a:solidFill>
-            <a:prstDash val="solid"/>
-          </a:ln>
-        </p:spPr>
+          <p:cNvPr id="14" name="Text 12"/>
+          <p:cNvSpPr/>
+          <p:nvPr/>
+        </p:nvSpPr>
+        <p:spPr>
+          <a:xfrm>
+            <a:off x="7799832" y="2935224"/>
+            <a:ext cx="3145536" cy="256032"/>
+          </a:xfrm>
+          <a:prstGeom prst="rect">
+            <a:avLst/>
+          </a:prstGeom>
+          <a:noFill/>
+          <a:ln/>
+        </p:spPr>
+        <p:txBody>
+          <a:bodyPr wrap="square" lIns="0" tIns="0" rIns="0" bIns="0" rtlCol="0" anchor="ctr"/>
+          <a:lstStyle/>
+          <a:p>
+            <a:pPr indent="0" marL="0">
+              <a:buNone/>
+            </a:pPr>
+            <a:r>
+              <a:rPr lang="en-US" sz="1300" b="1" dirty="0">
+                <a:solidFill>
+                  <a:srgbClr val="0068B7"/>
+                </a:solidFill>
+                <a:latin typeface="Aptos" pitchFamily="34" charset="0"/>
+                <a:ea typeface="Aptos" pitchFamily="34" charset="-122"/>
+                <a:cs typeface="Aptos" pitchFamily="34" charset="-120"/>
+              </a:rPr>
+              <a:t>Concept checkpoints</a:t>
+            </a:r>
+            <a:endParaRPr lang="en-US" sz="1300" dirty="0"/>
+          </a:p>
+        </p:txBody>
       </p:sp>
       <p:sp>
         <p:nvSpPr>
@@ -20347,240 +17746,67 @@
         </p:nvSpPr>
         <p:spPr>
           <a:xfrm>
-            <a:off x="8001000" y="3511296"/>
-            <a:ext cx="646176" cy="310896"/>
-          </a:xfrm>
-          <a:prstGeom prst="rect">
-            <a:avLst/>
-          </a:prstGeom>
-          <a:noFill/>
-          <a:ln/>
-        </p:spPr>
-        <p:txBody>
-          <a:bodyPr wrap="square" lIns="0" tIns="0" rIns="0" bIns="0" rtlCol="0" anchor="ctr">
+            <a:off x="7818120" y="3300984"/>
+            <a:ext cx="3090672" cy="877824"/>
+          </a:xfrm>
+          <a:prstGeom prst="rect">
+            <a:avLst/>
+          </a:prstGeom>
+          <a:noFill/>
+          <a:ln/>
+        </p:spPr>
+        <p:txBody>
+          <a:bodyPr wrap="square" lIns="254" tIns="254" rIns="254" bIns="254" rtlCol="0" anchor="t">
             <a:normAutofit/>
           </a:bodyPr>
           <a:lstStyle/>
           <a:p>
-            <a:pPr algn="ctr" indent="0" marL="0">
-              <a:buNone/>
-            </a:pPr>
-            <a:r>
-              <a:rPr lang="en-US" sz="1500" b="1" dirty="0">
-                <a:solidFill>
-                  <a:srgbClr val="FFFFFF"/>
-                </a:solidFill>
-                <a:latin typeface="Aptos" pitchFamily="34" charset="0"/>
-                <a:ea typeface="Aptos" pitchFamily="34" charset="-122"/>
-                <a:cs typeface="Aptos" pitchFamily="34" charset="-120"/>
-              </a:rPr>
-              <a:t>Plan</a:t>
-            </a:r>
-            <a:endParaRPr lang="en-US" sz="1500" dirty="0"/>
+            <a:r>
+              <a:rPr lang="en-US" sz="1380" dirty="0">
+                <a:solidFill>
+                  <a:srgbClr val="17364A"/>
+                </a:solidFill>
+                <a:latin typeface="Aptos" pitchFamily="34" charset="0"/>
+                <a:ea typeface="Aptos" pitchFamily="34" charset="-122"/>
+                <a:cs typeface="Aptos" pitchFamily="34" charset="-120"/>
+              </a:rPr>
+              <a:t>A staff member may log in through single sign-on, an AI service may use a service account.</a:t>
+            </a:r>
+            <a:endParaRPr lang="en-US" sz="1380" dirty="0"/>
+          </a:p>
+          <a:p>
+            <a:r>
+              <a:rPr lang="en-US" sz="1380" dirty="0">
+                <a:solidFill>
+                  <a:srgbClr val="17364A"/>
+                </a:solidFill>
+                <a:latin typeface="Aptos" pitchFamily="34" charset="0"/>
+                <a:ea typeface="Aptos" pitchFamily="34" charset="-122"/>
+                <a:cs typeface="Aptos" pitchFamily="34" charset="-120"/>
+              </a:rPr>
+              <a:t>Agencies should avoid shared accounts or overly broad service accounts because they make.</a:t>
+            </a:r>
+            <a:endParaRPr lang="en-US" sz="1380" dirty="0"/>
+          </a:p>
+          <a:p>
+            <a:r>
+              <a:rPr lang="en-US" sz="1380" dirty="0">
+                <a:solidFill>
+                  <a:srgbClr val="17364A"/>
+                </a:solidFill>
+                <a:latin typeface="Aptos" pitchFamily="34" charset="0"/>
+                <a:ea typeface="Aptos" pitchFamily="34" charset="-122"/>
+                <a:cs typeface="Aptos" pitchFamily="34" charset="-120"/>
+              </a:rPr>
+              <a:t>Authentication verifies who or what is using the system, but authorization defines what.</a:t>
+            </a:r>
+            <a:endParaRPr lang="en-US" sz="1380" dirty="0"/>
           </a:p>
         </p:txBody>
       </p:sp>
       <p:sp>
         <p:nvSpPr>
           <p:cNvPr id="16" name="Shape 14"/>
-          <p:cNvSpPr/>
-          <p:nvPr/>
-        </p:nvSpPr>
-        <p:spPr>
-          <a:xfrm>
-            <a:off x="8976360" y="3319272"/>
-            <a:ext cx="792480" cy="749808"/>
-          </a:xfrm>
-          <a:prstGeom prst="roundRect">
-            <a:avLst>
-              <a:gd name="adj" fmla="val 14634"/>
-            </a:avLst>
-          </a:prstGeom>
-          <a:solidFill>
-            <a:srgbClr val="2F8A28"/>
-          </a:solidFill>
-          <a:ln w="12700">
-            <a:solidFill>
-              <a:srgbClr val="2F8A28"/>
-            </a:solidFill>
-            <a:prstDash val="solid"/>
-          </a:ln>
-        </p:spPr>
-      </p:sp>
-      <p:sp>
-        <p:nvSpPr>
-          <p:cNvPr id="17" name="Text 15"/>
-          <p:cNvSpPr/>
-          <p:nvPr/>
-        </p:nvSpPr>
-        <p:spPr>
-          <a:xfrm>
-            <a:off x="9049512" y="3511296"/>
-            <a:ext cx="646176" cy="310896"/>
-          </a:xfrm>
-          <a:prstGeom prst="rect">
-            <a:avLst/>
-          </a:prstGeom>
-          <a:noFill/>
-          <a:ln/>
-        </p:spPr>
-        <p:txBody>
-          <a:bodyPr wrap="square" lIns="0" tIns="0" rIns="0" bIns="0" rtlCol="0" anchor="ctr">
-            <a:normAutofit/>
-          </a:bodyPr>
-          <a:lstStyle/>
-          <a:p>
-            <a:pPr algn="ctr" indent="0" marL="0">
-              <a:buNone/>
-            </a:pPr>
-            <a:r>
-              <a:rPr lang="en-US" sz="1500" b="1" dirty="0">
-                <a:solidFill>
-                  <a:srgbClr val="FFFFFF"/>
-                </a:solidFill>
-                <a:latin typeface="Aptos" pitchFamily="34" charset="0"/>
-                <a:ea typeface="Aptos" pitchFamily="34" charset="-122"/>
-                <a:cs typeface="Aptos" pitchFamily="34" charset="-120"/>
-              </a:rPr>
-              <a:t>Do</a:t>
-            </a:r>
-            <a:endParaRPr lang="en-US" sz="1500" dirty="0"/>
-          </a:p>
-        </p:txBody>
-      </p:sp>
-      <p:sp>
-        <p:nvSpPr>
-          <p:cNvPr id="18" name="Shape 16"/>
-          <p:cNvSpPr/>
-          <p:nvPr/>
-        </p:nvSpPr>
-        <p:spPr>
-          <a:xfrm>
-            <a:off x="10024872" y="3319272"/>
-            <a:ext cx="792480" cy="749808"/>
-          </a:xfrm>
-          <a:prstGeom prst="roundRect">
-            <a:avLst>
-              <a:gd name="adj" fmla="val 14634"/>
-            </a:avLst>
-          </a:prstGeom>
-          <a:solidFill>
-            <a:srgbClr val="D69A2D"/>
-          </a:solidFill>
-          <a:ln w="12700">
-            <a:solidFill>
-              <a:srgbClr val="D69A2D"/>
-            </a:solidFill>
-            <a:prstDash val="solid"/>
-          </a:ln>
-        </p:spPr>
-      </p:sp>
-      <p:sp>
-        <p:nvSpPr>
-          <p:cNvPr id="19" name="Text 17"/>
-          <p:cNvSpPr/>
-          <p:nvPr/>
-        </p:nvSpPr>
-        <p:spPr>
-          <a:xfrm>
-            <a:off x="10098024" y="3511296"/>
-            <a:ext cx="646176" cy="310896"/>
-          </a:xfrm>
-          <a:prstGeom prst="rect">
-            <a:avLst/>
-          </a:prstGeom>
-          <a:noFill/>
-          <a:ln/>
-        </p:spPr>
-        <p:txBody>
-          <a:bodyPr wrap="square" lIns="0" tIns="0" rIns="0" bIns="0" rtlCol="0" anchor="ctr">
-            <a:normAutofit/>
-          </a:bodyPr>
-          <a:lstStyle/>
-          <a:p>
-            <a:pPr algn="ctr" indent="0" marL="0">
-              <a:buNone/>
-            </a:pPr>
-            <a:r>
-              <a:rPr lang="en-US" sz="1500" b="1" dirty="0">
-                <a:solidFill>
-                  <a:srgbClr val="FFFFFF"/>
-                </a:solidFill>
-                <a:latin typeface="Aptos" pitchFamily="34" charset="0"/>
-                <a:ea typeface="Aptos" pitchFamily="34" charset="-122"/>
-                <a:cs typeface="Aptos" pitchFamily="34" charset="-120"/>
-              </a:rPr>
-              <a:t>Review</a:t>
-            </a:r>
-            <a:endParaRPr lang="en-US" sz="1500" dirty="0"/>
-          </a:p>
-        </p:txBody>
-      </p:sp>
-      <p:sp>
-        <p:nvSpPr>
-          <p:cNvPr id="20" name="Shape 18"/>
-          <p:cNvSpPr/>
-          <p:nvPr/>
-        </p:nvSpPr>
-        <p:spPr>
-          <a:xfrm>
-            <a:off x="8293608" y="4389120"/>
-            <a:ext cx="2157984" cy="0"/>
-          </a:xfrm>
-          <a:prstGeom prst="line">
-            <a:avLst/>
-          </a:prstGeom>
-          <a:noFill/>
-          <a:ln w="25400">
-            <a:solidFill>
-              <a:srgbClr val="8ABBD8"/>
-            </a:solidFill>
-            <a:prstDash val="solid"/>
-          </a:ln>
-        </p:spPr>
-      </p:sp>
-      <p:sp>
-        <p:nvSpPr>
-          <p:cNvPr id="21" name="Text 19"/>
-          <p:cNvSpPr/>
-          <p:nvPr/>
-        </p:nvSpPr>
-        <p:spPr>
-          <a:xfrm>
-            <a:off x="7909560" y="3977640"/>
-            <a:ext cx="2926080" cy="182880"/>
-          </a:xfrm>
-          <a:prstGeom prst="rect">
-            <a:avLst/>
-          </a:prstGeom>
-          <a:noFill/>
-          <a:ln/>
-        </p:spPr>
-        <p:txBody>
-          <a:bodyPr wrap="square" lIns="0" tIns="0" rIns="0" bIns="0" rtlCol="0" anchor="ctr"/>
-          <a:lstStyle/>
-          <a:p>
-            <a:pPr algn="ctr" indent="0" marL="0">
-              <a:buNone/>
-            </a:pPr>
-            <a:r>
-              <a:rPr lang="en-US" sz="1000" dirty="0">
-                <a:solidFill>
-                  <a:srgbClr val="003A63"/>
-                </a:solidFill>
-                <a:latin typeface="Aptos" pitchFamily="34" charset="0"/>
-                <a:ea typeface="Aptos" pitchFamily="34" charset="-122"/>
-                <a:cs typeface="Aptos" pitchFamily="34" charset="-120"/>
-              </a:rPr>
-              <a:t>Dependencies visible</a:t>
-            </a:r>
-            <a:endParaRPr lang="en-US" sz="1000" dirty="0"/>
-          </a:p>
-        </p:txBody>
-      </p:sp>
-      <p:sp>
-        <p:nvSpPr>
-          <p:cNvPr id="22" name="Shape 20"/>
           <p:cNvSpPr/>
           <p:nvPr/>
         </p:nvSpPr>
@@ -20607,7 +17833,7 @@
       </p:sp>
       <p:sp>
         <p:nvSpPr>
-          <p:cNvPr id="23" name="Text 21"/>
+          <p:cNvPr id="17" name="Text 15"/>
           <p:cNvSpPr/>
           <p:nvPr/>
         </p:nvSpPr>
@@ -20646,7 +17872,7 @@
       </p:sp>
       <p:sp>
         <p:nvSpPr>
-          <p:cNvPr id="24" name="Text 22"/>
+          <p:cNvPr id="18" name="Text 16"/>
           <p:cNvSpPr/>
           <p:nvPr/>
         </p:nvSpPr>

--- a/downloads/presentations/modules/gov-350.pptx
+++ b/downloads/presentations/modules/gov-350.pptx
@@ -3447,49 +3447,58 @@
           <a:ln/>
         </p:spPr>
         <p:txBody>
-          <a:bodyPr wrap="square" lIns="635" tIns="635" rIns="635" bIns="635" rtlCol="0" anchor="t">
+          <a:bodyPr wrap="square" lIns="1016" tIns="1016" rIns="1016" bIns="1016" rtlCol="0" anchor="t">
             <a:normAutofit/>
           </a:bodyPr>
           <a:lstStyle/>
           <a:p>
+            <a:pPr indent="0" marL="0">
+              <a:buNone/>
+            </a:pPr>
             <a:r>
               <a:rPr lang="en-US" sz="2100" dirty="0">
                 <a:solidFill>
-                  <a:srgbClr val="17364A"/>
-                </a:solidFill>
-                <a:latin typeface="Aptos" pitchFamily="34" charset="0"/>
-                <a:ea typeface="Aptos" pitchFamily="34" charset="-122"/>
-                <a:cs typeface="Aptos" pitchFamily="34" charset="-120"/>
-              </a:rPr>
-              <a:t>Audit logs should make AI access visible.</a:t>
+                  <a:srgbClr val="003A63"/>
+                </a:solidFill>
+                <a:latin typeface="Aptos" pitchFamily="34" charset="0"/>
+                <a:ea typeface="Aptos" pitchFamily="34" charset="-122"/>
+                <a:cs typeface="Aptos" pitchFamily="34" charset="-120"/>
+              </a:rPr>
+              <a:t>• Audit logs should make AI access visible.</a:t>
             </a:r>
             <a:endParaRPr lang="en-US" sz="2100" dirty="0"/>
           </a:p>
           <a:p>
+            <a:pPr indent="0" marL="0">
+              <a:buNone/>
+            </a:pPr>
             <a:r>
               <a:rPr lang="en-US" sz="2100" dirty="0">
                 <a:solidFill>
-                  <a:srgbClr val="17364A"/>
-                </a:solidFill>
-                <a:latin typeface="Aptos" pitchFamily="34" charset="0"/>
-                <a:ea typeface="Aptos" pitchFamily="34" charset="-122"/>
-                <a:cs typeface="Aptos" pitchFamily="34" charset="-120"/>
-              </a:rPr>
-              <a:t>Logs should capture user identity, service identity, data accessed, action taken, time, output.</a:t>
+                  <a:srgbClr val="003A63"/>
+                </a:solidFill>
+                <a:latin typeface="Aptos" pitchFamily="34" charset="0"/>
+                <a:ea typeface="Aptos" pitchFamily="34" charset="-122"/>
+                <a:cs typeface="Aptos" pitchFamily="34" charset="-120"/>
+              </a:rPr>
+              <a:t>• Logs should capture user identity, service identity, data accessed, action taken, time, output.</a:t>
             </a:r>
             <a:endParaRPr lang="en-US" sz="2100" dirty="0"/>
           </a:p>
           <a:p>
+            <a:pPr indent="0" marL="0">
+              <a:buNone/>
+            </a:pPr>
             <a:r>
               <a:rPr lang="en-US" sz="2100" dirty="0">
                 <a:solidFill>
-                  <a:srgbClr val="17364A"/>
-                </a:solidFill>
-                <a:latin typeface="Aptos" pitchFamily="34" charset="0"/>
-                <a:ea typeface="Aptos" pitchFamily="34" charset="-122"/>
-                <a:cs typeface="Aptos" pitchFamily="34" charset="-120"/>
-              </a:rPr>
-              <a:t>For agentic workflows, logs should also show tool calls, attempted actions, blocked actions, and human.</a:t>
+                  <a:srgbClr val="003A63"/>
+                </a:solidFill>
+                <a:latin typeface="Aptos" pitchFamily="34" charset="0"/>
+                <a:ea typeface="Aptos" pitchFamily="34" charset="-122"/>
+                <a:cs typeface="Aptos" pitchFamily="34" charset="-120"/>
+              </a:rPr>
+              <a:t>• For agentic workflows, logs should also show tool calls, attempted actions, blocked actions,.</a:t>
             </a:r>
             <a:endParaRPr lang="en-US" sz="2100" dirty="0"/>
           </a:p>
@@ -3569,17 +3578,17 @@
         </p:nvSpPr>
         <p:spPr>
           <a:xfrm>
-            <a:off x="7799832" y="1828800"/>
-            <a:ext cx="3145536" cy="685800"/>
-          </a:xfrm>
-          <a:prstGeom prst="rect">
-            <a:avLst/>
-          </a:prstGeom>
-          <a:noFill/>
-          <a:ln/>
-        </p:spPr>
-        <p:txBody>
-          <a:bodyPr wrap="square" lIns="0" tIns="0" rIns="0" bIns="0" rtlCol="0" anchor="t">
+            <a:off x="7799832" y="1801368"/>
+            <a:ext cx="3145536" cy="758952"/>
+          </a:xfrm>
+          <a:prstGeom prst="rect">
+            <a:avLst/>
+          </a:prstGeom>
+          <a:noFill/>
+          <a:ln/>
+        </p:spPr>
+        <p:txBody>
+          <a:bodyPr wrap="square" lIns="254" tIns="254" rIns="254" bIns="254" rtlCol="0" anchor="t">
             <a:normAutofit/>
           </a:bodyPr>
           <a:lstStyle/>
@@ -3588,7 +3597,7 @@
               <a:buNone/>
             </a:pPr>
             <a:r>
-              <a:rPr lang="en-US" sz="1550" dirty="0">
+              <a:rPr lang="en-US" sz="1320" dirty="0">
                 <a:solidFill>
                   <a:srgbClr val="17364A"/>
                 </a:solidFill>
@@ -3598,7 +3607,7 @@
               </a:rPr>
               <a:t>Audit logs should make AI access visible.</a:t>
             </a:r>
-            <a:endParaRPr lang="en-US" sz="1550" dirty="0"/>
+            <a:endParaRPr lang="en-US" sz="1320" dirty="0"/>
           </a:p>
         </p:txBody>
       </p:sp>
@@ -3686,13 +3695,16 @@
           <a:ln/>
         </p:spPr>
         <p:txBody>
-          <a:bodyPr wrap="square" lIns="254" tIns="254" rIns="254" bIns="254" rtlCol="0" anchor="t">
+          <a:bodyPr wrap="square" lIns="508" tIns="508" rIns="508" bIns="508" rtlCol="0" anchor="t">
             <a:normAutofit/>
           </a:bodyPr>
           <a:lstStyle/>
           <a:p>
-            <a:r>
-              <a:rPr lang="en-US" sz="1380" dirty="0">
+            <a:pPr indent="0" marL="0">
+              <a:buNone/>
+            </a:pPr>
+            <a:r>
+              <a:rPr lang="en-US" sz="1220" dirty="0">
                 <a:solidFill>
                   <a:srgbClr val="17364A"/>
                 </a:solidFill>
@@ -3700,13 +3712,16 @@
                 <a:ea typeface="Aptos" pitchFamily="34" charset="-122"/>
                 <a:cs typeface="Aptos" pitchFamily="34" charset="-120"/>
               </a:rPr>
-              <a:t>Logs should capture user identity, service identity, data accessed, action taken, time,.</a:t>
-            </a:r>
-            <a:endParaRPr lang="en-US" sz="1380" dirty="0"/>
-          </a:p>
-          <a:p>
-            <a:r>
-              <a:rPr lang="en-US" sz="1380" dirty="0">
+              <a:t>Logs should capture user identity, service identity, data.</a:t>
+            </a:r>
+            <a:endParaRPr lang="en-US" sz="1220" dirty="0"/>
+          </a:p>
+          <a:p>
+            <a:pPr indent="0" marL="0">
+              <a:buNone/>
+            </a:pPr>
+            <a:r>
+              <a:rPr lang="en-US" sz="1220" dirty="0">
                 <a:solidFill>
                   <a:srgbClr val="17364A"/>
                 </a:solidFill>
@@ -3714,9 +3729,9 @@
                 <a:ea typeface="Aptos" pitchFamily="34" charset="-122"/>
                 <a:cs typeface="Aptos" pitchFamily="34" charset="-120"/>
               </a:rPr>
-              <a:t>For agentic workflows, logs should also show tool calls, attempted actions, blocked.</a:t>
-            </a:r>
-            <a:endParaRPr lang="en-US" sz="1380" dirty="0"/>
+              <a:t>For agentic workflows, logs should also show tool calls, attempted.</a:t>
+            </a:r>
+            <a:endParaRPr lang="en-US" sz="1220" dirty="0"/>
           </a:p>
         </p:txBody>
       </p:sp>
@@ -3794,17 +3809,17 @@
         </p:nvSpPr>
         <p:spPr>
           <a:xfrm>
-            <a:off x="7799832" y="5001768"/>
-            <a:ext cx="3145536" cy="502920"/>
-          </a:xfrm>
-          <a:prstGeom prst="rect">
-            <a:avLst/>
-          </a:prstGeom>
-          <a:noFill/>
-          <a:ln/>
-        </p:spPr>
-        <p:txBody>
-          <a:bodyPr wrap="square" lIns="0" tIns="0" rIns="0" bIns="0" rtlCol="0" anchor="t">
+            <a:off x="7799832" y="4974336"/>
+            <a:ext cx="3145536" cy="576072"/>
+          </a:xfrm>
+          <a:prstGeom prst="rect">
+            <a:avLst/>
+          </a:prstGeom>
+          <a:noFill/>
+          <a:ln/>
+        </p:spPr>
+        <p:txBody>
+          <a:bodyPr wrap="square" lIns="254" tIns="254" rIns="254" bIns="254" rtlCol="0" anchor="t">
             <a:normAutofit/>
           </a:bodyPr>
           <a:lstStyle/>
@@ -3813,7 +3828,7 @@
               <a:buNone/>
             </a:pPr>
             <a:r>
-              <a:rPr lang="en-US" sz="1550" dirty="0">
+              <a:rPr lang="en-US" sz="1320" dirty="0">
                 <a:solidFill>
                   <a:srgbClr val="17364A"/>
                 </a:solidFill>
@@ -3821,9 +3836,9 @@
                 <a:ea typeface="Aptos" pitchFamily="34" charset="-122"/>
                 <a:cs typeface="Aptos" pitchFamily="34" charset="-120"/>
               </a:rPr>
-              <a:t>Use the concept to clarify workflow changes, dependencies, staffing, procurement requirements, training needs, and implementation checkpoints.</a:t>
-            </a:r>
-            <a:endParaRPr lang="en-US" sz="1550" dirty="0"/>
+              <a:t>Use the concept to clarify workflow changes, dependencies, staffing, procurement requirements, training needs, and.</a:t>
+            </a:r>
+            <a:endParaRPr lang="en-US" sz="1320" dirty="0"/>
           </a:p>
         </p:txBody>
       </p:sp>
@@ -4124,49 +4139,58 @@
           <a:ln/>
         </p:spPr>
         <p:txBody>
-          <a:bodyPr wrap="square" lIns="635" tIns="635" rIns="635" bIns="635" rtlCol="0" anchor="t">
+          <a:bodyPr wrap="square" lIns="1016" tIns="1016" rIns="1016" bIns="1016" rtlCol="0" anchor="t">
             <a:normAutofit/>
           </a:bodyPr>
           <a:lstStyle/>
           <a:p>
+            <a:pPr indent="0" marL="0">
+              <a:buNone/>
+            </a:pPr>
             <a:r>
               <a:rPr lang="en-US" sz="2100" dirty="0">
                 <a:solidFill>
-                  <a:srgbClr val="17364A"/>
-                </a:solidFill>
-                <a:latin typeface="Aptos" pitchFamily="34" charset="0"/>
-                <a:ea typeface="Aptos" pitchFamily="34" charset="-122"/>
-                <a:cs typeface="Aptos" pitchFamily="34" charset="-120"/>
-              </a:rPr>
-              <a:t>Risks and failure modes include the following:</a:t>
+                  <a:srgbClr val="003A63"/>
+                </a:solidFill>
+                <a:latin typeface="Aptos" pitchFamily="34" charset="0"/>
+                <a:ea typeface="Aptos" pitchFamily="34" charset="-122"/>
+                <a:cs typeface="Aptos" pitchFamily="34" charset="-120"/>
+              </a:rPr>
+              <a:t>• Risks and failure modes include the following:</a:t>
             </a:r>
             <a:endParaRPr lang="en-US" sz="2100" dirty="0"/>
           </a:p>
           <a:p>
+            <a:pPr indent="0" marL="0">
+              <a:buNone/>
+            </a:pPr>
             <a:r>
               <a:rPr lang="en-US" sz="2100" dirty="0">
                 <a:solidFill>
-                  <a:srgbClr val="17364A"/>
-                </a:solidFill>
-                <a:latin typeface="Aptos" pitchFamily="34" charset="0"/>
-                <a:ea typeface="Aptos" pitchFamily="34" charset="-122"/>
-                <a:cs typeface="Aptos" pitchFamily="34" charset="-120"/>
-              </a:rPr>
-              <a:t>Service accounts with broad access to sensitive data.</a:t>
+                  <a:srgbClr val="003A63"/>
+                </a:solidFill>
+                <a:latin typeface="Aptos" pitchFamily="34" charset="0"/>
+                <a:ea typeface="Aptos" pitchFamily="34" charset="-122"/>
+                <a:cs typeface="Aptos" pitchFamily="34" charset="-120"/>
+              </a:rPr>
+              <a:t>• Service accounts with broad access to sensitive data.</a:t>
             </a:r>
             <a:endParaRPr lang="en-US" sz="2100" dirty="0"/>
           </a:p>
           <a:p>
+            <a:pPr indent="0" marL="0">
+              <a:buNone/>
+            </a:pPr>
             <a:r>
               <a:rPr lang="en-US" sz="2100" dirty="0">
                 <a:solidFill>
-                  <a:srgbClr val="17364A"/>
-                </a:solidFill>
-                <a:latin typeface="Aptos" pitchFamily="34" charset="0"/>
-                <a:ea typeface="Aptos" pitchFamily="34" charset="-122"/>
-                <a:cs typeface="Aptos" pitchFamily="34" charset="-120"/>
-              </a:rPr>
-              <a:t>AI tools retrieving data unrelated to the approved use case.</a:t>
+                  <a:srgbClr val="003A63"/>
+                </a:solidFill>
+                <a:latin typeface="Aptos" pitchFamily="34" charset="0"/>
+                <a:ea typeface="Aptos" pitchFamily="34" charset="-122"/>
+                <a:cs typeface="Aptos" pitchFamily="34" charset="-120"/>
+              </a:rPr>
+              <a:t>• AI tools retrieving data unrelated to the approved use case.</a:t>
             </a:r>
             <a:endParaRPr lang="en-US" sz="2100" dirty="0"/>
           </a:p>
@@ -4246,17 +4270,17 @@
         </p:nvSpPr>
         <p:spPr>
           <a:xfrm>
-            <a:off x="7799832" y="1828800"/>
-            <a:ext cx="3145536" cy="685800"/>
-          </a:xfrm>
-          <a:prstGeom prst="rect">
-            <a:avLst/>
-          </a:prstGeom>
-          <a:noFill/>
-          <a:ln/>
-        </p:spPr>
-        <p:txBody>
-          <a:bodyPr wrap="square" lIns="0" tIns="0" rIns="0" bIns="0" rtlCol="0" anchor="t">
+            <a:off x="7799832" y="1801368"/>
+            <a:ext cx="3145536" cy="758952"/>
+          </a:xfrm>
+          <a:prstGeom prst="rect">
+            <a:avLst/>
+          </a:prstGeom>
+          <a:noFill/>
+          <a:ln/>
+        </p:spPr>
+        <p:txBody>
+          <a:bodyPr wrap="square" lIns="254" tIns="254" rIns="254" bIns="254" rtlCol="0" anchor="t">
             <a:normAutofit/>
           </a:bodyPr>
           <a:lstStyle/>
@@ -4265,7 +4289,7 @@
               <a:buNone/>
             </a:pPr>
             <a:r>
-              <a:rPr lang="en-US" sz="1550" dirty="0">
+              <a:rPr lang="en-US" sz="1320" dirty="0">
                 <a:solidFill>
                   <a:srgbClr val="17364A"/>
                 </a:solidFill>
@@ -4275,7 +4299,7 @@
               </a:rPr>
               <a:t>Risks and failure modes include the following:</a:t>
             </a:r>
-            <a:endParaRPr lang="en-US" sz="1550" dirty="0"/>
+            <a:endParaRPr lang="en-US" sz="1320" dirty="0"/>
           </a:p>
         </p:txBody>
       </p:sp>
@@ -4363,13 +4387,16 @@
           <a:ln/>
         </p:spPr>
         <p:txBody>
-          <a:bodyPr wrap="square" lIns="254" tIns="254" rIns="254" bIns="254" rtlCol="0" anchor="t">
+          <a:bodyPr wrap="square" lIns="508" tIns="508" rIns="508" bIns="508" rtlCol="0" anchor="t">
             <a:normAutofit/>
           </a:bodyPr>
           <a:lstStyle/>
           <a:p>
-            <a:r>
-              <a:rPr lang="en-US" sz="1380" dirty="0">
+            <a:pPr indent="0" marL="0">
+              <a:buNone/>
+            </a:pPr>
+            <a:r>
+              <a:rPr lang="en-US" sz="1220" dirty="0">
                 <a:solidFill>
                   <a:srgbClr val="17364A"/>
                 </a:solidFill>
@@ -4379,11 +4406,14 @@
               </a:rPr>
               <a:t>Risks and failure modes include the following:</a:t>
             </a:r>
-            <a:endParaRPr lang="en-US" sz="1380" dirty="0"/>
-          </a:p>
-          <a:p>
-            <a:r>
-              <a:rPr lang="en-US" sz="1380" dirty="0">
+            <a:endParaRPr lang="en-US" sz="1220" dirty="0"/>
+          </a:p>
+          <a:p>
+            <a:pPr indent="0" marL="0">
+              <a:buNone/>
+            </a:pPr>
+            <a:r>
+              <a:rPr lang="en-US" sz="1220" dirty="0">
                 <a:solidFill>
                   <a:srgbClr val="17364A"/>
                 </a:solidFill>
@@ -4393,11 +4423,14 @@
               </a:rPr>
               <a:t>Service accounts with broad access to sensitive data.</a:t>
             </a:r>
-            <a:endParaRPr lang="en-US" sz="1380" dirty="0"/>
-          </a:p>
-          <a:p>
-            <a:r>
-              <a:rPr lang="en-US" sz="1380" dirty="0">
+            <a:endParaRPr lang="en-US" sz="1220" dirty="0"/>
+          </a:p>
+          <a:p>
+            <a:pPr indent="0" marL="0">
+              <a:buNone/>
+            </a:pPr>
+            <a:r>
+              <a:rPr lang="en-US" sz="1220" dirty="0">
                 <a:solidFill>
                   <a:srgbClr val="17364A"/>
                 </a:solidFill>
@@ -4407,7 +4440,7 @@
               </a:rPr>
               <a:t>AI tools retrieving data unrelated to the approved use case.</a:t>
             </a:r>
-            <a:endParaRPr lang="en-US" sz="1380" dirty="0"/>
+            <a:endParaRPr lang="en-US" sz="1220" dirty="0"/>
           </a:p>
         </p:txBody>
       </p:sp>
@@ -4485,17 +4518,17 @@
         </p:nvSpPr>
         <p:spPr>
           <a:xfrm>
-            <a:off x="7799832" y="5001768"/>
-            <a:ext cx="3145536" cy="502920"/>
-          </a:xfrm>
-          <a:prstGeom prst="rect">
-            <a:avLst/>
-          </a:prstGeom>
-          <a:noFill/>
-          <a:ln/>
-        </p:spPr>
-        <p:txBody>
-          <a:bodyPr wrap="square" lIns="0" tIns="0" rIns="0" bIns="0" rtlCol="0" anchor="t">
+            <a:off x="7799832" y="4974336"/>
+            <a:ext cx="3145536" cy="576072"/>
+          </a:xfrm>
+          <a:prstGeom prst="rect">
+            <a:avLst/>
+          </a:prstGeom>
+          <a:noFill/>
+          <a:ln/>
+        </p:spPr>
+        <p:txBody>
+          <a:bodyPr wrap="square" lIns="254" tIns="254" rIns="254" bIns="254" rtlCol="0" anchor="t">
             <a:normAutofit/>
           </a:bodyPr>
           <a:lstStyle/>
@@ -4504,7 +4537,7 @@
               <a:buNone/>
             </a:pPr>
             <a:r>
-              <a:rPr lang="en-US" sz="1550" dirty="0">
+              <a:rPr lang="en-US" sz="1320" dirty="0">
                 <a:solidFill>
                   <a:srgbClr val="17364A"/>
                 </a:solidFill>
@@ -4512,9 +4545,9 @@
                 <a:ea typeface="Aptos" pitchFamily="34" charset="-122"/>
                 <a:cs typeface="Aptos" pitchFamily="34" charset="-120"/>
               </a:rPr>
-              <a:t>Identify what could go wrong, who could be affected, what safeguards are needed, and what evidence should be reviewed before use expands.</a:t>
-            </a:r>
-            <a:endParaRPr lang="en-US" sz="1550" dirty="0"/>
+              <a:t>Identify what could go wrong, who could be affected, what safeguards are needed, and what evidence should be reviewed.</a:t>
+            </a:r>
+            <a:endParaRPr lang="en-US" sz="1320" dirty="0"/>
           </a:p>
         </p:txBody>
       </p:sp>
@@ -4815,49 +4848,58 @@
           <a:ln/>
         </p:spPr>
         <p:txBody>
-          <a:bodyPr wrap="square" lIns="635" tIns="635" rIns="635" bIns="635" rtlCol="0" anchor="t">
+          <a:bodyPr wrap="square" lIns="1016" tIns="1016" rIns="1016" bIns="1016" rtlCol="0" anchor="t">
             <a:normAutofit/>
           </a:bodyPr>
           <a:lstStyle/>
           <a:p>
+            <a:pPr indent="0" marL="0">
+              <a:buNone/>
+            </a:pPr>
             <a:r>
               <a:rPr lang="en-US" sz="2100" dirty="0">
                 <a:solidFill>
-                  <a:srgbClr val="17364A"/>
-                </a:solidFill>
-                <a:latin typeface="Aptos" pitchFamily="34" charset="0"/>
-                <a:ea typeface="Aptos" pitchFamily="34" charset="-122"/>
-                <a:cs typeface="Aptos" pitchFamily="34" charset="-120"/>
-              </a:rPr>
-              <a:t>Write-back actions occurring without human approval.</a:t>
+                  <a:srgbClr val="003A63"/>
+                </a:solidFill>
+                <a:latin typeface="Aptos" pitchFamily="34" charset="0"/>
+                <a:ea typeface="Aptos" pitchFamily="34" charset="-122"/>
+                <a:cs typeface="Aptos" pitchFamily="34" charset="-120"/>
+              </a:rPr>
+              <a:t>• Write-back actions occurring without human approval.</a:t>
             </a:r>
             <a:endParaRPr lang="en-US" sz="2100" dirty="0"/>
           </a:p>
           <a:p>
+            <a:pPr indent="0" marL="0">
+              <a:buNone/>
+            </a:pPr>
             <a:r>
               <a:rPr lang="en-US" sz="2100" dirty="0">
                 <a:solidFill>
-                  <a:srgbClr val="17364A"/>
-                </a:solidFill>
-                <a:latin typeface="Aptos" pitchFamily="34" charset="0"/>
-                <a:ea typeface="Aptos" pitchFamily="34" charset="-122"/>
-                <a:cs typeface="Aptos" pitchFamily="34" charset="-120"/>
-              </a:rPr>
-              <a:t>Shared accounts preventing accountability.</a:t>
+                  <a:srgbClr val="003A63"/>
+                </a:solidFill>
+                <a:latin typeface="Aptos" pitchFamily="34" charset="0"/>
+                <a:ea typeface="Aptos" pitchFamily="34" charset="-122"/>
+                <a:cs typeface="Aptos" pitchFamily="34" charset="-120"/>
+              </a:rPr>
+              <a:t>• Shared accounts preventing accountability.</a:t>
             </a:r>
             <a:endParaRPr lang="en-US" sz="2100" dirty="0"/>
           </a:p>
           <a:p>
+            <a:pPr indent="0" marL="0">
+              <a:buNone/>
+            </a:pPr>
             <a:r>
               <a:rPr lang="en-US" sz="2100" dirty="0">
                 <a:solidFill>
-                  <a:srgbClr val="17364A"/>
-                </a:solidFill>
-                <a:latin typeface="Aptos" pitchFamily="34" charset="0"/>
-                <a:ea typeface="Aptos" pitchFamily="34" charset="-122"/>
-                <a:cs typeface="Aptos" pitchFamily="34" charset="-120"/>
-              </a:rPr>
-              <a:t>Insufficient logs to investigate data access or output generation.</a:t>
+                  <a:srgbClr val="003A63"/>
+                </a:solidFill>
+                <a:latin typeface="Aptos" pitchFamily="34" charset="0"/>
+                <a:ea typeface="Aptos" pitchFamily="34" charset="-122"/>
+                <a:cs typeface="Aptos" pitchFamily="34" charset="-120"/>
+              </a:rPr>
+              <a:t>• Insufficient logs to investigate data access or output generation.</a:t>
             </a:r>
             <a:endParaRPr lang="en-US" sz="2100" dirty="0"/>
           </a:p>
@@ -4937,17 +4979,17 @@
         </p:nvSpPr>
         <p:spPr>
           <a:xfrm>
-            <a:off x="7799832" y="1828800"/>
-            <a:ext cx="3145536" cy="685800"/>
-          </a:xfrm>
-          <a:prstGeom prst="rect">
-            <a:avLst/>
-          </a:prstGeom>
-          <a:noFill/>
-          <a:ln/>
-        </p:spPr>
-        <p:txBody>
-          <a:bodyPr wrap="square" lIns="0" tIns="0" rIns="0" bIns="0" rtlCol="0" anchor="t">
+            <a:off x="7799832" y="1801368"/>
+            <a:ext cx="3145536" cy="758952"/>
+          </a:xfrm>
+          <a:prstGeom prst="rect">
+            <a:avLst/>
+          </a:prstGeom>
+          <a:noFill/>
+          <a:ln/>
+        </p:spPr>
+        <p:txBody>
+          <a:bodyPr wrap="square" lIns="254" tIns="254" rIns="254" bIns="254" rtlCol="0" anchor="t">
             <a:normAutofit/>
           </a:bodyPr>
           <a:lstStyle/>
@@ -4956,7 +4998,7 @@
               <a:buNone/>
             </a:pPr>
             <a:r>
-              <a:rPr lang="en-US" sz="1550" dirty="0">
+              <a:rPr lang="en-US" sz="1320" dirty="0">
                 <a:solidFill>
                   <a:srgbClr val="17364A"/>
                 </a:solidFill>
@@ -4966,7 +5008,7 @@
               </a:rPr>
               <a:t>Write-back actions occurring without human approval.</a:t>
             </a:r>
-            <a:endParaRPr lang="en-US" sz="1550" dirty="0"/>
+            <a:endParaRPr lang="en-US" sz="1320" dirty="0"/>
           </a:p>
         </p:txBody>
       </p:sp>
@@ -5054,13 +5096,16 @@
           <a:ln/>
         </p:spPr>
         <p:txBody>
-          <a:bodyPr wrap="square" lIns="254" tIns="254" rIns="254" bIns="254" rtlCol="0" anchor="t">
+          <a:bodyPr wrap="square" lIns="508" tIns="508" rIns="508" bIns="508" rtlCol="0" anchor="t">
             <a:normAutofit/>
           </a:bodyPr>
           <a:lstStyle/>
           <a:p>
-            <a:r>
-              <a:rPr lang="en-US" sz="1380" dirty="0">
+            <a:pPr indent="0" marL="0">
+              <a:buNone/>
+            </a:pPr>
+            <a:r>
+              <a:rPr lang="en-US" sz="1220" dirty="0">
                 <a:solidFill>
                   <a:srgbClr val="17364A"/>
                 </a:solidFill>
@@ -5070,11 +5115,14 @@
               </a:rPr>
               <a:t>Write-back actions occurring without human approval.</a:t>
             </a:r>
-            <a:endParaRPr lang="en-US" sz="1380" dirty="0"/>
-          </a:p>
-          <a:p>
-            <a:r>
-              <a:rPr lang="en-US" sz="1380" dirty="0">
+            <a:endParaRPr lang="en-US" sz="1220" dirty="0"/>
+          </a:p>
+          <a:p>
+            <a:pPr indent="0" marL="0">
+              <a:buNone/>
+            </a:pPr>
+            <a:r>
+              <a:rPr lang="en-US" sz="1220" dirty="0">
                 <a:solidFill>
                   <a:srgbClr val="17364A"/>
                 </a:solidFill>
@@ -5084,11 +5132,14 @@
               </a:rPr>
               <a:t>Shared accounts preventing accountability.</a:t>
             </a:r>
-            <a:endParaRPr lang="en-US" sz="1380" dirty="0"/>
-          </a:p>
-          <a:p>
-            <a:r>
-              <a:rPr lang="en-US" sz="1380" dirty="0">
+            <a:endParaRPr lang="en-US" sz="1220" dirty="0"/>
+          </a:p>
+          <a:p>
+            <a:pPr indent="0" marL="0">
+              <a:buNone/>
+            </a:pPr>
+            <a:r>
+              <a:rPr lang="en-US" sz="1220" dirty="0">
                 <a:solidFill>
                   <a:srgbClr val="17364A"/>
                 </a:solidFill>
@@ -5098,7 +5149,7 @@
               </a:rPr>
               <a:t>Insufficient logs to investigate data access or output generation.</a:t>
             </a:r>
-            <a:endParaRPr lang="en-US" sz="1380" dirty="0"/>
+            <a:endParaRPr lang="en-US" sz="1220" dirty="0"/>
           </a:p>
         </p:txBody>
       </p:sp>
@@ -5176,17 +5227,17 @@
         </p:nvSpPr>
         <p:spPr>
           <a:xfrm>
-            <a:off x="7799832" y="5001768"/>
-            <a:ext cx="3145536" cy="502920"/>
-          </a:xfrm>
-          <a:prstGeom prst="rect">
-            <a:avLst/>
-          </a:prstGeom>
-          <a:noFill/>
-          <a:ln/>
-        </p:spPr>
-        <p:txBody>
-          <a:bodyPr wrap="square" lIns="0" tIns="0" rIns="0" bIns="0" rtlCol="0" anchor="t">
+            <a:off x="7799832" y="4974336"/>
+            <a:ext cx="3145536" cy="576072"/>
+          </a:xfrm>
+          <a:prstGeom prst="rect">
+            <a:avLst/>
+          </a:prstGeom>
+          <a:noFill/>
+          <a:ln/>
+        </p:spPr>
+        <p:txBody>
+          <a:bodyPr wrap="square" lIns="254" tIns="254" rIns="254" bIns="254" rtlCol="0" anchor="t">
             <a:normAutofit/>
           </a:bodyPr>
           <a:lstStyle/>
@@ -5195,7 +5246,7 @@
               <a:buNone/>
             </a:pPr>
             <a:r>
-              <a:rPr lang="en-US" sz="1550" dirty="0">
+              <a:rPr lang="en-US" sz="1320" dirty="0">
                 <a:solidFill>
                   <a:srgbClr val="17364A"/>
                 </a:solidFill>
@@ -5203,9 +5254,9 @@
                 <a:ea typeface="Aptos" pitchFamily="34" charset="-122"/>
                 <a:cs typeface="Aptos" pitchFamily="34" charset="-120"/>
               </a:rPr>
-              <a:t>Identify what could go wrong, who could be affected, what safeguards are needed, and what evidence should be reviewed before use expands.</a:t>
-            </a:r>
-            <a:endParaRPr lang="en-US" sz="1550" dirty="0"/>
+              <a:t>Identify what could go wrong, who could be affected, what safeguards are needed, and what evidence should be reviewed.</a:t>
+            </a:r>
+            <a:endParaRPr lang="en-US" sz="1320" dirty="0"/>
           </a:p>
         </p:txBody>
       </p:sp>
@@ -5506,49 +5557,58 @@
           <a:ln/>
         </p:spPr>
         <p:txBody>
-          <a:bodyPr wrap="square" lIns="635" tIns="635" rIns="635" bIns="635" rtlCol="0" anchor="t">
+          <a:bodyPr wrap="square" lIns="1016" tIns="1016" rIns="1016" bIns="1016" rtlCol="0" anchor="t">
             <a:normAutofit/>
           </a:bodyPr>
           <a:lstStyle/>
           <a:p>
+            <a:pPr indent="0" marL="0">
+              <a:buNone/>
+            </a:pPr>
             <a:r>
               <a:rPr lang="en-US" sz="2100" dirty="0">
                 <a:solidFill>
-                  <a:srgbClr val="17364A"/>
-                </a:solidFill>
-                <a:latin typeface="Aptos" pitchFamily="34" charset="0"/>
-                <a:ea typeface="Aptos" pitchFamily="34" charset="-122"/>
-                <a:cs typeface="Aptos" pitchFamily="34" charset="-120"/>
-              </a:rPr>
-              <a:t>Recommended guardrails include the following:</a:t>
+                  <a:srgbClr val="003A63"/>
+                </a:solidFill>
+                <a:latin typeface="Aptos" pitchFamily="34" charset="0"/>
+                <a:ea typeface="Aptos" pitchFamily="34" charset="-122"/>
+                <a:cs typeface="Aptos" pitchFamily="34" charset="-120"/>
+              </a:rPr>
+              <a:t>• Recommended guardrails include the following:</a:t>
             </a:r>
             <a:endParaRPr lang="en-US" sz="2100" dirty="0"/>
           </a:p>
           <a:p>
+            <a:pPr indent="0" marL="0">
+              <a:buNone/>
+            </a:pPr>
             <a:r>
               <a:rPr lang="en-US" sz="2100" dirty="0">
                 <a:solidFill>
-                  <a:srgbClr val="17364A"/>
-                </a:solidFill>
-                <a:latin typeface="Aptos" pitchFamily="34" charset="0"/>
-                <a:ea typeface="Aptos" pitchFamily="34" charset="-122"/>
-                <a:cs typeface="Aptos" pitchFamily="34" charset="-120"/>
-              </a:rPr>
-              <a:t>Use role-based and purpose-based access controls.</a:t>
+                  <a:srgbClr val="003A63"/>
+                </a:solidFill>
+                <a:latin typeface="Aptos" pitchFamily="34" charset="0"/>
+                <a:ea typeface="Aptos" pitchFamily="34" charset="-122"/>
+                <a:cs typeface="Aptos" pitchFamily="34" charset="-120"/>
+              </a:rPr>
+              <a:t>• Use role-based and purpose-based access controls.</a:t>
             </a:r>
             <a:endParaRPr lang="en-US" sz="2100" dirty="0"/>
           </a:p>
           <a:p>
+            <a:pPr indent="0" marL="0">
+              <a:buNone/>
+            </a:pPr>
             <a:r>
               <a:rPr lang="en-US" sz="2100" dirty="0">
                 <a:solidFill>
-                  <a:srgbClr val="17364A"/>
-                </a:solidFill>
-                <a:latin typeface="Aptos" pitchFamily="34" charset="0"/>
-                <a:ea typeface="Aptos" pitchFamily="34" charset="-122"/>
-                <a:cs typeface="Aptos" pitchFamily="34" charset="-120"/>
-              </a:rPr>
-              <a:t>Apply least privilege to users, service accounts, APIs, and agents.</a:t>
+                  <a:srgbClr val="003A63"/>
+                </a:solidFill>
+                <a:latin typeface="Aptos" pitchFamily="34" charset="0"/>
+                <a:ea typeface="Aptos" pitchFamily="34" charset="-122"/>
+                <a:cs typeface="Aptos" pitchFamily="34" charset="-120"/>
+              </a:rPr>
+              <a:t>• Apply least privilege to users, service accounts, APIs, and agents.</a:t>
             </a:r>
             <a:endParaRPr lang="en-US" sz="2100" dirty="0"/>
           </a:p>
@@ -5628,17 +5688,17 @@
         </p:nvSpPr>
         <p:spPr>
           <a:xfrm>
-            <a:off x="7799832" y="1828800"/>
-            <a:ext cx="3145536" cy="685800"/>
-          </a:xfrm>
-          <a:prstGeom prst="rect">
-            <a:avLst/>
-          </a:prstGeom>
-          <a:noFill/>
-          <a:ln/>
-        </p:spPr>
-        <p:txBody>
-          <a:bodyPr wrap="square" lIns="0" tIns="0" rIns="0" bIns="0" rtlCol="0" anchor="t">
+            <a:off x="7799832" y="1801368"/>
+            <a:ext cx="3145536" cy="758952"/>
+          </a:xfrm>
+          <a:prstGeom prst="rect">
+            <a:avLst/>
+          </a:prstGeom>
+          <a:noFill/>
+          <a:ln/>
+        </p:spPr>
+        <p:txBody>
+          <a:bodyPr wrap="square" lIns="254" tIns="254" rIns="254" bIns="254" rtlCol="0" anchor="t">
             <a:normAutofit/>
           </a:bodyPr>
           <a:lstStyle/>
@@ -5647,7 +5707,7 @@
               <a:buNone/>
             </a:pPr>
             <a:r>
-              <a:rPr lang="en-US" sz="1550" dirty="0">
+              <a:rPr lang="en-US" sz="1320" dirty="0">
                 <a:solidFill>
                   <a:srgbClr val="17364A"/>
                 </a:solidFill>
@@ -5657,7 +5717,7 @@
               </a:rPr>
               <a:t>Recommended guardrails include the following:</a:t>
             </a:r>
-            <a:endParaRPr lang="en-US" sz="1550" dirty="0"/>
+            <a:endParaRPr lang="en-US" sz="1320" dirty="0"/>
           </a:p>
         </p:txBody>
       </p:sp>
@@ -5745,13 +5805,16 @@
           <a:ln/>
         </p:spPr>
         <p:txBody>
-          <a:bodyPr wrap="square" lIns="254" tIns="254" rIns="254" bIns="254" rtlCol="0" anchor="t">
+          <a:bodyPr wrap="square" lIns="508" tIns="508" rIns="508" bIns="508" rtlCol="0" anchor="t">
             <a:normAutofit/>
           </a:bodyPr>
           <a:lstStyle/>
           <a:p>
-            <a:r>
-              <a:rPr lang="en-US" sz="1380" dirty="0">
+            <a:pPr indent="0" marL="0">
+              <a:buNone/>
+            </a:pPr>
+            <a:r>
+              <a:rPr lang="en-US" sz="1220" dirty="0">
                 <a:solidFill>
                   <a:srgbClr val="17364A"/>
                 </a:solidFill>
@@ -5761,11 +5824,14 @@
               </a:rPr>
               <a:t>Recommended guardrails include the following:</a:t>
             </a:r>
-            <a:endParaRPr lang="en-US" sz="1380" dirty="0"/>
-          </a:p>
-          <a:p>
-            <a:r>
-              <a:rPr lang="en-US" sz="1380" dirty="0">
+            <a:endParaRPr lang="en-US" sz="1220" dirty="0"/>
+          </a:p>
+          <a:p>
+            <a:pPr indent="0" marL="0">
+              <a:buNone/>
+            </a:pPr>
+            <a:r>
+              <a:rPr lang="en-US" sz="1220" dirty="0">
                 <a:solidFill>
                   <a:srgbClr val="17364A"/>
                 </a:solidFill>
@@ -5775,11 +5841,14 @@
               </a:rPr>
               <a:t>Use role-based and purpose-based access controls.</a:t>
             </a:r>
-            <a:endParaRPr lang="en-US" sz="1380" dirty="0"/>
-          </a:p>
-          <a:p>
-            <a:r>
-              <a:rPr lang="en-US" sz="1380" dirty="0">
+            <a:endParaRPr lang="en-US" sz="1220" dirty="0"/>
+          </a:p>
+          <a:p>
+            <a:pPr indent="0" marL="0">
+              <a:buNone/>
+            </a:pPr>
+            <a:r>
+              <a:rPr lang="en-US" sz="1220" dirty="0">
                 <a:solidFill>
                   <a:srgbClr val="17364A"/>
                 </a:solidFill>
@@ -5789,7 +5858,7 @@
               </a:rPr>
               <a:t>Apply least privilege to users, service accounts, APIs, and agents.</a:t>
             </a:r>
-            <a:endParaRPr lang="en-US" sz="1380" dirty="0"/>
+            <a:endParaRPr lang="en-US" sz="1220" dirty="0"/>
           </a:p>
         </p:txBody>
       </p:sp>
@@ -5867,17 +5936,17 @@
         </p:nvSpPr>
         <p:spPr>
           <a:xfrm>
-            <a:off x="7799832" y="5001768"/>
-            <a:ext cx="3145536" cy="502920"/>
-          </a:xfrm>
-          <a:prstGeom prst="rect">
-            <a:avLst/>
-          </a:prstGeom>
-          <a:noFill/>
-          <a:ln/>
-        </p:spPr>
-        <p:txBody>
-          <a:bodyPr wrap="square" lIns="0" tIns="0" rIns="0" bIns="0" rtlCol="0" anchor="t">
+            <a:off x="7799832" y="4974336"/>
+            <a:ext cx="3145536" cy="576072"/>
+          </a:xfrm>
+          <a:prstGeom prst="rect">
+            <a:avLst/>
+          </a:prstGeom>
+          <a:noFill/>
+          <a:ln/>
+        </p:spPr>
+        <p:txBody>
+          <a:bodyPr wrap="square" lIns="254" tIns="254" rIns="254" bIns="254" rtlCol="0" anchor="t">
             <a:normAutofit/>
           </a:bodyPr>
           <a:lstStyle/>
@@ -5886,7 +5955,7 @@
               <a:buNone/>
             </a:pPr>
             <a:r>
-              <a:rPr lang="en-US" sz="1550" dirty="0">
+              <a:rPr lang="en-US" sz="1320" dirty="0">
                 <a:solidFill>
                   <a:srgbClr val="17364A"/>
                 </a:solidFill>
@@ -5894,9 +5963,9 @@
                 <a:ea typeface="Aptos" pitchFamily="34" charset="-122"/>
                 <a:cs typeface="Aptos" pitchFamily="34" charset="-120"/>
               </a:rPr>
-              <a:t>Identify what could go wrong, who could be affected, what safeguards are needed, and what evidence should be reviewed before use expands.</a:t>
-            </a:r>
-            <a:endParaRPr lang="en-US" sz="1550" dirty="0"/>
+              <a:t>Identify what could go wrong, who could be affected, what safeguards are needed, and what evidence should be reviewed.</a:t>
+            </a:r>
+            <a:endParaRPr lang="en-US" sz="1320" dirty="0"/>
           </a:p>
         </p:txBody>
       </p:sp>
@@ -6197,49 +6266,58 @@
           <a:ln/>
         </p:spPr>
         <p:txBody>
-          <a:bodyPr wrap="square" lIns="635" tIns="635" rIns="635" bIns="635" rtlCol="0" anchor="t">
+          <a:bodyPr wrap="square" lIns="1016" tIns="1016" rIns="1016" bIns="1016" rtlCol="0" anchor="t">
             <a:normAutofit/>
           </a:bodyPr>
           <a:lstStyle/>
           <a:p>
+            <a:pPr indent="0" marL="0">
+              <a:buNone/>
+            </a:pPr>
             <a:r>
               <a:rPr lang="en-US" sz="2100" dirty="0">
                 <a:solidFill>
-                  <a:srgbClr val="17364A"/>
-                </a:solidFill>
-                <a:latin typeface="Aptos" pitchFamily="34" charset="0"/>
-                <a:ea typeface="Aptos" pitchFamily="34" charset="-122"/>
-                <a:cs typeface="Aptos" pitchFamily="34" charset="-120"/>
-              </a:rPr>
-              <a:t>Require stronger approval for write-back, external transmission, and automated actions.</a:t>
+                  <a:srgbClr val="003A63"/>
+                </a:solidFill>
+                <a:latin typeface="Aptos" pitchFamily="34" charset="0"/>
+                <a:ea typeface="Aptos" pitchFamily="34" charset="-122"/>
+                <a:cs typeface="Aptos" pitchFamily="34" charset="-120"/>
+              </a:rPr>
+              <a:t>• Require stronger approval for write-back, external transmission, and automated actions.</a:t>
             </a:r>
             <a:endParaRPr lang="en-US" sz="2100" dirty="0"/>
           </a:p>
           <a:p>
+            <a:pPr indent="0" marL="0">
+              <a:buNone/>
+            </a:pPr>
             <a:r>
               <a:rPr lang="en-US" sz="2100" dirty="0">
                 <a:solidFill>
-                  <a:srgbClr val="17364A"/>
-                </a:solidFill>
-                <a:latin typeface="Aptos" pitchFamily="34" charset="0"/>
-                <a:ea typeface="Aptos" pitchFamily="34" charset="-122"/>
-                <a:cs typeface="Aptos" pitchFamily="34" charset="-120"/>
-              </a:rPr>
-              <a:t>Avoid shared accounts and undocumented service identities.</a:t>
+                  <a:srgbClr val="003A63"/>
+                </a:solidFill>
+                <a:latin typeface="Aptos" pitchFamily="34" charset="0"/>
+                <a:ea typeface="Aptos" pitchFamily="34" charset="-122"/>
+                <a:cs typeface="Aptos" pitchFamily="34" charset="-120"/>
+              </a:rPr>
+              <a:t>• Avoid shared accounts and undocumented service identities.</a:t>
             </a:r>
             <a:endParaRPr lang="en-US" sz="2100" dirty="0"/>
           </a:p>
           <a:p>
+            <a:pPr indent="0" marL="0">
+              <a:buNone/>
+            </a:pPr>
             <a:r>
               <a:rPr lang="en-US" sz="2100" dirty="0">
                 <a:solidFill>
-                  <a:srgbClr val="17364A"/>
-                </a:solidFill>
-                <a:latin typeface="Aptos" pitchFamily="34" charset="0"/>
-                <a:ea typeface="Aptos" pitchFamily="34" charset="-122"/>
-                <a:cs typeface="Aptos" pitchFamily="34" charset="-120"/>
-              </a:rPr>
-              <a:t>Maintain detailed audit logs for AI access and actions.</a:t>
+                  <a:srgbClr val="003A63"/>
+                </a:solidFill>
+                <a:latin typeface="Aptos" pitchFamily="34" charset="0"/>
+                <a:ea typeface="Aptos" pitchFamily="34" charset="-122"/>
+                <a:cs typeface="Aptos" pitchFamily="34" charset="-120"/>
+              </a:rPr>
+              <a:t>• Maintain detailed audit logs for AI access and actions.</a:t>
             </a:r>
             <a:endParaRPr lang="en-US" sz="2100" dirty="0"/>
           </a:p>
@@ -6319,17 +6397,17 @@
         </p:nvSpPr>
         <p:spPr>
           <a:xfrm>
-            <a:off x="7799832" y="1828800"/>
-            <a:ext cx="3145536" cy="685800"/>
-          </a:xfrm>
-          <a:prstGeom prst="rect">
-            <a:avLst/>
-          </a:prstGeom>
-          <a:noFill/>
-          <a:ln/>
-        </p:spPr>
-        <p:txBody>
-          <a:bodyPr wrap="square" lIns="0" tIns="0" rIns="0" bIns="0" rtlCol="0" anchor="t">
+            <a:off x="7799832" y="1801368"/>
+            <a:ext cx="3145536" cy="758952"/>
+          </a:xfrm>
+          <a:prstGeom prst="rect">
+            <a:avLst/>
+          </a:prstGeom>
+          <a:noFill/>
+          <a:ln/>
+        </p:spPr>
+        <p:txBody>
+          <a:bodyPr wrap="square" lIns="254" tIns="254" rIns="254" bIns="254" rtlCol="0" anchor="t">
             <a:normAutofit/>
           </a:bodyPr>
           <a:lstStyle/>
@@ -6338,7 +6416,7 @@
               <a:buNone/>
             </a:pPr>
             <a:r>
-              <a:rPr lang="en-US" sz="1550" dirty="0">
+              <a:rPr lang="en-US" sz="1320" dirty="0">
                 <a:solidFill>
                   <a:srgbClr val="17364A"/>
                 </a:solidFill>
@@ -6348,7 +6426,7 @@
               </a:rPr>
               <a:t>Require stronger approval for write-back, external transmission, and automated actions.</a:t>
             </a:r>
-            <a:endParaRPr lang="en-US" sz="1550" dirty="0"/>
+            <a:endParaRPr lang="en-US" sz="1320" dirty="0"/>
           </a:p>
         </p:txBody>
       </p:sp>
@@ -6436,13 +6514,16 @@
           <a:ln/>
         </p:spPr>
         <p:txBody>
-          <a:bodyPr wrap="square" lIns="254" tIns="254" rIns="254" bIns="254" rtlCol="0" anchor="t">
+          <a:bodyPr wrap="square" lIns="508" tIns="508" rIns="508" bIns="508" rtlCol="0" anchor="t">
             <a:normAutofit/>
           </a:bodyPr>
           <a:lstStyle/>
           <a:p>
-            <a:r>
-              <a:rPr lang="en-US" sz="1380" dirty="0">
+            <a:pPr indent="0" marL="0">
+              <a:buNone/>
+            </a:pPr>
+            <a:r>
+              <a:rPr lang="en-US" sz="1220" dirty="0">
                 <a:solidFill>
                   <a:srgbClr val="17364A"/>
                 </a:solidFill>
@@ -6450,13 +6531,16 @@
                 <a:ea typeface="Aptos" pitchFamily="34" charset="-122"/>
                 <a:cs typeface="Aptos" pitchFamily="34" charset="-120"/>
               </a:rPr>
-              <a:t>Require stronger approval for write-back, external transmission, and automated actions.</a:t>
-            </a:r>
-            <a:endParaRPr lang="en-US" sz="1380" dirty="0"/>
-          </a:p>
-          <a:p>
-            <a:r>
-              <a:rPr lang="en-US" sz="1380" dirty="0">
+              <a:t>Require stronger approval for write-back, external transmission,.</a:t>
+            </a:r>
+            <a:endParaRPr lang="en-US" sz="1220" dirty="0"/>
+          </a:p>
+          <a:p>
+            <a:pPr indent="0" marL="0">
+              <a:buNone/>
+            </a:pPr>
+            <a:r>
+              <a:rPr lang="en-US" sz="1220" dirty="0">
                 <a:solidFill>
                   <a:srgbClr val="17364A"/>
                 </a:solidFill>
@@ -6466,11 +6550,14 @@
               </a:rPr>
               <a:t>Avoid shared accounts and undocumented service identities.</a:t>
             </a:r>
-            <a:endParaRPr lang="en-US" sz="1380" dirty="0"/>
-          </a:p>
-          <a:p>
-            <a:r>
-              <a:rPr lang="en-US" sz="1380" dirty="0">
+            <a:endParaRPr lang="en-US" sz="1220" dirty="0"/>
+          </a:p>
+          <a:p>
+            <a:pPr indent="0" marL="0">
+              <a:buNone/>
+            </a:pPr>
+            <a:r>
+              <a:rPr lang="en-US" sz="1220" dirty="0">
                 <a:solidFill>
                   <a:srgbClr val="17364A"/>
                 </a:solidFill>
@@ -6480,7 +6567,7 @@
               </a:rPr>
               <a:t>Maintain detailed audit logs for AI access and actions.</a:t>
             </a:r>
-            <a:endParaRPr lang="en-US" sz="1380" dirty="0"/>
+            <a:endParaRPr lang="en-US" sz="1220" dirty="0"/>
           </a:p>
         </p:txBody>
       </p:sp>
@@ -6558,17 +6645,17 @@
         </p:nvSpPr>
         <p:spPr>
           <a:xfrm>
-            <a:off x="7799832" y="5001768"/>
-            <a:ext cx="3145536" cy="502920"/>
-          </a:xfrm>
-          <a:prstGeom prst="rect">
-            <a:avLst/>
-          </a:prstGeom>
-          <a:noFill/>
-          <a:ln/>
-        </p:spPr>
-        <p:txBody>
-          <a:bodyPr wrap="square" lIns="0" tIns="0" rIns="0" bIns="0" rtlCol="0" anchor="t">
+            <a:off x="7799832" y="4974336"/>
+            <a:ext cx="3145536" cy="576072"/>
+          </a:xfrm>
+          <a:prstGeom prst="rect">
+            <a:avLst/>
+          </a:prstGeom>
+          <a:noFill/>
+          <a:ln/>
+        </p:spPr>
+        <p:txBody>
+          <a:bodyPr wrap="square" lIns="254" tIns="254" rIns="254" bIns="254" rtlCol="0" anchor="t">
             <a:normAutofit/>
           </a:bodyPr>
           <a:lstStyle/>
@@ -6577,7 +6664,7 @@
               <a:buNone/>
             </a:pPr>
             <a:r>
-              <a:rPr lang="en-US" sz="1550" dirty="0">
+              <a:rPr lang="en-US" sz="1320" dirty="0">
                 <a:solidFill>
                   <a:srgbClr val="17364A"/>
                 </a:solidFill>
@@ -6585,9 +6672,9 @@
                 <a:ea typeface="Aptos" pitchFamily="34" charset="-122"/>
                 <a:cs typeface="Aptos" pitchFamily="34" charset="-120"/>
               </a:rPr>
-              <a:t>Identify what could go wrong, who could be affected, what safeguards are needed, and what evidence should be reviewed before use expands.</a:t>
-            </a:r>
-            <a:endParaRPr lang="en-US" sz="1550" dirty="0"/>
+              <a:t>Identify what could go wrong, who could be affected, what safeguards are needed, and what evidence should be reviewed.</a:t>
+            </a:r>
+            <a:endParaRPr lang="en-US" sz="1320" dirty="0"/>
           </a:p>
         </p:txBody>
       </p:sp>
@@ -6888,49 +6975,58 @@
           <a:ln/>
         </p:spPr>
         <p:txBody>
-          <a:bodyPr wrap="square" lIns="635" tIns="635" rIns="635" bIns="635" rtlCol="0" anchor="t">
+          <a:bodyPr wrap="square" lIns="1016" tIns="1016" rIns="1016" bIns="1016" rtlCol="0" anchor="t">
             <a:normAutofit/>
           </a:bodyPr>
           <a:lstStyle/>
           <a:p>
+            <a:pPr indent="0" marL="0">
+              <a:buNone/>
+            </a:pPr>
             <a:r>
               <a:rPr lang="en-US" sz="2100" dirty="0">
                 <a:solidFill>
-                  <a:srgbClr val="17364A"/>
-                </a:solidFill>
-                <a:latin typeface="Aptos" pitchFamily="34" charset="0"/>
-                <a:ea typeface="Aptos" pitchFamily="34" charset="-122"/>
-                <a:cs typeface="Aptos" pitchFamily="34" charset="-120"/>
-              </a:rPr>
-              <a:t>Where does this topic appear in your agency, program, or workflow?</a:t>
+                  <a:srgbClr val="003A63"/>
+                </a:solidFill>
+                <a:latin typeface="Aptos" pitchFamily="34" charset="0"/>
+                <a:ea typeface="Aptos" pitchFamily="34" charset="-122"/>
+                <a:cs typeface="Aptos" pitchFamily="34" charset="-120"/>
+              </a:rPr>
+              <a:t>• Where does this topic appear in your agency, program, or workflow?</a:t>
             </a:r>
             <a:endParaRPr lang="en-US" sz="2100" dirty="0"/>
           </a:p>
           <a:p>
+            <a:pPr indent="0" marL="0">
+              <a:buNone/>
+            </a:pPr>
             <a:r>
               <a:rPr lang="en-US" sz="2100" dirty="0">
                 <a:solidFill>
-                  <a:srgbClr val="17364A"/>
-                </a:solidFill>
-                <a:latin typeface="Aptos" pitchFamily="34" charset="0"/>
-                <a:ea typeface="Aptos" pitchFamily="34" charset="-122"/>
-                <a:cs typeface="Aptos" pitchFamily="34" charset="-120"/>
-              </a:rPr>
-              <a:t>Which staff roles would need to understand or apply this concept before AI use is approved?</a:t>
+                  <a:srgbClr val="003A63"/>
+                </a:solidFill>
+                <a:latin typeface="Aptos" pitchFamily="34" charset="0"/>
+                <a:ea typeface="Aptos" pitchFamily="34" charset="-122"/>
+                <a:cs typeface="Aptos" pitchFamily="34" charset="-120"/>
+              </a:rPr>
+              <a:t>• Which staff roles would need to understand or apply this concept before AI use is approved?</a:t>
             </a:r>
             <a:endParaRPr lang="en-US" sz="2100" dirty="0"/>
           </a:p>
           <a:p>
+            <a:pPr indent="0" marL="0">
+              <a:buNone/>
+            </a:pPr>
             <a:r>
               <a:rPr lang="en-US" sz="2100" dirty="0">
                 <a:solidFill>
-                  <a:srgbClr val="17364A"/>
-                </a:solidFill>
-                <a:latin typeface="Aptos" pitchFamily="34" charset="0"/>
-                <a:ea typeface="Aptos" pitchFamily="34" charset="-122"/>
-                <a:cs typeface="Aptos" pitchFamily="34" charset="-120"/>
-              </a:rPr>
-              <a:t>What could go wrong if this topic is not addressed before implementation?</a:t>
+                  <a:srgbClr val="003A63"/>
+                </a:solidFill>
+                <a:latin typeface="Aptos" pitchFamily="34" charset="0"/>
+                <a:ea typeface="Aptos" pitchFamily="34" charset="-122"/>
+                <a:cs typeface="Aptos" pitchFamily="34" charset="-120"/>
+              </a:rPr>
+              <a:t>• What could go wrong if this topic is not addressed before implementation?</a:t>
             </a:r>
             <a:endParaRPr lang="en-US" sz="2100" dirty="0"/>
           </a:p>
@@ -7010,17 +7106,17 @@
         </p:nvSpPr>
         <p:spPr>
           <a:xfrm>
-            <a:off x="7799832" y="1828800"/>
-            <a:ext cx="3145536" cy="685800"/>
-          </a:xfrm>
-          <a:prstGeom prst="rect">
-            <a:avLst/>
-          </a:prstGeom>
-          <a:noFill/>
-          <a:ln/>
-        </p:spPr>
-        <p:txBody>
-          <a:bodyPr wrap="square" lIns="0" tIns="0" rIns="0" bIns="0" rtlCol="0" anchor="t">
+            <a:off x="7799832" y="1801368"/>
+            <a:ext cx="3145536" cy="758952"/>
+          </a:xfrm>
+          <a:prstGeom prst="rect">
+            <a:avLst/>
+          </a:prstGeom>
+          <a:noFill/>
+          <a:ln/>
+        </p:spPr>
+        <p:txBody>
+          <a:bodyPr wrap="square" lIns="254" tIns="254" rIns="254" bIns="254" rtlCol="0" anchor="t">
             <a:normAutofit/>
           </a:bodyPr>
           <a:lstStyle/>
@@ -7029,7 +7125,7 @@
               <a:buNone/>
             </a:pPr>
             <a:r>
-              <a:rPr lang="en-US" sz="1550" dirty="0">
+              <a:rPr lang="en-US" sz="1320" dirty="0">
                 <a:solidFill>
                   <a:srgbClr val="17364A"/>
                 </a:solidFill>
@@ -7039,7 +7135,7 @@
               </a:rPr>
               <a:t>Where does this topic appear in your agency, program, or workflow?</a:t>
             </a:r>
-            <a:endParaRPr lang="en-US" sz="1550" dirty="0"/>
+            <a:endParaRPr lang="en-US" sz="1320" dirty="0"/>
           </a:p>
         </p:txBody>
       </p:sp>
@@ -7127,13 +7223,16 @@
           <a:ln/>
         </p:spPr>
         <p:txBody>
-          <a:bodyPr wrap="square" lIns="254" tIns="254" rIns="254" bIns="254" rtlCol="0" anchor="t">
+          <a:bodyPr wrap="square" lIns="508" tIns="508" rIns="508" bIns="508" rtlCol="0" anchor="t">
             <a:normAutofit/>
           </a:bodyPr>
           <a:lstStyle/>
           <a:p>
-            <a:r>
-              <a:rPr lang="en-US" sz="1380" dirty="0">
+            <a:pPr indent="0" marL="0">
+              <a:buNone/>
+            </a:pPr>
+            <a:r>
+              <a:rPr lang="en-US" sz="1220" dirty="0">
                 <a:solidFill>
                   <a:srgbClr val="17364A"/>
                 </a:solidFill>
@@ -7143,11 +7242,14 @@
               </a:rPr>
               <a:t>Where does this topic appear in your agency, program, or workflow?</a:t>
             </a:r>
-            <a:endParaRPr lang="en-US" sz="1380" dirty="0"/>
-          </a:p>
-          <a:p>
-            <a:r>
-              <a:rPr lang="en-US" sz="1380" dirty="0">
+            <a:endParaRPr lang="en-US" sz="1220" dirty="0"/>
+          </a:p>
+          <a:p>
+            <a:pPr indent="0" marL="0">
+              <a:buNone/>
+            </a:pPr>
+            <a:r>
+              <a:rPr lang="en-US" sz="1220" dirty="0">
                 <a:solidFill>
                   <a:srgbClr val="17364A"/>
                 </a:solidFill>
@@ -7155,13 +7257,16 @@
                 <a:ea typeface="Aptos" pitchFamily="34" charset="-122"/>
                 <a:cs typeface="Aptos" pitchFamily="34" charset="-120"/>
               </a:rPr>
-              <a:t>Which staff roles would need to understand or apply this concept before AI use is approved?</a:t>
-            </a:r>
-            <a:endParaRPr lang="en-US" sz="1380" dirty="0"/>
-          </a:p>
-          <a:p>
-            <a:r>
-              <a:rPr lang="en-US" sz="1380" dirty="0">
+              <a:t>Which staff roles would need to understand or apply this concept.</a:t>
+            </a:r>
+            <a:endParaRPr lang="en-US" sz="1220" dirty="0"/>
+          </a:p>
+          <a:p>
+            <a:pPr indent="0" marL="0">
+              <a:buNone/>
+            </a:pPr>
+            <a:r>
+              <a:rPr lang="en-US" sz="1220" dirty="0">
                 <a:solidFill>
                   <a:srgbClr val="17364A"/>
                 </a:solidFill>
@@ -7169,9 +7274,9 @@
                 <a:ea typeface="Aptos" pitchFamily="34" charset="-122"/>
                 <a:cs typeface="Aptos" pitchFamily="34" charset="-120"/>
               </a:rPr>
-              <a:t>What could go wrong if this topic is not addressed before implementation?</a:t>
-            </a:r>
-            <a:endParaRPr lang="en-US" sz="1380" dirty="0"/>
+              <a:t>What could go wrong if this topic is not addressed before.</a:t>
+            </a:r>
+            <a:endParaRPr lang="en-US" sz="1220" dirty="0"/>
           </a:p>
         </p:txBody>
       </p:sp>
@@ -7249,17 +7354,17 @@
         </p:nvSpPr>
         <p:spPr>
           <a:xfrm>
-            <a:off x="7799832" y="5001768"/>
-            <a:ext cx="3145536" cy="502920"/>
-          </a:xfrm>
-          <a:prstGeom prst="rect">
-            <a:avLst/>
-          </a:prstGeom>
-          <a:noFill/>
-          <a:ln/>
-        </p:spPr>
-        <p:txBody>
-          <a:bodyPr wrap="square" lIns="0" tIns="0" rIns="0" bIns="0" rtlCol="0" anchor="t">
+            <a:off x="7799832" y="4974336"/>
+            <a:ext cx="3145536" cy="576072"/>
+          </a:xfrm>
+          <a:prstGeom prst="rect">
+            <a:avLst/>
+          </a:prstGeom>
+          <a:noFill/>
+          <a:ln/>
+        </p:spPr>
+        <p:txBody>
+          <a:bodyPr wrap="square" lIns="254" tIns="254" rIns="254" bIns="254" rtlCol="0" anchor="t">
             <a:normAutofit/>
           </a:bodyPr>
           <a:lstStyle/>
@@ -7268,7 +7373,7 @@
               <a:buNone/>
             </a:pPr>
             <a:r>
-              <a:rPr lang="en-US" sz="1550" dirty="0">
+              <a:rPr lang="en-US" sz="1320" dirty="0">
                 <a:solidFill>
                   <a:srgbClr val="17364A"/>
                 </a:solidFill>
@@ -7276,9 +7381,9 @@
                 <a:ea typeface="Aptos" pitchFamily="34" charset="-122"/>
                 <a:cs typeface="Aptos" pitchFamily="34" charset="-120"/>
               </a:rPr>
-              <a:t>Use the concept to clarify workflow changes, dependencies, staffing, procurement requirements, training needs, and implementation checkpoints.</a:t>
-            </a:r>
-            <a:endParaRPr lang="en-US" sz="1550" dirty="0"/>
+              <a:t>Use the concept to clarify workflow changes, dependencies, staffing, procurement requirements, training needs, and.</a:t>
+            </a:r>
+            <a:endParaRPr lang="en-US" sz="1320" dirty="0"/>
           </a:p>
         </p:txBody>
       </p:sp>
@@ -7579,35 +7684,41 @@
           <a:ln/>
         </p:spPr>
         <p:txBody>
-          <a:bodyPr wrap="square" lIns="635" tIns="635" rIns="635" bIns="635" rtlCol="0" anchor="t">
+          <a:bodyPr wrap="square" lIns="1016" tIns="1016" rIns="1016" bIns="1016" rtlCol="0" anchor="t">
             <a:normAutofit/>
           </a:bodyPr>
           <a:lstStyle/>
           <a:p>
+            <a:pPr indent="0" marL="0">
+              <a:buNone/>
+            </a:pPr>
             <a:r>
               <a:rPr lang="en-US" sz="2100" dirty="0">
                 <a:solidFill>
-                  <a:srgbClr val="17364A"/>
-                </a:solidFill>
-                <a:latin typeface="Aptos" pitchFamily="34" charset="0"/>
-                <a:ea typeface="Aptos" pitchFamily="34" charset="-122"/>
-                <a:cs typeface="Aptos" pitchFamily="34" charset="-120"/>
-              </a:rPr>
-              <a:t>What evidence would governance, leadership, or operations staff need before moving forward?</a:t>
+                  <a:srgbClr val="003A63"/>
+                </a:solidFill>
+                <a:latin typeface="Aptos" pitchFamily="34" charset="0"/>
+                <a:ea typeface="Aptos" pitchFamily="34" charset="-122"/>
+                <a:cs typeface="Aptos" pitchFamily="34" charset="-120"/>
+              </a:rPr>
+              <a:t>• What evidence would governance, leadership, or operations staff need before moving forward?</a:t>
             </a:r>
             <a:endParaRPr lang="en-US" sz="2100" dirty="0"/>
           </a:p>
           <a:p>
+            <a:pPr indent="0" marL="0">
+              <a:buNone/>
+            </a:pPr>
             <a:r>
               <a:rPr lang="en-US" sz="2100" dirty="0">
                 <a:solidFill>
-                  <a:srgbClr val="17364A"/>
-                </a:solidFill>
-                <a:latin typeface="Aptos" pitchFamily="34" charset="0"/>
-                <a:ea typeface="Aptos" pitchFamily="34" charset="-122"/>
-                <a:cs typeface="Aptos" pitchFamily="34" charset="-120"/>
-              </a:rPr>
-              <a:t>Which policy, data, equity, privacy, security, or workflow questions remain unresolved?</a:t>
+                  <a:srgbClr val="003A63"/>
+                </a:solidFill>
+                <a:latin typeface="Aptos" pitchFamily="34" charset="0"/>
+                <a:ea typeface="Aptos" pitchFamily="34" charset="-122"/>
+                <a:cs typeface="Aptos" pitchFamily="34" charset="-120"/>
+              </a:rPr>
+              <a:t>• Which policy, data, equity, privacy, security, or workflow questions remain unresolved?</a:t>
             </a:r>
             <a:endParaRPr lang="en-US" sz="2100" dirty="0"/>
           </a:p>
@@ -7687,17 +7798,17 @@
         </p:nvSpPr>
         <p:spPr>
           <a:xfrm>
-            <a:off x="7799832" y="1828800"/>
-            <a:ext cx="3145536" cy="685800"/>
-          </a:xfrm>
-          <a:prstGeom prst="rect">
-            <a:avLst/>
-          </a:prstGeom>
-          <a:noFill/>
-          <a:ln/>
-        </p:spPr>
-        <p:txBody>
-          <a:bodyPr wrap="square" lIns="0" tIns="0" rIns="0" bIns="0" rtlCol="0" anchor="t">
+            <a:off x="7799832" y="1801368"/>
+            <a:ext cx="3145536" cy="758952"/>
+          </a:xfrm>
+          <a:prstGeom prst="rect">
+            <a:avLst/>
+          </a:prstGeom>
+          <a:noFill/>
+          <a:ln/>
+        </p:spPr>
+        <p:txBody>
+          <a:bodyPr wrap="square" lIns="254" tIns="254" rIns="254" bIns="254" rtlCol="0" anchor="t">
             <a:normAutofit/>
           </a:bodyPr>
           <a:lstStyle/>
@@ -7706,7 +7817,7 @@
               <a:buNone/>
             </a:pPr>
             <a:r>
-              <a:rPr lang="en-US" sz="1550" dirty="0">
+              <a:rPr lang="en-US" sz="1320" dirty="0">
                 <a:solidFill>
                   <a:srgbClr val="17364A"/>
                 </a:solidFill>
@@ -7716,7 +7827,7 @@
               </a:rPr>
               <a:t>What evidence would governance, leadership, or operations staff need before moving forward?</a:t>
             </a:r>
-            <a:endParaRPr lang="en-US" sz="1550" dirty="0"/>
+            <a:endParaRPr lang="en-US" sz="1320" dirty="0"/>
           </a:p>
         </p:txBody>
       </p:sp>
@@ -7804,13 +7915,16 @@
           <a:ln/>
         </p:spPr>
         <p:txBody>
-          <a:bodyPr wrap="square" lIns="254" tIns="254" rIns="254" bIns="254" rtlCol="0" anchor="t">
+          <a:bodyPr wrap="square" lIns="508" tIns="508" rIns="508" bIns="508" rtlCol="0" anchor="t">
             <a:normAutofit/>
           </a:bodyPr>
           <a:lstStyle/>
           <a:p>
-            <a:r>
-              <a:rPr lang="en-US" sz="1380" dirty="0">
+            <a:pPr indent="0" marL="0">
+              <a:buNone/>
+            </a:pPr>
+            <a:r>
+              <a:rPr lang="en-US" sz="1220" dirty="0">
                 <a:solidFill>
                   <a:srgbClr val="17364A"/>
                 </a:solidFill>
@@ -7818,13 +7932,16 @@
                 <a:ea typeface="Aptos" pitchFamily="34" charset="-122"/>
                 <a:cs typeface="Aptos" pitchFamily="34" charset="-120"/>
               </a:rPr>
-              <a:t>What evidence would governance, leadership, or operations staff need before moving forward?</a:t>
-            </a:r>
-            <a:endParaRPr lang="en-US" sz="1380" dirty="0"/>
-          </a:p>
-          <a:p>
-            <a:r>
-              <a:rPr lang="en-US" sz="1380" dirty="0">
+              <a:t>What evidence would governance, leadership, or operations staff.</a:t>
+            </a:r>
+            <a:endParaRPr lang="en-US" sz="1220" dirty="0"/>
+          </a:p>
+          <a:p>
+            <a:pPr indent="0" marL="0">
+              <a:buNone/>
+            </a:pPr>
+            <a:r>
+              <a:rPr lang="en-US" sz="1220" dirty="0">
                 <a:solidFill>
                   <a:srgbClr val="17364A"/>
                 </a:solidFill>
@@ -7832,9 +7949,9 @@
                 <a:ea typeface="Aptos" pitchFamily="34" charset="-122"/>
                 <a:cs typeface="Aptos" pitchFamily="34" charset="-120"/>
               </a:rPr>
-              <a:t>Which policy, data, equity, privacy, security, or workflow questions remain unresolved?</a:t>
-            </a:r>
-            <a:endParaRPr lang="en-US" sz="1380" dirty="0"/>
+              <a:t>Which policy, data, equity, privacy, security, or workflow.</a:t>
+            </a:r>
+            <a:endParaRPr lang="en-US" sz="1220" dirty="0"/>
           </a:p>
         </p:txBody>
       </p:sp>
@@ -7912,17 +8029,17 @@
         </p:nvSpPr>
         <p:spPr>
           <a:xfrm>
-            <a:off x="7799832" y="5001768"/>
-            <a:ext cx="3145536" cy="502920"/>
-          </a:xfrm>
-          <a:prstGeom prst="rect">
-            <a:avLst/>
-          </a:prstGeom>
-          <a:noFill/>
-          <a:ln/>
-        </p:spPr>
-        <p:txBody>
-          <a:bodyPr wrap="square" lIns="0" tIns="0" rIns="0" bIns="0" rtlCol="0" anchor="t">
+            <a:off x="7799832" y="4974336"/>
+            <a:ext cx="3145536" cy="576072"/>
+          </a:xfrm>
+          <a:prstGeom prst="rect">
+            <a:avLst/>
+          </a:prstGeom>
+          <a:noFill/>
+          <a:ln/>
+        </p:spPr>
+        <p:txBody>
+          <a:bodyPr wrap="square" lIns="254" tIns="254" rIns="254" bIns="254" rtlCol="0" anchor="t">
             <a:normAutofit/>
           </a:bodyPr>
           <a:lstStyle/>
@@ -7931,7 +8048,7 @@
               <a:buNone/>
             </a:pPr>
             <a:r>
-              <a:rPr lang="en-US" sz="1550" dirty="0">
+              <a:rPr lang="en-US" sz="1320" dirty="0">
                 <a:solidFill>
                   <a:srgbClr val="17364A"/>
                 </a:solidFill>
@@ -7939,9 +8056,9 @@
                 <a:ea typeface="Aptos" pitchFamily="34" charset="-122"/>
                 <a:cs typeface="Aptos" pitchFamily="34" charset="-120"/>
               </a:rPr>
-              <a:t>Use the concept to clarify workflow changes, dependencies, staffing, procurement requirements, training needs, and implementation checkpoints.</a:t>
-            </a:r>
-            <a:endParaRPr lang="en-US" sz="1550" dirty="0"/>
+              <a:t>Use the concept to clarify workflow changes, dependencies, staffing, procurement requirements, training needs, and.</a:t>
+            </a:r>
+            <a:endParaRPr lang="en-US" sz="1320" dirty="0"/>
           </a:p>
         </p:txBody>
       </p:sp>
@@ -8242,35 +8359,41 @@
           <a:ln/>
         </p:spPr>
         <p:txBody>
-          <a:bodyPr wrap="square" lIns="635" tIns="635" rIns="635" bIns="635" rtlCol="0" anchor="t">
+          <a:bodyPr wrap="square" lIns="1016" tIns="1016" rIns="1016" bIns="1016" rtlCol="0" anchor="t">
             <a:normAutofit/>
           </a:bodyPr>
           <a:lstStyle/>
           <a:p>
+            <a:pPr indent="0" marL="0">
+              <a:buNone/>
+            </a:pPr>
             <a:r>
               <a:rPr lang="en-US" sz="2100" dirty="0">
                 <a:solidFill>
-                  <a:srgbClr val="17364A"/>
-                </a:solidFill>
-                <a:latin typeface="Aptos" pitchFamily="34" charset="0"/>
-                <a:ea typeface="Aptos" pitchFamily="34" charset="-122"/>
-                <a:cs typeface="Aptos" pitchFamily="34" charset="-120"/>
-              </a:rPr>
-              <a:t>Create an identity, access, and permissions review for one AI-supported workflow.</a:t>
+                  <a:srgbClr val="003A63"/>
+                </a:solidFill>
+                <a:latin typeface="Aptos" pitchFamily="34" charset="0"/>
+                <a:ea typeface="Aptos" pitchFamily="34" charset="-122"/>
+                <a:cs typeface="Aptos" pitchFamily="34" charset="-120"/>
+              </a:rPr>
+              <a:t>• Create an identity, access, and permissions review for one AI-supported workflow.</a:t>
             </a:r>
             <a:endParaRPr lang="en-US" sz="2100" dirty="0"/>
           </a:p>
           <a:p>
+            <a:pPr indent="0" marL="0">
+              <a:buNone/>
+            </a:pPr>
             <a:r>
               <a:rPr lang="en-US" sz="2100" dirty="0">
                 <a:solidFill>
-                  <a:srgbClr val="17364A"/>
-                </a:solidFill>
-                <a:latin typeface="Aptos" pitchFamily="34" charset="0"/>
-                <a:ea typeface="Aptos" pitchFamily="34" charset="-122"/>
-                <a:cs typeface="Aptos" pitchFamily="34" charset="-120"/>
-              </a:rPr>
-              <a:t>Identify users, service accounts, systems, data accessed, read/write permissions, approval points,.</a:t>
+                  <a:srgbClr val="003A63"/>
+                </a:solidFill>
+                <a:latin typeface="Aptos" pitchFamily="34" charset="0"/>
+                <a:ea typeface="Aptos" pitchFamily="34" charset="-122"/>
+                <a:cs typeface="Aptos" pitchFamily="34" charset="-120"/>
+              </a:rPr>
+              <a:t>• Identify users, service accounts, systems, data accessed, read/write permissions, approval.</a:t>
             </a:r>
             <a:endParaRPr lang="en-US" sz="2100" dirty="0"/>
           </a:p>
@@ -8350,17 +8473,17 @@
         </p:nvSpPr>
         <p:spPr>
           <a:xfrm>
-            <a:off x="7799832" y="1828800"/>
-            <a:ext cx="3145536" cy="685800"/>
-          </a:xfrm>
-          <a:prstGeom prst="rect">
-            <a:avLst/>
-          </a:prstGeom>
-          <a:noFill/>
-          <a:ln/>
-        </p:spPr>
-        <p:txBody>
-          <a:bodyPr wrap="square" lIns="0" tIns="0" rIns="0" bIns="0" rtlCol="0" anchor="t">
+            <a:off x="7799832" y="1801368"/>
+            <a:ext cx="3145536" cy="758952"/>
+          </a:xfrm>
+          <a:prstGeom prst="rect">
+            <a:avLst/>
+          </a:prstGeom>
+          <a:noFill/>
+          <a:ln/>
+        </p:spPr>
+        <p:txBody>
+          <a:bodyPr wrap="square" lIns="254" tIns="254" rIns="254" bIns="254" rtlCol="0" anchor="t">
             <a:normAutofit/>
           </a:bodyPr>
           <a:lstStyle/>
@@ -8369,7 +8492,7 @@
               <a:buNone/>
             </a:pPr>
             <a:r>
-              <a:rPr lang="en-US" sz="1550" dirty="0">
+              <a:rPr lang="en-US" sz="1320" dirty="0">
                 <a:solidFill>
                   <a:srgbClr val="17364A"/>
                 </a:solidFill>
@@ -8379,7 +8502,7 @@
               </a:rPr>
               <a:t>Create an identity, access, and permissions review for one AI-supported workflow.</a:t>
             </a:r>
-            <a:endParaRPr lang="en-US" sz="1550" dirty="0"/>
+            <a:endParaRPr lang="en-US" sz="1320" dirty="0"/>
           </a:p>
         </p:txBody>
       </p:sp>
@@ -8467,13 +8590,16 @@
           <a:ln/>
         </p:spPr>
         <p:txBody>
-          <a:bodyPr wrap="square" lIns="254" tIns="254" rIns="254" bIns="254" rtlCol="0" anchor="t">
+          <a:bodyPr wrap="square" lIns="508" tIns="508" rIns="508" bIns="508" rtlCol="0" anchor="t">
             <a:normAutofit/>
           </a:bodyPr>
           <a:lstStyle/>
           <a:p>
-            <a:r>
-              <a:rPr lang="en-US" sz="1380" dirty="0">
+            <a:pPr indent="0" marL="0">
+              <a:buNone/>
+            </a:pPr>
+            <a:r>
+              <a:rPr lang="en-US" sz="1220" dirty="0">
                 <a:solidFill>
                   <a:srgbClr val="17364A"/>
                 </a:solidFill>
@@ -8481,13 +8607,16 @@
                 <a:ea typeface="Aptos" pitchFamily="34" charset="-122"/>
                 <a:cs typeface="Aptos" pitchFamily="34" charset="-120"/>
               </a:rPr>
-              <a:t>Create an identity, access, and permissions review for one AI-supported workflow.</a:t>
-            </a:r>
-            <a:endParaRPr lang="en-US" sz="1380" dirty="0"/>
-          </a:p>
-          <a:p>
-            <a:r>
-              <a:rPr lang="en-US" sz="1380" dirty="0">
+              <a:t>Create an identity, access, and permissions review for one.</a:t>
+            </a:r>
+            <a:endParaRPr lang="en-US" sz="1220" dirty="0"/>
+          </a:p>
+          <a:p>
+            <a:pPr indent="0" marL="0">
+              <a:buNone/>
+            </a:pPr>
+            <a:r>
+              <a:rPr lang="en-US" sz="1220" dirty="0">
                 <a:solidFill>
                   <a:srgbClr val="17364A"/>
                 </a:solidFill>
@@ -8495,9 +8624,9 @@
                 <a:ea typeface="Aptos" pitchFamily="34" charset="-122"/>
                 <a:cs typeface="Aptos" pitchFamily="34" charset="-120"/>
               </a:rPr>
-              <a:t>Identify users, service accounts, systems, data accessed, read/write permissions, approval.</a:t>
-            </a:r>
-            <a:endParaRPr lang="en-US" sz="1380" dirty="0"/>
+              <a:t>Identify users, service accounts, systems, data accessed,.</a:t>
+            </a:r>
+            <a:endParaRPr lang="en-US" sz="1220" dirty="0"/>
           </a:p>
         </p:txBody>
       </p:sp>
@@ -8575,17 +8704,17 @@
         </p:nvSpPr>
         <p:spPr>
           <a:xfrm>
-            <a:off x="7799832" y="5001768"/>
-            <a:ext cx="3145536" cy="502920"/>
-          </a:xfrm>
-          <a:prstGeom prst="rect">
-            <a:avLst/>
-          </a:prstGeom>
-          <a:noFill/>
-          <a:ln/>
-        </p:spPr>
-        <p:txBody>
-          <a:bodyPr wrap="square" lIns="0" tIns="0" rIns="0" bIns="0" rtlCol="0" anchor="t">
+            <a:off x="7799832" y="4974336"/>
+            <a:ext cx="3145536" cy="576072"/>
+          </a:xfrm>
+          <a:prstGeom prst="rect">
+            <a:avLst/>
+          </a:prstGeom>
+          <a:noFill/>
+          <a:ln/>
+        </p:spPr>
+        <p:txBody>
+          <a:bodyPr wrap="square" lIns="254" tIns="254" rIns="254" bIns="254" rtlCol="0" anchor="t">
             <a:normAutofit/>
           </a:bodyPr>
           <a:lstStyle/>
@@ -8594,7 +8723,7 @@
               <a:buNone/>
             </a:pPr>
             <a:r>
-              <a:rPr lang="en-US" sz="1550" dirty="0">
+              <a:rPr lang="en-US" sz="1320" dirty="0">
                 <a:solidFill>
                   <a:srgbClr val="17364A"/>
                 </a:solidFill>
@@ -8602,9 +8731,9 @@
                 <a:ea typeface="Aptos" pitchFamily="34" charset="-122"/>
                 <a:cs typeface="Aptos" pitchFamily="34" charset="-120"/>
               </a:rPr>
-              <a:t>Use the assignment to test whether you can explain the concept, apply it to a realistic public health situation, and identify what would need review before the work moves forward.</a:t>
-            </a:r>
-            <a:endParaRPr lang="en-US" sz="1550" dirty="0"/>
+              <a:t>Use the assignment to test whether you can explain the concept, apply it to a realistic public health situation, and.</a:t>
+            </a:r>
+            <a:endParaRPr lang="en-US" sz="1320" dirty="0"/>
           </a:p>
         </p:txBody>
       </p:sp>
@@ -8905,49 +9034,58 @@
           <a:ln/>
         </p:spPr>
         <p:txBody>
-          <a:bodyPr wrap="square" lIns="635" tIns="635" rIns="635" bIns="635" rtlCol="0" anchor="t">
+          <a:bodyPr wrap="square" lIns="1016" tIns="1016" rIns="1016" bIns="1016" rtlCol="0" anchor="t">
             <a:normAutofit/>
           </a:bodyPr>
           <a:lstStyle/>
           <a:p>
+            <a:pPr indent="0" marL="0">
+              <a:buNone/>
+            </a:pPr>
             <a:r>
               <a:rPr lang="en-US" sz="2100" dirty="0">
                 <a:solidFill>
-                  <a:srgbClr val="17364A"/>
-                </a:solidFill>
-                <a:latin typeface="Aptos" pitchFamily="34" charset="0"/>
-                <a:ea typeface="Aptos" pitchFamily="34" charset="-122"/>
-                <a:cs typeface="Aptos" pitchFamily="34" charset="-120"/>
-              </a:rPr>
-              <a:t>Access and permissions review</a:t>
+                  <a:srgbClr val="003A63"/>
+                </a:solidFill>
+                <a:latin typeface="Aptos" pitchFamily="34" charset="0"/>
+                <a:ea typeface="Aptos" pitchFamily="34" charset="-122"/>
+                <a:cs typeface="Aptos" pitchFamily="34" charset="-120"/>
+              </a:rPr>
+              <a:t>• Access and permissions review</a:t>
             </a:r>
             <a:endParaRPr lang="en-US" sz="2100" dirty="0"/>
           </a:p>
           <a:p>
+            <a:pPr indent="0" marL="0">
+              <a:buNone/>
+            </a:pPr>
             <a:r>
               <a:rPr lang="en-US" sz="2100" dirty="0">
                 <a:solidFill>
-                  <a:srgbClr val="17364A"/>
-                </a:solidFill>
-                <a:latin typeface="Aptos" pitchFamily="34" charset="0"/>
-                <a:ea typeface="Aptos" pitchFamily="34" charset="-122"/>
-                <a:cs typeface="Aptos" pitchFamily="34" charset="-120"/>
-              </a:rPr>
-              <a:t>List of user and service identities</a:t>
+                  <a:srgbClr val="003A63"/>
+                </a:solidFill>
+                <a:latin typeface="Aptos" pitchFamily="34" charset="0"/>
+                <a:ea typeface="Aptos" pitchFamily="34" charset="-122"/>
+                <a:cs typeface="Aptos" pitchFamily="34" charset="-120"/>
+              </a:rPr>
+              <a:t>• List of user and service identities</a:t>
             </a:r>
             <a:endParaRPr lang="en-US" sz="2100" dirty="0"/>
           </a:p>
           <a:p>
+            <a:pPr indent="0" marL="0">
+              <a:buNone/>
+            </a:pPr>
             <a:r>
               <a:rPr lang="en-US" sz="2100" dirty="0">
                 <a:solidFill>
-                  <a:srgbClr val="17364A"/>
-                </a:solidFill>
-                <a:latin typeface="Aptos" pitchFamily="34" charset="0"/>
-                <a:ea typeface="Aptos" pitchFamily="34" charset="-122"/>
-                <a:cs typeface="Aptos" pitchFamily="34" charset="-120"/>
-              </a:rPr>
-              <a:t>Least-privilege recommendation</a:t>
+                  <a:srgbClr val="003A63"/>
+                </a:solidFill>
+                <a:latin typeface="Aptos" pitchFamily="34" charset="0"/>
+                <a:ea typeface="Aptos" pitchFamily="34" charset="-122"/>
+                <a:cs typeface="Aptos" pitchFamily="34" charset="-120"/>
+              </a:rPr>
+              <a:t>• Least-privilege recommendation</a:t>
             </a:r>
             <a:endParaRPr lang="en-US" sz="2100" dirty="0"/>
           </a:p>
@@ -9027,17 +9165,17 @@
         </p:nvSpPr>
         <p:spPr>
           <a:xfrm>
-            <a:off x="7799832" y="1828800"/>
-            <a:ext cx="3145536" cy="685800"/>
-          </a:xfrm>
-          <a:prstGeom prst="rect">
-            <a:avLst/>
-          </a:prstGeom>
-          <a:noFill/>
-          <a:ln/>
-        </p:spPr>
-        <p:txBody>
-          <a:bodyPr wrap="square" lIns="0" tIns="0" rIns="0" bIns="0" rtlCol="0" anchor="t">
+            <a:off x="7799832" y="1801368"/>
+            <a:ext cx="3145536" cy="758952"/>
+          </a:xfrm>
+          <a:prstGeom prst="rect">
+            <a:avLst/>
+          </a:prstGeom>
+          <a:noFill/>
+          <a:ln/>
+        </p:spPr>
+        <p:txBody>
+          <a:bodyPr wrap="square" lIns="254" tIns="254" rIns="254" bIns="254" rtlCol="0" anchor="t">
             <a:normAutofit/>
           </a:bodyPr>
           <a:lstStyle/>
@@ -9046,7 +9184,7 @@
               <a:buNone/>
             </a:pPr>
             <a:r>
-              <a:rPr lang="en-US" sz="1550" dirty="0">
+              <a:rPr lang="en-US" sz="1320" dirty="0">
                 <a:solidFill>
                   <a:srgbClr val="17364A"/>
                 </a:solidFill>
@@ -9056,7 +9194,7 @@
               </a:rPr>
               <a:t>Access and permissions review</a:t>
             </a:r>
-            <a:endParaRPr lang="en-US" sz="1550" dirty="0"/>
+            <a:endParaRPr lang="en-US" sz="1320" dirty="0"/>
           </a:p>
         </p:txBody>
       </p:sp>
@@ -9144,13 +9282,16 @@
           <a:ln/>
         </p:spPr>
         <p:txBody>
-          <a:bodyPr wrap="square" lIns="254" tIns="254" rIns="254" bIns="254" rtlCol="0" anchor="t">
+          <a:bodyPr wrap="square" lIns="508" tIns="508" rIns="508" bIns="508" rtlCol="0" anchor="t">
             <a:normAutofit/>
           </a:bodyPr>
           <a:lstStyle/>
           <a:p>
-            <a:r>
-              <a:rPr lang="en-US" sz="1380" dirty="0">
+            <a:pPr indent="0" marL="0">
+              <a:buNone/>
+            </a:pPr>
+            <a:r>
+              <a:rPr lang="en-US" sz="1220" dirty="0">
                 <a:solidFill>
                   <a:srgbClr val="17364A"/>
                 </a:solidFill>
@@ -9160,11 +9301,14 @@
               </a:rPr>
               <a:t>Access and permissions review</a:t>
             </a:r>
-            <a:endParaRPr lang="en-US" sz="1380" dirty="0"/>
-          </a:p>
-          <a:p>
-            <a:r>
-              <a:rPr lang="en-US" sz="1380" dirty="0">
+            <a:endParaRPr lang="en-US" sz="1220" dirty="0"/>
+          </a:p>
+          <a:p>
+            <a:pPr indent="0" marL="0">
+              <a:buNone/>
+            </a:pPr>
+            <a:r>
+              <a:rPr lang="en-US" sz="1220" dirty="0">
                 <a:solidFill>
                   <a:srgbClr val="17364A"/>
                 </a:solidFill>
@@ -9174,11 +9318,14 @@
               </a:rPr>
               <a:t>List of user and service identities</a:t>
             </a:r>
-            <a:endParaRPr lang="en-US" sz="1380" dirty="0"/>
-          </a:p>
-          <a:p>
-            <a:r>
-              <a:rPr lang="en-US" sz="1380" dirty="0">
+            <a:endParaRPr lang="en-US" sz="1220" dirty="0"/>
+          </a:p>
+          <a:p>
+            <a:pPr indent="0" marL="0">
+              <a:buNone/>
+            </a:pPr>
+            <a:r>
+              <a:rPr lang="en-US" sz="1220" dirty="0">
                 <a:solidFill>
                   <a:srgbClr val="17364A"/>
                 </a:solidFill>
@@ -9188,7 +9335,7 @@
               </a:rPr>
               <a:t>Least-privilege recommendation</a:t>
             </a:r>
-            <a:endParaRPr lang="en-US" sz="1380" dirty="0"/>
+            <a:endParaRPr lang="en-US" sz="1220" dirty="0"/>
           </a:p>
         </p:txBody>
       </p:sp>
@@ -9266,17 +9413,17 @@
         </p:nvSpPr>
         <p:spPr>
           <a:xfrm>
-            <a:off x="7799832" y="5001768"/>
-            <a:ext cx="3145536" cy="502920"/>
-          </a:xfrm>
-          <a:prstGeom prst="rect">
-            <a:avLst/>
-          </a:prstGeom>
-          <a:noFill/>
-          <a:ln/>
-        </p:spPr>
-        <p:txBody>
-          <a:bodyPr wrap="square" lIns="0" tIns="0" rIns="0" bIns="0" rtlCol="0" anchor="t">
+            <a:off x="7799832" y="4974336"/>
+            <a:ext cx="3145536" cy="576072"/>
+          </a:xfrm>
+          <a:prstGeom prst="rect">
+            <a:avLst/>
+          </a:prstGeom>
+          <a:noFill/>
+          <a:ln/>
+        </p:spPr>
+        <p:txBody>
+          <a:bodyPr wrap="square" lIns="254" tIns="254" rIns="254" bIns="254" rtlCol="0" anchor="t">
             <a:normAutofit/>
           </a:bodyPr>
           <a:lstStyle/>
@@ -9285,7 +9432,7 @@
               <a:buNone/>
             </a:pPr>
             <a:r>
-              <a:rPr lang="en-US" sz="1550" dirty="0">
+              <a:rPr lang="en-US" sz="1320" dirty="0">
                 <a:solidFill>
                   <a:srgbClr val="17364A"/>
                 </a:solidFill>
@@ -9293,9 +9440,9 @@
                 <a:ea typeface="Aptos" pitchFamily="34" charset="-122"/>
                 <a:cs typeface="Aptos" pitchFamily="34" charset="-120"/>
               </a:rPr>
-              <a:t>Use the concept to clarify workflow changes, dependencies, staffing, procurement requirements, training needs, and implementation checkpoints.</a:t>
-            </a:r>
-            <a:endParaRPr lang="en-US" sz="1550" dirty="0"/>
+              <a:t>Use the concept to clarify workflow changes, dependencies, staffing, procurement requirements, training needs, and.</a:t>
+            </a:r>
+            <a:endParaRPr lang="en-US" sz="1320" dirty="0"/>
           </a:p>
         </p:txBody>
       </p:sp>
@@ -9596,35 +9743,41 @@
           <a:ln/>
         </p:spPr>
         <p:txBody>
-          <a:bodyPr wrap="square" lIns="635" tIns="635" rIns="635" bIns="635" rtlCol="0" anchor="t">
+          <a:bodyPr wrap="square" lIns="1016" tIns="1016" rIns="1016" bIns="1016" rtlCol="0" anchor="t">
             <a:normAutofit/>
           </a:bodyPr>
           <a:lstStyle/>
           <a:p>
+            <a:pPr indent="0" marL="0">
+              <a:buNone/>
+            </a:pPr>
             <a:r>
               <a:rPr lang="en-US" sz="2100" dirty="0">
                 <a:solidFill>
-                  <a:srgbClr val="17364A"/>
-                </a:solidFill>
-                <a:latin typeface="Aptos" pitchFamily="34" charset="0"/>
-                <a:ea typeface="Aptos" pitchFamily="34" charset="-122"/>
-                <a:cs typeface="Aptos" pitchFamily="34" charset="-120"/>
-              </a:rPr>
-              <a:t>Write-back approval rules</a:t>
+                  <a:srgbClr val="003A63"/>
+                </a:solidFill>
+                <a:latin typeface="Aptos" pitchFamily="34" charset="0"/>
+                <a:ea typeface="Aptos" pitchFamily="34" charset="-122"/>
+                <a:cs typeface="Aptos" pitchFamily="34" charset="-120"/>
+              </a:rPr>
+              <a:t>• Write-back approval rules</a:t>
             </a:r>
             <a:endParaRPr lang="en-US" sz="2100" dirty="0"/>
           </a:p>
           <a:p>
+            <a:pPr indent="0" marL="0">
+              <a:buNone/>
+            </a:pPr>
             <a:r>
               <a:rPr lang="en-US" sz="2100" dirty="0">
                 <a:solidFill>
-                  <a:srgbClr val="17364A"/>
-                </a:solidFill>
-                <a:latin typeface="Aptos" pitchFamily="34" charset="0"/>
-                <a:ea typeface="Aptos" pitchFamily="34" charset="-122"/>
-                <a:cs typeface="Aptos" pitchFamily="34" charset="-120"/>
-              </a:rPr>
-              <a:t>Audit log requirements</a:t>
+                  <a:srgbClr val="003A63"/>
+                </a:solidFill>
+                <a:latin typeface="Aptos" pitchFamily="34" charset="0"/>
+                <a:ea typeface="Aptos" pitchFamily="34" charset="-122"/>
+                <a:cs typeface="Aptos" pitchFamily="34" charset="-120"/>
+              </a:rPr>
+              <a:t>• Audit log requirements</a:t>
             </a:r>
             <a:endParaRPr lang="en-US" sz="2100" dirty="0"/>
           </a:p>
@@ -9704,17 +9857,17 @@
         </p:nvSpPr>
         <p:spPr>
           <a:xfrm>
-            <a:off x="7799832" y="1828800"/>
-            <a:ext cx="3145536" cy="685800"/>
-          </a:xfrm>
-          <a:prstGeom prst="rect">
-            <a:avLst/>
-          </a:prstGeom>
-          <a:noFill/>
-          <a:ln/>
-        </p:spPr>
-        <p:txBody>
-          <a:bodyPr wrap="square" lIns="0" tIns="0" rIns="0" bIns="0" rtlCol="0" anchor="t">
+            <a:off x="7799832" y="1801368"/>
+            <a:ext cx="3145536" cy="758952"/>
+          </a:xfrm>
+          <a:prstGeom prst="rect">
+            <a:avLst/>
+          </a:prstGeom>
+          <a:noFill/>
+          <a:ln/>
+        </p:spPr>
+        <p:txBody>
+          <a:bodyPr wrap="square" lIns="254" tIns="254" rIns="254" bIns="254" rtlCol="0" anchor="t">
             <a:normAutofit/>
           </a:bodyPr>
           <a:lstStyle/>
@@ -9723,7 +9876,7 @@
               <a:buNone/>
             </a:pPr>
             <a:r>
-              <a:rPr lang="en-US" sz="1550" dirty="0">
+              <a:rPr lang="en-US" sz="1320" dirty="0">
                 <a:solidFill>
                   <a:srgbClr val="17364A"/>
                 </a:solidFill>
@@ -9733,7 +9886,7 @@
               </a:rPr>
               <a:t>Write-back approval rules</a:t>
             </a:r>
-            <a:endParaRPr lang="en-US" sz="1550" dirty="0"/>
+            <a:endParaRPr lang="en-US" sz="1320" dirty="0"/>
           </a:p>
         </p:txBody>
       </p:sp>
@@ -9821,13 +9974,16 @@
           <a:ln/>
         </p:spPr>
         <p:txBody>
-          <a:bodyPr wrap="square" lIns="254" tIns="254" rIns="254" bIns="254" rtlCol="0" anchor="t">
+          <a:bodyPr wrap="square" lIns="508" tIns="508" rIns="508" bIns="508" rtlCol="0" anchor="t">
             <a:normAutofit/>
           </a:bodyPr>
           <a:lstStyle/>
           <a:p>
-            <a:r>
-              <a:rPr lang="en-US" sz="1380" dirty="0">
+            <a:pPr indent="0" marL="0">
+              <a:buNone/>
+            </a:pPr>
+            <a:r>
+              <a:rPr lang="en-US" sz="1220" dirty="0">
                 <a:solidFill>
                   <a:srgbClr val="17364A"/>
                 </a:solidFill>
@@ -9837,11 +9993,14 @@
               </a:rPr>
               <a:t>Write-back approval rules</a:t>
             </a:r>
-            <a:endParaRPr lang="en-US" sz="1380" dirty="0"/>
-          </a:p>
-          <a:p>
-            <a:r>
-              <a:rPr lang="en-US" sz="1380" dirty="0">
+            <a:endParaRPr lang="en-US" sz="1220" dirty="0"/>
+          </a:p>
+          <a:p>
+            <a:pPr indent="0" marL="0">
+              <a:buNone/>
+            </a:pPr>
+            <a:r>
+              <a:rPr lang="en-US" sz="1220" dirty="0">
                 <a:solidFill>
                   <a:srgbClr val="17364A"/>
                 </a:solidFill>
@@ -9851,7 +10010,7 @@
               </a:rPr>
               <a:t>Audit log requirements</a:t>
             </a:r>
-            <a:endParaRPr lang="en-US" sz="1380" dirty="0"/>
+            <a:endParaRPr lang="en-US" sz="1220" dirty="0"/>
           </a:p>
         </p:txBody>
       </p:sp>
@@ -9929,17 +10088,17 @@
         </p:nvSpPr>
         <p:spPr>
           <a:xfrm>
-            <a:off x="7799832" y="5001768"/>
-            <a:ext cx="3145536" cy="502920"/>
-          </a:xfrm>
-          <a:prstGeom prst="rect">
-            <a:avLst/>
-          </a:prstGeom>
-          <a:noFill/>
-          <a:ln/>
-        </p:spPr>
-        <p:txBody>
-          <a:bodyPr wrap="square" lIns="0" tIns="0" rIns="0" bIns="0" rtlCol="0" anchor="t">
+            <a:off x="7799832" y="4974336"/>
+            <a:ext cx="3145536" cy="576072"/>
+          </a:xfrm>
+          <a:prstGeom prst="rect">
+            <a:avLst/>
+          </a:prstGeom>
+          <a:noFill/>
+          <a:ln/>
+        </p:spPr>
+        <p:txBody>
+          <a:bodyPr wrap="square" lIns="254" tIns="254" rIns="254" bIns="254" rtlCol="0" anchor="t">
             <a:normAutofit/>
           </a:bodyPr>
           <a:lstStyle/>
@@ -9948,7 +10107,7 @@
               <a:buNone/>
             </a:pPr>
             <a:r>
-              <a:rPr lang="en-US" sz="1550" dirty="0">
+              <a:rPr lang="en-US" sz="1320" dirty="0">
                 <a:solidFill>
                   <a:srgbClr val="17364A"/>
                 </a:solidFill>
@@ -9956,9 +10115,9 @@
                 <a:ea typeface="Aptos" pitchFamily="34" charset="-122"/>
                 <a:cs typeface="Aptos" pitchFamily="34" charset="-120"/>
               </a:rPr>
-              <a:t>Use the concept to clarify workflow changes, dependencies, staffing, procurement requirements, training needs, and implementation checkpoints.</a:t>
-            </a:r>
-            <a:endParaRPr lang="en-US" sz="1550" dirty="0"/>
+              <a:t>Use the concept to clarify workflow changes, dependencies, staffing, procurement requirements, training needs, and.</a:t>
+            </a:r>
+            <a:endParaRPr lang="en-US" sz="1320" dirty="0"/>
           </a:p>
         </p:txBody>
       </p:sp>
@@ -10259,49 +10418,58 @@
           <a:ln/>
         </p:spPr>
         <p:txBody>
-          <a:bodyPr wrap="square" lIns="635" tIns="635" rIns="635" bIns="635" rtlCol="0" anchor="t">
+          <a:bodyPr wrap="square" lIns="1016" tIns="1016" rIns="1016" bIns="1016" rtlCol="0" anchor="t">
             <a:normAutofit/>
           </a:bodyPr>
           <a:lstStyle/>
           <a:p>
+            <a:pPr indent="0" marL="0">
+              <a:buNone/>
+            </a:pPr>
             <a:r>
               <a:rPr lang="en-US" sz="2100" dirty="0">
                 <a:solidFill>
-                  <a:srgbClr val="17364A"/>
-                </a:solidFill>
-                <a:latin typeface="Aptos" pitchFamily="34" charset="0"/>
-                <a:ea typeface="Aptos" pitchFamily="34" charset="-122"/>
-                <a:cs typeface="Aptos" pitchFamily="34" charset="-120"/>
-              </a:rPr>
-              <a:t>Identity, access, and permissions determine who or what can use data, systems, tools, and actions in an.</a:t>
+                  <a:srgbClr val="003A63"/>
+                </a:solidFill>
+                <a:latin typeface="Aptos" pitchFamily="34" charset="0"/>
+                <a:ea typeface="Aptos" pitchFamily="34" charset="-122"/>
+                <a:cs typeface="Aptos" pitchFamily="34" charset="-120"/>
+              </a:rPr>
+              <a:t>• Identity, access, and permissions determine who or what can use data, systems, tools, and.</a:t>
             </a:r>
             <a:endParaRPr lang="en-US" sz="2100" dirty="0"/>
           </a:p>
           <a:p>
+            <a:pPr indent="0" marL="0">
+              <a:buNone/>
+            </a:pPr>
             <a:r>
               <a:rPr lang="en-US" sz="2100" dirty="0">
                 <a:solidFill>
-                  <a:srgbClr val="17364A"/>
-                </a:solidFill>
-                <a:latin typeface="Aptos" pitchFamily="34" charset="0"/>
-                <a:ea typeface="Aptos" pitchFamily="34" charset="-122"/>
-                <a:cs typeface="Aptos" pitchFamily="34" charset="-120"/>
-              </a:rPr>
-              <a:t>Public health AI workflows may involve staff users, service accounts, APIs, vendors, plugins, agents, dashboards,.</a:t>
+                  <a:srgbClr val="003A63"/>
+                </a:solidFill>
+                <a:latin typeface="Aptos" pitchFamily="34" charset="0"/>
+                <a:ea typeface="Aptos" pitchFamily="34" charset="-122"/>
+                <a:cs typeface="Aptos" pitchFamily="34" charset="-120"/>
+              </a:rPr>
+              <a:t>• Public health AI workflows may involve staff users, service accounts, APIs, vendors, plugins,.</a:t>
             </a:r>
             <a:endParaRPr lang="en-US" sz="2100" dirty="0"/>
           </a:p>
           <a:p>
+            <a:pPr indent="0" marL="0">
+              <a:buNone/>
+            </a:pPr>
             <a:r>
               <a:rPr lang="en-US" sz="2100" dirty="0">
                 <a:solidFill>
-                  <a:srgbClr val="17364A"/>
-                </a:solidFill>
-                <a:latin typeface="Aptos" pitchFamily="34" charset="0"/>
-                <a:ea typeface="Aptos" pitchFamily="34" charset="-122"/>
-                <a:cs typeface="Aptos" pitchFamily="34" charset="-120"/>
-              </a:rPr>
-              <a:t>Without clear access controls, an AI tool may retrieve sensitive data, expose information to unauthorized users,.</a:t>
+                  <a:srgbClr val="003A63"/>
+                </a:solidFill>
+                <a:latin typeface="Aptos" pitchFamily="34" charset="0"/>
+                <a:ea typeface="Aptos" pitchFamily="34" charset="-122"/>
+                <a:cs typeface="Aptos" pitchFamily="34" charset="-120"/>
+              </a:rPr>
+              <a:t>• Without clear access controls, an AI tool may retrieve sensitive data, expose information to.</a:t>
             </a:r>
             <a:endParaRPr lang="en-US" sz="2100" dirty="0"/>
           </a:p>
@@ -10381,17 +10549,17 @@
         </p:nvSpPr>
         <p:spPr>
           <a:xfrm>
-            <a:off x="8074152" y="1920240"/>
-            <a:ext cx="2825496" cy="1280160"/>
-          </a:xfrm>
-          <a:prstGeom prst="rect">
-            <a:avLst/>
-          </a:prstGeom>
-          <a:noFill/>
-          <a:ln/>
-        </p:spPr>
-        <p:txBody>
-          <a:bodyPr wrap="square" lIns="0" tIns="0" rIns="0" bIns="0" rtlCol="0" anchor="t">
+            <a:off x="8074152" y="1892808"/>
+            <a:ext cx="2825496" cy="1353312"/>
+          </a:xfrm>
+          <a:prstGeom prst="rect">
+            <a:avLst/>
+          </a:prstGeom>
+          <a:noFill/>
+          <a:ln/>
+        </p:spPr>
+        <p:txBody>
+          <a:bodyPr wrap="square" lIns="254" tIns="254" rIns="254" bIns="254" rtlCol="0" anchor="t">
             <a:normAutofit/>
           </a:bodyPr>
           <a:lstStyle/>
@@ -10400,7 +10568,7 @@
               <a:buNone/>
             </a:pPr>
             <a:r>
-              <a:rPr lang="en-US" sz="1550" dirty="0">
+              <a:rPr lang="en-US" sz="1320" dirty="0">
                 <a:solidFill>
                   <a:srgbClr val="17364A"/>
                 </a:solidFill>
@@ -10408,43 +10576,9 @@
                 <a:ea typeface="Aptos" pitchFamily="34" charset="-122"/>
                 <a:cs typeface="Aptos" pitchFamily="34" charset="-120"/>
               </a:rPr>
-              <a:t>Level: intermediate/practitioner</a:t>
-            </a:r>
-            <a:endParaRPr lang="en-US" sz="1550" dirty="0"/>
-          </a:p>
-          <a:p>
-            <a:pPr indent="0" marL="0">
-              <a:buNone/>
-            </a:pPr>
-            <a:r>
-              <a:rPr lang="en-US" sz="1550" dirty="0">
-                <a:solidFill>
-                  <a:srgbClr val="17364A"/>
-                </a:solidFill>
-                <a:latin typeface="Aptos" pitchFamily="34" charset="0"/>
-                <a:ea typeface="Aptos" pitchFamily="34" charset="-122"/>
-                <a:cs typeface="Aptos" pitchFamily="34" charset="-120"/>
-              </a:rPr>
-              <a:t>Primary track: Governance and Security Track</a:t>
-            </a:r>
-            <a:endParaRPr lang="en-US" sz="1550" dirty="0"/>
-          </a:p>
-          <a:p>
-            <a:pPr indent="0" marL="0">
-              <a:buNone/>
-            </a:pPr>
-            <a:r>
-              <a:rPr lang="en-US" sz="1550" dirty="0">
-                <a:solidFill>
-                  <a:srgbClr val="17364A"/>
-                </a:solidFill>
-                <a:latin typeface="Aptos" pitchFamily="34" charset="0"/>
-                <a:ea typeface="Aptos" pitchFamily="34" charset="-122"/>
-                <a:cs typeface="Aptos" pitchFamily="34" charset="-120"/>
-              </a:rPr>
-              <a:t>Appears in tracks: technical-architecture, governance-and-security, operations-and-data-quality</a:t>
-            </a:r>
-            <a:endParaRPr lang="en-US" sz="1550" dirty="0"/>
+              <a:t>Level: intermediate/practitioner Primary track: Governance and Security Track Appears in tracks: technical-architecture,.</a:t>
+            </a:r>
+            <a:endParaRPr lang="en-US" sz="1320" dirty="0"/>
           </a:p>
         </p:txBody>
       </p:sp>
@@ -10532,13 +10666,16 @@
           <a:ln/>
         </p:spPr>
         <p:txBody>
-          <a:bodyPr wrap="square" lIns="254" tIns="254" rIns="254" bIns="254" rtlCol="0" anchor="t">
+          <a:bodyPr wrap="square" lIns="508" tIns="508" rIns="508" bIns="508" rtlCol="0" anchor="t">
             <a:normAutofit/>
           </a:bodyPr>
           <a:lstStyle/>
           <a:p>
-            <a:r>
-              <a:rPr lang="en-US" sz="1380" dirty="0">
+            <a:pPr indent="0" marL="0">
+              <a:buNone/>
+            </a:pPr>
+            <a:r>
+              <a:rPr lang="en-US" sz="1220" dirty="0">
                 <a:solidFill>
                   <a:srgbClr val="17364A"/>
                 </a:solidFill>
@@ -10548,11 +10685,14 @@
               </a:rPr>
               <a:t>Read the module for shared vocabulary and context.</a:t>
             </a:r>
-            <a:endParaRPr lang="en-US" sz="1380" dirty="0"/>
-          </a:p>
-          <a:p>
-            <a:r>
-              <a:rPr lang="en-US" sz="1380" dirty="0">
+            <a:endParaRPr lang="en-US" sz="1220" dirty="0"/>
+          </a:p>
+          <a:p>
+            <a:pPr indent="0" marL="0">
+              <a:buNone/>
+            </a:pPr>
+            <a:r>
+              <a:rPr lang="en-US" sz="1220" dirty="0">
                 <a:solidFill>
                   <a:srgbClr val="17364A"/>
                 </a:solidFill>
@@ -10562,11 +10702,14 @@
               </a:rPr>
               <a:t>Complete the practical exercise to apply the concept.</a:t>
             </a:r>
-            <a:endParaRPr lang="en-US" sz="1380" dirty="0"/>
-          </a:p>
-          <a:p>
-            <a:r>
-              <a:rPr lang="en-US" sz="1380" dirty="0">
+            <a:endParaRPr lang="en-US" sz="1220" dirty="0"/>
+          </a:p>
+          <a:p>
+            <a:pPr indent="0" marL="0">
+              <a:buNone/>
+            </a:pPr>
+            <a:r>
+              <a:rPr lang="en-US" sz="1220" dirty="0">
                 <a:solidFill>
                   <a:srgbClr val="17364A"/>
                 </a:solidFill>
@@ -10576,7 +10719,7 @@
               </a:rPr>
               <a:t>Use the notes and references for deeper review.</a:t>
             </a:r>
-            <a:endParaRPr lang="en-US" sz="1380" dirty="0"/>
+            <a:endParaRPr lang="en-US" sz="1220" dirty="0"/>
           </a:p>
         </p:txBody>
       </p:sp>
@@ -10877,49 +11020,58 @@
           <a:ln/>
         </p:spPr>
         <p:txBody>
-          <a:bodyPr wrap="square" lIns="635" tIns="635" rIns="635" bIns="635" rtlCol="0" anchor="t">
+          <a:bodyPr wrap="square" lIns="1016" tIns="1016" rIns="1016" bIns="1016" rtlCol="0" anchor="t">
             <a:normAutofit/>
           </a:bodyPr>
           <a:lstStyle/>
           <a:p>
+            <a:pPr indent="0" marL="0">
+              <a:buNone/>
+            </a:pPr>
             <a:r>
               <a:rPr lang="en-US" sz="2100" dirty="0">
                 <a:solidFill>
-                  <a:srgbClr val="17364A"/>
-                </a:solidFill>
-                <a:latin typeface="Aptos" pitchFamily="34" charset="0"/>
-                <a:ea typeface="Aptos" pitchFamily="34" charset="-122"/>
-                <a:cs typeface="Aptos" pitchFamily="34" charset="-120"/>
-              </a:rPr>
-              <a:t>Access and permissions review</a:t>
+                  <a:srgbClr val="003A63"/>
+                </a:solidFill>
+                <a:latin typeface="Aptos" pitchFamily="34" charset="0"/>
+                <a:ea typeface="Aptos" pitchFamily="34" charset="-122"/>
+                <a:cs typeface="Aptos" pitchFamily="34" charset="-120"/>
+              </a:rPr>
+              <a:t>• Access and permissions review</a:t>
             </a:r>
             <a:endParaRPr lang="en-US" sz="2100" dirty="0"/>
           </a:p>
           <a:p>
+            <a:pPr indent="0" marL="0">
+              <a:buNone/>
+            </a:pPr>
             <a:r>
               <a:rPr lang="en-US" sz="2100" dirty="0">
                 <a:solidFill>
-                  <a:srgbClr val="17364A"/>
-                </a:solidFill>
-                <a:latin typeface="Aptos" pitchFamily="34" charset="0"/>
-                <a:ea typeface="Aptos" pitchFamily="34" charset="-122"/>
-                <a:cs typeface="Aptos" pitchFamily="34" charset="-120"/>
-              </a:rPr>
-              <a:t>List of user and service identities</a:t>
+                  <a:srgbClr val="003A63"/>
+                </a:solidFill>
+                <a:latin typeface="Aptos" pitchFamily="34" charset="0"/>
+                <a:ea typeface="Aptos" pitchFamily="34" charset="-122"/>
+                <a:cs typeface="Aptos" pitchFamily="34" charset="-120"/>
+              </a:rPr>
+              <a:t>• List of user and service identities</a:t>
             </a:r>
             <a:endParaRPr lang="en-US" sz="2100" dirty="0"/>
           </a:p>
           <a:p>
+            <a:pPr indent="0" marL="0">
+              <a:buNone/>
+            </a:pPr>
             <a:r>
               <a:rPr lang="en-US" sz="2100" dirty="0">
                 <a:solidFill>
-                  <a:srgbClr val="17364A"/>
-                </a:solidFill>
-                <a:latin typeface="Aptos" pitchFamily="34" charset="0"/>
-                <a:ea typeface="Aptos" pitchFamily="34" charset="-122"/>
-                <a:cs typeface="Aptos" pitchFamily="34" charset="-120"/>
-              </a:rPr>
-              <a:t>Least-privilege recommendation</a:t>
+                  <a:srgbClr val="003A63"/>
+                </a:solidFill>
+                <a:latin typeface="Aptos" pitchFamily="34" charset="0"/>
+                <a:ea typeface="Aptos" pitchFamily="34" charset="-122"/>
+                <a:cs typeface="Aptos" pitchFamily="34" charset="-120"/>
+              </a:rPr>
+              <a:t>• Least-privilege recommendation</a:t>
             </a:r>
             <a:endParaRPr lang="en-US" sz="2100" dirty="0"/>
           </a:p>
@@ -10999,17 +11151,17 @@
         </p:nvSpPr>
         <p:spPr>
           <a:xfrm>
-            <a:off x="7799832" y="1828800"/>
-            <a:ext cx="3145536" cy="685800"/>
-          </a:xfrm>
-          <a:prstGeom prst="rect">
-            <a:avLst/>
-          </a:prstGeom>
-          <a:noFill/>
-          <a:ln/>
-        </p:spPr>
-        <p:txBody>
-          <a:bodyPr wrap="square" lIns="0" tIns="0" rIns="0" bIns="0" rtlCol="0" anchor="t">
+            <a:off x="7799832" y="1801368"/>
+            <a:ext cx="3145536" cy="758952"/>
+          </a:xfrm>
+          <a:prstGeom prst="rect">
+            <a:avLst/>
+          </a:prstGeom>
+          <a:noFill/>
+          <a:ln/>
+        </p:spPr>
+        <p:txBody>
+          <a:bodyPr wrap="square" lIns="254" tIns="254" rIns="254" bIns="254" rtlCol="0" anchor="t">
             <a:normAutofit/>
           </a:bodyPr>
           <a:lstStyle/>
@@ -11018,7 +11170,7 @@
               <a:buNone/>
             </a:pPr>
             <a:r>
-              <a:rPr lang="en-US" sz="1550" dirty="0">
+              <a:rPr lang="en-US" sz="1320" dirty="0">
                 <a:solidFill>
                   <a:srgbClr val="17364A"/>
                 </a:solidFill>
@@ -11028,7 +11180,7 @@
               </a:rPr>
               <a:t>Access and permissions review</a:t>
             </a:r>
-            <a:endParaRPr lang="en-US" sz="1550" dirty="0"/>
+            <a:endParaRPr lang="en-US" sz="1320" dirty="0"/>
           </a:p>
         </p:txBody>
       </p:sp>
@@ -11116,13 +11268,16 @@
           <a:ln/>
         </p:spPr>
         <p:txBody>
-          <a:bodyPr wrap="square" lIns="254" tIns="254" rIns="254" bIns="254" rtlCol="0" anchor="t">
+          <a:bodyPr wrap="square" lIns="508" tIns="508" rIns="508" bIns="508" rtlCol="0" anchor="t">
             <a:normAutofit/>
           </a:bodyPr>
           <a:lstStyle/>
           <a:p>
-            <a:r>
-              <a:rPr lang="en-US" sz="1380" dirty="0">
+            <a:pPr indent="0" marL="0">
+              <a:buNone/>
+            </a:pPr>
+            <a:r>
+              <a:rPr lang="en-US" sz="1220" dirty="0">
                 <a:solidFill>
                   <a:srgbClr val="17364A"/>
                 </a:solidFill>
@@ -11132,11 +11287,14 @@
               </a:rPr>
               <a:t>Write-back approval rules</a:t>
             </a:r>
-            <a:endParaRPr lang="en-US" sz="1380" dirty="0"/>
-          </a:p>
-          <a:p>
-            <a:r>
-              <a:rPr lang="en-US" sz="1380" dirty="0">
+            <a:endParaRPr lang="en-US" sz="1220" dirty="0"/>
+          </a:p>
+          <a:p>
+            <a:pPr indent="0" marL="0">
+              <a:buNone/>
+            </a:pPr>
+            <a:r>
+              <a:rPr lang="en-US" sz="1220" dirty="0">
                 <a:solidFill>
                   <a:srgbClr val="17364A"/>
                 </a:solidFill>
@@ -11146,7 +11304,7 @@
               </a:rPr>
               <a:t>Audit log requirements</a:t>
             </a:r>
-            <a:endParaRPr lang="en-US" sz="1380" dirty="0"/>
+            <a:endParaRPr lang="en-US" sz="1220" dirty="0"/>
           </a:p>
         </p:txBody>
       </p:sp>
@@ -11224,17 +11382,17 @@
         </p:nvSpPr>
         <p:spPr>
           <a:xfrm>
-            <a:off x="7799832" y="5001768"/>
-            <a:ext cx="3145536" cy="502920"/>
-          </a:xfrm>
-          <a:prstGeom prst="rect">
-            <a:avLst/>
-          </a:prstGeom>
-          <a:noFill/>
-          <a:ln/>
-        </p:spPr>
-        <p:txBody>
-          <a:bodyPr wrap="square" lIns="0" tIns="0" rIns="0" bIns="0" rtlCol="0" anchor="t">
+            <a:off x="7799832" y="4974336"/>
+            <a:ext cx="3145536" cy="576072"/>
+          </a:xfrm>
+          <a:prstGeom prst="rect">
+            <a:avLst/>
+          </a:prstGeom>
+          <a:noFill/>
+          <a:ln/>
+        </p:spPr>
+        <p:txBody>
+          <a:bodyPr wrap="square" lIns="254" tIns="254" rIns="254" bIns="254" rtlCol="0" anchor="t">
             <a:normAutofit/>
           </a:bodyPr>
           <a:lstStyle/>
@@ -11243,7 +11401,7 @@
               <a:buNone/>
             </a:pPr>
             <a:r>
-              <a:rPr lang="en-US" sz="1550" dirty="0">
+              <a:rPr lang="en-US" sz="1320" dirty="0">
                 <a:solidFill>
                   <a:srgbClr val="17364A"/>
                 </a:solidFill>
@@ -11251,9 +11409,9 @@
                 <a:ea typeface="Aptos" pitchFamily="34" charset="-122"/>
                 <a:cs typeface="Aptos" pitchFamily="34" charset="-120"/>
               </a:rPr>
-              <a:t>Use the assignment to test whether you can explain the concept, apply it to a realistic public health situation, and identify what would need review before the work moves forward.</a:t>
-            </a:r>
-            <a:endParaRPr lang="en-US" sz="1550" dirty="0"/>
+              <a:t>Use the assignment to test whether you can explain the concept, apply it to a realistic public health situation, and.</a:t>
+            </a:r>
+            <a:endParaRPr lang="en-US" sz="1320" dirty="0"/>
           </a:p>
         </p:txBody>
       </p:sp>
@@ -11554,49 +11712,58 @@
           <a:ln/>
         </p:spPr>
         <p:txBody>
-          <a:bodyPr wrap="square" lIns="635" tIns="635" rIns="635" bIns="635" rtlCol="0" anchor="t">
+          <a:bodyPr wrap="square" lIns="1016" tIns="1016" rIns="1016" bIns="1016" rtlCol="0" anchor="t">
             <a:normAutofit/>
           </a:bodyPr>
           <a:lstStyle/>
           <a:p>
+            <a:pPr indent="0" marL="0">
+              <a:buNone/>
+            </a:pPr>
             <a:r>
               <a:rPr lang="en-US" sz="2100" dirty="0">
                 <a:solidFill>
-                  <a:srgbClr val="17364A"/>
-                </a:solidFill>
-                <a:latin typeface="Aptos" pitchFamily="34" charset="0"/>
-                <a:ea typeface="Aptos" pitchFamily="34" charset="-122"/>
-                <a:cs typeface="Aptos" pitchFamily="34" charset="-120"/>
-              </a:rPr>
-              <a:t>1. What is authorization?</a:t>
+                  <a:srgbClr val="003A63"/>
+                </a:solidFill>
+                <a:latin typeface="Aptos" pitchFamily="34" charset="0"/>
+                <a:ea typeface="Aptos" pitchFamily="34" charset="-122"/>
+                <a:cs typeface="Aptos" pitchFamily="34" charset="-120"/>
+              </a:rPr>
+              <a:t>• 1. What is authorization?</a:t>
             </a:r>
             <a:endParaRPr lang="en-US" sz="2100" dirty="0"/>
           </a:p>
           <a:p>
+            <a:pPr indent="0" marL="0">
+              <a:buNone/>
+            </a:pPr>
             <a:r>
               <a:rPr lang="en-US" sz="2100" dirty="0">
                 <a:solidFill>
-                  <a:srgbClr val="17364A"/>
-                </a:solidFill>
-                <a:latin typeface="Aptos" pitchFamily="34" charset="0"/>
-                <a:ea typeface="Aptos" pitchFamily="34" charset="-122"/>
-                <a:cs typeface="Aptos" pitchFamily="34" charset="-120"/>
-              </a:rPr>
-              <a:t>2. Why are service accounts important in AI workflows?</a:t>
+                  <a:srgbClr val="003A63"/>
+                </a:solidFill>
+                <a:latin typeface="Aptos" pitchFamily="34" charset="0"/>
+                <a:ea typeface="Aptos" pitchFamily="34" charset="-122"/>
+                <a:cs typeface="Aptos" pitchFamily="34" charset="-120"/>
+              </a:rPr>
+              <a:t>• 2. Why are service accounts important in AI workflows?</a:t>
             </a:r>
             <a:endParaRPr lang="en-US" sz="2100" dirty="0"/>
           </a:p>
           <a:p>
+            <a:pPr indent="0" marL="0">
+              <a:buNone/>
+            </a:pPr>
             <a:r>
               <a:rPr lang="en-US" sz="2100" dirty="0">
                 <a:solidFill>
-                  <a:srgbClr val="17364A"/>
-                </a:solidFill>
-                <a:latin typeface="Aptos" pitchFamily="34" charset="0"/>
-                <a:ea typeface="Aptos" pitchFamily="34" charset="-122"/>
-                <a:cs typeface="Aptos" pitchFamily="34" charset="-120"/>
-              </a:rPr>
-              <a:t>3. What does least privilege mean?</a:t>
+                  <a:srgbClr val="003A63"/>
+                </a:solidFill>
+                <a:latin typeface="Aptos" pitchFamily="34" charset="0"/>
+                <a:ea typeface="Aptos" pitchFamily="34" charset="-122"/>
+                <a:cs typeface="Aptos" pitchFamily="34" charset="-120"/>
+              </a:rPr>
+              <a:t>• 3. What does least privilege mean?</a:t>
             </a:r>
             <a:endParaRPr lang="en-US" sz="2100" dirty="0"/>
           </a:p>
@@ -11676,17 +11843,17 @@
         </p:nvSpPr>
         <p:spPr>
           <a:xfrm>
-            <a:off x="7799832" y="1828800"/>
-            <a:ext cx="3145536" cy="685800"/>
-          </a:xfrm>
-          <a:prstGeom prst="rect">
-            <a:avLst/>
-          </a:prstGeom>
-          <a:noFill/>
-          <a:ln/>
-        </p:spPr>
-        <p:txBody>
-          <a:bodyPr wrap="square" lIns="0" tIns="0" rIns="0" bIns="0" rtlCol="0" anchor="t">
+            <a:off x="7799832" y="1801368"/>
+            <a:ext cx="3145536" cy="758952"/>
+          </a:xfrm>
+          <a:prstGeom prst="rect">
+            <a:avLst/>
+          </a:prstGeom>
+          <a:noFill/>
+          <a:ln/>
+        </p:spPr>
+        <p:txBody>
+          <a:bodyPr wrap="square" lIns="254" tIns="254" rIns="254" bIns="254" rtlCol="0" anchor="t">
             <a:normAutofit/>
           </a:bodyPr>
           <a:lstStyle/>
@@ -11695,7 +11862,7 @@
               <a:buNone/>
             </a:pPr>
             <a:r>
-              <a:rPr lang="en-US" sz="1550" dirty="0">
+              <a:rPr lang="en-US" sz="1320" dirty="0">
                 <a:solidFill>
                   <a:srgbClr val="17364A"/>
                 </a:solidFill>
@@ -11705,7 +11872,7 @@
               </a:rPr>
               <a:t>1. What is authorization?</a:t>
             </a:r>
-            <a:endParaRPr lang="en-US" sz="1550" dirty="0"/>
+            <a:endParaRPr lang="en-US" sz="1320" dirty="0"/>
           </a:p>
         </p:txBody>
       </p:sp>
@@ -11793,13 +11960,16 @@
           <a:ln/>
         </p:spPr>
         <p:txBody>
-          <a:bodyPr wrap="square" lIns="254" tIns="254" rIns="254" bIns="254" rtlCol="0" anchor="t">
+          <a:bodyPr wrap="square" lIns="508" tIns="508" rIns="508" bIns="508" rtlCol="0" anchor="t">
             <a:normAutofit/>
           </a:bodyPr>
           <a:lstStyle/>
           <a:p>
-            <a:r>
-              <a:rPr lang="en-US" sz="1380" dirty="0">
+            <a:pPr indent="0" marL="0">
+              <a:buNone/>
+            </a:pPr>
+            <a:r>
+              <a:rPr lang="en-US" sz="1220" dirty="0">
                 <a:solidFill>
                   <a:srgbClr val="17364A"/>
                 </a:solidFill>
@@ -11809,11 +11979,14 @@
               </a:rPr>
               <a:t>1.</a:t>
             </a:r>
-            <a:endParaRPr lang="en-US" sz="1380" dirty="0"/>
-          </a:p>
-          <a:p>
-            <a:r>
-              <a:rPr lang="en-US" sz="1380" dirty="0">
+            <a:endParaRPr lang="en-US" sz="1220" dirty="0"/>
+          </a:p>
+          <a:p>
+            <a:pPr indent="0" marL="0">
+              <a:buNone/>
+            </a:pPr>
+            <a:r>
+              <a:rPr lang="en-US" sz="1220" dirty="0">
                 <a:solidFill>
                   <a:srgbClr val="17364A"/>
                 </a:solidFill>
@@ -11823,11 +11996,14 @@
               </a:rPr>
               <a:t>What is authorization?</a:t>
             </a:r>
-            <a:endParaRPr lang="en-US" sz="1380" dirty="0"/>
-          </a:p>
-          <a:p>
-            <a:r>
-              <a:rPr lang="en-US" sz="1380" dirty="0">
+            <a:endParaRPr lang="en-US" sz="1220" dirty="0"/>
+          </a:p>
+          <a:p>
+            <a:pPr indent="0" marL="0">
+              <a:buNone/>
+            </a:pPr>
+            <a:r>
+              <a:rPr lang="en-US" sz="1220" dirty="0">
                 <a:solidFill>
                   <a:srgbClr val="17364A"/>
                 </a:solidFill>
@@ -11837,7 +12013,7 @@
               </a:rPr>
               <a:t>2.</a:t>
             </a:r>
-            <a:endParaRPr lang="en-US" sz="1380" dirty="0"/>
+            <a:endParaRPr lang="en-US" sz="1220" dirty="0"/>
           </a:p>
         </p:txBody>
       </p:sp>
@@ -11915,17 +12091,17 @@
         </p:nvSpPr>
         <p:spPr>
           <a:xfrm>
-            <a:off x="7799832" y="5001768"/>
-            <a:ext cx="3145536" cy="502920"/>
-          </a:xfrm>
-          <a:prstGeom prst="rect">
-            <a:avLst/>
-          </a:prstGeom>
-          <a:noFill/>
-          <a:ln/>
-        </p:spPr>
-        <p:txBody>
-          <a:bodyPr wrap="square" lIns="0" tIns="0" rIns="0" bIns="0" rtlCol="0" anchor="t">
+            <a:off x="7799832" y="4974336"/>
+            <a:ext cx="3145536" cy="576072"/>
+          </a:xfrm>
+          <a:prstGeom prst="rect">
+            <a:avLst/>
+          </a:prstGeom>
+          <a:noFill/>
+          <a:ln/>
+        </p:spPr>
+        <p:txBody>
+          <a:bodyPr wrap="square" lIns="254" tIns="254" rIns="254" bIns="254" rtlCol="0" anchor="t">
             <a:normAutofit/>
           </a:bodyPr>
           <a:lstStyle/>
@@ -11934,7 +12110,7 @@
               <a:buNone/>
             </a:pPr>
             <a:r>
-              <a:rPr lang="en-US" sz="1550" dirty="0">
+              <a:rPr lang="en-US" sz="1320" dirty="0">
                 <a:solidFill>
                   <a:srgbClr val="17364A"/>
                 </a:solidFill>
@@ -11942,9 +12118,9 @@
                 <a:ea typeface="Aptos" pitchFamily="34" charset="-122"/>
                 <a:cs typeface="Aptos" pitchFamily="34" charset="-120"/>
               </a:rPr>
-              <a:t>Use the assignment to test whether you can explain the concept, apply it to a realistic public health situation, and identify what would need review before the work moves forward.</a:t>
-            </a:r>
-            <a:endParaRPr lang="en-US" sz="1550" dirty="0"/>
+              <a:t>Use the assignment to test whether you can explain the concept, apply it to a realistic public health situation, and.</a:t>
+            </a:r>
+            <a:endParaRPr lang="en-US" sz="1320" dirty="0"/>
           </a:p>
         </p:txBody>
       </p:sp>
@@ -12245,49 +12421,58 @@
           <a:ln/>
         </p:spPr>
         <p:txBody>
-          <a:bodyPr wrap="square" lIns="635" tIns="635" rIns="635" bIns="635" rtlCol="0" anchor="t">
+          <a:bodyPr wrap="square" lIns="1016" tIns="1016" rIns="1016" bIns="1016" rtlCol="0" anchor="t">
             <a:normAutofit/>
           </a:bodyPr>
           <a:lstStyle/>
           <a:p>
+            <a:pPr indent="0" marL="0">
+              <a:buNone/>
+            </a:pPr>
             <a:r>
               <a:rPr lang="en-US" sz="2100" dirty="0">
                 <a:solidFill>
-                  <a:srgbClr val="17364A"/>
-                </a:solidFill>
-                <a:latin typeface="Aptos" pitchFamily="34" charset="0"/>
-                <a:ea typeface="Aptos" pitchFamily="34" charset="-122"/>
-                <a:cs typeface="Aptos" pitchFamily="34" charset="-120"/>
-              </a:rPr>
-              <a:t>NIST Artificial Intelligence Risk Management Framework:.</a:t>
+                  <a:srgbClr val="003A63"/>
+                </a:solidFill>
+                <a:latin typeface="Aptos" pitchFamily="34" charset="0"/>
+                <a:ea typeface="Aptos" pitchFamily="34" charset="-122"/>
+                <a:cs typeface="Aptos" pitchFamily="34" charset="-120"/>
+              </a:rPr>
+              <a:t>• NIST Artificial Intelligence Risk Management Framework:.</a:t>
             </a:r>
             <a:endParaRPr lang="en-US" sz="2100" dirty="0"/>
           </a:p>
           <a:p>
+            <a:pPr indent="0" marL="0">
+              <a:buNone/>
+            </a:pPr>
             <a:r>
               <a:rPr lang="en-US" sz="2100" dirty="0">
                 <a:solidFill>
-                  <a:srgbClr val="17364A"/>
-                </a:solidFill>
-                <a:latin typeface="Aptos" pitchFamily="34" charset="0"/>
-                <a:ea typeface="Aptos" pitchFamily="34" charset="-122"/>
-                <a:cs typeface="Aptos" pitchFamily="34" charset="-120"/>
-              </a:rPr>
-              <a:t>NIST Generative AI Profile:.</a:t>
+                  <a:srgbClr val="003A63"/>
+                </a:solidFill>
+                <a:latin typeface="Aptos" pitchFamily="34" charset="0"/>
+                <a:ea typeface="Aptos" pitchFamily="34" charset="-122"/>
+                <a:cs typeface="Aptos" pitchFamily="34" charset="-120"/>
+              </a:rPr>
+              <a:t>• NIST Generative AI Profile:.</a:t>
             </a:r>
             <a:endParaRPr lang="en-US" sz="2100" dirty="0"/>
           </a:p>
           <a:p>
+            <a:pPr indent="0" marL="0">
+              <a:buNone/>
+            </a:pPr>
             <a:r>
               <a:rPr lang="en-US" sz="2100" dirty="0">
                 <a:solidFill>
-                  <a:srgbClr val="17364A"/>
-                </a:solidFill>
-                <a:latin typeface="Aptos" pitchFamily="34" charset="0"/>
-                <a:ea typeface="Aptos" pitchFamily="34" charset="-122"/>
-                <a:cs typeface="Aptos" pitchFamily="34" charset="-120"/>
-              </a:rPr>
-              <a:t>CDC Public Health Data Strategy and Data Modernization resources:.</a:t>
+                  <a:srgbClr val="003A63"/>
+                </a:solidFill>
+                <a:latin typeface="Aptos" pitchFamily="34" charset="0"/>
+                <a:ea typeface="Aptos" pitchFamily="34" charset="-122"/>
+                <a:cs typeface="Aptos" pitchFamily="34" charset="-120"/>
+              </a:rPr>
+              <a:t>• CDC Public Health Data Strategy and Data Modernization resources:.</a:t>
             </a:r>
             <a:endParaRPr lang="en-US" sz="2100" dirty="0"/>
           </a:p>
@@ -12367,17 +12552,17 @@
         </p:nvSpPr>
         <p:spPr>
           <a:xfrm>
-            <a:off x="7799832" y="1828800"/>
-            <a:ext cx="3145536" cy="685800"/>
-          </a:xfrm>
-          <a:prstGeom prst="rect">
-            <a:avLst/>
-          </a:prstGeom>
-          <a:noFill/>
-          <a:ln/>
-        </p:spPr>
-        <p:txBody>
-          <a:bodyPr wrap="square" lIns="0" tIns="0" rIns="0" bIns="0" rtlCol="0" anchor="t">
+            <a:off x="7799832" y="1801368"/>
+            <a:ext cx="3145536" cy="758952"/>
+          </a:xfrm>
+          <a:prstGeom prst="rect">
+            <a:avLst/>
+          </a:prstGeom>
+          <a:noFill/>
+          <a:ln/>
+        </p:spPr>
+        <p:txBody>
+          <a:bodyPr wrap="square" lIns="254" tIns="254" rIns="254" bIns="254" rtlCol="0" anchor="t">
             <a:normAutofit/>
           </a:bodyPr>
           <a:lstStyle/>
@@ -12386,7 +12571,7 @@
               <a:buNone/>
             </a:pPr>
             <a:r>
-              <a:rPr lang="en-US" sz="1550" dirty="0">
+              <a:rPr lang="en-US" sz="1320" dirty="0">
                 <a:solidFill>
                   <a:srgbClr val="17364A"/>
                 </a:solidFill>
@@ -12396,7 +12581,7 @@
               </a:rPr>
               <a:t>NIST Artificial Intelligence Risk Management Framework:.</a:t>
             </a:r>
-            <a:endParaRPr lang="en-US" sz="1550" dirty="0"/>
+            <a:endParaRPr lang="en-US" sz="1320" dirty="0"/>
           </a:p>
         </p:txBody>
       </p:sp>
@@ -12484,13 +12669,16 @@
           <a:ln/>
         </p:spPr>
         <p:txBody>
-          <a:bodyPr wrap="square" lIns="254" tIns="254" rIns="254" bIns="254" rtlCol="0" anchor="t">
+          <a:bodyPr wrap="square" lIns="508" tIns="508" rIns="508" bIns="508" rtlCol="0" anchor="t">
             <a:normAutofit/>
           </a:bodyPr>
           <a:lstStyle/>
           <a:p>
-            <a:r>
-              <a:rPr lang="en-US" sz="1380" dirty="0">
+            <a:pPr indent="0" marL="0">
+              <a:buNone/>
+            </a:pPr>
+            <a:r>
+              <a:rPr lang="en-US" sz="1220" dirty="0">
                 <a:solidFill>
                   <a:srgbClr val="17364A"/>
                 </a:solidFill>
@@ -12500,11 +12688,14 @@
               </a:rPr>
               <a:t>NIST Artificial Intelligence Risk Management Framework:.</a:t>
             </a:r>
-            <a:endParaRPr lang="en-US" sz="1380" dirty="0"/>
-          </a:p>
-          <a:p>
-            <a:r>
-              <a:rPr lang="en-US" sz="1380" dirty="0">
+            <a:endParaRPr lang="en-US" sz="1220" dirty="0"/>
+          </a:p>
+          <a:p>
+            <a:pPr indent="0" marL="0">
+              <a:buNone/>
+            </a:pPr>
+            <a:r>
+              <a:rPr lang="en-US" sz="1220" dirty="0">
                 <a:solidFill>
                   <a:srgbClr val="17364A"/>
                 </a:solidFill>
@@ -12514,11 +12705,14 @@
               </a:rPr>
               <a:t>OWASP guidance for LLM application security</a:t>
             </a:r>
-            <a:endParaRPr lang="en-US" sz="1380" dirty="0"/>
-          </a:p>
-          <a:p>
-            <a:r>
-              <a:rPr lang="en-US" sz="1380" dirty="0">
+            <a:endParaRPr lang="en-US" sz="1220" dirty="0"/>
+          </a:p>
+          <a:p>
+            <a:pPr indent="0" marL="0">
+              <a:buNone/>
+            </a:pPr>
+            <a:r>
+              <a:rPr lang="en-US" sz="1220" dirty="0">
                 <a:solidFill>
                   <a:srgbClr val="17364A"/>
                 </a:solidFill>
@@ -12526,9 +12720,9 @@
                 <a:ea typeface="Aptos" pitchFamily="34" charset="-122"/>
                 <a:cs typeface="Aptos" pitchFamily="34" charset="-120"/>
               </a:rPr>
-              <a:t>Agency policies for privacy, cybersecurity, records, procurement, accessibility, and.</a:t>
-            </a:r>
-            <a:endParaRPr lang="en-US" sz="1380" dirty="0"/>
+              <a:t>Agency policies for privacy, cybersecurity, records, procurement,.</a:t>
+            </a:r>
+            <a:endParaRPr lang="en-US" sz="1220" dirty="0"/>
           </a:p>
         </p:txBody>
       </p:sp>
@@ -12606,17 +12800,17 @@
         </p:nvSpPr>
         <p:spPr>
           <a:xfrm>
-            <a:off x="7799832" y="5001768"/>
-            <a:ext cx="3145536" cy="502920"/>
-          </a:xfrm>
-          <a:prstGeom prst="rect">
-            <a:avLst/>
-          </a:prstGeom>
-          <a:noFill/>
-          <a:ln/>
-        </p:spPr>
-        <p:txBody>
-          <a:bodyPr wrap="square" lIns="0" tIns="0" rIns="0" bIns="0" rtlCol="0" anchor="t">
+            <a:off x="7799832" y="4974336"/>
+            <a:ext cx="3145536" cy="576072"/>
+          </a:xfrm>
+          <a:prstGeom prst="rect">
+            <a:avLst/>
+          </a:prstGeom>
+          <a:noFill/>
+          <a:ln/>
+        </p:spPr>
+        <p:txBody>
+          <a:bodyPr wrap="square" lIns="254" tIns="254" rIns="254" bIns="254" rtlCol="0" anchor="t">
             <a:normAutofit/>
           </a:bodyPr>
           <a:lstStyle/>
@@ -12625,7 +12819,7 @@
               <a:buNone/>
             </a:pPr>
             <a:r>
-              <a:rPr lang="en-US" sz="1550" dirty="0">
+              <a:rPr lang="en-US" sz="1320" dirty="0">
                 <a:solidFill>
                   <a:srgbClr val="17364A"/>
                 </a:solidFill>
@@ -12633,9 +12827,9 @@
                 <a:ea typeface="Aptos" pitchFamily="34" charset="-122"/>
                 <a:cs typeface="Aptos" pitchFamily="34" charset="-120"/>
               </a:rPr>
-              <a:t>Use the concept to clarify workflow changes, dependencies, staffing, procurement requirements, training needs, and implementation checkpoints.</a:t>
-            </a:r>
-            <a:endParaRPr lang="en-US" sz="1550" dirty="0"/>
+              <a:t>Use the concept to clarify workflow changes, dependencies, staffing, procurement requirements, training needs, and.</a:t>
+            </a:r>
+            <a:endParaRPr lang="en-US" sz="1320" dirty="0"/>
           </a:p>
         </p:txBody>
       </p:sp>
@@ -12936,21 +13130,24 @@
           <a:ln/>
         </p:spPr>
         <p:txBody>
-          <a:bodyPr wrap="square" lIns="635" tIns="635" rIns="635" bIns="635" rtlCol="0" anchor="t">
+          <a:bodyPr wrap="square" lIns="1016" tIns="1016" rIns="1016" bIns="1016" rtlCol="0" anchor="t">
             <a:normAutofit/>
           </a:bodyPr>
           <a:lstStyle/>
           <a:p>
+            <a:pPr indent="0" marL="0">
+              <a:buNone/>
+            </a:pPr>
             <a:r>
               <a:rPr lang="en-US" sz="2100" dirty="0">
                 <a:solidFill>
-                  <a:srgbClr val="17364A"/>
-                </a:solidFill>
-                <a:latin typeface="Aptos" pitchFamily="34" charset="0"/>
-                <a:ea typeface="Aptos" pitchFamily="34" charset="-122"/>
-                <a:cs typeface="Aptos" pitchFamily="34" charset="-120"/>
-              </a:rPr>
-              <a:t>Relevant public health program SOPs, data governance documentation, and implementation plans</a:t>
+                  <a:srgbClr val="003A63"/>
+                </a:solidFill>
+                <a:latin typeface="Aptos" pitchFamily="34" charset="0"/>
+                <a:ea typeface="Aptos" pitchFamily="34" charset="-122"/>
+                <a:cs typeface="Aptos" pitchFamily="34" charset="-120"/>
+              </a:rPr>
+              <a:t>• Relevant public health program SOPs, data governance documentation, and implementation plans</a:t>
             </a:r>
             <a:endParaRPr lang="en-US" sz="2100" dirty="0"/>
           </a:p>
@@ -13030,17 +13227,17 @@
         </p:nvSpPr>
         <p:spPr>
           <a:xfrm>
-            <a:off x="7799832" y="1828800"/>
-            <a:ext cx="3145536" cy="685800"/>
-          </a:xfrm>
-          <a:prstGeom prst="rect">
-            <a:avLst/>
-          </a:prstGeom>
-          <a:noFill/>
-          <a:ln/>
-        </p:spPr>
-        <p:txBody>
-          <a:bodyPr wrap="square" lIns="0" tIns="0" rIns="0" bIns="0" rtlCol="0" anchor="t">
+            <a:off x="7799832" y="1801368"/>
+            <a:ext cx="3145536" cy="758952"/>
+          </a:xfrm>
+          <a:prstGeom prst="rect">
+            <a:avLst/>
+          </a:prstGeom>
+          <a:noFill/>
+          <a:ln/>
+        </p:spPr>
+        <p:txBody>
+          <a:bodyPr wrap="square" lIns="254" tIns="254" rIns="254" bIns="254" rtlCol="0" anchor="t">
             <a:normAutofit/>
           </a:bodyPr>
           <a:lstStyle/>
@@ -13049,7 +13246,7 @@
               <a:buNone/>
             </a:pPr>
             <a:r>
-              <a:rPr lang="en-US" sz="1550" dirty="0">
+              <a:rPr lang="en-US" sz="1320" dirty="0">
                 <a:solidFill>
                   <a:srgbClr val="17364A"/>
                 </a:solidFill>
@@ -13059,7 +13256,7 @@
               </a:rPr>
               <a:t>Relevant public health program SOPs, data governance documentation, and implementation plans</a:t>
             </a:r>
-            <a:endParaRPr lang="en-US" sz="1550" dirty="0"/>
+            <a:endParaRPr lang="en-US" sz="1320" dirty="0"/>
           </a:p>
         </p:txBody>
       </p:sp>
@@ -13147,13 +13344,16 @@
           <a:ln/>
         </p:spPr>
         <p:txBody>
-          <a:bodyPr wrap="square" lIns="254" tIns="254" rIns="254" bIns="254" rtlCol="0" anchor="t">
+          <a:bodyPr wrap="square" lIns="508" tIns="508" rIns="508" bIns="508" rtlCol="0" anchor="t">
             <a:normAutofit/>
           </a:bodyPr>
           <a:lstStyle/>
           <a:p>
-            <a:r>
-              <a:rPr lang="en-US" sz="1380" dirty="0">
+            <a:pPr indent="0" marL="0">
+              <a:buNone/>
+            </a:pPr>
+            <a:r>
+              <a:rPr lang="en-US" sz="1220" dirty="0">
                 <a:solidFill>
                   <a:srgbClr val="17364A"/>
                 </a:solidFill>
@@ -13161,9 +13361,9 @@
                 <a:ea typeface="Aptos" pitchFamily="34" charset="-122"/>
                 <a:cs typeface="Aptos" pitchFamily="34" charset="-120"/>
               </a:rPr>
-              <a:t>Relevant public health program SOPs, data governance documentation, and implementation plans</a:t>
-            </a:r>
-            <a:endParaRPr lang="en-US" sz="1380" dirty="0"/>
+              <a:t>Relevant public health program SOPs, data governance.</a:t>
+            </a:r>
+            <a:endParaRPr lang="en-US" sz="1220" dirty="0"/>
           </a:p>
         </p:txBody>
       </p:sp>
@@ -13241,17 +13441,17 @@
         </p:nvSpPr>
         <p:spPr>
           <a:xfrm>
-            <a:off x="7799832" y="5001768"/>
-            <a:ext cx="3145536" cy="502920"/>
-          </a:xfrm>
-          <a:prstGeom prst="rect">
-            <a:avLst/>
-          </a:prstGeom>
-          <a:noFill/>
-          <a:ln/>
-        </p:spPr>
-        <p:txBody>
-          <a:bodyPr wrap="square" lIns="0" tIns="0" rIns="0" bIns="0" rtlCol="0" anchor="t">
+            <a:off x="7799832" y="4974336"/>
+            <a:ext cx="3145536" cy="576072"/>
+          </a:xfrm>
+          <a:prstGeom prst="rect">
+            <a:avLst/>
+          </a:prstGeom>
+          <a:noFill/>
+          <a:ln/>
+        </p:spPr>
+        <p:txBody>
+          <a:bodyPr wrap="square" lIns="254" tIns="254" rIns="254" bIns="254" rtlCol="0" anchor="t">
             <a:normAutofit/>
           </a:bodyPr>
           <a:lstStyle/>
@@ -13260,7 +13460,7 @@
               <a:buNone/>
             </a:pPr>
             <a:r>
-              <a:rPr lang="en-US" sz="1550" dirty="0">
+              <a:rPr lang="en-US" sz="1320" dirty="0">
                 <a:solidFill>
                   <a:srgbClr val="17364A"/>
                 </a:solidFill>
@@ -13268,9 +13468,9 @@
                 <a:ea typeface="Aptos" pitchFamily="34" charset="-122"/>
                 <a:cs typeface="Aptos" pitchFamily="34" charset="-120"/>
               </a:rPr>
-              <a:t>Use the concept to clarify workflow changes, dependencies, staffing, procurement requirements, training needs, and implementation checkpoints.</a:t>
-            </a:r>
-            <a:endParaRPr lang="en-US" sz="1550" dirty="0"/>
+              <a:t>Use the concept to clarify workflow changes, dependencies, staffing, procurement requirements, training needs, and.</a:t>
+            </a:r>
+            <a:endParaRPr lang="en-US" sz="1320" dirty="0"/>
           </a:p>
         </p:txBody>
       </p:sp>
@@ -13571,63 +13771,75 @@
           <a:ln/>
         </p:spPr>
         <p:txBody>
-          <a:bodyPr wrap="square" lIns="635" tIns="635" rIns="635" bIns="635" rtlCol="0" anchor="t">
+          <a:bodyPr wrap="square" lIns="1016" tIns="1016" rIns="1016" bIns="1016" rtlCol="0" anchor="t">
             <a:normAutofit/>
           </a:bodyPr>
           <a:lstStyle/>
           <a:p>
+            <a:pPr indent="0" marL="0">
+              <a:buNone/>
+            </a:pPr>
             <a:r>
               <a:rPr lang="en-US" sz="1900" dirty="0">
                 <a:solidFill>
-                  <a:srgbClr val="17364A"/>
-                </a:solidFill>
-                <a:latin typeface="Aptos" pitchFamily="34" charset="0"/>
-                <a:ea typeface="Aptos" pitchFamily="34" charset="-122"/>
-                <a:cs typeface="Aptos" pitchFamily="34" charset="-120"/>
-              </a:rPr>
-              <a:t>Play 11: Build and Deploy AI Solutions - This lesson informs Play 11 by helping learners connect the lesson.</a:t>
+                  <a:srgbClr val="003A63"/>
+                </a:solidFill>
+                <a:latin typeface="Aptos" pitchFamily="34" charset="0"/>
+                <a:ea typeface="Aptos" pitchFamily="34" charset="-122"/>
+                <a:cs typeface="Aptos" pitchFamily="34" charset="-120"/>
+              </a:rPr>
+              <a:t>• Play 11: Build and Deploy AI Solutions - This lesson informs Play 11 by helping learners.</a:t>
             </a:r>
             <a:endParaRPr lang="en-US" sz="1900" dirty="0"/>
           </a:p>
           <a:p>
+            <a:pPr indent="0" marL="0">
+              <a:buNone/>
+            </a:pPr>
             <a:r>
               <a:rPr lang="en-US" sz="1900" dirty="0">
                 <a:solidFill>
-                  <a:srgbClr val="17364A"/>
-                </a:solidFill>
-                <a:latin typeface="Aptos" pitchFamily="34" charset="0"/>
-                <a:ea typeface="Aptos" pitchFamily="34" charset="-122"/>
-                <a:cs typeface="Aptos" pitchFamily="34" charset="-120"/>
-              </a:rPr>
-              <a:t>Play 1: Vision &amp; Guardrails - This lesson informs Play 1 by helping learners connect the lesson topic to.</a:t>
+                  <a:srgbClr val="003A63"/>
+                </a:solidFill>
+                <a:latin typeface="Aptos" pitchFamily="34" charset="0"/>
+                <a:ea typeface="Aptos" pitchFamily="34" charset="-122"/>
+                <a:cs typeface="Aptos" pitchFamily="34" charset="-120"/>
+              </a:rPr>
+              <a:t>• Play 1: Vision &amp; Guardrails - This lesson informs Play 1 by helping learners connect the.</a:t>
             </a:r>
             <a:endParaRPr lang="en-US" sz="1900" dirty="0"/>
           </a:p>
           <a:p>
+            <a:pPr indent="0" marL="0">
+              <a:buNone/>
+            </a:pPr>
             <a:r>
               <a:rPr lang="en-US" sz="1900" dirty="0">
                 <a:solidFill>
-                  <a:srgbClr val="17364A"/>
-                </a:solidFill>
-                <a:latin typeface="Aptos" pitchFamily="34" charset="0"/>
-                <a:ea typeface="Aptos" pitchFamily="34" charset="-122"/>
-                <a:cs typeface="Aptos" pitchFamily="34" charset="-120"/>
-              </a:rPr>
-              <a:t>Play 2: Readiness Assessment - This lesson informs Play 2 by helping learners connect the lesson topic to.</a:t>
+                  <a:srgbClr val="003A63"/>
+                </a:solidFill>
+                <a:latin typeface="Aptos" pitchFamily="34" charset="0"/>
+                <a:ea typeface="Aptos" pitchFamily="34" charset="-122"/>
+                <a:cs typeface="Aptos" pitchFamily="34" charset="-120"/>
+              </a:rPr>
+              <a:t>• Play 2: Readiness Assessment - This lesson informs Play 2 by helping learners connect the.</a:t>
             </a:r>
             <a:endParaRPr lang="en-US" sz="1900" dirty="0"/>
           </a:p>
           <a:p>
+            <a:pPr indent="0" marL="0">
+              <a:buNone/>
+            </a:pPr>
             <a:r>
               <a:rPr lang="en-US" sz="1900" dirty="0">
                 <a:solidFill>
-                  <a:srgbClr val="17364A"/>
-                </a:solidFill>
-                <a:latin typeface="Aptos" pitchFamily="34" charset="0"/>
-                <a:ea typeface="Aptos" pitchFamily="34" charset="-122"/>
-                <a:cs typeface="Aptos" pitchFamily="34" charset="-120"/>
-              </a:rPr>
-              <a:t>Play 3: Establish AI Governance - This lesson informs Play 3 by helping learners connect the lesson topic to.</a:t>
+                  <a:srgbClr val="003A63"/>
+                </a:solidFill>
+                <a:latin typeface="Aptos" pitchFamily="34" charset="0"/>
+                <a:ea typeface="Aptos" pitchFamily="34" charset="-122"/>
+                <a:cs typeface="Aptos" pitchFamily="34" charset="-120"/>
+              </a:rPr>
+              <a:t>• Play 3: Establish AI Governance - This lesson informs Play 3 by helping learners connect the.</a:t>
             </a:r>
             <a:endParaRPr lang="en-US" sz="1900" dirty="0"/>
           </a:p>
@@ -13707,17 +13919,17 @@
         </p:nvSpPr>
         <p:spPr>
           <a:xfrm>
-            <a:off x="8211312" y="1920240"/>
-            <a:ext cx="2734056" cy="1463040"/>
-          </a:xfrm>
-          <a:prstGeom prst="rect">
-            <a:avLst/>
-          </a:prstGeom>
-          <a:noFill/>
-          <a:ln/>
-        </p:spPr>
-        <p:txBody>
-          <a:bodyPr wrap="square" lIns="0" tIns="0" rIns="0" bIns="0" rtlCol="0" anchor="t">
+            <a:off x="8211312" y="1892808"/>
+            <a:ext cx="2734056" cy="1536192"/>
+          </a:xfrm>
+          <a:prstGeom prst="rect">
+            <a:avLst/>
+          </a:prstGeom>
+          <a:noFill/>
+          <a:ln/>
+        </p:spPr>
+        <p:txBody>
+          <a:bodyPr wrap="square" lIns="254" tIns="254" rIns="254" bIns="254" rtlCol="0" anchor="t">
             <a:normAutofit/>
           </a:bodyPr>
           <a:lstStyle/>
@@ -13726,7 +13938,7 @@
               <a:buNone/>
             </a:pPr>
             <a:r>
-              <a:rPr lang="en-US" sz="1550" dirty="0">
+              <a:rPr lang="en-US" sz="1320" dirty="0">
                 <a:solidFill>
                   <a:srgbClr val="17364A"/>
                 </a:solidFill>
@@ -13734,9 +13946,9 @@
                 <a:ea typeface="Aptos" pitchFamily="34" charset="-122"/>
                 <a:cs typeface="Aptos" pitchFamily="34" charset="-120"/>
               </a:rPr>
-              <a:t>Use the related plays to identify decisions, participants, timing, approvals, and documentation needed for responsible implementation.</a:t>
-            </a:r>
-            <a:endParaRPr lang="en-US" sz="1550" dirty="0"/>
+              <a:t>Use the related plays to identify decisions, participants, timing, approvals, and documentation needed for responsible.</a:t>
+            </a:r>
+            <a:endParaRPr lang="en-US" sz="1320" dirty="0"/>
           </a:p>
         </p:txBody>
       </p:sp>
@@ -13824,13 +14036,16 @@
           <a:ln/>
         </p:spPr>
         <p:txBody>
-          <a:bodyPr wrap="square" lIns="254" tIns="254" rIns="254" bIns="254" rtlCol="0" anchor="t">
+          <a:bodyPr wrap="square" lIns="508" tIns="508" rIns="508" bIns="508" rtlCol="0" anchor="t">
             <a:normAutofit/>
           </a:bodyPr>
           <a:lstStyle/>
           <a:p>
-            <a:r>
-              <a:rPr lang="en-US" sz="1380" dirty="0">
+            <a:pPr indent="0" marL="0">
+              <a:buNone/>
+            </a:pPr>
+            <a:r>
+              <a:rPr lang="en-US" sz="1220" dirty="0">
                 <a:solidFill>
                   <a:srgbClr val="17364A"/>
                 </a:solidFill>
@@ -13840,11 +14055,14 @@
               </a:rPr>
               <a:t>Locate the decision point in the playbook sequence.</a:t>
             </a:r>
-            <a:endParaRPr lang="en-US" sz="1380" dirty="0"/>
-          </a:p>
-          <a:p>
-            <a:r>
-              <a:rPr lang="en-US" sz="1380" dirty="0">
+            <a:endParaRPr lang="en-US" sz="1220" dirty="0"/>
+          </a:p>
+          <a:p>
+            <a:pPr indent="0" marL="0">
+              <a:buNone/>
+            </a:pPr>
+            <a:r>
+              <a:rPr lang="en-US" sz="1220" dirty="0">
                 <a:solidFill>
                   <a:srgbClr val="17364A"/>
                 </a:solidFill>
@@ -13854,11 +14072,14 @@
               </a:rPr>
               <a:t>Identify who should participate in the work.</a:t>
             </a:r>
-            <a:endParaRPr lang="en-US" sz="1380" dirty="0"/>
-          </a:p>
-          <a:p>
-            <a:r>
-              <a:rPr lang="en-US" sz="1380" dirty="0">
+            <a:endParaRPr lang="en-US" sz="1220" dirty="0"/>
+          </a:p>
+          <a:p>
+            <a:pPr indent="0" marL="0">
+              <a:buNone/>
+            </a:pPr>
+            <a:r>
+              <a:rPr lang="en-US" sz="1220" dirty="0">
                 <a:solidFill>
                   <a:srgbClr val="17364A"/>
                 </a:solidFill>
@@ -13868,7 +14089,7 @@
               </a:rPr>
               <a:t>Document the review, approval, or implementation step.</a:t>
             </a:r>
-            <a:endParaRPr lang="en-US" sz="1380" dirty="0"/>
+            <a:endParaRPr lang="en-US" sz="1220" dirty="0"/>
           </a:p>
         </p:txBody>
       </p:sp>
@@ -14169,63 +14390,75 @@
           <a:ln/>
         </p:spPr>
         <p:txBody>
-          <a:bodyPr wrap="square" lIns="635" tIns="635" rIns="635" bIns="635" rtlCol="0" anchor="t">
+          <a:bodyPr wrap="square" lIns="1016" tIns="1016" rIns="1016" bIns="1016" rtlCol="0" anchor="t">
             <a:normAutofit/>
           </a:bodyPr>
           <a:lstStyle/>
           <a:p>
+            <a:pPr indent="0" marL="0">
+              <a:buNone/>
+            </a:pPr>
             <a:r>
               <a:rPr lang="en-US" sz="1850" dirty="0">
                 <a:solidFill>
-                  <a:srgbClr val="17364A"/>
-                </a:solidFill>
-                <a:latin typeface="Aptos" pitchFamily="34" charset="0"/>
-                <a:ea typeface="Aptos" pitchFamily="34" charset="-122"/>
-                <a:cs typeface="Aptos" pitchFamily="34" charset="-120"/>
-              </a:rPr>
-              <a:t>Tool 4: AI Policy Landscape Scan (Worksheet) - Use AI Policy Landscape Scan to translate this lesson into a.</a:t>
+                  <a:srgbClr val="003A63"/>
+                </a:solidFill>
+                <a:latin typeface="Aptos" pitchFamily="34" charset="0"/>
+                <a:ea typeface="Aptos" pitchFamily="34" charset="-122"/>
+                <a:cs typeface="Aptos" pitchFamily="34" charset="-120"/>
+              </a:rPr>
+              <a:t>• Tool 4: AI Policy Landscape Scan (Worksheet) - Use AI Policy Landscape Scan to translate this.</a:t>
             </a:r>
             <a:endParaRPr lang="en-US" sz="1850" dirty="0"/>
           </a:p>
           <a:p>
+            <a:pPr indent="0" marL="0">
+              <a:buNone/>
+            </a:pPr>
             <a:r>
               <a:rPr lang="en-US" sz="1850" dirty="0">
                 <a:solidFill>
-                  <a:srgbClr val="17364A"/>
-                </a:solidFill>
-                <a:latin typeface="Aptos" pitchFamily="34" charset="0"/>
-                <a:ea typeface="Aptos" pitchFamily="34" charset="-122"/>
-                <a:cs typeface="Aptos" pitchFamily="34" charset="-120"/>
-              </a:rPr>
-              <a:t>Tool 5: AI Environmental and Resource Impact Review (Checklist) - Use AI Environmental and Resource Impact.</a:t>
+                  <a:srgbClr val="003A63"/>
+                </a:solidFill>
+                <a:latin typeface="Aptos" pitchFamily="34" charset="0"/>
+                <a:ea typeface="Aptos" pitchFamily="34" charset="-122"/>
+                <a:cs typeface="Aptos" pitchFamily="34" charset="-120"/>
+              </a:rPr>
+              <a:t>• Tool 5: AI Environmental and Resource Impact Review (Checklist) - Use AI Environmental and.</a:t>
             </a:r>
             <a:endParaRPr lang="en-US" sz="1850" dirty="0"/>
           </a:p>
           <a:p>
+            <a:pPr indent="0" marL="0">
+              <a:buNone/>
+            </a:pPr>
             <a:r>
               <a:rPr lang="en-US" sz="1850" dirty="0">
                 <a:solidFill>
-                  <a:srgbClr val="17364A"/>
-                </a:solidFill>
-                <a:latin typeface="Aptos" pitchFamily="34" charset="0"/>
-                <a:ea typeface="Aptos" pitchFamily="34" charset="-122"/>
-                <a:cs typeface="Aptos" pitchFamily="34" charset="-120"/>
-              </a:rPr>
-              <a:t>Tool 6: Human-Centered AI Decision Rule Checklist (Checklist) - Use Human-Centered AI Decision Rule.</a:t>
+                  <a:srgbClr val="003A63"/>
+                </a:solidFill>
+                <a:latin typeface="Aptos" pitchFamily="34" charset="0"/>
+                <a:ea typeface="Aptos" pitchFamily="34" charset="-122"/>
+                <a:cs typeface="Aptos" pitchFamily="34" charset="-120"/>
+              </a:rPr>
+              <a:t>• Tool 6: Human-Centered AI Decision Rule Checklist (Checklist) - Use Human-Centered AI Decision.</a:t>
             </a:r>
             <a:endParaRPr lang="en-US" sz="1850" dirty="0"/>
           </a:p>
           <a:p>
+            <a:pPr indent="0" marL="0">
+              <a:buNone/>
+            </a:pPr>
             <a:r>
               <a:rPr lang="en-US" sz="1850" dirty="0">
                 <a:solidFill>
-                  <a:srgbClr val="17364A"/>
-                </a:solidFill>
-                <a:latin typeface="Aptos" pitchFamily="34" charset="0"/>
-                <a:ea typeface="Aptos" pitchFamily="34" charset="-122"/>
-                <a:cs typeface="Aptos" pitchFamily="34" charset="-120"/>
-              </a:rPr>
-              <a:t>Tool 8: AI Project Charter (Planning) - Use AI Project Charter to translate this lesson into a documented.</a:t>
+                  <a:srgbClr val="003A63"/>
+                </a:solidFill>
+                <a:latin typeface="Aptos" pitchFamily="34" charset="0"/>
+                <a:ea typeface="Aptos" pitchFamily="34" charset="-122"/>
+                <a:cs typeface="Aptos" pitchFamily="34" charset="-120"/>
+              </a:rPr>
+              <a:t>• Tool 8: AI Project Charter (Planning) - Use AI Project Charter to translate this lesson into a.</a:t>
             </a:r>
             <a:endParaRPr lang="en-US" sz="1850" dirty="0"/>
           </a:p>
@@ -14305,17 +14538,17 @@
         </p:nvSpPr>
         <p:spPr>
           <a:xfrm>
-            <a:off x="8211312" y="1920240"/>
-            <a:ext cx="2734056" cy="1463040"/>
-          </a:xfrm>
-          <a:prstGeom prst="rect">
-            <a:avLst/>
-          </a:prstGeom>
-          <a:noFill/>
-          <a:ln/>
-        </p:spPr>
-        <p:txBody>
-          <a:bodyPr wrap="square" lIns="0" tIns="0" rIns="0" bIns="0" rtlCol="0" anchor="t">
+            <a:off x="8211312" y="1892808"/>
+            <a:ext cx="2734056" cy="1536192"/>
+          </a:xfrm>
+          <a:prstGeom prst="rect">
+            <a:avLst/>
+          </a:prstGeom>
+          <a:noFill/>
+          <a:ln/>
+        </p:spPr>
+        <p:txBody>
+          <a:bodyPr wrap="square" lIns="254" tIns="254" rIns="254" bIns="254" rtlCol="0" anchor="t">
             <a:normAutofit/>
           </a:bodyPr>
           <a:lstStyle/>
@@ -14324,7 +14557,7 @@
               <a:buNone/>
             </a:pPr>
             <a:r>
-              <a:rPr lang="en-US" sz="1550" dirty="0">
+              <a:rPr lang="en-US" sz="1320" dirty="0">
                 <a:solidFill>
                   <a:srgbClr val="17364A"/>
                 </a:solidFill>
@@ -14332,9 +14565,9 @@
                 <a:ea typeface="Aptos" pitchFamily="34" charset="-122"/>
                 <a:cs typeface="Aptos" pitchFamily="34" charset="-120"/>
               </a:rPr>
-              <a:t>Use linked tools when your department needs a structured worksheet, template, checklist, review process, or documentation artifact.</a:t>
-            </a:r>
-            <a:endParaRPr lang="en-US" sz="1550" dirty="0"/>
+              <a:t>Use linked tools when your department needs a structured worksheet, template, checklist, review process, or.</a:t>
+            </a:r>
+            <a:endParaRPr lang="en-US" sz="1320" dirty="0"/>
           </a:p>
         </p:txBody>
       </p:sp>
@@ -14422,13 +14655,16 @@
           <a:ln/>
         </p:spPr>
         <p:txBody>
-          <a:bodyPr wrap="square" lIns="254" tIns="254" rIns="254" bIns="254" rtlCol="0" anchor="t">
+          <a:bodyPr wrap="square" lIns="508" tIns="508" rIns="508" bIns="508" rtlCol="0" anchor="t">
             <a:normAutofit/>
           </a:bodyPr>
           <a:lstStyle/>
           <a:p>
-            <a:r>
-              <a:rPr lang="en-US" sz="1380" dirty="0">
+            <a:pPr indent="0" marL="0">
+              <a:buNone/>
+            </a:pPr>
+            <a:r>
+              <a:rPr lang="en-US" sz="1220" dirty="0">
                 <a:solidFill>
                   <a:srgbClr val="17364A"/>
                 </a:solidFill>
@@ -14438,11 +14674,14 @@
               </a:rPr>
               <a:t>Use a tool when no comparable local process exists.</a:t>
             </a:r>
-            <a:endParaRPr lang="en-US" sz="1380" dirty="0"/>
-          </a:p>
-          <a:p>
-            <a:r>
-              <a:rPr lang="en-US" sz="1380" dirty="0">
+            <a:endParaRPr lang="en-US" sz="1220" dirty="0"/>
+          </a:p>
+          <a:p>
+            <a:pPr indent="0" marL="0">
+              <a:buNone/>
+            </a:pPr>
+            <a:r>
+              <a:rPr lang="en-US" sz="1220" dirty="0">
                 <a:solidFill>
                   <a:srgbClr val="17364A"/>
                 </a:solidFill>
@@ -14450,13 +14689,16 @@
                 <a:ea typeface="Aptos" pitchFamily="34" charset="-122"/>
                 <a:cs typeface="Aptos" pitchFamily="34" charset="-120"/>
               </a:rPr>
-              <a:t>Adapt existing department templates when they already fit the purpose.</a:t>
-            </a:r>
-            <a:endParaRPr lang="en-US" sz="1380" dirty="0"/>
-          </a:p>
-          <a:p>
-            <a:r>
-              <a:rPr lang="en-US" sz="1380" dirty="0">
+              <a:t>Adapt existing department templates when they already fit the.</a:t>
+            </a:r>
+            <a:endParaRPr lang="en-US" sz="1220" dirty="0"/>
+          </a:p>
+          <a:p>
+            <a:pPr indent="0" marL="0">
+              <a:buNone/>
+            </a:pPr>
+            <a:r>
+              <a:rPr lang="en-US" sz="1220" dirty="0">
                 <a:solidFill>
                   <a:srgbClr val="17364A"/>
                 </a:solidFill>
@@ -14466,7 +14708,7 @@
               </a:rPr>
               <a:t>Save the completed artifact as evidence of the decision.</a:t>
             </a:r>
-            <a:endParaRPr lang="en-US" sz="1380" dirty="0"/>
+            <a:endParaRPr lang="en-US" sz="1220" dirty="0"/>
           </a:p>
         </p:txBody>
       </p:sp>
@@ -14767,49 +15009,58 @@
           <a:ln/>
         </p:spPr>
         <p:txBody>
-          <a:bodyPr wrap="square" lIns="635" tIns="635" rIns="635" bIns="635" rtlCol="0" anchor="t">
+          <a:bodyPr wrap="square" lIns="1016" tIns="1016" rIns="1016" bIns="1016" rtlCol="0" anchor="t">
             <a:normAutofit/>
           </a:bodyPr>
           <a:lstStyle/>
           <a:p>
+            <a:pPr indent="0" marL="0">
+              <a:buNone/>
+            </a:pPr>
             <a:r>
               <a:rPr lang="en-US" sz="2100" dirty="0">
                 <a:solidFill>
-                  <a:srgbClr val="17364A"/>
-                </a:solidFill>
-                <a:latin typeface="Aptos" pitchFamily="34" charset="0"/>
-                <a:ea typeface="Aptos" pitchFamily="34" charset="-122"/>
-                <a:cs typeface="Aptos" pitchFamily="34" charset="-120"/>
-              </a:rPr>
-              <a:t>Explain the difference between user identity, service identity, authentication, authorization, and.</a:t>
+                  <a:srgbClr val="003A63"/>
+                </a:solidFill>
+                <a:latin typeface="Aptos" pitchFamily="34" charset="0"/>
+                <a:ea typeface="Aptos" pitchFamily="34" charset="-122"/>
+                <a:cs typeface="Aptos" pitchFamily="34" charset="-120"/>
+              </a:rPr>
+              <a:t>• Explain the difference between user identity, service identity, authentication, authorization,.</a:t>
             </a:r>
             <a:endParaRPr lang="en-US" sz="2100" dirty="0"/>
           </a:p>
           <a:p>
+            <a:pPr indent="0" marL="0">
+              <a:buNone/>
+            </a:pPr>
             <a:r>
               <a:rPr lang="en-US" sz="2100" dirty="0">
                 <a:solidFill>
-                  <a:srgbClr val="17364A"/>
-                </a:solidFill>
-                <a:latin typeface="Aptos" pitchFamily="34" charset="0"/>
-                <a:ea typeface="Aptos" pitchFamily="34" charset="-122"/>
-                <a:cs typeface="Aptos" pitchFamily="34" charset="-120"/>
-              </a:rPr>
-              <a:t>Apply least-privilege principles to AI-supported public health workflows.</a:t>
+                  <a:srgbClr val="003A63"/>
+                </a:solidFill>
+                <a:latin typeface="Aptos" pitchFamily="34" charset="0"/>
+                <a:ea typeface="Aptos" pitchFamily="34" charset="-122"/>
+                <a:cs typeface="Aptos" pitchFamily="34" charset="-120"/>
+              </a:rPr>
+              <a:t>• Apply least-privilege principles to AI-supported public health workflows.</a:t>
             </a:r>
             <a:endParaRPr lang="en-US" sz="2100" dirty="0"/>
           </a:p>
           <a:p>
+            <a:pPr indent="0" marL="0">
+              <a:buNone/>
+            </a:pPr>
             <a:r>
               <a:rPr lang="en-US" sz="2100" dirty="0">
                 <a:solidFill>
-                  <a:srgbClr val="17364A"/>
-                </a:solidFill>
-                <a:latin typeface="Aptos" pitchFamily="34" charset="0"/>
-                <a:ea typeface="Aptos" pitchFamily="34" charset="-122"/>
-                <a:cs typeface="Aptos" pitchFamily="34" charset="-120"/>
-              </a:rPr>
-              <a:t>Identify access risks for read-only, retrieval, summarization, and write-back AI functions.</a:t>
+                  <a:srgbClr val="003A63"/>
+                </a:solidFill>
+                <a:latin typeface="Aptos" pitchFamily="34" charset="0"/>
+                <a:ea typeface="Aptos" pitchFamily="34" charset="-122"/>
+                <a:cs typeface="Aptos" pitchFamily="34" charset="-120"/>
+              </a:rPr>
+              <a:t>• Identify access risks for read-only, retrieval, summarization, and write-back AI functions.</a:t>
             </a:r>
             <a:endParaRPr lang="en-US" sz="2100" dirty="0"/>
           </a:p>
@@ -14889,17 +15140,17 @@
         </p:nvSpPr>
         <p:spPr>
           <a:xfrm>
-            <a:off x="7799832" y="1828800"/>
-            <a:ext cx="3145536" cy="685800"/>
-          </a:xfrm>
-          <a:prstGeom prst="rect">
-            <a:avLst/>
-          </a:prstGeom>
-          <a:noFill/>
-          <a:ln/>
-        </p:spPr>
-        <p:txBody>
-          <a:bodyPr wrap="square" lIns="0" tIns="0" rIns="0" bIns="0" rtlCol="0" anchor="t">
+            <a:off x="7799832" y="1801368"/>
+            <a:ext cx="3145536" cy="758952"/>
+          </a:xfrm>
+          <a:prstGeom prst="rect">
+            <a:avLst/>
+          </a:prstGeom>
+          <a:noFill/>
+          <a:ln/>
+        </p:spPr>
+        <p:txBody>
+          <a:bodyPr wrap="square" lIns="254" tIns="254" rIns="254" bIns="254" rtlCol="0" anchor="t">
             <a:normAutofit/>
           </a:bodyPr>
           <a:lstStyle/>
@@ -14908,7 +15159,7 @@
               <a:buNone/>
             </a:pPr>
             <a:r>
-              <a:rPr lang="en-US" sz="1550" dirty="0">
+              <a:rPr lang="en-US" sz="1320" dirty="0">
                 <a:solidFill>
                   <a:srgbClr val="17364A"/>
                 </a:solidFill>
@@ -14918,7 +15169,7 @@
               </a:rPr>
               <a:t>Explain the difference between user identity, service identity, authentication, authorization, and.</a:t>
             </a:r>
-            <a:endParaRPr lang="en-US" sz="1550" dirty="0"/>
+            <a:endParaRPr lang="en-US" sz="1320" dirty="0"/>
           </a:p>
         </p:txBody>
       </p:sp>
@@ -15006,13 +15257,16 @@
           <a:ln/>
         </p:spPr>
         <p:txBody>
-          <a:bodyPr wrap="square" lIns="254" tIns="254" rIns="254" bIns="254" rtlCol="0" anchor="t">
+          <a:bodyPr wrap="square" lIns="508" tIns="508" rIns="508" bIns="508" rtlCol="0" anchor="t">
             <a:normAutofit/>
           </a:bodyPr>
           <a:lstStyle/>
           <a:p>
-            <a:r>
-              <a:rPr lang="en-US" sz="1380" dirty="0">
+            <a:pPr indent="0" marL="0">
+              <a:buNone/>
+            </a:pPr>
+            <a:r>
+              <a:rPr lang="en-US" sz="1220" dirty="0">
                 <a:solidFill>
                   <a:srgbClr val="17364A"/>
                 </a:solidFill>
@@ -15020,13 +15274,16 @@
                 <a:ea typeface="Aptos" pitchFamily="34" charset="-122"/>
                 <a:cs typeface="Aptos" pitchFamily="34" charset="-120"/>
               </a:rPr>
-              <a:t>Explain the difference between user identity, service identity, authentication,.</a:t>
-            </a:r>
-            <a:endParaRPr lang="en-US" sz="1380" dirty="0"/>
-          </a:p>
-          <a:p>
-            <a:r>
-              <a:rPr lang="en-US" sz="1380" dirty="0">
+              <a:t>Explain the difference between user identity, service identity,.</a:t>
+            </a:r>
+            <a:endParaRPr lang="en-US" sz="1220" dirty="0"/>
+          </a:p>
+          <a:p>
+            <a:pPr indent="0" marL="0">
+              <a:buNone/>
+            </a:pPr>
+            <a:r>
+              <a:rPr lang="en-US" sz="1220" dirty="0">
                 <a:solidFill>
                   <a:srgbClr val="17364A"/>
                 </a:solidFill>
@@ -15034,13 +15291,16 @@
                 <a:ea typeface="Aptos" pitchFamily="34" charset="-122"/>
                 <a:cs typeface="Aptos" pitchFamily="34" charset="-120"/>
               </a:rPr>
-              <a:t>Define audit log and approval requirements for AI tools that access sensitive systems or.</a:t>
-            </a:r>
-            <a:endParaRPr lang="en-US" sz="1380" dirty="0"/>
-          </a:p>
-          <a:p>
-            <a:r>
-              <a:rPr lang="en-US" sz="1380" dirty="0">
+              <a:t>Define audit log and approval requirements for AI tools that.</a:t>
+            </a:r>
+            <a:endParaRPr lang="en-US" sz="1220" dirty="0"/>
+          </a:p>
+          <a:p>
+            <a:pPr indent="0" marL="0">
+              <a:buNone/>
+            </a:pPr>
+            <a:r>
+              <a:rPr lang="en-US" sz="1220" dirty="0">
                 <a:solidFill>
                   <a:srgbClr val="17364A"/>
                 </a:solidFill>
@@ -15050,7 +15310,7 @@
               </a:rPr>
               <a:t>Create an access and permissions review for an AI workflow.</a:t>
             </a:r>
-            <a:endParaRPr lang="en-US" sz="1380" dirty="0"/>
+            <a:endParaRPr lang="en-US" sz="1220" dirty="0"/>
           </a:p>
         </p:txBody>
       </p:sp>
@@ -15128,17 +15388,17 @@
         </p:nvSpPr>
         <p:spPr>
           <a:xfrm>
-            <a:off x="7799832" y="5001768"/>
-            <a:ext cx="3145536" cy="502920"/>
-          </a:xfrm>
-          <a:prstGeom prst="rect">
-            <a:avLst/>
-          </a:prstGeom>
-          <a:noFill/>
-          <a:ln/>
-        </p:spPr>
-        <p:txBody>
-          <a:bodyPr wrap="square" lIns="0" tIns="0" rIns="0" bIns="0" rtlCol="0" anchor="t">
+            <a:off x="7799832" y="4974336"/>
+            <a:ext cx="3145536" cy="576072"/>
+          </a:xfrm>
+          <a:prstGeom prst="rect">
+            <a:avLst/>
+          </a:prstGeom>
+          <a:noFill/>
+          <a:ln/>
+        </p:spPr>
+        <p:txBody>
+          <a:bodyPr wrap="square" lIns="254" tIns="254" rIns="254" bIns="254" rtlCol="0" anchor="t">
             <a:normAutofit/>
           </a:bodyPr>
           <a:lstStyle/>
@@ -15147,7 +15407,7 @@
               <a:buNone/>
             </a:pPr>
             <a:r>
-              <a:rPr lang="en-US" sz="1550" dirty="0">
+              <a:rPr lang="en-US" sz="1320" dirty="0">
                 <a:solidFill>
                   <a:srgbClr val="17364A"/>
                 </a:solidFill>
@@ -15155,9 +15415,9 @@
                 <a:ea typeface="Aptos" pitchFamily="34" charset="-122"/>
                 <a:cs typeface="Aptos" pitchFamily="34" charset="-120"/>
               </a:rPr>
-              <a:t>Use the assignment to test whether you can explain the concept, apply it to a realistic public health situation, and identify what would need review before the work moves forward.</a:t>
-            </a:r>
-            <a:endParaRPr lang="en-US" sz="1550" dirty="0"/>
+              <a:t>Use the assignment to test whether you can explain the concept, apply it to a realistic public health situation, and.</a:t>
+            </a:r>
+            <a:endParaRPr lang="en-US" sz="1320" dirty="0"/>
           </a:p>
         </p:txBody>
       </p:sp>
@@ -15458,49 +15718,58 @@
           <a:ln/>
         </p:spPr>
         <p:txBody>
-          <a:bodyPr wrap="square" lIns="635" tIns="635" rIns="635" bIns="635" rtlCol="0" anchor="t">
+          <a:bodyPr wrap="square" lIns="1016" tIns="1016" rIns="1016" bIns="1016" rtlCol="0" anchor="t">
             <a:normAutofit/>
           </a:bodyPr>
           <a:lstStyle/>
           <a:p>
+            <a:pPr indent="0" marL="0">
+              <a:buNone/>
+            </a:pPr>
             <a:r>
               <a:rPr lang="en-US" sz="2100" dirty="0">
                 <a:solidFill>
-                  <a:srgbClr val="17364A"/>
-                </a:solidFill>
-                <a:latin typeface="Aptos" pitchFamily="34" charset="0"/>
-                <a:ea typeface="Aptos" pitchFamily="34" charset="-122"/>
-                <a:cs typeface="Aptos" pitchFamily="34" charset="-120"/>
-              </a:rPr>
-              <a:t>Identity, access, and permissions determine who or what can use data, systems, tools, and actions in an.</a:t>
+                  <a:srgbClr val="003A63"/>
+                </a:solidFill>
+                <a:latin typeface="Aptos" pitchFamily="34" charset="0"/>
+                <a:ea typeface="Aptos" pitchFamily="34" charset="-122"/>
+                <a:cs typeface="Aptos" pitchFamily="34" charset="-120"/>
+              </a:rPr>
+              <a:t>• Identity, access, and permissions determine who or what can use data, systems, tools, and.</a:t>
             </a:r>
             <a:endParaRPr lang="en-US" sz="2100" dirty="0"/>
           </a:p>
           <a:p>
+            <a:pPr indent="0" marL="0">
+              <a:buNone/>
+            </a:pPr>
             <a:r>
               <a:rPr lang="en-US" sz="2100" dirty="0">
                 <a:solidFill>
-                  <a:srgbClr val="17364A"/>
-                </a:solidFill>
-                <a:latin typeface="Aptos" pitchFamily="34" charset="0"/>
-                <a:ea typeface="Aptos" pitchFamily="34" charset="-122"/>
-                <a:cs typeface="Aptos" pitchFamily="34" charset="-120"/>
-              </a:rPr>
-              <a:t>Public health AI workflows may involve staff users, service accounts, APIs, vendors, plugins, agents,.</a:t>
+                  <a:srgbClr val="003A63"/>
+                </a:solidFill>
+                <a:latin typeface="Aptos" pitchFamily="34" charset="0"/>
+                <a:ea typeface="Aptos" pitchFamily="34" charset="-122"/>
+                <a:cs typeface="Aptos" pitchFamily="34" charset="-120"/>
+              </a:rPr>
+              <a:t>• Public health AI workflows may involve staff users, service accounts, APIs, vendors, plugins,.</a:t>
             </a:r>
             <a:endParaRPr lang="en-US" sz="2100" dirty="0"/>
           </a:p>
           <a:p>
+            <a:pPr indent="0" marL="0">
+              <a:buNone/>
+            </a:pPr>
             <a:r>
               <a:rPr lang="en-US" sz="2100" dirty="0">
                 <a:solidFill>
-                  <a:srgbClr val="17364A"/>
-                </a:solidFill>
-                <a:latin typeface="Aptos" pitchFamily="34" charset="0"/>
-                <a:ea typeface="Aptos" pitchFamily="34" charset="-122"/>
-                <a:cs typeface="Aptos" pitchFamily="34" charset="-120"/>
-              </a:rPr>
-              <a:t>Without clear access controls, an AI tool may retrieve sensitive data, expose information to.</a:t>
+                  <a:srgbClr val="003A63"/>
+                </a:solidFill>
+                <a:latin typeface="Aptos" pitchFamily="34" charset="0"/>
+                <a:ea typeface="Aptos" pitchFamily="34" charset="-122"/>
+                <a:cs typeface="Aptos" pitchFamily="34" charset="-120"/>
+              </a:rPr>
+              <a:t>• Without clear access controls, an AI tool may retrieve sensitive data, expose information to.</a:t>
             </a:r>
             <a:endParaRPr lang="en-US" sz="2100" dirty="0"/>
           </a:p>
@@ -15580,17 +15849,17 @@
         </p:nvSpPr>
         <p:spPr>
           <a:xfrm>
-            <a:off x="7799832" y="1828800"/>
-            <a:ext cx="3145536" cy="685800"/>
-          </a:xfrm>
-          <a:prstGeom prst="rect">
-            <a:avLst/>
-          </a:prstGeom>
-          <a:noFill/>
-          <a:ln/>
-        </p:spPr>
-        <p:txBody>
-          <a:bodyPr wrap="square" lIns="0" tIns="0" rIns="0" bIns="0" rtlCol="0" anchor="t">
+            <a:off x="7799832" y="1801368"/>
+            <a:ext cx="3145536" cy="758952"/>
+          </a:xfrm>
+          <a:prstGeom prst="rect">
+            <a:avLst/>
+          </a:prstGeom>
+          <a:noFill/>
+          <a:ln/>
+        </p:spPr>
+        <p:txBody>
+          <a:bodyPr wrap="square" lIns="254" tIns="254" rIns="254" bIns="254" rtlCol="0" anchor="t">
             <a:normAutofit/>
           </a:bodyPr>
           <a:lstStyle/>
@@ -15599,7 +15868,7 @@
               <a:buNone/>
             </a:pPr>
             <a:r>
-              <a:rPr lang="en-US" sz="1550" dirty="0">
+              <a:rPr lang="en-US" sz="1320" dirty="0">
                 <a:solidFill>
                   <a:srgbClr val="17364A"/>
                 </a:solidFill>
@@ -15609,7 +15878,7 @@
               </a:rPr>
               <a:t>Identity, access, and permissions determine who or what can use data, systems, tools, and actions in an.</a:t>
             </a:r>
-            <a:endParaRPr lang="en-US" sz="1550" dirty="0"/>
+            <a:endParaRPr lang="en-US" sz="1320" dirty="0"/>
           </a:p>
         </p:txBody>
       </p:sp>
@@ -15697,13 +15966,16 @@
           <a:ln/>
         </p:spPr>
         <p:txBody>
-          <a:bodyPr wrap="square" lIns="254" tIns="254" rIns="254" bIns="254" rtlCol="0" anchor="t">
+          <a:bodyPr wrap="square" lIns="508" tIns="508" rIns="508" bIns="508" rtlCol="0" anchor="t">
             <a:normAutofit/>
           </a:bodyPr>
           <a:lstStyle/>
           <a:p>
-            <a:r>
-              <a:rPr lang="en-US" sz="1380" dirty="0">
+            <a:pPr indent="0" marL="0">
+              <a:buNone/>
+            </a:pPr>
+            <a:r>
+              <a:rPr lang="en-US" sz="1220" dirty="0">
                 <a:solidFill>
                   <a:srgbClr val="17364A"/>
                 </a:solidFill>
@@ -15711,13 +15983,16 @@
                 <a:ea typeface="Aptos" pitchFamily="34" charset="-122"/>
                 <a:cs typeface="Aptos" pitchFamily="34" charset="-120"/>
               </a:rPr>
-              <a:t>Identity, access, and permissions determine who or what can use data, systems, tools, and.</a:t>
-            </a:r>
-            <a:endParaRPr lang="en-US" sz="1380" dirty="0"/>
-          </a:p>
-          <a:p>
-            <a:r>
-              <a:rPr lang="en-US" sz="1380" dirty="0">
+              <a:t>Identity, access, and permissions determine who or what can use.</a:t>
+            </a:r>
+            <a:endParaRPr lang="en-US" sz="1220" dirty="0"/>
+          </a:p>
+          <a:p>
+            <a:pPr indent="0" marL="0">
+              <a:buNone/>
+            </a:pPr>
+            <a:r>
+              <a:rPr lang="en-US" sz="1220" dirty="0">
                 <a:solidFill>
                   <a:srgbClr val="17364A"/>
                 </a:solidFill>
@@ -15725,13 +16000,16 @@
                 <a:ea typeface="Aptos" pitchFamily="34" charset="-122"/>
                 <a:cs typeface="Aptos" pitchFamily="34" charset="-120"/>
               </a:rPr>
-              <a:t>Public health AI workflows may involve staff users, service accounts, APIs, vendors,.</a:t>
-            </a:r>
-            <a:endParaRPr lang="en-US" sz="1380" dirty="0"/>
-          </a:p>
-          <a:p>
-            <a:r>
-              <a:rPr lang="en-US" sz="1380" dirty="0">
+              <a:t>Public health AI workflows may involve staff users, service.</a:t>
+            </a:r>
+            <a:endParaRPr lang="en-US" sz="1220" dirty="0"/>
+          </a:p>
+          <a:p>
+            <a:pPr indent="0" marL="0">
+              <a:buNone/>
+            </a:pPr>
+            <a:r>
+              <a:rPr lang="en-US" sz="1220" dirty="0">
                 <a:solidFill>
                   <a:srgbClr val="17364A"/>
                 </a:solidFill>
@@ -15739,9 +16017,9 @@
                 <a:ea typeface="Aptos" pitchFamily="34" charset="-122"/>
                 <a:cs typeface="Aptos" pitchFamily="34" charset="-120"/>
               </a:rPr>
-              <a:t>Without clear access controls, an AI tool may retrieve sensitive data, expose information.</a:t>
-            </a:r>
-            <a:endParaRPr lang="en-US" sz="1380" dirty="0"/>
+              <a:t>Without clear access controls, an AI tool may retrieve sensitive.</a:t>
+            </a:r>
+            <a:endParaRPr lang="en-US" sz="1220" dirty="0"/>
           </a:p>
         </p:txBody>
       </p:sp>
@@ -15819,17 +16097,17 @@
         </p:nvSpPr>
         <p:spPr>
           <a:xfrm>
-            <a:off x="7799832" y="5001768"/>
-            <a:ext cx="3145536" cy="502920"/>
-          </a:xfrm>
-          <a:prstGeom prst="rect">
-            <a:avLst/>
-          </a:prstGeom>
-          <a:noFill/>
-          <a:ln/>
-        </p:spPr>
-        <p:txBody>
-          <a:bodyPr wrap="square" lIns="0" tIns="0" rIns="0" bIns="0" rtlCol="0" anchor="t">
+            <a:off x="7799832" y="4974336"/>
+            <a:ext cx="3145536" cy="576072"/>
+          </a:xfrm>
+          <a:prstGeom prst="rect">
+            <a:avLst/>
+          </a:prstGeom>
+          <a:noFill/>
+          <a:ln/>
+        </p:spPr>
+        <p:txBody>
+          <a:bodyPr wrap="square" lIns="254" tIns="254" rIns="254" bIns="254" rtlCol="0" anchor="t">
             <a:normAutofit/>
           </a:bodyPr>
           <a:lstStyle/>
@@ -15838,7 +16116,7 @@
               <a:buNone/>
             </a:pPr>
             <a:r>
-              <a:rPr lang="en-US" sz="1550" dirty="0">
+              <a:rPr lang="en-US" sz="1320" dirty="0">
                 <a:solidFill>
                   <a:srgbClr val="17364A"/>
                 </a:solidFill>
@@ -15846,9 +16124,9 @@
                 <a:ea typeface="Aptos" pitchFamily="34" charset="-122"/>
                 <a:cs typeface="Aptos" pitchFamily="34" charset="-120"/>
               </a:rPr>
-              <a:t>Use the concept to clarify workflow changes, dependencies, staffing, procurement requirements, training needs, and implementation checkpoints.</a:t>
-            </a:r>
-            <a:endParaRPr lang="en-US" sz="1550" dirty="0"/>
+              <a:t>Use the concept to clarify workflow changes, dependencies, staffing, procurement requirements, training needs, and.</a:t>
+            </a:r>
+            <a:endParaRPr lang="en-US" sz="1320" dirty="0"/>
           </a:p>
         </p:txBody>
       </p:sp>
@@ -16149,49 +16427,58 @@
           <a:ln/>
         </p:spPr>
         <p:txBody>
-          <a:bodyPr wrap="square" lIns="635" tIns="635" rIns="635" bIns="635" rtlCol="0" anchor="t">
+          <a:bodyPr wrap="square" lIns="1016" tIns="1016" rIns="1016" bIns="1016" rtlCol="0" anchor="t">
             <a:normAutofit/>
           </a:bodyPr>
           <a:lstStyle/>
           <a:p>
+            <a:pPr indent="0" marL="0">
+              <a:buNone/>
+            </a:pPr>
             <a:r>
               <a:rPr lang="en-US" sz="2100" dirty="0">
                 <a:solidFill>
-                  <a:srgbClr val="17364A"/>
-                </a:solidFill>
-                <a:latin typeface="Aptos" pitchFamily="34" charset="0"/>
-                <a:ea typeface="Aptos" pitchFamily="34" charset="-122"/>
-                <a:cs typeface="Aptos" pitchFamily="34" charset="-120"/>
-              </a:rPr>
-              <a:t>This module provides national-level training guidance for public health agencies and partners.</a:t>
+                  <a:srgbClr val="003A63"/>
+                </a:solidFill>
+                <a:latin typeface="Aptos" pitchFamily="34" charset="0"/>
+                <a:ea typeface="Aptos" pitchFamily="34" charset="-122"/>
+                <a:cs typeface="Aptos" pitchFamily="34" charset="-120"/>
+              </a:rPr>
+              <a:t>• This module provides national-level training guidance for public health agencies and partners.</a:t>
             </a:r>
             <a:endParaRPr lang="en-US" sz="2100" dirty="0"/>
           </a:p>
           <a:p>
+            <a:pPr indent="0" marL="0">
+              <a:buNone/>
+            </a:pPr>
             <a:r>
               <a:rPr lang="en-US" sz="2100" dirty="0">
                 <a:solidFill>
-                  <a:srgbClr val="17364A"/>
-                </a:solidFill>
-                <a:latin typeface="Aptos" pitchFamily="34" charset="0"/>
-                <a:ea typeface="Aptos" pitchFamily="34" charset="-122"/>
-                <a:cs typeface="Aptos" pitchFamily="34" charset="-120"/>
-              </a:rPr>
-              <a:t>It is not legal advice and does not replace review by agency legal counsel, privacy officers,.</a:t>
+                  <a:srgbClr val="003A63"/>
+                </a:solidFill>
+                <a:latin typeface="Aptos" pitchFamily="34" charset="0"/>
+                <a:ea typeface="Aptos" pitchFamily="34" charset="-122"/>
+                <a:cs typeface="Aptos" pitchFamily="34" charset="-120"/>
+              </a:rPr>
+              <a:t>• It is not legal advice and does not replace review by agency legal counsel, privacy officers,.</a:t>
             </a:r>
             <a:endParaRPr lang="en-US" sz="2100" dirty="0"/>
           </a:p>
           <a:p>
+            <a:pPr indent="0" marL="0">
+              <a:buNone/>
+            </a:pPr>
             <a:r>
               <a:rPr lang="en-US" sz="2100" dirty="0">
                 <a:solidFill>
-                  <a:srgbClr val="17364A"/>
-                </a:solidFill>
-                <a:latin typeface="Aptos" pitchFamily="34" charset="0"/>
-                <a:ea typeface="Aptos" pitchFamily="34" charset="-122"/>
-                <a:cs typeface="Aptos" pitchFamily="34" charset="-120"/>
-              </a:rPr>
-              <a:t>Requirements may vary by state, locality, territory, Tribe, agency, funding source, data-sharing.</a:t>
+                  <a:srgbClr val="003A63"/>
+                </a:solidFill>
+                <a:latin typeface="Aptos" pitchFamily="34" charset="0"/>
+                <a:ea typeface="Aptos" pitchFamily="34" charset="-122"/>
+                <a:cs typeface="Aptos" pitchFamily="34" charset="-120"/>
+              </a:rPr>
+              <a:t>• Requirements may vary by state, locality, territory, Tribe, agency, funding source,.</a:t>
             </a:r>
             <a:endParaRPr lang="en-US" sz="2100" dirty="0"/>
           </a:p>
@@ -16271,17 +16558,17 @@
         </p:nvSpPr>
         <p:spPr>
           <a:xfrm>
-            <a:off x="7799832" y="1828800"/>
-            <a:ext cx="3145536" cy="685800"/>
-          </a:xfrm>
-          <a:prstGeom prst="rect">
-            <a:avLst/>
-          </a:prstGeom>
-          <a:noFill/>
-          <a:ln/>
-        </p:spPr>
-        <p:txBody>
-          <a:bodyPr wrap="square" lIns="0" tIns="0" rIns="0" bIns="0" rtlCol="0" anchor="t">
+            <a:off x="7799832" y="1801368"/>
+            <a:ext cx="3145536" cy="758952"/>
+          </a:xfrm>
+          <a:prstGeom prst="rect">
+            <a:avLst/>
+          </a:prstGeom>
+          <a:noFill/>
+          <a:ln/>
+        </p:spPr>
+        <p:txBody>
+          <a:bodyPr wrap="square" lIns="254" tIns="254" rIns="254" bIns="254" rtlCol="0" anchor="t">
             <a:normAutofit/>
           </a:bodyPr>
           <a:lstStyle/>
@@ -16290,7 +16577,7 @@
               <a:buNone/>
             </a:pPr>
             <a:r>
-              <a:rPr lang="en-US" sz="1550" dirty="0">
+              <a:rPr lang="en-US" sz="1320" dirty="0">
                 <a:solidFill>
                   <a:srgbClr val="17364A"/>
                 </a:solidFill>
@@ -16300,7 +16587,7 @@
               </a:rPr>
               <a:t>This module provides national-level training guidance for public health agencies and partners.</a:t>
             </a:r>
-            <a:endParaRPr lang="en-US" sz="1550" dirty="0"/>
+            <a:endParaRPr lang="en-US" sz="1320" dirty="0"/>
           </a:p>
         </p:txBody>
       </p:sp>
@@ -16388,13 +16675,16 @@
           <a:ln/>
         </p:spPr>
         <p:txBody>
-          <a:bodyPr wrap="square" lIns="254" tIns="254" rIns="254" bIns="254" rtlCol="0" anchor="t">
+          <a:bodyPr wrap="square" lIns="508" tIns="508" rIns="508" bIns="508" rtlCol="0" anchor="t">
             <a:normAutofit/>
           </a:bodyPr>
           <a:lstStyle/>
           <a:p>
-            <a:r>
-              <a:rPr lang="en-US" sz="1380" dirty="0">
+            <a:pPr indent="0" marL="0">
+              <a:buNone/>
+            </a:pPr>
+            <a:r>
+              <a:rPr lang="en-US" sz="1220" dirty="0">
                 <a:solidFill>
                   <a:srgbClr val="17364A"/>
                 </a:solidFill>
@@ -16402,13 +16692,16 @@
                 <a:ea typeface="Aptos" pitchFamily="34" charset="-122"/>
                 <a:cs typeface="Aptos" pitchFamily="34" charset="-120"/>
               </a:rPr>
-              <a:t>It is not legal advice and does not replace review by agency legal counsel, privacy.</a:t>
-            </a:r>
-            <a:endParaRPr lang="en-US" sz="1380" dirty="0"/>
-          </a:p>
-          <a:p>
-            <a:r>
-              <a:rPr lang="en-US" sz="1380" dirty="0">
+              <a:t>It is not legal advice and does not replace review by agency legal.</a:t>
+            </a:r>
+            <a:endParaRPr lang="en-US" sz="1220" dirty="0"/>
+          </a:p>
+          <a:p>
+            <a:pPr indent="0" marL="0">
+              <a:buNone/>
+            </a:pPr>
+            <a:r>
+              <a:rPr lang="en-US" sz="1220" dirty="0">
                 <a:solidFill>
                   <a:srgbClr val="17364A"/>
                 </a:solidFill>
@@ -16416,13 +16709,16 @@
                 <a:ea typeface="Aptos" pitchFamily="34" charset="-122"/>
                 <a:cs typeface="Aptos" pitchFamily="34" charset="-120"/>
               </a:rPr>
-              <a:t>Requirements may vary by state, locality, territory, Tribe, agency, funding source,.</a:t>
-            </a:r>
-            <a:endParaRPr lang="en-US" sz="1380" dirty="0"/>
-          </a:p>
-          <a:p>
-            <a:r>
-              <a:rPr lang="en-US" sz="1380" dirty="0">
+              <a:t>Requirements may vary by state, locality, territory, Tribe,.</a:t>
+            </a:r>
+            <a:endParaRPr lang="en-US" sz="1220" dirty="0"/>
+          </a:p>
+          <a:p>
+            <a:pPr indent="0" marL="0">
+              <a:buNone/>
+            </a:pPr>
+            <a:r>
+              <a:rPr lang="en-US" sz="1220" dirty="0">
                 <a:solidFill>
                   <a:srgbClr val="17364A"/>
                 </a:solidFill>
@@ -16430,9 +16726,9 @@
                 <a:ea typeface="Aptos" pitchFamily="34" charset="-122"/>
                 <a:cs typeface="Aptos" pitchFamily="34" charset="-120"/>
               </a:rPr>
-              <a:t>Learners should use this module to identify the issues that require review and should.</a:t>
-            </a:r>
-            <a:endParaRPr lang="en-US" sz="1380" dirty="0"/>
+              <a:t>Learners should use this module to identify the issues that.</a:t>
+            </a:r>
+            <a:endParaRPr lang="en-US" sz="1220" dirty="0"/>
           </a:p>
         </p:txBody>
       </p:sp>
@@ -16510,17 +16806,17 @@
         </p:nvSpPr>
         <p:spPr>
           <a:xfrm>
-            <a:off x="7799832" y="5001768"/>
-            <a:ext cx="3145536" cy="502920"/>
-          </a:xfrm>
-          <a:prstGeom prst="rect">
-            <a:avLst/>
-          </a:prstGeom>
-          <a:noFill/>
-          <a:ln/>
-        </p:spPr>
-        <p:txBody>
-          <a:bodyPr wrap="square" lIns="0" tIns="0" rIns="0" bIns="0" rtlCol="0" anchor="t">
+            <a:off x="7799832" y="4974336"/>
+            <a:ext cx="3145536" cy="576072"/>
+          </a:xfrm>
+          <a:prstGeom prst="rect">
+            <a:avLst/>
+          </a:prstGeom>
+          <a:noFill/>
+          <a:ln/>
+        </p:spPr>
+        <p:txBody>
+          <a:bodyPr wrap="square" lIns="254" tIns="254" rIns="254" bIns="254" rtlCol="0" anchor="t">
             <a:normAutofit/>
           </a:bodyPr>
           <a:lstStyle/>
@@ -16529,7 +16825,7 @@
               <a:buNone/>
             </a:pPr>
             <a:r>
-              <a:rPr lang="en-US" sz="1550" dirty="0">
+              <a:rPr lang="en-US" sz="1320" dirty="0">
                 <a:solidFill>
                   <a:srgbClr val="17364A"/>
                 </a:solidFill>
@@ -16537,9 +16833,9 @@
                 <a:ea typeface="Aptos" pitchFamily="34" charset="-122"/>
                 <a:cs typeface="Aptos" pitchFamily="34" charset="-120"/>
               </a:rPr>
-              <a:t>Translate this concept into clear decision rights, review steps, documentation expectations, and escalation paths before an AI-supported workflow is approved.</a:t>
-            </a:r>
-            <a:endParaRPr lang="en-US" sz="1550" dirty="0"/>
+              <a:t>Translate this concept into clear decision rights, review steps, documentation expectations, and escalation paths before.</a:t>
+            </a:r>
+            <a:endParaRPr lang="en-US" sz="1320" dirty="0"/>
           </a:p>
         </p:txBody>
       </p:sp>
@@ -16840,49 +17136,58 @@
           <a:ln/>
         </p:spPr>
         <p:txBody>
-          <a:bodyPr wrap="square" lIns="635" tIns="635" rIns="635" bIns="635" rtlCol="0" anchor="t">
+          <a:bodyPr wrap="square" lIns="1016" tIns="1016" rIns="1016" bIns="1016" rtlCol="0" anchor="t">
             <a:normAutofit/>
           </a:bodyPr>
           <a:lstStyle/>
           <a:p>
+            <a:pPr indent="0" marL="0">
+              <a:buNone/>
+            </a:pPr>
             <a:r>
               <a:rPr lang="en-US" sz="2100" dirty="0">
                 <a:solidFill>
-                  <a:srgbClr val="17364A"/>
-                </a:solidFill>
-                <a:latin typeface="Aptos" pitchFamily="34" charset="0"/>
-                <a:ea typeface="Aptos" pitchFamily="34" charset="-122"/>
-                <a:cs typeface="Aptos" pitchFamily="34" charset="-120"/>
-              </a:rPr>
-              <a:t>An AI assistant is approved to summarize case records for authorized disease investigators.</a:t>
+                  <a:srgbClr val="003A63"/>
+                </a:solidFill>
+                <a:latin typeface="Aptos" pitchFamily="34" charset="0"/>
+                <a:ea typeface="Aptos" pitchFamily="34" charset="-122"/>
+                <a:cs typeface="Aptos" pitchFamily="34" charset="-120"/>
+              </a:rPr>
+              <a:t>• An AI assistant is approved to summarize case records for authorized disease investigators.</a:t>
             </a:r>
             <a:endParaRPr lang="en-US" sz="2100" dirty="0"/>
           </a:p>
           <a:p>
+            <a:pPr indent="0" marL="0">
+              <a:buNone/>
+            </a:pPr>
             <a:r>
               <a:rPr lang="en-US" sz="2100" dirty="0">
                 <a:solidFill>
-                  <a:srgbClr val="17364A"/>
-                </a:solidFill>
-                <a:latin typeface="Aptos" pitchFamily="34" charset="0"/>
-                <a:ea typeface="Aptos" pitchFamily="34" charset="-122"/>
-                <a:cs typeface="Aptos" pitchFamily="34" charset="-120"/>
-              </a:rPr>
-              <a:t>The access review determines that the assistant may retrieve only records assigned to the.</a:t>
+                  <a:srgbClr val="003A63"/>
+                </a:solidFill>
+                <a:latin typeface="Aptos" pitchFamily="34" charset="0"/>
+                <a:ea typeface="Aptos" pitchFamily="34" charset="-122"/>
+                <a:cs typeface="Aptos" pitchFamily="34" charset="-120"/>
+              </a:rPr>
+              <a:t>• The access review determines that the assistant may retrieve only records assigned to the.</a:t>
             </a:r>
             <a:endParaRPr lang="en-US" sz="2100" dirty="0"/>
           </a:p>
           <a:p>
+            <a:pPr indent="0" marL="0">
+              <a:buNone/>
+            </a:pPr>
             <a:r>
               <a:rPr lang="en-US" sz="2100" dirty="0">
                 <a:solidFill>
-                  <a:srgbClr val="17364A"/>
-                </a:solidFill>
-                <a:latin typeface="Aptos" pitchFamily="34" charset="0"/>
-                <a:ea typeface="Aptos" pitchFamily="34" charset="-122"/>
-                <a:cs typeface="Aptos" pitchFamily="34" charset="-120"/>
-              </a:rPr>
-              <a:t>Logs must show which user requested the summary, which record was accessed, and whether the output was.</a:t>
+                  <a:srgbClr val="003A63"/>
+                </a:solidFill>
+                <a:latin typeface="Aptos" pitchFamily="34" charset="0"/>
+                <a:ea typeface="Aptos" pitchFamily="34" charset="-122"/>
+                <a:cs typeface="Aptos" pitchFamily="34" charset="-120"/>
+              </a:rPr>
+              <a:t>• Logs must show which user requested the summary, which record was accessed, and whether the.</a:t>
             </a:r>
             <a:endParaRPr lang="en-US" sz="2100" dirty="0"/>
           </a:p>
@@ -16962,17 +17267,17 @@
         </p:nvSpPr>
         <p:spPr>
           <a:xfrm>
-            <a:off x="7799832" y="1828800"/>
-            <a:ext cx="3145536" cy="685800"/>
-          </a:xfrm>
-          <a:prstGeom prst="rect">
-            <a:avLst/>
-          </a:prstGeom>
-          <a:noFill/>
-          <a:ln/>
-        </p:spPr>
-        <p:txBody>
-          <a:bodyPr wrap="square" lIns="0" tIns="0" rIns="0" bIns="0" rtlCol="0" anchor="t">
+            <a:off x="7799832" y="1801368"/>
+            <a:ext cx="3145536" cy="758952"/>
+          </a:xfrm>
+          <a:prstGeom prst="rect">
+            <a:avLst/>
+          </a:prstGeom>
+          <a:noFill/>
+          <a:ln/>
+        </p:spPr>
+        <p:txBody>
+          <a:bodyPr wrap="square" lIns="254" tIns="254" rIns="254" bIns="254" rtlCol="0" anchor="t">
             <a:normAutofit/>
           </a:bodyPr>
           <a:lstStyle/>
@@ -16981,7 +17286,7 @@
               <a:buNone/>
             </a:pPr>
             <a:r>
-              <a:rPr lang="en-US" sz="1550" dirty="0">
+              <a:rPr lang="en-US" sz="1320" dirty="0">
                 <a:solidFill>
                   <a:srgbClr val="17364A"/>
                 </a:solidFill>
@@ -16991,7 +17296,7 @@
               </a:rPr>
               <a:t>An AI assistant is approved to summarize case records for authorized disease investigators.</a:t>
             </a:r>
-            <a:endParaRPr lang="en-US" sz="1550" dirty="0"/>
+            <a:endParaRPr lang="en-US" sz="1320" dirty="0"/>
           </a:p>
         </p:txBody>
       </p:sp>
@@ -17079,13 +17384,16 @@
           <a:ln/>
         </p:spPr>
         <p:txBody>
-          <a:bodyPr wrap="square" lIns="254" tIns="254" rIns="254" bIns="254" rtlCol="0" anchor="t">
+          <a:bodyPr wrap="square" lIns="508" tIns="508" rIns="508" bIns="508" rtlCol="0" anchor="t">
             <a:normAutofit/>
           </a:bodyPr>
           <a:lstStyle/>
           <a:p>
-            <a:r>
-              <a:rPr lang="en-US" sz="1380" dirty="0">
+            <a:pPr indent="0" marL="0">
+              <a:buNone/>
+            </a:pPr>
+            <a:r>
+              <a:rPr lang="en-US" sz="1220" dirty="0">
                 <a:solidFill>
                   <a:srgbClr val="17364A"/>
                 </a:solidFill>
@@ -17093,13 +17401,16 @@
                 <a:ea typeface="Aptos" pitchFamily="34" charset="-122"/>
                 <a:cs typeface="Aptos" pitchFamily="34" charset="-120"/>
               </a:rPr>
-              <a:t>The access review determines that the assistant may retrieve only records assigned to the.</a:t>
-            </a:r>
-            <a:endParaRPr lang="en-US" sz="1380" dirty="0"/>
-          </a:p>
-          <a:p>
-            <a:r>
-              <a:rPr lang="en-US" sz="1380" dirty="0">
+              <a:t>The access review determines that the assistant may retrieve only.</a:t>
+            </a:r>
+            <a:endParaRPr lang="en-US" sz="1220" dirty="0"/>
+          </a:p>
+          <a:p>
+            <a:pPr indent="0" marL="0">
+              <a:buNone/>
+            </a:pPr>
+            <a:r>
+              <a:rPr lang="en-US" sz="1220" dirty="0">
                 <a:solidFill>
                   <a:srgbClr val="17364A"/>
                 </a:solidFill>
@@ -17107,9 +17418,9 @@
                 <a:ea typeface="Aptos" pitchFamily="34" charset="-122"/>
                 <a:cs typeface="Aptos" pitchFamily="34" charset="-120"/>
               </a:rPr>
-              <a:t>Logs must show which user requested the summary, which record was accessed, and whether.</a:t>
-            </a:r>
-            <a:endParaRPr lang="en-US" sz="1380" dirty="0"/>
+              <a:t>Logs must show which user requested the summary, which record was.</a:t>
+            </a:r>
+            <a:endParaRPr lang="en-US" sz="1220" dirty="0"/>
           </a:p>
         </p:txBody>
       </p:sp>
@@ -17187,17 +17498,17 @@
         </p:nvSpPr>
         <p:spPr>
           <a:xfrm>
-            <a:off x="7799832" y="5001768"/>
-            <a:ext cx="3145536" cy="502920"/>
-          </a:xfrm>
-          <a:prstGeom prst="rect">
-            <a:avLst/>
-          </a:prstGeom>
-          <a:noFill/>
-          <a:ln/>
-        </p:spPr>
-        <p:txBody>
-          <a:bodyPr wrap="square" lIns="0" tIns="0" rIns="0" bIns="0" rtlCol="0" anchor="t">
+            <a:off x="7799832" y="4974336"/>
+            <a:ext cx="3145536" cy="576072"/>
+          </a:xfrm>
+          <a:prstGeom prst="rect">
+            <a:avLst/>
+          </a:prstGeom>
+          <a:noFill/>
+          <a:ln/>
+        </p:spPr>
+        <p:txBody>
+          <a:bodyPr wrap="square" lIns="254" tIns="254" rIns="254" bIns="254" rtlCol="0" anchor="t">
             <a:normAutofit/>
           </a:bodyPr>
           <a:lstStyle/>
@@ -17206,7 +17517,7 @@
               <a:buNone/>
             </a:pPr>
             <a:r>
-              <a:rPr lang="en-US" sz="1550" dirty="0">
+              <a:rPr lang="en-US" sz="1320" dirty="0">
                 <a:solidFill>
                   <a:srgbClr val="17364A"/>
                 </a:solidFill>
@@ -17214,9 +17525,9 @@
                 <a:ea typeface="Aptos" pitchFamily="34" charset="-122"/>
                 <a:cs typeface="Aptos" pitchFamily="34" charset="-120"/>
               </a:rPr>
-              <a:t>Use the concept to clarify workflow changes, dependencies, staffing, procurement requirements, training needs, and implementation checkpoints.</a:t>
-            </a:r>
-            <a:endParaRPr lang="en-US" sz="1550" dirty="0"/>
+              <a:t>Use the concept to clarify workflow changes, dependencies, staffing, procurement requirements, training needs, and.</a:t>
+            </a:r>
+            <a:endParaRPr lang="en-US" sz="1320" dirty="0"/>
           </a:p>
         </p:txBody>
       </p:sp>
@@ -17517,49 +17828,58 @@
           <a:ln/>
         </p:spPr>
         <p:txBody>
-          <a:bodyPr wrap="square" lIns="635" tIns="635" rIns="635" bIns="635" rtlCol="0" anchor="t">
+          <a:bodyPr wrap="square" lIns="1016" tIns="1016" rIns="1016" bIns="1016" rtlCol="0" anchor="t">
             <a:normAutofit/>
           </a:bodyPr>
           <a:lstStyle/>
           <a:p>
+            <a:pPr indent="0" marL="0">
+              <a:buNone/>
+            </a:pPr>
             <a:r>
               <a:rPr lang="en-US" sz="2100" dirty="0">
                 <a:solidFill>
-                  <a:srgbClr val="17364A"/>
-                </a:solidFill>
-                <a:latin typeface="Aptos" pitchFamily="34" charset="0"/>
-                <a:ea typeface="Aptos" pitchFamily="34" charset="-122"/>
-                <a:cs typeface="Aptos" pitchFamily="34" charset="-120"/>
-              </a:rPr>
-              <a:t>AI workflows may involve multiple identities.</a:t>
+                  <a:srgbClr val="003A63"/>
+                </a:solidFill>
+                <a:latin typeface="Aptos" pitchFamily="34" charset="0"/>
+                <a:ea typeface="Aptos" pitchFamily="34" charset="-122"/>
+                <a:cs typeface="Aptos" pitchFamily="34" charset="-120"/>
+              </a:rPr>
+              <a:t>• AI workflows may involve multiple identities.</a:t>
             </a:r>
             <a:endParaRPr lang="en-US" sz="2100" dirty="0"/>
           </a:p>
           <a:p>
+            <a:pPr indent="0" marL="0">
+              <a:buNone/>
+            </a:pPr>
             <a:r>
               <a:rPr lang="en-US" sz="2100" dirty="0">
                 <a:solidFill>
-                  <a:srgbClr val="17364A"/>
-                </a:solidFill>
-                <a:latin typeface="Aptos" pitchFamily="34" charset="0"/>
-                <a:ea typeface="Aptos" pitchFamily="34" charset="-122"/>
-                <a:cs typeface="Aptos" pitchFamily="34" charset="-120"/>
-              </a:rPr>
-              <a:t>A staff member may log in through single sign-on, an AI service may use a service account to retrieve.</a:t>
+                  <a:srgbClr val="003A63"/>
+                </a:solidFill>
+                <a:latin typeface="Aptos" pitchFamily="34" charset="0"/>
+                <a:ea typeface="Aptos" pitchFamily="34" charset="-122"/>
+                <a:cs typeface="Aptos" pitchFamily="34" charset="-120"/>
+              </a:rPr>
+              <a:t>• A staff member may log in through single sign-on, an AI service may use a service account to.</a:t>
             </a:r>
             <a:endParaRPr lang="en-US" sz="2100" dirty="0"/>
           </a:p>
           <a:p>
+            <a:pPr indent="0" marL="0">
+              <a:buNone/>
+            </a:pPr>
             <a:r>
               <a:rPr lang="en-US" sz="2100" dirty="0">
                 <a:solidFill>
-                  <a:srgbClr val="17364A"/>
-                </a:solidFill>
-                <a:latin typeface="Aptos" pitchFamily="34" charset="0"/>
-                <a:ea typeface="Aptos" pitchFamily="34" charset="-122"/>
-                <a:cs typeface="Aptos" pitchFamily="34" charset="-120"/>
-              </a:rPr>
-              <a:t>Each identity should be documented and tied to specific permissions.</a:t>
+                  <a:srgbClr val="003A63"/>
+                </a:solidFill>
+                <a:latin typeface="Aptos" pitchFamily="34" charset="0"/>
+                <a:ea typeface="Aptos" pitchFamily="34" charset="-122"/>
+                <a:cs typeface="Aptos" pitchFamily="34" charset="-120"/>
+              </a:rPr>
+              <a:t>• Each identity should be documented and tied to specific permissions.</a:t>
             </a:r>
             <a:endParaRPr lang="en-US" sz="2100" dirty="0"/>
           </a:p>
@@ -17639,17 +17959,17 @@
         </p:nvSpPr>
         <p:spPr>
           <a:xfrm>
-            <a:off x="7799832" y="1828800"/>
-            <a:ext cx="3145536" cy="685800"/>
-          </a:xfrm>
-          <a:prstGeom prst="rect">
-            <a:avLst/>
-          </a:prstGeom>
-          <a:noFill/>
-          <a:ln/>
-        </p:spPr>
-        <p:txBody>
-          <a:bodyPr wrap="square" lIns="0" tIns="0" rIns="0" bIns="0" rtlCol="0" anchor="t">
+            <a:off x="7799832" y="1801368"/>
+            <a:ext cx="3145536" cy="758952"/>
+          </a:xfrm>
+          <a:prstGeom prst="rect">
+            <a:avLst/>
+          </a:prstGeom>
+          <a:noFill/>
+          <a:ln/>
+        </p:spPr>
+        <p:txBody>
+          <a:bodyPr wrap="square" lIns="254" tIns="254" rIns="254" bIns="254" rtlCol="0" anchor="t">
             <a:normAutofit/>
           </a:bodyPr>
           <a:lstStyle/>
@@ -17658,7 +17978,7 @@
               <a:buNone/>
             </a:pPr>
             <a:r>
-              <a:rPr lang="en-US" sz="1550" dirty="0">
+              <a:rPr lang="en-US" sz="1320" dirty="0">
                 <a:solidFill>
                   <a:srgbClr val="17364A"/>
                 </a:solidFill>
@@ -17668,7 +17988,7 @@
               </a:rPr>
               <a:t>AI workflows may involve multiple identities.</a:t>
             </a:r>
-            <a:endParaRPr lang="en-US" sz="1550" dirty="0"/>
+            <a:endParaRPr lang="en-US" sz="1320" dirty="0"/>
           </a:p>
         </p:txBody>
       </p:sp>
@@ -17756,13 +18076,16 @@
           <a:ln/>
         </p:spPr>
         <p:txBody>
-          <a:bodyPr wrap="square" lIns="254" tIns="254" rIns="254" bIns="254" rtlCol="0" anchor="t">
+          <a:bodyPr wrap="square" lIns="508" tIns="508" rIns="508" bIns="508" rtlCol="0" anchor="t">
             <a:normAutofit/>
           </a:bodyPr>
           <a:lstStyle/>
           <a:p>
-            <a:r>
-              <a:rPr lang="en-US" sz="1380" dirty="0">
+            <a:pPr indent="0" marL="0">
+              <a:buNone/>
+            </a:pPr>
+            <a:r>
+              <a:rPr lang="en-US" sz="1220" dirty="0">
                 <a:solidFill>
                   <a:srgbClr val="17364A"/>
                 </a:solidFill>
@@ -17770,13 +18093,16 @@
                 <a:ea typeface="Aptos" pitchFamily="34" charset="-122"/>
                 <a:cs typeface="Aptos" pitchFamily="34" charset="-120"/>
               </a:rPr>
-              <a:t>A staff member may log in through single sign-on, an AI service may use a service account.</a:t>
-            </a:r>
-            <a:endParaRPr lang="en-US" sz="1380" dirty="0"/>
-          </a:p>
-          <a:p>
-            <a:r>
-              <a:rPr lang="en-US" sz="1380" dirty="0">
+              <a:t>A staff member may log in through single sign-on, an AI service.</a:t>
+            </a:r>
+            <a:endParaRPr lang="en-US" sz="1220" dirty="0"/>
+          </a:p>
+          <a:p>
+            <a:pPr indent="0" marL="0">
+              <a:buNone/>
+            </a:pPr>
+            <a:r>
+              <a:rPr lang="en-US" sz="1220" dirty="0">
                 <a:solidFill>
                   <a:srgbClr val="17364A"/>
                 </a:solidFill>
@@ -17784,13 +18110,16 @@
                 <a:ea typeface="Aptos" pitchFamily="34" charset="-122"/>
                 <a:cs typeface="Aptos" pitchFamily="34" charset="-120"/>
               </a:rPr>
-              <a:t>Agencies should avoid shared accounts or overly broad service accounts because they make.</a:t>
-            </a:r>
-            <a:endParaRPr lang="en-US" sz="1380" dirty="0"/>
-          </a:p>
-          <a:p>
-            <a:r>
-              <a:rPr lang="en-US" sz="1380" dirty="0">
+              <a:t>Agencies should avoid shared accounts or overly broad service.</a:t>
+            </a:r>
+            <a:endParaRPr lang="en-US" sz="1220" dirty="0"/>
+          </a:p>
+          <a:p>
+            <a:pPr indent="0" marL="0">
+              <a:buNone/>
+            </a:pPr>
+            <a:r>
+              <a:rPr lang="en-US" sz="1220" dirty="0">
                 <a:solidFill>
                   <a:srgbClr val="17364A"/>
                 </a:solidFill>
@@ -17798,9 +18127,9 @@
                 <a:ea typeface="Aptos" pitchFamily="34" charset="-122"/>
                 <a:cs typeface="Aptos" pitchFamily="34" charset="-120"/>
               </a:rPr>
-              <a:t>Authentication verifies who or what is using the system, but authorization defines what.</a:t>
-            </a:r>
-            <a:endParaRPr lang="en-US" sz="1380" dirty="0"/>
+              <a:t>Authentication verifies who or what is using the system, but.</a:t>
+            </a:r>
+            <a:endParaRPr lang="en-US" sz="1220" dirty="0"/>
           </a:p>
         </p:txBody>
       </p:sp>
@@ -17878,17 +18207,17 @@
         </p:nvSpPr>
         <p:spPr>
           <a:xfrm>
-            <a:off x="7799832" y="5001768"/>
-            <a:ext cx="3145536" cy="502920"/>
-          </a:xfrm>
-          <a:prstGeom prst="rect">
-            <a:avLst/>
-          </a:prstGeom>
-          <a:noFill/>
-          <a:ln/>
-        </p:spPr>
-        <p:txBody>
-          <a:bodyPr wrap="square" lIns="0" tIns="0" rIns="0" bIns="0" rtlCol="0" anchor="t">
+            <a:off x="7799832" y="4974336"/>
+            <a:ext cx="3145536" cy="576072"/>
+          </a:xfrm>
+          <a:prstGeom prst="rect">
+            <a:avLst/>
+          </a:prstGeom>
+          <a:noFill/>
+          <a:ln/>
+        </p:spPr>
+        <p:txBody>
+          <a:bodyPr wrap="square" lIns="254" tIns="254" rIns="254" bIns="254" rtlCol="0" anchor="t">
             <a:normAutofit/>
           </a:bodyPr>
           <a:lstStyle/>
@@ -17897,7 +18226,7 @@
               <a:buNone/>
             </a:pPr>
             <a:r>
-              <a:rPr lang="en-US" sz="1550" dirty="0">
+              <a:rPr lang="en-US" sz="1320" dirty="0">
                 <a:solidFill>
                   <a:srgbClr val="17364A"/>
                 </a:solidFill>
@@ -17905,9 +18234,9 @@
                 <a:ea typeface="Aptos" pitchFamily="34" charset="-122"/>
                 <a:cs typeface="Aptos" pitchFamily="34" charset="-120"/>
               </a:rPr>
-              <a:t>Use the concept to clarify workflow changes, dependencies, staffing, procurement requirements, training needs, and implementation checkpoints.</a:t>
-            </a:r>
-            <a:endParaRPr lang="en-US" sz="1550" dirty="0"/>
+              <a:t>Use the concept to clarify workflow changes, dependencies, staffing, procurement requirements, training needs, and.</a:t>
+            </a:r>
+            <a:endParaRPr lang="en-US" sz="1320" dirty="0"/>
           </a:p>
         </p:txBody>
       </p:sp>

--- a/downloads/presentations/modules/gov-350.pptx
+++ b/downloads/presentations/modules/gov-350.pptx
@@ -3513,11 +3513,11 @@
         <p:spPr>
           <a:xfrm>
             <a:off x="7635240" y="1325880"/>
-            <a:ext cx="3474720" cy="1325880"/>
+            <a:ext cx="3474720" cy="1207008"/>
           </a:xfrm>
           <a:prstGeom prst="roundRect">
             <a:avLst>
-              <a:gd name="adj" fmla="val 8276"/>
+              <a:gd name="adj" fmla="val 9091"/>
             </a:avLst>
           </a:prstGeom>
           <a:solidFill>
@@ -3579,7 +3579,7 @@
         <p:spPr>
           <a:xfrm>
             <a:off x="7799832" y="1801368"/>
-            <a:ext cx="3145536" cy="758952"/>
+            <a:ext cx="3145536" cy="640080"/>
           </a:xfrm>
           <a:prstGeom prst="rect">
             <a:avLst/>
@@ -3619,12 +3619,12 @@
         </p:nvSpPr>
         <p:spPr>
           <a:xfrm>
-            <a:off x="7635240" y="2788920"/>
-            <a:ext cx="3474720" cy="1536192"/>
+            <a:off x="7635240" y="2670048"/>
+            <a:ext cx="3474720" cy="1377086"/>
           </a:xfrm>
           <a:prstGeom prst="roundRect">
             <a:avLst>
-              <a:gd name="adj" fmla="val 7143"/>
+              <a:gd name="adj" fmla="val 7968"/>
             </a:avLst>
           </a:prstGeom>
           <a:solidFill>
@@ -3646,7 +3646,7 @@
         </p:nvSpPr>
         <p:spPr>
           <a:xfrm>
-            <a:off x="7799832" y="2935224"/>
+            <a:off x="7799832" y="2816352"/>
             <a:ext cx="3145536" cy="256032"/>
           </a:xfrm>
           <a:prstGeom prst="rect">
@@ -3685,8 +3685,8 @@
         </p:nvSpPr>
         <p:spPr>
           <a:xfrm>
-            <a:off x="7818120" y="3300984"/>
-            <a:ext cx="3090672" cy="877824"/>
+            <a:off x="7818120" y="3182112"/>
+            <a:ext cx="3090672" cy="718718"/>
           </a:xfrm>
           <a:prstGeom prst="rect">
             <a:avLst/>
@@ -3743,12 +3743,12 @@
         </p:nvSpPr>
         <p:spPr>
           <a:xfrm>
-            <a:off x="7635240" y="4498848"/>
-            <a:ext cx="3474720" cy="1143000"/>
+            <a:off x="7635240" y="4184294"/>
+            <a:ext cx="3474720" cy="1466698"/>
           </a:xfrm>
           <a:prstGeom prst="roundRect">
             <a:avLst>
-              <a:gd name="adj" fmla="val 9600"/>
+              <a:gd name="adj" fmla="val 7481"/>
             </a:avLst>
           </a:prstGeom>
           <a:solidFill>
@@ -3770,7 +3770,7 @@
         </p:nvSpPr>
         <p:spPr>
           <a:xfrm>
-            <a:off x="7799832" y="4645152"/>
+            <a:off x="7799832" y="4330598"/>
             <a:ext cx="3145536" cy="256032"/>
           </a:xfrm>
           <a:prstGeom prst="rect">
@@ -3809,8 +3809,8 @@
         </p:nvSpPr>
         <p:spPr>
           <a:xfrm>
-            <a:off x="7799832" y="4974336"/>
-            <a:ext cx="3145536" cy="576072"/>
+            <a:off x="7799832" y="4659782"/>
+            <a:ext cx="3145536" cy="899770"/>
           </a:xfrm>
           <a:prstGeom prst="rect">
             <a:avLst/>
@@ -3836,7 +3836,7 @@
                 <a:ea typeface="Aptos" pitchFamily="34" charset="-122"/>
                 <a:cs typeface="Aptos" pitchFamily="34" charset="-120"/>
               </a:rPr>
-              <a:t>Use the concept to clarify workflow changes, dependencies, staffing, procurement requirements, training needs, and.</a:t>
+              <a:t>Use the concept to clarify workflow changes, dependencies, staffing, procurement requirements, training needs, and implementation checkpoints.</a:t>
             </a:r>
             <a:endParaRPr lang="en-US" sz="1320" dirty="0"/>
           </a:p>
@@ -4205,11 +4205,11 @@
         <p:spPr>
           <a:xfrm>
             <a:off x="7635240" y="1325880"/>
-            <a:ext cx="3474720" cy="1325880"/>
+            <a:ext cx="3474720" cy="1207008"/>
           </a:xfrm>
           <a:prstGeom prst="roundRect">
             <a:avLst>
-              <a:gd name="adj" fmla="val 8276"/>
+              <a:gd name="adj" fmla="val 9091"/>
             </a:avLst>
           </a:prstGeom>
           <a:solidFill>
@@ -4271,7 +4271,7 @@
         <p:spPr>
           <a:xfrm>
             <a:off x="7799832" y="1801368"/>
-            <a:ext cx="3145536" cy="758952"/>
+            <a:ext cx="3145536" cy="640080"/>
           </a:xfrm>
           <a:prstGeom prst="rect">
             <a:avLst/>
@@ -4311,7 +4311,7 @@
         </p:nvSpPr>
         <p:spPr>
           <a:xfrm>
-            <a:off x="7635240" y="2788920"/>
+            <a:off x="7635240" y="2670048"/>
             <a:ext cx="3474720" cy="1536192"/>
           </a:xfrm>
           <a:prstGeom prst="roundRect">
@@ -4338,7 +4338,7 @@
         </p:nvSpPr>
         <p:spPr>
           <a:xfrm>
-            <a:off x="7799832" y="2935224"/>
+            <a:off x="7799832" y="2816352"/>
             <a:ext cx="3145536" cy="256032"/>
           </a:xfrm>
           <a:prstGeom prst="rect">
@@ -4377,7 +4377,7 @@
         </p:nvSpPr>
         <p:spPr>
           <a:xfrm>
-            <a:off x="7818120" y="3300984"/>
+            <a:off x="7818120" y="3182112"/>
             <a:ext cx="3090672" cy="877824"/>
           </a:xfrm>
           <a:prstGeom prst="rect">
@@ -4452,12 +4452,12 @@
         </p:nvSpPr>
         <p:spPr>
           <a:xfrm>
-            <a:off x="7635240" y="4498848"/>
-            <a:ext cx="3474720" cy="1143000"/>
+            <a:off x="7635240" y="4343400"/>
+            <a:ext cx="3474720" cy="1255471"/>
           </a:xfrm>
           <a:prstGeom prst="roundRect">
             <a:avLst>
-              <a:gd name="adj" fmla="val 9600"/>
+              <a:gd name="adj" fmla="val 8740"/>
             </a:avLst>
           </a:prstGeom>
           <a:solidFill>
@@ -4479,7 +4479,7 @@
         </p:nvSpPr>
         <p:spPr>
           <a:xfrm>
-            <a:off x="7799832" y="4645152"/>
+            <a:off x="7799832" y="4489704"/>
             <a:ext cx="3145536" cy="256032"/>
           </a:xfrm>
           <a:prstGeom prst="rect">
@@ -4518,8 +4518,8 @@
         </p:nvSpPr>
         <p:spPr>
           <a:xfrm>
-            <a:off x="7799832" y="4974336"/>
-            <a:ext cx="3145536" cy="576072"/>
+            <a:off x="7799832" y="4818888"/>
+            <a:ext cx="3145536" cy="688543"/>
           </a:xfrm>
           <a:prstGeom prst="rect">
             <a:avLst/>
@@ -4545,7 +4545,7 @@
                 <a:ea typeface="Aptos" pitchFamily="34" charset="-122"/>
                 <a:cs typeface="Aptos" pitchFamily="34" charset="-120"/>
               </a:rPr>
-              <a:t>Identify what could go wrong, who could be affected, what safeguards are needed, and what evidence should be reviewed.</a:t>
+              <a:t>Identify what could go wrong, who could be affected, what safeguards are needed, and what evidence should be reviewed before use.</a:t>
             </a:r>
             <a:endParaRPr lang="en-US" sz="1320" dirty="0"/>
           </a:p>
@@ -4914,11 +4914,11 @@
         <p:spPr>
           <a:xfrm>
             <a:off x="7635240" y="1325880"/>
-            <a:ext cx="3474720" cy="1325880"/>
+            <a:ext cx="3474720" cy="1207008"/>
           </a:xfrm>
           <a:prstGeom prst="roundRect">
             <a:avLst>
-              <a:gd name="adj" fmla="val 8276"/>
+              <a:gd name="adj" fmla="val 9091"/>
             </a:avLst>
           </a:prstGeom>
           <a:solidFill>
@@ -4980,7 +4980,7 @@
         <p:spPr>
           <a:xfrm>
             <a:off x="7799832" y="1801368"/>
-            <a:ext cx="3145536" cy="758952"/>
+            <a:ext cx="3145536" cy="640080"/>
           </a:xfrm>
           <a:prstGeom prst="rect">
             <a:avLst/>
@@ -5020,7 +5020,7 @@
         </p:nvSpPr>
         <p:spPr>
           <a:xfrm>
-            <a:off x="7635240" y="2788920"/>
+            <a:off x="7635240" y="2670048"/>
             <a:ext cx="3474720" cy="1536192"/>
           </a:xfrm>
           <a:prstGeom prst="roundRect">
@@ -5047,7 +5047,7 @@
         </p:nvSpPr>
         <p:spPr>
           <a:xfrm>
-            <a:off x="7799832" y="2935224"/>
+            <a:off x="7799832" y="2816352"/>
             <a:ext cx="3145536" cy="256032"/>
           </a:xfrm>
           <a:prstGeom prst="rect">
@@ -5086,7 +5086,7 @@
         </p:nvSpPr>
         <p:spPr>
           <a:xfrm>
-            <a:off x="7818120" y="3300984"/>
+            <a:off x="7818120" y="3182112"/>
             <a:ext cx="3090672" cy="877824"/>
           </a:xfrm>
           <a:prstGeom prst="rect">
@@ -5161,12 +5161,12 @@
         </p:nvSpPr>
         <p:spPr>
           <a:xfrm>
-            <a:off x="7635240" y="4498848"/>
-            <a:ext cx="3474720" cy="1143000"/>
+            <a:off x="7635240" y="4343400"/>
+            <a:ext cx="3474720" cy="1255471"/>
           </a:xfrm>
           <a:prstGeom prst="roundRect">
             <a:avLst>
-              <a:gd name="adj" fmla="val 9600"/>
+              <a:gd name="adj" fmla="val 8740"/>
             </a:avLst>
           </a:prstGeom>
           <a:solidFill>
@@ -5188,7 +5188,7 @@
         </p:nvSpPr>
         <p:spPr>
           <a:xfrm>
-            <a:off x="7799832" y="4645152"/>
+            <a:off x="7799832" y="4489704"/>
             <a:ext cx="3145536" cy="256032"/>
           </a:xfrm>
           <a:prstGeom prst="rect">
@@ -5227,8 +5227,8 @@
         </p:nvSpPr>
         <p:spPr>
           <a:xfrm>
-            <a:off x="7799832" y="4974336"/>
-            <a:ext cx="3145536" cy="576072"/>
+            <a:off x="7799832" y="4818888"/>
+            <a:ext cx="3145536" cy="688543"/>
           </a:xfrm>
           <a:prstGeom prst="rect">
             <a:avLst/>
@@ -5254,7 +5254,7 @@
                 <a:ea typeface="Aptos" pitchFamily="34" charset="-122"/>
                 <a:cs typeface="Aptos" pitchFamily="34" charset="-120"/>
               </a:rPr>
-              <a:t>Identify what could go wrong, who could be affected, what safeguards are needed, and what evidence should be reviewed.</a:t>
+              <a:t>Identify what could go wrong, who could be affected, what safeguards are needed, and what evidence should be reviewed before use.</a:t>
             </a:r>
             <a:endParaRPr lang="en-US" sz="1320" dirty="0"/>
           </a:p>
@@ -5623,11 +5623,11 @@
         <p:spPr>
           <a:xfrm>
             <a:off x="7635240" y="1325880"/>
-            <a:ext cx="3474720" cy="1325880"/>
+            <a:ext cx="3474720" cy="1207008"/>
           </a:xfrm>
           <a:prstGeom prst="roundRect">
             <a:avLst>
-              <a:gd name="adj" fmla="val 8276"/>
+              <a:gd name="adj" fmla="val 9091"/>
             </a:avLst>
           </a:prstGeom>
           <a:solidFill>
@@ -5689,7 +5689,7 @@
         <p:spPr>
           <a:xfrm>
             <a:off x="7799832" y="1801368"/>
-            <a:ext cx="3145536" cy="758952"/>
+            <a:ext cx="3145536" cy="640080"/>
           </a:xfrm>
           <a:prstGeom prst="rect">
             <a:avLst/>
@@ -5729,7 +5729,7 @@
         </p:nvSpPr>
         <p:spPr>
           <a:xfrm>
-            <a:off x="7635240" y="2788920"/>
+            <a:off x="7635240" y="2670048"/>
             <a:ext cx="3474720" cy="1536192"/>
           </a:xfrm>
           <a:prstGeom prst="roundRect">
@@ -5756,7 +5756,7 @@
         </p:nvSpPr>
         <p:spPr>
           <a:xfrm>
-            <a:off x="7799832" y="2935224"/>
+            <a:off x="7799832" y="2816352"/>
             <a:ext cx="3145536" cy="256032"/>
           </a:xfrm>
           <a:prstGeom prst="rect">
@@ -5795,7 +5795,7 @@
         </p:nvSpPr>
         <p:spPr>
           <a:xfrm>
-            <a:off x="7818120" y="3300984"/>
+            <a:off x="7818120" y="3182112"/>
             <a:ext cx="3090672" cy="877824"/>
           </a:xfrm>
           <a:prstGeom prst="rect">
@@ -5870,12 +5870,12 @@
         </p:nvSpPr>
         <p:spPr>
           <a:xfrm>
-            <a:off x="7635240" y="4498848"/>
-            <a:ext cx="3474720" cy="1143000"/>
+            <a:off x="7635240" y="4343400"/>
+            <a:ext cx="3474720" cy="1255471"/>
           </a:xfrm>
           <a:prstGeom prst="roundRect">
             <a:avLst>
-              <a:gd name="adj" fmla="val 9600"/>
+              <a:gd name="adj" fmla="val 8740"/>
             </a:avLst>
           </a:prstGeom>
           <a:solidFill>
@@ -5897,7 +5897,7 @@
         </p:nvSpPr>
         <p:spPr>
           <a:xfrm>
-            <a:off x="7799832" y="4645152"/>
+            <a:off x="7799832" y="4489704"/>
             <a:ext cx="3145536" cy="256032"/>
           </a:xfrm>
           <a:prstGeom prst="rect">
@@ -5936,8 +5936,8 @@
         </p:nvSpPr>
         <p:spPr>
           <a:xfrm>
-            <a:off x="7799832" y="4974336"/>
-            <a:ext cx="3145536" cy="576072"/>
+            <a:off x="7799832" y="4818888"/>
+            <a:ext cx="3145536" cy="688543"/>
           </a:xfrm>
           <a:prstGeom prst="rect">
             <a:avLst/>
@@ -5963,7 +5963,7 @@
                 <a:ea typeface="Aptos" pitchFamily="34" charset="-122"/>
                 <a:cs typeface="Aptos" pitchFamily="34" charset="-120"/>
               </a:rPr>
-              <a:t>Identify what could go wrong, who could be affected, what safeguards are needed, and what evidence should be reviewed.</a:t>
+              <a:t>Identify what could go wrong, who could be affected, what safeguards are needed, and what evidence should be reviewed before use.</a:t>
             </a:r>
             <a:endParaRPr lang="en-US" sz="1320" dirty="0"/>
           </a:p>
@@ -6332,11 +6332,11 @@
         <p:spPr>
           <a:xfrm>
             <a:off x="7635240" y="1325880"/>
-            <a:ext cx="3474720" cy="1325880"/>
+            <a:ext cx="3474720" cy="1207008"/>
           </a:xfrm>
           <a:prstGeom prst="roundRect">
             <a:avLst>
-              <a:gd name="adj" fmla="val 8276"/>
+              <a:gd name="adj" fmla="val 9091"/>
             </a:avLst>
           </a:prstGeom>
           <a:solidFill>
@@ -6398,7 +6398,7 @@
         <p:spPr>
           <a:xfrm>
             <a:off x="7799832" y="1801368"/>
-            <a:ext cx="3145536" cy="758952"/>
+            <a:ext cx="3145536" cy="640080"/>
           </a:xfrm>
           <a:prstGeom prst="rect">
             <a:avLst/>
@@ -6438,7 +6438,7 @@
         </p:nvSpPr>
         <p:spPr>
           <a:xfrm>
-            <a:off x="7635240" y="2788920"/>
+            <a:off x="7635240" y="2670048"/>
             <a:ext cx="3474720" cy="1536192"/>
           </a:xfrm>
           <a:prstGeom prst="roundRect">
@@ -6465,7 +6465,7 @@
         </p:nvSpPr>
         <p:spPr>
           <a:xfrm>
-            <a:off x="7799832" y="2935224"/>
+            <a:off x="7799832" y="2816352"/>
             <a:ext cx="3145536" cy="256032"/>
           </a:xfrm>
           <a:prstGeom prst="rect">
@@ -6504,7 +6504,7 @@
         </p:nvSpPr>
         <p:spPr>
           <a:xfrm>
-            <a:off x="7818120" y="3300984"/>
+            <a:off x="7818120" y="3182112"/>
             <a:ext cx="3090672" cy="877824"/>
           </a:xfrm>
           <a:prstGeom prst="rect">
@@ -6579,12 +6579,12 @@
         </p:nvSpPr>
         <p:spPr>
           <a:xfrm>
-            <a:off x="7635240" y="4498848"/>
-            <a:ext cx="3474720" cy="1143000"/>
+            <a:off x="7635240" y="4343400"/>
+            <a:ext cx="3474720" cy="1255471"/>
           </a:xfrm>
           <a:prstGeom prst="roundRect">
             <a:avLst>
-              <a:gd name="adj" fmla="val 9600"/>
+              <a:gd name="adj" fmla="val 8740"/>
             </a:avLst>
           </a:prstGeom>
           <a:solidFill>
@@ -6606,7 +6606,7 @@
         </p:nvSpPr>
         <p:spPr>
           <a:xfrm>
-            <a:off x="7799832" y="4645152"/>
+            <a:off x="7799832" y="4489704"/>
             <a:ext cx="3145536" cy="256032"/>
           </a:xfrm>
           <a:prstGeom prst="rect">
@@ -6645,8 +6645,8 @@
         </p:nvSpPr>
         <p:spPr>
           <a:xfrm>
-            <a:off x="7799832" y="4974336"/>
-            <a:ext cx="3145536" cy="576072"/>
+            <a:off x="7799832" y="4818888"/>
+            <a:ext cx="3145536" cy="688543"/>
           </a:xfrm>
           <a:prstGeom prst="rect">
             <a:avLst/>
@@ -6672,7 +6672,7 @@
                 <a:ea typeface="Aptos" pitchFamily="34" charset="-122"/>
                 <a:cs typeface="Aptos" pitchFamily="34" charset="-120"/>
               </a:rPr>
-              <a:t>Identify what could go wrong, who could be affected, what safeguards are needed, and what evidence should be reviewed.</a:t>
+              <a:t>Identify what could go wrong, who could be affected, what safeguards are needed, and what evidence should be reviewed before use.</a:t>
             </a:r>
             <a:endParaRPr lang="en-US" sz="1320" dirty="0"/>
           </a:p>
@@ -7041,11 +7041,11 @@
         <p:spPr>
           <a:xfrm>
             <a:off x="7635240" y="1325880"/>
-            <a:ext cx="3474720" cy="1325880"/>
+            <a:ext cx="3474720" cy="1207008"/>
           </a:xfrm>
           <a:prstGeom prst="roundRect">
             <a:avLst>
-              <a:gd name="adj" fmla="val 8276"/>
+              <a:gd name="adj" fmla="val 9091"/>
             </a:avLst>
           </a:prstGeom>
           <a:solidFill>
@@ -7107,7 +7107,7 @@
         <p:spPr>
           <a:xfrm>
             <a:off x="7799832" y="1801368"/>
-            <a:ext cx="3145536" cy="758952"/>
+            <a:ext cx="3145536" cy="640080"/>
           </a:xfrm>
           <a:prstGeom prst="rect">
             <a:avLst/>
@@ -7147,12 +7147,12 @@
         </p:nvSpPr>
         <p:spPr>
           <a:xfrm>
-            <a:off x="7635240" y="2788920"/>
-            <a:ext cx="3474720" cy="1536192"/>
+            <a:off x="7635240" y="2670048"/>
+            <a:ext cx="3474720" cy="1377086"/>
           </a:xfrm>
           <a:prstGeom prst="roundRect">
             <a:avLst>
-              <a:gd name="adj" fmla="val 7143"/>
+              <a:gd name="adj" fmla="val 7968"/>
             </a:avLst>
           </a:prstGeom>
           <a:solidFill>
@@ -7174,7 +7174,7 @@
         </p:nvSpPr>
         <p:spPr>
           <a:xfrm>
-            <a:off x="7799832" y="2935224"/>
+            <a:off x="7799832" y="2816352"/>
             <a:ext cx="3145536" cy="256032"/>
           </a:xfrm>
           <a:prstGeom prst="rect">
@@ -7213,8 +7213,8 @@
         </p:nvSpPr>
         <p:spPr>
           <a:xfrm>
-            <a:off x="7818120" y="3300984"/>
-            <a:ext cx="3090672" cy="877824"/>
+            <a:off x="7818120" y="3182112"/>
+            <a:ext cx="3090672" cy="718718"/>
           </a:xfrm>
           <a:prstGeom prst="rect">
             <a:avLst/>
@@ -7288,12 +7288,12 @@
         </p:nvSpPr>
         <p:spPr>
           <a:xfrm>
-            <a:off x="7635240" y="4498848"/>
-            <a:ext cx="3474720" cy="1143000"/>
+            <a:off x="7635240" y="4184294"/>
+            <a:ext cx="3474720" cy="1466698"/>
           </a:xfrm>
           <a:prstGeom prst="roundRect">
             <a:avLst>
-              <a:gd name="adj" fmla="val 9600"/>
+              <a:gd name="adj" fmla="val 7481"/>
             </a:avLst>
           </a:prstGeom>
           <a:solidFill>
@@ -7315,7 +7315,7 @@
         </p:nvSpPr>
         <p:spPr>
           <a:xfrm>
-            <a:off x="7799832" y="4645152"/>
+            <a:off x="7799832" y="4330598"/>
             <a:ext cx="3145536" cy="256032"/>
           </a:xfrm>
           <a:prstGeom prst="rect">
@@ -7354,8 +7354,8 @@
         </p:nvSpPr>
         <p:spPr>
           <a:xfrm>
-            <a:off x="7799832" y="4974336"/>
-            <a:ext cx="3145536" cy="576072"/>
+            <a:off x="7799832" y="4659782"/>
+            <a:ext cx="3145536" cy="899770"/>
           </a:xfrm>
           <a:prstGeom prst="rect">
             <a:avLst/>
@@ -7381,7 +7381,7 @@
                 <a:ea typeface="Aptos" pitchFamily="34" charset="-122"/>
                 <a:cs typeface="Aptos" pitchFamily="34" charset="-120"/>
               </a:rPr>
-              <a:t>Use the concept to clarify workflow changes, dependencies, staffing, procurement requirements, training needs, and.</a:t>
+              <a:t>Use the concept to clarify workflow changes, dependencies, staffing, procurement requirements, training needs, and implementation checkpoints.</a:t>
             </a:r>
             <a:endParaRPr lang="en-US" sz="1320" dirty="0"/>
           </a:p>
@@ -7733,11 +7733,11 @@
         <p:spPr>
           <a:xfrm>
             <a:off x="7635240" y="1325880"/>
-            <a:ext cx="3474720" cy="1325880"/>
+            <a:ext cx="3474720" cy="1207008"/>
           </a:xfrm>
           <a:prstGeom prst="roundRect">
             <a:avLst>
-              <a:gd name="adj" fmla="val 8276"/>
+              <a:gd name="adj" fmla="val 9091"/>
             </a:avLst>
           </a:prstGeom>
           <a:solidFill>
@@ -7799,7 +7799,7 @@
         <p:spPr>
           <a:xfrm>
             <a:off x="7799832" y="1801368"/>
-            <a:ext cx="3145536" cy="758952"/>
+            <a:ext cx="3145536" cy="640080"/>
           </a:xfrm>
           <a:prstGeom prst="rect">
             <a:avLst/>
@@ -7825,7 +7825,7 @@
                 <a:ea typeface="Aptos" pitchFamily="34" charset="-122"/>
                 <a:cs typeface="Aptos" pitchFamily="34" charset="-120"/>
               </a:rPr>
-              <a:t>What evidence would governance, leadership, or operations staff need before moving forward?</a:t>
+              <a:t>What evidence would governance, leadership, or operations staff need before moving.</a:t>
             </a:r>
             <a:endParaRPr lang="en-US" sz="1320" dirty="0"/>
           </a:p>
@@ -7839,12 +7839,12 @@
         </p:nvSpPr>
         <p:spPr>
           <a:xfrm>
-            <a:off x="7635240" y="2788920"/>
-            <a:ext cx="3474720" cy="1536192"/>
+            <a:off x="7635240" y="2670048"/>
+            <a:ext cx="3474720" cy="1377086"/>
           </a:xfrm>
           <a:prstGeom prst="roundRect">
             <a:avLst>
-              <a:gd name="adj" fmla="val 7143"/>
+              <a:gd name="adj" fmla="val 7968"/>
             </a:avLst>
           </a:prstGeom>
           <a:solidFill>
@@ -7866,7 +7866,7 @@
         </p:nvSpPr>
         <p:spPr>
           <a:xfrm>
-            <a:off x="7799832" y="2935224"/>
+            <a:off x="7799832" y="2816352"/>
             <a:ext cx="3145536" cy="256032"/>
           </a:xfrm>
           <a:prstGeom prst="rect">
@@ -7905,8 +7905,8 @@
         </p:nvSpPr>
         <p:spPr>
           <a:xfrm>
-            <a:off x="7818120" y="3300984"/>
-            <a:ext cx="3090672" cy="877824"/>
+            <a:off x="7818120" y="3182112"/>
+            <a:ext cx="3090672" cy="718718"/>
           </a:xfrm>
           <a:prstGeom prst="rect">
             <a:avLst/>
@@ -7963,12 +7963,12 @@
         </p:nvSpPr>
         <p:spPr>
           <a:xfrm>
-            <a:off x="7635240" y="4498848"/>
-            <a:ext cx="3474720" cy="1143000"/>
+            <a:off x="7635240" y="4184294"/>
+            <a:ext cx="3474720" cy="1466698"/>
           </a:xfrm>
           <a:prstGeom prst="roundRect">
             <a:avLst>
-              <a:gd name="adj" fmla="val 9600"/>
+              <a:gd name="adj" fmla="val 7481"/>
             </a:avLst>
           </a:prstGeom>
           <a:solidFill>
@@ -7990,7 +7990,7 @@
         </p:nvSpPr>
         <p:spPr>
           <a:xfrm>
-            <a:off x="7799832" y="4645152"/>
+            <a:off x="7799832" y="4330598"/>
             <a:ext cx="3145536" cy="256032"/>
           </a:xfrm>
           <a:prstGeom prst="rect">
@@ -8029,8 +8029,8 @@
         </p:nvSpPr>
         <p:spPr>
           <a:xfrm>
-            <a:off x="7799832" y="4974336"/>
-            <a:ext cx="3145536" cy="576072"/>
+            <a:off x="7799832" y="4659782"/>
+            <a:ext cx="3145536" cy="899770"/>
           </a:xfrm>
           <a:prstGeom prst="rect">
             <a:avLst/>
@@ -8056,7 +8056,7 @@
                 <a:ea typeface="Aptos" pitchFamily="34" charset="-122"/>
                 <a:cs typeface="Aptos" pitchFamily="34" charset="-120"/>
               </a:rPr>
-              <a:t>Use the concept to clarify workflow changes, dependencies, staffing, procurement requirements, training needs, and.</a:t>
+              <a:t>Use the concept to clarify workflow changes, dependencies, staffing, procurement requirements, training needs, and implementation checkpoints.</a:t>
             </a:r>
             <a:endParaRPr lang="en-US" sz="1320" dirty="0"/>
           </a:p>
@@ -8408,11 +8408,11 @@
         <p:spPr>
           <a:xfrm>
             <a:off x="7635240" y="1325880"/>
-            <a:ext cx="3474720" cy="1325880"/>
+            <a:ext cx="3474720" cy="1207008"/>
           </a:xfrm>
           <a:prstGeom prst="roundRect">
             <a:avLst>
-              <a:gd name="adj" fmla="val 8276"/>
+              <a:gd name="adj" fmla="val 9091"/>
             </a:avLst>
           </a:prstGeom>
           <a:solidFill>
@@ -8474,7 +8474,7 @@
         <p:spPr>
           <a:xfrm>
             <a:off x="7799832" y="1801368"/>
-            <a:ext cx="3145536" cy="758952"/>
+            <a:ext cx="3145536" cy="640080"/>
           </a:xfrm>
           <a:prstGeom prst="rect">
             <a:avLst/>
@@ -8514,12 +8514,12 @@
         </p:nvSpPr>
         <p:spPr>
           <a:xfrm>
-            <a:off x="7635240" y="2788920"/>
-            <a:ext cx="3474720" cy="1536192"/>
+            <a:off x="7635240" y="2670048"/>
+            <a:ext cx="3474720" cy="1377086"/>
           </a:xfrm>
           <a:prstGeom prst="roundRect">
             <a:avLst>
-              <a:gd name="adj" fmla="val 7143"/>
+              <a:gd name="adj" fmla="val 7968"/>
             </a:avLst>
           </a:prstGeom>
           <a:solidFill>
@@ -8541,7 +8541,7 @@
         </p:nvSpPr>
         <p:spPr>
           <a:xfrm>
-            <a:off x="7799832" y="2935224"/>
+            <a:off x="7799832" y="2816352"/>
             <a:ext cx="3145536" cy="256032"/>
           </a:xfrm>
           <a:prstGeom prst="rect">
@@ -8580,8 +8580,8 @@
         </p:nvSpPr>
         <p:spPr>
           <a:xfrm>
-            <a:off x="7818120" y="3300984"/>
-            <a:ext cx="3090672" cy="877824"/>
+            <a:off x="7818120" y="3182112"/>
+            <a:ext cx="3090672" cy="718718"/>
           </a:xfrm>
           <a:prstGeom prst="rect">
             <a:avLst/>
@@ -8638,12 +8638,12 @@
         </p:nvSpPr>
         <p:spPr>
           <a:xfrm>
-            <a:off x="7635240" y="4498848"/>
-            <a:ext cx="3474720" cy="1143000"/>
+            <a:off x="7635240" y="4184294"/>
+            <a:ext cx="3474720" cy="1466698"/>
           </a:xfrm>
           <a:prstGeom prst="roundRect">
             <a:avLst>
-              <a:gd name="adj" fmla="val 9600"/>
+              <a:gd name="adj" fmla="val 7481"/>
             </a:avLst>
           </a:prstGeom>
           <a:solidFill>
@@ -8665,7 +8665,7 @@
         </p:nvSpPr>
         <p:spPr>
           <a:xfrm>
-            <a:off x="7799832" y="4645152"/>
+            <a:off x="7799832" y="4330598"/>
             <a:ext cx="3145536" cy="256032"/>
           </a:xfrm>
           <a:prstGeom prst="rect">
@@ -8704,8 +8704,8 @@
         </p:nvSpPr>
         <p:spPr>
           <a:xfrm>
-            <a:off x="7799832" y="4974336"/>
-            <a:ext cx="3145536" cy="576072"/>
+            <a:off x="7799832" y="4659782"/>
+            <a:ext cx="3145536" cy="899770"/>
           </a:xfrm>
           <a:prstGeom prst="rect">
             <a:avLst/>
@@ -8731,7 +8731,7 @@
                 <a:ea typeface="Aptos" pitchFamily="34" charset="-122"/>
                 <a:cs typeface="Aptos" pitchFamily="34" charset="-120"/>
               </a:rPr>
-              <a:t>Use the assignment to test whether you can explain the concept, apply it to a realistic public health situation, and.</a:t>
+              <a:t>Use the assignment to test whether you can explain the concept, apply it to a realistic public health situation, and identify what would need review before the work moves forward.</a:t>
             </a:r>
             <a:endParaRPr lang="en-US" sz="1320" dirty="0"/>
           </a:p>
@@ -9100,11 +9100,11 @@
         <p:spPr>
           <a:xfrm>
             <a:off x="7635240" y="1325880"/>
-            <a:ext cx="3474720" cy="1325880"/>
+            <a:ext cx="3474720" cy="1207008"/>
           </a:xfrm>
           <a:prstGeom prst="roundRect">
             <a:avLst>
-              <a:gd name="adj" fmla="val 8276"/>
+              <a:gd name="adj" fmla="val 9091"/>
             </a:avLst>
           </a:prstGeom>
           <a:solidFill>
@@ -9166,7 +9166,7 @@
         <p:spPr>
           <a:xfrm>
             <a:off x="7799832" y="1801368"/>
-            <a:ext cx="3145536" cy="758952"/>
+            <a:ext cx="3145536" cy="640080"/>
           </a:xfrm>
           <a:prstGeom prst="rect">
             <a:avLst/>
@@ -9206,12 +9206,12 @@
         </p:nvSpPr>
         <p:spPr>
           <a:xfrm>
-            <a:off x="7635240" y="2788920"/>
-            <a:ext cx="3474720" cy="1536192"/>
+            <a:off x="7635240" y="2670048"/>
+            <a:ext cx="3474720" cy="1377086"/>
           </a:xfrm>
           <a:prstGeom prst="roundRect">
             <a:avLst>
-              <a:gd name="adj" fmla="val 7143"/>
+              <a:gd name="adj" fmla="val 7968"/>
             </a:avLst>
           </a:prstGeom>
           <a:solidFill>
@@ -9233,7 +9233,7 @@
         </p:nvSpPr>
         <p:spPr>
           <a:xfrm>
-            <a:off x="7799832" y="2935224"/>
+            <a:off x="7799832" y="2816352"/>
             <a:ext cx="3145536" cy="256032"/>
           </a:xfrm>
           <a:prstGeom prst="rect">
@@ -9272,8 +9272,8 @@
         </p:nvSpPr>
         <p:spPr>
           <a:xfrm>
-            <a:off x="7818120" y="3300984"/>
-            <a:ext cx="3090672" cy="877824"/>
+            <a:off x="7818120" y="3182112"/>
+            <a:ext cx="3090672" cy="718718"/>
           </a:xfrm>
           <a:prstGeom prst="rect">
             <a:avLst/>
@@ -9347,12 +9347,12 @@
         </p:nvSpPr>
         <p:spPr>
           <a:xfrm>
-            <a:off x="7635240" y="4498848"/>
-            <a:ext cx="3474720" cy="1143000"/>
+            <a:off x="7635240" y="4184294"/>
+            <a:ext cx="3474720" cy="1466698"/>
           </a:xfrm>
           <a:prstGeom prst="roundRect">
             <a:avLst>
-              <a:gd name="adj" fmla="val 9600"/>
+              <a:gd name="adj" fmla="val 7481"/>
             </a:avLst>
           </a:prstGeom>
           <a:solidFill>
@@ -9374,7 +9374,7 @@
         </p:nvSpPr>
         <p:spPr>
           <a:xfrm>
-            <a:off x="7799832" y="4645152"/>
+            <a:off x="7799832" y="4330598"/>
             <a:ext cx="3145536" cy="256032"/>
           </a:xfrm>
           <a:prstGeom prst="rect">
@@ -9413,8 +9413,8 @@
         </p:nvSpPr>
         <p:spPr>
           <a:xfrm>
-            <a:off x="7799832" y="4974336"/>
-            <a:ext cx="3145536" cy="576072"/>
+            <a:off x="7799832" y="4659782"/>
+            <a:ext cx="3145536" cy="899770"/>
           </a:xfrm>
           <a:prstGeom prst="rect">
             <a:avLst/>
@@ -9440,7 +9440,7 @@
                 <a:ea typeface="Aptos" pitchFamily="34" charset="-122"/>
                 <a:cs typeface="Aptos" pitchFamily="34" charset="-120"/>
               </a:rPr>
-              <a:t>Use the concept to clarify workflow changes, dependencies, staffing, procurement requirements, training needs, and.</a:t>
+              <a:t>Use the concept to clarify workflow changes, dependencies, staffing, procurement requirements, training needs, and implementation checkpoints.</a:t>
             </a:r>
             <a:endParaRPr lang="en-US" sz="1320" dirty="0"/>
           </a:p>
@@ -9792,11 +9792,11 @@
         <p:spPr>
           <a:xfrm>
             <a:off x="7635240" y="1325880"/>
-            <a:ext cx="3474720" cy="1325880"/>
+            <a:ext cx="3474720" cy="1207008"/>
           </a:xfrm>
           <a:prstGeom prst="roundRect">
             <a:avLst>
-              <a:gd name="adj" fmla="val 8276"/>
+              <a:gd name="adj" fmla="val 9091"/>
             </a:avLst>
           </a:prstGeom>
           <a:solidFill>
@@ -9858,7 +9858,7 @@
         <p:spPr>
           <a:xfrm>
             <a:off x="7799832" y="1801368"/>
-            <a:ext cx="3145536" cy="758952"/>
+            <a:ext cx="3145536" cy="640080"/>
           </a:xfrm>
           <a:prstGeom prst="rect">
             <a:avLst/>
@@ -9898,12 +9898,12 @@
         </p:nvSpPr>
         <p:spPr>
           <a:xfrm>
-            <a:off x="7635240" y="2788920"/>
-            <a:ext cx="3474720" cy="1536192"/>
+            <a:off x="7635240" y="2670048"/>
+            <a:ext cx="3474720" cy="1377086"/>
           </a:xfrm>
           <a:prstGeom prst="roundRect">
             <a:avLst>
-              <a:gd name="adj" fmla="val 7143"/>
+              <a:gd name="adj" fmla="val 7968"/>
             </a:avLst>
           </a:prstGeom>
           <a:solidFill>
@@ -9925,7 +9925,7 @@
         </p:nvSpPr>
         <p:spPr>
           <a:xfrm>
-            <a:off x="7799832" y="2935224"/>
+            <a:off x="7799832" y="2816352"/>
             <a:ext cx="3145536" cy="256032"/>
           </a:xfrm>
           <a:prstGeom prst="rect">
@@ -9964,8 +9964,8 @@
         </p:nvSpPr>
         <p:spPr>
           <a:xfrm>
-            <a:off x="7818120" y="3300984"/>
-            <a:ext cx="3090672" cy="877824"/>
+            <a:off x="7818120" y="3182112"/>
+            <a:ext cx="3090672" cy="718718"/>
           </a:xfrm>
           <a:prstGeom prst="rect">
             <a:avLst/>
@@ -10022,12 +10022,12 @@
         </p:nvSpPr>
         <p:spPr>
           <a:xfrm>
-            <a:off x="7635240" y="4498848"/>
-            <a:ext cx="3474720" cy="1143000"/>
+            <a:off x="7635240" y="4184294"/>
+            <a:ext cx="3474720" cy="1466698"/>
           </a:xfrm>
           <a:prstGeom prst="roundRect">
             <a:avLst>
-              <a:gd name="adj" fmla="val 9600"/>
+              <a:gd name="adj" fmla="val 7481"/>
             </a:avLst>
           </a:prstGeom>
           <a:solidFill>
@@ -10049,7 +10049,7 @@
         </p:nvSpPr>
         <p:spPr>
           <a:xfrm>
-            <a:off x="7799832" y="4645152"/>
+            <a:off x="7799832" y="4330598"/>
             <a:ext cx="3145536" cy="256032"/>
           </a:xfrm>
           <a:prstGeom prst="rect">
@@ -10088,8 +10088,8 @@
         </p:nvSpPr>
         <p:spPr>
           <a:xfrm>
-            <a:off x="7799832" y="4974336"/>
-            <a:ext cx="3145536" cy="576072"/>
+            <a:off x="7799832" y="4659782"/>
+            <a:ext cx="3145536" cy="899770"/>
           </a:xfrm>
           <a:prstGeom prst="rect">
             <a:avLst/>
@@ -10115,7 +10115,7 @@
                 <a:ea typeface="Aptos" pitchFamily="34" charset="-122"/>
                 <a:cs typeface="Aptos" pitchFamily="34" charset="-120"/>
               </a:rPr>
-              <a:t>Use the concept to clarify workflow changes, dependencies, staffing, procurement requirements, training needs, and.</a:t>
+              <a:t>Use the concept to clarify workflow changes, dependencies, staffing, procurement requirements, training needs, and implementation checkpoints.</a:t>
             </a:r>
             <a:endParaRPr lang="en-US" sz="1320" dirty="0"/>
           </a:p>
@@ -10576,7 +10576,7 @@
                 <a:ea typeface="Aptos" pitchFamily="34" charset="-122"/>
                 <a:cs typeface="Aptos" pitchFamily="34" charset="-120"/>
               </a:rPr>
-              <a:t>Level: intermediate/practitioner Primary track: Governance and Security Track Appears in tracks: technical-architecture,.</a:t>
+              <a:t>Level: intermediate/practitioner Primary track: Governance and Security Track Appears in tracks: technical-architecture, governance-and-security, operations-and-data-quality</a:t>
             </a:r>
             <a:endParaRPr lang="en-US" sz="1320" dirty="0"/>
           </a:p>
@@ -11086,11 +11086,11 @@
         <p:spPr>
           <a:xfrm>
             <a:off x="7635240" y="1325880"/>
-            <a:ext cx="3474720" cy="1325880"/>
+            <a:ext cx="3474720" cy="1207008"/>
           </a:xfrm>
           <a:prstGeom prst="roundRect">
             <a:avLst>
-              <a:gd name="adj" fmla="val 8276"/>
+              <a:gd name="adj" fmla="val 9091"/>
             </a:avLst>
           </a:prstGeom>
           <a:solidFill>
@@ -11152,7 +11152,7 @@
         <p:spPr>
           <a:xfrm>
             <a:off x="7799832" y="1801368"/>
-            <a:ext cx="3145536" cy="758952"/>
+            <a:ext cx="3145536" cy="640080"/>
           </a:xfrm>
           <a:prstGeom prst="rect">
             <a:avLst/>
@@ -11192,12 +11192,12 @@
         </p:nvSpPr>
         <p:spPr>
           <a:xfrm>
-            <a:off x="7635240" y="2788920"/>
-            <a:ext cx="3474720" cy="1536192"/>
+            <a:off x="7635240" y="2670048"/>
+            <a:ext cx="3474720" cy="1377086"/>
           </a:xfrm>
           <a:prstGeom prst="roundRect">
             <a:avLst>
-              <a:gd name="adj" fmla="val 7143"/>
+              <a:gd name="adj" fmla="val 7968"/>
             </a:avLst>
           </a:prstGeom>
           <a:solidFill>
@@ -11219,7 +11219,7 @@
         </p:nvSpPr>
         <p:spPr>
           <a:xfrm>
-            <a:off x="7799832" y="2935224"/>
+            <a:off x="7799832" y="2816352"/>
             <a:ext cx="3145536" cy="256032"/>
           </a:xfrm>
           <a:prstGeom prst="rect">
@@ -11258,8 +11258,8 @@
         </p:nvSpPr>
         <p:spPr>
           <a:xfrm>
-            <a:off x="7818120" y="3300984"/>
-            <a:ext cx="3090672" cy="877824"/>
+            <a:off x="7818120" y="3182112"/>
+            <a:ext cx="3090672" cy="718718"/>
           </a:xfrm>
           <a:prstGeom prst="rect">
             <a:avLst/>
@@ -11316,12 +11316,12 @@
         </p:nvSpPr>
         <p:spPr>
           <a:xfrm>
-            <a:off x="7635240" y="4498848"/>
-            <a:ext cx="3474720" cy="1143000"/>
+            <a:off x="7635240" y="4184294"/>
+            <a:ext cx="3474720" cy="1466698"/>
           </a:xfrm>
           <a:prstGeom prst="roundRect">
             <a:avLst>
-              <a:gd name="adj" fmla="val 9600"/>
+              <a:gd name="adj" fmla="val 7481"/>
             </a:avLst>
           </a:prstGeom>
           <a:solidFill>
@@ -11343,7 +11343,7 @@
         </p:nvSpPr>
         <p:spPr>
           <a:xfrm>
-            <a:off x="7799832" y="4645152"/>
+            <a:off x="7799832" y="4330598"/>
             <a:ext cx="3145536" cy="256032"/>
           </a:xfrm>
           <a:prstGeom prst="rect">
@@ -11382,8 +11382,8 @@
         </p:nvSpPr>
         <p:spPr>
           <a:xfrm>
-            <a:off x="7799832" y="4974336"/>
-            <a:ext cx="3145536" cy="576072"/>
+            <a:off x="7799832" y="4659782"/>
+            <a:ext cx="3145536" cy="899770"/>
           </a:xfrm>
           <a:prstGeom prst="rect">
             <a:avLst/>
@@ -11409,7 +11409,7 @@
                 <a:ea typeface="Aptos" pitchFamily="34" charset="-122"/>
                 <a:cs typeface="Aptos" pitchFamily="34" charset="-120"/>
               </a:rPr>
-              <a:t>Use the assignment to test whether you can explain the concept, apply it to a realistic public health situation, and.</a:t>
+              <a:t>Use the assignment to test whether you can explain the concept, apply it to a realistic public health situation, and identify what would need review before the work moves forward.</a:t>
             </a:r>
             <a:endParaRPr lang="en-US" sz="1320" dirty="0"/>
           </a:p>
@@ -11778,11 +11778,11 @@
         <p:spPr>
           <a:xfrm>
             <a:off x="7635240" y="1325880"/>
-            <a:ext cx="3474720" cy="1325880"/>
+            <a:ext cx="3474720" cy="1207008"/>
           </a:xfrm>
           <a:prstGeom prst="roundRect">
             <a:avLst>
-              <a:gd name="adj" fmla="val 8276"/>
+              <a:gd name="adj" fmla="val 9091"/>
             </a:avLst>
           </a:prstGeom>
           <a:solidFill>
@@ -11844,7 +11844,7 @@
         <p:spPr>
           <a:xfrm>
             <a:off x="7799832" y="1801368"/>
-            <a:ext cx="3145536" cy="758952"/>
+            <a:ext cx="3145536" cy="640080"/>
           </a:xfrm>
           <a:prstGeom prst="rect">
             <a:avLst/>
@@ -11884,12 +11884,12 @@
         </p:nvSpPr>
         <p:spPr>
           <a:xfrm>
-            <a:off x="7635240" y="2788920"/>
-            <a:ext cx="3474720" cy="1536192"/>
+            <a:off x="7635240" y="2670048"/>
+            <a:ext cx="3474720" cy="1377086"/>
           </a:xfrm>
           <a:prstGeom prst="roundRect">
             <a:avLst>
-              <a:gd name="adj" fmla="val 7143"/>
+              <a:gd name="adj" fmla="val 7968"/>
             </a:avLst>
           </a:prstGeom>
           <a:solidFill>
@@ -11911,7 +11911,7 @@
         </p:nvSpPr>
         <p:spPr>
           <a:xfrm>
-            <a:off x="7799832" y="2935224"/>
+            <a:off x="7799832" y="2816352"/>
             <a:ext cx="3145536" cy="256032"/>
           </a:xfrm>
           <a:prstGeom prst="rect">
@@ -11950,8 +11950,8 @@
         </p:nvSpPr>
         <p:spPr>
           <a:xfrm>
-            <a:off x="7818120" y="3300984"/>
-            <a:ext cx="3090672" cy="877824"/>
+            <a:off x="7818120" y="3182112"/>
+            <a:ext cx="3090672" cy="718718"/>
           </a:xfrm>
           <a:prstGeom prst="rect">
             <a:avLst/>
@@ -12025,12 +12025,12 @@
         </p:nvSpPr>
         <p:spPr>
           <a:xfrm>
-            <a:off x="7635240" y="4498848"/>
-            <a:ext cx="3474720" cy="1143000"/>
+            <a:off x="7635240" y="4184294"/>
+            <a:ext cx="3474720" cy="1466698"/>
           </a:xfrm>
           <a:prstGeom prst="roundRect">
             <a:avLst>
-              <a:gd name="adj" fmla="val 9600"/>
+              <a:gd name="adj" fmla="val 7481"/>
             </a:avLst>
           </a:prstGeom>
           <a:solidFill>
@@ -12052,7 +12052,7 @@
         </p:nvSpPr>
         <p:spPr>
           <a:xfrm>
-            <a:off x="7799832" y="4645152"/>
+            <a:off x="7799832" y="4330598"/>
             <a:ext cx="3145536" cy="256032"/>
           </a:xfrm>
           <a:prstGeom prst="rect">
@@ -12091,8 +12091,8 @@
         </p:nvSpPr>
         <p:spPr>
           <a:xfrm>
-            <a:off x="7799832" y="4974336"/>
-            <a:ext cx="3145536" cy="576072"/>
+            <a:off x="7799832" y="4659782"/>
+            <a:ext cx="3145536" cy="899770"/>
           </a:xfrm>
           <a:prstGeom prst="rect">
             <a:avLst/>
@@ -12118,7 +12118,7 @@
                 <a:ea typeface="Aptos" pitchFamily="34" charset="-122"/>
                 <a:cs typeface="Aptos" pitchFamily="34" charset="-120"/>
               </a:rPr>
-              <a:t>Use the assignment to test whether you can explain the concept, apply it to a realistic public health situation, and.</a:t>
+              <a:t>Use the assignment to test whether you can explain the concept, apply it to a realistic public health situation, and identify what would need review before the work moves forward.</a:t>
             </a:r>
             <a:endParaRPr lang="en-US" sz="1320" dirty="0"/>
           </a:p>
@@ -12487,11 +12487,11 @@
         <p:spPr>
           <a:xfrm>
             <a:off x="7635240" y="1325880"/>
-            <a:ext cx="3474720" cy="1325880"/>
+            <a:ext cx="3474720" cy="1207008"/>
           </a:xfrm>
           <a:prstGeom prst="roundRect">
             <a:avLst>
-              <a:gd name="adj" fmla="val 8276"/>
+              <a:gd name="adj" fmla="val 9091"/>
             </a:avLst>
           </a:prstGeom>
           <a:solidFill>
@@ -12553,7 +12553,7 @@
         <p:spPr>
           <a:xfrm>
             <a:off x="7799832" y="1801368"/>
-            <a:ext cx="3145536" cy="758952"/>
+            <a:ext cx="3145536" cy="640080"/>
           </a:xfrm>
           <a:prstGeom prst="rect">
             <a:avLst/>
@@ -12593,12 +12593,12 @@
         </p:nvSpPr>
         <p:spPr>
           <a:xfrm>
-            <a:off x="7635240" y="2788920"/>
-            <a:ext cx="3474720" cy="1536192"/>
+            <a:off x="7635240" y="2670048"/>
+            <a:ext cx="3474720" cy="1377086"/>
           </a:xfrm>
           <a:prstGeom prst="roundRect">
             <a:avLst>
-              <a:gd name="adj" fmla="val 7143"/>
+              <a:gd name="adj" fmla="val 7968"/>
             </a:avLst>
           </a:prstGeom>
           <a:solidFill>
@@ -12620,7 +12620,7 @@
         </p:nvSpPr>
         <p:spPr>
           <a:xfrm>
-            <a:off x="7799832" y="2935224"/>
+            <a:off x="7799832" y="2816352"/>
             <a:ext cx="3145536" cy="256032"/>
           </a:xfrm>
           <a:prstGeom prst="rect">
@@ -12659,8 +12659,8 @@
         </p:nvSpPr>
         <p:spPr>
           <a:xfrm>
-            <a:off x="7818120" y="3300984"/>
-            <a:ext cx="3090672" cy="877824"/>
+            <a:off x="7818120" y="3182112"/>
+            <a:ext cx="3090672" cy="718718"/>
           </a:xfrm>
           <a:prstGeom prst="rect">
             <a:avLst/>
@@ -12734,12 +12734,12 @@
         </p:nvSpPr>
         <p:spPr>
           <a:xfrm>
-            <a:off x="7635240" y="4498848"/>
-            <a:ext cx="3474720" cy="1143000"/>
+            <a:off x="7635240" y="4184294"/>
+            <a:ext cx="3474720" cy="1466698"/>
           </a:xfrm>
           <a:prstGeom prst="roundRect">
             <a:avLst>
-              <a:gd name="adj" fmla="val 9600"/>
+              <a:gd name="adj" fmla="val 7481"/>
             </a:avLst>
           </a:prstGeom>
           <a:solidFill>
@@ -12761,7 +12761,7 @@
         </p:nvSpPr>
         <p:spPr>
           <a:xfrm>
-            <a:off x="7799832" y="4645152"/>
+            <a:off x="7799832" y="4330598"/>
             <a:ext cx="3145536" cy="256032"/>
           </a:xfrm>
           <a:prstGeom prst="rect">
@@ -12800,8 +12800,8 @@
         </p:nvSpPr>
         <p:spPr>
           <a:xfrm>
-            <a:off x="7799832" y="4974336"/>
-            <a:ext cx="3145536" cy="576072"/>
+            <a:off x="7799832" y="4659782"/>
+            <a:ext cx="3145536" cy="899770"/>
           </a:xfrm>
           <a:prstGeom prst="rect">
             <a:avLst/>
@@ -12827,7 +12827,7 @@
                 <a:ea typeface="Aptos" pitchFamily="34" charset="-122"/>
                 <a:cs typeface="Aptos" pitchFamily="34" charset="-120"/>
               </a:rPr>
-              <a:t>Use the concept to clarify workflow changes, dependencies, staffing, procurement requirements, training needs, and.</a:t>
+              <a:t>Use the concept to clarify workflow changes, dependencies, staffing, procurement requirements, training needs, and implementation checkpoints.</a:t>
             </a:r>
             <a:endParaRPr lang="en-US" sz="1320" dirty="0"/>
           </a:p>
@@ -13162,11 +13162,11 @@
         <p:spPr>
           <a:xfrm>
             <a:off x="7635240" y="1325880"/>
-            <a:ext cx="3474720" cy="1325880"/>
+            <a:ext cx="3474720" cy="1207008"/>
           </a:xfrm>
           <a:prstGeom prst="roundRect">
             <a:avLst>
-              <a:gd name="adj" fmla="val 8276"/>
+              <a:gd name="adj" fmla="val 9091"/>
             </a:avLst>
           </a:prstGeom>
           <a:solidFill>
@@ -13228,7 +13228,7 @@
         <p:spPr>
           <a:xfrm>
             <a:off x="7799832" y="1801368"/>
-            <a:ext cx="3145536" cy="758952"/>
+            <a:ext cx="3145536" cy="640080"/>
           </a:xfrm>
           <a:prstGeom prst="rect">
             <a:avLst/>
@@ -13254,7 +13254,7 @@
                 <a:ea typeface="Aptos" pitchFamily="34" charset="-122"/>
                 <a:cs typeface="Aptos" pitchFamily="34" charset="-120"/>
               </a:rPr>
-              <a:t>Relevant public health program SOPs, data governance documentation, and implementation plans</a:t>
+              <a:t>Relevant public health program SOPs, data governance documentation, and implementation.</a:t>
             </a:r>
             <a:endParaRPr lang="en-US" sz="1320" dirty="0"/>
           </a:p>
@@ -13268,12 +13268,12 @@
         </p:nvSpPr>
         <p:spPr>
           <a:xfrm>
-            <a:off x="7635240" y="2788920"/>
-            <a:ext cx="3474720" cy="1536192"/>
+            <a:off x="7635240" y="2670048"/>
+            <a:ext cx="3474720" cy="1377086"/>
           </a:xfrm>
           <a:prstGeom prst="roundRect">
             <a:avLst>
-              <a:gd name="adj" fmla="val 7143"/>
+              <a:gd name="adj" fmla="val 7968"/>
             </a:avLst>
           </a:prstGeom>
           <a:solidFill>
@@ -13295,7 +13295,7 @@
         </p:nvSpPr>
         <p:spPr>
           <a:xfrm>
-            <a:off x="7799832" y="2935224"/>
+            <a:off x="7799832" y="2816352"/>
             <a:ext cx="3145536" cy="256032"/>
           </a:xfrm>
           <a:prstGeom prst="rect">
@@ -13334,8 +13334,8 @@
         </p:nvSpPr>
         <p:spPr>
           <a:xfrm>
-            <a:off x="7818120" y="3300984"/>
-            <a:ext cx="3090672" cy="877824"/>
+            <a:off x="7818120" y="3182112"/>
+            <a:ext cx="3090672" cy="718718"/>
           </a:xfrm>
           <a:prstGeom prst="rect">
             <a:avLst/>
@@ -13375,12 +13375,12 @@
         </p:nvSpPr>
         <p:spPr>
           <a:xfrm>
-            <a:off x="7635240" y="4498848"/>
-            <a:ext cx="3474720" cy="1143000"/>
+            <a:off x="7635240" y="4184294"/>
+            <a:ext cx="3474720" cy="1466698"/>
           </a:xfrm>
           <a:prstGeom prst="roundRect">
             <a:avLst>
-              <a:gd name="adj" fmla="val 9600"/>
+              <a:gd name="adj" fmla="val 7481"/>
             </a:avLst>
           </a:prstGeom>
           <a:solidFill>
@@ -13402,7 +13402,7 @@
         </p:nvSpPr>
         <p:spPr>
           <a:xfrm>
-            <a:off x="7799832" y="4645152"/>
+            <a:off x="7799832" y="4330598"/>
             <a:ext cx="3145536" cy="256032"/>
           </a:xfrm>
           <a:prstGeom prst="rect">
@@ -13441,8 +13441,8 @@
         </p:nvSpPr>
         <p:spPr>
           <a:xfrm>
-            <a:off x="7799832" y="4974336"/>
-            <a:ext cx="3145536" cy="576072"/>
+            <a:off x="7799832" y="4659782"/>
+            <a:ext cx="3145536" cy="899770"/>
           </a:xfrm>
           <a:prstGeom prst="rect">
             <a:avLst/>
@@ -13468,7 +13468,7 @@
                 <a:ea typeface="Aptos" pitchFamily="34" charset="-122"/>
                 <a:cs typeface="Aptos" pitchFamily="34" charset="-120"/>
               </a:rPr>
-              <a:t>Use the concept to clarify workflow changes, dependencies, staffing, procurement requirements, training needs, and.</a:t>
+              <a:t>Use the concept to clarify workflow changes, dependencies, staffing, procurement requirements, training needs, and implementation checkpoints.</a:t>
             </a:r>
             <a:endParaRPr lang="en-US" sz="1320" dirty="0"/>
           </a:p>
@@ -13946,7 +13946,7 @@
                 <a:ea typeface="Aptos" pitchFamily="34" charset="-122"/>
                 <a:cs typeface="Aptos" pitchFamily="34" charset="-120"/>
               </a:rPr>
-              <a:t>Use the related plays to identify decisions, participants, timing, approvals, and documentation needed for responsible.</a:t>
+              <a:t>Use the related plays to identify decisions, participants, timing, approvals, and documentation needed for responsible implementation.</a:t>
             </a:r>
             <a:endParaRPr lang="en-US" sz="1320" dirty="0"/>
           </a:p>
@@ -14565,7 +14565,7 @@
                 <a:ea typeface="Aptos" pitchFamily="34" charset="-122"/>
                 <a:cs typeface="Aptos" pitchFamily="34" charset="-120"/>
               </a:rPr>
-              <a:t>Use linked tools when your department needs a structured worksheet, template, checklist, review process, or.</a:t>
+              <a:t>Use linked tools when your department needs a structured worksheet, template, checklist, review process, or documentation artifact.</a:t>
             </a:r>
             <a:endParaRPr lang="en-US" sz="1320" dirty="0"/>
           </a:p>
@@ -15075,11 +15075,11 @@
         <p:spPr>
           <a:xfrm>
             <a:off x="7635240" y="1325880"/>
-            <a:ext cx="3474720" cy="1325880"/>
+            <a:ext cx="3474720" cy="1255471"/>
           </a:xfrm>
           <a:prstGeom prst="roundRect">
             <a:avLst>
-              <a:gd name="adj" fmla="val 8276"/>
+              <a:gd name="adj" fmla="val 8740"/>
             </a:avLst>
           </a:prstGeom>
           <a:solidFill>
@@ -15141,7 +15141,7 @@
         <p:spPr>
           <a:xfrm>
             <a:off x="7799832" y="1801368"/>
-            <a:ext cx="3145536" cy="758952"/>
+            <a:ext cx="3145536" cy="688543"/>
           </a:xfrm>
           <a:prstGeom prst="rect">
             <a:avLst/>
@@ -15181,12 +15181,12 @@
         </p:nvSpPr>
         <p:spPr>
           <a:xfrm>
-            <a:off x="7635240" y="2788920"/>
-            <a:ext cx="3474720" cy="1536192"/>
+            <a:off x="7635240" y="2718511"/>
+            <a:ext cx="3474720" cy="1328623"/>
           </a:xfrm>
           <a:prstGeom prst="roundRect">
             <a:avLst>
-              <a:gd name="adj" fmla="val 7143"/>
+              <a:gd name="adj" fmla="val 8259"/>
             </a:avLst>
           </a:prstGeom>
           <a:solidFill>
@@ -15208,7 +15208,7 @@
         </p:nvSpPr>
         <p:spPr>
           <a:xfrm>
-            <a:off x="7799832" y="2935224"/>
+            <a:off x="7799832" y="2864815"/>
             <a:ext cx="3145536" cy="256032"/>
           </a:xfrm>
           <a:prstGeom prst="rect">
@@ -15247,8 +15247,8 @@
         </p:nvSpPr>
         <p:spPr>
           <a:xfrm>
-            <a:off x="7818120" y="3300984"/>
-            <a:ext cx="3090672" cy="877824"/>
+            <a:off x="7818120" y="3230575"/>
+            <a:ext cx="3090672" cy="670255"/>
           </a:xfrm>
           <a:prstGeom prst="rect">
             <a:avLst/>
@@ -15322,12 +15322,12 @@
         </p:nvSpPr>
         <p:spPr>
           <a:xfrm>
-            <a:off x="7635240" y="4498848"/>
-            <a:ext cx="3474720" cy="1143000"/>
+            <a:off x="7635240" y="4184294"/>
+            <a:ext cx="3474720" cy="1466698"/>
           </a:xfrm>
           <a:prstGeom prst="roundRect">
             <a:avLst>
-              <a:gd name="adj" fmla="val 9600"/>
+              <a:gd name="adj" fmla="val 7481"/>
             </a:avLst>
           </a:prstGeom>
           <a:solidFill>
@@ -15349,7 +15349,7 @@
         </p:nvSpPr>
         <p:spPr>
           <a:xfrm>
-            <a:off x="7799832" y="4645152"/>
+            <a:off x="7799832" y="4330598"/>
             <a:ext cx="3145536" cy="256032"/>
           </a:xfrm>
           <a:prstGeom prst="rect">
@@ -15388,8 +15388,8 @@
         </p:nvSpPr>
         <p:spPr>
           <a:xfrm>
-            <a:off x="7799832" y="4974336"/>
-            <a:ext cx="3145536" cy="576072"/>
+            <a:off x="7799832" y="4659782"/>
+            <a:ext cx="3145536" cy="899770"/>
           </a:xfrm>
           <a:prstGeom prst="rect">
             <a:avLst/>
@@ -15415,7 +15415,7 @@
                 <a:ea typeface="Aptos" pitchFamily="34" charset="-122"/>
                 <a:cs typeface="Aptos" pitchFamily="34" charset="-120"/>
               </a:rPr>
-              <a:t>Use the assignment to test whether you can explain the concept, apply it to a realistic public health situation, and.</a:t>
+              <a:t>Use the assignment to test whether you can explain the concept, apply it to a realistic public health situation, and identify what would need review before the work moves forward.</a:t>
             </a:r>
             <a:endParaRPr lang="en-US" sz="1320" dirty="0"/>
           </a:p>
@@ -15784,11 +15784,11 @@
         <p:spPr>
           <a:xfrm>
             <a:off x="7635240" y="1325880"/>
-            <a:ext cx="3474720" cy="1325880"/>
+            <a:ext cx="3474720" cy="1255471"/>
           </a:xfrm>
           <a:prstGeom prst="roundRect">
             <a:avLst>
-              <a:gd name="adj" fmla="val 8276"/>
+              <a:gd name="adj" fmla="val 8740"/>
             </a:avLst>
           </a:prstGeom>
           <a:solidFill>
@@ -15850,7 +15850,7 @@
         <p:spPr>
           <a:xfrm>
             <a:off x="7799832" y="1801368"/>
-            <a:ext cx="3145536" cy="758952"/>
+            <a:ext cx="3145536" cy="688543"/>
           </a:xfrm>
           <a:prstGeom prst="rect">
             <a:avLst/>
@@ -15890,12 +15890,12 @@
         </p:nvSpPr>
         <p:spPr>
           <a:xfrm>
-            <a:off x="7635240" y="2788920"/>
-            <a:ext cx="3474720" cy="1536192"/>
+            <a:off x="7635240" y="2718511"/>
+            <a:ext cx="3474720" cy="1328623"/>
           </a:xfrm>
           <a:prstGeom prst="roundRect">
             <a:avLst>
-              <a:gd name="adj" fmla="val 7143"/>
+              <a:gd name="adj" fmla="val 8259"/>
             </a:avLst>
           </a:prstGeom>
           <a:solidFill>
@@ -15917,8 +15917,8 @@
         </p:nvSpPr>
         <p:spPr>
           <a:xfrm>
-            <a:off x="7799832" y="2935224"/>
-            <a:ext cx="3145536" cy="256032"/>
+            <a:off x="7799832" y="2846527"/>
+            <a:ext cx="3145536" cy="237744"/>
           </a:xfrm>
           <a:prstGeom prst="rect">
             <a:avLst/>
@@ -15934,7 +15934,7 @@
               <a:buNone/>
             </a:pPr>
             <a:r>
-              <a:rPr lang="en-US" sz="1300" b="1" dirty="0">
+              <a:rPr lang="en-US" sz="1250" b="1" dirty="0">
                 <a:solidFill>
                   <a:srgbClr val="0068B7"/>
                 </a:solidFill>
@@ -15942,101 +15942,317 @@
                 <a:ea typeface="Aptos" pitchFamily="34" charset="-122"/>
                 <a:cs typeface="Aptos" pitchFamily="34" charset="-120"/>
               </a:rPr>
-              <a:t>Concept checkpoints</a:t>
-            </a:r>
-            <a:endParaRPr lang="en-US" sz="1300" dirty="0"/>
-          </a:p>
-        </p:txBody>
-      </p:sp>
-      <p:sp>
-        <p:nvSpPr>
-          <p:cNvPr id="15" name="Text 13"/>
-          <p:cNvSpPr/>
-          <p:nvPr/>
-        </p:nvSpPr>
-        <p:spPr>
-          <a:xfrm>
-            <a:off x="7818120" y="3300984"/>
-            <a:ext cx="3090672" cy="877824"/>
-          </a:xfrm>
-          <a:prstGeom prst="rect">
-            <a:avLst/>
-          </a:prstGeom>
-          <a:noFill/>
-          <a:ln/>
-        </p:spPr>
-        <p:txBody>
-          <a:bodyPr wrap="square" lIns="508" tIns="508" rIns="508" bIns="508" rtlCol="0" anchor="t">
+              <a:t>Implementation path</a:t>
+            </a:r>
+            <a:endParaRPr lang="en-US" sz="1250" dirty="0"/>
+          </a:p>
+        </p:txBody>
+      </p:sp>
+      <p:sp>
+        <p:nvSpPr>
+          <p:cNvPr id="15" name="Shape 13"/>
+          <p:cNvSpPr/>
+          <p:nvPr/>
+        </p:nvSpPr>
+        <p:spPr>
+          <a:xfrm>
+            <a:off x="8763000" y="3399739"/>
+            <a:ext cx="164592" cy="0"/>
+          </a:xfrm>
+          <a:prstGeom prst="line">
+            <a:avLst/>
+          </a:prstGeom>
+          <a:noFill/>
+          <a:ln w="15240">
+            <a:solidFill>
+              <a:srgbClr val="8ABBD8"/>
+            </a:solidFill>
+            <a:prstDash val="solid"/>
+          </a:ln>
+        </p:spPr>
+      </p:sp>
+      <p:sp>
+        <p:nvSpPr>
+          <p:cNvPr id="16" name="Shape 14"/>
+          <p:cNvSpPr/>
+          <p:nvPr/>
+        </p:nvSpPr>
+        <p:spPr>
+          <a:xfrm>
+            <a:off x="7872984" y="3248863"/>
+            <a:ext cx="890016" cy="301752"/>
+          </a:xfrm>
+          <a:prstGeom prst="roundRect">
+            <a:avLst>
+              <a:gd name="adj" fmla="val 24242"/>
+            </a:avLst>
+          </a:prstGeom>
+          <a:solidFill>
+            <a:srgbClr val="0068B7"/>
+          </a:solidFill>
+          <a:ln w="12700">
+            <a:solidFill>
+              <a:srgbClr val="0068B7"/>
+            </a:solidFill>
+            <a:prstDash val="solid"/>
+          </a:ln>
+        </p:spPr>
+      </p:sp>
+      <p:sp>
+        <p:nvSpPr>
+          <p:cNvPr id="17" name="Text 15"/>
+          <p:cNvSpPr/>
+          <p:nvPr/>
+        </p:nvSpPr>
+        <p:spPr>
+          <a:xfrm>
+            <a:off x="7909560" y="3322015"/>
+            <a:ext cx="816864" cy="146304"/>
+          </a:xfrm>
+          <a:prstGeom prst="rect">
+            <a:avLst/>
+          </a:prstGeom>
+          <a:noFill/>
+          <a:ln/>
+        </p:spPr>
+        <p:txBody>
+          <a:bodyPr wrap="square" lIns="0" tIns="0" rIns="0" bIns="0" rtlCol="0" anchor="ctr">
             <a:normAutofit/>
           </a:bodyPr>
           <a:lstStyle/>
           <a:p>
-            <a:pPr indent="0" marL="0">
-              <a:buNone/>
-            </a:pPr>
-            <a:r>
-              <a:rPr lang="en-US" sz="1220" dirty="0">
-                <a:solidFill>
-                  <a:srgbClr val="17364A"/>
-                </a:solidFill>
-                <a:latin typeface="Aptos" pitchFamily="34" charset="0"/>
-                <a:ea typeface="Aptos" pitchFamily="34" charset="-122"/>
-                <a:cs typeface="Aptos" pitchFamily="34" charset="-120"/>
-              </a:rPr>
-              <a:t>Identity, access, and permissions determine who or what can use.</a:t>
-            </a:r>
-            <a:endParaRPr lang="en-US" sz="1220" dirty="0"/>
-          </a:p>
-          <a:p>
-            <a:pPr indent="0" marL="0">
-              <a:buNone/>
-            </a:pPr>
-            <a:r>
-              <a:rPr lang="en-US" sz="1220" dirty="0">
-                <a:solidFill>
-                  <a:srgbClr val="17364A"/>
-                </a:solidFill>
-                <a:latin typeface="Aptos" pitchFamily="34" charset="0"/>
-                <a:ea typeface="Aptos" pitchFamily="34" charset="-122"/>
-                <a:cs typeface="Aptos" pitchFamily="34" charset="-120"/>
-              </a:rPr>
-              <a:t>Public health AI workflows may involve staff users, service.</a:t>
-            </a:r>
-            <a:endParaRPr lang="en-US" sz="1220" dirty="0"/>
-          </a:p>
-          <a:p>
-            <a:pPr indent="0" marL="0">
-              <a:buNone/>
-            </a:pPr>
-            <a:r>
-              <a:rPr lang="en-US" sz="1220" dirty="0">
-                <a:solidFill>
-                  <a:srgbClr val="17364A"/>
-                </a:solidFill>
-                <a:latin typeface="Aptos" pitchFamily="34" charset="0"/>
-                <a:ea typeface="Aptos" pitchFamily="34" charset="-122"/>
-                <a:cs typeface="Aptos" pitchFamily="34" charset="-120"/>
-              </a:rPr>
-              <a:t>Without clear access controls, an AI tool may retrieve sensitive.</a:t>
-            </a:r>
-            <a:endParaRPr lang="en-US" sz="1220" dirty="0"/>
-          </a:p>
-        </p:txBody>
-      </p:sp>
-      <p:sp>
-        <p:nvSpPr>
-          <p:cNvPr id="16" name="Shape 14"/>
-          <p:cNvSpPr/>
-          <p:nvPr/>
-        </p:nvSpPr>
-        <p:spPr>
-          <a:xfrm>
-            <a:off x="7635240" y="4498848"/>
-            <a:ext cx="3474720" cy="1143000"/>
+            <a:pPr algn="ctr" indent="0" marL="0">
+              <a:buNone/>
+            </a:pPr>
+            <a:r>
+              <a:rPr lang="en-US" sz="880" b="1" dirty="0">
+                <a:solidFill>
+                  <a:srgbClr val="FFFFFF"/>
+                </a:solidFill>
+                <a:latin typeface="Aptos" pitchFamily="34" charset="0"/>
+                <a:ea typeface="Aptos" pitchFamily="34" charset="-122"/>
+                <a:cs typeface="Aptos" pitchFamily="34" charset="-120"/>
+              </a:rPr>
+              <a:t>Need</a:t>
+            </a:r>
+            <a:endParaRPr lang="en-US" sz="880" dirty="0"/>
+          </a:p>
+        </p:txBody>
+      </p:sp>
+      <p:sp>
+        <p:nvSpPr>
+          <p:cNvPr id="18" name="Shape 16"/>
+          <p:cNvSpPr/>
+          <p:nvPr/>
+        </p:nvSpPr>
+        <p:spPr>
+          <a:xfrm>
+            <a:off x="9817608" y="3399739"/>
+            <a:ext cx="164592" cy="0"/>
+          </a:xfrm>
+          <a:prstGeom prst="line">
+            <a:avLst/>
+          </a:prstGeom>
+          <a:noFill/>
+          <a:ln w="15240">
+            <a:solidFill>
+              <a:srgbClr val="8ABBD8"/>
+            </a:solidFill>
+            <a:prstDash val="solid"/>
+          </a:ln>
+        </p:spPr>
+      </p:sp>
+      <p:sp>
+        <p:nvSpPr>
+          <p:cNvPr id="19" name="Shape 17"/>
+          <p:cNvSpPr/>
+          <p:nvPr/>
+        </p:nvSpPr>
+        <p:spPr>
+          <a:xfrm>
+            <a:off x="8927592" y="3248863"/>
+            <a:ext cx="890016" cy="301752"/>
           </a:xfrm>
           <a:prstGeom prst="roundRect">
             <a:avLst>
-              <a:gd name="adj" fmla="val 9600"/>
+              <a:gd name="adj" fmla="val 24242"/>
+            </a:avLst>
+          </a:prstGeom>
+          <a:solidFill>
+            <a:srgbClr val="2F8A28"/>
+          </a:solidFill>
+          <a:ln w="12700">
+            <a:solidFill>
+              <a:srgbClr val="2F8A28"/>
+            </a:solidFill>
+            <a:prstDash val="solid"/>
+          </a:ln>
+        </p:spPr>
+      </p:sp>
+      <p:sp>
+        <p:nvSpPr>
+          <p:cNvPr id="20" name="Text 18"/>
+          <p:cNvSpPr/>
+          <p:nvPr/>
+        </p:nvSpPr>
+        <p:spPr>
+          <a:xfrm>
+            <a:off x="8964168" y="3322015"/>
+            <a:ext cx="816864" cy="146304"/>
+          </a:xfrm>
+          <a:prstGeom prst="rect">
+            <a:avLst/>
+          </a:prstGeom>
+          <a:noFill/>
+          <a:ln/>
+        </p:spPr>
+        <p:txBody>
+          <a:bodyPr wrap="square" lIns="0" tIns="0" rIns="0" bIns="0" rtlCol="0" anchor="ctr">
+            <a:normAutofit/>
+          </a:bodyPr>
+          <a:lstStyle/>
+          <a:p>
+            <a:pPr algn="ctr" indent="0" marL="0">
+              <a:buNone/>
+            </a:pPr>
+            <a:r>
+              <a:rPr lang="en-US" sz="880" b="1" dirty="0">
+                <a:solidFill>
+                  <a:srgbClr val="FFFFFF"/>
+                </a:solidFill>
+                <a:latin typeface="Aptos" pitchFamily="34" charset="0"/>
+                <a:ea typeface="Aptos" pitchFamily="34" charset="-122"/>
+                <a:cs typeface="Aptos" pitchFamily="34" charset="-120"/>
+              </a:rPr>
+              <a:t>Build</a:t>
+            </a:r>
+            <a:endParaRPr lang="en-US" sz="880" dirty="0"/>
+          </a:p>
+        </p:txBody>
+      </p:sp>
+      <p:sp>
+        <p:nvSpPr>
+          <p:cNvPr id="21" name="Shape 19"/>
+          <p:cNvSpPr/>
+          <p:nvPr/>
+        </p:nvSpPr>
+        <p:spPr>
+          <a:xfrm>
+            <a:off x="9982200" y="3248863"/>
+            <a:ext cx="890016" cy="301752"/>
+          </a:xfrm>
+          <a:prstGeom prst="roundRect">
+            <a:avLst>
+              <a:gd name="adj" fmla="val 24242"/>
+            </a:avLst>
+          </a:prstGeom>
+          <a:solidFill>
+            <a:srgbClr val="6A4CA3"/>
+          </a:solidFill>
+          <a:ln w="12700">
+            <a:solidFill>
+              <a:srgbClr val="6A4CA3"/>
+            </a:solidFill>
+            <a:prstDash val="solid"/>
+          </a:ln>
+        </p:spPr>
+      </p:sp>
+      <p:sp>
+        <p:nvSpPr>
+          <p:cNvPr id="22" name="Text 20"/>
+          <p:cNvSpPr/>
+          <p:nvPr/>
+        </p:nvSpPr>
+        <p:spPr>
+          <a:xfrm>
+            <a:off x="10018776" y="3322015"/>
+            <a:ext cx="816864" cy="146304"/>
+          </a:xfrm>
+          <a:prstGeom prst="rect">
+            <a:avLst/>
+          </a:prstGeom>
+          <a:noFill/>
+          <a:ln/>
+        </p:spPr>
+        <p:txBody>
+          <a:bodyPr wrap="square" lIns="0" tIns="0" rIns="0" bIns="0" rtlCol="0" anchor="ctr">
+            <a:normAutofit/>
+          </a:bodyPr>
+          <a:lstStyle/>
+          <a:p>
+            <a:pPr algn="ctr" indent="0" marL="0">
+              <a:buNone/>
+            </a:pPr>
+            <a:r>
+              <a:rPr lang="en-US" sz="880" b="1" dirty="0">
+                <a:solidFill>
+                  <a:srgbClr val="FFFFFF"/>
+                </a:solidFill>
+                <a:latin typeface="Aptos" pitchFamily="34" charset="0"/>
+                <a:ea typeface="Aptos" pitchFamily="34" charset="-122"/>
+                <a:cs typeface="Aptos" pitchFamily="34" charset="-120"/>
+              </a:rPr>
+              <a:t>Adopt</a:t>
+            </a:r>
+            <a:endParaRPr lang="en-US" sz="880" dirty="0"/>
+          </a:p>
+        </p:txBody>
+      </p:sp>
+      <p:sp>
+        <p:nvSpPr>
+          <p:cNvPr id="23" name="Text 21"/>
+          <p:cNvSpPr/>
+          <p:nvPr/>
+        </p:nvSpPr>
+        <p:spPr>
+          <a:xfrm>
+            <a:off x="7854696" y="3742639"/>
+            <a:ext cx="3035808" cy="158191"/>
+          </a:xfrm>
+          <a:prstGeom prst="rect">
+            <a:avLst/>
+          </a:prstGeom>
+          <a:noFill/>
+          <a:ln/>
+        </p:spPr>
+        <p:txBody>
+          <a:bodyPr wrap="square" lIns="254" tIns="254" rIns="254" bIns="254" rtlCol="0" anchor="t">
+            <a:normAutofit/>
+          </a:bodyPr>
+          <a:lstStyle/>
+          <a:p>
+            <a:pPr indent="0" marL="0">
+              <a:buNone/>
+            </a:pPr>
+            <a:r>
+              <a:rPr lang="en-US" sz="1120" dirty="0">
+                <a:solidFill>
+                  <a:srgbClr val="17364A"/>
+                </a:solidFill>
+                <a:latin typeface="Aptos" pitchFamily="34" charset="0"/>
+                <a:ea typeface="Aptos" pitchFamily="34" charset="-122"/>
+                <a:cs typeface="Aptos" pitchFamily="34" charset="-120"/>
+              </a:rPr>
+              <a:t>Implementation work should make dependencies, approvals, training, and sustainment visible before launch.</a:t>
+            </a:r>
+            <a:endParaRPr lang="en-US" sz="1120" dirty="0"/>
+          </a:p>
+        </p:txBody>
+      </p:sp>
+      <p:sp>
+        <p:nvSpPr>
+          <p:cNvPr id="24" name="Shape 22"/>
+          <p:cNvSpPr/>
+          <p:nvPr/>
+        </p:nvSpPr>
+        <p:spPr>
+          <a:xfrm>
+            <a:off x="7635240" y="4184294"/>
+            <a:ext cx="3474720" cy="1466698"/>
+          </a:xfrm>
+          <a:prstGeom prst="roundRect">
+            <a:avLst>
+              <a:gd name="adj" fmla="val 7481"/>
             </a:avLst>
           </a:prstGeom>
           <a:solidFill>
@@ -16052,13 +16268,13 @@
       </p:sp>
       <p:sp>
         <p:nvSpPr>
-          <p:cNvPr id="17" name="Text 15"/>
-          <p:cNvSpPr/>
-          <p:nvPr/>
-        </p:nvSpPr>
-        <p:spPr>
-          <a:xfrm>
-            <a:off x="7799832" y="4645152"/>
+          <p:cNvPr id="25" name="Text 23"/>
+          <p:cNvSpPr/>
+          <p:nvPr/>
+        </p:nvSpPr>
+        <p:spPr>
+          <a:xfrm>
+            <a:off x="7799832" y="4330598"/>
             <a:ext cx="3145536" cy="256032"/>
           </a:xfrm>
           <a:prstGeom prst="rect">
@@ -16091,14 +16307,14 @@
       </p:sp>
       <p:sp>
         <p:nvSpPr>
-          <p:cNvPr id="18" name="Text 16"/>
-          <p:cNvSpPr/>
-          <p:nvPr/>
-        </p:nvSpPr>
-        <p:spPr>
-          <a:xfrm>
-            <a:off x="7799832" y="4974336"/>
-            <a:ext cx="3145536" cy="576072"/>
+          <p:cNvPr id="26" name="Text 24"/>
+          <p:cNvSpPr/>
+          <p:nvPr/>
+        </p:nvSpPr>
+        <p:spPr>
+          <a:xfrm>
+            <a:off x="7799832" y="4659782"/>
+            <a:ext cx="3145536" cy="899770"/>
           </a:xfrm>
           <a:prstGeom prst="rect">
             <a:avLst/>
@@ -16124,7 +16340,7 @@
                 <a:ea typeface="Aptos" pitchFamily="34" charset="-122"/>
                 <a:cs typeface="Aptos" pitchFamily="34" charset="-120"/>
               </a:rPr>
-              <a:t>Use the concept to clarify workflow changes, dependencies, staffing, procurement requirements, training needs, and.</a:t>
+              <a:t>Use the concept to clarify workflow changes, dependencies, staffing, procurement requirements, training needs, and implementation checkpoints.</a:t>
             </a:r>
             <a:endParaRPr lang="en-US" sz="1320" dirty="0"/>
           </a:p>
@@ -16493,11 +16709,11 @@
         <p:spPr>
           <a:xfrm>
             <a:off x="7635240" y="1325880"/>
-            <a:ext cx="3474720" cy="1325880"/>
+            <a:ext cx="3474720" cy="1207008"/>
           </a:xfrm>
           <a:prstGeom prst="roundRect">
             <a:avLst>
-              <a:gd name="adj" fmla="val 8276"/>
+              <a:gd name="adj" fmla="val 9091"/>
             </a:avLst>
           </a:prstGeom>
           <a:solidFill>
@@ -16559,7 +16775,7 @@
         <p:spPr>
           <a:xfrm>
             <a:off x="7799832" y="1801368"/>
-            <a:ext cx="3145536" cy="758952"/>
+            <a:ext cx="3145536" cy="640080"/>
           </a:xfrm>
           <a:prstGeom prst="rect">
             <a:avLst/>
@@ -16585,7 +16801,7 @@
                 <a:ea typeface="Aptos" pitchFamily="34" charset="-122"/>
                 <a:cs typeface="Aptos" pitchFamily="34" charset="-120"/>
               </a:rPr>
-              <a:t>This module provides national-level training guidance for public health agencies and partners.</a:t>
+              <a:t>This module provides national-level training guidance for public health agencies and.</a:t>
             </a:r>
             <a:endParaRPr lang="en-US" sz="1320" dirty="0"/>
           </a:p>
@@ -16599,12 +16815,12 @@
         </p:nvSpPr>
         <p:spPr>
           <a:xfrm>
-            <a:off x="7635240" y="2788920"/>
-            <a:ext cx="3474720" cy="1536192"/>
+            <a:off x="7635240" y="2670048"/>
+            <a:ext cx="3474720" cy="1377086"/>
           </a:xfrm>
           <a:prstGeom prst="roundRect">
             <a:avLst>
-              <a:gd name="adj" fmla="val 7143"/>
+              <a:gd name="adj" fmla="val 7968"/>
             </a:avLst>
           </a:prstGeom>
           <a:solidFill>
@@ -16626,8 +16842,8 @@
         </p:nvSpPr>
         <p:spPr>
           <a:xfrm>
-            <a:off x="7799832" y="2935224"/>
-            <a:ext cx="3145536" cy="256032"/>
+            <a:off x="7799832" y="2798064"/>
+            <a:ext cx="3145536" cy="237744"/>
           </a:xfrm>
           <a:prstGeom prst="rect">
             <a:avLst/>
@@ -16643,7 +16859,7 @@
               <a:buNone/>
             </a:pPr>
             <a:r>
-              <a:rPr lang="en-US" sz="1300" b="1" dirty="0">
+              <a:rPr lang="en-US" sz="1250" b="1" dirty="0">
                 <a:solidFill>
                   <a:srgbClr val="0068B7"/>
                 </a:solidFill>
@@ -16651,101 +16867,317 @@
                 <a:ea typeface="Aptos" pitchFamily="34" charset="-122"/>
                 <a:cs typeface="Aptos" pitchFamily="34" charset="-120"/>
               </a:rPr>
-              <a:t>Concept checkpoints</a:t>
-            </a:r>
-            <a:endParaRPr lang="en-US" sz="1300" dirty="0"/>
-          </a:p>
-        </p:txBody>
-      </p:sp>
-      <p:sp>
-        <p:nvSpPr>
-          <p:cNvPr id="15" name="Text 13"/>
-          <p:cNvSpPr/>
-          <p:nvPr/>
-        </p:nvSpPr>
-        <p:spPr>
-          <a:xfrm>
-            <a:off x="7818120" y="3300984"/>
-            <a:ext cx="3090672" cy="877824"/>
-          </a:xfrm>
-          <a:prstGeom prst="rect">
-            <a:avLst/>
-          </a:prstGeom>
-          <a:noFill/>
-          <a:ln/>
-        </p:spPr>
-        <p:txBody>
-          <a:bodyPr wrap="square" lIns="508" tIns="508" rIns="508" bIns="508" rtlCol="0" anchor="t">
+              <a:t>Governance pathway</a:t>
+            </a:r>
+            <a:endParaRPr lang="en-US" sz="1250" dirty="0"/>
+          </a:p>
+        </p:txBody>
+      </p:sp>
+      <p:sp>
+        <p:nvSpPr>
+          <p:cNvPr id="15" name="Shape 13"/>
+          <p:cNvSpPr/>
+          <p:nvPr/>
+        </p:nvSpPr>
+        <p:spPr>
+          <a:xfrm>
+            <a:off x="8763000" y="3351276"/>
+            <a:ext cx="164592" cy="0"/>
+          </a:xfrm>
+          <a:prstGeom prst="line">
+            <a:avLst/>
+          </a:prstGeom>
+          <a:noFill/>
+          <a:ln w="15240">
+            <a:solidFill>
+              <a:srgbClr val="8ABBD8"/>
+            </a:solidFill>
+            <a:prstDash val="solid"/>
+          </a:ln>
+        </p:spPr>
+      </p:sp>
+      <p:sp>
+        <p:nvSpPr>
+          <p:cNvPr id="16" name="Shape 14"/>
+          <p:cNvSpPr/>
+          <p:nvPr/>
+        </p:nvSpPr>
+        <p:spPr>
+          <a:xfrm>
+            <a:off x="7872984" y="3200400"/>
+            <a:ext cx="890016" cy="301752"/>
+          </a:xfrm>
+          <a:prstGeom prst="roundRect">
+            <a:avLst>
+              <a:gd name="adj" fmla="val 24242"/>
+            </a:avLst>
+          </a:prstGeom>
+          <a:solidFill>
+            <a:srgbClr val="0068B7"/>
+          </a:solidFill>
+          <a:ln w="12700">
+            <a:solidFill>
+              <a:srgbClr val="0068B7"/>
+            </a:solidFill>
+            <a:prstDash val="solid"/>
+          </a:ln>
+        </p:spPr>
+      </p:sp>
+      <p:sp>
+        <p:nvSpPr>
+          <p:cNvPr id="17" name="Text 15"/>
+          <p:cNvSpPr/>
+          <p:nvPr/>
+        </p:nvSpPr>
+        <p:spPr>
+          <a:xfrm>
+            <a:off x="7909560" y="3273552"/>
+            <a:ext cx="816864" cy="146304"/>
+          </a:xfrm>
+          <a:prstGeom prst="rect">
+            <a:avLst/>
+          </a:prstGeom>
+          <a:noFill/>
+          <a:ln/>
+        </p:spPr>
+        <p:txBody>
+          <a:bodyPr wrap="square" lIns="0" tIns="0" rIns="0" bIns="0" rtlCol="0" anchor="ctr">
             <a:normAutofit/>
           </a:bodyPr>
           <a:lstStyle/>
           <a:p>
-            <a:pPr indent="0" marL="0">
-              <a:buNone/>
-            </a:pPr>
-            <a:r>
-              <a:rPr lang="en-US" sz="1220" dirty="0">
-                <a:solidFill>
-                  <a:srgbClr val="17364A"/>
-                </a:solidFill>
-                <a:latin typeface="Aptos" pitchFamily="34" charset="0"/>
-                <a:ea typeface="Aptos" pitchFamily="34" charset="-122"/>
-                <a:cs typeface="Aptos" pitchFamily="34" charset="-120"/>
-              </a:rPr>
-              <a:t>It is not legal advice and does not replace review by agency legal.</a:t>
-            </a:r>
-            <a:endParaRPr lang="en-US" sz="1220" dirty="0"/>
-          </a:p>
-          <a:p>
-            <a:pPr indent="0" marL="0">
-              <a:buNone/>
-            </a:pPr>
-            <a:r>
-              <a:rPr lang="en-US" sz="1220" dirty="0">
-                <a:solidFill>
-                  <a:srgbClr val="17364A"/>
-                </a:solidFill>
-                <a:latin typeface="Aptos" pitchFamily="34" charset="0"/>
-                <a:ea typeface="Aptos" pitchFamily="34" charset="-122"/>
-                <a:cs typeface="Aptos" pitchFamily="34" charset="-120"/>
-              </a:rPr>
-              <a:t>Requirements may vary by state, locality, territory, Tribe,.</a:t>
-            </a:r>
-            <a:endParaRPr lang="en-US" sz="1220" dirty="0"/>
-          </a:p>
-          <a:p>
-            <a:pPr indent="0" marL="0">
-              <a:buNone/>
-            </a:pPr>
-            <a:r>
-              <a:rPr lang="en-US" sz="1220" dirty="0">
-                <a:solidFill>
-                  <a:srgbClr val="17364A"/>
-                </a:solidFill>
-                <a:latin typeface="Aptos" pitchFamily="34" charset="0"/>
-                <a:ea typeface="Aptos" pitchFamily="34" charset="-122"/>
-                <a:cs typeface="Aptos" pitchFamily="34" charset="-120"/>
-              </a:rPr>
-              <a:t>Learners should use this module to identify the issues that.</a:t>
-            </a:r>
-            <a:endParaRPr lang="en-US" sz="1220" dirty="0"/>
-          </a:p>
-        </p:txBody>
-      </p:sp>
-      <p:sp>
-        <p:nvSpPr>
-          <p:cNvPr id="16" name="Shape 14"/>
-          <p:cNvSpPr/>
-          <p:nvPr/>
-        </p:nvSpPr>
-        <p:spPr>
-          <a:xfrm>
-            <a:off x="7635240" y="4498848"/>
-            <a:ext cx="3474720" cy="1143000"/>
+            <a:pPr algn="ctr" indent="0" marL="0">
+              <a:buNone/>
+            </a:pPr>
+            <a:r>
+              <a:rPr lang="en-US" sz="880" b="1" dirty="0">
+                <a:solidFill>
+                  <a:srgbClr val="FFFFFF"/>
+                </a:solidFill>
+                <a:latin typeface="Aptos" pitchFamily="34" charset="0"/>
+                <a:ea typeface="Aptos" pitchFamily="34" charset="-122"/>
+                <a:cs typeface="Aptos" pitchFamily="34" charset="-120"/>
+              </a:rPr>
+              <a:t>Submit</a:t>
+            </a:r>
+            <a:endParaRPr lang="en-US" sz="880" dirty="0"/>
+          </a:p>
+        </p:txBody>
+      </p:sp>
+      <p:sp>
+        <p:nvSpPr>
+          <p:cNvPr id="18" name="Shape 16"/>
+          <p:cNvSpPr/>
+          <p:nvPr/>
+        </p:nvSpPr>
+        <p:spPr>
+          <a:xfrm>
+            <a:off x="9817608" y="3351276"/>
+            <a:ext cx="164592" cy="0"/>
+          </a:xfrm>
+          <a:prstGeom prst="line">
+            <a:avLst/>
+          </a:prstGeom>
+          <a:noFill/>
+          <a:ln w="15240">
+            <a:solidFill>
+              <a:srgbClr val="8ABBD8"/>
+            </a:solidFill>
+            <a:prstDash val="solid"/>
+          </a:ln>
+        </p:spPr>
+      </p:sp>
+      <p:sp>
+        <p:nvSpPr>
+          <p:cNvPr id="19" name="Shape 17"/>
+          <p:cNvSpPr/>
+          <p:nvPr/>
+        </p:nvSpPr>
+        <p:spPr>
+          <a:xfrm>
+            <a:off x="8927592" y="3200400"/>
+            <a:ext cx="890016" cy="301752"/>
           </a:xfrm>
           <a:prstGeom prst="roundRect">
             <a:avLst>
-              <a:gd name="adj" fmla="val 9600"/>
+              <a:gd name="adj" fmla="val 24242"/>
+            </a:avLst>
+          </a:prstGeom>
+          <a:solidFill>
+            <a:srgbClr val="2F8A28"/>
+          </a:solidFill>
+          <a:ln w="12700">
+            <a:solidFill>
+              <a:srgbClr val="2F8A28"/>
+            </a:solidFill>
+            <a:prstDash val="solid"/>
+          </a:ln>
+        </p:spPr>
+      </p:sp>
+      <p:sp>
+        <p:nvSpPr>
+          <p:cNvPr id="20" name="Text 18"/>
+          <p:cNvSpPr/>
+          <p:nvPr/>
+        </p:nvSpPr>
+        <p:spPr>
+          <a:xfrm>
+            <a:off x="8964168" y="3273552"/>
+            <a:ext cx="816864" cy="146304"/>
+          </a:xfrm>
+          <a:prstGeom prst="rect">
+            <a:avLst/>
+          </a:prstGeom>
+          <a:noFill/>
+          <a:ln/>
+        </p:spPr>
+        <p:txBody>
+          <a:bodyPr wrap="square" lIns="0" tIns="0" rIns="0" bIns="0" rtlCol="0" anchor="ctr">
+            <a:normAutofit/>
+          </a:bodyPr>
+          <a:lstStyle/>
+          <a:p>
+            <a:pPr algn="ctr" indent="0" marL="0">
+              <a:buNone/>
+            </a:pPr>
+            <a:r>
+              <a:rPr lang="en-US" sz="880" b="1" dirty="0">
+                <a:solidFill>
+                  <a:srgbClr val="FFFFFF"/>
+                </a:solidFill>
+                <a:latin typeface="Aptos" pitchFamily="34" charset="0"/>
+                <a:ea typeface="Aptos" pitchFamily="34" charset="-122"/>
+                <a:cs typeface="Aptos" pitchFamily="34" charset="-120"/>
+              </a:rPr>
+              <a:t>Review</a:t>
+            </a:r>
+            <a:endParaRPr lang="en-US" sz="880" dirty="0"/>
+          </a:p>
+        </p:txBody>
+      </p:sp>
+      <p:sp>
+        <p:nvSpPr>
+          <p:cNvPr id="21" name="Shape 19"/>
+          <p:cNvSpPr/>
+          <p:nvPr/>
+        </p:nvSpPr>
+        <p:spPr>
+          <a:xfrm>
+            <a:off x="9982200" y="3200400"/>
+            <a:ext cx="890016" cy="301752"/>
+          </a:xfrm>
+          <a:prstGeom prst="roundRect">
+            <a:avLst>
+              <a:gd name="adj" fmla="val 24242"/>
+            </a:avLst>
+          </a:prstGeom>
+          <a:solidFill>
+            <a:srgbClr val="6A4CA3"/>
+          </a:solidFill>
+          <a:ln w="12700">
+            <a:solidFill>
+              <a:srgbClr val="6A4CA3"/>
+            </a:solidFill>
+            <a:prstDash val="solid"/>
+          </a:ln>
+        </p:spPr>
+      </p:sp>
+      <p:sp>
+        <p:nvSpPr>
+          <p:cNvPr id="22" name="Text 20"/>
+          <p:cNvSpPr/>
+          <p:nvPr/>
+        </p:nvSpPr>
+        <p:spPr>
+          <a:xfrm>
+            <a:off x="10018776" y="3273552"/>
+            <a:ext cx="816864" cy="146304"/>
+          </a:xfrm>
+          <a:prstGeom prst="rect">
+            <a:avLst/>
+          </a:prstGeom>
+          <a:noFill/>
+          <a:ln/>
+        </p:spPr>
+        <p:txBody>
+          <a:bodyPr wrap="square" lIns="0" tIns="0" rIns="0" bIns="0" rtlCol="0" anchor="ctr">
+            <a:normAutofit/>
+          </a:bodyPr>
+          <a:lstStyle/>
+          <a:p>
+            <a:pPr algn="ctr" indent="0" marL="0">
+              <a:buNone/>
+            </a:pPr>
+            <a:r>
+              <a:rPr lang="en-US" sz="880" b="1" dirty="0">
+                <a:solidFill>
+                  <a:srgbClr val="FFFFFF"/>
+                </a:solidFill>
+                <a:latin typeface="Aptos" pitchFamily="34" charset="0"/>
+                <a:ea typeface="Aptos" pitchFamily="34" charset="-122"/>
+                <a:cs typeface="Aptos" pitchFamily="34" charset="-120"/>
+              </a:rPr>
+              <a:t>Oversee</a:t>
+            </a:r>
+            <a:endParaRPr lang="en-US" sz="880" dirty="0"/>
+          </a:p>
+        </p:txBody>
+      </p:sp>
+      <p:sp>
+        <p:nvSpPr>
+          <p:cNvPr id="23" name="Text 21"/>
+          <p:cNvSpPr/>
+          <p:nvPr/>
+        </p:nvSpPr>
+        <p:spPr>
+          <a:xfrm>
+            <a:off x="7854696" y="3694176"/>
+            <a:ext cx="3035808" cy="206654"/>
+          </a:xfrm>
+          <a:prstGeom prst="rect">
+            <a:avLst/>
+          </a:prstGeom>
+          <a:noFill/>
+          <a:ln/>
+        </p:spPr>
+        <p:txBody>
+          <a:bodyPr wrap="square" lIns="254" tIns="254" rIns="254" bIns="254" rtlCol="0" anchor="t">
+            <a:normAutofit/>
+          </a:bodyPr>
+          <a:lstStyle/>
+          <a:p>
+            <a:pPr indent="0" marL="0">
+              <a:buNone/>
+            </a:pPr>
+            <a:r>
+              <a:rPr lang="en-US" sz="1120" dirty="0">
+                <a:solidFill>
+                  <a:srgbClr val="17364A"/>
+                </a:solidFill>
+                <a:latin typeface="Aptos" pitchFamily="34" charset="0"/>
+                <a:ea typeface="Aptos" pitchFamily="34" charset="-122"/>
+                <a:cs typeface="Aptos" pitchFamily="34" charset="-120"/>
+              </a:rPr>
+              <a:t>A proposed AI use should move through documented review before it becomes an operational workflow.</a:t>
+            </a:r>
+            <a:endParaRPr lang="en-US" sz="1120" dirty="0"/>
+          </a:p>
+        </p:txBody>
+      </p:sp>
+      <p:sp>
+        <p:nvSpPr>
+          <p:cNvPr id="24" name="Shape 22"/>
+          <p:cNvSpPr/>
+          <p:nvPr/>
+        </p:nvSpPr>
+        <p:spPr>
+          <a:xfrm>
+            <a:off x="7635240" y="4184294"/>
+            <a:ext cx="3474720" cy="1466698"/>
+          </a:xfrm>
+          <a:prstGeom prst="roundRect">
+            <a:avLst>
+              <a:gd name="adj" fmla="val 7481"/>
             </a:avLst>
           </a:prstGeom>
           <a:solidFill>
@@ -16761,13 +17193,13 @@
       </p:sp>
       <p:sp>
         <p:nvSpPr>
-          <p:cNvPr id="17" name="Text 15"/>
-          <p:cNvSpPr/>
-          <p:nvPr/>
-        </p:nvSpPr>
-        <p:spPr>
-          <a:xfrm>
-            <a:off x="7799832" y="4645152"/>
+          <p:cNvPr id="25" name="Text 23"/>
+          <p:cNvSpPr/>
+          <p:nvPr/>
+        </p:nvSpPr>
+        <p:spPr>
+          <a:xfrm>
+            <a:off x="7799832" y="4330598"/>
             <a:ext cx="3145536" cy="256032"/>
           </a:xfrm>
           <a:prstGeom prst="rect">
@@ -16800,14 +17232,14 @@
       </p:sp>
       <p:sp>
         <p:nvSpPr>
-          <p:cNvPr id="18" name="Text 16"/>
-          <p:cNvSpPr/>
-          <p:nvPr/>
-        </p:nvSpPr>
-        <p:spPr>
-          <a:xfrm>
-            <a:off x="7799832" y="4974336"/>
-            <a:ext cx="3145536" cy="576072"/>
+          <p:cNvPr id="26" name="Text 24"/>
+          <p:cNvSpPr/>
+          <p:nvPr/>
+        </p:nvSpPr>
+        <p:spPr>
+          <a:xfrm>
+            <a:off x="7799832" y="4659782"/>
+            <a:ext cx="3145536" cy="899770"/>
           </a:xfrm>
           <a:prstGeom prst="rect">
             <a:avLst/>
@@ -16833,7 +17265,7 @@
                 <a:ea typeface="Aptos" pitchFamily="34" charset="-122"/>
                 <a:cs typeface="Aptos" pitchFamily="34" charset="-120"/>
               </a:rPr>
-              <a:t>Translate this concept into clear decision rights, review steps, documentation expectations, and escalation paths before.</a:t>
+              <a:t>Translate this concept into clear decision rights, review steps, documentation expectations, and escalation paths before an AI-supported workflow is approved.</a:t>
             </a:r>
             <a:endParaRPr lang="en-US" sz="1320" dirty="0"/>
           </a:p>
@@ -17202,11 +17634,11 @@
         <p:spPr>
           <a:xfrm>
             <a:off x="7635240" y="1325880"/>
-            <a:ext cx="3474720" cy="1325880"/>
+            <a:ext cx="3474720" cy="1207008"/>
           </a:xfrm>
           <a:prstGeom prst="roundRect">
             <a:avLst>
-              <a:gd name="adj" fmla="val 8276"/>
+              <a:gd name="adj" fmla="val 9091"/>
             </a:avLst>
           </a:prstGeom>
           <a:solidFill>
@@ -17268,7 +17700,7 @@
         <p:spPr>
           <a:xfrm>
             <a:off x="7799832" y="1801368"/>
-            <a:ext cx="3145536" cy="758952"/>
+            <a:ext cx="3145536" cy="640080"/>
           </a:xfrm>
           <a:prstGeom prst="rect">
             <a:avLst/>
@@ -17294,7 +17726,7 @@
                 <a:ea typeface="Aptos" pitchFamily="34" charset="-122"/>
                 <a:cs typeface="Aptos" pitchFamily="34" charset="-120"/>
               </a:rPr>
-              <a:t>An AI assistant is approved to summarize case records for authorized disease investigators.</a:t>
+              <a:t>An AI assistant is approved to summarize case records for authorized disease.</a:t>
             </a:r>
             <a:endParaRPr lang="en-US" sz="1320" dirty="0"/>
           </a:p>
@@ -17308,12 +17740,12 @@
         </p:nvSpPr>
         <p:spPr>
           <a:xfrm>
-            <a:off x="7635240" y="2788920"/>
-            <a:ext cx="3474720" cy="1536192"/>
+            <a:off x="7635240" y="2670048"/>
+            <a:ext cx="3474720" cy="1377086"/>
           </a:xfrm>
           <a:prstGeom prst="roundRect">
             <a:avLst>
-              <a:gd name="adj" fmla="val 7143"/>
+              <a:gd name="adj" fmla="val 7968"/>
             </a:avLst>
           </a:prstGeom>
           <a:solidFill>
@@ -17335,7 +17767,7 @@
         </p:nvSpPr>
         <p:spPr>
           <a:xfrm>
-            <a:off x="7799832" y="2935224"/>
+            <a:off x="7799832" y="2816352"/>
             <a:ext cx="3145536" cy="256032"/>
           </a:xfrm>
           <a:prstGeom prst="rect">
@@ -17374,8 +17806,8 @@
         </p:nvSpPr>
         <p:spPr>
           <a:xfrm>
-            <a:off x="7818120" y="3300984"/>
-            <a:ext cx="3090672" cy="877824"/>
+            <a:off x="7818120" y="3182112"/>
+            <a:ext cx="3090672" cy="718718"/>
           </a:xfrm>
           <a:prstGeom prst="rect">
             <a:avLst/>
@@ -17432,12 +17864,12 @@
         </p:nvSpPr>
         <p:spPr>
           <a:xfrm>
-            <a:off x="7635240" y="4498848"/>
-            <a:ext cx="3474720" cy="1143000"/>
+            <a:off x="7635240" y="4184294"/>
+            <a:ext cx="3474720" cy="1466698"/>
           </a:xfrm>
           <a:prstGeom prst="roundRect">
             <a:avLst>
-              <a:gd name="adj" fmla="val 9600"/>
+              <a:gd name="adj" fmla="val 7481"/>
             </a:avLst>
           </a:prstGeom>
           <a:solidFill>
@@ -17459,7 +17891,7 @@
         </p:nvSpPr>
         <p:spPr>
           <a:xfrm>
-            <a:off x="7799832" y="4645152"/>
+            <a:off x="7799832" y="4330598"/>
             <a:ext cx="3145536" cy="256032"/>
           </a:xfrm>
           <a:prstGeom prst="rect">
@@ -17498,8 +17930,8 @@
         </p:nvSpPr>
         <p:spPr>
           <a:xfrm>
-            <a:off x="7799832" y="4974336"/>
-            <a:ext cx="3145536" cy="576072"/>
+            <a:off x="7799832" y="4659782"/>
+            <a:ext cx="3145536" cy="899770"/>
           </a:xfrm>
           <a:prstGeom prst="rect">
             <a:avLst/>
@@ -17525,7 +17957,7 @@
                 <a:ea typeface="Aptos" pitchFamily="34" charset="-122"/>
                 <a:cs typeface="Aptos" pitchFamily="34" charset="-120"/>
               </a:rPr>
-              <a:t>Use the concept to clarify workflow changes, dependencies, staffing, procurement requirements, training needs, and.</a:t>
+              <a:t>Use the concept to clarify workflow changes, dependencies, staffing, procurement requirements, training needs, and implementation checkpoints.</a:t>
             </a:r>
             <a:endParaRPr lang="en-US" sz="1320" dirty="0"/>
           </a:p>
@@ -17894,11 +18326,11 @@
         <p:spPr>
           <a:xfrm>
             <a:off x="7635240" y="1325880"/>
-            <a:ext cx="3474720" cy="1325880"/>
+            <a:ext cx="3474720" cy="1207008"/>
           </a:xfrm>
           <a:prstGeom prst="roundRect">
             <a:avLst>
-              <a:gd name="adj" fmla="val 8276"/>
+              <a:gd name="adj" fmla="val 9091"/>
             </a:avLst>
           </a:prstGeom>
           <a:solidFill>
@@ -17960,7 +18392,7 @@
         <p:spPr>
           <a:xfrm>
             <a:off x="7799832" y="1801368"/>
-            <a:ext cx="3145536" cy="758952"/>
+            <a:ext cx="3145536" cy="640080"/>
           </a:xfrm>
           <a:prstGeom prst="rect">
             <a:avLst/>
@@ -18000,12 +18432,12 @@
         </p:nvSpPr>
         <p:spPr>
           <a:xfrm>
-            <a:off x="7635240" y="2788920"/>
-            <a:ext cx="3474720" cy="1536192"/>
+            <a:off x="7635240" y="2670048"/>
+            <a:ext cx="3474720" cy="1377086"/>
           </a:xfrm>
           <a:prstGeom prst="roundRect">
             <a:avLst>
-              <a:gd name="adj" fmla="val 7143"/>
+              <a:gd name="adj" fmla="val 7968"/>
             </a:avLst>
           </a:prstGeom>
           <a:solidFill>
@@ -18027,8 +18459,8 @@
         </p:nvSpPr>
         <p:spPr>
           <a:xfrm>
-            <a:off x="7799832" y="2935224"/>
-            <a:ext cx="3145536" cy="256032"/>
+            <a:off x="7799832" y="2798064"/>
+            <a:ext cx="3145536" cy="237744"/>
           </a:xfrm>
           <a:prstGeom prst="rect">
             <a:avLst/>
@@ -18044,7 +18476,7 @@
               <a:buNone/>
             </a:pPr>
             <a:r>
-              <a:rPr lang="en-US" sz="1300" b="1" dirty="0">
+              <a:rPr lang="en-US" sz="1250" b="1" dirty="0">
                 <a:solidFill>
                   <a:srgbClr val="0068B7"/>
                 </a:solidFill>
@@ -18052,101 +18484,317 @@
                 <a:ea typeface="Aptos" pitchFamily="34" charset="-122"/>
                 <a:cs typeface="Aptos" pitchFamily="34" charset="-120"/>
               </a:rPr>
-              <a:t>Concept checkpoints</a:t>
-            </a:r>
-            <a:endParaRPr lang="en-US" sz="1300" dirty="0"/>
-          </a:p>
-        </p:txBody>
-      </p:sp>
-      <p:sp>
-        <p:nvSpPr>
-          <p:cNvPr id="15" name="Text 13"/>
-          <p:cNvSpPr/>
-          <p:nvPr/>
-        </p:nvSpPr>
-        <p:spPr>
-          <a:xfrm>
-            <a:off x="7818120" y="3300984"/>
-            <a:ext cx="3090672" cy="877824"/>
-          </a:xfrm>
-          <a:prstGeom prst="rect">
-            <a:avLst/>
-          </a:prstGeom>
-          <a:noFill/>
-          <a:ln/>
-        </p:spPr>
-        <p:txBody>
-          <a:bodyPr wrap="square" lIns="508" tIns="508" rIns="508" bIns="508" rtlCol="0" anchor="t">
+              <a:t>Implementation path</a:t>
+            </a:r>
+            <a:endParaRPr lang="en-US" sz="1250" dirty="0"/>
+          </a:p>
+        </p:txBody>
+      </p:sp>
+      <p:sp>
+        <p:nvSpPr>
+          <p:cNvPr id="15" name="Shape 13"/>
+          <p:cNvSpPr/>
+          <p:nvPr/>
+        </p:nvSpPr>
+        <p:spPr>
+          <a:xfrm>
+            <a:off x="8763000" y="3351276"/>
+            <a:ext cx="164592" cy="0"/>
+          </a:xfrm>
+          <a:prstGeom prst="line">
+            <a:avLst/>
+          </a:prstGeom>
+          <a:noFill/>
+          <a:ln w="15240">
+            <a:solidFill>
+              <a:srgbClr val="8ABBD8"/>
+            </a:solidFill>
+            <a:prstDash val="solid"/>
+          </a:ln>
+        </p:spPr>
+      </p:sp>
+      <p:sp>
+        <p:nvSpPr>
+          <p:cNvPr id="16" name="Shape 14"/>
+          <p:cNvSpPr/>
+          <p:nvPr/>
+        </p:nvSpPr>
+        <p:spPr>
+          <a:xfrm>
+            <a:off x="7872984" y="3200400"/>
+            <a:ext cx="890016" cy="301752"/>
+          </a:xfrm>
+          <a:prstGeom prst="roundRect">
+            <a:avLst>
+              <a:gd name="adj" fmla="val 24242"/>
+            </a:avLst>
+          </a:prstGeom>
+          <a:solidFill>
+            <a:srgbClr val="0068B7"/>
+          </a:solidFill>
+          <a:ln w="12700">
+            <a:solidFill>
+              <a:srgbClr val="0068B7"/>
+            </a:solidFill>
+            <a:prstDash val="solid"/>
+          </a:ln>
+        </p:spPr>
+      </p:sp>
+      <p:sp>
+        <p:nvSpPr>
+          <p:cNvPr id="17" name="Text 15"/>
+          <p:cNvSpPr/>
+          <p:nvPr/>
+        </p:nvSpPr>
+        <p:spPr>
+          <a:xfrm>
+            <a:off x="7909560" y="3273552"/>
+            <a:ext cx="816864" cy="146304"/>
+          </a:xfrm>
+          <a:prstGeom prst="rect">
+            <a:avLst/>
+          </a:prstGeom>
+          <a:noFill/>
+          <a:ln/>
+        </p:spPr>
+        <p:txBody>
+          <a:bodyPr wrap="square" lIns="0" tIns="0" rIns="0" bIns="0" rtlCol="0" anchor="ctr">
             <a:normAutofit/>
           </a:bodyPr>
           <a:lstStyle/>
           <a:p>
-            <a:pPr indent="0" marL="0">
-              <a:buNone/>
-            </a:pPr>
-            <a:r>
-              <a:rPr lang="en-US" sz="1220" dirty="0">
-                <a:solidFill>
-                  <a:srgbClr val="17364A"/>
-                </a:solidFill>
-                <a:latin typeface="Aptos" pitchFamily="34" charset="0"/>
-                <a:ea typeface="Aptos" pitchFamily="34" charset="-122"/>
-                <a:cs typeface="Aptos" pitchFamily="34" charset="-120"/>
-              </a:rPr>
-              <a:t>A staff member may log in through single sign-on, an AI service.</a:t>
-            </a:r>
-            <a:endParaRPr lang="en-US" sz="1220" dirty="0"/>
-          </a:p>
-          <a:p>
-            <a:pPr indent="0" marL="0">
-              <a:buNone/>
-            </a:pPr>
-            <a:r>
-              <a:rPr lang="en-US" sz="1220" dirty="0">
-                <a:solidFill>
-                  <a:srgbClr val="17364A"/>
-                </a:solidFill>
-                <a:latin typeface="Aptos" pitchFamily="34" charset="0"/>
-                <a:ea typeface="Aptos" pitchFamily="34" charset="-122"/>
-                <a:cs typeface="Aptos" pitchFamily="34" charset="-120"/>
-              </a:rPr>
-              <a:t>Agencies should avoid shared accounts or overly broad service.</a:t>
-            </a:r>
-            <a:endParaRPr lang="en-US" sz="1220" dirty="0"/>
-          </a:p>
-          <a:p>
-            <a:pPr indent="0" marL="0">
-              <a:buNone/>
-            </a:pPr>
-            <a:r>
-              <a:rPr lang="en-US" sz="1220" dirty="0">
-                <a:solidFill>
-                  <a:srgbClr val="17364A"/>
-                </a:solidFill>
-                <a:latin typeface="Aptos" pitchFamily="34" charset="0"/>
-                <a:ea typeface="Aptos" pitchFamily="34" charset="-122"/>
-                <a:cs typeface="Aptos" pitchFamily="34" charset="-120"/>
-              </a:rPr>
-              <a:t>Authentication verifies who or what is using the system, but.</a:t>
-            </a:r>
-            <a:endParaRPr lang="en-US" sz="1220" dirty="0"/>
-          </a:p>
-        </p:txBody>
-      </p:sp>
-      <p:sp>
-        <p:nvSpPr>
-          <p:cNvPr id="16" name="Shape 14"/>
-          <p:cNvSpPr/>
-          <p:nvPr/>
-        </p:nvSpPr>
-        <p:spPr>
-          <a:xfrm>
-            <a:off x="7635240" y="4498848"/>
-            <a:ext cx="3474720" cy="1143000"/>
+            <a:pPr algn="ctr" indent="0" marL="0">
+              <a:buNone/>
+            </a:pPr>
+            <a:r>
+              <a:rPr lang="en-US" sz="880" b="1" dirty="0">
+                <a:solidFill>
+                  <a:srgbClr val="FFFFFF"/>
+                </a:solidFill>
+                <a:latin typeface="Aptos" pitchFamily="34" charset="0"/>
+                <a:ea typeface="Aptos" pitchFamily="34" charset="-122"/>
+                <a:cs typeface="Aptos" pitchFamily="34" charset="-120"/>
+              </a:rPr>
+              <a:t>Need</a:t>
+            </a:r>
+            <a:endParaRPr lang="en-US" sz="880" dirty="0"/>
+          </a:p>
+        </p:txBody>
+      </p:sp>
+      <p:sp>
+        <p:nvSpPr>
+          <p:cNvPr id="18" name="Shape 16"/>
+          <p:cNvSpPr/>
+          <p:nvPr/>
+        </p:nvSpPr>
+        <p:spPr>
+          <a:xfrm>
+            <a:off x="9817608" y="3351276"/>
+            <a:ext cx="164592" cy="0"/>
+          </a:xfrm>
+          <a:prstGeom prst="line">
+            <a:avLst/>
+          </a:prstGeom>
+          <a:noFill/>
+          <a:ln w="15240">
+            <a:solidFill>
+              <a:srgbClr val="8ABBD8"/>
+            </a:solidFill>
+            <a:prstDash val="solid"/>
+          </a:ln>
+        </p:spPr>
+      </p:sp>
+      <p:sp>
+        <p:nvSpPr>
+          <p:cNvPr id="19" name="Shape 17"/>
+          <p:cNvSpPr/>
+          <p:nvPr/>
+        </p:nvSpPr>
+        <p:spPr>
+          <a:xfrm>
+            <a:off x="8927592" y="3200400"/>
+            <a:ext cx="890016" cy="301752"/>
           </a:xfrm>
           <a:prstGeom prst="roundRect">
             <a:avLst>
-              <a:gd name="adj" fmla="val 9600"/>
+              <a:gd name="adj" fmla="val 24242"/>
+            </a:avLst>
+          </a:prstGeom>
+          <a:solidFill>
+            <a:srgbClr val="2F8A28"/>
+          </a:solidFill>
+          <a:ln w="12700">
+            <a:solidFill>
+              <a:srgbClr val="2F8A28"/>
+            </a:solidFill>
+            <a:prstDash val="solid"/>
+          </a:ln>
+        </p:spPr>
+      </p:sp>
+      <p:sp>
+        <p:nvSpPr>
+          <p:cNvPr id="20" name="Text 18"/>
+          <p:cNvSpPr/>
+          <p:nvPr/>
+        </p:nvSpPr>
+        <p:spPr>
+          <a:xfrm>
+            <a:off x="8964168" y="3273552"/>
+            <a:ext cx="816864" cy="146304"/>
+          </a:xfrm>
+          <a:prstGeom prst="rect">
+            <a:avLst/>
+          </a:prstGeom>
+          <a:noFill/>
+          <a:ln/>
+        </p:spPr>
+        <p:txBody>
+          <a:bodyPr wrap="square" lIns="0" tIns="0" rIns="0" bIns="0" rtlCol="0" anchor="ctr">
+            <a:normAutofit/>
+          </a:bodyPr>
+          <a:lstStyle/>
+          <a:p>
+            <a:pPr algn="ctr" indent="0" marL="0">
+              <a:buNone/>
+            </a:pPr>
+            <a:r>
+              <a:rPr lang="en-US" sz="880" b="1" dirty="0">
+                <a:solidFill>
+                  <a:srgbClr val="FFFFFF"/>
+                </a:solidFill>
+                <a:latin typeface="Aptos" pitchFamily="34" charset="0"/>
+                <a:ea typeface="Aptos" pitchFamily="34" charset="-122"/>
+                <a:cs typeface="Aptos" pitchFamily="34" charset="-120"/>
+              </a:rPr>
+              <a:t>Build</a:t>
+            </a:r>
+            <a:endParaRPr lang="en-US" sz="880" dirty="0"/>
+          </a:p>
+        </p:txBody>
+      </p:sp>
+      <p:sp>
+        <p:nvSpPr>
+          <p:cNvPr id="21" name="Shape 19"/>
+          <p:cNvSpPr/>
+          <p:nvPr/>
+        </p:nvSpPr>
+        <p:spPr>
+          <a:xfrm>
+            <a:off x="9982200" y="3200400"/>
+            <a:ext cx="890016" cy="301752"/>
+          </a:xfrm>
+          <a:prstGeom prst="roundRect">
+            <a:avLst>
+              <a:gd name="adj" fmla="val 24242"/>
+            </a:avLst>
+          </a:prstGeom>
+          <a:solidFill>
+            <a:srgbClr val="6A4CA3"/>
+          </a:solidFill>
+          <a:ln w="12700">
+            <a:solidFill>
+              <a:srgbClr val="6A4CA3"/>
+            </a:solidFill>
+            <a:prstDash val="solid"/>
+          </a:ln>
+        </p:spPr>
+      </p:sp>
+      <p:sp>
+        <p:nvSpPr>
+          <p:cNvPr id="22" name="Text 20"/>
+          <p:cNvSpPr/>
+          <p:nvPr/>
+        </p:nvSpPr>
+        <p:spPr>
+          <a:xfrm>
+            <a:off x="10018776" y="3273552"/>
+            <a:ext cx="816864" cy="146304"/>
+          </a:xfrm>
+          <a:prstGeom prst="rect">
+            <a:avLst/>
+          </a:prstGeom>
+          <a:noFill/>
+          <a:ln/>
+        </p:spPr>
+        <p:txBody>
+          <a:bodyPr wrap="square" lIns="0" tIns="0" rIns="0" bIns="0" rtlCol="0" anchor="ctr">
+            <a:normAutofit/>
+          </a:bodyPr>
+          <a:lstStyle/>
+          <a:p>
+            <a:pPr algn="ctr" indent="0" marL="0">
+              <a:buNone/>
+            </a:pPr>
+            <a:r>
+              <a:rPr lang="en-US" sz="880" b="1" dirty="0">
+                <a:solidFill>
+                  <a:srgbClr val="FFFFFF"/>
+                </a:solidFill>
+                <a:latin typeface="Aptos" pitchFamily="34" charset="0"/>
+                <a:ea typeface="Aptos" pitchFamily="34" charset="-122"/>
+                <a:cs typeface="Aptos" pitchFamily="34" charset="-120"/>
+              </a:rPr>
+              <a:t>Adopt</a:t>
+            </a:r>
+            <a:endParaRPr lang="en-US" sz="880" dirty="0"/>
+          </a:p>
+        </p:txBody>
+      </p:sp>
+      <p:sp>
+        <p:nvSpPr>
+          <p:cNvPr id="23" name="Text 21"/>
+          <p:cNvSpPr/>
+          <p:nvPr/>
+        </p:nvSpPr>
+        <p:spPr>
+          <a:xfrm>
+            <a:off x="7854696" y="3694176"/>
+            <a:ext cx="3035808" cy="206654"/>
+          </a:xfrm>
+          <a:prstGeom prst="rect">
+            <a:avLst/>
+          </a:prstGeom>
+          <a:noFill/>
+          <a:ln/>
+        </p:spPr>
+        <p:txBody>
+          <a:bodyPr wrap="square" lIns="254" tIns="254" rIns="254" bIns="254" rtlCol="0" anchor="t">
+            <a:normAutofit/>
+          </a:bodyPr>
+          <a:lstStyle/>
+          <a:p>
+            <a:pPr indent="0" marL="0">
+              <a:buNone/>
+            </a:pPr>
+            <a:r>
+              <a:rPr lang="en-US" sz="1120" dirty="0">
+                <a:solidFill>
+                  <a:srgbClr val="17364A"/>
+                </a:solidFill>
+                <a:latin typeface="Aptos" pitchFamily="34" charset="0"/>
+                <a:ea typeface="Aptos" pitchFamily="34" charset="-122"/>
+                <a:cs typeface="Aptos" pitchFamily="34" charset="-120"/>
+              </a:rPr>
+              <a:t>Implementation work should make dependencies, approvals, training, and sustainment visible before launch.</a:t>
+            </a:r>
+            <a:endParaRPr lang="en-US" sz="1120" dirty="0"/>
+          </a:p>
+        </p:txBody>
+      </p:sp>
+      <p:sp>
+        <p:nvSpPr>
+          <p:cNvPr id="24" name="Shape 22"/>
+          <p:cNvSpPr/>
+          <p:nvPr/>
+        </p:nvSpPr>
+        <p:spPr>
+          <a:xfrm>
+            <a:off x="7635240" y="4184294"/>
+            <a:ext cx="3474720" cy="1466698"/>
+          </a:xfrm>
+          <a:prstGeom prst="roundRect">
+            <a:avLst>
+              <a:gd name="adj" fmla="val 7481"/>
             </a:avLst>
           </a:prstGeom>
           <a:solidFill>
@@ -18162,13 +18810,13 @@
       </p:sp>
       <p:sp>
         <p:nvSpPr>
-          <p:cNvPr id="17" name="Text 15"/>
-          <p:cNvSpPr/>
-          <p:nvPr/>
-        </p:nvSpPr>
-        <p:spPr>
-          <a:xfrm>
-            <a:off x="7799832" y="4645152"/>
+          <p:cNvPr id="25" name="Text 23"/>
+          <p:cNvSpPr/>
+          <p:nvPr/>
+        </p:nvSpPr>
+        <p:spPr>
+          <a:xfrm>
+            <a:off x="7799832" y="4330598"/>
             <a:ext cx="3145536" cy="256032"/>
           </a:xfrm>
           <a:prstGeom prst="rect">
@@ -18201,14 +18849,14 @@
       </p:sp>
       <p:sp>
         <p:nvSpPr>
-          <p:cNvPr id="18" name="Text 16"/>
-          <p:cNvSpPr/>
-          <p:nvPr/>
-        </p:nvSpPr>
-        <p:spPr>
-          <a:xfrm>
-            <a:off x="7799832" y="4974336"/>
-            <a:ext cx="3145536" cy="576072"/>
+          <p:cNvPr id="26" name="Text 24"/>
+          <p:cNvSpPr/>
+          <p:nvPr/>
+        </p:nvSpPr>
+        <p:spPr>
+          <a:xfrm>
+            <a:off x="7799832" y="4659782"/>
+            <a:ext cx="3145536" cy="899770"/>
           </a:xfrm>
           <a:prstGeom prst="rect">
             <a:avLst/>
@@ -18234,7 +18882,7 @@
                 <a:ea typeface="Aptos" pitchFamily="34" charset="-122"/>
                 <a:cs typeface="Aptos" pitchFamily="34" charset="-120"/>
               </a:rPr>
-              <a:t>Use the concept to clarify workflow changes, dependencies, staffing, procurement requirements, training needs, and.</a:t>
+              <a:t>Use the concept to clarify workflow changes, dependencies, staffing, procurement requirements, training needs, and implementation checkpoints.</a:t>
             </a:r>
             <a:endParaRPr lang="en-US" sz="1320" dirty="0"/>
           </a:p>

--- a/downloads/presentations/modules/gov-350.pptx
+++ b/downloads/presentations/modules/gov-350.pptx
@@ -3437,8 +3437,8 @@
         </p:nvSpPr>
         <p:spPr>
           <a:xfrm>
-            <a:off x="868680" y="1508760"/>
-            <a:ext cx="6309360" cy="4160520"/>
+            <a:off x="822960" y="1463040"/>
+            <a:ext cx="6565392" cy="4343400"/>
           </a:xfrm>
           <a:prstGeom prst="rect">
             <a:avLst/>
@@ -3456,7 +3456,7 @@
               <a:buNone/>
             </a:pPr>
             <a:r>
-              <a:rPr lang="en-US" sz="2100" dirty="0">
+              <a:rPr lang="en-US" sz="1920" dirty="0">
                 <a:solidFill>
                   <a:srgbClr val="003A63"/>
                 </a:solidFill>
@@ -3466,14 +3466,14 @@
               </a:rPr>
               <a:t>• Audit logs should make AI access visible.</a:t>
             </a:r>
-            <a:endParaRPr lang="en-US" sz="2100" dirty="0"/>
-          </a:p>
-          <a:p>
-            <a:pPr indent="0" marL="0">
-              <a:buNone/>
-            </a:pPr>
-            <a:r>
-              <a:rPr lang="en-US" sz="2100" dirty="0">
+            <a:endParaRPr lang="en-US" sz="1920" dirty="0"/>
+          </a:p>
+          <a:p>
+            <a:pPr indent="0" marL="0">
+              <a:buNone/>
+            </a:pPr>
+            <a:r>
+              <a:rPr lang="en-US" sz="1920" dirty="0">
                 <a:solidFill>
                   <a:srgbClr val="003A63"/>
                 </a:solidFill>
@@ -3481,16 +3481,16 @@
                 <a:ea typeface="Aptos" pitchFamily="34" charset="-122"/>
                 <a:cs typeface="Aptos" pitchFamily="34" charset="-120"/>
               </a:rPr>
-              <a:t>• Logs should capture user identity, service identity, data accessed, action taken, time, output.</a:t>
-            </a:r>
-            <a:endParaRPr lang="en-US" sz="2100" dirty="0"/>
-          </a:p>
-          <a:p>
-            <a:pPr indent="0" marL="0">
-              <a:buNone/>
-            </a:pPr>
-            <a:r>
-              <a:rPr lang="en-US" sz="2100" dirty="0">
+              <a:t>• Logs should capture user identity, service identity, data accessed, action.</a:t>
+            </a:r>
+            <a:endParaRPr lang="en-US" sz="1920" dirty="0"/>
+          </a:p>
+          <a:p>
+            <a:pPr indent="0" marL="0">
+              <a:buNone/>
+            </a:pPr>
+            <a:r>
+              <a:rPr lang="en-US" sz="1920" dirty="0">
                 <a:solidFill>
                   <a:srgbClr val="003A63"/>
                 </a:solidFill>
@@ -3498,9 +3498,9 @@
                 <a:ea typeface="Aptos" pitchFamily="34" charset="-122"/>
                 <a:cs typeface="Aptos" pitchFamily="34" charset="-120"/>
               </a:rPr>
-              <a:t>• For agentic workflows, logs should also show tool calls, attempted actions, blocked actions,.</a:t>
-            </a:r>
-            <a:endParaRPr lang="en-US" sz="2100" dirty="0"/>
+              <a:t>• For agentic workflows, logs should also show tool calls, attempted actions,.</a:t>
+            </a:r>
+            <a:endParaRPr lang="en-US" sz="1920" dirty="0"/>
           </a:p>
         </p:txBody>
       </p:sp>
@@ -3512,12 +3512,12 @@
         </p:nvSpPr>
         <p:spPr>
           <a:xfrm>
-            <a:off x="7635240" y="1325880"/>
-            <a:ext cx="3474720" cy="1207008"/>
+            <a:off x="7543800" y="1325880"/>
+            <a:ext cx="3611880" cy="1261872"/>
           </a:xfrm>
           <a:prstGeom prst="roundRect">
             <a:avLst>
-              <a:gd name="adj" fmla="val 9091"/>
+              <a:gd name="adj" fmla="val 8696"/>
             </a:avLst>
           </a:prstGeom>
           <a:solidFill>
@@ -3539,8 +3539,8 @@
         </p:nvSpPr>
         <p:spPr>
           <a:xfrm>
-            <a:off x="7799832" y="1472184"/>
-            <a:ext cx="3145536" cy="256032"/>
+            <a:off x="7708392" y="1453896"/>
+            <a:ext cx="3282696" cy="228600"/>
           </a:xfrm>
           <a:prstGeom prst="rect">
             <a:avLst/>
@@ -3556,7 +3556,7 @@
               <a:buNone/>
             </a:pPr>
             <a:r>
-              <a:rPr lang="en-US" sz="1300" b="1" dirty="0">
+              <a:rPr lang="en-US" sz="1220" b="1" dirty="0">
                 <a:solidFill>
                   <a:srgbClr val="0068B7"/>
                 </a:solidFill>
@@ -3566,7 +3566,7 @@
               </a:rPr>
               <a:t>Implementation cue</a:t>
             </a:r>
-            <a:endParaRPr lang="en-US" sz="1300" dirty="0"/>
+            <a:endParaRPr lang="en-US" sz="1220" dirty="0"/>
           </a:p>
         </p:txBody>
       </p:sp>
@@ -3578,8 +3578,8 @@
         </p:nvSpPr>
         <p:spPr>
           <a:xfrm>
-            <a:off x="7799832" y="1801368"/>
-            <a:ext cx="3145536" cy="640080"/>
+            <a:off x="7708392" y="1764792"/>
+            <a:ext cx="3282696" cy="749808"/>
           </a:xfrm>
           <a:prstGeom prst="rect">
             <a:avLst/>
@@ -3597,7 +3597,7 @@
               <a:buNone/>
             </a:pPr>
             <a:r>
-              <a:rPr lang="en-US" sz="1320" dirty="0">
+              <a:rPr lang="en-US" sz="1220" dirty="0">
                 <a:solidFill>
                   <a:srgbClr val="17364A"/>
                 </a:solidFill>
@@ -3607,7 +3607,7 @@
               </a:rPr>
               <a:t>Audit logs should make AI access visible.</a:t>
             </a:r>
-            <a:endParaRPr lang="en-US" sz="1320" dirty="0"/>
+            <a:endParaRPr lang="en-US" sz="1220" dirty="0"/>
           </a:p>
         </p:txBody>
       </p:sp>
@@ -3619,12 +3619,12 @@
         </p:nvSpPr>
         <p:spPr>
           <a:xfrm>
-            <a:off x="7635240" y="2670048"/>
-            <a:ext cx="3474720" cy="1377086"/>
+            <a:off x="7543800" y="2724912"/>
+            <a:ext cx="3611880" cy="1527048"/>
           </a:xfrm>
           <a:prstGeom prst="roundRect">
             <a:avLst>
-              <a:gd name="adj" fmla="val 7968"/>
+              <a:gd name="adj" fmla="val 7186"/>
             </a:avLst>
           </a:prstGeom>
           <a:solidFill>
@@ -3646,8 +3646,8 @@
         </p:nvSpPr>
         <p:spPr>
           <a:xfrm>
-            <a:off x="7799832" y="2816352"/>
-            <a:ext cx="3145536" cy="256032"/>
+            <a:off x="7708392" y="2852928"/>
+            <a:ext cx="3282696" cy="228600"/>
           </a:xfrm>
           <a:prstGeom prst="rect">
             <a:avLst/>
@@ -3663,7 +3663,7 @@
               <a:buNone/>
             </a:pPr>
             <a:r>
-              <a:rPr lang="en-US" sz="1300" b="1" dirty="0">
+              <a:rPr lang="en-US" sz="1220" b="1" dirty="0">
                 <a:solidFill>
                   <a:srgbClr val="0068B7"/>
                 </a:solidFill>
@@ -3673,7 +3673,7 @@
               </a:rPr>
               <a:t>Concept checkpoints</a:t>
             </a:r>
-            <a:endParaRPr lang="en-US" sz="1300" dirty="0"/>
+            <a:endParaRPr lang="en-US" sz="1220" dirty="0"/>
           </a:p>
         </p:txBody>
       </p:sp>
@@ -3685,8 +3685,8 @@
         </p:nvSpPr>
         <p:spPr>
           <a:xfrm>
-            <a:off x="7818120" y="3182112"/>
-            <a:ext cx="3090672" cy="718718"/>
+            <a:off x="7726680" y="3182112"/>
+            <a:ext cx="3227832" cy="960120"/>
           </a:xfrm>
           <a:prstGeom prst="rect">
             <a:avLst/>
@@ -3704,7 +3704,7 @@
               <a:buNone/>
             </a:pPr>
             <a:r>
-              <a:rPr lang="en-US" sz="1220" dirty="0">
+              <a:rPr lang="en-US" sz="1140" dirty="0">
                 <a:solidFill>
                   <a:srgbClr val="17364A"/>
                 </a:solidFill>
@@ -3712,16 +3712,16 @@
                 <a:ea typeface="Aptos" pitchFamily="34" charset="-122"/>
                 <a:cs typeface="Aptos" pitchFamily="34" charset="-120"/>
               </a:rPr>
-              <a:t>Logs should capture user identity, service identity, data.</a:t>
-            </a:r>
-            <a:endParaRPr lang="en-US" sz="1220" dirty="0"/>
-          </a:p>
-          <a:p>
-            <a:pPr indent="0" marL="0">
-              <a:buNone/>
-            </a:pPr>
-            <a:r>
-              <a:rPr lang="en-US" sz="1220" dirty="0">
+              <a:t>Logs should capture user identity, service.</a:t>
+            </a:r>
+            <a:endParaRPr lang="en-US" sz="1140" dirty="0"/>
+          </a:p>
+          <a:p>
+            <a:pPr indent="0" marL="0">
+              <a:buNone/>
+            </a:pPr>
+            <a:r>
+              <a:rPr lang="en-US" sz="1140" dirty="0">
                 <a:solidFill>
                   <a:srgbClr val="17364A"/>
                 </a:solidFill>
@@ -3729,9 +3729,9 @@
                 <a:ea typeface="Aptos" pitchFamily="34" charset="-122"/>
                 <a:cs typeface="Aptos" pitchFamily="34" charset="-120"/>
               </a:rPr>
-              <a:t>For agentic workflows, logs should also show tool calls, attempted.</a:t>
-            </a:r>
-            <a:endParaRPr lang="en-US" sz="1220" dirty="0"/>
+              <a:t>For agentic workflows, logs should also show tool.</a:t>
+            </a:r>
+            <a:endParaRPr lang="en-US" sz="1140" dirty="0"/>
           </a:p>
         </p:txBody>
       </p:sp>
@@ -3743,12 +3743,12 @@
         </p:nvSpPr>
         <p:spPr>
           <a:xfrm>
-            <a:off x="7635240" y="4184294"/>
-            <a:ext cx="3474720" cy="1466698"/>
+            <a:off x="7543800" y="4389120"/>
+            <a:ext cx="3611880" cy="1261872"/>
           </a:xfrm>
           <a:prstGeom prst="roundRect">
             <a:avLst>
-              <a:gd name="adj" fmla="val 7481"/>
+              <a:gd name="adj" fmla="val 8696"/>
             </a:avLst>
           </a:prstGeom>
           <a:solidFill>
@@ -3770,8 +3770,8 @@
         </p:nvSpPr>
         <p:spPr>
           <a:xfrm>
-            <a:off x="7799832" y="4330598"/>
-            <a:ext cx="3145536" cy="256032"/>
+            <a:off x="7708392" y="4517136"/>
+            <a:ext cx="3282696" cy="228600"/>
           </a:xfrm>
           <a:prstGeom prst="rect">
             <a:avLst/>
@@ -3787,7 +3787,7 @@
               <a:buNone/>
             </a:pPr>
             <a:r>
-              <a:rPr lang="en-US" sz="1300" b="1" dirty="0">
+              <a:rPr lang="en-US" sz="1220" b="1" dirty="0">
                 <a:solidFill>
                   <a:srgbClr val="0068B7"/>
                 </a:solidFill>
@@ -3797,7 +3797,7 @@
               </a:rPr>
               <a:t>Next action</a:t>
             </a:r>
-            <a:endParaRPr lang="en-US" sz="1300" dirty="0"/>
+            <a:endParaRPr lang="en-US" sz="1220" dirty="0"/>
           </a:p>
         </p:txBody>
       </p:sp>
@@ -3809,8 +3809,8 @@
         </p:nvSpPr>
         <p:spPr>
           <a:xfrm>
-            <a:off x="7799832" y="4659782"/>
-            <a:ext cx="3145536" cy="899770"/>
+            <a:off x="7708392" y="4828032"/>
+            <a:ext cx="3282696" cy="749808"/>
           </a:xfrm>
           <a:prstGeom prst="rect">
             <a:avLst/>
@@ -3828,7 +3828,7 @@
               <a:buNone/>
             </a:pPr>
             <a:r>
-              <a:rPr lang="en-US" sz="1320" dirty="0">
+              <a:rPr lang="en-US" sz="1220" dirty="0">
                 <a:solidFill>
                   <a:srgbClr val="17364A"/>
                 </a:solidFill>
@@ -3836,9 +3836,9 @@
                 <a:ea typeface="Aptos" pitchFamily="34" charset="-122"/>
                 <a:cs typeface="Aptos" pitchFamily="34" charset="-120"/>
               </a:rPr>
-              <a:t>Use the concept to clarify workflow changes, dependencies, staffing, procurement requirements, training needs, and implementation checkpoints.</a:t>
-            </a:r>
-            <a:endParaRPr lang="en-US" sz="1320" dirty="0"/>
+              <a:t>Use the concept to clarify workflow changes, dependencies, staffing, procurement.</a:t>
+            </a:r>
+            <a:endParaRPr lang="en-US" sz="1220" dirty="0"/>
           </a:p>
         </p:txBody>
       </p:sp>
@@ -4129,8 +4129,8 @@
         </p:nvSpPr>
         <p:spPr>
           <a:xfrm>
-            <a:off x="868680" y="1508760"/>
-            <a:ext cx="6309360" cy="4160520"/>
+            <a:off x="822960" y="1463040"/>
+            <a:ext cx="6565392" cy="4343400"/>
           </a:xfrm>
           <a:prstGeom prst="rect">
             <a:avLst/>
@@ -4148,7 +4148,7 @@
               <a:buNone/>
             </a:pPr>
             <a:r>
-              <a:rPr lang="en-US" sz="2100" dirty="0">
+              <a:rPr lang="en-US" sz="1920" dirty="0">
                 <a:solidFill>
                   <a:srgbClr val="003A63"/>
                 </a:solidFill>
@@ -4158,14 +4158,14 @@
               </a:rPr>
               <a:t>• Risks and failure modes include the following:</a:t>
             </a:r>
-            <a:endParaRPr lang="en-US" sz="2100" dirty="0"/>
-          </a:p>
-          <a:p>
-            <a:pPr indent="0" marL="0">
-              <a:buNone/>
-            </a:pPr>
-            <a:r>
-              <a:rPr lang="en-US" sz="2100" dirty="0">
+            <a:endParaRPr lang="en-US" sz="1920" dirty="0"/>
+          </a:p>
+          <a:p>
+            <a:pPr indent="0" marL="0">
+              <a:buNone/>
+            </a:pPr>
+            <a:r>
+              <a:rPr lang="en-US" sz="1920" dirty="0">
                 <a:solidFill>
                   <a:srgbClr val="003A63"/>
                 </a:solidFill>
@@ -4175,14 +4175,14 @@
               </a:rPr>
               <a:t>• Service accounts with broad access to sensitive data.</a:t>
             </a:r>
-            <a:endParaRPr lang="en-US" sz="2100" dirty="0"/>
-          </a:p>
-          <a:p>
-            <a:pPr indent="0" marL="0">
-              <a:buNone/>
-            </a:pPr>
-            <a:r>
-              <a:rPr lang="en-US" sz="2100" dirty="0">
+            <a:endParaRPr lang="en-US" sz="1920" dirty="0"/>
+          </a:p>
+          <a:p>
+            <a:pPr indent="0" marL="0">
+              <a:buNone/>
+            </a:pPr>
+            <a:r>
+              <a:rPr lang="en-US" sz="1920" dirty="0">
                 <a:solidFill>
                   <a:srgbClr val="003A63"/>
                 </a:solidFill>
@@ -4192,7 +4192,7 @@
               </a:rPr>
               <a:t>• AI tools retrieving data unrelated to the approved use case.</a:t>
             </a:r>
-            <a:endParaRPr lang="en-US" sz="2100" dirty="0"/>
+            <a:endParaRPr lang="en-US" sz="1920" dirty="0"/>
           </a:p>
         </p:txBody>
       </p:sp>
@@ -4204,12 +4204,12 @@
         </p:nvSpPr>
         <p:spPr>
           <a:xfrm>
-            <a:off x="7635240" y="1325880"/>
-            <a:ext cx="3474720" cy="1207008"/>
+            <a:off x="7543800" y="1325880"/>
+            <a:ext cx="3611880" cy="1261872"/>
           </a:xfrm>
           <a:prstGeom prst="roundRect">
             <a:avLst>
-              <a:gd name="adj" fmla="val 9091"/>
+              <a:gd name="adj" fmla="val 8696"/>
             </a:avLst>
           </a:prstGeom>
           <a:solidFill>
@@ -4231,8 +4231,8 @@
         </p:nvSpPr>
         <p:spPr>
           <a:xfrm>
-            <a:off x="7799832" y="1472184"/>
-            <a:ext cx="3145536" cy="256032"/>
+            <a:off x="7708392" y="1453896"/>
+            <a:ext cx="3282696" cy="228600"/>
           </a:xfrm>
           <a:prstGeom prst="rect">
             <a:avLst/>
@@ -4248,7 +4248,7 @@
               <a:buNone/>
             </a:pPr>
             <a:r>
-              <a:rPr lang="en-US" sz="1300" b="1" dirty="0">
+              <a:rPr lang="en-US" sz="1220" b="1" dirty="0">
                 <a:solidFill>
                   <a:srgbClr val="0068B7"/>
                 </a:solidFill>
@@ -4258,7 +4258,7 @@
               </a:rPr>
               <a:t>Risk check</a:t>
             </a:r>
-            <a:endParaRPr lang="en-US" sz="1300" dirty="0"/>
+            <a:endParaRPr lang="en-US" sz="1220" dirty="0"/>
           </a:p>
         </p:txBody>
       </p:sp>
@@ -4270,8 +4270,8 @@
         </p:nvSpPr>
         <p:spPr>
           <a:xfrm>
-            <a:off x="7799832" y="1801368"/>
-            <a:ext cx="3145536" cy="640080"/>
+            <a:off x="7708392" y="1764792"/>
+            <a:ext cx="3282696" cy="749808"/>
           </a:xfrm>
           <a:prstGeom prst="rect">
             <a:avLst/>
@@ -4289,7 +4289,7 @@
               <a:buNone/>
             </a:pPr>
             <a:r>
-              <a:rPr lang="en-US" sz="1320" dirty="0">
+              <a:rPr lang="en-US" sz="1220" dirty="0">
                 <a:solidFill>
                   <a:srgbClr val="17364A"/>
                 </a:solidFill>
@@ -4299,7 +4299,7 @@
               </a:rPr>
               <a:t>Risks and failure modes include the following:</a:t>
             </a:r>
-            <a:endParaRPr lang="en-US" sz="1320" dirty="0"/>
+            <a:endParaRPr lang="en-US" sz="1220" dirty="0"/>
           </a:p>
         </p:txBody>
       </p:sp>
@@ -4311,12 +4311,12 @@
         </p:nvSpPr>
         <p:spPr>
           <a:xfrm>
-            <a:off x="7635240" y="2670048"/>
-            <a:ext cx="3474720" cy="1536192"/>
+            <a:off x="7543800" y="2724912"/>
+            <a:ext cx="3611880" cy="1527048"/>
           </a:xfrm>
           <a:prstGeom prst="roundRect">
             <a:avLst>
-              <a:gd name="adj" fmla="val 7143"/>
+              <a:gd name="adj" fmla="val 7186"/>
             </a:avLst>
           </a:prstGeom>
           <a:solidFill>
@@ -4338,8 +4338,8 @@
         </p:nvSpPr>
         <p:spPr>
           <a:xfrm>
-            <a:off x="7799832" y="2816352"/>
-            <a:ext cx="3145536" cy="256032"/>
+            <a:off x="7708392" y="2852928"/>
+            <a:ext cx="3282696" cy="228600"/>
           </a:xfrm>
           <a:prstGeom prst="rect">
             <a:avLst/>
@@ -4355,7 +4355,7 @@
               <a:buNone/>
             </a:pPr>
             <a:r>
-              <a:rPr lang="en-US" sz="1300" b="1" dirty="0">
+              <a:rPr lang="en-US" sz="1220" b="1" dirty="0">
                 <a:solidFill>
                   <a:srgbClr val="0068B7"/>
                 </a:solidFill>
@@ -4365,7 +4365,7 @@
               </a:rPr>
               <a:t>Concept checkpoints</a:t>
             </a:r>
-            <a:endParaRPr lang="en-US" sz="1300" dirty="0"/>
+            <a:endParaRPr lang="en-US" sz="1220" dirty="0"/>
           </a:p>
         </p:txBody>
       </p:sp>
@@ -4377,8 +4377,8 @@
         </p:nvSpPr>
         <p:spPr>
           <a:xfrm>
-            <a:off x="7818120" y="3182112"/>
-            <a:ext cx="3090672" cy="877824"/>
+            <a:off x="7726680" y="3182112"/>
+            <a:ext cx="3227832" cy="960120"/>
           </a:xfrm>
           <a:prstGeom prst="rect">
             <a:avLst/>
@@ -4396,7 +4396,7 @@
               <a:buNone/>
             </a:pPr>
             <a:r>
-              <a:rPr lang="en-US" sz="1220" dirty="0">
+              <a:rPr lang="en-US" sz="1140" dirty="0">
                 <a:solidFill>
                   <a:srgbClr val="17364A"/>
                 </a:solidFill>
@@ -4406,14 +4406,14 @@
               </a:rPr>
               <a:t>Risks and failure modes include the following:</a:t>
             </a:r>
-            <a:endParaRPr lang="en-US" sz="1220" dirty="0"/>
-          </a:p>
-          <a:p>
-            <a:pPr indent="0" marL="0">
-              <a:buNone/>
-            </a:pPr>
-            <a:r>
-              <a:rPr lang="en-US" sz="1220" dirty="0">
+            <a:endParaRPr lang="en-US" sz="1140" dirty="0"/>
+          </a:p>
+          <a:p>
+            <a:pPr indent="0" marL="0">
+              <a:buNone/>
+            </a:pPr>
+            <a:r>
+              <a:rPr lang="en-US" sz="1140" dirty="0">
                 <a:solidFill>
                   <a:srgbClr val="17364A"/>
                 </a:solidFill>
@@ -4421,16 +4421,16 @@
                 <a:ea typeface="Aptos" pitchFamily="34" charset="-122"/>
                 <a:cs typeface="Aptos" pitchFamily="34" charset="-120"/>
               </a:rPr>
-              <a:t>Service accounts with broad access to sensitive data.</a:t>
-            </a:r>
-            <a:endParaRPr lang="en-US" sz="1220" dirty="0"/>
-          </a:p>
-          <a:p>
-            <a:pPr indent="0" marL="0">
-              <a:buNone/>
-            </a:pPr>
-            <a:r>
-              <a:rPr lang="en-US" sz="1220" dirty="0">
+              <a:t>Service accounts with broad access to sensitive.</a:t>
+            </a:r>
+            <a:endParaRPr lang="en-US" sz="1140" dirty="0"/>
+          </a:p>
+          <a:p>
+            <a:pPr indent="0" marL="0">
+              <a:buNone/>
+            </a:pPr>
+            <a:r>
+              <a:rPr lang="en-US" sz="1140" dirty="0">
                 <a:solidFill>
                   <a:srgbClr val="17364A"/>
                 </a:solidFill>
@@ -4438,9 +4438,9 @@
                 <a:ea typeface="Aptos" pitchFamily="34" charset="-122"/>
                 <a:cs typeface="Aptos" pitchFamily="34" charset="-120"/>
               </a:rPr>
-              <a:t>AI tools retrieving data unrelated to the approved use case.</a:t>
-            </a:r>
-            <a:endParaRPr lang="en-US" sz="1220" dirty="0"/>
+              <a:t>AI tools retrieving data unrelated to the approved.</a:t>
+            </a:r>
+            <a:endParaRPr lang="en-US" sz="1140" dirty="0"/>
           </a:p>
         </p:txBody>
       </p:sp>
@@ -4452,12 +4452,12 @@
         </p:nvSpPr>
         <p:spPr>
           <a:xfrm>
-            <a:off x="7635240" y="4343400"/>
-            <a:ext cx="3474720" cy="1255471"/>
+            <a:off x="7543800" y="4389120"/>
+            <a:ext cx="3611880" cy="1261872"/>
           </a:xfrm>
           <a:prstGeom prst="roundRect">
             <a:avLst>
-              <a:gd name="adj" fmla="val 8740"/>
+              <a:gd name="adj" fmla="val 8696"/>
             </a:avLst>
           </a:prstGeom>
           <a:solidFill>
@@ -4479,8 +4479,8 @@
         </p:nvSpPr>
         <p:spPr>
           <a:xfrm>
-            <a:off x="7799832" y="4489704"/>
-            <a:ext cx="3145536" cy="256032"/>
+            <a:off x="7708392" y="4517136"/>
+            <a:ext cx="3282696" cy="228600"/>
           </a:xfrm>
           <a:prstGeom prst="rect">
             <a:avLst/>
@@ -4496,7 +4496,7 @@
               <a:buNone/>
             </a:pPr>
             <a:r>
-              <a:rPr lang="en-US" sz="1300" b="1" dirty="0">
+              <a:rPr lang="en-US" sz="1220" b="1" dirty="0">
                 <a:solidFill>
                   <a:srgbClr val="0068B7"/>
                 </a:solidFill>
@@ -4506,7 +4506,7 @@
               </a:rPr>
               <a:t>Safeguard to plan</a:t>
             </a:r>
-            <a:endParaRPr lang="en-US" sz="1300" dirty="0"/>
+            <a:endParaRPr lang="en-US" sz="1220" dirty="0"/>
           </a:p>
         </p:txBody>
       </p:sp>
@@ -4518,8 +4518,8 @@
         </p:nvSpPr>
         <p:spPr>
           <a:xfrm>
-            <a:off x="7799832" y="4818888"/>
-            <a:ext cx="3145536" cy="688543"/>
+            <a:off x="7708392" y="4828032"/>
+            <a:ext cx="3282696" cy="749808"/>
           </a:xfrm>
           <a:prstGeom prst="rect">
             <a:avLst/>
@@ -4537,7 +4537,7 @@
               <a:buNone/>
             </a:pPr>
             <a:r>
-              <a:rPr lang="en-US" sz="1320" dirty="0">
+              <a:rPr lang="en-US" sz="1220" dirty="0">
                 <a:solidFill>
                   <a:srgbClr val="17364A"/>
                 </a:solidFill>
@@ -4545,9 +4545,9 @@
                 <a:ea typeface="Aptos" pitchFamily="34" charset="-122"/>
                 <a:cs typeface="Aptos" pitchFamily="34" charset="-120"/>
               </a:rPr>
-              <a:t>Identify what could go wrong, who could be affected, what safeguards are needed, and what evidence should be reviewed before use.</a:t>
-            </a:r>
-            <a:endParaRPr lang="en-US" sz="1320" dirty="0"/>
+              <a:t>Identify what could go wrong, who could be affected, what safeguards are needed,.</a:t>
+            </a:r>
+            <a:endParaRPr lang="en-US" sz="1220" dirty="0"/>
           </a:p>
         </p:txBody>
       </p:sp>
@@ -4838,8 +4838,8 @@
         </p:nvSpPr>
         <p:spPr>
           <a:xfrm>
-            <a:off x="868680" y="1508760"/>
-            <a:ext cx="6309360" cy="4160520"/>
+            <a:off x="822960" y="1463040"/>
+            <a:ext cx="6565392" cy="4343400"/>
           </a:xfrm>
           <a:prstGeom prst="rect">
             <a:avLst/>
@@ -4857,7 +4857,7 @@
               <a:buNone/>
             </a:pPr>
             <a:r>
-              <a:rPr lang="en-US" sz="2100" dirty="0">
+              <a:rPr lang="en-US" sz="1920" dirty="0">
                 <a:solidFill>
                   <a:srgbClr val="003A63"/>
                 </a:solidFill>
@@ -4867,14 +4867,14 @@
               </a:rPr>
               <a:t>• Write-back actions occurring without human approval.</a:t>
             </a:r>
-            <a:endParaRPr lang="en-US" sz="2100" dirty="0"/>
-          </a:p>
-          <a:p>
-            <a:pPr indent="0" marL="0">
-              <a:buNone/>
-            </a:pPr>
-            <a:r>
-              <a:rPr lang="en-US" sz="2100" dirty="0">
+            <a:endParaRPr lang="en-US" sz="1920" dirty="0"/>
+          </a:p>
+          <a:p>
+            <a:pPr indent="0" marL="0">
+              <a:buNone/>
+            </a:pPr>
+            <a:r>
+              <a:rPr lang="en-US" sz="1920" dirty="0">
                 <a:solidFill>
                   <a:srgbClr val="003A63"/>
                 </a:solidFill>
@@ -4884,14 +4884,14 @@
               </a:rPr>
               <a:t>• Shared accounts preventing accountability.</a:t>
             </a:r>
-            <a:endParaRPr lang="en-US" sz="2100" dirty="0"/>
-          </a:p>
-          <a:p>
-            <a:pPr indent="0" marL="0">
-              <a:buNone/>
-            </a:pPr>
-            <a:r>
-              <a:rPr lang="en-US" sz="2100" dirty="0">
+            <a:endParaRPr lang="en-US" sz="1920" dirty="0"/>
+          </a:p>
+          <a:p>
+            <a:pPr indent="0" marL="0">
+              <a:buNone/>
+            </a:pPr>
+            <a:r>
+              <a:rPr lang="en-US" sz="1920" dirty="0">
                 <a:solidFill>
                   <a:srgbClr val="003A63"/>
                 </a:solidFill>
@@ -4901,7 +4901,7 @@
               </a:rPr>
               <a:t>• Insufficient logs to investigate data access or output generation.</a:t>
             </a:r>
-            <a:endParaRPr lang="en-US" sz="2100" dirty="0"/>
+            <a:endParaRPr lang="en-US" sz="1920" dirty="0"/>
           </a:p>
         </p:txBody>
       </p:sp>
@@ -4913,12 +4913,12 @@
         </p:nvSpPr>
         <p:spPr>
           <a:xfrm>
-            <a:off x="7635240" y="1325880"/>
-            <a:ext cx="3474720" cy="1207008"/>
+            <a:off x="7543800" y="1325880"/>
+            <a:ext cx="3611880" cy="1261872"/>
           </a:xfrm>
           <a:prstGeom prst="roundRect">
             <a:avLst>
-              <a:gd name="adj" fmla="val 9091"/>
+              <a:gd name="adj" fmla="val 8696"/>
             </a:avLst>
           </a:prstGeom>
           <a:solidFill>
@@ -4940,8 +4940,8 @@
         </p:nvSpPr>
         <p:spPr>
           <a:xfrm>
-            <a:off x="7799832" y="1472184"/>
-            <a:ext cx="3145536" cy="256032"/>
+            <a:off x="7708392" y="1453896"/>
+            <a:ext cx="3282696" cy="228600"/>
           </a:xfrm>
           <a:prstGeom prst="rect">
             <a:avLst/>
@@ -4957,7 +4957,7 @@
               <a:buNone/>
             </a:pPr>
             <a:r>
-              <a:rPr lang="en-US" sz="1300" b="1" dirty="0">
+              <a:rPr lang="en-US" sz="1220" b="1" dirty="0">
                 <a:solidFill>
                   <a:srgbClr val="0068B7"/>
                 </a:solidFill>
@@ -4967,7 +4967,7 @@
               </a:rPr>
               <a:t>Risk check</a:t>
             </a:r>
-            <a:endParaRPr lang="en-US" sz="1300" dirty="0"/>
+            <a:endParaRPr lang="en-US" sz="1220" dirty="0"/>
           </a:p>
         </p:txBody>
       </p:sp>
@@ -4979,8 +4979,8 @@
         </p:nvSpPr>
         <p:spPr>
           <a:xfrm>
-            <a:off x="7799832" y="1801368"/>
-            <a:ext cx="3145536" cy="640080"/>
+            <a:off x="7708392" y="1764792"/>
+            <a:ext cx="3282696" cy="749808"/>
           </a:xfrm>
           <a:prstGeom prst="rect">
             <a:avLst/>
@@ -4998,7 +4998,7 @@
               <a:buNone/>
             </a:pPr>
             <a:r>
-              <a:rPr lang="en-US" sz="1320" dirty="0">
+              <a:rPr lang="en-US" sz="1220" dirty="0">
                 <a:solidFill>
                   <a:srgbClr val="17364A"/>
                 </a:solidFill>
@@ -5008,7 +5008,7 @@
               </a:rPr>
               <a:t>Write-back actions occurring without human approval.</a:t>
             </a:r>
-            <a:endParaRPr lang="en-US" sz="1320" dirty="0"/>
+            <a:endParaRPr lang="en-US" sz="1220" dirty="0"/>
           </a:p>
         </p:txBody>
       </p:sp>
@@ -5020,12 +5020,12 @@
         </p:nvSpPr>
         <p:spPr>
           <a:xfrm>
-            <a:off x="7635240" y="2670048"/>
-            <a:ext cx="3474720" cy="1536192"/>
+            <a:off x="7543800" y="2724912"/>
+            <a:ext cx="3611880" cy="1527048"/>
           </a:xfrm>
           <a:prstGeom prst="roundRect">
             <a:avLst>
-              <a:gd name="adj" fmla="val 7143"/>
+              <a:gd name="adj" fmla="val 7186"/>
             </a:avLst>
           </a:prstGeom>
           <a:solidFill>
@@ -5047,8 +5047,8 @@
         </p:nvSpPr>
         <p:spPr>
           <a:xfrm>
-            <a:off x="7799832" y="2816352"/>
-            <a:ext cx="3145536" cy="256032"/>
+            <a:off x="7708392" y="2852928"/>
+            <a:ext cx="3282696" cy="228600"/>
           </a:xfrm>
           <a:prstGeom prst="rect">
             <a:avLst/>
@@ -5064,7 +5064,7 @@
               <a:buNone/>
             </a:pPr>
             <a:r>
-              <a:rPr lang="en-US" sz="1300" b="1" dirty="0">
+              <a:rPr lang="en-US" sz="1220" b="1" dirty="0">
                 <a:solidFill>
                   <a:srgbClr val="0068B7"/>
                 </a:solidFill>
@@ -5074,7 +5074,7 @@
               </a:rPr>
               <a:t>Concept checkpoints</a:t>
             </a:r>
-            <a:endParaRPr lang="en-US" sz="1300" dirty="0"/>
+            <a:endParaRPr lang="en-US" sz="1220" dirty="0"/>
           </a:p>
         </p:txBody>
       </p:sp>
@@ -5086,8 +5086,8 @@
         </p:nvSpPr>
         <p:spPr>
           <a:xfrm>
-            <a:off x="7818120" y="3182112"/>
-            <a:ext cx="3090672" cy="877824"/>
+            <a:off x="7726680" y="3182112"/>
+            <a:ext cx="3227832" cy="960120"/>
           </a:xfrm>
           <a:prstGeom prst="rect">
             <a:avLst/>
@@ -5105,7 +5105,7 @@
               <a:buNone/>
             </a:pPr>
             <a:r>
-              <a:rPr lang="en-US" sz="1220" dirty="0">
+              <a:rPr lang="en-US" sz="1140" dirty="0">
                 <a:solidFill>
                   <a:srgbClr val="17364A"/>
                 </a:solidFill>
@@ -5115,14 +5115,14 @@
               </a:rPr>
               <a:t>Write-back actions occurring without human approval.</a:t>
             </a:r>
-            <a:endParaRPr lang="en-US" sz="1220" dirty="0"/>
-          </a:p>
-          <a:p>
-            <a:pPr indent="0" marL="0">
-              <a:buNone/>
-            </a:pPr>
-            <a:r>
-              <a:rPr lang="en-US" sz="1220" dirty="0">
+            <a:endParaRPr lang="en-US" sz="1140" dirty="0"/>
+          </a:p>
+          <a:p>
+            <a:pPr indent="0" marL="0">
+              <a:buNone/>
+            </a:pPr>
+            <a:r>
+              <a:rPr lang="en-US" sz="1140" dirty="0">
                 <a:solidFill>
                   <a:srgbClr val="17364A"/>
                 </a:solidFill>
@@ -5132,14 +5132,14 @@
               </a:rPr>
               <a:t>Shared accounts preventing accountability.</a:t>
             </a:r>
-            <a:endParaRPr lang="en-US" sz="1220" dirty="0"/>
-          </a:p>
-          <a:p>
-            <a:pPr indent="0" marL="0">
-              <a:buNone/>
-            </a:pPr>
-            <a:r>
-              <a:rPr lang="en-US" sz="1220" dirty="0">
+            <a:endParaRPr lang="en-US" sz="1140" dirty="0"/>
+          </a:p>
+          <a:p>
+            <a:pPr indent="0" marL="0">
+              <a:buNone/>
+            </a:pPr>
+            <a:r>
+              <a:rPr lang="en-US" sz="1140" dirty="0">
                 <a:solidFill>
                   <a:srgbClr val="17364A"/>
                 </a:solidFill>
@@ -5147,9 +5147,9 @@
                 <a:ea typeface="Aptos" pitchFamily="34" charset="-122"/>
                 <a:cs typeface="Aptos" pitchFamily="34" charset="-120"/>
               </a:rPr>
-              <a:t>Insufficient logs to investigate data access or output generation.</a:t>
-            </a:r>
-            <a:endParaRPr lang="en-US" sz="1220" dirty="0"/>
+              <a:t>Insufficient logs to investigate data access or.</a:t>
+            </a:r>
+            <a:endParaRPr lang="en-US" sz="1140" dirty="0"/>
           </a:p>
         </p:txBody>
       </p:sp>
@@ -5161,12 +5161,12 @@
         </p:nvSpPr>
         <p:spPr>
           <a:xfrm>
-            <a:off x="7635240" y="4343400"/>
-            <a:ext cx="3474720" cy="1255471"/>
+            <a:off x="7543800" y="4389120"/>
+            <a:ext cx="3611880" cy="1261872"/>
           </a:xfrm>
           <a:prstGeom prst="roundRect">
             <a:avLst>
-              <a:gd name="adj" fmla="val 8740"/>
+              <a:gd name="adj" fmla="val 8696"/>
             </a:avLst>
           </a:prstGeom>
           <a:solidFill>
@@ -5188,8 +5188,8 @@
         </p:nvSpPr>
         <p:spPr>
           <a:xfrm>
-            <a:off x="7799832" y="4489704"/>
-            <a:ext cx="3145536" cy="256032"/>
+            <a:off x="7708392" y="4517136"/>
+            <a:ext cx="3282696" cy="228600"/>
           </a:xfrm>
           <a:prstGeom prst="rect">
             <a:avLst/>
@@ -5205,7 +5205,7 @@
               <a:buNone/>
             </a:pPr>
             <a:r>
-              <a:rPr lang="en-US" sz="1300" b="1" dirty="0">
+              <a:rPr lang="en-US" sz="1220" b="1" dirty="0">
                 <a:solidFill>
                   <a:srgbClr val="0068B7"/>
                 </a:solidFill>
@@ -5215,7 +5215,7 @@
               </a:rPr>
               <a:t>Safeguard to plan</a:t>
             </a:r>
-            <a:endParaRPr lang="en-US" sz="1300" dirty="0"/>
+            <a:endParaRPr lang="en-US" sz="1220" dirty="0"/>
           </a:p>
         </p:txBody>
       </p:sp>
@@ -5227,8 +5227,8 @@
         </p:nvSpPr>
         <p:spPr>
           <a:xfrm>
-            <a:off x="7799832" y="4818888"/>
-            <a:ext cx="3145536" cy="688543"/>
+            <a:off x="7708392" y="4828032"/>
+            <a:ext cx="3282696" cy="749808"/>
           </a:xfrm>
           <a:prstGeom prst="rect">
             <a:avLst/>
@@ -5246,7 +5246,7 @@
               <a:buNone/>
             </a:pPr>
             <a:r>
-              <a:rPr lang="en-US" sz="1320" dirty="0">
+              <a:rPr lang="en-US" sz="1220" dirty="0">
                 <a:solidFill>
                   <a:srgbClr val="17364A"/>
                 </a:solidFill>
@@ -5254,9 +5254,9 @@
                 <a:ea typeface="Aptos" pitchFamily="34" charset="-122"/>
                 <a:cs typeface="Aptos" pitchFamily="34" charset="-120"/>
               </a:rPr>
-              <a:t>Identify what could go wrong, who could be affected, what safeguards are needed, and what evidence should be reviewed before use.</a:t>
-            </a:r>
-            <a:endParaRPr lang="en-US" sz="1320" dirty="0"/>
+              <a:t>Identify what could go wrong, who could be affected, what safeguards are needed,.</a:t>
+            </a:r>
+            <a:endParaRPr lang="en-US" sz="1220" dirty="0"/>
           </a:p>
         </p:txBody>
       </p:sp>
@@ -5547,8 +5547,8 @@
         </p:nvSpPr>
         <p:spPr>
           <a:xfrm>
-            <a:off x="868680" y="1508760"/>
-            <a:ext cx="6309360" cy="4160520"/>
+            <a:off x="822960" y="1463040"/>
+            <a:ext cx="6565392" cy="4343400"/>
           </a:xfrm>
           <a:prstGeom prst="rect">
             <a:avLst/>
@@ -5566,7 +5566,7 @@
               <a:buNone/>
             </a:pPr>
             <a:r>
-              <a:rPr lang="en-US" sz="2100" dirty="0">
+              <a:rPr lang="en-US" sz="1920" dirty="0">
                 <a:solidFill>
                   <a:srgbClr val="003A63"/>
                 </a:solidFill>
@@ -5576,14 +5576,14 @@
               </a:rPr>
               <a:t>• Recommended guardrails include the following:</a:t>
             </a:r>
-            <a:endParaRPr lang="en-US" sz="2100" dirty="0"/>
-          </a:p>
-          <a:p>
-            <a:pPr indent="0" marL="0">
-              <a:buNone/>
-            </a:pPr>
-            <a:r>
-              <a:rPr lang="en-US" sz="2100" dirty="0">
+            <a:endParaRPr lang="en-US" sz="1920" dirty="0"/>
+          </a:p>
+          <a:p>
+            <a:pPr indent="0" marL="0">
+              <a:buNone/>
+            </a:pPr>
+            <a:r>
+              <a:rPr lang="en-US" sz="1920" dirty="0">
                 <a:solidFill>
                   <a:srgbClr val="003A63"/>
                 </a:solidFill>
@@ -5593,14 +5593,14 @@
               </a:rPr>
               <a:t>• Use role-based and purpose-based access controls.</a:t>
             </a:r>
-            <a:endParaRPr lang="en-US" sz="2100" dirty="0"/>
-          </a:p>
-          <a:p>
-            <a:pPr indent="0" marL="0">
-              <a:buNone/>
-            </a:pPr>
-            <a:r>
-              <a:rPr lang="en-US" sz="2100" dirty="0">
+            <a:endParaRPr lang="en-US" sz="1920" dirty="0"/>
+          </a:p>
+          <a:p>
+            <a:pPr indent="0" marL="0">
+              <a:buNone/>
+            </a:pPr>
+            <a:r>
+              <a:rPr lang="en-US" sz="1920" dirty="0">
                 <a:solidFill>
                   <a:srgbClr val="003A63"/>
                 </a:solidFill>
@@ -5610,7 +5610,7 @@
               </a:rPr>
               <a:t>• Apply least privilege to users, service accounts, APIs, and agents.</a:t>
             </a:r>
-            <a:endParaRPr lang="en-US" sz="2100" dirty="0"/>
+            <a:endParaRPr lang="en-US" sz="1920" dirty="0"/>
           </a:p>
         </p:txBody>
       </p:sp>
@@ -5622,12 +5622,12 @@
         </p:nvSpPr>
         <p:spPr>
           <a:xfrm>
-            <a:off x="7635240" y="1325880"/>
-            <a:ext cx="3474720" cy="1207008"/>
+            <a:off x="7543800" y="1325880"/>
+            <a:ext cx="3611880" cy="1261872"/>
           </a:xfrm>
           <a:prstGeom prst="roundRect">
             <a:avLst>
-              <a:gd name="adj" fmla="val 9091"/>
+              <a:gd name="adj" fmla="val 8696"/>
             </a:avLst>
           </a:prstGeom>
           <a:solidFill>
@@ -5649,8 +5649,8 @@
         </p:nvSpPr>
         <p:spPr>
           <a:xfrm>
-            <a:off x="7799832" y="1472184"/>
-            <a:ext cx="3145536" cy="256032"/>
+            <a:off x="7708392" y="1453896"/>
+            <a:ext cx="3282696" cy="228600"/>
           </a:xfrm>
           <a:prstGeom prst="rect">
             <a:avLst/>
@@ -5666,7 +5666,7 @@
               <a:buNone/>
             </a:pPr>
             <a:r>
-              <a:rPr lang="en-US" sz="1300" b="1" dirty="0">
+              <a:rPr lang="en-US" sz="1220" b="1" dirty="0">
                 <a:solidFill>
                   <a:srgbClr val="0068B7"/>
                 </a:solidFill>
@@ -5676,7 +5676,7 @@
               </a:rPr>
               <a:t>Risk check</a:t>
             </a:r>
-            <a:endParaRPr lang="en-US" sz="1300" dirty="0"/>
+            <a:endParaRPr lang="en-US" sz="1220" dirty="0"/>
           </a:p>
         </p:txBody>
       </p:sp>
@@ -5688,8 +5688,8 @@
         </p:nvSpPr>
         <p:spPr>
           <a:xfrm>
-            <a:off x="7799832" y="1801368"/>
-            <a:ext cx="3145536" cy="640080"/>
+            <a:off x="7708392" y="1764792"/>
+            <a:ext cx="3282696" cy="749808"/>
           </a:xfrm>
           <a:prstGeom prst="rect">
             <a:avLst/>
@@ -5707,7 +5707,7 @@
               <a:buNone/>
             </a:pPr>
             <a:r>
-              <a:rPr lang="en-US" sz="1320" dirty="0">
+              <a:rPr lang="en-US" sz="1220" dirty="0">
                 <a:solidFill>
                   <a:srgbClr val="17364A"/>
                 </a:solidFill>
@@ -5717,7 +5717,7 @@
               </a:rPr>
               <a:t>Recommended guardrails include the following:</a:t>
             </a:r>
-            <a:endParaRPr lang="en-US" sz="1320" dirty="0"/>
+            <a:endParaRPr lang="en-US" sz="1220" dirty="0"/>
           </a:p>
         </p:txBody>
       </p:sp>
@@ -5729,12 +5729,12 @@
         </p:nvSpPr>
         <p:spPr>
           <a:xfrm>
-            <a:off x="7635240" y="2670048"/>
-            <a:ext cx="3474720" cy="1536192"/>
+            <a:off x="7543800" y="2724912"/>
+            <a:ext cx="3611880" cy="1527048"/>
           </a:xfrm>
           <a:prstGeom prst="roundRect">
             <a:avLst>
-              <a:gd name="adj" fmla="val 7143"/>
+              <a:gd name="adj" fmla="val 7186"/>
             </a:avLst>
           </a:prstGeom>
           <a:solidFill>
@@ -5756,8 +5756,8 @@
         </p:nvSpPr>
         <p:spPr>
           <a:xfrm>
-            <a:off x="7799832" y="2816352"/>
-            <a:ext cx="3145536" cy="256032"/>
+            <a:off x="7708392" y="2852928"/>
+            <a:ext cx="3282696" cy="228600"/>
           </a:xfrm>
           <a:prstGeom prst="rect">
             <a:avLst/>
@@ -5773,7 +5773,7 @@
               <a:buNone/>
             </a:pPr>
             <a:r>
-              <a:rPr lang="en-US" sz="1300" b="1" dirty="0">
+              <a:rPr lang="en-US" sz="1220" b="1" dirty="0">
                 <a:solidFill>
                   <a:srgbClr val="0068B7"/>
                 </a:solidFill>
@@ -5783,7 +5783,7 @@
               </a:rPr>
               <a:t>Concept checkpoints</a:t>
             </a:r>
-            <a:endParaRPr lang="en-US" sz="1300" dirty="0"/>
+            <a:endParaRPr lang="en-US" sz="1220" dirty="0"/>
           </a:p>
         </p:txBody>
       </p:sp>
@@ -5795,8 +5795,8 @@
         </p:nvSpPr>
         <p:spPr>
           <a:xfrm>
-            <a:off x="7818120" y="3182112"/>
-            <a:ext cx="3090672" cy="877824"/>
+            <a:off x="7726680" y="3182112"/>
+            <a:ext cx="3227832" cy="960120"/>
           </a:xfrm>
           <a:prstGeom prst="rect">
             <a:avLst/>
@@ -5814,7 +5814,7 @@
               <a:buNone/>
             </a:pPr>
             <a:r>
-              <a:rPr lang="en-US" sz="1220" dirty="0">
+              <a:rPr lang="en-US" sz="1140" dirty="0">
                 <a:solidFill>
                   <a:srgbClr val="17364A"/>
                 </a:solidFill>
@@ -5824,14 +5824,14 @@
               </a:rPr>
               <a:t>Recommended guardrails include the following:</a:t>
             </a:r>
-            <a:endParaRPr lang="en-US" sz="1220" dirty="0"/>
-          </a:p>
-          <a:p>
-            <a:pPr indent="0" marL="0">
-              <a:buNone/>
-            </a:pPr>
-            <a:r>
-              <a:rPr lang="en-US" sz="1220" dirty="0">
+            <a:endParaRPr lang="en-US" sz="1140" dirty="0"/>
+          </a:p>
+          <a:p>
+            <a:pPr indent="0" marL="0">
+              <a:buNone/>
+            </a:pPr>
+            <a:r>
+              <a:rPr lang="en-US" sz="1140" dirty="0">
                 <a:solidFill>
                   <a:srgbClr val="17364A"/>
                 </a:solidFill>
@@ -5841,14 +5841,14 @@
               </a:rPr>
               <a:t>Use role-based and purpose-based access controls.</a:t>
             </a:r>
-            <a:endParaRPr lang="en-US" sz="1220" dirty="0"/>
-          </a:p>
-          <a:p>
-            <a:pPr indent="0" marL="0">
-              <a:buNone/>
-            </a:pPr>
-            <a:r>
-              <a:rPr lang="en-US" sz="1220" dirty="0">
+            <a:endParaRPr lang="en-US" sz="1140" dirty="0"/>
+          </a:p>
+          <a:p>
+            <a:pPr indent="0" marL="0">
+              <a:buNone/>
+            </a:pPr>
+            <a:r>
+              <a:rPr lang="en-US" sz="1140" dirty="0">
                 <a:solidFill>
                   <a:srgbClr val="17364A"/>
                 </a:solidFill>
@@ -5856,9 +5856,9 @@
                 <a:ea typeface="Aptos" pitchFamily="34" charset="-122"/>
                 <a:cs typeface="Aptos" pitchFamily="34" charset="-120"/>
               </a:rPr>
-              <a:t>Apply least privilege to users, service accounts, APIs, and agents.</a:t>
-            </a:r>
-            <a:endParaRPr lang="en-US" sz="1220" dirty="0"/>
+              <a:t>Apply least privilege to users, service accounts,.</a:t>
+            </a:r>
+            <a:endParaRPr lang="en-US" sz="1140" dirty="0"/>
           </a:p>
         </p:txBody>
       </p:sp>
@@ -5870,12 +5870,12 @@
         </p:nvSpPr>
         <p:spPr>
           <a:xfrm>
-            <a:off x="7635240" y="4343400"/>
-            <a:ext cx="3474720" cy="1255471"/>
+            <a:off x="7543800" y="4389120"/>
+            <a:ext cx="3611880" cy="1261872"/>
           </a:xfrm>
           <a:prstGeom prst="roundRect">
             <a:avLst>
-              <a:gd name="adj" fmla="val 8740"/>
+              <a:gd name="adj" fmla="val 8696"/>
             </a:avLst>
           </a:prstGeom>
           <a:solidFill>
@@ -5897,8 +5897,8 @@
         </p:nvSpPr>
         <p:spPr>
           <a:xfrm>
-            <a:off x="7799832" y="4489704"/>
-            <a:ext cx="3145536" cy="256032"/>
+            <a:off x="7708392" y="4517136"/>
+            <a:ext cx="3282696" cy="228600"/>
           </a:xfrm>
           <a:prstGeom prst="rect">
             <a:avLst/>
@@ -5914,7 +5914,7 @@
               <a:buNone/>
             </a:pPr>
             <a:r>
-              <a:rPr lang="en-US" sz="1300" b="1" dirty="0">
+              <a:rPr lang="en-US" sz="1220" b="1" dirty="0">
                 <a:solidFill>
                   <a:srgbClr val="0068B7"/>
                 </a:solidFill>
@@ -5924,7 +5924,7 @@
               </a:rPr>
               <a:t>Safeguard to plan</a:t>
             </a:r>
-            <a:endParaRPr lang="en-US" sz="1300" dirty="0"/>
+            <a:endParaRPr lang="en-US" sz="1220" dirty="0"/>
           </a:p>
         </p:txBody>
       </p:sp>
@@ -5936,8 +5936,8 @@
         </p:nvSpPr>
         <p:spPr>
           <a:xfrm>
-            <a:off x="7799832" y="4818888"/>
-            <a:ext cx="3145536" cy="688543"/>
+            <a:off x="7708392" y="4828032"/>
+            <a:ext cx="3282696" cy="749808"/>
           </a:xfrm>
           <a:prstGeom prst="rect">
             <a:avLst/>
@@ -5955,7 +5955,7 @@
               <a:buNone/>
             </a:pPr>
             <a:r>
-              <a:rPr lang="en-US" sz="1320" dirty="0">
+              <a:rPr lang="en-US" sz="1220" dirty="0">
                 <a:solidFill>
                   <a:srgbClr val="17364A"/>
                 </a:solidFill>
@@ -5963,9 +5963,9 @@
                 <a:ea typeface="Aptos" pitchFamily="34" charset="-122"/>
                 <a:cs typeface="Aptos" pitchFamily="34" charset="-120"/>
               </a:rPr>
-              <a:t>Identify what could go wrong, who could be affected, what safeguards are needed, and what evidence should be reviewed before use.</a:t>
-            </a:r>
-            <a:endParaRPr lang="en-US" sz="1320" dirty="0"/>
+              <a:t>Identify what could go wrong, who could be affected, what safeguards are needed,.</a:t>
+            </a:r>
+            <a:endParaRPr lang="en-US" sz="1220" dirty="0"/>
           </a:p>
         </p:txBody>
       </p:sp>
@@ -6256,8 +6256,8 @@
         </p:nvSpPr>
         <p:spPr>
           <a:xfrm>
-            <a:off x="868680" y="1508760"/>
-            <a:ext cx="6309360" cy="4160520"/>
+            <a:off x="822960" y="1463040"/>
+            <a:ext cx="6565392" cy="4343400"/>
           </a:xfrm>
           <a:prstGeom prst="rect">
             <a:avLst/>
@@ -6275,7 +6275,7 @@
               <a:buNone/>
             </a:pPr>
             <a:r>
-              <a:rPr lang="en-US" sz="2100" dirty="0">
+              <a:rPr lang="en-US" sz="1920" dirty="0">
                 <a:solidFill>
                   <a:srgbClr val="003A63"/>
                 </a:solidFill>
@@ -6283,16 +6283,16 @@
                 <a:ea typeface="Aptos" pitchFamily="34" charset="-122"/>
                 <a:cs typeface="Aptos" pitchFamily="34" charset="-120"/>
               </a:rPr>
-              <a:t>• Require stronger approval for write-back, external transmission, and automated actions.</a:t>
-            </a:r>
-            <a:endParaRPr lang="en-US" sz="2100" dirty="0"/>
-          </a:p>
-          <a:p>
-            <a:pPr indent="0" marL="0">
-              <a:buNone/>
-            </a:pPr>
-            <a:r>
-              <a:rPr lang="en-US" sz="2100" dirty="0">
+              <a:t>• Require stronger approval for write-back, external transmission, and.</a:t>
+            </a:r>
+            <a:endParaRPr lang="en-US" sz="1920" dirty="0"/>
+          </a:p>
+          <a:p>
+            <a:pPr indent="0" marL="0">
+              <a:buNone/>
+            </a:pPr>
+            <a:r>
+              <a:rPr lang="en-US" sz="1920" dirty="0">
                 <a:solidFill>
                   <a:srgbClr val="003A63"/>
                 </a:solidFill>
@@ -6302,14 +6302,14 @@
               </a:rPr>
               <a:t>• Avoid shared accounts and undocumented service identities.</a:t>
             </a:r>
-            <a:endParaRPr lang="en-US" sz="2100" dirty="0"/>
-          </a:p>
-          <a:p>
-            <a:pPr indent="0" marL="0">
-              <a:buNone/>
-            </a:pPr>
-            <a:r>
-              <a:rPr lang="en-US" sz="2100" dirty="0">
+            <a:endParaRPr lang="en-US" sz="1920" dirty="0"/>
+          </a:p>
+          <a:p>
+            <a:pPr indent="0" marL="0">
+              <a:buNone/>
+            </a:pPr>
+            <a:r>
+              <a:rPr lang="en-US" sz="1920" dirty="0">
                 <a:solidFill>
                   <a:srgbClr val="003A63"/>
                 </a:solidFill>
@@ -6319,7 +6319,7 @@
               </a:rPr>
               <a:t>• Maintain detailed audit logs for AI access and actions.</a:t>
             </a:r>
-            <a:endParaRPr lang="en-US" sz="2100" dirty="0"/>
+            <a:endParaRPr lang="en-US" sz="1920" dirty="0"/>
           </a:p>
         </p:txBody>
       </p:sp>
@@ -6331,12 +6331,12 @@
         </p:nvSpPr>
         <p:spPr>
           <a:xfrm>
-            <a:off x="7635240" y="1325880"/>
-            <a:ext cx="3474720" cy="1207008"/>
+            <a:off x="7543800" y="1325880"/>
+            <a:ext cx="3611880" cy="1261872"/>
           </a:xfrm>
           <a:prstGeom prst="roundRect">
             <a:avLst>
-              <a:gd name="adj" fmla="val 9091"/>
+              <a:gd name="adj" fmla="val 8696"/>
             </a:avLst>
           </a:prstGeom>
           <a:solidFill>
@@ -6358,8 +6358,8 @@
         </p:nvSpPr>
         <p:spPr>
           <a:xfrm>
-            <a:off x="7799832" y="1472184"/>
-            <a:ext cx="3145536" cy="256032"/>
+            <a:off x="7708392" y="1453896"/>
+            <a:ext cx="3282696" cy="228600"/>
           </a:xfrm>
           <a:prstGeom prst="rect">
             <a:avLst/>
@@ -6375,7 +6375,7 @@
               <a:buNone/>
             </a:pPr>
             <a:r>
-              <a:rPr lang="en-US" sz="1300" b="1" dirty="0">
+              <a:rPr lang="en-US" sz="1220" b="1" dirty="0">
                 <a:solidFill>
                   <a:srgbClr val="0068B7"/>
                 </a:solidFill>
@@ -6385,7 +6385,7 @@
               </a:rPr>
               <a:t>Risk check</a:t>
             </a:r>
-            <a:endParaRPr lang="en-US" sz="1300" dirty="0"/>
+            <a:endParaRPr lang="en-US" sz="1220" dirty="0"/>
           </a:p>
         </p:txBody>
       </p:sp>
@@ -6397,8 +6397,8 @@
         </p:nvSpPr>
         <p:spPr>
           <a:xfrm>
-            <a:off x="7799832" y="1801368"/>
-            <a:ext cx="3145536" cy="640080"/>
+            <a:off x="7708392" y="1764792"/>
+            <a:ext cx="3282696" cy="749808"/>
           </a:xfrm>
           <a:prstGeom prst="rect">
             <a:avLst/>
@@ -6416,7 +6416,7 @@
               <a:buNone/>
             </a:pPr>
             <a:r>
-              <a:rPr lang="en-US" sz="1320" dirty="0">
+              <a:rPr lang="en-US" sz="1220" dirty="0">
                 <a:solidFill>
                   <a:srgbClr val="17364A"/>
                 </a:solidFill>
@@ -6424,9 +6424,9 @@
                 <a:ea typeface="Aptos" pitchFamily="34" charset="-122"/>
                 <a:cs typeface="Aptos" pitchFamily="34" charset="-120"/>
               </a:rPr>
-              <a:t>Require stronger approval for write-back, external transmission, and automated actions.</a:t>
-            </a:r>
-            <a:endParaRPr lang="en-US" sz="1320" dirty="0"/>
+              <a:t>Require stronger approval for write-back, external transmission, and automated.</a:t>
+            </a:r>
+            <a:endParaRPr lang="en-US" sz="1220" dirty="0"/>
           </a:p>
         </p:txBody>
       </p:sp>
@@ -6438,12 +6438,12 @@
         </p:nvSpPr>
         <p:spPr>
           <a:xfrm>
-            <a:off x="7635240" y="2670048"/>
-            <a:ext cx="3474720" cy="1536192"/>
+            <a:off x="7543800" y="2724912"/>
+            <a:ext cx="3611880" cy="1527048"/>
           </a:xfrm>
           <a:prstGeom prst="roundRect">
             <a:avLst>
-              <a:gd name="adj" fmla="val 7143"/>
+              <a:gd name="adj" fmla="val 7186"/>
             </a:avLst>
           </a:prstGeom>
           <a:solidFill>
@@ -6465,8 +6465,8 @@
         </p:nvSpPr>
         <p:spPr>
           <a:xfrm>
-            <a:off x="7799832" y="2816352"/>
-            <a:ext cx="3145536" cy="256032"/>
+            <a:off x="7708392" y="2852928"/>
+            <a:ext cx="3282696" cy="228600"/>
           </a:xfrm>
           <a:prstGeom prst="rect">
             <a:avLst/>
@@ -6482,7 +6482,7 @@
               <a:buNone/>
             </a:pPr>
             <a:r>
-              <a:rPr lang="en-US" sz="1300" b="1" dirty="0">
+              <a:rPr lang="en-US" sz="1220" b="1" dirty="0">
                 <a:solidFill>
                   <a:srgbClr val="0068B7"/>
                 </a:solidFill>
@@ -6492,7 +6492,7 @@
               </a:rPr>
               <a:t>Concept checkpoints</a:t>
             </a:r>
-            <a:endParaRPr lang="en-US" sz="1300" dirty="0"/>
+            <a:endParaRPr lang="en-US" sz="1220" dirty="0"/>
           </a:p>
         </p:txBody>
       </p:sp>
@@ -6504,8 +6504,8 @@
         </p:nvSpPr>
         <p:spPr>
           <a:xfrm>
-            <a:off x="7818120" y="3182112"/>
-            <a:ext cx="3090672" cy="877824"/>
+            <a:off x="7726680" y="3182112"/>
+            <a:ext cx="3227832" cy="960120"/>
           </a:xfrm>
           <a:prstGeom prst="rect">
             <a:avLst/>
@@ -6523,7 +6523,7 @@
               <a:buNone/>
             </a:pPr>
             <a:r>
-              <a:rPr lang="en-US" sz="1220" dirty="0">
+              <a:rPr lang="en-US" sz="1140" dirty="0">
                 <a:solidFill>
                   <a:srgbClr val="17364A"/>
                 </a:solidFill>
@@ -6531,16 +6531,16 @@
                 <a:ea typeface="Aptos" pitchFamily="34" charset="-122"/>
                 <a:cs typeface="Aptos" pitchFamily="34" charset="-120"/>
               </a:rPr>
-              <a:t>Require stronger approval for write-back, external transmission,.</a:t>
-            </a:r>
-            <a:endParaRPr lang="en-US" sz="1220" dirty="0"/>
-          </a:p>
-          <a:p>
-            <a:pPr indent="0" marL="0">
-              <a:buNone/>
-            </a:pPr>
-            <a:r>
-              <a:rPr lang="en-US" sz="1220" dirty="0">
+              <a:t>Require stronger approval for write-back, external.</a:t>
+            </a:r>
+            <a:endParaRPr lang="en-US" sz="1140" dirty="0"/>
+          </a:p>
+          <a:p>
+            <a:pPr indent="0" marL="0">
+              <a:buNone/>
+            </a:pPr>
+            <a:r>
+              <a:rPr lang="en-US" sz="1140" dirty="0">
                 <a:solidFill>
                   <a:srgbClr val="17364A"/>
                 </a:solidFill>
@@ -6548,16 +6548,16 @@
                 <a:ea typeface="Aptos" pitchFamily="34" charset="-122"/>
                 <a:cs typeface="Aptos" pitchFamily="34" charset="-120"/>
               </a:rPr>
-              <a:t>Avoid shared accounts and undocumented service identities.</a:t>
-            </a:r>
-            <a:endParaRPr lang="en-US" sz="1220" dirty="0"/>
-          </a:p>
-          <a:p>
-            <a:pPr indent="0" marL="0">
-              <a:buNone/>
-            </a:pPr>
-            <a:r>
-              <a:rPr lang="en-US" sz="1220" dirty="0">
+              <a:t>Avoid shared accounts and undocumented service.</a:t>
+            </a:r>
+            <a:endParaRPr lang="en-US" sz="1140" dirty="0"/>
+          </a:p>
+          <a:p>
+            <a:pPr indent="0" marL="0">
+              <a:buNone/>
+            </a:pPr>
+            <a:r>
+              <a:rPr lang="en-US" sz="1140" dirty="0">
                 <a:solidFill>
                   <a:srgbClr val="17364A"/>
                 </a:solidFill>
@@ -6565,9 +6565,9 @@
                 <a:ea typeface="Aptos" pitchFamily="34" charset="-122"/>
                 <a:cs typeface="Aptos" pitchFamily="34" charset="-120"/>
               </a:rPr>
-              <a:t>Maintain detailed audit logs for AI access and actions.</a:t>
-            </a:r>
-            <a:endParaRPr lang="en-US" sz="1220" dirty="0"/>
+              <a:t>Maintain detailed audit logs for AI access and.</a:t>
+            </a:r>
+            <a:endParaRPr lang="en-US" sz="1140" dirty="0"/>
           </a:p>
         </p:txBody>
       </p:sp>
@@ -6579,12 +6579,12 @@
         </p:nvSpPr>
         <p:spPr>
           <a:xfrm>
-            <a:off x="7635240" y="4343400"/>
-            <a:ext cx="3474720" cy="1255471"/>
+            <a:off x="7543800" y="4389120"/>
+            <a:ext cx="3611880" cy="1261872"/>
           </a:xfrm>
           <a:prstGeom prst="roundRect">
             <a:avLst>
-              <a:gd name="adj" fmla="val 8740"/>
+              <a:gd name="adj" fmla="val 8696"/>
             </a:avLst>
           </a:prstGeom>
           <a:solidFill>
@@ -6606,8 +6606,8 @@
         </p:nvSpPr>
         <p:spPr>
           <a:xfrm>
-            <a:off x="7799832" y="4489704"/>
-            <a:ext cx="3145536" cy="256032"/>
+            <a:off x="7708392" y="4517136"/>
+            <a:ext cx="3282696" cy="228600"/>
           </a:xfrm>
           <a:prstGeom prst="rect">
             <a:avLst/>
@@ -6623,7 +6623,7 @@
               <a:buNone/>
             </a:pPr>
             <a:r>
-              <a:rPr lang="en-US" sz="1300" b="1" dirty="0">
+              <a:rPr lang="en-US" sz="1220" b="1" dirty="0">
                 <a:solidFill>
                   <a:srgbClr val="0068B7"/>
                 </a:solidFill>
@@ -6633,7 +6633,7 @@
               </a:rPr>
               <a:t>Safeguard to plan</a:t>
             </a:r>
-            <a:endParaRPr lang="en-US" sz="1300" dirty="0"/>
+            <a:endParaRPr lang="en-US" sz="1220" dirty="0"/>
           </a:p>
         </p:txBody>
       </p:sp>
@@ -6645,8 +6645,8 @@
         </p:nvSpPr>
         <p:spPr>
           <a:xfrm>
-            <a:off x="7799832" y="4818888"/>
-            <a:ext cx="3145536" cy="688543"/>
+            <a:off x="7708392" y="4828032"/>
+            <a:ext cx="3282696" cy="749808"/>
           </a:xfrm>
           <a:prstGeom prst="rect">
             <a:avLst/>
@@ -6664,7 +6664,7 @@
               <a:buNone/>
             </a:pPr>
             <a:r>
-              <a:rPr lang="en-US" sz="1320" dirty="0">
+              <a:rPr lang="en-US" sz="1220" dirty="0">
                 <a:solidFill>
                   <a:srgbClr val="17364A"/>
                 </a:solidFill>
@@ -6672,9 +6672,9 @@
                 <a:ea typeface="Aptos" pitchFamily="34" charset="-122"/>
                 <a:cs typeface="Aptos" pitchFamily="34" charset="-120"/>
               </a:rPr>
-              <a:t>Identify what could go wrong, who could be affected, what safeguards are needed, and what evidence should be reviewed before use.</a:t>
-            </a:r>
-            <a:endParaRPr lang="en-US" sz="1320" dirty="0"/>
+              <a:t>Identify what could go wrong, who could be affected, what safeguards are needed,.</a:t>
+            </a:r>
+            <a:endParaRPr lang="en-US" sz="1220" dirty="0"/>
           </a:p>
         </p:txBody>
       </p:sp>
@@ -6965,8 +6965,8 @@
         </p:nvSpPr>
         <p:spPr>
           <a:xfrm>
-            <a:off x="868680" y="1508760"/>
-            <a:ext cx="6309360" cy="4160520"/>
+            <a:off x="822960" y="1463040"/>
+            <a:ext cx="6565392" cy="4343400"/>
           </a:xfrm>
           <a:prstGeom prst="rect">
             <a:avLst/>
@@ -6984,7 +6984,7 @@
               <a:buNone/>
             </a:pPr>
             <a:r>
-              <a:rPr lang="en-US" sz="2100" dirty="0">
+              <a:rPr lang="en-US" sz="1920" dirty="0">
                 <a:solidFill>
                   <a:srgbClr val="003A63"/>
                 </a:solidFill>
@@ -6994,14 +6994,14 @@
               </a:rPr>
               <a:t>• Where does this topic appear in your agency, program, or workflow?</a:t>
             </a:r>
-            <a:endParaRPr lang="en-US" sz="2100" dirty="0"/>
-          </a:p>
-          <a:p>
-            <a:pPr indent="0" marL="0">
-              <a:buNone/>
-            </a:pPr>
-            <a:r>
-              <a:rPr lang="en-US" sz="2100" dirty="0">
+            <a:endParaRPr lang="en-US" sz="1920" dirty="0"/>
+          </a:p>
+          <a:p>
+            <a:pPr indent="0" marL="0">
+              <a:buNone/>
+            </a:pPr>
+            <a:r>
+              <a:rPr lang="en-US" sz="1920" dirty="0">
                 <a:solidFill>
                   <a:srgbClr val="003A63"/>
                 </a:solidFill>
@@ -7009,16 +7009,16 @@
                 <a:ea typeface="Aptos" pitchFamily="34" charset="-122"/>
                 <a:cs typeface="Aptos" pitchFamily="34" charset="-120"/>
               </a:rPr>
-              <a:t>• Which staff roles would need to understand or apply this concept before AI use is approved?</a:t>
-            </a:r>
-            <a:endParaRPr lang="en-US" sz="2100" dirty="0"/>
-          </a:p>
-          <a:p>
-            <a:pPr indent="0" marL="0">
-              <a:buNone/>
-            </a:pPr>
-            <a:r>
-              <a:rPr lang="en-US" sz="2100" dirty="0">
+              <a:t>• Which staff roles would need to understand or apply this concept before AI.</a:t>
+            </a:r>
+            <a:endParaRPr lang="en-US" sz="1920" dirty="0"/>
+          </a:p>
+          <a:p>
+            <a:pPr indent="0" marL="0">
+              <a:buNone/>
+            </a:pPr>
+            <a:r>
+              <a:rPr lang="en-US" sz="1920" dirty="0">
                 <a:solidFill>
                   <a:srgbClr val="003A63"/>
                 </a:solidFill>
@@ -7028,7 +7028,7 @@
               </a:rPr>
               <a:t>• What could go wrong if this topic is not addressed before implementation?</a:t>
             </a:r>
-            <a:endParaRPr lang="en-US" sz="2100" dirty="0"/>
+            <a:endParaRPr lang="en-US" sz="1920" dirty="0"/>
           </a:p>
         </p:txBody>
       </p:sp>
@@ -7040,12 +7040,12 @@
         </p:nvSpPr>
         <p:spPr>
           <a:xfrm>
-            <a:off x="7635240" y="1325880"/>
-            <a:ext cx="3474720" cy="1207008"/>
+            <a:off x="7543800" y="1325880"/>
+            <a:ext cx="3611880" cy="1261872"/>
           </a:xfrm>
           <a:prstGeom prst="roundRect">
             <a:avLst>
-              <a:gd name="adj" fmla="val 9091"/>
+              <a:gd name="adj" fmla="val 8696"/>
             </a:avLst>
           </a:prstGeom>
           <a:solidFill>
@@ -7067,8 +7067,8 @@
         </p:nvSpPr>
         <p:spPr>
           <a:xfrm>
-            <a:off x="7799832" y="1472184"/>
-            <a:ext cx="3145536" cy="256032"/>
+            <a:off x="7708392" y="1453896"/>
+            <a:ext cx="3282696" cy="228600"/>
           </a:xfrm>
           <a:prstGeom prst="rect">
             <a:avLst/>
@@ -7084,7 +7084,7 @@
               <a:buNone/>
             </a:pPr>
             <a:r>
-              <a:rPr lang="en-US" sz="1300" b="1" dirty="0">
+              <a:rPr lang="en-US" sz="1220" b="1" dirty="0">
                 <a:solidFill>
                   <a:srgbClr val="0068B7"/>
                 </a:solidFill>
@@ -7094,7 +7094,7 @@
               </a:rPr>
               <a:t>Implementation cue</a:t>
             </a:r>
-            <a:endParaRPr lang="en-US" sz="1300" dirty="0"/>
+            <a:endParaRPr lang="en-US" sz="1220" dirty="0"/>
           </a:p>
         </p:txBody>
       </p:sp>
@@ -7106,8 +7106,8 @@
         </p:nvSpPr>
         <p:spPr>
           <a:xfrm>
-            <a:off x="7799832" y="1801368"/>
-            <a:ext cx="3145536" cy="640080"/>
+            <a:off x="7708392" y="1764792"/>
+            <a:ext cx="3282696" cy="749808"/>
           </a:xfrm>
           <a:prstGeom prst="rect">
             <a:avLst/>
@@ -7125,7 +7125,7 @@
               <a:buNone/>
             </a:pPr>
             <a:r>
-              <a:rPr lang="en-US" sz="1320" dirty="0">
+              <a:rPr lang="en-US" sz="1220" dirty="0">
                 <a:solidFill>
                   <a:srgbClr val="17364A"/>
                 </a:solidFill>
@@ -7135,7 +7135,7 @@
               </a:rPr>
               <a:t>Where does this topic appear in your agency, program, or workflow?</a:t>
             </a:r>
-            <a:endParaRPr lang="en-US" sz="1320" dirty="0"/>
+            <a:endParaRPr lang="en-US" sz="1220" dirty="0"/>
           </a:p>
         </p:txBody>
       </p:sp>
@@ -7147,12 +7147,12 @@
         </p:nvSpPr>
         <p:spPr>
           <a:xfrm>
-            <a:off x="7635240" y="2670048"/>
-            <a:ext cx="3474720" cy="1377086"/>
+            <a:off x="7543800" y="2724912"/>
+            <a:ext cx="3611880" cy="1527048"/>
           </a:xfrm>
           <a:prstGeom prst="roundRect">
             <a:avLst>
-              <a:gd name="adj" fmla="val 7968"/>
+              <a:gd name="adj" fmla="val 7186"/>
             </a:avLst>
           </a:prstGeom>
           <a:solidFill>
@@ -7174,8 +7174,8 @@
         </p:nvSpPr>
         <p:spPr>
           <a:xfrm>
-            <a:off x="7799832" y="2816352"/>
-            <a:ext cx="3145536" cy="256032"/>
+            <a:off x="7708392" y="2852928"/>
+            <a:ext cx="3282696" cy="228600"/>
           </a:xfrm>
           <a:prstGeom prst="rect">
             <a:avLst/>
@@ -7191,7 +7191,7 @@
               <a:buNone/>
             </a:pPr>
             <a:r>
-              <a:rPr lang="en-US" sz="1300" b="1" dirty="0">
+              <a:rPr lang="en-US" sz="1220" b="1" dirty="0">
                 <a:solidFill>
                   <a:srgbClr val="0068B7"/>
                 </a:solidFill>
@@ -7201,7 +7201,7 @@
               </a:rPr>
               <a:t>Concept checkpoints</a:t>
             </a:r>
-            <a:endParaRPr lang="en-US" sz="1300" dirty="0"/>
+            <a:endParaRPr lang="en-US" sz="1220" dirty="0"/>
           </a:p>
         </p:txBody>
       </p:sp>
@@ -7213,8 +7213,8 @@
         </p:nvSpPr>
         <p:spPr>
           <a:xfrm>
-            <a:off x="7818120" y="3182112"/>
-            <a:ext cx="3090672" cy="718718"/>
+            <a:off x="7726680" y="3182112"/>
+            <a:ext cx="3227832" cy="960120"/>
           </a:xfrm>
           <a:prstGeom prst="rect">
             <a:avLst/>
@@ -7232,7 +7232,7 @@
               <a:buNone/>
             </a:pPr>
             <a:r>
-              <a:rPr lang="en-US" sz="1220" dirty="0">
+              <a:rPr lang="en-US" sz="1140" dirty="0">
                 <a:solidFill>
                   <a:srgbClr val="17364A"/>
                 </a:solidFill>
@@ -7240,16 +7240,16 @@
                 <a:ea typeface="Aptos" pitchFamily="34" charset="-122"/>
                 <a:cs typeface="Aptos" pitchFamily="34" charset="-120"/>
               </a:rPr>
-              <a:t>Where does this topic appear in your agency, program, or workflow?</a:t>
-            </a:r>
-            <a:endParaRPr lang="en-US" sz="1220" dirty="0"/>
-          </a:p>
-          <a:p>
-            <a:pPr indent="0" marL="0">
-              <a:buNone/>
-            </a:pPr>
-            <a:r>
-              <a:rPr lang="en-US" sz="1220" dirty="0">
+              <a:t>Where does this topic appear in your agency,.</a:t>
+            </a:r>
+            <a:endParaRPr lang="en-US" sz="1140" dirty="0"/>
+          </a:p>
+          <a:p>
+            <a:pPr indent="0" marL="0">
+              <a:buNone/>
+            </a:pPr>
+            <a:r>
+              <a:rPr lang="en-US" sz="1140" dirty="0">
                 <a:solidFill>
                   <a:srgbClr val="17364A"/>
                 </a:solidFill>
@@ -7257,16 +7257,16 @@
                 <a:ea typeface="Aptos" pitchFamily="34" charset="-122"/>
                 <a:cs typeface="Aptos" pitchFamily="34" charset="-120"/>
               </a:rPr>
-              <a:t>Which staff roles would need to understand or apply this concept.</a:t>
-            </a:r>
-            <a:endParaRPr lang="en-US" sz="1220" dirty="0"/>
-          </a:p>
-          <a:p>
-            <a:pPr indent="0" marL="0">
-              <a:buNone/>
-            </a:pPr>
-            <a:r>
-              <a:rPr lang="en-US" sz="1220" dirty="0">
+              <a:t>Which staff roles would need to understand or.</a:t>
+            </a:r>
+            <a:endParaRPr lang="en-US" sz="1140" dirty="0"/>
+          </a:p>
+          <a:p>
+            <a:pPr indent="0" marL="0">
+              <a:buNone/>
+            </a:pPr>
+            <a:r>
+              <a:rPr lang="en-US" sz="1140" dirty="0">
                 <a:solidFill>
                   <a:srgbClr val="17364A"/>
                 </a:solidFill>
@@ -7274,9 +7274,9 @@
                 <a:ea typeface="Aptos" pitchFamily="34" charset="-122"/>
                 <a:cs typeface="Aptos" pitchFamily="34" charset="-120"/>
               </a:rPr>
-              <a:t>What could go wrong if this topic is not addressed before.</a:t>
-            </a:r>
-            <a:endParaRPr lang="en-US" sz="1220" dirty="0"/>
+              <a:t>What could go wrong if this topic is not addressed.</a:t>
+            </a:r>
+            <a:endParaRPr lang="en-US" sz="1140" dirty="0"/>
           </a:p>
         </p:txBody>
       </p:sp>
@@ -7288,12 +7288,12 @@
         </p:nvSpPr>
         <p:spPr>
           <a:xfrm>
-            <a:off x="7635240" y="4184294"/>
-            <a:ext cx="3474720" cy="1466698"/>
+            <a:off x="7543800" y="4389120"/>
+            <a:ext cx="3611880" cy="1261872"/>
           </a:xfrm>
           <a:prstGeom prst="roundRect">
             <a:avLst>
-              <a:gd name="adj" fmla="val 7481"/>
+              <a:gd name="adj" fmla="val 8696"/>
             </a:avLst>
           </a:prstGeom>
           <a:solidFill>
@@ -7315,8 +7315,8 @@
         </p:nvSpPr>
         <p:spPr>
           <a:xfrm>
-            <a:off x="7799832" y="4330598"/>
-            <a:ext cx="3145536" cy="256032"/>
+            <a:off x="7708392" y="4517136"/>
+            <a:ext cx="3282696" cy="228600"/>
           </a:xfrm>
           <a:prstGeom prst="rect">
             <a:avLst/>
@@ -7332,7 +7332,7 @@
               <a:buNone/>
             </a:pPr>
             <a:r>
-              <a:rPr lang="en-US" sz="1300" b="1" dirty="0">
+              <a:rPr lang="en-US" sz="1220" b="1" dirty="0">
                 <a:solidFill>
                   <a:srgbClr val="0068B7"/>
                 </a:solidFill>
@@ -7342,7 +7342,7 @@
               </a:rPr>
               <a:t>Next action</a:t>
             </a:r>
-            <a:endParaRPr lang="en-US" sz="1300" dirty="0"/>
+            <a:endParaRPr lang="en-US" sz="1220" dirty="0"/>
           </a:p>
         </p:txBody>
       </p:sp>
@@ -7354,8 +7354,8 @@
         </p:nvSpPr>
         <p:spPr>
           <a:xfrm>
-            <a:off x="7799832" y="4659782"/>
-            <a:ext cx="3145536" cy="899770"/>
+            <a:off x="7708392" y="4828032"/>
+            <a:ext cx="3282696" cy="749808"/>
           </a:xfrm>
           <a:prstGeom prst="rect">
             <a:avLst/>
@@ -7373,7 +7373,7 @@
               <a:buNone/>
             </a:pPr>
             <a:r>
-              <a:rPr lang="en-US" sz="1320" dirty="0">
+              <a:rPr lang="en-US" sz="1220" dirty="0">
                 <a:solidFill>
                   <a:srgbClr val="17364A"/>
                 </a:solidFill>
@@ -7381,9 +7381,9 @@
                 <a:ea typeface="Aptos" pitchFamily="34" charset="-122"/>
                 <a:cs typeface="Aptos" pitchFamily="34" charset="-120"/>
               </a:rPr>
-              <a:t>Use the concept to clarify workflow changes, dependencies, staffing, procurement requirements, training needs, and implementation checkpoints.</a:t>
-            </a:r>
-            <a:endParaRPr lang="en-US" sz="1320" dirty="0"/>
+              <a:t>Use the concept to clarify workflow changes, dependencies, staffing, procurement.</a:t>
+            </a:r>
+            <a:endParaRPr lang="en-US" sz="1220" dirty="0"/>
           </a:p>
         </p:txBody>
       </p:sp>
@@ -7674,8 +7674,8 @@
         </p:nvSpPr>
         <p:spPr>
           <a:xfrm>
-            <a:off x="868680" y="1508760"/>
-            <a:ext cx="6309360" cy="4160520"/>
+            <a:off x="822960" y="1463040"/>
+            <a:ext cx="6565392" cy="4343400"/>
           </a:xfrm>
           <a:prstGeom prst="rect">
             <a:avLst/>
@@ -7693,7 +7693,7 @@
               <a:buNone/>
             </a:pPr>
             <a:r>
-              <a:rPr lang="en-US" sz="2100" dirty="0">
+              <a:rPr lang="en-US" sz="1920" dirty="0">
                 <a:solidFill>
                   <a:srgbClr val="003A63"/>
                 </a:solidFill>
@@ -7701,16 +7701,16 @@
                 <a:ea typeface="Aptos" pitchFamily="34" charset="-122"/>
                 <a:cs typeface="Aptos" pitchFamily="34" charset="-120"/>
               </a:rPr>
-              <a:t>• What evidence would governance, leadership, or operations staff need before moving forward?</a:t>
-            </a:r>
-            <a:endParaRPr lang="en-US" sz="2100" dirty="0"/>
-          </a:p>
-          <a:p>
-            <a:pPr indent="0" marL="0">
-              <a:buNone/>
-            </a:pPr>
-            <a:r>
-              <a:rPr lang="en-US" sz="2100" dirty="0">
+              <a:t>• What evidence would governance, leadership, or operations staff need before.</a:t>
+            </a:r>
+            <a:endParaRPr lang="en-US" sz="1920" dirty="0"/>
+          </a:p>
+          <a:p>
+            <a:pPr indent="0" marL="0">
+              <a:buNone/>
+            </a:pPr>
+            <a:r>
+              <a:rPr lang="en-US" sz="1920" dirty="0">
                 <a:solidFill>
                   <a:srgbClr val="003A63"/>
                 </a:solidFill>
@@ -7718,9 +7718,9 @@
                 <a:ea typeface="Aptos" pitchFamily="34" charset="-122"/>
                 <a:cs typeface="Aptos" pitchFamily="34" charset="-120"/>
               </a:rPr>
-              <a:t>• Which policy, data, equity, privacy, security, or workflow questions remain unresolved?</a:t>
-            </a:r>
-            <a:endParaRPr lang="en-US" sz="2100" dirty="0"/>
+              <a:t>• Which policy, data, equity, privacy, security, or workflow questions remain.</a:t>
+            </a:r>
+            <a:endParaRPr lang="en-US" sz="1920" dirty="0"/>
           </a:p>
         </p:txBody>
       </p:sp>
@@ -7732,12 +7732,12 @@
         </p:nvSpPr>
         <p:spPr>
           <a:xfrm>
-            <a:off x="7635240" y="1325880"/>
-            <a:ext cx="3474720" cy="1207008"/>
+            <a:off x="7543800" y="1325880"/>
+            <a:ext cx="3611880" cy="1261872"/>
           </a:xfrm>
           <a:prstGeom prst="roundRect">
             <a:avLst>
-              <a:gd name="adj" fmla="val 9091"/>
+              <a:gd name="adj" fmla="val 8696"/>
             </a:avLst>
           </a:prstGeom>
           <a:solidFill>
@@ -7759,8 +7759,8 @@
         </p:nvSpPr>
         <p:spPr>
           <a:xfrm>
-            <a:off x="7799832" y="1472184"/>
-            <a:ext cx="3145536" cy="256032"/>
+            <a:off x="7708392" y="1453896"/>
+            <a:ext cx="3282696" cy="228600"/>
           </a:xfrm>
           <a:prstGeom prst="rect">
             <a:avLst/>
@@ -7776,7 +7776,7 @@
               <a:buNone/>
             </a:pPr>
             <a:r>
-              <a:rPr lang="en-US" sz="1300" b="1" dirty="0">
+              <a:rPr lang="en-US" sz="1220" b="1" dirty="0">
                 <a:solidFill>
                   <a:srgbClr val="0068B7"/>
                 </a:solidFill>
@@ -7786,7 +7786,7 @@
               </a:rPr>
               <a:t>Implementation cue</a:t>
             </a:r>
-            <a:endParaRPr lang="en-US" sz="1300" dirty="0"/>
+            <a:endParaRPr lang="en-US" sz="1220" dirty="0"/>
           </a:p>
         </p:txBody>
       </p:sp>
@@ -7798,8 +7798,8 @@
         </p:nvSpPr>
         <p:spPr>
           <a:xfrm>
-            <a:off x="7799832" y="1801368"/>
-            <a:ext cx="3145536" cy="640080"/>
+            <a:off x="7708392" y="1764792"/>
+            <a:ext cx="3282696" cy="749808"/>
           </a:xfrm>
           <a:prstGeom prst="rect">
             <a:avLst/>
@@ -7817,7 +7817,7 @@
               <a:buNone/>
             </a:pPr>
             <a:r>
-              <a:rPr lang="en-US" sz="1320" dirty="0">
+              <a:rPr lang="en-US" sz="1220" dirty="0">
                 <a:solidFill>
                   <a:srgbClr val="17364A"/>
                 </a:solidFill>
@@ -7825,9 +7825,9 @@
                 <a:ea typeface="Aptos" pitchFamily="34" charset="-122"/>
                 <a:cs typeface="Aptos" pitchFamily="34" charset="-120"/>
               </a:rPr>
-              <a:t>What evidence would governance, leadership, or operations staff need before moving.</a:t>
-            </a:r>
-            <a:endParaRPr lang="en-US" sz="1320" dirty="0"/>
+              <a:t>What evidence would governance, leadership, or operations staff need before.</a:t>
+            </a:r>
+            <a:endParaRPr lang="en-US" sz="1220" dirty="0"/>
           </a:p>
         </p:txBody>
       </p:sp>
@@ -7839,12 +7839,12 @@
         </p:nvSpPr>
         <p:spPr>
           <a:xfrm>
-            <a:off x="7635240" y="2670048"/>
-            <a:ext cx="3474720" cy="1377086"/>
+            <a:off x="7543800" y="2724912"/>
+            <a:ext cx="3611880" cy="1527048"/>
           </a:xfrm>
           <a:prstGeom prst="roundRect">
             <a:avLst>
-              <a:gd name="adj" fmla="val 7968"/>
+              <a:gd name="adj" fmla="val 7186"/>
             </a:avLst>
           </a:prstGeom>
           <a:solidFill>
@@ -7866,8 +7866,8 @@
         </p:nvSpPr>
         <p:spPr>
           <a:xfrm>
-            <a:off x="7799832" y="2816352"/>
-            <a:ext cx="3145536" cy="256032"/>
+            <a:off x="7708392" y="2852928"/>
+            <a:ext cx="3282696" cy="228600"/>
           </a:xfrm>
           <a:prstGeom prst="rect">
             <a:avLst/>
@@ -7883,7 +7883,7 @@
               <a:buNone/>
             </a:pPr>
             <a:r>
-              <a:rPr lang="en-US" sz="1300" b="1" dirty="0">
+              <a:rPr lang="en-US" sz="1220" b="1" dirty="0">
                 <a:solidFill>
                   <a:srgbClr val="0068B7"/>
                 </a:solidFill>
@@ -7893,7 +7893,7 @@
               </a:rPr>
               <a:t>Concept checkpoints</a:t>
             </a:r>
-            <a:endParaRPr lang="en-US" sz="1300" dirty="0"/>
+            <a:endParaRPr lang="en-US" sz="1220" dirty="0"/>
           </a:p>
         </p:txBody>
       </p:sp>
@@ -7905,8 +7905,8 @@
         </p:nvSpPr>
         <p:spPr>
           <a:xfrm>
-            <a:off x="7818120" y="3182112"/>
-            <a:ext cx="3090672" cy="718718"/>
+            <a:off x="7726680" y="3182112"/>
+            <a:ext cx="3227832" cy="960120"/>
           </a:xfrm>
           <a:prstGeom prst="rect">
             <a:avLst/>
@@ -7924,7 +7924,7 @@
               <a:buNone/>
             </a:pPr>
             <a:r>
-              <a:rPr lang="en-US" sz="1220" dirty="0">
+              <a:rPr lang="en-US" sz="1140" dirty="0">
                 <a:solidFill>
                   <a:srgbClr val="17364A"/>
                 </a:solidFill>
@@ -7932,16 +7932,16 @@
                 <a:ea typeface="Aptos" pitchFamily="34" charset="-122"/>
                 <a:cs typeface="Aptos" pitchFamily="34" charset="-120"/>
               </a:rPr>
-              <a:t>What evidence would governance, leadership, or operations staff.</a:t>
-            </a:r>
-            <a:endParaRPr lang="en-US" sz="1220" dirty="0"/>
-          </a:p>
-          <a:p>
-            <a:pPr indent="0" marL="0">
-              <a:buNone/>
-            </a:pPr>
-            <a:r>
-              <a:rPr lang="en-US" sz="1220" dirty="0">
+              <a:t>What evidence would governance, leadership, or.</a:t>
+            </a:r>
+            <a:endParaRPr lang="en-US" sz="1140" dirty="0"/>
+          </a:p>
+          <a:p>
+            <a:pPr indent="0" marL="0">
+              <a:buNone/>
+            </a:pPr>
+            <a:r>
+              <a:rPr lang="en-US" sz="1140" dirty="0">
                 <a:solidFill>
                   <a:srgbClr val="17364A"/>
                 </a:solidFill>
@@ -7949,9 +7949,9 @@
                 <a:ea typeface="Aptos" pitchFamily="34" charset="-122"/>
                 <a:cs typeface="Aptos" pitchFamily="34" charset="-120"/>
               </a:rPr>
-              <a:t>Which policy, data, equity, privacy, security, or workflow.</a:t>
-            </a:r>
-            <a:endParaRPr lang="en-US" sz="1220" dirty="0"/>
+              <a:t>Which policy, data, equity, privacy, security, or.</a:t>
+            </a:r>
+            <a:endParaRPr lang="en-US" sz="1140" dirty="0"/>
           </a:p>
         </p:txBody>
       </p:sp>
@@ -7963,12 +7963,12 @@
         </p:nvSpPr>
         <p:spPr>
           <a:xfrm>
-            <a:off x="7635240" y="4184294"/>
-            <a:ext cx="3474720" cy="1466698"/>
+            <a:off x="7543800" y="4389120"/>
+            <a:ext cx="3611880" cy="1261872"/>
           </a:xfrm>
           <a:prstGeom prst="roundRect">
             <a:avLst>
-              <a:gd name="adj" fmla="val 7481"/>
+              <a:gd name="adj" fmla="val 8696"/>
             </a:avLst>
           </a:prstGeom>
           <a:solidFill>
@@ -7990,8 +7990,8 @@
         </p:nvSpPr>
         <p:spPr>
           <a:xfrm>
-            <a:off x="7799832" y="4330598"/>
-            <a:ext cx="3145536" cy="256032"/>
+            <a:off x="7708392" y="4517136"/>
+            <a:ext cx="3282696" cy="228600"/>
           </a:xfrm>
           <a:prstGeom prst="rect">
             <a:avLst/>
@@ -8007,7 +8007,7 @@
               <a:buNone/>
             </a:pPr>
             <a:r>
-              <a:rPr lang="en-US" sz="1300" b="1" dirty="0">
+              <a:rPr lang="en-US" sz="1220" b="1" dirty="0">
                 <a:solidFill>
                   <a:srgbClr val="0068B7"/>
                 </a:solidFill>
@@ -8017,7 +8017,7 @@
               </a:rPr>
               <a:t>Next action</a:t>
             </a:r>
-            <a:endParaRPr lang="en-US" sz="1300" dirty="0"/>
+            <a:endParaRPr lang="en-US" sz="1220" dirty="0"/>
           </a:p>
         </p:txBody>
       </p:sp>
@@ -8029,8 +8029,8 @@
         </p:nvSpPr>
         <p:spPr>
           <a:xfrm>
-            <a:off x="7799832" y="4659782"/>
-            <a:ext cx="3145536" cy="899770"/>
+            <a:off x="7708392" y="4828032"/>
+            <a:ext cx="3282696" cy="749808"/>
           </a:xfrm>
           <a:prstGeom prst="rect">
             <a:avLst/>
@@ -8048,7 +8048,7 @@
               <a:buNone/>
             </a:pPr>
             <a:r>
-              <a:rPr lang="en-US" sz="1320" dirty="0">
+              <a:rPr lang="en-US" sz="1220" dirty="0">
                 <a:solidFill>
                   <a:srgbClr val="17364A"/>
                 </a:solidFill>
@@ -8056,9 +8056,9 @@
                 <a:ea typeface="Aptos" pitchFamily="34" charset="-122"/>
                 <a:cs typeface="Aptos" pitchFamily="34" charset="-120"/>
               </a:rPr>
-              <a:t>Use the concept to clarify workflow changes, dependencies, staffing, procurement requirements, training needs, and implementation checkpoints.</a:t>
-            </a:r>
-            <a:endParaRPr lang="en-US" sz="1320" dirty="0"/>
+              <a:t>Use the concept to clarify workflow changes, dependencies, staffing, procurement.</a:t>
+            </a:r>
+            <a:endParaRPr lang="en-US" sz="1220" dirty="0"/>
           </a:p>
         </p:txBody>
       </p:sp>
@@ -8349,8 +8349,8 @@
         </p:nvSpPr>
         <p:spPr>
           <a:xfrm>
-            <a:off x="868680" y="1508760"/>
-            <a:ext cx="6309360" cy="4160520"/>
+            <a:off x="822960" y="1463040"/>
+            <a:ext cx="6565392" cy="4343400"/>
           </a:xfrm>
           <a:prstGeom prst="rect">
             <a:avLst/>
@@ -8368,7 +8368,7 @@
               <a:buNone/>
             </a:pPr>
             <a:r>
-              <a:rPr lang="en-US" sz="2100" dirty="0">
+              <a:rPr lang="en-US" sz="1920" dirty="0">
                 <a:solidFill>
                   <a:srgbClr val="003A63"/>
                 </a:solidFill>
@@ -8376,16 +8376,16 @@
                 <a:ea typeface="Aptos" pitchFamily="34" charset="-122"/>
                 <a:cs typeface="Aptos" pitchFamily="34" charset="-120"/>
               </a:rPr>
-              <a:t>• Create an identity, access, and permissions review for one AI-supported workflow.</a:t>
-            </a:r>
-            <a:endParaRPr lang="en-US" sz="2100" dirty="0"/>
-          </a:p>
-          <a:p>
-            <a:pPr indent="0" marL="0">
-              <a:buNone/>
-            </a:pPr>
-            <a:r>
-              <a:rPr lang="en-US" sz="2100" dirty="0">
+              <a:t>• Create an identity, access, and permissions review for one AI-supported.</a:t>
+            </a:r>
+            <a:endParaRPr lang="en-US" sz="1920" dirty="0"/>
+          </a:p>
+          <a:p>
+            <a:pPr indent="0" marL="0">
+              <a:buNone/>
+            </a:pPr>
+            <a:r>
+              <a:rPr lang="en-US" sz="1920" dirty="0">
                 <a:solidFill>
                   <a:srgbClr val="003A63"/>
                 </a:solidFill>
@@ -8393,9 +8393,9 @@
                 <a:ea typeface="Aptos" pitchFamily="34" charset="-122"/>
                 <a:cs typeface="Aptos" pitchFamily="34" charset="-120"/>
               </a:rPr>
-              <a:t>• Identify users, service accounts, systems, data accessed, read/write permissions, approval.</a:t>
-            </a:r>
-            <a:endParaRPr lang="en-US" sz="2100" dirty="0"/>
+              <a:t>• Identify users, service accounts, systems, data accessed, read/write.</a:t>
+            </a:r>
+            <a:endParaRPr lang="en-US" sz="1920" dirty="0"/>
           </a:p>
         </p:txBody>
       </p:sp>
@@ -8407,12 +8407,12 @@
         </p:nvSpPr>
         <p:spPr>
           <a:xfrm>
-            <a:off x="7635240" y="1325880"/>
-            <a:ext cx="3474720" cy="1207008"/>
+            <a:off x="7543800" y="1325880"/>
+            <a:ext cx="3611880" cy="1261872"/>
           </a:xfrm>
           <a:prstGeom prst="roundRect">
             <a:avLst>
-              <a:gd name="adj" fmla="val 9091"/>
+              <a:gd name="adj" fmla="val 8696"/>
             </a:avLst>
           </a:prstGeom>
           <a:solidFill>
@@ -8434,8 +8434,8 @@
         </p:nvSpPr>
         <p:spPr>
           <a:xfrm>
-            <a:off x="7799832" y="1472184"/>
-            <a:ext cx="3145536" cy="256032"/>
+            <a:off x="7708392" y="1453896"/>
+            <a:ext cx="3282696" cy="228600"/>
           </a:xfrm>
           <a:prstGeom prst="rect">
             <a:avLst/>
@@ -8451,7 +8451,7 @@
               <a:buNone/>
             </a:pPr>
             <a:r>
-              <a:rPr lang="en-US" sz="1300" b="1" dirty="0">
+              <a:rPr lang="en-US" sz="1220" b="1" dirty="0">
                 <a:solidFill>
                   <a:srgbClr val="0068B7"/>
                 </a:solidFill>
@@ -8461,7 +8461,7 @@
               </a:rPr>
               <a:t>Implementation cue</a:t>
             </a:r>
-            <a:endParaRPr lang="en-US" sz="1300" dirty="0"/>
+            <a:endParaRPr lang="en-US" sz="1220" dirty="0"/>
           </a:p>
         </p:txBody>
       </p:sp>
@@ -8473,8 +8473,8 @@
         </p:nvSpPr>
         <p:spPr>
           <a:xfrm>
-            <a:off x="7799832" y="1801368"/>
-            <a:ext cx="3145536" cy="640080"/>
+            <a:off x="7708392" y="1764792"/>
+            <a:ext cx="3282696" cy="749808"/>
           </a:xfrm>
           <a:prstGeom prst="rect">
             <a:avLst/>
@@ -8492,7 +8492,7 @@
               <a:buNone/>
             </a:pPr>
             <a:r>
-              <a:rPr lang="en-US" sz="1320" dirty="0">
+              <a:rPr lang="en-US" sz="1220" dirty="0">
                 <a:solidFill>
                   <a:srgbClr val="17364A"/>
                 </a:solidFill>
@@ -8502,7 +8502,7 @@
               </a:rPr>
               <a:t>Create an identity, access, and permissions review for one AI-supported workflow.</a:t>
             </a:r>
-            <a:endParaRPr lang="en-US" sz="1320" dirty="0"/>
+            <a:endParaRPr lang="en-US" sz="1220" dirty="0"/>
           </a:p>
         </p:txBody>
       </p:sp>
@@ -8514,12 +8514,12 @@
         </p:nvSpPr>
         <p:spPr>
           <a:xfrm>
-            <a:off x="7635240" y="2670048"/>
-            <a:ext cx="3474720" cy="1377086"/>
+            <a:off x="7543800" y="2724912"/>
+            <a:ext cx="3611880" cy="1527048"/>
           </a:xfrm>
           <a:prstGeom prst="roundRect">
             <a:avLst>
-              <a:gd name="adj" fmla="val 7968"/>
+              <a:gd name="adj" fmla="val 7186"/>
             </a:avLst>
           </a:prstGeom>
           <a:solidFill>
@@ -8541,8 +8541,8 @@
         </p:nvSpPr>
         <p:spPr>
           <a:xfrm>
-            <a:off x="7799832" y="2816352"/>
-            <a:ext cx="3145536" cy="256032"/>
+            <a:off x="7708392" y="2852928"/>
+            <a:ext cx="3282696" cy="228600"/>
           </a:xfrm>
           <a:prstGeom prst="rect">
             <a:avLst/>
@@ -8558,7 +8558,7 @@
               <a:buNone/>
             </a:pPr>
             <a:r>
-              <a:rPr lang="en-US" sz="1300" b="1" dirty="0">
+              <a:rPr lang="en-US" sz="1220" b="1" dirty="0">
                 <a:solidFill>
                   <a:srgbClr val="0068B7"/>
                 </a:solidFill>
@@ -8568,7 +8568,7 @@
               </a:rPr>
               <a:t>Concept checkpoints</a:t>
             </a:r>
-            <a:endParaRPr lang="en-US" sz="1300" dirty="0"/>
+            <a:endParaRPr lang="en-US" sz="1220" dirty="0"/>
           </a:p>
         </p:txBody>
       </p:sp>
@@ -8580,8 +8580,8 @@
         </p:nvSpPr>
         <p:spPr>
           <a:xfrm>
-            <a:off x="7818120" y="3182112"/>
-            <a:ext cx="3090672" cy="718718"/>
+            <a:off x="7726680" y="3182112"/>
+            <a:ext cx="3227832" cy="960120"/>
           </a:xfrm>
           <a:prstGeom prst="rect">
             <a:avLst/>
@@ -8599,7 +8599,7 @@
               <a:buNone/>
             </a:pPr>
             <a:r>
-              <a:rPr lang="en-US" sz="1220" dirty="0">
+              <a:rPr lang="en-US" sz="1140" dirty="0">
                 <a:solidFill>
                   <a:srgbClr val="17364A"/>
                 </a:solidFill>
@@ -8607,16 +8607,16 @@
                 <a:ea typeface="Aptos" pitchFamily="34" charset="-122"/>
                 <a:cs typeface="Aptos" pitchFamily="34" charset="-120"/>
               </a:rPr>
-              <a:t>Create an identity, access, and permissions review for one.</a:t>
-            </a:r>
-            <a:endParaRPr lang="en-US" sz="1220" dirty="0"/>
-          </a:p>
-          <a:p>
-            <a:pPr indent="0" marL="0">
-              <a:buNone/>
-            </a:pPr>
-            <a:r>
-              <a:rPr lang="en-US" sz="1220" dirty="0">
+              <a:t>Create an identity, access, and permissions review.</a:t>
+            </a:r>
+            <a:endParaRPr lang="en-US" sz="1140" dirty="0"/>
+          </a:p>
+          <a:p>
+            <a:pPr indent="0" marL="0">
+              <a:buNone/>
+            </a:pPr>
+            <a:r>
+              <a:rPr lang="en-US" sz="1140" dirty="0">
                 <a:solidFill>
                   <a:srgbClr val="17364A"/>
                 </a:solidFill>
@@ -8624,9 +8624,9 @@
                 <a:ea typeface="Aptos" pitchFamily="34" charset="-122"/>
                 <a:cs typeface="Aptos" pitchFamily="34" charset="-120"/>
               </a:rPr>
-              <a:t>Identify users, service accounts, systems, data accessed,.</a:t>
-            </a:r>
-            <a:endParaRPr lang="en-US" sz="1220" dirty="0"/>
+              <a:t>Identify users, service accounts, systems, data.</a:t>
+            </a:r>
+            <a:endParaRPr lang="en-US" sz="1140" dirty="0"/>
           </a:p>
         </p:txBody>
       </p:sp>
@@ -8638,12 +8638,12 @@
         </p:nvSpPr>
         <p:spPr>
           <a:xfrm>
-            <a:off x="7635240" y="4184294"/>
-            <a:ext cx="3474720" cy="1466698"/>
+            <a:off x="7543800" y="4389120"/>
+            <a:ext cx="3611880" cy="1261872"/>
           </a:xfrm>
           <a:prstGeom prst="roundRect">
             <a:avLst>
-              <a:gd name="adj" fmla="val 7481"/>
+              <a:gd name="adj" fmla="val 8696"/>
             </a:avLst>
           </a:prstGeom>
           <a:solidFill>
@@ -8665,8 +8665,8 @@
         </p:nvSpPr>
         <p:spPr>
           <a:xfrm>
-            <a:off x="7799832" y="4330598"/>
-            <a:ext cx="3145536" cy="256032"/>
+            <a:off x="7708392" y="4517136"/>
+            <a:ext cx="3282696" cy="228600"/>
           </a:xfrm>
           <a:prstGeom prst="rect">
             <a:avLst/>
@@ -8682,7 +8682,7 @@
               <a:buNone/>
             </a:pPr>
             <a:r>
-              <a:rPr lang="en-US" sz="1300" b="1" dirty="0">
+              <a:rPr lang="en-US" sz="1220" b="1" dirty="0">
                 <a:solidFill>
                   <a:srgbClr val="0068B7"/>
                 </a:solidFill>
@@ -8692,7 +8692,7 @@
               </a:rPr>
               <a:t>Next action</a:t>
             </a:r>
-            <a:endParaRPr lang="en-US" sz="1300" dirty="0"/>
+            <a:endParaRPr lang="en-US" sz="1220" dirty="0"/>
           </a:p>
         </p:txBody>
       </p:sp>
@@ -8704,8 +8704,8 @@
         </p:nvSpPr>
         <p:spPr>
           <a:xfrm>
-            <a:off x="7799832" y="4659782"/>
-            <a:ext cx="3145536" cy="899770"/>
+            <a:off x="7708392" y="4828032"/>
+            <a:ext cx="3282696" cy="749808"/>
           </a:xfrm>
           <a:prstGeom prst="rect">
             <a:avLst/>
@@ -8723,7 +8723,7 @@
               <a:buNone/>
             </a:pPr>
             <a:r>
-              <a:rPr lang="en-US" sz="1320" dirty="0">
+              <a:rPr lang="en-US" sz="1220" dirty="0">
                 <a:solidFill>
                   <a:srgbClr val="17364A"/>
                 </a:solidFill>
@@ -8731,9 +8731,9 @@
                 <a:ea typeface="Aptos" pitchFamily="34" charset="-122"/>
                 <a:cs typeface="Aptos" pitchFamily="34" charset="-120"/>
               </a:rPr>
-              <a:t>Use the assignment to test whether you can explain the concept, apply it to a realistic public health situation, and identify what would need review before the work moves forward.</a:t>
-            </a:r>
-            <a:endParaRPr lang="en-US" sz="1320" dirty="0"/>
+              <a:t>Use the assignment to test whether you can explain the concept, apply it to a.</a:t>
+            </a:r>
+            <a:endParaRPr lang="en-US" sz="1220" dirty="0"/>
           </a:p>
         </p:txBody>
       </p:sp>
@@ -9024,8 +9024,8 @@
         </p:nvSpPr>
         <p:spPr>
           <a:xfrm>
-            <a:off x="868680" y="1508760"/>
-            <a:ext cx="6309360" cy="4160520"/>
+            <a:off x="822960" y="1463040"/>
+            <a:ext cx="6565392" cy="4343400"/>
           </a:xfrm>
           <a:prstGeom prst="rect">
             <a:avLst/>
@@ -9043,7 +9043,7 @@
               <a:buNone/>
             </a:pPr>
             <a:r>
-              <a:rPr lang="en-US" sz="2100" dirty="0">
+              <a:rPr lang="en-US" sz="1920" dirty="0">
                 <a:solidFill>
                   <a:srgbClr val="003A63"/>
                 </a:solidFill>
@@ -9053,14 +9053,14 @@
               </a:rPr>
               <a:t>• Access and permissions review</a:t>
             </a:r>
-            <a:endParaRPr lang="en-US" sz="2100" dirty="0"/>
-          </a:p>
-          <a:p>
-            <a:pPr indent="0" marL="0">
-              <a:buNone/>
-            </a:pPr>
-            <a:r>
-              <a:rPr lang="en-US" sz="2100" dirty="0">
+            <a:endParaRPr lang="en-US" sz="1920" dirty="0"/>
+          </a:p>
+          <a:p>
+            <a:pPr indent="0" marL="0">
+              <a:buNone/>
+            </a:pPr>
+            <a:r>
+              <a:rPr lang="en-US" sz="1920" dirty="0">
                 <a:solidFill>
                   <a:srgbClr val="003A63"/>
                 </a:solidFill>
@@ -9070,14 +9070,14 @@
               </a:rPr>
               <a:t>• List of user and service identities</a:t>
             </a:r>
-            <a:endParaRPr lang="en-US" sz="2100" dirty="0"/>
-          </a:p>
-          <a:p>
-            <a:pPr indent="0" marL="0">
-              <a:buNone/>
-            </a:pPr>
-            <a:r>
-              <a:rPr lang="en-US" sz="2100" dirty="0">
+            <a:endParaRPr lang="en-US" sz="1920" dirty="0"/>
+          </a:p>
+          <a:p>
+            <a:pPr indent="0" marL="0">
+              <a:buNone/>
+            </a:pPr>
+            <a:r>
+              <a:rPr lang="en-US" sz="1920" dirty="0">
                 <a:solidFill>
                   <a:srgbClr val="003A63"/>
                 </a:solidFill>
@@ -9087,7 +9087,7 @@
               </a:rPr>
               <a:t>• Least-privilege recommendation</a:t>
             </a:r>
-            <a:endParaRPr lang="en-US" sz="2100" dirty="0"/>
+            <a:endParaRPr lang="en-US" sz="1920" dirty="0"/>
           </a:p>
         </p:txBody>
       </p:sp>
@@ -9099,12 +9099,12 @@
         </p:nvSpPr>
         <p:spPr>
           <a:xfrm>
-            <a:off x="7635240" y="1325880"/>
-            <a:ext cx="3474720" cy="1207008"/>
+            <a:off x="7543800" y="1325880"/>
+            <a:ext cx="3611880" cy="1261872"/>
           </a:xfrm>
           <a:prstGeom prst="roundRect">
             <a:avLst>
-              <a:gd name="adj" fmla="val 9091"/>
+              <a:gd name="adj" fmla="val 8696"/>
             </a:avLst>
           </a:prstGeom>
           <a:solidFill>
@@ -9126,8 +9126,8 @@
         </p:nvSpPr>
         <p:spPr>
           <a:xfrm>
-            <a:off x="7799832" y="1472184"/>
-            <a:ext cx="3145536" cy="256032"/>
+            <a:off x="7708392" y="1453896"/>
+            <a:ext cx="3282696" cy="228600"/>
           </a:xfrm>
           <a:prstGeom prst="rect">
             <a:avLst/>
@@ -9143,7 +9143,7 @@
               <a:buNone/>
             </a:pPr>
             <a:r>
-              <a:rPr lang="en-US" sz="1300" b="1" dirty="0">
+              <a:rPr lang="en-US" sz="1220" b="1" dirty="0">
                 <a:solidFill>
                   <a:srgbClr val="0068B7"/>
                 </a:solidFill>
@@ -9153,7 +9153,7 @@
               </a:rPr>
               <a:t>Implementation cue</a:t>
             </a:r>
-            <a:endParaRPr lang="en-US" sz="1300" dirty="0"/>
+            <a:endParaRPr lang="en-US" sz="1220" dirty="0"/>
           </a:p>
         </p:txBody>
       </p:sp>
@@ -9165,8 +9165,8 @@
         </p:nvSpPr>
         <p:spPr>
           <a:xfrm>
-            <a:off x="7799832" y="1801368"/>
-            <a:ext cx="3145536" cy="640080"/>
+            <a:off x="7708392" y="1764792"/>
+            <a:ext cx="3282696" cy="749808"/>
           </a:xfrm>
           <a:prstGeom prst="rect">
             <a:avLst/>
@@ -9184,7 +9184,7 @@
               <a:buNone/>
             </a:pPr>
             <a:r>
-              <a:rPr lang="en-US" sz="1320" dirty="0">
+              <a:rPr lang="en-US" sz="1220" dirty="0">
                 <a:solidFill>
                   <a:srgbClr val="17364A"/>
                 </a:solidFill>
@@ -9194,7 +9194,7 @@
               </a:rPr>
               <a:t>Access and permissions review</a:t>
             </a:r>
-            <a:endParaRPr lang="en-US" sz="1320" dirty="0"/>
+            <a:endParaRPr lang="en-US" sz="1220" dirty="0"/>
           </a:p>
         </p:txBody>
       </p:sp>
@@ -9206,12 +9206,12 @@
         </p:nvSpPr>
         <p:spPr>
           <a:xfrm>
-            <a:off x="7635240" y="2670048"/>
-            <a:ext cx="3474720" cy="1377086"/>
+            <a:off x="7543800" y="2724912"/>
+            <a:ext cx="3611880" cy="1527048"/>
           </a:xfrm>
           <a:prstGeom prst="roundRect">
             <a:avLst>
-              <a:gd name="adj" fmla="val 7968"/>
+              <a:gd name="adj" fmla="val 7186"/>
             </a:avLst>
           </a:prstGeom>
           <a:solidFill>
@@ -9233,8 +9233,8 @@
         </p:nvSpPr>
         <p:spPr>
           <a:xfrm>
-            <a:off x="7799832" y="2816352"/>
-            <a:ext cx="3145536" cy="256032"/>
+            <a:off x="7708392" y="2852928"/>
+            <a:ext cx="3282696" cy="228600"/>
           </a:xfrm>
           <a:prstGeom prst="rect">
             <a:avLst/>
@@ -9250,7 +9250,7 @@
               <a:buNone/>
             </a:pPr>
             <a:r>
-              <a:rPr lang="en-US" sz="1300" b="1" dirty="0">
+              <a:rPr lang="en-US" sz="1220" b="1" dirty="0">
                 <a:solidFill>
                   <a:srgbClr val="0068B7"/>
                 </a:solidFill>
@@ -9260,7 +9260,7 @@
               </a:rPr>
               <a:t>Concept checkpoints</a:t>
             </a:r>
-            <a:endParaRPr lang="en-US" sz="1300" dirty="0"/>
+            <a:endParaRPr lang="en-US" sz="1220" dirty="0"/>
           </a:p>
         </p:txBody>
       </p:sp>
@@ -9272,8 +9272,8 @@
         </p:nvSpPr>
         <p:spPr>
           <a:xfrm>
-            <a:off x="7818120" y="3182112"/>
-            <a:ext cx="3090672" cy="718718"/>
+            <a:off x="7726680" y="3182112"/>
+            <a:ext cx="3227832" cy="960120"/>
           </a:xfrm>
           <a:prstGeom prst="rect">
             <a:avLst/>
@@ -9291,7 +9291,7 @@
               <a:buNone/>
             </a:pPr>
             <a:r>
-              <a:rPr lang="en-US" sz="1220" dirty="0">
+              <a:rPr lang="en-US" sz="1140" dirty="0">
                 <a:solidFill>
                   <a:srgbClr val="17364A"/>
                 </a:solidFill>
@@ -9301,14 +9301,14 @@
               </a:rPr>
               <a:t>Access and permissions review</a:t>
             </a:r>
-            <a:endParaRPr lang="en-US" sz="1220" dirty="0"/>
-          </a:p>
-          <a:p>
-            <a:pPr indent="0" marL="0">
-              <a:buNone/>
-            </a:pPr>
-            <a:r>
-              <a:rPr lang="en-US" sz="1220" dirty="0">
+            <a:endParaRPr lang="en-US" sz="1140" dirty="0"/>
+          </a:p>
+          <a:p>
+            <a:pPr indent="0" marL="0">
+              <a:buNone/>
+            </a:pPr>
+            <a:r>
+              <a:rPr lang="en-US" sz="1140" dirty="0">
                 <a:solidFill>
                   <a:srgbClr val="17364A"/>
                 </a:solidFill>
@@ -9318,14 +9318,14 @@
               </a:rPr>
               <a:t>List of user and service identities</a:t>
             </a:r>
-            <a:endParaRPr lang="en-US" sz="1220" dirty="0"/>
-          </a:p>
-          <a:p>
-            <a:pPr indent="0" marL="0">
-              <a:buNone/>
-            </a:pPr>
-            <a:r>
-              <a:rPr lang="en-US" sz="1220" dirty="0">
+            <a:endParaRPr lang="en-US" sz="1140" dirty="0"/>
+          </a:p>
+          <a:p>
+            <a:pPr indent="0" marL="0">
+              <a:buNone/>
+            </a:pPr>
+            <a:r>
+              <a:rPr lang="en-US" sz="1140" dirty="0">
                 <a:solidFill>
                   <a:srgbClr val="17364A"/>
                 </a:solidFill>
@@ -9335,7 +9335,7 @@
               </a:rPr>
               <a:t>Least-privilege recommendation</a:t>
             </a:r>
-            <a:endParaRPr lang="en-US" sz="1220" dirty="0"/>
+            <a:endParaRPr lang="en-US" sz="1140" dirty="0"/>
           </a:p>
         </p:txBody>
       </p:sp>
@@ -9347,12 +9347,12 @@
         </p:nvSpPr>
         <p:spPr>
           <a:xfrm>
-            <a:off x="7635240" y="4184294"/>
-            <a:ext cx="3474720" cy="1466698"/>
+            <a:off x="7543800" y="4389120"/>
+            <a:ext cx="3611880" cy="1261872"/>
           </a:xfrm>
           <a:prstGeom prst="roundRect">
             <a:avLst>
-              <a:gd name="adj" fmla="val 7481"/>
+              <a:gd name="adj" fmla="val 8696"/>
             </a:avLst>
           </a:prstGeom>
           <a:solidFill>
@@ -9374,8 +9374,8 @@
         </p:nvSpPr>
         <p:spPr>
           <a:xfrm>
-            <a:off x="7799832" y="4330598"/>
-            <a:ext cx="3145536" cy="256032"/>
+            <a:off x="7708392" y="4517136"/>
+            <a:ext cx="3282696" cy="228600"/>
           </a:xfrm>
           <a:prstGeom prst="rect">
             <a:avLst/>
@@ -9391,7 +9391,7 @@
               <a:buNone/>
             </a:pPr>
             <a:r>
-              <a:rPr lang="en-US" sz="1300" b="1" dirty="0">
+              <a:rPr lang="en-US" sz="1220" b="1" dirty="0">
                 <a:solidFill>
                   <a:srgbClr val="0068B7"/>
                 </a:solidFill>
@@ -9401,7 +9401,7 @@
               </a:rPr>
               <a:t>Next action</a:t>
             </a:r>
-            <a:endParaRPr lang="en-US" sz="1300" dirty="0"/>
+            <a:endParaRPr lang="en-US" sz="1220" dirty="0"/>
           </a:p>
         </p:txBody>
       </p:sp>
@@ -9413,8 +9413,8 @@
         </p:nvSpPr>
         <p:spPr>
           <a:xfrm>
-            <a:off x="7799832" y="4659782"/>
-            <a:ext cx="3145536" cy="899770"/>
+            <a:off x="7708392" y="4828032"/>
+            <a:ext cx="3282696" cy="749808"/>
           </a:xfrm>
           <a:prstGeom prst="rect">
             <a:avLst/>
@@ -9432,7 +9432,7 @@
               <a:buNone/>
             </a:pPr>
             <a:r>
-              <a:rPr lang="en-US" sz="1320" dirty="0">
+              <a:rPr lang="en-US" sz="1220" dirty="0">
                 <a:solidFill>
                   <a:srgbClr val="17364A"/>
                 </a:solidFill>
@@ -9440,9 +9440,9 @@
                 <a:ea typeface="Aptos" pitchFamily="34" charset="-122"/>
                 <a:cs typeface="Aptos" pitchFamily="34" charset="-120"/>
               </a:rPr>
-              <a:t>Use the concept to clarify workflow changes, dependencies, staffing, procurement requirements, training needs, and implementation checkpoints.</a:t>
-            </a:r>
-            <a:endParaRPr lang="en-US" sz="1320" dirty="0"/>
+              <a:t>Use the concept to clarify workflow changes, dependencies, staffing, procurement.</a:t>
+            </a:r>
+            <a:endParaRPr lang="en-US" sz="1220" dirty="0"/>
           </a:p>
         </p:txBody>
       </p:sp>
@@ -9733,8 +9733,8 @@
         </p:nvSpPr>
         <p:spPr>
           <a:xfrm>
-            <a:off x="868680" y="1508760"/>
-            <a:ext cx="6309360" cy="4160520"/>
+            <a:off x="822960" y="1463040"/>
+            <a:ext cx="6565392" cy="4343400"/>
           </a:xfrm>
           <a:prstGeom prst="rect">
             <a:avLst/>
@@ -9752,7 +9752,7 @@
               <a:buNone/>
             </a:pPr>
             <a:r>
-              <a:rPr lang="en-US" sz="2100" dirty="0">
+              <a:rPr lang="en-US" sz="1920" dirty="0">
                 <a:solidFill>
                   <a:srgbClr val="003A63"/>
                 </a:solidFill>
@@ -9762,14 +9762,14 @@
               </a:rPr>
               <a:t>• Write-back approval rules</a:t>
             </a:r>
-            <a:endParaRPr lang="en-US" sz="2100" dirty="0"/>
-          </a:p>
-          <a:p>
-            <a:pPr indent="0" marL="0">
-              <a:buNone/>
-            </a:pPr>
-            <a:r>
-              <a:rPr lang="en-US" sz="2100" dirty="0">
+            <a:endParaRPr lang="en-US" sz="1920" dirty="0"/>
+          </a:p>
+          <a:p>
+            <a:pPr indent="0" marL="0">
+              <a:buNone/>
+            </a:pPr>
+            <a:r>
+              <a:rPr lang="en-US" sz="1920" dirty="0">
                 <a:solidFill>
                   <a:srgbClr val="003A63"/>
                 </a:solidFill>
@@ -9779,7 +9779,7 @@
               </a:rPr>
               <a:t>• Audit log requirements</a:t>
             </a:r>
-            <a:endParaRPr lang="en-US" sz="2100" dirty="0"/>
+            <a:endParaRPr lang="en-US" sz="1920" dirty="0"/>
           </a:p>
         </p:txBody>
       </p:sp>
@@ -9791,12 +9791,12 @@
         </p:nvSpPr>
         <p:spPr>
           <a:xfrm>
-            <a:off x="7635240" y="1325880"/>
-            <a:ext cx="3474720" cy="1207008"/>
+            <a:off x="7543800" y="1325880"/>
+            <a:ext cx="3611880" cy="1261872"/>
           </a:xfrm>
           <a:prstGeom prst="roundRect">
             <a:avLst>
-              <a:gd name="adj" fmla="val 9091"/>
+              <a:gd name="adj" fmla="val 8696"/>
             </a:avLst>
           </a:prstGeom>
           <a:solidFill>
@@ -9818,8 +9818,8 @@
         </p:nvSpPr>
         <p:spPr>
           <a:xfrm>
-            <a:off x="7799832" y="1472184"/>
-            <a:ext cx="3145536" cy="256032"/>
+            <a:off x="7708392" y="1453896"/>
+            <a:ext cx="3282696" cy="228600"/>
           </a:xfrm>
           <a:prstGeom prst="rect">
             <a:avLst/>
@@ -9835,7 +9835,7 @@
               <a:buNone/>
             </a:pPr>
             <a:r>
-              <a:rPr lang="en-US" sz="1300" b="1" dirty="0">
+              <a:rPr lang="en-US" sz="1220" b="1" dirty="0">
                 <a:solidFill>
                   <a:srgbClr val="0068B7"/>
                 </a:solidFill>
@@ -9845,7 +9845,7 @@
               </a:rPr>
               <a:t>Implementation cue</a:t>
             </a:r>
-            <a:endParaRPr lang="en-US" sz="1300" dirty="0"/>
+            <a:endParaRPr lang="en-US" sz="1220" dirty="0"/>
           </a:p>
         </p:txBody>
       </p:sp>
@@ -9857,8 +9857,8 @@
         </p:nvSpPr>
         <p:spPr>
           <a:xfrm>
-            <a:off x="7799832" y="1801368"/>
-            <a:ext cx="3145536" cy="640080"/>
+            <a:off x="7708392" y="1764792"/>
+            <a:ext cx="3282696" cy="749808"/>
           </a:xfrm>
           <a:prstGeom prst="rect">
             <a:avLst/>
@@ -9876,7 +9876,7 @@
               <a:buNone/>
             </a:pPr>
             <a:r>
-              <a:rPr lang="en-US" sz="1320" dirty="0">
+              <a:rPr lang="en-US" sz="1220" dirty="0">
                 <a:solidFill>
                   <a:srgbClr val="17364A"/>
                 </a:solidFill>
@@ -9886,7 +9886,7 @@
               </a:rPr>
               <a:t>Write-back approval rules</a:t>
             </a:r>
-            <a:endParaRPr lang="en-US" sz="1320" dirty="0"/>
+            <a:endParaRPr lang="en-US" sz="1220" dirty="0"/>
           </a:p>
         </p:txBody>
       </p:sp>
@@ -9898,12 +9898,12 @@
         </p:nvSpPr>
         <p:spPr>
           <a:xfrm>
-            <a:off x="7635240" y="2670048"/>
-            <a:ext cx="3474720" cy="1377086"/>
+            <a:off x="7543800" y="2724912"/>
+            <a:ext cx="3611880" cy="1527048"/>
           </a:xfrm>
           <a:prstGeom prst="roundRect">
             <a:avLst>
-              <a:gd name="adj" fmla="val 7968"/>
+              <a:gd name="adj" fmla="val 7186"/>
             </a:avLst>
           </a:prstGeom>
           <a:solidFill>
@@ -9925,8 +9925,8 @@
         </p:nvSpPr>
         <p:spPr>
           <a:xfrm>
-            <a:off x="7799832" y="2816352"/>
-            <a:ext cx="3145536" cy="256032"/>
+            <a:off x="7708392" y="2852928"/>
+            <a:ext cx="3282696" cy="228600"/>
           </a:xfrm>
           <a:prstGeom prst="rect">
             <a:avLst/>
@@ -9942,7 +9942,7 @@
               <a:buNone/>
             </a:pPr>
             <a:r>
-              <a:rPr lang="en-US" sz="1300" b="1" dirty="0">
+              <a:rPr lang="en-US" sz="1220" b="1" dirty="0">
                 <a:solidFill>
                   <a:srgbClr val="0068B7"/>
                 </a:solidFill>
@@ -9952,7 +9952,7 @@
               </a:rPr>
               <a:t>Concept checkpoints</a:t>
             </a:r>
-            <a:endParaRPr lang="en-US" sz="1300" dirty="0"/>
+            <a:endParaRPr lang="en-US" sz="1220" dirty="0"/>
           </a:p>
         </p:txBody>
       </p:sp>
@@ -9964,8 +9964,8 @@
         </p:nvSpPr>
         <p:spPr>
           <a:xfrm>
-            <a:off x="7818120" y="3182112"/>
-            <a:ext cx="3090672" cy="718718"/>
+            <a:off x="7726680" y="3182112"/>
+            <a:ext cx="3227832" cy="960120"/>
           </a:xfrm>
           <a:prstGeom prst="rect">
             <a:avLst/>
@@ -9983,7 +9983,7 @@
               <a:buNone/>
             </a:pPr>
             <a:r>
-              <a:rPr lang="en-US" sz="1220" dirty="0">
+              <a:rPr lang="en-US" sz="1140" dirty="0">
                 <a:solidFill>
                   <a:srgbClr val="17364A"/>
                 </a:solidFill>
@@ -9993,14 +9993,14 @@
               </a:rPr>
               <a:t>Write-back approval rules</a:t>
             </a:r>
-            <a:endParaRPr lang="en-US" sz="1220" dirty="0"/>
-          </a:p>
-          <a:p>
-            <a:pPr indent="0" marL="0">
-              <a:buNone/>
-            </a:pPr>
-            <a:r>
-              <a:rPr lang="en-US" sz="1220" dirty="0">
+            <a:endParaRPr lang="en-US" sz="1140" dirty="0"/>
+          </a:p>
+          <a:p>
+            <a:pPr indent="0" marL="0">
+              <a:buNone/>
+            </a:pPr>
+            <a:r>
+              <a:rPr lang="en-US" sz="1140" dirty="0">
                 <a:solidFill>
                   <a:srgbClr val="17364A"/>
                 </a:solidFill>
@@ -10010,7 +10010,7 @@
               </a:rPr>
               <a:t>Audit log requirements</a:t>
             </a:r>
-            <a:endParaRPr lang="en-US" sz="1220" dirty="0"/>
+            <a:endParaRPr lang="en-US" sz="1140" dirty="0"/>
           </a:p>
         </p:txBody>
       </p:sp>
@@ -10022,12 +10022,12 @@
         </p:nvSpPr>
         <p:spPr>
           <a:xfrm>
-            <a:off x="7635240" y="4184294"/>
-            <a:ext cx="3474720" cy="1466698"/>
+            <a:off x="7543800" y="4389120"/>
+            <a:ext cx="3611880" cy="1261872"/>
           </a:xfrm>
           <a:prstGeom prst="roundRect">
             <a:avLst>
-              <a:gd name="adj" fmla="val 7481"/>
+              <a:gd name="adj" fmla="val 8696"/>
             </a:avLst>
           </a:prstGeom>
           <a:solidFill>
@@ -10049,8 +10049,8 @@
         </p:nvSpPr>
         <p:spPr>
           <a:xfrm>
-            <a:off x="7799832" y="4330598"/>
-            <a:ext cx="3145536" cy="256032"/>
+            <a:off x="7708392" y="4517136"/>
+            <a:ext cx="3282696" cy="228600"/>
           </a:xfrm>
           <a:prstGeom prst="rect">
             <a:avLst/>
@@ -10066,7 +10066,7 @@
               <a:buNone/>
             </a:pPr>
             <a:r>
-              <a:rPr lang="en-US" sz="1300" b="1" dirty="0">
+              <a:rPr lang="en-US" sz="1220" b="1" dirty="0">
                 <a:solidFill>
                   <a:srgbClr val="0068B7"/>
                 </a:solidFill>
@@ -10076,7 +10076,7 @@
               </a:rPr>
               <a:t>Next action</a:t>
             </a:r>
-            <a:endParaRPr lang="en-US" sz="1300" dirty="0"/>
+            <a:endParaRPr lang="en-US" sz="1220" dirty="0"/>
           </a:p>
         </p:txBody>
       </p:sp>
@@ -10088,8 +10088,8 @@
         </p:nvSpPr>
         <p:spPr>
           <a:xfrm>
-            <a:off x="7799832" y="4659782"/>
-            <a:ext cx="3145536" cy="899770"/>
+            <a:off x="7708392" y="4828032"/>
+            <a:ext cx="3282696" cy="749808"/>
           </a:xfrm>
           <a:prstGeom prst="rect">
             <a:avLst/>
@@ -10107,7 +10107,7 @@
               <a:buNone/>
             </a:pPr>
             <a:r>
-              <a:rPr lang="en-US" sz="1320" dirty="0">
+              <a:rPr lang="en-US" sz="1220" dirty="0">
                 <a:solidFill>
                   <a:srgbClr val="17364A"/>
                 </a:solidFill>
@@ -10115,9 +10115,9 @@
                 <a:ea typeface="Aptos" pitchFamily="34" charset="-122"/>
                 <a:cs typeface="Aptos" pitchFamily="34" charset="-120"/>
               </a:rPr>
-              <a:t>Use the concept to clarify workflow changes, dependencies, staffing, procurement requirements, training needs, and implementation checkpoints.</a:t>
-            </a:r>
-            <a:endParaRPr lang="en-US" sz="1320" dirty="0"/>
+              <a:t>Use the concept to clarify workflow changes, dependencies, staffing, procurement.</a:t>
+            </a:r>
+            <a:endParaRPr lang="en-US" sz="1220" dirty="0"/>
           </a:p>
         </p:txBody>
       </p:sp>
@@ -10435,7 +10435,7 @@
                 <a:ea typeface="Aptos" pitchFamily="34" charset="-122"/>
                 <a:cs typeface="Aptos" pitchFamily="34" charset="-120"/>
               </a:rPr>
-              <a:t>• Identity, access, and permissions determine who or what can use data, systems, tools, and.</a:t>
+              <a:t>• Identity, access, and permissions determine who or what can use data,.</a:t>
             </a:r>
             <a:endParaRPr lang="en-US" sz="2100" dirty="0"/>
           </a:p>
@@ -10452,7 +10452,7 @@
                 <a:ea typeface="Aptos" pitchFamily="34" charset="-122"/>
                 <a:cs typeface="Aptos" pitchFamily="34" charset="-120"/>
               </a:rPr>
-              <a:t>• Public health AI workflows may involve staff users, service accounts, APIs, vendors, plugins,.</a:t>
+              <a:t>• Public health AI workflows may involve staff users, service accounts, APIs,.</a:t>
             </a:r>
             <a:endParaRPr lang="en-US" sz="2100" dirty="0"/>
           </a:p>
@@ -10469,7 +10469,7 @@
                 <a:ea typeface="Aptos" pitchFamily="34" charset="-122"/>
                 <a:cs typeface="Aptos" pitchFamily="34" charset="-120"/>
               </a:rPr>
-              <a:t>• Without clear access controls, an AI tool may retrieve sensitive data, expose information to.</a:t>
+              <a:t>• Without clear access controls, an AI tool may retrieve sensitive data,.</a:t>
             </a:r>
             <a:endParaRPr lang="en-US" sz="2100" dirty="0"/>
           </a:p>
@@ -10510,8 +10510,8 @@
         </p:nvSpPr>
         <p:spPr>
           <a:xfrm>
-            <a:off x="8074152" y="1563624"/>
-            <a:ext cx="2825496" cy="256032"/>
+            <a:off x="8074152" y="1545336"/>
+            <a:ext cx="2825496" cy="228600"/>
           </a:xfrm>
           <a:prstGeom prst="rect">
             <a:avLst/>
@@ -10527,7 +10527,7 @@
               <a:buNone/>
             </a:pPr>
             <a:r>
-              <a:rPr lang="en-US" sz="1300" b="1" dirty="0">
+              <a:rPr lang="en-US" sz="1220" b="1" dirty="0">
                 <a:solidFill>
                   <a:srgbClr val="0068B7"/>
                 </a:solidFill>
@@ -10537,7 +10537,7 @@
               </a:rPr>
               <a:t>Module details</a:t>
             </a:r>
-            <a:endParaRPr lang="en-US" sz="1300" dirty="0"/>
+            <a:endParaRPr lang="en-US" sz="1220" dirty="0"/>
           </a:p>
         </p:txBody>
       </p:sp>
@@ -10549,8 +10549,8 @@
         </p:nvSpPr>
         <p:spPr>
           <a:xfrm>
-            <a:off x="8074152" y="1892808"/>
-            <a:ext cx="2825496" cy="1353312"/>
+            <a:off x="8074152" y="1856232"/>
+            <a:ext cx="2825496" cy="1408176"/>
           </a:xfrm>
           <a:prstGeom prst="rect">
             <a:avLst/>
@@ -10568,7 +10568,7 @@
               <a:buNone/>
             </a:pPr>
             <a:r>
-              <a:rPr lang="en-US" sz="1320" dirty="0">
+              <a:rPr lang="en-US" sz="1220" dirty="0">
                 <a:solidFill>
                   <a:srgbClr val="17364A"/>
                 </a:solidFill>
@@ -10576,9 +10576,9 @@
                 <a:ea typeface="Aptos" pitchFamily="34" charset="-122"/>
                 <a:cs typeface="Aptos" pitchFamily="34" charset="-120"/>
               </a:rPr>
-              <a:t>Level: intermediate/practitioner Primary track: Governance and Security Track Appears in tracks: technical-architecture, governance-and-security, operations-and-data-quality</a:t>
-            </a:r>
-            <a:endParaRPr lang="en-US" sz="1320" dirty="0"/>
+              <a:t>Level: intermediate/practitioner Primary track: Governance and Security Track.</a:t>
+            </a:r>
+            <a:endParaRPr lang="en-US" sz="1220" dirty="0"/>
           </a:p>
         </p:txBody>
       </p:sp>
@@ -10617,8 +10617,8 @@
         </p:nvSpPr>
         <p:spPr>
           <a:xfrm>
-            <a:off x="8074152" y="3822192"/>
-            <a:ext cx="2825496" cy="256032"/>
+            <a:off x="8074152" y="3803904"/>
+            <a:ext cx="2825496" cy="228600"/>
           </a:xfrm>
           <a:prstGeom prst="rect">
             <a:avLst/>
@@ -10634,7 +10634,7 @@
               <a:buNone/>
             </a:pPr>
             <a:r>
-              <a:rPr lang="en-US" sz="1300" b="1" dirty="0">
+              <a:rPr lang="en-US" sz="1220" b="1" dirty="0">
                 <a:solidFill>
                   <a:srgbClr val="0068B7"/>
                 </a:solidFill>
@@ -10644,7 +10644,7 @@
               </a:rPr>
               <a:t>Learning sequence</a:t>
             </a:r>
-            <a:endParaRPr lang="en-US" sz="1300" dirty="0"/>
+            <a:endParaRPr lang="en-US" sz="1220" dirty="0"/>
           </a:p>
         </p:txBody>
       </p:sp>
@@ -10656,8 +10656,8 @@
         </p:nvSpPr>
         <p:spPr>
           <a:xfrm>
-            <a:off x="8092440" y="4187952"/>
-            <a:ext cx="2770632" cy="1033272"/>
+            <a:off x="8092440" y="4133088"/>
+            <a:ext cx="2770632" cy="1124712"/>
           </a:xfrm>
           <a:prstGeom prst="rect">
             <a:avLst/>
@@ -10675,7 +10675,7 @@
               <a:buNone/>
             </a:pPr>
             <a:r>
-              <a:rPr lang="en-US" sz="1220" dirty="0">
+              <a:rPr lang="en-US" sz="1140" dirty="0">
                 <a:solidFill>
                   <a:srgbClr val="17364A"/>
                 </a:solidFill>
@@ -10685,14 +10685,14 @@
               </a:rPr>
               <a:t>Read the module for shared vocabulary and context.</a:t>
             </a:r>
-            <a:endParaRPr lang="en-US" sz="1220" dirty="0"/>
-          </a:p>
-          <a:p>
-            <a:pPr indent="0" marL="0">
-              <a:buNone/>
-            </a:pPr>
-            <a:r>
-              <a:rPr lang="en-US" sz="1220" dirty="0">
+            <a:endParaRPr lang="en-US" sz="1140" dirty="0"/>
+          </a:p>
+          <a:p>
+            <a:pPr indent="0" marL="0">
+              <a:buNone/>
+            </a:pPr>
+            <a:r>
+              <a:rPr lang="en-US" sz="1140" dirty="0">
                 <a:solidFill>
                   <a:srgbClr val="17364A"/>
                 </a:solidFill>
@@ -10700,16 +10700,16 @@
                 <a:ea typeface="Aptos" pitchFamily="34" charset="-122"/>
                 <a:cs typeface="Aptos" pitchFamily="34" charset="-120"/>
               </a:rPr>
-              <a:t>Complete the practical exercise to apply the concept.</a:t>
-            </a:r>
-            <a:endParaRPr lang="en-US" sz="1220" dirty="0"/>
-          </a:p>
-          <a:p>
-            <a:pPr indent="0" marL="0">
-              <a:buNone/>
-            </a:pPr>
-            <a:r>
-              <a:rPr lang="en-US" sz="1220" dirty="0">
+              <a:t>Complete the practical exercise to apply the.</a:t>
+            </a:r>
+            <a:endParaRPr lang="en-US" sz="1140" dirty="0"/>
+          </a:p>
+          <a:p>
+            <a:pPr indent="0" marL="0">
+              <a:buNone/>
+            </a:pPr>
+            <a:r>
+              <a:rPr lang="en-US" sz="1140" dirty="0">
                 <a:solidFill>
                   <a:srgbClr val="17364A"/>
                 </a:solidFill>
@@ -10719,7 +10719,7 @@
               </a:rPr>
               <a:t>Use the notes and references for deeper review.</a:t>
             </a:r>
-            <a:endParaRPr lang="en-US" sz="1220" dirty="0"/>
+            <a:endParaRPr lang="en-US" sz="1140" dirty="0"/>
           </a:p>
         </p:txBody>
       </p:sp>
@@ -11010,8 +11010,8 @@
         </p:nvSpPr>
         <p:spPr>
           <a:xfrm>
-            <a:off x="868680" y="1508760"/>
-            <a:ext cx="6309360" cy="4160520"/>
+            <a:off x="822960" y="1463040"/>
+            <a:ext cx="6565392" cy="4343400"/>
           </a:xfrm>
           <a:prstGeom prst="rect">
             <a:avLst/>
@@ -11029,7 +11029,7 @@
               <a:buNone/>
             </a:pPr>
             <a:r>
-              <a:rPr lang="en-US" sz="2100" dirty="0">
+              <a:rPr lang="en-US" sz="1920" dirty="0">
                 <a:solidFill>
                   <a:srgbClr val="003A63"/>
                 </a:solidFill>
@@ -11039,14 +11039,14 @@
               </a:rPr>
               <a:t>• Access and permissions review</a:t>
             </a:r>
-            <a:endParaRPr lang="en-US" sz="2100" dirty="0"/>
-          </a:p>
-          <a:p>
-            <a:pPr indent="0" marL="0">
-              <a:buNone/>
-            </a:pPr>
-            <a:r>
-              <a:rPr lang="en-US" sz="2100" dirty="0">
+            <a:endParaRPr lang="en-US" sz="1920" dirty="0"/>
+          </a:p>
+          <a:p>
+            <a:pPr indent="0" marL="0">
+              <a:buNone/>
+            </a:pPr>
+            <a:r>
+              <a:rPr lang="en-US" sz="1920" dirty="0">
                 <a:solidFill>
                   <a:srgbClr val="003A63"/>
                 </a:solidFill>
@@ -11056,14 +11056,14 @@
               </a:rPr>
               <a:t>• List of user and service identities</a:t>
             </a:r>
-            <a:endParaRPr lang="en-US" sz="2100" dirty="0"/>
-          </a:p>
-          <a:p>
-            <a:pPr indent="0" marL="0">
-              <a:buNone/>
-            </a:pPr>
-            <a:r>
-              <a:rPr lang="en-US" sz="2100" dirty="0">
+            <a:endParaRPr lang="en-US" sz="1920" dirty="0"/>
+          </a:p>
+          <a:p>
+            <a:pPr indent="0" marL="0">
+              <a:buNone/>
+            </a:pPr>
+            <a:r>
+              <a:rPr lang="en-US" sz="1920" dirty="0">
                 <a:solidFill>
                   <a:srgbClr val="003A63"/>
                 </a:solidFill>
@@ -11073,7 +11073,7 @@
               </a:rPr>
               <a:t>• Least-privilege recommendation</a:t>
             </a:r>
-            <a:endParaRPr lang="en-US" sz="2100" dirty="0"/>
+            <a:endParaRPr lang="en-US" sz="1920" dirty="0"/>
           </a:p>
         </p:txBody>
       </p:sp>
@@ -11085,12 +11085,12 @@
         </p:nvSpPr>
         <p:spPr>
           <a:xfrm>
-            <a:off x="7635240" y="1325880"/>
-            <a:ext cx="3474720" cy="1207008"/>
+            <a:off x="7543800" y="1325880"/>
+            <a:ext cx="3611880" cy="1261872"/>
           </a:xfrm>
           <a:prstGeom prst="roundRect">
             <a:avLst>
-              <a:gd name="adj" fmla="val 9091"/>
+              <a:gd name="adj" fmla="val 8696"/>
             </a:avLst>
           </a:prstGeom>
           <a:solidFill>
@@ -11112,8 +11112,8 @@
         </p:nvSpPr>
         <p:spPr>
           <a:xfrm>
-            <a:off x="7799832" y="1472184"/>
-            <a:ext cx="3145536" cy="256032"/>
+            <a:off x="7708392" y="1453896"/>
+            <a:ext cx="3282696" cy="228600"/>
           </a:xfrm>
           <a:prstGeom prst="rect">
             <a:avLst/>
@@ -11129,7 +11129,7 @@
               <a:buNone/>
             </a:pPr>
             <a:r>
-              <a:rPr lang="en-US" sz="1300" b="1" dirty="0">
+              <a:rPr lang="en-US" sz="1220" b="1" dirty="0">
                 <a:solidFill>
                   <a:srgbClr val="0068B7"/>
                 </a:solidFill>
@@ -11139,7 +11139,7 @@
               </a:rPr>
               <a:t>Implementation cue</a:t>
             </a:r>
-            <a:endParaRPr lang="en-US" sz="1300" dirty="0"/>
+            <a:endParaRPr lang="en-US" sz="1220" dirty="0"/>
           </a:p>
         </p:txBody>
       </p:sp>
@@ -11151,8 +11151,8 @@
         </p:nvSpPr>
         <p:spPr>
           <a:xfrm>
-            <a:off x="7799832" y="1801368"/>
-            <a:ext cx="3145536" cy="640080"/>
+            <a:off x="7708392" y="1764792"/>
+            <a:ext cx="3282696" cy="749808"/>
           </a:xfrm>
           <a:prstGeom prst="rect">
             <a:avLst/>
@@ -11170,7 +11170,7 @@
               <a:buNone/>
             </a:pPr>
             <a:r>
-              <a:rPr lang="en-US" sz="1320" dirty="0">
+              <a:rPr lang="en-US" sz="1220" dirty="0">
                 <a:solidFill>
                   <a:srgbClr val="17364A"/>
                 </a:solidFill>
@@ -11180,7 +11180,7 @@
               </a:rPr>
               <a:t>Access and permissions review</a:t>
             </a:r>
-            <a:endParaRPr lang="en-US" sz="1320" dirty="0"/>
+            <a:endParaRPr lang="en-US" sz="1220" dirty="0"/>
           </a:p>
         </p:txBody>
       </p:sp>
@@ -11192,12 +11192,12 @@
         </p:nvSpPr>
         <p:spPr>
           <a:xfrm>
-            <a:off x="7635240" y="2670048"/>
-            <a:ext cx="3474720" cy="1377086"/>
+            <a:off x="7543800" y="2724912"/>
+            <a:ext cx="3611880" cy="1527048"/>
           </a:xfrm>
           <a:prstGeom prst="roundRect">
             <a:avLst>
-              <a:gd name="adj" fmla="val 7968"/>
+              <a:gd name="adj" fmla="val 7186"/>
             </a:avLst>
           </a:prstGeom>
           <a:solidFill>
@@ -11219,8 +11219,8 @@
         </p:nvSpPr>
         <p:spPr>
           <a:xfrm>
-            <a:off x="7799832" y="2816352"/>
-            <a:ext cx="3145536" cy="256032"/>
+            <a:off x="7708392" y="2852928"/>
+            <a:ext cx="3282696" cy="228600"/>
           </a:xfrm>
           <a:prstGeom prst="rect">
             <a:avLst/>
@@ -11236,7 +11236,7 @@
               <a:buNone/>
             </a:pPr>
             <a:r>
-              <a:rPr lang="en-US" sz="1300" b="1" dirty="0">
+              <a:rPr lang="en-US" sz="1220" b="1" dirty="0">
                 <a:solidFill>
                   <a:srgbClr val="0068B7"/>
                 </a:solidFill>
@@ -11246,7 +11246,7 @@
               </a:rPr>
               <a:t>Concept checkpoints</a:t>
             </a:r>
-            <a:endParaRPr lang="en-US" sz="1300" dirty="0"/>
+            <a:endParaRPr lang="en-US" sz="1220" dirty="0"/>
           </a:p>
         </p:txBody>
       </p:sp>
@@ -11258,8 +11258,8 @@
         </p:nvSpPr>
         <p:spPr>
           <a:xfrm>
-            <a:off x="7818120" y="3182112"/>
-            <a:ext cx="3090672" cy="718718"/>
+            <a:off x="7726680" y="3182112"/>
+            <a:ext cx="3227832" cy="960120"/>
           </a:xfrm>
           <a:prstGeom prst="rect">
             <a:avLst/>
@@ -11277,7 +11277,7 @@
               <a:buNone/>
             </a:pPr>
             <a:r>
-              <a:rPr lang="en-US" sz="1220" dirty="0">
+              <a:rPr lang="en-US" sz="1140" dirty="0">
                 <a:solidFill>
                   <a:srgbClr val="17364A"/>
                 </a:solidFill>
@@ -11287,14 +11287,14 @@
               </a:rPr>
               <a:t>Write-back approval rules</a:t>
             </a:r>
-            <a:endParaRPr lang="en-US" sz="1220" dirty="0"/>
-          </a:p>
-          <a:p>
-            <a:pPr indent="0" marL="0">
-              <a:buNone/>
-            </a:pPr>
-            <a:r>
-              <a:rPr lang="en-US" sz="1220" dirty="0">
+            <a:endParaRPr lang="en-US" sz="1140" dirty="0"/>
+          </a:p>
+          <a:p>
+            <a:pPr indent="0" marL="0">
+              <a:buNone/>
+            </a:pPr>
+            <a:r>
+              <a:rPr lang="en-US" sz="1140" dirty="0">
                 <a:solidFill>
                   <a:srgbClr val="17364A"/>
                 </a:solidFill>
@@ -11304,7 +11304,7 @@
               </a:rPr>
               <a:t>Audit log requirements</a:t>
             </a:r>
-            <a:endParaRPr lang="en-US" sz="1220" dirty="0"/>
+            <a:endParaRPr lang="en-US" sz="1140" dirty="0"/>
           </a:p>
         </p:txBody>
       </p:sp>
@@ -11316,12 +11316,12 @@
         </p:nvSpPr>
         <p:spPr>
           <a:xfrm>
-            <a:off x="7635240" y="4184294"/>
-            <a:ext cx="3474720" cy="1466698"/>
+            <a:off x="7543800" y="4389120"/>
+            <a:ext cx="3611880" cy="1261872"/>
           </a:xfrm>
           <a:prstGeom prst="roundRect">
             <a:avLst>
-              <a:gd name="adj" fmla="val 7481"/>
+              <a:gd name="adj" fmla="val 8696"/>
             </a:avLst>
           </a:prstGeom>
           <a:solidFill>
@@ -11343,8 +11343,8 @@
         </p:nvSpPr>
         <p:spPr>
           <a:xfrm>
-            <a:off x="7799832" y="4330598"/>
-            <a:ext cx="3145536" cy="256032"/>
+            <a:off x="7708392" y="4517136"/>
+            <a:ext cx="3282696" cy="228600"/>
           </a:xfrm>
           <a:prstGeom prst="rect">
             <a:avLst/>
@@ -11360,7 +11360,7 @@
               <a:buNone/>
             </a:pPr>
             <a:r>
-              <a:rPr lang="en-US" sz="1300" b="1" dirty="0">
+              <a:rPr lang="en-US" sz="1220" b="1" dirty="0">
                 <a:solidFill>
                   <a:srgbClr val="0068B7"/>
                 </a:solidFill>
@@ -11370,7 +11370,7 @@
               </a:rPr>
               <a:t>Next action</a:t>
             </a:r>
-            <a:endParaRPr lang="en-US" sz="1300" dirty="0"/>
+            <a:endParaRPr lang="en-US" sz="1220" dirty="0"/>
           </a:p>
         </p:txBody>
       </p:sp>
@@ -11382,8 +11382,8 @@
         </p:nvSpPr>
         <p:spPr>
           <a:xfrm>
-            <a:off x="7799832" y="4659782"/>
-            <a:ext cx="3145536" cy="899770"/>
+            <a:off x="7708392" y="4828032"/>
+            <a:ext cx="3282696" cy="749808"/>
           </a:xfrm>
           <a:prstGeom prst="rect">
             <a:avLst/>
@@ -11401,7 +11401,7 @@
               <a:buNone/>
             </a:pPr>
             <a:r>
-              <a:rPr lang="en-US" sz="1320" dirty="0">
+              <a:rPr lang="en-US" sz="1220" dirty="0">
                 <a:solidFill>
                   <a:srgbClr val="17364A"/>
                 </a:solidFill>
@@ -11409,9 +11409,9 @@
                 <a:ea typeface="Aptos" pitchFamily="34" charset="-122"/>
                 <a:cs typeface="Aptos" pitchFamily="34" charset="-120"/>
               </a:rPr>
-              <a:t>Use the assignment to test whether you can explain the concept, apply it to a realistic public health situation, and identify what would need review before the work moves forward.</a:t>
-            </a:r>
-            <a:endParaRPr lang="en-US" sz="1320" dirty="0"/>
+              <a:t>Use the assignment to test whether you can explain the concept, apply it to a.</a:t>
+            </a:r>
+            <a:endParaRPr lang="en-US" sz="1220" dirty="0"/>
           </a:p>
         </p:txBody>
       </p:sp>
@@ -11702,8 +11702,8 @@
         </p:nvSpPr>
         <p:spPr>
           <a:xfrm>
-            <a:off x="868680" y="1508760"/>
-            <a:ext cx="6309360" cy="4160520"/>
+            <a:off x="822960" y="1463040"/>
+            <a:ext cx="6565392" cy="4343400"/>
           </a:xfrm>
           <a:prstGeom prst="rect">
             <a:avLst/>
@@ -11721,7 +11721,7 @@
               <a:buNone/>
             </a:pPr>
             <a:r>
-              <a:rPr lang="en-US" sz="2100" dirty="0">
+              <a:rPr lang="en-US" sz="1920" dirty="0">
                 <a:solidFill>
                   <a:srgbClr val="003A63"/>
                 </a:solidFill>
@@ -11731,14 +11731,14 @@
               </a:rPr>
               <a:t>• 1. What is authorization?</a:t>
             </a:r>
-            <a:endParaRPr lang="en-US" sz="2100" dirty="0"/>
-          </a:p>
-          <a:p>
-            <a:pPr indent="0" marL="0">
-              <a:buNone/>
-            </a:pPr>
-            <a:r>
-              <a:rPr lang="en-US" sz="2100" dirty="0">
+            <a:endParaRPr lang="en-US" sz="1920" dirty="0"/>
+          </a:p>
+          <a:p>
+            <a:pPr indent="0" marL="0">
+              <a:buNone/>
+            </a:pPr>
+            <a:r>
+              <a:rPr lang="en-US" sz="1920" dirty="0">
                 <a:solidFill>
                   <a:srgbClr val="003A63"/>
                 </a:solidFill>
@@ -11748,14 +11748,14 @@
               </a:rPr>
               <a:t>• 2. Why are service accounts important in AI workflows?</a:t>
             </a:r>
-            <a:endParaRPr lang="en-US" sz="2100" dirty="0"/>
-          </a:p>
-          <a:p>
-            <a:pPr indent="0" marL="0">
-              <a:buNone/>
-            </a:pPr>
-            <a:r>
-              <a:rPr lang="en-US" sz="2100" dirty="0">
+            <a:endParaRPr lang="en-US" sz="1920" dirty="0"/>
+          </a:p>
+          <a:p>
+            <a:pPr indent="0" marL="0">
+              <a:buNone/>
+            </a:pPr>
+            <a:r>
+              <a:rPr lang="en-US" sz="1920" dirty="0">
                 <a:solidFill>
                   <a:srgbClr val="003A63"/>
                 </a:solidFill>
@@ -11765,7 +11765,7 @@
               </a:rPr>
               <a:t>• 3. What does least privilege mean?</a:t>
             </a:r>
-            <a:endParaRPr lang="en-US" sz="2100" dirty="0"/>
+            <a:endParaRPr lang="en-US" sz="1920" dirty="0"/>
           </a:p>
         </p:txBody>
       </p:sp>
@@ -11777,12 +11777,12 @@
         </p:nvSpPr>
         <p:spPr>
           <a:xfrm>
-            <a:off x="7635240" y="1325880"/>
-            <a:ext cx="3474720" cy="1207008"/>
+            <a:off x="7543800" y="1325880"/>
+            <a:ext cx="3611880" cy="1261872"/>
           </a:xfrm>
           <a:prstGeom prst="roundRect">
             <a:avLst>
-              <a:gd name="adj" fmla="val 9091"/>
+              <a:gd name="adj" fmla="val 8696"/>
             </a:avLst>
           </a:prstGeom>
           <a:solidFill>
@@ -11804,8 +11804,8 @@
         </p:nvSpPr>
         <p:spPr>
           <a:xfrm>
-            <a:off x="7799832" y="1472184"/>
-            <a:ext cx="3145536" cy="256032"/>
+            <a:off x="7708392" y="1453896"/>
+            <a:ext cx="3282696" cy="228600"/>
           </a:xfrm>
           <a:prstGeom prst="rect">
             <a:avLst/>
@@ -11821,7 +11821,7 @@
               <a:buNone/>
             </a:pPr>
             <a:r>
-              <a:rPr lang="en-US" sz="1300" b="1" dirty="0">
+              <a:rPr lang="en-US" sz="1220" b="1" dirty="0">
                 <a:solidFill>
                   <a:srgbClr val="0068B7"/>
                 </a:solidFill>
@@ -11831,7 +11831,7 @@
               </a:rPr>
               <a:t>Implementation cue</a:t>
             </a:r>
-            <a:endParaRPr lang="en-US" sz="1300" dirty="0"/>
+            <a:endParaRPr lang="en-US" sz="1220" dirty="0"/>
           </a:p>
         </p:txBody>
       </p:sp>
@@ -11843,8 +11843,8 @@
         </p:nvSpPr>
         <p:spPr>
           <a:xfrm>
-            <a:off x="7799832" y="1801368"/>
-            <a:ext cx="3145536" cy="640080"/>
+            <a:off x="7708392" y="1764792"/>
+            <a:ext cx="3282696" cy="749808"/>
           </a:xfrm>
           <a:prstGeom prst="rect">
             <a:avLst/>
@@ -11862,7 +11862,7 @@
               <a:buNone/>
             </a:pPr>
             <a:r>
-              <a:rPr lang="en-US" sz="1320" dirty="0">
+              <a:rPr lang="en-US" sz="1220" dirty="0">
                 <a:solidFill>
                   <a:srgbClr val="17364A"/>
                 </a:solidFill>
@@ -11872,7 +11872,7 @@
               </a:rPr>
               <a:t>1. What is authorization?</a:t>
             </a:r>
-            <a:endParaRPr lang="en-US" sz="1320" dirty="0"/>
+            <a:endParaRPr lang="en-US" sz="1220" dirty="0"/>
           </a:p>
         </p:txBody>
       </p:sp>
@@ -11884,12 +11884,12 @@
         </p:nvSpPr>
         <p:spPr>
           <a:xfrm>
-            <a:off x="7635240" y="2670048"/>
-            <a:ext cx="3474720" cy="1377086"/>
+            <a:off x="7543800" y="2724912"/>
+            <a:ext cx="3611880" cy="1527048"/>
           </a:xfrm>
           <a:prstGeom prst="roundRect">
             <a:avLst>
-              <a:gd name="adj" fmla="val 7968"/>
+              <a:gd name="adj" fmla="val 7186"/>
             </a:avLst>
           </a:prstGeom>
           <a:solidFill>
@@ -11911,8 +11911,8 @@
         </p:nvSpPr>
         <p:spPr>
           <a:xfrm>
-            <a:off x="7799832" y="2816352"/>
-            <a:ext cx="3145536" cy="256032"/>
+            <a:off x="7708392" y="2852928"/>
+            <a:ext cx="3282696" cy="228600"/>
           </a:xfrm>
           <a:prstGeom prst="rect">
             <a:avLst/>
@@ -11928,7 +11928,7 @@
               <a:buNone/>
             </a:pPr>
             <a:r>
-              <a:rPr lang="en-US" sz="1300" b="1" dirty="0">
+              <a:rPr lang="en-US" sz="1220" b="1" dirty="0">
                 <a:solidFill>
                   <a:srgbClr val="0068B7"/>
                 </a:solidFill>
@@ -11938,7 +11938,7 @@
               </a:rPr>
               <a:t>Concept checkpoints</a:t>
             </a:r>
-            <a:endParaRPr lang="en-US" sz="1300" dirty="0"/>
+            <a:endParaRPr lang="en-US" sz="1220" dirty="0"/>
           </a:p>
         </p:txBody>
       </p:sp>
@@ -11950,8 +11950,8 @@
         </p:nvSpPr>
         <p:spPr>
           <a:xfrm>
-            <a:off x="7818120" y="3182112"/>
-            <a:ext cx="3090672" cy="718718"/>
+            <a:off x="7726680" y="3182112"/>
+            <a:ext cx="3227832" cy="960120"/>
           </a:xfrm>
           <a:prstGeom prst="rect">
             <a:avLst/>
@@ -11969,7 +11969,7 @@
               <a:buNone/>
             </a:pPr>
             <a:r>
-              <a:rPr lang="en-US" sz="1220" dirty="0">
+              <a:rPr lang="en-US" sz="1140" dirty="0">
                 <a:solidFill>
                   <a:srgbClr val="17364A"/>
                 </a:solidFill>
@@ -11979,14 +11979,14 @@
               </a:rPr>
               <a:t>1.</a:t>
             </a:r>
-            <a:endParaRPr lang="en-US" sz="1220" dirty="0"/>
-          </a:p>
-          <a:p>
-            <a:pPr indent="0" marL="0">
-              <a:buNone/>
-            </a:pPr>
-            <a:r>
-              <a:rPr lang="en-US" sz="1220" dirty="0">
+            <a:endParaRPr lang="en-US" sz="1140" dirty="0"/>
+          </a:p>
+          <a:p>
+            <a:pPr indent="0" marL="0">
+              <a:buNone/>
+            </a:pPr>
+            <a:r>
+              <a:rPr lang="en-US" sz="1140" dirty="0">
                 <a:solidFill>
                   <a:srgbClr val="17364A"/>
                 </a:solidFill>
@@ -11996,14 +11996,14 @@
               </a:rPr>
               <a:t>What is authorization?</a:t>
             </a:r>
-            <a:endParaRPr lang="en-US" sz="1220" dirty="0"/>
-          </a:p>
-          <a:p>
-            <a:pPr indent="0" marL="0">
-              <a:buNone/>
-            </a:pPr>
-            <a:r>
-              <a:rPr lang="en-US" sz="1220" dirty="0">
+            <a:endParaRPr lang="en-US" sz="1140" dirty="0"/>
+          </a:p>
+          <a:p>
+            <a:pPr indent="0" marL="0">
+              <a:buNone/>
+            </a:pPr>
+            <a:r>
+              <a:rPr lang="en-US" sz="1140" dirty="0">
                 <a:solidFill>
                   <a:srgbClr val="17364A"/>
                 </a:solidFill>
@@ -12013,7 +12013,7 @@
               </a:rPr>
               <a:t>2.</a:t>
             </a:r>
-            <a:endParaRPr lang="en-US" sz="1220" dirty="0"/>
+            <a:endParaRPr lang="en-US" sz="1140" dirty="0"/>
           </a:p>
         </p:txBody>
       </p:sp>
@@ -12025,12 +12025,12 @@
         </p:nvSpPr>
         <p:spPr>
           <a:xfrm>
-            <a:off x="7635240" y="4184294"/>
-            <a:ext cx="3474720" cy="1466698"/>
+            <a:off x="7543800" y="4389120"/>
+            <a:ext cx="3611880" cy="1261872"/>
           </a:xfrm>
           <a:prstGeom prst="roundRect">
             <a:avLst>
-              <a:gd name="adj" fmla="val 7481"/>
+              <a:gd name="adj" fmla="val 8696"/>
             </a:avLst>
           </a:prstGeom>
           <a:solidFill>
@@ -12052,8 +12052,8 @@
         </p:nvSpPr>
         <p:spPr>
           <a:xfrm>
-            <a:off x="7799832" y="4330598"/>
-            <a:ext cx="3145536" cy="256032"/>
+            <a:off x="7708392" y="4517136"/>
+            <a:ext cx="3282696" cy="228600"/>
           </a:xfrm>
           <a:prstGeom prst="rect">
             <a:avLst/>
@@ -12069,7 +12069,7 @@
               <a:buNone/>
             </a:pPr>
             <a:r>
-              <a:rPr lang="en-US" sz="1300" b="1" dirty="0">
+              <a:rPr lang="en-US" sz="1220" b="1" dirty="0">
                 <a:solidFill>
                   <a:srgbClr val="0068B7"/>
                 </a:solidFill>
@@ -12079,7 +12079,7 @@
               </a:rPr>
               <a:t>Next action</a:t>
             </a:r>
-            <a:endParaRPr lang="en-US" sz="1300" dirty="0"/>
+            <a:endParaRPr lang="en-US" sz="1220" dirty="0"/>
           </a:p>
         </p:txBody>
       </p:sp>
@@ -12091,8 +12091,8 @@
         </p:nvSpPr>
         <p:spPr>
           <a:xfrm>
-            <a:off x="7799832" y="4659782"/>
-            <a:ext cx="3145536" cy="899770"/>
+            <a:off x="7708392" y="4828032"/>
+            <a:ext cx="3282696" cy="749808"/>
           </a:xfrm>
           <a:prstGeom prst="rect">
             <a:avLst/>
@@ -12110,7 +12110,7 @@
               <a:buNone/>
             </a:pPr>
             <a:r>
-              <a:rPr lang="en-US" sz="1320" dirty="0">
+              <a:rPr lang="en-US" sz="1220" dirty="0">
                 <a:solidFill>
                   <a:srgbClr val="17364A"/>
                 </a:solidFill>
@@ -12118,9 +12118,9 @@
                 <a:ea typeface="Aptos" pitchFamily="34" charset="-122"/>
                 <a:cs typeface="Aptos" pitchFamily="34" charset="-120"/>
               </a:rPr>
-              <a:t>Use the assignment to test whether you can explain the concept, apply it to a realistic public health situation, and identify what would need review before the work moves forward.</a:t>
-            </a:r>
-            <a:endParaRPr lang="en-US" sz="1320" dirty="0"/>
+              <a:t>Use the assignment to test whether you can explain the concept, apply it to a.</a:t>
+            </a:r>
+            <a:endParaRPr lang="en-US" sz="1220" dirty="0"/>
           </a:p>
         </p:txBody>
       </p:sp>
@@ -12411,8 +12411,8 @@
         </p:nvSpPr>
         <p:spPr>
           <a:xfrm>
-            <a:off x="868680" y="1508760"/>
-            <a:ext cx="6309360" cy="4160520"/>
+            <a:off x="822960" y="1463040"/>
+            <a:ext cx="6565392" cy="4343400"/>
           </a:xfrm>
           <a:prstGeom prst="rect">
             <a:avLst/>
@@ -12430,7 +12430,7 @@
               <a:buNone/>
             </a:pPr>
             <a:r>
-              <a:rPr lang="en-US" sz="2100" dirty="0">
+              <a:rPr lang="en-US" sz="1920" dirty="0">
                 <a:solidFill>
                   <a:srgbClr val="003A63"/>
                 </a:solidFill>
@@ -12440,14 +12440,14 @@
               </a:rPr>
               <a:t>• NIST Artificial Intelligence Risk Management Framework:.</a:t>
             </a:r>
-            <a:endParaRPr lang="en-US" sz="2100" dirty="0"/>
-          </a:p>
-          <a:p>
-            <a:pPr indent="0" marL="0">
-              <a:buNone/>
-            </a:pPr>
-            <a:r>
-              <a:rPr lang="en-US" sz="2100" dirty="0">
+            <a:endParaRPr lang="en-US" sz="1920" dirty="0"/>
+          </a:p>
+          <a:p>
+            <a:pPr indent="0" marL="0">
+              <a:buNone/>
+            </a:pPr>
+            <a:r>
+              <a:rPr lang="en-US" sz="1920" dirty="0">
                 <a:solidFill>
                   <a:srgbClr val="003A63"/>
                 </a:solidFill>
@@ -12457,14 +12457,14 @@
               </a:rPr>
               <a:t>• NIST Generative AI Profile:.</a:t>
             </a:r>
-            <a:endParaRPr lang="en-US" sz="2100" dirty="0"/>
-          </a:p>
-          <a:p>
-            <a:pPr indent="0" marL="0">
-              <a:buNone/>
-            </a:pPr>
-            <a:r>
-              <a:rPr lang="en-US" sz="2100" dirty="0">
+            <a:endParaRPr lang="en-US" sz="1920" dirty="0"/>
+          </a:p>
+          <a:p>
+            <a:pPr indent="0" marL="0">
+              <a:buNone/>
+            </a:pPr>
+            <a:r>
+              <a:rPr lang="en-US" sz="1920" dirty="0">
                 <a:solidFill>
                   <a:srgbClr val="003A63"/>
                 </a:solidFill>
@@ -12474,7 +12474,7 @@
               </a:rPr>
               <a:t>• CDC Public Health Data Strategy and Data Modernization resources:.</a:t>
             </a:r>
-            <a:endParaRPr lang="en-US" sz="2100" dirty="0"/>
+            <a:endParaRPr lang="en-US" sz="1920" dirty="0"/>
           </a:p>
         </p:txBody>
       </p:sp>
@@ -12486,12 +12486,12 @@
         </p:nvSpPr>
         <p:spPr>
           <a:xfrm>
-            <a:off x="7635240" y="1325880"/>
-            <a:ext cx="3474720" cy="1207008"/>
+            <a:off x="7543800" y="1325880"/>
+            <a:ext cx="3611880" cy="1261872"/>
           </a:xfrm>
           <a:prstGeom prst="roundRect">
             <a:avLst>
-              <a:gd name="adj" fmla="val 9091"/>
+              <a:gd name="adj" fmla="val 8696"/>
             </a:avLst>
           </a:prstGeom>
           <a:solidFill>
@@ -12513,8 +12513,8 @@
         </p:nvSpPr>
         <p:spPr>
           <a:xfrm>
-            <a:off x="7799832" y="1472184"/>
-            <a:ext cx="3145536" cy="256032"/>
+            <a:off x="7708392" y="1453896"/>
+            <a:ext cx="3282696" cy="228600"/>
           </a:xfrm>
           <a:prstGeom prst="rect">
             <a:avLst/>
@@ -12530,7 +12530,7 @@
               <a:buNone/>
             </a:pPr>
             <a:r>
-              <a:rPr lang="en-US" sz="1300" b="1" dirty="0">
+              <a:rPr lang="en-US" sz="1220" b="1" dirty="0">
                 <a:solidFill>
                   <a:srgbClr val="0068B7"/>
                 </a:solidFill>
@@ -12540,7 +12540,7 @@
               </a:rPr>
               <a:t>Implementation cue</a:t>
             </a:r>
-            <a:endParaRPr lang="en-US" sz="1300" dirty="0"/>
+            <a:endParaRPr lang="en-US" sz="1220" dirty="0"/>
           </a:p>
         </p:txBody>
       </p:sp>
@@ -12552,8 +12552,8 @@
         </p:nvSpPr>
         <p:spPr>
           <a:xfrm>
-            <a:off x="7799832" y="1801368"/>
-            <a:ext cx="3145536" cy="640080"/>
+            <a:off x="7708392" y="1764792"/>
+            <a:ext cx="3282696" cy="749808"/>
           </a:xfrm>
           <a:prstGeom prst="rect">
             <a:avLst/>
@@ -12571,7 +12571,7 @@
               <a:buNone/>
             </a:pPr>
             <a:r>
-              <a:rPr lang="en-US" sz="1320" dirty="0">
+              <a:rPr lang="en-US" sz="1220" dirty="0">
                 <a:solidFill>
                   <a:srgbClr val="17364A"/>
                 </a:solidFill>
@@ -12581,7 +12581,7 @@
               </a:rPr>
               <a:t>NIST Artificial Intelligence Risk Management Framework:.</a:t>
             </a:r>
-            <a:endParaRPr lang="en-US" sz="1320" dirty="0"/>
+            <a:endParaRPr lang="en-US" sz="1220" dirty="0"/>
           </a:p>
         </p:txBody>
       </p:sp>
@@ -12593,12 +12593,12 @@
         </p:nvSpPr>
         <p:spPr>
           <a:xfrm>
-            <a:off x="7635240" y="2670048"/>
-            <a:ext cx="3474720" cy="1377086"/>
+            <a:off x="7543800" y="2724912"/>
+            <a:ext cx="3611880" cy="1527048"/>
           </a:xfrm>
           <a:prstGeom prst="roundRect">
             <a:avLst>
-              <a:gd name="adj" fmla="val 7968"/>
+              <a:gd name="adj" fmla="val 7186"/>
             </a:avLst>
           </a:prstGeom>
           <a:solidFill>
@@ -12620,8 +12620,8 @@
         </p:nvSpPr>
         <p:spPr>
           <a:xfrm>
-            <a:off x="7799832" y="2816352"/>
-            <a:ext cx="3145536" cy="256032"/>
+            <a:off x="7708392" y="2852928"/>
+            <a:ext cx="3282696" cy="228600"/>
           </a:xfrm>
           <a:prstGeom prst="rect">
             <a:avLst/>
@@ -12637,7 +12637,7 @@
               <a:buNone/>
             </a:pPr>
             <a:r>
-              <a:rPr lang="en-US" sz="1300" b="1" dirty="0">
+              <a:rPr lang="en-US" sz="1220" b="1" dirty="0">
                 <a:solidFill>
                   <a:srgbClr val="0068B7"/>
                 </a:solidFill>
@@ -12647,7 +12647,7 @@
               </a:rPr>
               <a:t>Concept checkpoints</a:t>
             </a:r>
-            <a:endParaRPr lang="en-US" sz="1300" dirty="0"/>
+            <a:endParaRPr lang="en-US" sz="1220" dirty="0"/>
           </a:p>
         </p:txBody>
       </p:sp>
@@ -12659,8 +12659,8 @@
         </p:nvSpPr>
         <p:spPr>
           <a:xfrm>
-            <a:off x="7818120" y="3182112"/>
-            <a:ext cx="3090672" cy="718718"/>
+            <a:off x="7726680" y="3182112"/>
+            <a:ext cx="3227832" cy="960120"/>
           </a:xfrm>
           <a:prstGeom prst="rect">
             <a:avLst/>
@@ -12678,7 +12678,7 @@
               <a:buNone/>
             </a:pPr>
             <a:r>
-              <a:rPr lang="en-US" sz="1220" dirty="0">
+              <a:rPr lang="en-US" sz="1140" dirty="0">
                 <a:solidFill>
                   <a:srgbClr val="17364A"/>
                 </a:solidFill>
@@ -12686,16 +12686,16 @@
                 <a:ea typeface="Aptos" pitchFamily="34" charset="-122"/>
                 <a:cs typeface="Aptos" pitchFamily="34" charset="-120"/>
               </a:rPr>
-              <a:t>NIST Artificial Intelligence Risk Management Framework:.</a:t>
-            </a:r>
-            <a:endParaRPr lang="en-US" sz="1220" dirty="0"/>
-          </a:p>
-          <a:p>
-            <a:pPr indent="0" marL="0">
-              <a:buNone/>
-            </a:pPr>
-            <a:r>
-              <a:rPr lang="en-US" sz="1220" dirty="0">
+              <a:t>NIST Artificial Intelligence Risk Management.</a:t>
+            </a:r>
+            <a:endParaRPr lang="en-US" sz="1140" dirty="0"/>
+          </a:p>
+          <a:p>
+            <a:pPr indent="0" marL="0">
+              <a:buNone/>
+            </a:pPr>
+            <a:r>
+              <a:rPr lang="en-US" sz="1140" dirty="0">
                 <a:solidFill>
                   <a:srgbClr val="17364A"/>
                 </a:solidFill>
@@ -12705,14 +12705,14 @@
               </a:rPr>
               <a:t>OWASP guidance for LLM application security</a:t>
             </a:r>
-            <a:endParaRPr lang="en-US" sz="1220" dirty="0"/>
-          </a:p>
-          <a:p>
-            <a:pPr indent="0" marL="0">
-              <a:buNone/>
-            </a:pPr>
-            <a:r>
-              <a:rPr lang="en-US" sz="1220" dirty="0">
+            <a:endParaRPr lang="en-US" sz="1140" dirty="0"/>
+          </a:p>
+          <a:p>
+            <a:pPr indent="0" marL="0">
+              <a:buNone/>
+            </a:pPr>
+            <a:r>
+              <a:rPr lang="en-US" sz="1140" dirty="0">
                 <a:solidFill>
                   <a:srgbClr val="17364A"/>
                 </a:solidFill>
@@ -12720,9 +12720,9 @@
                 <a:ea typeface="Aptos" pitchFamily="34" charset="-122"/>
                 <a:cs typeface="Aptos" pitchFamily="34" charset="-120"/>
               </a:rPr>
-              <a:t>Agency policies for privacy, cybersecurity, records, procurement,.</a:t>
-            </a:r>
-            <a:endParaRPr lang="en-US" sz="1220" dirty="0"/>
+              <a:t>Agency policies for privacy, cybersecurity,.</a:t>
+            </a:r>
+            <a:endParaRPr lang="en-US" sz="1140" dirty="0"/>
           </a:p>
         </p:txBody>
       </p:sp>
@@ -12734,12 +12734,12 @@
         </p:nvSpPr>
         <p:spPr>
           <a:xfrm>
-            <a:off x="7635240" y="4184294"/>
-            <a:ext cx="3474720" cy="1466698"/>
+            <a:off x="7543800" y="4389120"/>
+            <a:ext cx="3611880" cy="1261872"/>
           </a:xfrm>
           <a:prstGeom prst="roundRect">
             <a:avLst>
-              <a:gd name="adj" fmla="val 7481"/>
+              <a:gd name="adj" fmla="val 8696"/>
             </a:avLst>
           </a:prstGeom>
           <a:solidFill>
@@ -12761,8 +12761,8 @@
         </p:nvSpPr>
         <p:spPr>
           <a:xfrm>
-            <a:off x="7799832" y="4330598"/>
-            <a:ext cx="3145536" cy="256032"/>
+            <a:off x="7708392" y="4517136"/>
+            <a:ext cx="3282696" cy="228600"/>
           </a:xfrm>
           <a:prstGeom prst="rect">
             <a:avLst/>
@@ -12778,7 +12778,7 @@
               <a:buNone/>
             </a:pPr>
             <a:r>
-              <a:rPr lang="en-US" sz="1300" b="1" dirty="0">
+              <a:rPr lang="en-US" sz="1220" b="1" dirty="0">
                 <a:solidFill>
                   <a:srgbClr val="0068B7"/>
                 </a:solidFill>
@@ -12788,7 +12788,7 @@
               </a:rPr>
               <a:t>Next action</a:t>
             </a:r>
-            <a:endParaRPr lang="en-US" sz="1300" dirty="0"/>
+            <a:endParaRPr lang="en-US" sz="1220" dirty="0"/>
           </a:p>
         </p:txBody>
       </p:sp>
@@ -12800,8 +12800,8 @@
         </p:nvSpPr>
         <p:spPr>
           <a:xfrm>
-            <a:off x="7799832" y="4659782"/>
-            <a:ext cx="3145536" cy="899770"/>
+            <a:off x="7708392" y="4828032"/>
+            <a:ext cx="3282696" cy="749808"/>
           </a:xfrm>
           <a:prstGeom prst="rect">
             <a:avLst/>
@@ -12819,7 +12819,7 @@
               <a:buNone/>
             </a:pPr>
             <a:r>
-              <a:rPr lang="en-US" sz="1320" dirty="0">
+              <a:rPr lang="en-US" sz="1220" dirty="0">
                 <a:solidFill>
                   <a:srgbClr val="17364A"/>
                 </a:solidFill>
@@ -12827,9 +12827,9 @@
                 <a:ea typeface="Aptos" pitchFamily="34" charset="-122"/>
                 <a:cs typeface="Aptos" pitchFamily="34" charset="-120"/>
               </a:rPr>
-              <a:t>Use the concept to clarify workflow changes, dependencies, staffing, procurement requirements, training needs, and implementation checkpoints.</a:t>
-            </a:r>
-            <a:endParaRPr lang="en-US" sz="1320" dirty="0"/>
+              <a:t>Use the concept to clarify workflow changes, dependencies, staffing, procurement.</a:t>
+            </a:r>
+            <a:endParaRPr lang="en-US" sz="1220" dirty="0"/>
           </a:p>
         </p:txBody>
       </p:sp>
@@ -13120,8 +13120,8 @@
         </p:nvSpPr>
         <p:spPr>
           <a:xfrm>
-            <a:off x="868680" y="1508760"/>
-            <a:ext cx="6309360" cy="4160520"/>
+            <a:off x="822960" y="1463040"/>
+            <a:ext cx="6565392" cy="4343400"/>
           </a:xfrm>
           <a:prstGeom prst="rect">
             <a:avLst/>
@@ -13139,7 +13139,7 @@
               <a:buNone/>
             </a:pPr>
             <a:r>
-              <a:rPr lang="en-US" sz="2100" dirty="0">
+              <a:rPr lang="en-US" sz="1920" dirty="0">
                 <a:solidFill>
                   <a:srgbClr val="003A63"/>
                 </a:solidFill>
@@ -13147,9 +13147,9 @@
                 <a:ea typeface="Aptos" pitchFamily="34" charset="-122"/>
                 <a:cs typeface="Aptos" pitchFamily="34" charset="-120"/>
               </a:rPr>
-              <a:t>• Relevant public health program SOPs, data governance documentation, and implementation plans</a:t>
-            </a:r>
-            <a:endParaRPr lang="en-US" sz="2100" dirty="0"/>
+              <a:t>• Relevant public health program SOPs, data governance documentation, and.</a:t>
+            </a:r>
+            <a:endParaRPr lang="en-US" sz="1920" dirty="0"/>
           </a:p>
         </p:txBody>
       </p:sp>
@@ -13161,12 +13161,12 @@
         </p:nvSpPr>
         <p:spPr>
           <a:xfrm>
-            <a:off x="7635240" y="1325880"/>
-            <a:ext cx="3474720" cy="1207008"/>
+            <a:off x="7543800" y="1325880"/>
+            <a:ext cx="3611880" cy="1261872"/>
           </a:xfrm>
           <a:prstGeom prst="roundRect">
             <a:avLst>
-              <a:gd name="adj" fmla="val 9091"/>
+              <a:gd name="adj" fmla="val 8696"/>
             </a:avLst>
           </a:prstGeom>
           <a:solidFill>
@@ -13188,8 +13188,8 @@
         </p:nvSpPr>
         <p:spPr>
           <a:xfrm>
-            <a:off x="7799832" y="1472184"/>
-            <a:ext cx="3145536" cy="256032"/>
+            <a:off x="7708392" y="1453896"/>
+            <a:ext cx="3282696" cy="228600"/>
           </a:xfrm>
           <a:prstGeom prst="rect">
             <a:avLst/>
@@ -13205,7 +13205,7 @@
               <a:buNone/>
             </a:pPr>
             <a:r>
-              <a:rPr lang="en-US" sz="1300" b="1" dirty="0">
+              <a:rPr lang="en-US" sz="1220" b="1" dirty="0">
                 <a:solidFill>
                   <a:srgbClr val="0068B7"/>
                 </a:solidFill>
@@ -13215,7 +13215,7 @@
               </a:rPr>
               <a:t>Implementation cue</a:t>
             </a:r>
-            <a:endParaRPr lang="en-US" sz="1300" dirty="0"/>
+            <a:endParaRPr lang="en-US" sz="1220" dirty="0"/>
           </a:p>
         </p:txBody>
       </p:sp>
@@ -13227,8 +13227,8 @@
         </p:nvSpPr>
         <p:spPr>
           <a:xfrm>
-            <a:off x="7799832" y="1801368"/>
-            <a:ext cx="3145536" cy="640080"/>
+            <a:off x="7708392" y="1764792"/>
+            <a:ext cx="3282696" cy="749808"/>
           </a:xfrm>
           <a:prstGeom prst="rect">
             <a:avLst/>
@@ -13246,7 +13246,7 @@
               <a:buNone/>
             </a:pPr>
             <a:r>
-              <a:rPr lang="en-US" sz="1320" dirty="0">
+              <a:rPr lang="en-US" sz="1220" dirty="0">
                 <a:solidFill>
                   <a:srgbClr val="17364A"/>
                 </a:solidFill>
@@ -13254,9 +13254,9 @@
                 <a:ea typeface="Aptos" pitchFamily="34" charset="-122"/>
                 <a:cs typeface="Aptos" pitchFamily="34" charset="-120"/>
               </a:rPr>
-              <a:t>Relevant public health program SOPs, data governance documentation, and implementation.</a:t>
-            </a:r>
-            <a:endParaRPr lang="en-US" sz="1320" dirty="0"/>
+              <a:t>Relevant public health program SOPs, data governance documentation, and.</a:t>
+            </a:r>
+            <a:endParaRPr lang="en-US" sz="1220" dirty="0"/>
           </a:p>
         </p:txBody>
       </p:sp>
@@ -13268,12 +13268,12 @@
         </p:nvSpPr>
         <p:spPr>
           <a:xfrm>
-            <a:off x="7635240" y="2670048"/>
-            <a:ext cx="3474720" cy="1377086"/>
+            <a:off x="7543800" y="2724912"/>
+            <a:ext cx="3611880" cy="1527048"/>
           </a:xfrm>
           <a:prstGeom prst="roundRect">
             <a:avLst>
-              <a:gd name="adj" fmla="val 7968"/>
+              <a:gd name="adj" fmla="val 7186"/>
             </a:avLst>
           </a:prstGeom>
           <a:solidFill>
@@ -13295,8 +13295,8 @@
         </p:nvSpPr>
         <p:spPr>
           <a:xfrm>
-            <a:off x="7799832" y="2816352"/>
-            <a:ext cx="3145536" cy="256032"/>
+            <a:off x="7708392" y="2852928"/>
+            <a:ext cx="3282696" cy="228600"/>
           </a:xfrm>
           <a:prstGeom prst="rect">
             <a:avLst/>
@@ -13312,7 +13312,7 @@
               <a:buNone/>
             </a:pPr>
             <a:r>
-              <a:rPr lang="en-US" sz="1300" b="1" dirty="0">
+              <a:rPr lang="en-US" sz="1220" b="1" dirty="0">
                 <a:solidFill>
                   <a:srgbClr val="0068B7"/>
                 </a:solidFill>
@@ -13322,7 +13322,7 @@
               </a:rPr>
               <a:t>Concept checkpoints</a:t>
             </a:r>
-            <a:endParaRPr lang="en-US" sz="1300" dirty="0"/>
+            <a:endParaRPr lang="en-US" sz="1220" dirty="0"/>
           </a:p>
         </p:txBody>
       </p:sp>
@@ -13334,8 +13334,8 @@
         </p:nvSpPr>
         <p:spPr>
           <a:xfrm>
-            <a:off x="7818120" y="3182112"/>
-            <a:ext cx="3090672" cy="718718"/>
+            <a:off x="7726680" y="3182112"/>
+            <a:ext cx="3227832" cy="960120"/>
           </a:xfrm>
           <a:prstGeom prst="rect">
             <a:avLst/>
@@ -13353,7 +13353,7 @@
               <a:buNone/>
             </a:pPr>
             <a:r>
-              <a:rPr lang="en-US" sz="1220" dirty="0">
+              <a:rPr lang="en-US" sz="1140" dirty="0">
                 <a:solidFill>
                   <a:srgbClr val="17364A"/>
                 </a:solidFill>
@@ -13361,9 +13361,9 @@
                 <a:ea typeface="Aptos" pitchFamily="34" charset="-122"/>
                 <a:cs typeface="Aptos" pitchFamily="34" charset="-120"/>
               </a:rPr>
-              <a:t>Relevant public health program SOPs, data governance.</a:t>
-            </a:r>
-            <a:endParaRPr lang="en-US" sz="1220" dirty="0"/>
+              <a:t>Relevant public health program SOPs, data.</a:t>
+            </a:r>
+            <a:endParaRPr lang="en-US" sz="1140" dirty="0"/>
           </a:p>
         </p:txBody>
       </p:sp>
@@ -13375,12 +13375,12 @@
         </p:nvSpPr>
         <p:spPr>
           <a:xfrm>
-            <a:off x="7635240" y="4184294"/>
-            <a:ext cx="3474720" cy="1466698"/>
+            <a:off x="7543800" y="4389120"/>
+            <a:ext cx="3611880" cy="1261872"/>
           </a:xfrm>
           <a:prstGeom prst="roundRect">
             <a:avLst>
-              <a:gd name="adj" fmla="val 7481"/>
+              <a:gd name="adj" fmla="val 8696"/>
             </a:avLst>
           </a:prstGeom>
           <a:solidFill>
@@ -13402,8 +13402,8 @@
         </p:nvSpPr>
         <p:spPr>
           <a:xfrm>
-            <a:off x="7799832" y="4330598"/>
-            <a:ext cx="3145536" cy="256032"/>
+            <a:off x="7708392" y="4517136"/>
+            <a:ext cx="3282696" cy="228600"/>
           </a:xfrm>
           <a:prstGeom prst="rect">
             <a:avLst/>
@@ -13419,7 +13419,7 @@
               <a:buNone/>
             </a:pPr>
             <a:r>
-              <a:rPr lang="en-US" sz="1300" b="1" dirty="0">
+              <a:rPr lang="en-US" sz="1220" b="1" dirty="0">
                 <a:solidFill>
                   <a:srgbClr val="0068B7"/>
                 </a:solidFill>
@@ -13429,7 +13429,7 @@
               </a:rPr>
               <a:t>Next action</a:t>
             </a:r>
-            <a:endParaRPr lang="en-US" sz="1300" dirty="0"/>
+            <a:endParaRPr lang="en-US" sz="1220" dirty="0"/>
           </a:p>
         </p:txBody>
       </p:sp>
@@ -13441,8 +13441,8 @@
         </p:nvSpPr>
         <p:spPr>
           <a:xfrm>
-            <a:off x="7799832" y="4659782"/>
-            <a:ext cx="3145536" cy="899770"/>
+            <a:off x="7708392" y="4828032"/>
+            <a:ext cx="3282696" cy="749808"/>
           </a:xfrm>
           <a:prstGeom prst="rect">
             <a:avLst/>
@@ -13460,7 +13460,7 @@
               <a:buNone/>
             </a:pPr>
             <a:r>
-              <a:rPr lang="en-US" sz="1320" dirty="0">
+              <a:rPr lang="en-US" sz="1220" dirty="0">
                 <a:solidFill>
                   <a:srgbClr val="17364A"/>
                 </a:solidFill>
@@ -13468,9 +13468,9 @@
                 <a:ea typeface="Aptos" pitchFamily="34" charset="-122"/>
                 <a:cs typeface="Aptos" pitchFamily="34" charset="-120"/>
               </a:rPr>
-              <a:t>Use the concept to clarify workflow changes, dependencies, staffing, procurement requirements, training needs, and implementation checkpoints.</a:t>
-            </a:r>
-            <a:endParaRPr lang="en-US" sz="1320" dirty="0"/>
+              <a:t>Use the concept to clarify workflow changes, dependencies, staffing, procurement.</a:t>
+            </a:r>
+            <a:endParaRPr lang="en-US" sz="1220" dirty="0"/>
           </a:p>
         </p:txBody>
       </p:sp>
@@ -13788,7 +13788,7 @@
                 <a:ea typeface="Aptos" pitchFamily="34" charset="-122"/>
                 <a:cs typeface="Aptos" pitchFamily="34" charset="-120"/>
               </a:rPr>
-              <a:t>• Play 11: Build and Deploy AI Solutions - This lesson informs Play 11 by helping learners.</a:t>
+              <a:t>• Play 11: Build and Deploy AI Solutions - This lesson informs Play 11 by.</a:t>
             </a:r>
             <a:endParaRPr lang="en-US" sz="1900" dirty="0"/>
           </a:p>
@@ -13805,7 +13805,7 @@
                 <a:ea typeface="Aptos" pitchFamily="34" charset="-122"/>
                 <a:cs typeface="Aptos" pitchFamily="34" charset="-120"/>
               </a:rPr>
-              <a:t>• Play 1: Vision &amp; Guardrails - This lesson informs Play 1 by helping learners connect the.</a:t>
+              <a:t>• Play 1: Vision &amp; Guardrails - This lesson informs Play 1 by helping learners.</a:t>
             </a:r>
             <a:endParaRPr lang="en-US" sz="1900" dirty="0"/>
           </a:p>
@@ -13822,7 +13822,7 @@
                 <a:ea typeface="Aptos" pitchFamily="34" charset="-122"/>
                 <a:cs typeface="Aptos" pitchFamily="34" charset="-120"/>
               </a:rPr>
-              <a:t>• Play 2: Readiness Assessment - This lesson informs Play 2 by helping learners connect the.</a:t>
+              <a:t>• Play 2: Readiness Assessment - This lesson informs Play 2 by helping.</a:t>
             </a:r>
             <a:endParaRPr lang="en-US" sz="1900" dirty="0"/>
           </a:p>
@@ -13839,7 +13839,7 @@
                 <a:ea typeface="Aptos" pitchFamily="34" charset="-122"/>
                 <a:cs typeface="Aptos" pitchFamily="34" charset="-120"/>
               </a:rPr>
-              <a:t>• Play 3: Establish AI Governance - This lesson informs Play 3 by helping learners connect the.</a:t>
+              <a:t>• Play 3: Establish AI Governance - This lesson informs Play 3 by helping.</a:t>
             </a:r>
             <a:endParaRPr lang="en-US" sz="1900" dirty="0"/>
           </a:p>
@@ -13880,8 +13880,8 @@
         </p:nvSpPr>
         <p:spPr>
           <a:xfrm>
-            <a:off x="8211312" y="1563624"/>
-            <a:ext cx="2734056" cy="256032"/>
+            <a:off x="8211312" y="1545336"/>
+            <a:ext cx="2734056" cy="228600"/>
           </a:xfrm>
           <a:prstGeom prst="rect">
             <a:avLst/>
@@ -13897,7 +13897,7 @@
               <a:buNone/>
             </a:pPr>
             <a:r>
-              <a:rPr lang="en-US" sz="1300" b="1" dirty="0">
+              <a:rPr lang="en-US" sz="1220" b="1" dirty="0">
                 <a:solidFill>
                   <a:srgbClr val="0068B7"/>
                 </a:solidFill>
@@ -13907,7 +13907,7 @@
               </a:rPr>
               <a:t>Apply the lesson</a:t>
             </a:r>
-            <a:endParaRPr lang="en-US" sz="1300" dirty="0"/>
+            <a:endParaRPr lang="en-US" sz="1220" dirty="0"/>
           </a:p>
         </p:txBody>
       </p:sp>
@@ -13919,8 +13919,8 @@
         </p:nvSpPr>
         <p:spPr>
           <a:xfrm>
-            <a:off x="8211312" y="1892808"/>
-            <a:ext cx="2734056" cy="1536192"/>
+            <a:off x="8211312" y="1856232"/>
+            <a:ext cx="2734056" cy="1591056"/>
           </a:xfrm>
           <a:prstGeom prst="rect">
             <a:avLst/>
@@ -13938,7 +13938,7 @@
               <a:buNone/>
             </a:pPr>
             <a:r>
-              <a:rPr lang="en-US" sz="1320" dirty="0">
+              <a:rPr lang="en-US" sz="1220" dirty="0">
                 <a:solidFill>
                   <a:srgbClr val="17364A"/>
                 </a:solidFill>
@@ -13946,9 +13946,9 @@
                 <a:ea typeface="Aptos" pitchFamily="34" charset="-122"/>
                 <a:cs typeface="Aptos" pitchFamily="34" charset="-120"/>
               </a:rPr>
-              <a:t>Use the related plays to identify decisions, participants, timing, approvals, and documentation needed for responsible implementation.</a:t>
-            </a:r>
-            <a:endParaRPr lang="en-US" sz="1320" dirty="0"/>
+              <a:t>Use the related plays to identify decisions, participants, timing, approvals,.</a:t>
+            </a:r>
+            <a:endParaRPr lang="en-US" sz="1220" dirty="0"/>
           </a:p>
         </p:txBody>
       </p:sp>
@@ -13987,8 +13987,8 @@
         </p:nvSpPr>
         <p:spPr>
           <a:xfrm>
-            <a:off x="8211312" y="3941064"/>
-            <a:ext cx="2734056" cy="256032"/>
+            <a:off x="8211312" y="3922776"/>
+            <a:ext cx="2734056" cy="228600"/>
           </a:xfrm>
           <a:prstGeom prst="rect">
             <a:avLst/>
@@ -14004,7 +14004,7 @@
               <a:buNone/>
             </a:pPr>
             <a:r>
-              <a:rPr lang="en-US" sz="1300" b="1" dirty="0">
+              <a:rPr lang="en-US" sz="1220" b="1" dirty="0">
                 <a:solidFill>
                   <a:srgbClr val="0068B7"/>
                 </a:solidFill>
@@ -14014,7 +14014,7 @@
               </a:rPr>
               <a:t>Use the play links to</a:t>
             </a:r>
-            <a:endParaRPr lang="en-US" sz="1300" dirty="0"/>
+            <a:endParaRPr lang="en-US" sz="1220" dirty="0"/>
           </a:p>
         </p:txBody>
       </p:sp>
@@ -14026,8 +14026,8 @@
         </p:nvSpPr>
         <p:spPr>
           <a:xfrm>
-            <a:off x="8229600" y="4306824"/>
-            <a:ext cx="2679192" cy="941832"/>
+            <a:off x="8229600" y="4251960"/>
+            <a:ext cx="2679192" cy="1033272"/>
           </a:xfrm>
           <a:prstGeom prst="rect">
             <a:avLst/>
@@ -14045,7 +14045,7 @@
               <a:buNone/>
             </a:pPr>
             <a:r>
-              <a:rPr lang="en-US" sz="1220" dirty="0">
+              <a:rPr lang="en-US" sz="1140" dirty="0">
                 <a:solidFill>
                   <a:srgbClr val="17364A"/>
                 </a:solidFill>
@@ -14055,14 +14055,14 @@
               </a:rPr>
               <a:t>Locate the decision point in the playbook sequence.</a:t>
             </a:r>
-            <a:endParaRPr lang="en-US" sz="1220" dirty="0"/>
-          </a:p>
-          <a:p>
-            <a:pPr indent="0" marL="0">
-              <a:buNone/>
-            </a:pPr>
-            <a:r>
-              <a:rPr lang="en-US" sz="1220" dirty="0">
+            <a:endParaRPr lang="en-US" sz="1140" dirty="0"/>
+          </a:p>
+          <a:p>
+            <a:pPr indent="0" marL="0">
+              <a:buNone/>
+            </a:pPr>
+            <a:r>
+              <a:rPr lang="en-US" sz="1140" dirty="0">
                 <a:solidFill>
                   <a:srgbClr val="17364A"/>
                 </a:solidFill>
@@ -14072,14 +14072,14 @@
               </a:rPr>
               <a:t>Identify who should participate in the work.</a:t>
             </a:r>
-            <a:endParaRPr lang="en-US" sz="1220" dirty="0"/>
-          </a:p>
-          <a:p>
-            <a:pPr indent="0" marL="0">
-              <a:buNone/>
-            </a:pPr>
-            <a:r>
-              <a:rPr lang="en-US" sz="1220" dirty="0">
+            <a:endParaRPr lang="en-US" sz="1140" dirty="0"/>
+          </a:p>
+          <a:p>
+            <a:pPr indent="0" marL="0">
+              <a:buNone/>
+            </a:pPr>
+            <a:r>
+              <a:rPr lang="en-US" sz="1140" dirty="0">
                 <a:solidFill>
                   <a:srgbClr val="17364A"/>
                 </a:solidFill>
@@ -14087,9 +14087,9 @@
                 <a:ea typeface="Aptos" pitchFamily="34" charset="-122"/>
                 <a:cs typeface="Aptos" pitchFamily="34" charset="-120"/>
               </a:rPr>
-              <a:t>Document the review, approval, or implementation step.</a:t>
-            </a:r>
-            <a:endParaRPr lang="en-US" sz="1220" dirty="0"/>
+              <a:t>Document the review, approval, or implementation.</a:t>
+            </a:r>
+            <a:endParaRPr lang="en-US" sz="1140" dirty="0"/>
           </a:p>
         </p:txBody>
       </p:sp>
@@ -14407,7 +14407,7 @@
                 <a:ea typeface="Aptos" pitchFamily="34" charset="-122"/>
                 <a:cs typeface="Aptos" pitchFamily="34" charset="-120"/>
               </a:rPr>
-              <a:t>• Tool 4: AI Policy Landscape Scan (Worksheet) - Use AI Policy Landscape Scan to translate this.</a:t>
+              <a:t>• Tool 4: AI Policy Landscape Scan (Worksheet) - Use AI Policy Landscape Scan.</a:t>
             </a:r>
             <a:endParaRPr lang="en-US" sz="1850" dirty="0"/>
           </a:p>
@@ -14424,7 +14424,7 @@
                 <a:ea typeface="Aptos" pitchFamily="34" charset="-122"/>
                 <a:cs typeface="Aptos" pitchFamily="34" charset="-120"/>
               </a:rPr>
-              <a:t>• Tool 5: AI Environmental and Resource Impact Review (Checklist) - Use AI Environmental and.</a:t>
+              <a:t>• Tool 5: AI Environmental and Resource Impact Review (Checklist) - Use AI.</a:t>
             </a:r>
             <a:endParaRPr lang="en-US" sz="1850" dirty="0"/>
           </a:p>
@@ -14441,7 +14441,7 @@
                 <a:ea typeface="Aptos" pitchFamily="34" charset="-122"/>
                 <a:cs typeface="Aptos" pitchFamily="34" charset="-120"/>
               </a:rPr>
-              <a:t>• Tool 6: Human-Centered AI Decision Rule Checklist (Checklist) - Use Human-Centered AI Decision.</a:t>
+              <a:t>• Tool 6: Human-Centered AI Decision Rule Checklist (Checklist) - Use.</a:t>
             </a:r>
             <a:endParaRPr lang="en-US" sz="1850" dirty="0"/>
           </a:p>
@@ -14458,7 +14458,7 @@
                 <a:ea typeface="Aptos" pitchFamily="34" charset="-122"/>
                 <a:cs typeface="Aptos" pitchFamily="34" charset="-120"/>
               </a:rPr>
-              <a:t>• Tool 8: AI Project Charter (Planning) - Use AI Project Charter to translate this lesson into a.</a:t>
+              <a:t>• Tool 8: AI Project Charter (Planning) - Use AI Project Charter to translate.</a:t>
             </a:r>
             <a:endParaRPr lang="en-US" sz="1850" dirty="0"/>
           </a:p>
@@ -14499,8 +14499,8 @@
         </p:nvSpPr>
         <p:spPr>
           <a:xfrm>
-            <a:off x="8211312" y="1563624"/>
-            <a:ext cx="2734056" cy="256032"/>
+            <a:off x="8211312" y="1545336"/>
+            <a:ext cx="2734056" cy="228600"/>
           </a:xfrm>
           <a:prstGeom prst="rect">
             <a:avLst/>
@@ -14516,7 +14516,7 @@
               <a:buNone/>
             </a:pPr>
             <a:r>
-              <a:rPr lang="en-US" sz="1300" b="1" dirty="0">
+              <a:rPr lang="en-US" sz="1220" b="1" dirty="0">
                 <a:solidFill>
                   <a:srgbClr val="0068B7"/>
                 </a:solidFill>
@@ -14526,7 +14526,7 @@
               </a:rPr>
               <a:t>Use the tools</a:t>
             </a:r>
-            <a:endParaRPr lang="en-US" sz="1300" dirty="0"/>
+            <a:endParaRPr lang="en-US" sz="1220" dirty="0"/>
           </a:p>
         </p:txBody>
       </p:sp>
@@ -14538,8 +14538,8 @@
         </p:nvSpPr>
         <p:spPr>
           <a:xfrm>
-            <a:off x="8211312" y="1892808"/>
-            <a:ext cx="2734056" cy="1536192"/>
+            <a:off x="8211312" y="1856232"/>
+            <a:ext cx="2734056" cy="1591056"/>
           </a:xfrm>
           <a:prstGeom prst="rect">
             <a:avLst/>
@@ -14557,7 +14557,7 @@
               <a:buNone/>
             </a:pPr>
             <a:r>
-              <a:rPr lang="en-US" sz="1320" dirty="0">
+              <a:rPr lang="en-US" sz="1220" dirty="0">
                 <a:solidFill>
                   <a:srgbClr val="17364A"/>
                 </a:solidFill>
@@ -14565,9 +14565,9 @@
                 <a:ea typeface="Aptos" pitchFamily="34" charset="-122"/>
                 <a:cs typeface="Aptos" pitchFamily="34" charset="-120"/>
               </a:rPr>
-              <a:t>Use linked tools when your department needs a structured worksheet, template, checklist, review process, or documentation artifact.</a:t>
-            </a:r>
-            <a:endParaRPr lang="en-US" sz="1320" dirty="0"/>
+              <a:t>Use linked tools when your department needs a structured worksheet, template,.</a:t>
+            </a:r>
+            <a:endParaRPr lang="en-US" sz="1220" dirty="0"/>
           </a:p>
         </p:txBody>
       </p:sp>
@@ -14606,8 +14606,8 @@
         </p:nvSpPr>
         <p:spPr>
           <a:xfrm>
-            <a:off x="8211312" y="3941064"/>
-            <a:ext cx="2734056" cy="256032"/>
+            <a:off x="8211312" y="3922776"/>
+            <a:ext cx="2734056" cy="228600"/>
           </a:xfrm>
           <a:prstGeom prst="rect">
             <a:avLst/>
@@ -14623,7 +14623,7 @@
               <a:buNone/>
             </a:pPr>
             <a:r>
-              <a:rPr lang="en-US" sz="1300" b="1" dirty="0">
+              <a:rPr lang="en-US" sz="1220" b="1" dirty="0">
                 <a:solidFill>
                   <a:srgbClr val="0068B7"/>
                 </a:solidFill>
@@ -14633,7 +14633,7 @@
               </a:rPr>
               <a:t>Tool selection cues</a:t>
             </a:r>
-            <a:endParaRPr lang="en-US" sz="1300" dirty="0"/>
+            <a:endParaRPr lang="en-US" sz="1220" dirty="0"/>
           </a:p>
         </p:txBody>
       </p:sp>
@@ -14645,8 +14645,8 @@
         </p:nvSpPr>
         <p:spPr>
           <a:xfrm>
-            <a:off x="8229600" y="4306824"/>
-            <a:ext cx="2679192" cy="941832"/>
+            <a:off x="8229600" y="4251960"/>
+            <a:ext cx="2679192" cy="1033272"/>
           </a:xfrm>
           <a:prstGeom prst="rect">
             <a:avLst/>
@@ -14664,7 +14664,7 @@
               <a:buNone/>
             </a:pPr>
             <a:r>
-              <a:rPr lang="en-US" sz="1220" dirty="0">
+              <a:rPr lang="en-US" sz="1140" dirty="0">
                 <a:solidFill>
                   <a:srgbClr val="17364A"/>
                 </a:solidFill>
@@ -14674,14 +14674,14 @@
               </a:rPr>
               <a:t>Use a tool when no comparable local process exists.</a:t>
             </a:r>
-            <a:endParaRPr lang="en-US" sz="1220" dirty="0"/>
-          </a:p>
-          <a:p>
-            <a:pPr indent="0" marL="0">
-              <a:buNone/>
-            </a:pPr>
-            <a:r>
-              <a:rPr lang="en-US" sz="1220" dirty="0">
+            <a:endParaRPr lang="en-US" sz="1140" dirty="0"/>
+          </a:p>
+          <a:p>
+            <a:pPr indent="0" marL="0">
+              <a:buNone/>
+            </a:pPr>
+            <a:r>
+              <a:rPr lang="en-US" sz="1140" dirty="0">
                 <a:solidFill>
                   <a:srgbClr val="17364A"/>
                 </a:solidFill>
@@ -14689,16 +14689,16 @@
                 <a:ea typeface="Aptos" pitchFamily="34" charset="-122"/>
                 <a:cs typeface="Aptos" pitchFamily="34" charset="-120"/>
               </a:rPr>
-              <a:t>Adapt existing department templates when they already fit the.</a:t>
-            </a:r>
-            <a:endParaRPr lang="en-US" sz="1220" dirty="0"/>
-          </a:p>
-          <a:p>
-            <a:pPr indent="0" marL="0">
-              <a:buNone/>
-            </a:pPr>
-            <a:r>
-              <a:rPr lang="en-US" sz="1220" dirty="0">
+              <a:t>Adapt existing department templates when they.</a:t>
+            </a:r>
+            <a:endParaRPr lang="en-US" sz="1140" dirty="0"/>
+          </a:p>
+          <a:p>
+            <a:pPr indent="0" marL="0">
+              <a:buNone/>
+            </a:pPr>
+            <a:r>
+              <a:rPr lang="en-US" sz="1140" dirty="0">
                 <a:solidFill>
                   <a:srgbClr val="17364A"/>
                 </a:solidFill>
@@ -14706,9 +14706,9 @@
                 <a:ea typeface="Aptos" pitchFamily="34" charset="-122"/>
                 <a:cs typeface="Aptos" pitchFamily="34" charset="-120"/>
               </a:rPr>
-              <a:t>Save the completed artifact as evidence of the decision.</a:t>
-            </a:r>
-            <a:endParaRPr lang="en-US" sz="1220" dirty="0"/>
+              <a:t>Save the completed artifact as evidence of the.</a:t>
+            </a:r>
+            <a:endParaRPr lang="en-US" sz="1140" dirty="0"/>
           </a:p>
         </p:txBody>
       </p:sp>
@@ -14999,8 +14999,8 @@
         </p:nvSpPr>
         <p:spPr>
           <a:xfrm>
-            <a:off x="868680" y="1508760"/>
-            <a:ext cx="6309360" cy="4160520"/>
+            <a:off x="822960" y="1463040"/>
+            <a:ext cx="6565392" cy="4343400"/>
           </a:xfrm>
           <a:prstGeom prst="rect">
             <a:avLst/>
@@ -15018,7 +15018,7 @@
               <a:buNone/>
             </a:pPr>
             <a:r>
-              <a:rPr lang="en-US" sz="2100" dirty="0">
+              <a:rPr lang="en-US" sz="1920" dirty="0">
                 <a:solidFill>
                   <a:srgbClr val="003A63"/>
                 </a:solidFill>
@@ -15026,16 +15026,16 @@
                 <a:ea typeface="Aptos" pitchFamily="34" charset="-122"/>
                 <a:cs typeface="Aptos" pitchFamily="34" charset="-120"/>
               </a:rPr>
-              <a:t>• Explain the difference between user identity, service identity, authentication, authorization,.</a:t>
-            </a:r>
-            <a:endParaRPr lang="en-US" sz="2100" dirty="0"/>
-          </a:p>
-          <a:p>
-            <a:pPr indent="0" marL="0">
-              <a:buNone/>
-            </a:pPr>
-            <a:r>
-              <a:rPr lang="en-US" sz="2100" dirty="0">
+              <a:t>• Explain the difference between user identity, service identity,.</a:t>
+            </a:r>
+            <a:endParaRPr lang="en-US" sz="1920" dirty="0"/>
+          </a:p>
+          <a:p>
+            <a:pPr indent="0" marL="0">
+              <a:buNone/>
+            </a:pPr>
+            <a:r>
+              <a:rPr lang="en-US" sz="1920" dirty="0">
                 <a:solidFill>
                   <a:srgbClr val="003A63"/>
                 </a:solidFill>
@@ -15045,14 +15045,14 @@
               </a:rPr>
               <a:t>• Apply least-privilege principles to AI-supported public health workflows.</a:t>
             </a:r>
-            <a:endParaRPr lang="en-US" sz="2100" dirty="0"/>
-          </a:p>
-          <a:p>
-            <a:pPr indent="0" marL="0">
-              <a:buNone/>
-            </a:pPr>
-            <a:r>
-              <a:rPr lang="en-US" sz="2100" dirty="0">
+            <a:endParaRPr lang="en-US" sz="1920" dirty="0"/>
+          </a:p>
+          <a:p>
+            <a:pPr indent="0" marL="0">
+              <a:buNone/>
+            </a:pPr>
+            <a:r>
+              <a:rPr lang="en-US" sz="1920" dirty="0">
                 <a:solidFill>
                   <a:srgbClr val="003A63"/>
                 </a:solidFill>
@@ -15060,9 +15060,9 @@
                 <a:ea typeface="Aptos" pitchFamily="34" charset="-122"/>
                 <a:cs typeface="Aptos" pitchFamily="34" charset="-120"/>
               </a:rPr>
-              <a:t>• Identify access risks for read-only, retrieval, summarization, and write-back AI functions.</a:t>
-            </a:r>
-            <a:endParaRPr lang="en-US" sz="2100" dirty="0"/>
+              <a:t>• Identify access risks for read-only, retrieval, summarization, and.</a:t>
+            </a:r>
+            <a:endParaRPr lang="en-US" sz="1920" dirty="0"/>
           </a:p>
         </p:txBody>
       </p:sp>
@@ -15074,12 +15074,12 @@
         </p:nvSpPr>
         <p:spPr>
           <a:xfrm>
-            <a:off x="7635240" y="1325880"/>
-            <a:ext cx="3474720" cy="1255471"/>
+            <a:off x="7543800" y="1325880"/>
+            <a:ext cx="3611880" cy="1261872"/>
           </a:xfrm>
           <a:prstGeom prst="roundRect">
             <a:avLst>
-              <a:gd name="adj" fmla="val 8740"/>
+              <a:gd name="adj" fmla="val 8696"/>
             </a:avLst>
           </a:prstGeom>
           <a:solidFill>
@@ -15101,8 +15101,8 @@
         </p:nvSpPr>
         <p:spPr>
           <a:xfrm>
-            <a:off x="7799832" y="1472184"/>
-            <a:ext cx="3145536" cy="256032"/>
+            <a:off x="7708392" y="1453896"/>
+            <a:ext cx="3282696" cy="228600"/>
           </a:xfrm>
           <a:prstGeom prst="rect">
             <a:avLst/>
@@ -15118,7 +15118,7 @@
               <a:buNone/>
             </a:pPr>
             <a:r>
-              <a:rPr lang="en-US" sz="1300" b="1" dirty="0">
+              <a:rPr lang="en-US" sz="1220" b="1" dirty="0">
                 <a:solidFill>
                   <a:srgbClr val="0068B7"/>
                 </a:solidFill>
@@ -15128,7 +15128,7 @@
               </a:rPr>
               <a:t>Implementation cue</a:t>
             </a:r>
-            <a:endParaRPr lang="en-US" sz="1300" dirty="0"/>
+            <a:endParaRPr lang="en-US" sz="1220" dirty="0"/>
           </a:p>
         </p:txBody>
       </p:sp>
@@ -15140,8 +15140,8 @@
         </p:nvSpPr>
         <p:spPr>
           <a:xfrm>
-            <a:off x="7799832" y="1801368"/>
-            <a:ext cx="3145536" cy="688543"/>
+            <a:off x="7708392" y="1764792"/>
+            <a:ext cx="3282696" cy="749808"/>
           </a:xfrm>
           <a:prstGeom prst="rect">
             <a:avLst/>
@@ -15159,7 +15159,7 @@
               <a:buNone/>
             </a:pPr>
             <a:r>
-              <a:rPr lang="en-US" sz="1320" dirty="0">
+              <a:rPr lang="en-US" sz="1220" dirty="0">
                 <a:solidFill>
                   <a:srgbClr val="17364A"/>
                 </a:solidFill>
@@ -15167,9 +15167,9 @@
                 <a:ea typeface="Aptos" pitchFamily="34" charset="-122"/>
                 <a:cs typeface="Aptos" pitchFamily="34" charset="-120"/>
               </a:rPr>
-              <a:t>Explain the difference between user identity, service identity, authentication, authorization, and.</a:t>
-            </a:r>
-            <a:endParaRPr lang="en-US" sz="1320" dirty="0"/>
+              <a:t>Explain the difference between user identity, service identity, authentication,.</a:t>
+            </a:r>
+            <a:endParaRPr lang="en-US" sz="1220" dirty="0"/>
           </a:p>
         </p:txBody>
       </p:sp>
@@ -15181,12 +15181,12 @@
         </p:nvSpPr>
         <p:spPr>
           <a:xfrm>
-            <a:off x="7635240" y="2718511"/>
-            <a:ext cx="3474720" cy="1328623"/>
+            <a:off x="7543800" y="2724912"/>
+            <a:ext cx="3611880" cy="1527048"/>
           </a:xfrm>
           <a:prstGeom prst="roundRect">
             <a:avLst>
-              <a:gd name="adj" fmla="val 8259"/>
+              <a:gd name="adj" fmla="val 7186"/>
             </a:avLst>
           </a:prstGeom>
           <a:solidFill>
@@ -15208,8 +15208,8 @@
         </p:nvSpPr>
         <p:spPr>
           <a:xfrm>
-            <a:off x="7799832" y="2864815"/>
-            <a:ext cx="3145536" cy="256032"/>
+            <a:off x="7708392" y="2852928"/>
+            <a:ext cx="3282696" cy="228600"/>
           </a:xfrm>
           <a:prstGeom prst="rect">
             <a:avLst/>
@@ -15225,7 +15225,7 @@
               <a:buNone/>
             </a:pPr>
             <a:r>
-              <a:rPr lang="en-US" sz="1300" b="1" dirty="0">
+              <a:rPr lang="en-US" sz="1220" b="1" dirty="0">
                 <a:solidFill>
                   <a:srgbClr val="0068B7"/>
                 </a:solidFill>
@@ -15235,7 +15235,7 @@
               </a:rPr>
               <a:t>Concept checkpoints</a:t>
             </a:r>
-            <a:endParaRPr lang="en-US" sz="1300" dirty="0"/>
+            <a:endParaRPr lang="en-US" sz="1220" dirty="0"/>
           </a:p>
         </p:txBody>
       </p:sp>
@@ -15247,8 +15247,8 @@
         </p:nvSpPr>
         <p:spPr>
           <a:xfrm>
-            <a:off x="7818120" y="3230575"/>
-            <a:ext cx="3090672" cy="670255"/>
+            <a:off x="7726680" y="3182112"/>
+            <a:ext cx="3227832" cy="960120"/>
           </a:xfrm>
           <a:prstGeom prst="rect">
             <a:avLst/>
@@ -15266,7 +15266,7 @@
               <a:buNone/>
             </a:pPr>
             <a:r>
-              <a:rPr lang="en-US" sz="1220" dirty="0">
+              <a:rPr lang="en-US" sz="1140" dirty="0">
                 <a:solidFill>
                   <a:srgbClr val="17364A"/>
                 </a:solidFill>
@@ -15274,16 +15274,16 @@
                 <a:ea typeface="Aptos" pitchFamily="34" charset="-122"/>
                 <a:cs typeface="Aptos" pitchFamily="34" charset="-120"/>
               </a:rPr>
-              <a:t>Explain the difference between user identity, service identity,.</a:t>
-            </a:r>
-            <a:endParaRPr lang="en-US" sz="1220" dirty="0"/>
-          </a:p>
-          <a:p>
-            <a:pPr indent="0" marL="0">
-              <a:buNone/>
-            </a:pPr>
-            <a:r>
-              <a:rPr lang="en-US" sz="1220" dirty="0">
+              <a:t>Explain the difference between user identity,.</a:t>
+            </a:r>
+            <a:endParaRPr lang="en-US" sz="1140" dirty="0"/>
+          </a:p>
+          <a:p>
+            <a:pPr indent="0" marL="0">
+              <a:buNone/>
+            </a:pPr>
+            <a:r>
+              <a:rPr lang="en-US" sz="1140" dirty="0">
                 <a:solidFill>
                   <a:srgbClr val="17364A"/>
                 </a:solidFill>
@@ -15291,16 +15291,16 @@
                 <a:ea typeface="Aptos" pitchFamily="34" charset="-122"/>
                 <a:cs typeface="Aptos" pitchFamily="34" charset="-120"/>
               </a:rPr>
-              <a:t>Define audit log and approval requirements for AI tools that.</a:t>
-            </a:r>
-            <a:endParaRPr lang="en-US" sz="1220" dirty="0"/>
-          </a:p>
-          <a:p>
-            <a:pPr indent="0" marL="0">
-              <a:buNone/>
-            </a:pPr>
-            <a:r>
-              <a:rPr lang="en-US" sz="1220" dirty="0">
+              <a:t>Define audit log and approval requirements for AI.</a:t>
+            </a:r>
+            <a:endParaRPr lang="en-US" sz="1140" dirty="0"/>
+          </a:p>
+          <a:p>
+            <a:pPr indent="0" marL="0">
+              <a:buNone/>
+            </a:pPr>
+            <a:r>
+              <a:rPr lang="en-US" sz="1140" dirty="0">
                 <a:solidFill>
                   <a:srgbClr val="17364A"/>
                 </a:solidFill>
@@ -15308,9 +15308,9 @@
                 <a:ea typeface="Aptos" pitchFamily="34" charset="-122"/>
                 <a:cs typeface="Aptos" pitchFamily="34" charset="-120"/>
               </a:rPr>
-              <a:t>Create an access and permissions review for an AI workflow.</a:t>
-            </a:r>
-            <a:endParaRPr lang="en-US" sz="1220" dirty="0"/>
+              <a:t>Create an access and permissions review for an AI.</a:t>
+            </a:r>
+            <a:endParaRPr lang="en-US" sz="1140" dirty="0"/>
           </a:p>
         </p:txBody>
       </p:sp>
@@ -15322,12 +15322,12 @@
         </p:nvSpPr>
         <p:spPr>
           <a:xfrm>
-            <a:off x="7635240" y="4184294"/>
-            <a:ext cx="3474720" cy="1466698"/>
+            <a:off x="7543800" y="4389120"/>
+            <a:ext cx="3611880" cy="1261872"/>
           </a:xfrm>
           <a:prstGeom prst="roundRect">
             <a:avLst>
-              <a:gd name="adj" fmla="val 7481"/>
+              <a:gd name="adj" fmla="val 8696"/>
             </a:avLst>
           </a:prstGeom>
           <a:solidFill>
@@ -15349,8 +15349,8 @@
         </p:nvSpPr>
         <p:spPr>
           <a:xfrm>
-            <a:off x="7799832" y="4330598"/>
-            <a:ext cx="3145536" cy="256032"/>
+            <a:off x="7708392" y="4517136"/>
+            <a:ext cx="3282696" cy="228600"/>
           </a:xfrm>
           <a:prstGeom prst="rect">
             <a:avLst/>
@@ -15366,7 +15366,7 @@
               <a:buNone/>
             </a:pPr>
             <a:r>
-              <a:rPr lang="en-US" sz="1300" b="1" dirty="0">
+              <a:rPr lang="en-US" sz="1220" b="1" dirty="0">
                 <a:solidFill>
                   <a:srgbClr val="0068B7"/>
                 </a:solidFill>
@@ -15376,7 +15376,7 @@
               </a:rPr>
               <a:t>Next action</a:t>
             </a:r>
-            <a:endParaRPr lang="en-US" sz="1300" dirty="0"/>
+            <a:endParaRPr lang="en-US" sz="1220" dirty="0"/>
           </a:p>
         </p:txBody>
       </p:sp>
@@ -15388,8 +15388,8 @@
         </p:nvSpPr>
         <p:spPr>
           <a:xfrm>
-            <a:off x="7799832" y="4659782"/>
-            <a:ext cx="3145536" cy="899770"/>
+            <a:off x="7708392" y="4828032"/>
+            <a:ext cx="3282696" cy="749808"/>
           </a:xfrm>
           <a:prstGeom prst="rect">
             <a:avLst/>
@@ -15407,7 +15407,7 @@
               <a:buNone/>
             </a:pPr>
             <a:r>
-              <a:rPr lang="en-US" sz="1320" dirty="0">
+              <a:rPr lang="en-US" sz="1220" dirty="0">
                 <a:solidFill>
                   <a:srgbClr val="17364A"/>
                 </a:solidFill>
@@ -15415,9 +15415,9 @@
                 <a:ea typeface="Aptos" pitchFamily="34" charset="-122"/>
                 <a:cs typeface="Aptos" pitchFamily="34" charset="-120"/>
               </a:rPr>
-              <a:t>Use the assignment to test whether you can explain the concept, apply it to a realistic public health situation, and identify what would need review before the work moves forward.</a:t>
-            </a:r>
-            <a:endParaRPr lang="en-US" sz="1320" dirty="0"/>
+              <a:t>Use the assignment to test whether you can explain the concept, apply it to a.</a:t>
+            </a:r>
+            <a:endParaRPr lang="en-US" sz="1220" dirty="0"/>
           </a:p>
         </p:txBody>
       </p:sp>
@@ -15708,8 +15708,8 @@
         </p:nvSpPr>
         <p:spPr>
           <a:xfrm>
-            <a:off x="868680" y="1508760"/>
-            <a:ext cx="6309360" cy="4160520"/>
+            <a:off x="822960" y="1463040"/>
+            <a:ext cx="6565392" cy="4343400"/>
           </a:xfrm>
           <a:prstGeom prst="rect">
             <a:avLst/>
@@ -15727,7 +15727,7 @@
               <a:buNone/>
             </a:pPr>
             <a:r>
-              <a:rPr lang="en-US" sz="2100" dirty="0">
+              <a:rPr lang="en-US" sz="1920" dirty="0">
                 <a:solidFill>
                   <a:srgbClr val="003A63"/>
                 </a:solidFill>
@@ -15735,16 +15735,16 @@
                 <a:ea typeface="Aptos" pitchFamily="34" charset="-122"/>
                 <a:cs typeface="Aptos" pitchFamily="34" charset="-120"/>
               </a:rPr>
-              <a:t>• Identity, access, and permissions determine who or what can use data, systems, tools, and.</a:t>
-            </a:r>
-            <a:endParaRPr lang="en-US" sz="2100" dirty="0"/>
-          </a:p>
-          <a:p>
-            <a:pPr indent="0" marL="0">
-              <a:buNone/>
-            </a:pPr>
-            <a:r>
-              <a:rPr lang="en-US" sz="2100" dirty="0">
+              <a:t>• Identity, access, and permissions determine who or what can use data,.</a:t>
+            </a:r>
+            <a:endParaRPr lang="en-US" sz="1920" dirty="0"/>
+          </a:p>
+          <a:p>
+            <a:pPr indent="0" marL="0">
+              <a:buNone/>
+            </a:pPr>
+            <a:r>
+              <a:rPr lang="en-US" sz="1920" dirty="0">
                 <a:solidFill>
                   <a:srgbClr val="003A63"/>
                 </a:solidFill>
@@ -15752,16 +15752,16 @@
                 <a:ea typeface="Aptos" pitchFamily="34" charset="-122"/>
                 <a:cs typeface="Aptos" pitchFamily="34" charset="-120"/>
               </a:rPr>
-              <a:t>• Public health AI workflows may involve staff users, service accounts, APIs, vendors, plugins,.</a:t>
-            </a:r>
-            <a:endParaRPr lang="en-US" sz="2100" dirty="0"/>
-          </a:p>
-          <a:p>
-            <a:pPr indent="0" marL="0">
-              <a:buNone/>
-            </a:pPr>
-            <a:r>
-              <a:rPr lang="en-US" sz="2100" dirty="0">
+              <a:t>• Public health AI workflows may involve staff users, service accounts, APIs,.</a:t>
+            </a:r>
+            <a:endParaRPr lang="en-US" sz="1920" dirty="0"/>
+          </a:p>
+          <a:p>
+            <a:pPr indent="0" marL="0">
+              <a:buNone/>
+            </a:pPr>
+            <a:r>
+              <a:rPr lang="en-US" sz="1920" dirty="0">
                 <a:solidFill>
                   <a:srgbClr val="003A63"/>
                 </a:solidFill>
@@ -15769,9 +15769,9 @@
                 <a:ea typeface="Aptos" pitchFamily="34" charset="-122"/>
                 <a:cs typeface="Aptos" pitchFamily="34" charset="-120"/>
               </a:rPr>
-              <a:t>• Without clear access controls, an AI tool may retrieve sensitive data, expose information to.</a:t>
-            </a:r>
-            <a:endParaRPr lang="en-US" sz="2100" dirty="0"/>
+              <a:t>• Without clear access controls, an AI tool may retrieve sensitive data,.</a:t>
+            </a:r>
+            <a:endParaRPr lang="en-US" sz="1920" dirty="0"/>
           </a:p>
         </p:txBody>
       </p:sp>
@@ -15783,12 +15783,12 @@
         </p:nvSpPr>
         <p:spPr>
           <a:xfrm>
-            <a:off x="7635240" y="1325880"/>
-            <a:ext cx="3474720" cy="1255471"/>
+            <a:off x="7543800" y="1325880"/>
+            <a:ext cx="3611880" cy="1261872"/>
           </a:xfrm>
           <a:prstGeom prst="roundRect">
             <a:avLst>
-              <a:gd name="adj" fmla="val 8740"/>
+              <a:gd name="adj" fmla="val 8696"/>
             </a:avLst>
           </a:prstGeom>
           <a:solidFill>
@@ -15810,8 +15810,8 @@
         </p:nvSpPr>
         <p:spPr>
           <a:xfrm>
-            <a:off x="7799832" y="1472184"/>
-            <a:ext cx="3145536" cy="256032"/>
+            <a:off x="7708392" y="1453896"/>
+            <a:ext cx="3282696" cy="228600"/>
           </a:xfrm>
           <a:prstGeom prst="rect">
             <a:avLst/>
@@ -15827,7 +15827,7 @@
               <a:buNone/>
             </a:pPr>
             <a:r>
-              <a:rPr lang="en-US" sz="1300" b="1" dirty="0">
+              <a:rPr lang="en-US" sz="1220" b="1" dirty="0">
                 <a:solidFill>
                   <a:srgbClr val="0068B7"/>
                 </a:solidFill>
@@ -15837,7 +15837,7 @@
               </a:rPr>
               <a:t>Implementation cue</a:t>
             </a:r>
-            <a:endParaRPr lang="en-US" sz="1300" dirty="0"/>
+            <a:endParaRPr lang="en-US" sz="1220" dirty="0"/>
           </a:p>
         </p:txBody>
       </p:sp>
@@ -15849,8 +15849,8 @@
         </p:nvSpPr>
         <p:spPr>
           <a:xfrm>
-            <a:off x="7799832" y="1801368"/>
-            <a:ext cx="3145536" cy="688543"/>
+            <a:off x="7708392" y="1764792"/>
+            <a:ext cx="3282696" cy="749808"/>
           </a:xfrm>
           <a:prstGeom prst="rect">
             <a:avLst/>
@@ -15868,7 +15868,7 @@
               <a:buNone/>
             </a:pPr>
             <a:r>
-              <a:rPr lang="en-US" sz="1320" dirty="0">
+              <a:rPr lang="en-US" sz="1220" dirty="0">
                 <a:solidFill>
                   <a:srgbClr val="17364A"/>
                 </a:solidFill>
@@ -15876,9 +15876,9 @@
                 <a:ea typeface="Aptos" pitchFamily="34" charset="-122"/>
                 <a:cs typeface="Aptos" pitchFamily="34" charset="-120"/>
               </a:rPr>
-              <a:t>Identity, access, and permissions determine who or what can use data, systems, tools, and actions in an.</a:t>
-            </a:r>
-            <a:endParaRPr lang="en-US" sz="1320" dirty="0"/>
+              <a:t>Identity, access, and permissions determine who or what can use data, systems,.</a:t>
+            </a:r>
+            <a:endParaRPr lang="en-US" sz="1220" dirty="0"/>
           </a:p>
         </p:txBody>
       </p:sp>
@@ -15890,12 +15890,12 @@
         </p:nvSpPr>
         <p:spPr>
           <a:xfrm>
-            <a:off x="7635240" y="2718511"/>
-            <a:ext cx="3474720" cy="1328623"/>
+            <a:off x="7543800" y="2724912"/>
+            <a:ext cx="3611880" cy="1527048"/>
           </a:xfrm>
           <a:prstGeom prst="roundRect">
             <a:avLst>
-              <a:gd name="adj" fmla="val 8259"/>
+              <a:gd name="adj" fmla="val 7186"/>
             </a:avLst>
           </a:prstGeom>
           <a:solidFill>
@@ -15917,24 +15917,26 @@
         </p:nvSpPr>
         <p:spPr>
           <a:xfrm>
-            <a:off x="7799832" y="2846527"/>
-            <a:ext cx="3145536" cy="237744"/>
-          </a:xfrm>
-          <a:prstGeom prst="rect">
-            <a:avLst/>
-          </a:prstGeom>
-          <a:noFill/>
-          <a:ln/>
-        </p:spPr>
-        <p:txBody>
-          <a:bodyPr wrap="square" lIns="0" tIns="0" rIns="0" bIns="0" rtlCol="0" anchor="ctr"/>
-          <a:lstStyle/>
-          <a:p>
-            <a:pPr indent="0" marL="0">
-              <a:buNone/>
-            </a:pPr>
-            <a:r>
-              <a:rPr lang="en-US" sz="1250" b="1" dirty="0">
+            <a:off x="7708392" y="2852928"/>
+            <a:ext cx="3282696" cy="219456"/>
+          </a:xfrm>
+          <a:prstGeom prst="rect">
+            <a:avLst/>
+          </a:prstGeom>
+          <a:noFill/>
+          <a:ln/>
+        </p:spPr>
+        <p:txBody>
+          <a:bodyPr wrap="square" lIns="0" tIns="0" rIns="0" bIns="0" rtlCol="0" anchor="ctr">
+            <a:normAutofit/>
+          </a:bodyPr>
+          <a:lstStyle/>
+          <a:p>
+            <a:pPr indent="0" marL="0">
+              <a:buNone/>
+            </a:pPr>
+            <a:r>
+              <a:rPr lang="en-US" sz="1160" b="1" dirty="0">
                 <a:solidFill>
                   <a:srgbClr val="0068B7"/>
                 </a:solidFill>
@@ -15944,7 +15946,7 @@
               </a:rPr>
               <a:t>Implementation path</a:t>
             </a:r>
-            <a:endParaRPr lang="en-US" sz="1250" dirty="0"/>
+            <a:endParaRPr lang="en-US" sz="1160" dirty="0"/>
           </a:p>
         </p:txBody>
       </p:sp>
@@ -15956,7 +15958,7 @@
         </p:nvSpPr>
         <p:spPr>
           <a:xfrm>
-            <a:off x="8763000" y="3399739"/>
+            <a:off x="8717280" y="3406140"/>
             <a:ext cx="164592" cy="0"/>
           </a:xfrm>
           <a:prstGeom prst="line">
@@ -15979,8 +15981,8 @@
         </p:nvSpPr>
         <p:spPr>
           <a:xfrm>
-            <a:off x="7872984" y="3248863"/>
-            <a:ext cx="890016" cy="301752"/>
+            <a:off x="7781544" y="3255264"/>
+            <a:ext cx="935736" cy="301752"/>
           </a:xfrm>
           <a:prstGeom prst="roundRect">
             <a:avLst>
@@ -16006,8 +16008,8 @@
         </p:nvSpPr>
         <p:spPr>
           <a:xfrm>
-            <a:off x="7909560" y="3322015"/>
-            <a:ext cx="816864" cy="146304"/>
+            <a:off x="7818120" y="3328416"/>
+            <a:ext cx="862584" cy="146304"/>
           </a:xfrm>
           <a:prstGeom prst="rect">
             <a:avLst/>
@@ -16047,7 +16049,7 @@
         </p:nvSpPr>
         <p:spPr>
           <a:xfrm>
-            <a:off x="9817608" y="3399739"/>
+            <a:off x="9817608" y="3406140"/>
             <a:ext cx="164592" cy="0"/>
           </a:xfrm>
           <a:prstGeom prst="line">
@@ -16070,8 +16072,8 @@
         </p:nvSpPr>
         <p:spPr>
           <a:xfrm>
-            <a:off x="8927592" y="3248863"/>
-            <a:ext cx="890016" cy="301752"/>
+            <a:off x="8881872" y="3255264"/>
+            <a:ext cx="935736" cy="301752"/>
           </a:xfrm>
           <a:prstGeom prst="roundRect">
             <a:avLst>
@@ -16097,8 +16099,8 @@
         </p:nvSpPr>
         <p:spPr>
           <a:xfrm>
-            <a:off x="8964168" y="3322015"/>
-            <a:ext cx="816864" cy="146304"/>
+            <a:off x="8918448" y="3328416"/>
+            <a:ext cx="862584" cy="146304"/>
           </a:xfrm>
           <a:prstGeom prst="rect">
             <a:avLst/>
@@ -16138,8 +16140,8 @@
         </p:nvSpPr>
         <p:spPr>
           <a:xfrm>
-            <a:off x="9982200" y="3248863"/>
-            <a:ext cx="890016" cy="301752"/>
+            <a:off x="9982200" y="3255264"/>
+            <a:ext cx="935736" cy="301752"/>
           </a:xfrm>
           <a:prstGeom prst="roundRect">
             <a:avLst>
@@ -16165,8 +16167,8 @@
         </p:nvSpPr>
         <p:spPr>
           <a:xfrm>
-            <a:off x="10018776" y="3322015"/>
-            <a:ext cx="816864" cy="146304"/>
+            <a:off x="10018776" y="3328416"/>
+            <a:ext cx="862584" cy="146304"/>
           </a:xfrm>
           <a:prstGeom prst="rect">
             <a:avLst/>
@@ -16206,8 +16208,8 @@
         </p:nvSpPr>
         <p:spPr>
           <a:xfrm>
-            <a:off x="7854696" y="3742639"/>
-            <a:ext cx="3035808" cy="158191"/>
+            <a:off x="7763256" y="3749040"/>
+            <a:ext cx="3172968" cy="356616"/>
           </a:xfrm>
           <a:prstGeom prst="rect">
             <a:avLst/>
@@ -16225,7 +16227,7 @@
               <a:buNone/>
             </a:pPr>
             <a:r>
-              <a:rPr lang="en-US" sz="1120" dirty="0">
+              <a:rPr lang="en-US" sz="1040" dirty="0">
                 <a:solidFill>
                   <a:srgbClr val="17364A"/>
                 </a:solidFill>
@@ -16233,9 +16235,9 @@
                 <a:ea typeface="Aptos" pitchFamily="34" charset="-122"/>
                 <a:cs typeface="Aptos" pitchFamily="34" charset="-120"/>
               </a:rPr>
-              <a:t>Implementation work should make dependencies, approvals, training, and sustainment visible before launch.</a:t>
-            </a:r>
-            <a:endParaRPr lang="en-US" sz="1120" dirty="0"/>
+              <a:t>Implementation work should make dependencies, approvals, training, and.</a:t>
+            </a:r>
+            <a:endParaRPr lang="en-US" sz="1040" dirty="0"/>
           </a:p>
         </p:txBody>
       </p:sp>
@@ -16247,12 +16249,12 @@
         </p:nvSpPr>
         <p:spPr>
           <a:xfrm>
-            <a:off x="7635240" y="4184294"/>
-            <a:ext cx="3474720" cy="1466698"/>
+            <a:off x="7543800" y="4389120"/>
+            <a:ext cx="3611880" cy="1261872"/>
           </a:xfrm>
           <a:prstGeom prst="roundRect">
             <a:avLst>
-              <a:gd name="adj" fmla="val 7481"/>
+              <a:gd name="adj" fmla="val 8696"/>
             </a:avLst>
           </a:prstGeom>
           <a:solidFill>
@@ -16274,8 +16276,8 @@
         </p:nvSpPr>
         <p:spPr>
           <a:xfrm>
-            <a:off x="7799832" y="4330598"/>
-            <a:ext cx="3145536" cy="256032"/>
+            <a:off x="7708392" y="4517136"/>
+            <a:ext cx="3282696" cy="228600"/>
           </a:xfrm>
           <a:prstGeom prst="rect">
             <a:avLst/>
@@ -16291,7 +16293,7 @@
               <a:buNone/>
             </a:pPr>
             <a:r>
-              <a:rPr lang="en-US" sz="1300" b="1" dirty="0">
+              <a:rPr lang="en-US" sz="1220" b="1" dirty="0">
                 <a:solidFill>
                   <a:srgbClr val="0068B7"/>
                 </a:solidFill>
@@ -16301,7 +16303,7 @@
               </a:rPr>
               <a:t>Next action</a:t>
             </a:r>
-            <a:endParaRPr lang="en-US" sz="1300" dirty="0"/>
+            <a:endParaRPr lang="en-US" sz="1220" dirty="0"/>
           </a:p>
         </p:txBody>
       </p:sp>
@@ -16313,8 +16315,8 @@
         </p:nvSpPr>
         <p:spPr>
           <a:xfrm>
-            <a:off x="7799832" y="4659782"/>
-            <a:ext cx="3145536" cy="899770"/>
+            <a:off x="7708392" y="4828032"/>
+            <a:ext cx="3282696" cy="749808"/>
           </a:xfrm>
           <a:prstGeom prst="rect">
             <a:avLst/>
@@ -16332,7 +16334,7 @@
               <a:buNone/>
             </a:pPr>
             <a:r>
-              <a:rPr lang="en-US" sz="1320" dirty="0">
+              <a:rPr lang="en-US" sz="1220" dirty="0">
                 <a:solidFill>
                   <a:srgbClr val="17364A"/>
                 </a:solidFill>
@@ -16340,9 +16342,9 @@
                 <a:ea typeface="Aptos" pitchFamily="34" charset="-122"/>
                 <a:cs typeface="Aptos" pitchFamily="34" charset="-120"/>
               </a:rPr>
-              <a:t>Use the concept to clarify workflow changes, dependencies, staffing, procurement requirements, training needs, and implementation checkpoints.</a:t>
-            </a:r>
-            <a:endParaRPr lang="en-US" sz="1320" dirty="0"/>
+              <a:t>Use the concept to clarify workflow changes, dependencies, staffing, procurement.</a:t>
+            </a:r>
+            <a:endParaRPr lang="en-US" sz="1220" dirty="0"/>
           </a:p>
         </p:txBody>
       </p:sp>
@@ -16633,8 +16635,8 @@
         </p:nvSpPr>
         <p:spPr>
           <a:xfrm>
-            <a:off x="868680" y="1508760"/>
-            <a:ext cx="6309360" cy="4160520"/>
+            <a:off x="822960" y="1463040"/>
+            <a:ext cx="6565392" cy="4343400"/>
           </a:xfrm>
           <a:prstGeom prst="rect">
             <a:avLst/>
@@ -16652,7 +16654,7 @@
               <a:buNone/>
             </a:pPr>
             <a:r>
-              <a:rPr lang="en-US" sz="2100" dirty="0">
+              <a:rPr lang="en-US" sz="1920" dirty="0">
                 <a:solidFill>
                   <a:srgbClr val="003A63"/>
                 </a:solidFill>
@@ -16660,16 +16662,16 @@
                 <a:ea typeface="Aptos" pitchFamily="34" charset="-122"/>
                 <a:cs typeface="Aptos" pitchFamily="34" charset="-120"/>
               </a:rPr>
-              <a:t>• This module provides national-level training guidance for public health agencies and partners.</a:t>
-            </a:r>
-            <a:endParaRPr lang="en-US" sz="2100" dirty="0"/>
-          </a:p>
-          <a:p>
-            <a:pPr indent="0" marL="0">
-              <a:buNone/>
-            </a:pPr>
-            <a:r>
-              <a:rPr lang="en-US" sz="2100" dirty="0">
+              <a:t>• This module provides national-level training guidance for public health.</a:t>
+            </a:r>
+            <a:endParaRPr lang="en-US" sz="1920" dirty="0"/>
+          </a:p>
+          <a:p>
+            <a:pPr indent="0" marL="0">
+              <a:buNone/>
+            </a:pPr>
+            <a:r>
+              <a:rPr lang="en-US" sz="1920" dirty="0">
                 <a:solidFill>
                   <a:srgbClr val="003A63"/>
                 </a:solidFill>
@@ -16677,16 +16679,16 @@
                 <a:ea typeface="Aptos" pitchFamily="34" charset="-122"/>
                 <a:cs typeface="Aptos" pitchFamily="34" charset="-120"/>
               </a:rPr>
-              <a:t>• It is not legal advice and does not replace review by agency legal counsel, privacy officers,.</a:t>
-            </a:r>
-            <a:endParaRPr lang="en-US" sz="2100" dirty="0"/>
-          </a:p>
-          <a:p>
-            <a:pPr indent="0" marL="0">
-              <a:buNone/>
-            </a:pPr>
-            <a:r>
-              <a:rPr lang="en-US" sz="2100" dirty="0">
+              <a:t>• It is not legal advice and does not replace review by agency legal counsel,.</a:t>
+            </a:r>
+            <a:endParaRPr lang="en-US" sz="1920" dirty="0"/>
+          </a:p>
+          <a:p>
+            <a:pPr indent="0" marL="0">
+              <a:buNone/>
+            </a:pPr>
+            <a:r>
+              <a:rPr lang="en-US" sz="1920" dirty="0">
                 <a:solidFill>
                   <a:srgbClr val="003A63"/>
                 </a:solidFill>
@@ -16694,9 +16696,9 @@
                 <a:ea typeface="Aptos" pitchFamily="34" charset="-122"/>
                 <a:cs typeface="Aptos" pitchFamily="34" charset="-120"/>
               </a:rPr>
-              <a:t>• Requirements may vary by state, locality, territory, Tribe, agency, funding source,.</a:t>
-            </a:r>
-            <a:endParaRPr lang="en-US" sz="2100" dirty="0"/>
+              <a:t>• Requirements may vary by state, locality, territory, Tribe, agency, funding.</a:t>
+            </a:r>
+            <a:endParaRPr lang="en-US" sz="1920" dirty="0"/>
           </a:p>
         </p:txBody>
       </p:sp>
@@ -16708,12 +16710,12 @@
         </p:nvSpPr>
         <p:spPr>
           <a:xfrm>
-            <a:off x="7635240" y="1325880"/>
-            <a:ext cx="3474720" cy="1207008"/>
+            <a:off x="7543800" y="1325880"/>
+            <a:ext cx="3611880" cy="1261872"/>
           </a:xfrm>
           <a:prstGeom prst="roundRect">
             <a:avLst>
-              <a:gd name="adj" fmla="val 9091"/>
+              <a:gd name="adj" fmla="val 8696"/>
             </a:avLst>
           </a:prstGeom>
           <a:solidFill>
@@ -16735,8 +16737,8 @@
         </p:nvSpPr>
         <p:spPr>
           <a:xfrm>
-            <a:off x="7799832" y="1472184"/>
-            <a:ext cx="3145536" cy="256032"/>
+            <a:off x="7708392" y="1453896"/>
+            <a:ext cx="3282696" cy="228600"/>
           </a:xfrm>
           <a:prstGeom prst="rect">
             <a:avLst/>
@@ -16752,7 +16754,7 @@
               <a:buNone/>
             </a:pPr>
             <a:r>
-              <a:rPr lang="en-US" sz="1300" b="1" dirty="0">
+              <a:rPr lang="en-US" sz="1220" b="1" dirty="0">
                 <a:solidFill>
                   <a:srgbClr val="0068B7"/>
                 </a:solidFill>
@@ -16762,7 +16764,7 @@
               </a:rPr>
               <a:t>Governance lens</a:t>
             </a:r>
-            <a:endParaRPr lang="en-US" sz="1300" dirty="0"/>
+            <a:endParaRPr lang="en-US" sz="1220" dirty="0"/>
           </a:p>
         </p:txBody>
       </p:sp>
@@ -16774,8 +16776,8 @@
         </p:nvSpPr>
         <p:spPr>
           <a:xfrm>
-            <a:off x="7799832" y="1801368"/>
-            <a:ext cx="3145536" cy="640080"/>
+            <a:off x="7708392" y="1764792"/>
+            <a:ext cx="3282696" cy="749808"/>
           </a:xfrm>
           <a:prstGeom prst="rect">
             <a:avLst/>
@@ -16793,7 +16795,7 @@
               <a:buNone/>
             </a:pPr>
             <a:r>
-              <a:rPr lang="en-US" sz="1320" dirty="0">
+              <a:rPr lang="en-US" sz="1220" dirty="0">
                 <a:solidFill>
                   <a:srgbClr val="17364A"/>
                 </a:solidFill>
@@ -16801,9 +16803,9 @@
                 <a:ea typeface="Aptos" pitchFamily="34" charset="-122"/>
                 <a:cs typeface="Aptos" pitchFamily="34" charset="-120"/>
               </a:rPr>
-              <a:t>This module provides national-level training guidance for public health agencies and.</a:t>
-            </a:r>
-            <a:endParaRPr lang="en-US" sz="1320" dirty="0"/>
+              <a:t>This module provides national-level training guidance for public health agencies.</a:t>
+            </a:r>
+            <a:endParaRPr lang="en-US" sz="1220" dirty="0"/>
           </a:p>
         </p:txBody>
       </p:sp>
@@ -16815,12 +16817,12 @@
         </p:nvSpPr>
         <p:spPr>
           <a:xfrm>
-            <a:off x="7635240" y="2670048"/>
-            <a:ext cx="3474720" cy="1377086"/>
+            <a:off x="7543800" y="2724912"/>
+            <a:ext cx="3611880" cy="1527048"/>
           </a:xfrm>
           <a:prstGeom prst="roundRect">
             <a:avLst>
-              <a:gd name="adj" fmla="val 7968"/>
+              <a:gd name="adj" fmla="val 7186"/>
             </a:avLst>
           </a:prstGeom>
           <a:solidFill>
@@ -16842,24 +16844,26 @@
         </p:nvSpPr>
         <p:spPr>
           <a:xfrm>
-            <a:off x="7799832" y="2798064"/>
-            <a:ext cx="3145536" cy="237744"/>
-          </a:xfrm>
-          <a:prstGeom prst="rect">
-            <a:avLst/>
-          </a:prstGeom>
-          <a:noFill/>
-          <a:ln/>
-        </p:spPr>
-        <p:txBody>
-          <a:bodyPr wrap="square" lIns="0" tIns="0" rIns="0" bIns="0" rtlCol="0" anchor="ctr"/>
-          <a:lstStyle/>
-          <a:p>
-            <a:pPr indent="0" marL="0">
-              <a:buNone/>
-            </a:pPr>
-            <a:r>
-              <a:rPr lang="en-US" sz="1250" b="1" dirty="0">
+            <a:off x="7708392" y="2852928"/>
+            <a:ext cx="3282696" cy="219456"/>
+          </a:xfrm>
+          <a:prstGeom prst="rect">
+            <a:avLst/>
+          </a:prstGeom>
+          <a:noFill/>
+          <a:ln/>
+        </p:spPr>
+        <p:txBody>
+          <a:bodyPr wrap="square" lIns="0" tIns="0" rIns="0" bIns="0" rtlCol="0" anchor="ctr">
+            <a:normAutofit/>
+          </a:bodyPr>
+          <a:lstStyle/>
+          <a:p>
+            <a:pPr indent="0" marL="0">
+              <a:buNone/>
+            </a:pPr>
+            <a:r>
+              <a:rPr lang="en-US" sz="1160" b="1" dirty="0">
                 <a:solidFill>
                   <a:srgbClr val="0068B7"/>
                 </a:solidFill>
@@ -16869,7 +16873,7 @@
               </a:rPr>
               <a:t>Governance pathway</a:t>
             </a:r>
-            <a:endParaRPr lang="en-US" sz="1250" dirty="0"/>
+            <a:endParaRPr lang="en-US" sz="1160" dirty="0"/>
           </a:p>
         </p:txBody>
       </p:sp>
@@ -16881,7 +16885,7 @@
         </p:nvSpPr>
         <p:spPr>
           <a:xfrm>
-            <a:off x="8763000" y="3351276"/>
+            <a:off x="8717280" y="3406140"/>
             <a:ext cx="164592" cy="0"/>
           </a:xfrm>
           <a:prstGeom prst="line">
@@ -16904,8 +16908,8 @@
         </p:nvSpPr>
         <p:spPr>
           <a:xfrm>
-            <a:off x="7872984" y="3200400"/>
-            <a:ext cx="890016" cy="301752"/>
+            <a:off x="7781544" y="3255264"/>
+            <a:ext cx="935736" cy="301752"/>
           </a:xfrm>
           <a:prstGeom prst="roundRect">
             <a:avLst>
@@ -16931,8 +16935,8 @@
         </p:nvSpPr>
         <p:spPr>
           <a:xfrm>
-            <a:off x="7909560" y="3273552"/>
-            <a:ext cx="816864" cy="146304"/>
+            <a:off x="7818120" y="3328416"/>
+            <a:ext cx="862584" cy="146304"/>
           </a:xfrm>
           <a:prstGeom prst="rect">
             <a:avLst/>
@@ -16972,7 +16976,7 @@
         </p:nvSpPr>
         <p:spPr>
           <a:xfrm>
-            <a:off x="9817608" y="3351276"/>
+            <a:off x="9817608" y="3406140"/>
             <a:ext cx="164592" cy="0"/>
           </a:xfrm>
           <a:prstGeom prst="line">
@@ -16995,8 +16999,8 @@
         </p:nvSpPr>
         <p:spPr>
           <a:xfrm>
-            <a:off x="8927592" y="3200400"/>
-            <a:ext cx="890016" cy="301752"/>
+            <a:off x="8881872" y="3255264"/>
+            <a:ext cx="935736" cy="301752"/>
           </a:xfrm>
           <a:prstGeom prst="roundRect">
             <a:avLst>
@@ -17022,8 +17026,8 @@
         </p:nvSpPr>
         <p:spPr>
           <a:xfrm>
-            <a:off x="8964168" y="3273552"/>
-            <a:ext cx="816864" cy="146304"/>
+            <a:off x="8918448" y="3328416"/>
+            <a:ext cx="862584" cy="146304"/>
           </a:xfrm>
           <a:prstGeom prst="rect">
             <a:avLst/>
@@ -17063,8 +17067,8 @@
         </p:nvSpPr>
         <p:spPr>
           <a:xfrm>
-            <a:off x="9982200" y="3200400"/>
-            <a:ext cx="890016" cy="301752"/>
+            <a:off x="9982200" y="3255264"/>
+            <a:ext cx="935736" cy="301752"/>
           </a:xfrm>
           <a:prstGeom prst="roundRect">
             <a:avLst>
@@ -17090,8 +17094,8 @@
         </p:nvSpPr>
         <p:spPr>
           <a:xfrm>
-            <a:off x="10018776" y="3273552"/>
-            <a:ext cx="816864" cy="146304"/>
+            <a:off x="10018776" y="3328416"/>
+            <a:ext cx="862584" cy="146304"/>
           </a:xfrm>
           <a:prstGeom prst="rect">
             <a:avLst/>
@@ -17131,8 +17135,8 @@
         </p:nvSpPr>
         <p:spPr>
           <a:xfrm>
-            <a:off x="7854696" y="3694176"/>
-            <a:ext cx="3035808" cy="206654"/>
+            <a:off x="7763256" y="3749040"/>
+            <a:ext cx="3172968" cy="356616"/>
           </a:xfrm>
           <a:prstGeom prst="rect">
             <a:avLst/>
@@ -17150,7 +17154,7 @@
               <a:buNone/>
             </a:pPr>
             <a:r>
-              <a:rPr lang="en-US" sz="1120" dirty="0">
+              <a:rPr lang="en-US" sz="1040" dirty="0">
                 <a:solidFill>
                   <a:srgbClr val="17364A"/>
                 </a:solidFill>
@@ -17158,9 +17162,9 @@
                 <a:ea typeface="Aptos" pitchFamily="34" charset="-122"/>
                 <a:cs typeface="Aptos" pitchFamily="34" charset="-120"/>
               </a:rPr>
-              <a:t>A proposed AI use should move through documented review before it becomes an operational workflow.</a:t>
-            </a:r>
-            <a:endParaRPr lang="en-US" sz="1120" dirty="0"/>
+              <a:t>A proposed AI use should move through documented review before it.</a:t>
+            </a:r>
+            <a:endParaRPr lang="en-US" sz="1040" dirty="0"/>
           </a:p>
         </p:txBody>
       </p:sp>
@@ -17172,12 +17176,12 @@
         </p:nvSpPr>
         <p:spPr>
           <a:xfrm>
-            <a:off x="7635240" y="4184294"/>
-            <a:ext cx="3474720" cy="1466698"/>
+            <a:off x="7543800" y="4389120"/>
+            <a:ext cx="3611880" cy="1261872"/>
           </a:xfrm>
           <a:prstGeom prst="roundRect">
             <a:avLst>
-              <a:gd name="adj" fmla="val 7481"/>
+              <a:gd name="adj" fmla="val 8696"/>
             </a:avLst>
           </a:prstGeom>
           <a:solidFill>
@@ -17199,8 +17203,8 @@
         </p:nvSpPr>
         <p:spPr>
           <a:xfrm>
-            <a:off x="7799832" y="4330598"/>
-            <a:ext cx="3145536" cy="256032"/>
+            <a:off x="7708392" y="4517136"/>
+            <a:ext cx="3282696" cy="228600"/>
           </a:xfrm>
           <a:prstGeom prst="rect">
             <a:avLst/>
@@ -17216,7 +17220,7 @@
               <a:buNone/>
             </a:pPr>
             <a:r>
-              <a:rPr lang="en-US" sz="1300" b="1" dirty="0">
+              <a:rPr lang="en-US" sz="1220" b="1" dirty="0">
                 <a:solidFill>
                   <a:srgbClr val="0068B7"/>
                 </a:solidFill>
@@ -17226,7 +17230,7 @@
               </a:rPr>
               <a:t>What to document</a:t>
             </a:r>
-            <a:endParaRPr lang="en-US" sz="1300" dirty="0"/>
+            <a:endParaRPr lang="en-US" sz="1220" dirty="0"/>
           </a:p>
         </p:txBody>
       </p:sp>
@@ -17238,8 +17242,8 @@
         </p:nvSpPr>
         <p:spPr>
           <a:xfrm>
-            <a:off x="7799832" y="4659782"/>
-            <a:ext cx="3145536" cy="899770"/>
+            <a:off x="7708392" y="4828032"/>
+            <a:ext cx="3282696" cy="749808"/>
           </a:xfrm>
           <a:prstGeom prst="rect">
             <a:avLst/>
@@ -17257,7 +17261,7 @@
               <a:buNone/>
             </a:pPr>
             <a:r>
-              <a:rPr lang="en-US" sz="1320" dirty="0">
+              <a:rPr lang="en-US" sz="1220" dirty="0">
                 <a:solidFill>
                   <a:srgbClr val="17364A"/>
                 </a:solidFill>
@@ -17265,9 +17269,9 @@
                 <a:ea typeface="Aptos" pitchFamily="34" charset="-122"/>
                 <a:cs typeface="Aptos" pitchFamily="34" charset="-120"/>
               </a:rPr>
-              <a:t>Translate this concept into clear decision rights, review steps, documentation expectations, and escalation paths before an AI-supported workflow is approved.</a:t>
-            </a:r>
-            <a:endParaRPr lang="en-US" sz="1320" dirty="0"/>
+              <a:t>Translate this concept into clear decision rights, review steps, documentation.</a:t>
+            </a:r>
+            <a:endParaRPr lang="en-US" sz="1220" dirty="0"/>
           </a:p>
         </p:txBody>
       </p:sp>
@@ -17558,8 +17562,8 @@
         </p:nvSpPr>
         <p:spPr>
           <a:xfrm>
-            <a:off x="868680" y="1508760"/>
-            <a:ext cx="6309360" cy="4160520"/>
+            <a:off x="822960" y="1463040"/>
+            <a:ext cx="6565392" cy="4343400"/>
           </a:xfrm>
           <a:prstGeom prst="rect">
             <a:avLst/>
@@ -17577,7 +17581,7 @@
               <a:buNone/>
             </a:pPr>
             <a:r>
-              <a:rPr lang="en-US" sz="2100" dirty="0">
+              <a:rPr lang="en-US" sz="1920" dirty="0">
                 <a:solidFill>
                   <a:srgbClr val="003A63"/>
                 </a:solidFill>
@@ -17585,16 +17589,16 @@
                 <a:ea typeface="Aptos" pitchFamily="34" charset="-122"/>
                 <a:cs typeface="Aptos" pitchFamily="34" charset="-120"/>
               </a:rPr>
-              <a:t>• An AI assistant is approved to summarize case records for authorized disease investigators.</a:t>
-            </a:r>
-            <a:endParaRPr lang="en-US" sz="2100" dirty="0"/>
-          </a:p>
-          <a:p>
-            <a:pPr indent="0" marL="0">
-              <a:buNone/>
-            </a:pPr>
-            <a:r>
-              <a:rPr lang="en-US" sz="2100" dirty="0">
+              <a:t>• An AI assistant is approved to summarize case records for authorized disease.</a:t>
+            </a:r>
+            <a:endParaRPr lang="en-US" sz="1920" dirty="0"/>
+          </a:p>
+          <a:p>
+            <a:pPr indent="0" marL="0">
+              <a:buNone/>
+            </a:pPr>
+            <a:r>
+              <a:rPr lang="en-US" sz="1920" dirty="0">
                 <a:solidFill>
                   <a:srgbClr val="003A63"/>
                 </a:solidFill>
@@ -17602,16 +17606,16 @@
                 <a:ea typeface="Aptos" pitchFamily="34" charset="-122"/>
                 <a:cs typeface="Aptos" pitchFamily="34" charset="-120"/>
               </a:rPr>
-              <a:t>• The access review determines that the assistant may retrieve only records assigned to the.</a:t>
-            </a:r>
-            <a:endParaRPr lang="en-US" sz="2100" dirty="0"/>
-          </a:p>
-          <a:p>
-            <a:pPr indent="0" marL="0">
-              <a:buNone/>
-            </a:pPr>
-            <a:r>
-              <a:rPr lang="en-US" sz="2100" dirty="0">
+              <a:t>• The access review determines that the assistant may retrieve only records.</a:t>
+            </a:r>
+            <a:endParaRPr lang="en-US" sz="1920" dirty="0"/>
+          </a:p>
+          <a:p>
+            <a:pPr indent="0" marL="0">
+              <a:buNone/>
+            </a:pPr>
+            <a:r>
+              <a:rPr lang="en-US" sz="1920" dirty="0">
                 <a:solidFill>
                   <a:srgbClr val="003A63"/>
                 </a:solidFill>
@@ -17619,9 +17623,9 @@
                 <a:ea typeface="Aptos" pitchFamily="34" charset="-122"/>
                 <a:cs typeface="Aptos" pitchFamily="34" charset="-120"/>
               </a:rPr>
-              <a:t>• Logs must show which user requested the summary, which record was accessed, and whether the.</a:t>
-            </a:r>
-            <a:endParaRPr lang="en-US" sz="2100" dirty="0"/>
+              <a:t>• Logs must show which user requested the summary, which record was accessed,.</a:t>
+            </a:r>
+            <a:endParaRPr lang="en-US" sz="1920" dirty="0"/>
           </a:p>
         </p:txBody>
       </p:sp>
@@ -17633,12 +17637,12 @@
         </p:nvSpPr>
         <p:spPr>
           <a:xfrm>
-            <a:off x="7635240" y="1325880"/>
-            <a:ext cx="3474720" cy="1207008"/>
+            <a:off x="7543800" y="1325880"/>
+            <a:ext cx="3611880" cy="1261872"/>
           </a:xfrm>
           <a:prstGeom prst="roundRect">
             <a:avLst>
-              <a:gd name="adj" fmla="val 9091"/>
+              <a:gd name="adj" fmla="val 8696"/>
             </a:avLst>
           </a:prstGeom>
           <a:solidFill>
@@ -17660,8 +17664,8 @@
         </p:nvSpPr>
         <p:spPr>
           <a:xfrm>
-            <a:off x="7799832" y="1472184"/>
-            <a:ext cx="3145536" cy="256032"/>
+            <a:off x="7708392" y="1453896"/>
+            <a:ext cx="3282696" cy="228600"/>
           </a:xfrm>
           <a:prstGeom prst="rect">
             <a:avLst/>
@@ -17677,7 +17681,7 @@
               <a:buNone/>
             </a:pPr>
             <a:r>
-              <a:rPr lang="en-US" sz="1300" b="1" dirty="0">
+              <a:rPr lang="en-US" sz="1220" b="1" dirty="0">
                 <a:solidFill>
                   <a:srgbClr val="0068B7"/>
                 </a:solidFill>
@@ -17687,7 +17691,7 @@
               </a:rPr>
               <a:t>Implementation cue</a:t>
             </a:r>
-            <a:endParaRPr lang="en-US" sz="1300" dirty="0"/>
+            <a:endParaRPr lang="en-US" sz="1220" dirty="0"/>
           </a:p>
         </p:txBody>
       </p:sp>
@@ -17699,8 +17703,8 @@
         </p:nvSpPr>
         <p:spPr>
           <a:xfrm>
-            <a:off x="7799832" y="1801368"/>
-            <a:ext cx="3145536" cy="640080"/>
+            <a:off x="7708392" y="1764792"/>
+            <a:ext cx="3282696" cy="749808"/>
           </a:xfrm>
           <a:prstGeom prst="rect">
             <a:avLst/>
@@ -17718,7 +17722,7 @@
               <a:buNone/>
             </a:pPr>
             <a:r>
-              <a:rPr lang="en-US" sz="1320" dirty="0">
+              <a:rPr lang="en-US" sz="1220" dirty="0">
                 <a:solidFill>
                   <a:srgbClr val="17364A"/>
                 </a:solidFill>
@@ -17728,7 +17732,7 @@
               </a:rPr>
               <a:t>An AI assistant is approved to summarize case records for authorized disease.</a:t>
             </a:r>
-            <a:endParaRPr lang="en-US" sz="1320" dirty="0"/>
+            <a:endParaRPr lang="en-US" sz="1220" dirty="0"/>
           </a:p>
         </p:txBody>
       </p:sp>
@@ -17740,12 +17744,12 @@
         </p:nvSpPr>
         <p:spPr>
           <a:xfrm>
-            <a:off x="7635240" y="2670048"/>
-            <a:ext cx="3474720" cy="1377086"/>
+            <a:off x="7543800" y="2724912"/>
+            <a:ext cx="3611880" cy="1527048"/>
           </a:xfrm>
           <a:prstGeom prst="roundRect">
             <a:avLst>
-              <a:gd name="adj" fmla="val 7968"/>
+              <a:gd name="adj" fmla="val 7186"/>
             </a:avLst>
           </a:prstGeom>
           <a:solidFill>
@@ -17767,8 +17771,8 @@
         </p:nvSpPr>
         <p:spPr>
           <a:xfrm>
-            <a:off x="7799832" y="2816352"/>
-            <a:ext cx="3145536" cy="256032"/>
+            <a:off x="7708392" y="2852928"/>
+            <a:ext cx="3282696" cy="228600"/>
           </a:xfrm>
           <a:prstGeom prst="rect">
             <a:avLst/>
@@ -17784,7 +17788,7 @@
               <a:buNone/>
             </a:pPr>
             <a:r>
-              <a:rPr lang="en-US" sz="1300" b="1" dirty="0">
+              <a:rPr lang="en-US" sz="1220" b="1" dirty="0">
                 <a:solidFill>
                   <a:srgbClr val="0068B7"/>
                 </a:solidFill>
@@ -17794,7 +17798,7 @@
               </a:rPr>
               <a:t>Concept checkpoints</a:t>
             </a:r>
-            <a:endParaRPr lang="en-US" sz="1300" dirty="0"/>
+            <a:endParaRPr lang="en-US" sz="1220" dirty="0"/>
           </a:p>
         </p:txBody>
       </p:sp>
@@ -17806,8 +17810,8 @@
         </p:nvSpPr>
         <p:spPr>
           <a:xfrm>
-            <a:off x="7818120" y="3182112"/>
-            <a:ext cx="3090672" cy="718718"/>
+            <a:off x="7726680" y="3182112"/>
+            <a:ext cx="3227832" cy="960120"/>
           </a:xfrm>
           <a:prstGeom prst="rect">
             <a:avLst/>
@@ -17825,7 +17829,7 @@
               <a:buNone/>
             </a:pPr>
             <a:r>
-              <a:rPr lang="en-US" sz="1220" dirty="0">
+              <a:rPr lang="en-US" sz="1140" dirty="0">
                 <a:solidFill>
                   <a:srgbClr val="17364A"/>
                 </a:solidFill>
@@ -17833,16 +17837,16 @@
                 <a:ea typeface="Aptos" pitchFamily="34" charset="-122"/>
                 <a:cs typeface="Aptos" pitchFamily="34" charset="-120"/>
               </a:rPr>
-              <a:t>The access review determines that the assistant may retrieve only.</a:t>
-            </a:r>
-            <a:endParaRPr lang="en-US" sz="1220" dirty="0"/>
-          </a:p>
-          <a:p>
-            <a:pPr indent="0" marL="0">
-              <a:buNone/>
-            </a:pPr>
-            <a:r>
-              <a:rPr lang="en-US" sz="1220" dirty="0">
+              <a:t>The access review determines that the assistant.</a:t>
+            </a:r>
+            <a:endParaRPr lang="en-US" sz="1140" dirty="0"/>
+          </a:p>
+          <a:p>
+            <a:pPr indent="0" marL="0">
+              <a:buNone/>
+            </a:pPr>
+            <a:r>
+              <a:rPr lang="en-US" sz="1140" dirty="0">
                 <a:solidFill>
                   <a:srgbClr val="17364A"/>
                 </a:solidFill>
@@ -17850,9 +17854,9 @@
                 <a:ea typeface="Aptos" pitchFamily="34" charset="-122"/>
                 <a:cs typeface="Aptos" pitchFamily="34" charset="-120"/>
               </a:rPr>
-              <a:t>Logs must show which user requested the summary, which record was.</a:t>
-            </a:r>
-            <a:endParaRPr lang="en-US" sz="1220" dirty="0"/>
+              <a:t>Logs must show which user requested the summary,.</a:t>
+            </a:r>
+            <a:endParaRPr lang="en-US" sz="1140" dirty="0"/>
           </a:p>
         </p:txBody>
       </p:sp>
@@ -17864,12 +17868,12 @@
         </p:nvSpPr>
         <p:spPr>
           <a:xfrm>
-            <a:off x="7635240" y="4184294"/>
-            <a:ext cx="3474720" cy="1466698"/>
+            <a:off x="7543800" y="4389120"/>
+            <a:ext cx="3611880" cy="1261872"/>
           </a:xfrm>
           <a:prstGeom prst="roundRect">
             <a:avLst>
-              <a:gd name="adj" fmla="val 7481"/>
+              <a:gd name="adj" fmla="val 8696"/>
             </a:avLst>
           </a:prstGeom>
           <a:solidFill>
@@ -17891,8 +17895,8 @@
         </p:nvSpPr>
         <p:spPr>
           <a:xfrm>
-            <a:off x="7799832" y="4330598"/>
-            <a:ext cx="3145536" cy="256032"/>
+            <a:off x="7708392" y="4517136"/>
+            <a:ext cx="3282696" cy="228600"/>
           </a:xfrm>
           <a:prstGeom prst="rect">
             <a:avLst/>
@@ -17908,7 +17912,7 @@
               <a:buNone/>
             </a:pPr>
             <a:r>
-              <a:rPr lang="en-US" sz="1300" b="1" dirty="0">
+              <a:rPr lang="en-US" sz="1220" b="1" dirty="0">
                 <a:solidFill>
                   <a:srgbClr val="0068B7"/>
                 </a:solidFill>
@@ -17918,7 +17922,7 @@
               </a:rPr>
               <a:t>Next action</a:t>
             </a:r>
-            <a:endParaRPr lang="en-US" sz="1300" dirty="0"/>
+            <a:endParaRPr lang="en-US" sz="1220" dirty="0"/>
           </a:p>
         </p:txBody>
       </p:sp>
@@ -17930,8 +17934,8 @@
         </p:nvSpPr>
         <p:spPr>
           <a:xfrm>
-            <a:off x="7799832" y="4659782"/>
-            <a:ext cx="3145536" cy="899770"/>
+            <a:off x="7708392" y="4828032"/>
+            <a:ext cx="3282696" cy="749808"/>
           </a:xfrm>
           <a:prstGeom prst="rect">
             <a:avLst/>
@@ -17949,7 +17953,7 @@
               <a:buNone/>
             </a:pPr>
             <a:r>
-              <a:rPr lang="en-US" sz="1320" dirty="0">
+              <a:rPr lang="en-US" sz="1220" dirty="0">
                 <a:solidFill>
                   <a:srgbClr val="17364A"/>
                 </a:solidFill>
@@ -17957,9 +17961,9 @@
                 <a:ea typeface="Aptos" pitchFamily="34" charset="-122"/>
                 <a:cs typeface="Aptos" pitchFamily="34" charset="-120"/>
               </a:rPr>
-              <a:t>Use the concept to clarify workflow changes, dependencies, staffing, procurement requirements, training needs, and implementation checkpoints.</a:t>
-            </a:r>
-            <a:endParaRPr lang="en-US" sz="1320" dirty="0"/>
+              <a:t>Use the concept to clarify workflow changes, dependencies, staffing, procurement.</a:t>
+            </a:r>
+            <a:endParaRPr lang="en-US" sz="1220" dirty="0"/>
           </a:p>
         </p:txBody>
       </p:sp>
@@ -18250,8 +18254,8 @@
         </p:nvSpPr>
         <p:spPr>
           <a:xfrm>
-            <a:off x="868680" y="1508760"/>
-            <a:ext cx="6309360" cy="4160520"/>
+            <a:off x="822960" y="1463040"/>
+            <a:ext cx="6565392" cy="4343400"/>
           </a:xfrm>
           <a:prstGeom prst="rect">
             <a:avLst/>
@@ -18269,7 +18273,7 @@
               <a:buNone/>
             </a:pPr>
             <a:r>
-              <a:rPr lang="en-US" sz="2100" dirty="0">
+              <a:rPr lang="en-US" sz="1920" dirty="0">
                 <a:solidFill>
                   <a:srgbClr val="003A63"/>
                 </a:solidFill>
@@ -18279,14 +18283,14 @@
               </a:rPr>
               <a:t>• AI workflows may involve multiple identities.</a:t>
             </a:r>
-            <a:endParaRPr lang="en-US" sz="2100" dirty="0"/>
-          </a:p>
-          <a:p>
-            <a:pPr indent="0" marL="0">
-              <a:buNone/>
-            </a:pPr>
-            <a:r>
-              <a:rPr lang="en-US" sz="2100" dirty="0">
+            <a:endParaRPr lang="en-US" sz="1920" dirty="0"/>
+          </a:p>
+          <a:p>
+            <a:pPr indent="0" marL="0">
+              <a:buNone/>
+            </a:pPr>
+            <a:r>
+              <a:rPr lang="en-US" sz="1920" dirty="0">
                 <a:solidFill>
                   <a:srgbClr val="003A63"/>
                 </a:solidFill>
@@ -18294,16 +18298,16 @@
                 <a:ea typeface="Aptos" pitchFamily="34" charset="-122"/>
                 <a:cs typeface="Aptos" pitchFamily="34" charset="-120"/>
               </a:rPr>
-              <a:t>• A staff member may log in through single sign-on, an AI service may use a service account to.</a:t>
-            </a:r>
-            <a:endParaRPr lang="en-US" sz="2100" dirty="0"/>
-          </a:p>
-          <a:p>
-            <a:pPr indent="0" marL="0">
-              <a:buNone/>
-            </a:pPr>
-            <a:r>
-              <a:rPr lang="en-US" sz="2100" dirty="0">
+              <a:t>• A staff member may log in through single sign-on, an AI service may use a.</a:t>
+            </a:r>
+            <a:endParaRPr lang="en-US" sz="1920" dirty="0"/>
+          </a:p>
+          <a:p>
+            <a:pPr indent="0" marL="0">
+              <a:buNone/>
+            </a:pPr>
+            <a:r>
+              <a:rPr lang="en-US" sz="1920" dirty="0">
                 <a:solidFill>
                   <a:srgbClr val="003A63"/>
                 </a:solidFill>
@@ -18313,7 +18317,7 @@
               </a:rPr>
               <a:t>• Each identity should be documented and tied to specific permissions.</a:t>
             </a:r>
-            <a:endParaRPr lang="en-US" sz="2100" dirty="0"/>
+            <a:endParaRPr lang="en-US" sz="1920" dirty="0"/>
           </a:p>
         </p:txBody>
       </p:sp>
@@ -18325,12 +18329,12 @@
         </p:nvSpPr>
         <p:spPr>
           <a:xfrm>
-            <a:off x="7635240" y="1325880"/>
-            <a:ext cx="3474720" cy="1207008"/>
+            <a:off x="7543800" y="1325880"/>
+            <a:ext cx="3611880" cy="1261872"/>
           </a:xfrm>
           <a:prstGeom prst="roundRect">
             <a:avLst>
-              <a:gd name="adj" fmla="val 9091"/>
+              <a:gd name="adj" fmla="val 8696"/>
             </a:avLst>
           </a:prstGeom>
           <a:solidFill>
@@ -18352,8 +18356,8 @@
         </p:nvSpPr>
         <p:spPr>
           <a:xfrm>
-            <a:off x="7799832" y="1472184"/>
-            <a:ext cx="3145536" cy="256032"/>
+            <a:off x="7708392" y="1453896"/>
+            <a:ext cx="3282696" cy="228600"/>
           </a:xfrm>
           <a:prstGeom prst="rect">
             <a:avLst/>
@@ -18369,7 +18373,7 @@
               <a:buNone/>
             </a:pPr>
             <a:r>
-              <a:rPr lang="en-US" sz="1300" b="1" dirty="0">
+              <a:rPr lang="en-US" sz="1220" b="1" dirty="0">
                 <a:solidFill>
                   <a:srgbClr val="0068B7"/>
                 </a:solidFill>
@@ -18379,7 +18383,7 @@
               </a:rPr>
               <a:t>Implementation cue</a:t>
             </a:r>
-            <a:endParaRPr lang="en-US" sz="1300" dirty="0"/>
+            <a:endParaRPr lang="en-US" sz="1220" dirty="0"/>
           </a:p>
         </p:txBody>
       </p:sp>
@@ -18391,8 +18395,8 @@
         </p:nvSpPr>
         <p:spPr>
           <a:xfrm>
-            <a:off x="7799832" y="1801368"/>
-            <a:ext cx="3145536" cy="640080"/>
+            <a:off x="7708392" y="1764792"/>
+            <a:ext cx="3282696" cy="749808"/>
           </a:xfrm>
           <a:prstGeom prst="rect">
             <a:avLst/>
@@ -18410,7 +18414,7 @@
               <a:buNone/>
             </a:pPr>
             <a:r>
-              <a:rPr lang="en-US" sz="1320" dirty="0">
+              <a:rPr lang="en-US" sz="1220" dirty="0">
                 <a:solidFill>
                   <a:srgbClr val="17364A"/>
                 </a:solidFill>
@@ -18420,7 +18424,7 @@
               </a:rPr>
               <a:t>AI workflows may involve multiple identities.</a:t>
             </a:r>
-            <a:endParaRPr lang="en-US" sz="1320" dirty="0"/>
+            <a:endParaRPr lang="en-US" sz="1220" dirty="0"/>
           </a:p>
         </p:txBody>
       </p:sp>
@@ -18432,12 +18436,12 @@
         </p:nvSpPr>
         <p:spPr>
           <a:xfrm>
-            <a:off x="7635240" y="2670048"/>
-            <a:ext cx="3474720" cy="1377086"/>
+            <a:off x="7543800" y="2724912"/>
+            <a:ext cx="3611880" cy="1527048"/>
           </a:xfrm>
           <a:prstGeom prst="roundRect">
             <a:avLst>
-              <a:gd name="adj" fmla="val 7968"/>
+              <a:gd name="adj" fmla="val 7186"/>
             </a:avLst>
           </a:prstGeom>
           <a:solidFill>
@@ -18459,24 +18463,26 @@
         </p:nvSpPr>
         <p:spPr>
           <a:xfrm>
-            <a:off x="7799832" y="2798064"/>
-            <a:ext cx="3145536" cy="237744"/>
-          </a:xfrm>
-          <a:prstGeom prst="rect">
-            <a:avLst/>
-          </a:prstGeom>
-          <a:noFill/>
-          <a:ln/>
-        </p:spPr>
-        <p:txBody>
-          <a:bodyPr wrap="square" lIns="0" tIns="0" rIns="0" bIns="0" rtlCol="0" anchor="ctr"/>
-          <a:lstStyle/>
-          <a:p>
-            <a:pPr indent="0" marL="0">
-              <a:buNone/>
-            </a:pPr>
-            <a:r>
-              <a:rPr lang="en-US" sz="1250" b="1" dirty="0">
+            <a:off x="7708392" y="2852928"/>
+            <a:ext cx="3282696" cy="219456"/>
+          </a:xfrm>
+          <a:prstGeom prst="rect">
+            <a:avLst/>
+          </a:prstGeom>
+          <a:noFill/>
+          <a:ln/>
+        </p:spPr>
+        <p:txBody>
+          <a:bodyPr wrap="square" lIns="0" tIns="0" rIns="0" bIns="0" rtlCol="0" anchor="ctr">
+            <a:normAutofit/>
+          </a:bodyPr>
+          <a:lstStyle/>
+          <a:p>
+            <a:pPr indent="0" marL="0">
+              <a:buNone/>
+            </a:pPr>
+            <a:r>
+              <a:rPr lang="en-US" sz="1160" b="1" dirty="0">
                 <a:solidFill>
                   <a:srgbClr val="0068B7"/>
                 </a:solidFill>
@@ -18486,7 +18492,7 @@
               </a:rPr>
               <a:t>Implementation path</a:t>
             </a:r>
-            <a:endParaRPr lang="en-US" sz="1250" dirty="0"/>
+            <a:endParaRPr lang="en-US" sz="1160" dirty="0"/>
           </a:p>
         </p:txBody>
       </p:sp>
@@ -18498,7 +18504,7 @@
         </p:nvSpPr>
         <p:spPr>
           <a:xfrm>
-            <a:off x="8763000" y="3351276"/>
+            <a:off x="8717280" y="3406140"/>
             <a:ext cx="164592" cy="0"/>
           </a:xfrm>
           <a:prstGeom prst="line">
@@ -18521,8 +18527,8 @@
         </p:nvSpPr>
         <p:spPr>
           <a:xfrm>
-            <a:off x="7872984" y="3200400"/>
-            <a:ext cx="890016" cy="301752"/>
+            <a:off x="7781544" y="3255264"/>
+            <a:ext cx="935736" cy="301752"/>
           </a:xfrm>
           <a:prstGeom prst="roundRect">
             <a:avLst>
@@ -18548,8 +18554,8 @@
         </p:nvSpPr>
         <p:spPr>
           <a:xfrm>
-            <a:off x="7909560" y="3273552"/>
-            <a:ext cx="816864" cy="146304"/>
+            <a:off x="7818120" y="3328416"/>
+            <a:ext cx="862584" cy="146304"/>
           </a:xfrm>
           <a:prstGeom prst="rect">
             <a:avLst/>
@@ -18589,7 +18595,7 @@
         </p:nvSpPr>
         <p:spPr>
           <a:xfrm>
-            <a:off x="9817608" y="3351276"/>
+            <a:off x="9817608" y="3406140"/>
             <a:ext cx="164592" cy="0"/>
           </a:xfrm>
           <a:prstGeom prst="line">
@@ -18612,8 +18618,8 @@
         </p:nvSpPr>
         <p:spPr>
           <a:xfrm>
-            <a:off x="8927592" y="3200400"/>
-            <a:ext cx="890016" cy="301752"/>
+            <a:off x="8881872" y="3255264"/>
+            <a:ext cx="935736" cy="301752"/>
           </a:xfrm>
           <a:prstGeom prst="roundRect">
             <a:avLst>
@@ -18639,8 +18645,8 @@
         </p:nvSpPr>
         <p:spPr>
           <a:xfrm>
-            <a:off x="8964168" y="3273552"/>
-            <a:ext cx="816864" cy="146304"/>
+            <a:off x="8918448" y="3328416"/>
+            <a:ext cx="862584" cy="146304"/>
           </a:xfrm>
           <a:prstGeom prst="rect">
             <a:avLst/>
@@ -18680,8 +18686,8 @@
         </p:nvSpPr>
         <p:spPr>
           <a:xfrm>
-            <a:off x="9982200" y="3200400"/>
-            <a:ext cx="890016" cy="301752"/>
+            <a:off x="9982200" y="3255264"/>
+            <a:ext cx="935736" cy="301752"/>
           </a:xfrm>
           <a:prstGeom prst="roundRect">
             <a:avLst>
@@ -18707,8 +18713,8 @@
         </p:nvSpPr>
         <p:spPr>
           <a:xfrm>
-            <a:off x="10018776" y="3273552"/>
-            <a:ext cx="816864" cy="146304"/>
+            <a:off x="10018776" y="3328416"/>
+            <a:ext cx="862584" cy="146304"/>
           </a:xfrm>
           <a:prstGeom prst="rect">
             <a:avLst/>
@@ -18748,8 +18754,8 @@
         </p:nvSpPr>
         <p:spPr>
           <a:xfrm>
-            <a:off x="7854696" y="3694176"/>
-            <a:ext cx="3035808" cy="206654"/>
+            <a:off x="7763256" y="3749040"/>
+            <a:ext cx="3172968" cy="356616"/>
           </a:xfrm>
           <a:prstGeom prst="rect">
             <a:avLst/>
@@ -18767,7 +18773,7 @@
               <a:buNone/>
             </a:pPr>
             <a:r>
-              <a:rPr lang="en-US" sz="1120" dirty="0">
+              <a:rPr lang="en-US" sz="1040" dirty="0">
                 <a:solidFill>
                   <a:srgbClr val="17364A"/>
                 </a:solidFill>
@@ -18775,9 +18781,9 @@
                 <a:ea typeface="Aptos" pitchFamily="34" charset="-122"/>
                 <a:cs typeface="Aptos" pitchFamily="34" charset="-120"/>
               </a:rPr>
-              <a:t>Implementation work should make dependencies, approvals, training, and sustainment visible before launch.</a:t>
-            </a:r>
-            <a:endParaRPr lang="en-US" sz="1120" dirty="0"/>
+              <a:t>Implementation work should make dependencies, approvals, training, and.</a:t>
+            </a:r>
+            <a:endParaRPr lang="en-US" sz="1040" dirty="0"/>
           </a:p>
         </p:txBody>
       </p:sp>
@@ -18789,12 +18795,12 @@
         </p:nvSpPr>
         <p:spPr>
           <a:xfrm>
-            <a:off x="7635240" y="4184294"/>
-            <a:ext cx="3474720" cy="1466698"/>
+            <a:off x="7543800" y="4389120"/>
+            <a:ext cx="3611880" cy="1261872"/>
           </a:xfrm>
           <a:prstGeom prst="roundRect">
             <a:avLst>
-              <a:gd name="adj" fmla="val 7481"/>
+              <a:gd name="adj" fmla="val 8696"/>
             </a:avLst>
           </a:prstGeom>
           <a:solidFill>
@@ -18816,8 +18822,8 @@
         </p:nvSpPr>
         <p:spPr>
           <a:xfrm>
-            <a:off x="7799832" y="4330598"/>
-            <a:ext cx="3145536" cy="256032"/>
+            <a:off x="7708392" y="4517136"/>
+            <a:ext cx="3282696" cy="228600"/>
           </a:xfrm>
           <a:prstGeom prst="rect">
             <a:avLst/>
@@ -18833,7 +18839,7 @@
               <a:buNone/>
             </a:pPr>
             <a:r>
-              <a:rPr lang="en-US" sz="1300" b="1" dirty="0">
+              <a:rPr lang="en-US" sz="1220" b="1" dirty="0">
                 <a:solidFill>
                   <a:srgbClr val="0068B7"/>
                 </a:solidFill>
@@ -18843,7 +18849,7 @@
               </a:rPr>
               <a:t>Next action</a:t>
             </a:r>
-            <a:endParaRPr lang="en-US" sz="1300" dirty="0"/>
+            <a:endParaRPr lang="en-US" sz="1220" dirty="0"/>
           </a:p>
         </p:txBody>
       </p:sp>
@@ -18855,8 +18861,8 @@
         </p:nvSpPr>
         <p:spPr>
           <a:xfrm>
-            <a:off x="7799832" y="4659782"/>
-            <a:ext cx="3145536" cy="899770"/>
+            <a:off x="7708392" y="4828032"/>
+            <a:ext cx="3282696" cy="749808"/>
           </a:xfrm>
           <a:prstGeom prst="rect">
             <a:avLst/>
@@ -18874,7 +18880,7 @@
               <a:buNone/>
             </a:pPr>
             <a:r>
-              <a:rPr lang="en-US" sz="1320" dirty="0">
+              <a:rPr lang="en-US" sz="1220" dirty="0">
                 <a:solidFill>
                   <a:srgbClr val="17364A"/>
                 </a:solidFill>
@@ -18882,9 +18888,9 @@
                 <a:ea typeface="Aptos" pitchFamily="34" charset="-122"/>
                 <a:cs typeface="Aptos" pitchFamily="34" charset="-120"/>
               </a:rPr>
-              <a:t>Use the concept to clarify workflow changes, dependencies, staffing, procurement requirements, training needs, and implementation checkpoints.</a:t>
-            </a:r>
-            <a:endParaRPr lang="en-US" sz="1320" dirty="0"/>
+              <a:t>Use the concept to clarify workflow changes, dependencies, staffing, procurement.</a:t>
+            </a:r>
+            <a:endParaRPr lang="en-US" sz="1220" dirty="0"/>
           </a:p>
         </p:txBody>
       </p:sp>

--- a/downloads/presentations/modules/gov-350.pptx
+++ b/downloads/presentations/modules/gov-350.pptx
@@ -11729,7 +11729,7 @@
                 <a:ea typeface="Aptos" pitchFamily="34" charset="-122"/>
                 <a:cs typeface="Aptos" pitchFamily="34" charset="-120"/>
               </a:rPr>
-              <a:t>• 1. What is authorization?</a:t>
+              <a:t>1. What is authorization?</a:t>
             </a:r>
             <a:endParaRPr lang="en-US" sz="1920" dirty="0"/>
           </a:p>
@@ -11746,7 +11746,7 @@
                 <a:ea typeface="Aptos" pitchFamily="34" charset="-122"/>
                 <a:cs typeface="Aptos" pitchFamily="34" charset="-120"/>
               </a:rPr>
-              <a:t>• 2. Why are service accounts important in AI workflows?</a:t>
+              <a:t>2. Why are service accounts important in AI workflows?</a:t>
             </a:r>
             <a:endParaRPr lang="en-US" sz="1920" dirty="0"/>
           </a:p>
@@ -11763,7 +11763,7 @@
                 <a:ea typeface="Aptos" pitchFamily="34" charset="-122"/>
                 <a:cs typeface="Aptos" pitchFamily="34" charset="-120"/>
               </a:rPr>
-              <a:t>• 3. What does least privilege mean?</a:t>
+              <a:t>3. What does least privilege mean?</a:t>
             </a:r>
             <a:endParaRPr lang="en-US" sz="1920" dirty="0"/>
           </a:p>
@@ -11870,7 +11870,7 @@
                 <a:ea typeface="Aptos" pitchFamily="34" charset="-122"/>
                 <a:cs typeface="Aptos" pitchFamily="34" charset="-120"/>
               </a:rPr>
-              <a:t>1. What is authorization?</a:t>
+              <a:t>What is authorization?</a:t>
             </a:r>
             <a:endParaRPr lang="en-US" sz="1220" dirty="0"/>
           </a:p>
@@ -11977,41 +11977,7 @@
                 <a:ea typeface="Aptos" pitchFamily="34" charset="-122"/>
                 <a:cs typeface="Aptos" pitchFamily="34" charset="-120"/>
               </a:rPr>
-              <a:t>1.</a:t>
-            </a:r>
-            <a:endParaRPr lang="en-US" sz="1140" dirty="0"/>
-          </a:p>
-          <a:p>
-            <a:pPr indent="0" marL="0">
-              <a:buNone/>
-            </a:pPr>
-            <a:r>
-              <a:rPr lang="en-US" sz="1140" dirty="0">
-                <a:solidFill>
-                  <a:srgbClr val="17364A"/>
-                </a:solidFill>
-                <a:latin typeface="Aptos" pitchFamily="34" charset="0"/>
-                <a:ea typeface="Aptos" pitchFamily="34" charset="-122"/>
-                <a:cs typeface="Aptos" pitchFamily="34" charset="-120"/>
-              </a:rPr>
               <a:t>What is authorization?</a:t>
-            </a:r>
-            <a:endParaRPr lang="en-US" sz="1140" dirty="0"/>
-          </a:p>
-          <a:p>
-            <a:pPr indent="0" marL="0">
-              <a:buNone/>
-            </a:pPr>
-            <a:r>
-              <a:rPr lang="en-US" sz="1140" dirty="0">
-                <a:solidFill>
-                  <a:srgbClr val="17364A"/>
-                </a:solidFill>
-                <a:latin typeface="Aptos" pitchFamily="34" charset="0"/>
-                <a:ea typeface="Aptos" pitchFamily="34" charset="-122"/>
-                <a:cs typeface="Aptos" pitchFamily="34" charset="-120"/>
-              </a:rPr>
-              <a:t>2.</a:t>
             </a:r>
             <a:endParaRPr lang="en-US" sz="1140" dirty="0"/>
           </a:p>
